--- a/Final/Figures/AinRinC.pptx
+++ b/Final/Figures/AinRinC.pptx
@@ -2,12 +2,12 @@
 <file path=ppt/presentation.xml><?xml version="1.0" encoding="utf-8"?>
 <p:presentation xmlns:a="http://schemas.openxmlformats.org/drawingml/2006/main" xmlns:r="http://schemas.openxmlformats.org/officeDocument/2006/relationships" xmlns:p="http://schemas.openxmlformats.org/presentationml/2006/main" saveSubsetFonts="1">
   <p:sldMasterIdLst>
-    <p:sldMasterId id="2147483792" r:id="rId1"/>
+    <p:sldMasterId id="2147483816" r:id="rId1"/>
   </p:sldMasterIdLst>
   <p:sldIdLst>
     <p:sldId id="256" r:id="rId2"/>
   </p:sldIdLst>
-  <p:sldSz cx="8280400" cy="5219700"/>
+  <p:sldSz cx="9906000" cy="6119813"/>
   <p:notesSz cx="6858000" cy="9144000"/>
   <p:defaultTextStyle>
     <a:defPPr>
@@ -141,15 +141,15 @@
         </p:nvSpPr>
         <p:spPr>
           <a:xfrm>
-            <a:off x="1035050" y="854243"/>
-            <a:ext cx="6210300" cy="1817229"/>
+            <a:off x="1238250" y="1001553"/>
+            <a:ext cx="7429500" cy="2130602"/>
           </a:xfrm>
         </p:spPr>
         <p:txBody>
           <a:bodyPr anchor="b"/>
           <a:lstStyle>
             <a:lvl1pPr algn="ctr">
-              <a:defRPr sz="4075"/>
+              <a:defRPr sz="4875"/>
             </a:lvl1pPr>
           </a:lstStyle>
           <a:p>
@@ -173,8 +173,8 @@
         </p:nvSpPr>
         <p:spPr>
           <a:xfrm>
-            <a:off x="1035050" y="2741551"/>
-            <a:ext cx="6210300" cy="1260219"/>
+            <a:off x="1238250" y="3214319"/>
+            <a:ext cx="7429500" cy="1477538"/>
           </a:xfrm>
         </p:spPr>
         <p:txBody>
@@ -182,39 +182,39 @@
           <a:lstStyle>
             <a:lvl1pPr marL="0" indent="0" algn="ctr">
               <a:buNone/>
-              <a:defRPr sz="1630"/>
+              <a:defRPr sz="1950"/>
             </a:lvl1pPr>
-            <a:lvl2pPr marL="310530" indent="0" algn="ctr">
-              <a:buNone/>
-              <a:defRPr sz="1358"/>
+            <a:lvl2pPr marL="371475" indent="0" algn="ctr">
+              <a:buNone/>
+              <a:defRPr sz="1625"/>
             </a:lvl2pPr>
-            <a:lvl3pPr marL="621060" indent="0" algn="ctr">
-              <a:buNone/>
-              <a:defRPr sz="1223"/>
+            <a:lvl3pPr marL="742950" indent="0" algn="ctr">
+              <a:buNone/>
+              <a:defRPr sz="1463"/>
             </a:lvl3pPr>
-            <a:lvl4pPr marL="931591" indent="0" algn="ctr">
-              <a:buNone/>
-              <a:defRPr sz="1087"/>
+            <a:lvl4pPr marL="1114425" indent="0" algn="ctr">
+              <a:buNone/>
+              <a:defRPr sz="1300"/>
             </a:lvl4pPr>
-            <a:lvl5pPr marL="1242121" indent="0" algn="ctr">
-              <a:buNone/>
-              <a:defRPr sz="1087"/>
+            <a:lvl5pPr marL="1485900" indent="0" algn="ctr">
+              <a:buNone/>
+              <a:defRPr sz="1300"/>
             </a:lvl5pPr>
-            <a:lvl6pPr marL="1552651" indent="0" algn="ctr">
-              <a:buNone/>
-              <a:defRPr sz="1087"/>
+            <a:lvl6pPr marL="1857375" indent="0" algn="ctr">
+              <a:buNone/>
+              <a:defRPr sz="1300"/>
             </a:lvl6pPr>
-            <a:lvl7pPr marL="1863181" indent="0" algn="ctr">
-              <a:buNone/>
-              <a:defRPr sz="1087"/>
+            <a:lvl7pPr marL="2228850" indent="0" algn="ctr">
+              <a:buNone/>
+              <a:defRPr sz="1300"/>
             </a:lvl7pPr>
-            <a:lvl8pPr marL="2173712" indent="0" algn="ctr">
-              <a:buNone/>
-              <a:defRPr sz="1087"/>
+            <a:lvl8pPr marL="2600325" indent="0" algn="ctr">
+              <a:buNone/>
+              <a:defRPr sz="1300"/>
             </a:lvl8pPr>
-            <a:lvl9pPr marL="2484242" indent="0" algn="ctr">
-              <a:buNone/>
-              <a:defRPr sz="1087"/>
+            <a:lvl9pPr marL="2971800" indent="0" algn="ctr">
+              <a:buNone/>
+              <a:defRPr sz="1300"/>
             </a:lvl9pPr>
           </a:lstStyle>
           <a:p>
@@ -243,7 +243,7 @@
           <a:p>
             <a:fld id="{4CEE9FC5-A85C-4366-93B5-9F0FBACB00B5}" type="datetimeFigureOut">
               <a:rPr lang="zh-TW" altLang="en-US" smtClean="0"/>
-              <a:t>2026/4/22</a:t>
+              <a:t>2026/5/20</a:t>
             </a:fld>
             <a:endParaRPr lang="zh-TW" altLang="en-US"/>
           </a:p>
@@ -294,7 +294,7 @@
     </p:spTree>
     <p:extLst>
       <p:ext uri="{BB962C8B-B14F-4D97-AF65-F5344CB8AC3E}">
-        <p14:creationId xmlns:p14="http://schemas.microsoft.com/office/powerpoint/2010/main" val="4199570344"/>
+        <p14:creationId xmlns:p14="http://schemas.microsoft.com/office/powerpoint/2010/main" val="2031102659"/>
       </p:ext>
     </p:extLst>
   </p:cSld>
@@ -413,7 +413,7 @@
           <a:p>
             <a:fld id="{4CEE9FC5-A85C-4366-93B5-9F0FBACB00B5}" type="datetimeFigureOut">
               <a:rPr lang="zh-TW" altLang="en-US" smtClean="0"/>
-              <a:t>2026/4/22</a:t>
+              <a:t>2026/5/20</a:t>
             </a:fld>
             <a:endParaRPr lang="zh-TW" altLang="en-US"/>
           </a:p>
@@ -464,7 +464,7 @@
     </p:spTree>
     <p:extLst>
       <p:ext uri="{BB962C8B-B14F-4D97-AF65-F5344CB8AC3E}">
-        <p14:creationId xmlns:p14="http://schemas.microsoft.com/office/powerpoint/2010/main" val="3705520282"/>
+        <p14:creationId xmlns:p14="http://schemas.microsoft.com/office/powerpoint/2010/main" val="3261366319"/>
       </p:ext>
     </p:extLst>
   </p:cSld>
@@ -503,8 +503,8 @@
         </p:nvSpPr>
         <p:spPr>
           <a:xfrm>
-            <a:off x="5925661" y="277901"/>
-            <a:ext cx="1785461" cy="4423454"/>
+            <a:off x="7088981" y="325823"/>
+            <a:ext cx="2135981" cy="5186259"/>
           </a:xfrm>
         </p:spPr>
         <p:txBody>
@@ -531,8 +531,8 @@
         </p:nvSpPr>
         <p:spPr>
           <a:xfrm>
-            <a:off x="569277" y="277901"/>
-            <a:ext cx="5252879" cy="4423454"/>
+            <a:off x="681037" y="325823"/>
+            <a:ext cx="6284119" cy="5186259"/>
           </a:xfrm>
         </p:spPr>
         <p:txBody>
@@ -593,7 +593,7 @@
           <a:p>
             <a:fld id="{4CEE9FC5-A85C-4366-93B5-9F0FBACB00B5}" type="datetimeFigureOut">
               <a:rPr lang="zh-TW" altLang="en-US" smtClean="0"/>
-              <a:t>2026/4/22</a:t>
+              <a:t>2026/5/20</a:t>
             </a:fld>
             <a:endParaRPr lang="zh-TW" altLang="en-US"/>
           </a:p>
@@ -644,7 +644,7 @@
     </p:spTree>
     <p:extLst>
       <p:ext uri="{BB962C8B-B14F-4D97-AF65-F5344CB8AC3E}">
-        <p14:creationId xmlns:p14="http://schemas.microsoft.com/office/powerpoint/2010/main" val="1808199944"/>
+        <p14:creationId xmlns:p14="http://schemas.microsoft.com/office/powerpoint/2010/main" val="3324413089"/>
       </p:ext>
     </p:extLst>
   </p:cSld>
@@ -763,7 +763,7 @@
           <a:p>
             <a:fld id="{4CEE9FC5-A85C-4366-93B5-9F0FBACB00B5}" type="datetimeFigureOut">
               <a:rPr lang="zh-TW" altLang="en-US" smtClean="0"/>
-              <a:t>2026/4/22</a:t>
+              <a:t>2026/5/20</a:t>
             </a:fld>
             <a:endParaRPr lang="zh-TW" altLang="en-US"/>
           </a:p>
@@ -814,7 +814,7 @@
     </p:spTree>
     <p:extLst>
       <p:ext uri="{BB962C8B-B14F-4D97-AF65-F5344CB8AC3E}">
-        <p14:creationId xmlns:p14="http://schemas.microsoft.com/office/powerpoint/2010/main" val="4105807982"/>
+        <p14:creationId xmlns:p14="http://schemas.microsoft.com/office/powerpoint/2010/main" val="103063121"/>
       </p:ext>
     </p:extLst>
   </p:cSld>
@@ -853,15 +853,15 @@
         </p:nvSpPr>
         <p:spPr>
           <a:xfrm>
-            <a:off x="564965" y="1301301"/>
-            <a:ext cx="7141845" cy="2171250"/>
+            <a:off x="675878" y="1525704"/>
+            <a:ext cx="8543925" cy="2545672"/>
           </a:xfrm>
         </p:spPr>
         <p:txBody>
           <a:bodyPr anchor="b"/>
           <a:lstStyle>
             <a:lvl1pPr>
-              <a:defRPr sz="4075"/>
+              <a:defRPr sz="4875"/>
             </a:lvl1pPr>
           </a:lstStyle>
           <a:p>
@@ -885,8 +885,8 @@
         </p:nvSpPr>
         <p:spPr>
           <a:xfrm>
-            <a:off x="564965" y="3493092"/>
-            <a:ext cx="7141845" cy="1141809"/>
+            <a:off x="675878" y="4095459"/>
+            <a:ext cx="8543925" cy="1338709"/>
           </a:xfrm>
         </p:spPr>
         <p:txBody>
@@ -894,7 +894,7 @@
           <a:lstStyle>
             <a:lvl1pPr marL="0" indent="0">
               <a:buNone/>
-              <a:defRPr sz="1630">
+              <a:defRPr sz="1950">
                 <a:solidFill>
                   <a:schemeClr val="tx1">
                     <a:tint val="75000"/>
@@ -902,9 +902,9 @@
                 </a:solidFill>
               </a:defRPr>
             </a:lvl1pPr>
-            <a:lvl2pPr marL="310530" indent="0">
-              <a:buNone/>
-              <a:defRPr sz="1358">
+            <a:lvl2pPr marL="371475" indent="0">
+              <a:buNone/>
+              <a:defRPr sz="1625">
                 <a:solidFill>
                   <a:schemeClr val="tx1">
                     <a:tint val="75000"/>
@@ -912,9 +912,9 @@
                 </a:solidFill>
               </a:defRPr>
             </a:lvl2pPr>
-            <a:lvl3pPr marL="621060" indent="0">
-              <a:buNone/>
-              <a:defRPr sz="1223">
+            <a:lvl3pPr marL="742950" indent="0">
+              <a:buNone/>
+              <a:defRPr sz="1463">
                 <a:solidFill>
                   <a:schemeClr val="tx1">
                     <a:tint val="75000"/>
@@ -922,9 +922,9 @@
                 </a:solidFill>
               </a:defRPr>
             </a:lvl3pPr>
-            <a:lvl4pPr marL="931591" indent="0">
-              <a:buNone/>
-              <a:defRPr sz="1087">
+            <a:lvl4pPr marL="1114425" indent="0">
+              <a:buNone/>
+              <a:defRPr sz="1300">
                 <a:solidFill>
                   <a:schemeClr val="tx1">
                     <a:tint val="75000"/>
@@ -932,9 +932,9 @@
                 </a:solidFill>
               </a:defRPr>
             </a:lvl4pPr>
-            <a:lvl5pPr marL="1242121" indent="0">
-              <a:buNone/>
-              <a:defRPr sz="1087">
+            <a:lvl5pPr marL="1485900" indent="0">
+              <a:buNone/>
+              <a:defRPr sz="1300">
                 <a:solidFill>
                   <a:schemeClr val="tx1">
                     <a:tint val="75000"/>
@@ -942,9 +942,9 @@
                 </a:solidFill>
               </a:defRPr>
             </a:lvl5pPr>
-            <a:lvl6pPr marL="1552651" indent="0">
-              <a:buNone/>
-              <a:defRPr sz="1087">
+            <a:lvl6pPr marL="1857375" indent="0">
+              <a:buNone/>
+              <a:defRPr sz="1300">
                 <a:solidFill>
                   <a:schemeClr val="tx1">
                     <a:tint val="75000"/>
@@ -952,9 +952,9 @@
                 </a:solidFill>
               </a:defRPr>
             </a:lvl6pPr>
-            <a:lvl7pPr marL="1863181" indent="0">
-              <a:buNone/>
-              <a:defRPr sz="1087">
+            <a:lvl7pPr marL="2228850" indent="0">
+              <a:buNone/>
+              <a:defRPr sz="1300">
                 <a:solidFill>
                   <a:schemeClr val="tx1">
                     <a:tint val="75000"/>
@@ -962,9 +962,9 @@
                 </a:solidFill>
               </a:defRPr>
             </a:lvl7pPr>
-            <a:lvl8pPr marL="2173712" indent="0">
-              <a:buNone/>
-              <a:defRPr sz="1087">
+            <a:lvl8pPr marL="2600325" indent="0">
+              <a:buNone/>
+              <a:defRPr sz="1300">
                 <a:solidFill>
                   <a:schemeClr val="tx1">
                     <a:tint val="75000"/>
@@ -972,9 +972,9 @@
                 </a:solidFill>
               </a:defRPr>
             </a:lvl8pPr>
-            <a:lvl9pPr marL="2484242" indent="0">
-              <a:buNone/>
-              <a:defRPr sz="1087">
+            <a:lvl9pPr marL="2971800" indent="0">
+              <a:buNone/>
+              <a:defRPr sz="1300">
                 <a:solidFill>
                   <a:schemeClr val="tx1">
                     <a:tint val="75000"/>
@@ -1009,7 +1009,7 @@
           <a:p>
             <a:fld id="{4CEE9FC5-A85C-4366-93B5-9F0FBACB00B5}" type="datetimeFigureOut">
               <a:rPr lang="zh-TW" altLang="en-US" smtClean="0"/>
-              <a:t>2026/4/22</a:t>
+              <a:t>2026/5/20</a:t>
             </a:fld>
             <a:endParaRPr lang="zh-TW" altLang="en-US"/>
           </a:p>
@@ -1060,7 +1060,7 @@
     </p:spTree>
     <p:extLst>
       <p:ext uri="{BB962C8B-B14F-4D97-AF65-F5344CB8AC3E}">
-        <p14:creationId xmlns:p14="http://schemas.microsoft.com/office/powerpoint/2010/main" val="4039849931"/>
+        <p14:creationId xmlns:p14="http://schemas.microsoft.com/office/powerpoint/2010/main" val="2848199447"/>
       </p:ext>
     </p:extLst>
   </p:cSld>
@@ -1122,8 +1122,8 @@
         </p:nvSpPr>
         <p:spPr>
           <a:xfrm>
-            <a:off x="569278" y="1389503"/>
-            <a:ext cx="3519170" cy="3311852"/>
+            <a:off x="681038" y="1629117"/>
+            <a:ext cx="4210050" cy="3882965"/>
           </a:xfrm>
         </p:spPr>
         <p:txBody>
@@ -1179,8 +1179,8 @@
         </p:nvSpPr>
         <p:spPr>
           <a:xfrm>
-            <a:off x="4191953" y="1389503"/>
-            <a:ext cx="3519170" cy="3311852"/>
+            <a:off x="5014913" y="1629117"/>
+            <a:ext cx="4210050" cy="3882965"/>
           </a:xfrm>
         </p:spPr>
         <p:txBody>
@@ -1241,7 +1241,7 @@
           <a:p>
             <a:fld id="{4CEE9FC5-A85C-4366-93B5-9F0FBACB00B5}" type="datetimeFigureOut">
               <a:rPr lang="zh-TW" altLang="en-US" smtClean="0"/>
-              <a:t>2026/4/22</a:t>
+              <a:t>2026/5/20</a:t>
             </a:fld>
             <a:endParaRPr lang="zh-TW" altLang="en-US"/>
           </a:p>
@@ -1292,7 +1292,7 @@
     </p:spTree>
     <p:extLst>
       <p:ext uri="{BB962C8B-B14F-4D97-AF65-F5344CB8AC3E}">
-        <p14:creationId xmlns:p14="http://schemas.microsoft.com/office/powerpoint/2010/main" val="1609662064"/>
+        <p14:creationId xmlns:p14="http://schemas.microsoft.com/office/powerpoint/2010/main" val="2623452726"/>
       </p:ext>
     </p:extLst>
   </p:cSld>
@@ -1331,8 +1331,8 @@
         </p:nvSpPr>
         <p:spPr>
           <a:xfrm>
-            <a:off x="570356" y="277901"/>
-            <a:ext cx="7141845" cy="1008901"/>
+            <a:off x="682328" y="325824"/>
+            <a:ext cx="8543925" cy="1182881"/>
           </a:xfrm>
         </p:spPr>
         <p:txBody>
@@ -1359,8 +1359,8 @@
         </p:nvSpPr>
         <p:spPr>
           <a:xfrm>
-            <a:off x="570356" y="1279552"/>
-            <a:ext cx="3502997" cy="627089"/>
+            <a:off x="682328" y="1500205"/>
+            <a:ext cx="4190702" cy="735227"/>
           </a:xfrm>
         </p:spPr>
         <p:txBody>
@@ -1368,39 +1368,39 @@
           <a:lstStyle>
             <a:lvl1pPr marL="0" indent="0">
               <a:buNone/>
-              <a:defRPr sz="1630" b="1"/>
+              <a:defRPr sz="1950" b="1"/>
             </a:lvl1pPr>
-            <a:lvl2pPr marL="310530" indent="0">
-              <a:buNone/>
-              <a:defRPr sz="1358" b="1"/>
+            <a:lvl2pPr marL="371475" indent="0">
+              <a:buNone/>
+              <a:defRPr sz="1625" b="1"/>
             </a:lvl2pPr>
-            <a:lvl3pPr marL="621060" indent="0">
-              <a:buNone/>
-              <a:defRPr sz="1223" b="1"/>
+            <a:lvl3pPr marL="742950" indent="0">
+              <a:buNone/>
+              <a:defRPr sz="1463" b="1"/>
             </a:lvl3pPr>
-            <a:lvl4pPr marL="931591" indent="0">
-              <a:buNone/>
-              <a:defRPr sz="1087" b="1"/>
+            <a:lvl4pPr marL="1114425" indent="0">
+              <a:buNone/>
+              <a:defRPr sz="1300" b="1"/>
             </a:lvl4pPr>
-            <a:lvl5pPr marL="1242121" indent="0">
-              <a:buNone/>
-              <a:defRPr sz="1087" b="1"/>
+            <a:lvl5pPr marL="1485900" indent="0">
+              <a:buNone/>
+              <a:defRPr sz="1300" b="1"/>
             </a:lvl5pPr>
-            <a:lvl6pPr marL="1552651" indent="0">
-              <a:buNone/>
-              <a:defRPr sz="1087" b="1"/>
+            <a:lvl6pPr marL="1857375" indent="0">
+              <a:buNone/>
+              <a:defRPr sz="1300" b="1"/>
             </a:lvl6pPr>
-            <a:lvl7pPr marL="1863181" indent="0">
-              <a:buNone/>
-              <a:defRPr sz="1087" b="1"/>
+            <a:lvl7pPr marL="2228850" indent="0">
+              <a:buNone/>
+              <a:defRPr sz="1300" b="1"/>
             </a:lvl7pPr>
-            <a:lvl8pPr marL="2173712" indent="0">
-              <a:buNone/>
-              <a:defRPr sz="1087" b="1"/>
+            <a:lvl8pPr marL="2600325" indent="0">
+              <a:buNone/>
+              <a:defRPr sz="1300" b="1"/>
             </a:lvl8pPr>
-            <a:lvl9pPr marL="2484242" indent="0">
-              <a:buNone/>
-              <a:defRPr sz="1087" b="1"/>
+            <a:lvl9pPr marL="2971800" indent="0">
+              <a:buNone/>
+              <a:defRPr sz="1300" b="1"/>
             </a:lvl9pPr>
           </a:lstStyle>
           <a:p>
@@ -1424,8 +1424,8 @@
         </p:nvSpPr>
         <p:spPr>
           <a:xfrm>
-            <a:off x="570356" y="1906640"/>
-            <a:ext cx="3502997" cy="2804381"/>
+            <a:off x="682328" y="2235432"/>
+            <a:ext cx="4190702" cy="3287983"/>
           </a:xfrm>
         </p:spPr>
         <p:txBody>
@@ -1481,8 +1481,8 @@
         </p:nvSpPr>
         <p:spPr>
           <a:xfrm>
-            <a:off x="4191952" y="1279552"/>
-            <a:ext cx="3520249" cy="627089"/>
+            <a:off x="5014913" y="1500205"/>
+            <a:ext cx="4211340" cy="735227"/>
           </a:xfrm>
         </p:spPr>
         <p:txBody>
@@ -1490,39 +1490,39 @@
           <a:lstStyle>
             <a:lvl1pPr marL="0" indent="0">
               <a:buNone/>
-              <a:defRPr sz="1630" b="1"/>
+              <a:defRPr sz="1950" b="1"/>
             </a:lvl1pPr>
-            <a:lvl2pPr marL="310530" indent="0">
-              <a:buNone/>
-              <a:defRPr sz="1358" b="1"/>
+            <a:lvl2pPr marL="371475" indent="0">
+              <a:buNone/>
+              <a:defRPr sz="1625" b="1"/>
             </a:lvl2pPr>
-            <a:lvl3pPr marL="621060" indent="0">
-              <a:buNone/>
-              <a:defRPr sz="1223" b="1"/>
+            <a:lvl3pPr marL="742950" indent="0">
+              <a:buNone/>
+              <a:defRPr sz="1463" b="1"/>
             </a:lvl3pPr>
-            <a:lvl4pPr marL="931591" indent="0">
-              <a:buNone/>
-              <a:defRPr sz="1087" b="1"/>
+            <a:lvl4pPr marL="1114425" indent="0">
+              <a:buNone/>
+              <a:defRPr sz="1300" b="1"/>
             </a:lvl4pPr>
-            <a:lvl5pPr marL="1242121" indent="0">
-              <a:buNone/>
-              <a:defRPr sz="1087" b="1"/>
+            <a:lvl5pPr marL="1485900" indent="0">
+              <a:buNone/>
+              <a:defRPr sz="1300" b="1"/>
             </a:lvl5pPr>
-            <a:lvl6pPr marL="1552651" indent="0">
-              <a:buNone/>
-              <a:defRPr sz="1087" b="1"/>
+            <a:lvl6pPr marL="1857375" indent="0">
+              <a:buNone/>
+              <a:defRPr sz="1300" b="1"/>
             </a:lvl6pPr>
-            <a:lvl7pPr marL="1863181" indent="0">
-              <a:buNone/>
-              <a:defRPr sz="1087" b="1"/>
+            <a:lvl7pPr marL="2228850" indent="0">
+              <a:buNone/>
+              <a:defRPr sz="1300" b="1"/>
             </a:lvl7pPr>
-            <a:lvl8pPr marL="2173712" indent="0">
-              <a:buNone/>
-              <a:defRPr sz="1087" b="1"/>
+            <a:lvl8pPr marL="2600325" indent="0">
+              <a:buNone/>
+              <a:defRPr sz="1300" b="1"/>
             </a:lvl8pPr>
-            <a:lvl9pPr marL="2484242" indent="0">
-              <a:buNone/>
-              <a:defRPr sz="1087" b="1"/>
+            <a:lvl9pPr marL="2971800" indent="0">
+              <a:buNone/>
+              <a:defRPr sz="1300" b="1"/>
             </a:lvl9pPr>
           </a:lstStyle>
           <a:p>
@@ -1546,8 +1546,8 @@
         </p:nvSpPr>
         <p:spPr>
           <a:xfrm>
-            <a:off x="4191952" y="1906640"/>
-            <a:ext cx="3520249" cy="2804381"/>
+            <a:off x="5014913" y="2235432"/>
+            <a:ext cx="4211340" cy="3287983"/>
           </a:xfrm>
         </p:spPr>
         <p:txBody>
@@ -1608,7 +1608,7 @@
           <a:p>
             <a:fld id="{4CEE9FC5-A85C-4366-93B5-9F0FBACB00B5}" type="datetimeFigureOut">
               <a:rPr lang="zh-TW" altLang="en-US" smtClean="0"/>
-              <a:t>2026/4/22</a:t>
+              <a:t>2026/5/20</a:t>
             </a:fld>
             <a:endParaRPr lang="zh-TW" altLang="en-US"/>
           </a:p>
@@ -1659,7 +1659,7 @@
     </p:spTree>
     <p:extLst>
       <p:ext uri="{BB962C8B-B14F-4D97-AF65-F5344CB8AC3E}">
-        <p14:creationId xmlns:p14="http://schemas.microsoft.com/office/powerpoint/2010/main" val="2845491376"/>
+        <p14:creationId xmlns:p14="http://schemas.microsoft.com/office/powerpoint/2010/main" val="1781611527"/>
       </p:ext>
     </p:extLst>
   </p:cSld>
@@ -1726,7 +1726,7 @@
           <a:p>
             <a:fld id="{4CEE9FC5-A85C-4366-93B5-9F0FBACB00B5}" type="datetimeFigureOut">
               <a:rPr lang="zh-TW" altLang="en-US" smtClean="0"/>
-              <a:t>2026/4/22</a:t>
+              <a:t>2026/5/20</a:t>
             </a:fld>
             <a:endParaRPr lang="zh-TW" altLang="en-US"/>
           </a:p>
@@ -1777,7 +1777,7 @@
     </p:spTree>
     <p:extLst>
       <p:ext uri="{BB962C8B-B14F-4D97-AF65-F5344CB8AC3E}">
-        <p14:creationId xmlns:p14="http://schemas.microsoft.com/office/powerpoint/2010/main" val="302329780"/>
+        <p14:creationId xmlns:p14="http://schemas.microsoft.com/office/powerpoint/2010/main" val="1042832829"/>
       </p:ext>
     </p:extLst>
   </p:cSld>
@@ -1821,7 +1821,7 @@
           <a:p>
             <a:fld id="{4CEE9FC5-A85C-4366-93B5-9F0FBACB00B5}" type="datetimeFigureOut">
               <a:rPr lang="zh-TW" altLang="en-US" smtClean="0"/>
-              <a:t>2026/4/22</a:t>
+              <a:t>2026/5/20</a:t>
             </a:fld>
             <a:endParaRPr lang="zh-TW" altLang="en-US"/>
           </a:p>
@@ -1872,7 +1872,7 @@
     </p:spTree>
     <p:extLst>
       <p:ext uri="{BB962C8B-B14F-4D97-AF65-F5344CB8AC3E}">
-        <p14:creationId xmlns:p14="http://schemas.microsoft.com/office/powerpoint/2010/main" val="712061413"/>
+        <p14:creationId xmlns:p14="http://schemas.microsoft.com/office/powerpoint/2010/main" val="3424337325"/>
       </p:ext>
     </p:extLst>
   </p:cSld>
@@ -1911,15 +1911,15 @@
         </p:nvSpPr>
         <p:spPr>
           <a:xfrm>
-            <a:off x="570357" y="347980"/>
-            <a:ext cx="2670644" cy="1217930"/>
+            <a:off x="682328" y="407988"/>
+            <a:ext cx="3194943" cy="1427956"/>
           </a:xfrm>
         </p:spPr>
         <p:txBody>
           <a:bodyPr anchor="b"/>
           <a:lstStyle>
             <a:lvl1pPr>
-              <a:defRPr sz="2173"/>
+              <a:defRPr sz="2600"/>
             </a:lvl1pPr>
           </a:lstStyle>
           <a:p>
@@ -1943,39 +1943,39 @@
         </p:nvSpPr>
         <p:spPr>
           <a:xfrm>
-            <a:off x="3520248" y="751541"/>
-            <a:ext cx="4191953" cy="3709370"/>
+            <a:off x="4211340" y="881140"/>
+            <a:ext cx="5014913" cy="4349034"/>
           </a:xfrm>
         </p:spPr>
         <p:txBody>
           <a:bodyPr/>
           <a:lstStyle>
             <a:lvl1pPr>
-              <a:defRPr sz="2173"/>
+              <a:defRPr sz="2600"/>
             </a:lvl1pPr>
             <a:lvl2pPr>
-              <a:defRPr sz="1902"/>
+              <a:defRPr sz="2275"/>
             </a:lvl2pPr>
             <a:lvl3pPr>
-              <a:defRPr sz="1630"/>
+              <a:defRPr sz="1950"/>
             </a:lvl3pPr>
             <a:lvl4pPr>
-              <a:defRPr sz="1358"/>
+              <a:defRPr sz="1625"/>
             </a:lvl4pPr>
             <a:lvl5pPr>
-              <a:defRPr sz="1358"/>
+              <a:defRPr sz="1625"/>
             </a:lvl5pPr>
             <a:lvl6pPr>
-              <a:defRPr sz="1358"/>
+              <a:defRPr sz="1625"/>
             </a:lvl6pPr>
             <a:lvl7pPr>
-              <a:defRPr sz="1358"/>
+              <a:defRPr sz="1625"/>
             </a:lvl7pPr>
             <a:lvl8pPr>
-              <a:defRPr sz="1358"/>
+              <a:defRPr sz="1625"/>
             </a:lvl8pPr>
             <a:lvl9pPr>
-              <a:defRPr sz="1358"/>
+              <a:defRPr sz="1625"/>
             </a:lvl9pPr>
           </a:lstStyle>
           <a:p>
@@ -2028,8 +2028,8 @@
         </p:nvSpPr>
         <p:spPr>
           <a:xfrm>
-            <a:off x="570357" y="1565910"/>
-            <a:ext cx="2670644" cy="2901042"/>
+            <a:off x="682328" y="1835944"/>
+            <a:ext cx="3194943" cy="3401313"/>
           </a:xfrm>
         </p:spPr>
         <p:txBody>
@@ -2037,39 +2037,39 @@
           <a:lstStyle>
             <a:lvl1pPr marL="0" indent="0">
               <a:buNone/>
-              <a:defRPr sz="1087"/>
+              <a:defRPr sz="1300"/>
             </a:lvl1pPr>
-            <a:lvl2pPr marL="310530" indent="0">
-              <a:buNone/>
-              <a:defRPr sz="951"/>
+            <a:lvl2pPr marL="371475" indent="0">
+              <a:buNone/>
+              <a:defRPr sz="1138"/>
             </a:lvl2pPr>
-            <a:lvl3pPr marL="621060" indent="0">
-              <a:buNone/>
-              <a:defRPr sz="815"/>
+            <a:lvl3pPr marL="742950" indent="0">
+              <a:buNone/>
+              <a:defRPr sz="975"/>
             </a:lvl3pPr>
-            <a:lvl4pPr marL="931591" indent="0">
-              <a:buNone/>
-              <a:defRPr sz="679"/>
+            <a:lvl4pPr marL="1114425" indent="0">
+              <a:buNone/>
+              <a:defRPr sz="813"/>
             </a:lvl4pPr>
-            <a:lvl5pPr marL="1242121" indent="0">
-              <a:buNone/>
-              <a:defRPr sz="679"/>
+            <a:lvl5pPr marL="1485900" indent="0">
+              <a:buNone/>
+              <a:defRPr sz="813"/>
             </a:lvl5pPr>
-            <a:lvl6pPr marL="1552651" indent="0">
-              <a:buNone/>
-              <a:defRPr sz="679"/>
+            <a:lvl6pPr marL="1857375" indent="0">
+              <a:buNone/>
+              <a:defRPr sz="813"/>
             </a:lvl6pPr>
-            <a:lvl7pPr marL="1863181" indent="0">
-              <a:buNone/>
-              <a:defRPr sz="679"/>
+            <a:lvl7pPr marL="2228850" indent="0">
+              <a:buNone/>
+              <a:defRPr sz="813"/>
             </a:lvl7pPr>
-            <a:lvl8pPr marL="2173712" indent="0">
-              <a:buNone/>
-              <a:defRPr sz="679"/>
+            <a:lvl8pPr marL="2600325" indent="0">
+              <a:buNone/>
+              <a:defRPr sz="813"/>
             </a:lvl8pPr>
-            <a:lvl9pPr marL="2484242" indent="0">
-              <a:buNone/>
-              <a:defRPr sz="679"/>
+            <a:lvl9pPr marL="2971800" indent="0">
+              <a:buNone/>
+              <a:defRPr sz="813"/>
             </a:lvl9pPr>
           </a:lstStyle>
           <a:p>
@@ -2098,7 +2098,7 @@
           <a:p>
             <a:fld id="{4CEE9FC5-A85C-4366-93B5-9F0FBACB00B5}" type="datetimeFigureOut">
               <a:rPr lang="zh-TW" altLang="en-US" smtClean="0"/>
-              <a:t>2026/4/22</a:t>
+              <a:t>2026/5/20</a:t>
             </a:fld>
             <a:endParaRPr lang="zh-TW" altLang="en-US"/>
           </a:p>
@@ -2149,7 +2149,7 @@
     </p:spTree>
     <p:extLst>
       <p:ext uri="{BB962C8B-B14F-4D97-AF65-F5344CB8AC3E}">
-        <p14:creationId xmlns:p14="http://schemas.microsoft.com/office/powerpoint/2010/main" val="549124173"/>
+        <p14:creationId xmlns:p14="http://schemas.microsoft.com/office/powerpoint/2010/main" val="499261763"/>
       </p:ext>
     </p:extLst>
   </p:cSld>
@@ -2188,15 +2188,15 @@
         </p:nvSpPr>
         <p:spPr>
           <a:xfrm>
-            <a:off x="570357" y="347980"/>
-            <a:ext cx="2670644" cy="1217930"/>
+            <a:off x="682328" y="407988"/>
+            <a:ext cx="3194943" cy="1427956"/>
           </a:xfrm>
         </p:spPr>
         <p:txBody>
           <a:bodyPr anchor="b"/>
           <a:lstStyle>
             <a:lvl1pPr>
-              <a:defRPr sz="2173"/>
+              <a:defRPr sz="2600"/>
             </a:lvl1pPr>
           </a:lstStyle>
           <a:p>
@@ -2220,8 +2220,8 @@
         </p:nvSpPr>
         <p:spPr>
           <a:xfrm>
-            <a:off x="3520248" y="751541"/>
-            <a:ext cx="4191953" cy="3709370"/>
+            <a:off x="4211340" y="881140"/>
+            <a:ext cx="5014913" cy="4349034"/>
           </a:xfrm>
         </p:spPr>
         <p:txBody>
@@ -2229,39 +2229,39 @@
           <a:lstStyle>
             <a:lvl1pPr marL="0" indent="0">
               <a:buNone/>
-              <a:defRPr sz="2173"/>
+              <a:defRPr sz="2600"/>
             </a:lvl1pPr>
-            <a:lvl2pPr marL="310530" indent="0">
-              <a:buNone/>
-              <a:defRPr sz="1902"/>
+            <a:lvl2pPr marL="371475" indent="0">
+              <a:buNone/>
+              <a:defRPr sz="2275"/>
             </a:lvl2pPr>
-            <a:lvl3pPr marL="621060" indent="0">
-              <a:buNone/>
-              <a:defRPr sz="1630"/>
+            <a:lvl3pPr marL="742950" indent="0">
+              <a:buNone/>
+              <a:defRPr sz="1950"/>
             </a:lvl3pPr>
-            <a:lvl4pPr marL="931591" indent="0">
-              <a:buNone/>
-              <a:defRPr sz="1358"/>
+            <a:lvl4pPr marL="1114425" indent="0">
+              <a:buNone/>
+              <a:defRPr sz="1625"/>
             </a:lvl4pPr>
-            <a:lvl5pPr marL="1242121" indent="0">
-              <a:buNone/>
-              <a:defRPr sz="1358"/>
+            <a:lvl5pPr marL="1485900" indent="0">
+              <a:buNone/>
+              <a:defRPr sz="1625"/>
             </a:lvl5pPr>
-            <a:lvl6pPr marL="1552651" indent="0">
-              <a:buNone/>
-              <a:defRPr sz="1358"/>
+            <a:lvl6pPr marL="1857375" indent="0">
+              <a:buNone/>
+              <a:defRPr sz="1625"/>
             </a:lvl6pPr>
-            <a:lvl7pPr marL="1863181" indent="0">
-              <a:buNone/>
-              <a:defRPr sz="1358"/>
+            <a:lvl7pPr marL="2228850" indent="0">
+              <a:buNone/>
+              <a:defRPr sz="1625"/>
             </a:lvl7pPr>
-            <a:lvl8pPr marL="2173712" indent="0">
-              <a:buNone/>
-              <a:defRPr sz="1358"/>
+            <a:lvl8pPr marL="2600325" indent="0">
+              <a:buNone/>
+              <a:defRPr sz="1625"/>
             </a:lvl8pPr>
-            <a:lvl9pPr marL="2484242" indent="0">
-              <a:buNone/>
-              <a:defRPr sz="1358"/>
+            <a:lvl9pPr marL="2971800" indent="0">
+              <a:buNone/>
+              <a:defRPr sz="1625"/>
             </a:lvl9pPr>
           </a:lstStyle>
           <a:p>
@@ -2285,8 +2285,8 @@
         </p:nvSpPr>
         <p:spPr>
           <a:xfrm>
-            <a:off x="570357" y="1565910"/>
-            <a:ext cx="2670644" cy="2901042"/>
+            <a:off x="682328" y="1835944"/>
+            <a:ext cx="3194943" cy="3401313"/>
           </a:xfrm>
         </p:spPr>
         <p:txBody>
@@ -2294,39 +2294,39 @@
           <a:lstStyle>
             <a:lvl1pPr marL="0" indent="0">
               <a:buNone/>
-              <a:defRPr sz="1087"/>
+              <a:defRPr sz="1300"/>
             </a:lvl1pPr>
-            <a:lvl2pPr marL="310530" indent="0">
-              <a:buNone/>
-              <a:defRPr sz="951"/>
+            <a:lvl2pPr marL="371475" indent="0">
+              <a:buNone/>
+              <a:defRPr sz="1138"/>
             </a:lvl2pPr>
-            <a:lvl3pPr marL="621060" indent="0">
-              <a:buNone/>
-              <a:defRPr sz="815"/>
+            <a:lvl3pPr marL="742950" indent="0">
+              <a:buNone/>
+              <a:defRPr sz="975"/>
             </a:lvl3pPr>
-            <a:lvl4pPr marL="931591" indent="0">
-              <a:buNone/>
-              <a:defRPr sz="679"/>
+            <a:lvl4pPr marL="1114425" indent="0">
+              <a:buNone/>
+              <a:defRPr sz="813"/>
             </a:lvl4pPr>
-            <a:lvl5pPr marL="1242121" indent="0">
-              <a:buNone/>
-              <a:defRPr sz="679"/>
+            <a:lvl5pPr marL="1485900" indent="0">
+              <a:buNone/>
+              <a:defRPr sz="813"/>
             </a:lvl5pPr>
-            <a:lvl6pPr marL="1552651" indent="0">
-              <a:buNone/>
-              <a:defRPr sz="679"/>
+            <a:lvl6pPr marL="1857375" indent="0">
+              <a:buNone/>
+              <a:defRPr sz="813"/>
             </a:lvl6pPr>
-            <a:lvl7pPr marL="1863181" indent="0">
-              <a:buNone/>
-              <a:defRPr sz="679"/>
+            <a:lvl7pPr marL="2228850" indent="0">
+              <a:buNone/>
+              <a:defRPr sz="813"/>
             </a:lvl7pPr>
-            <a:lvl8pPr marL="2173712" indent="0">
-              <a:buNone/>
-              <a:defRPr sz="679"/>
+            <a:lvl8pPr marL="2600325" indent="0">
+              <a:buNone/>
+              <a:defRPr sz="813"/>
             </a:lvl8pPr>
-            <a:lvl9pPr marL="2484242" indent="0">
-              <a:buNone/>
-              <a:defRPr sz="679"/>
+            <a:lvl9pPr marL="2971800" indent="0">
+              <a:buNone/>
+              <a:defRPr sz="813"/>
             </a:lvl9pPr>
           </a:lstStyle>
           <a:p>
@@ -2355,7 +2355,7 @@
           <a:p>
             <a:fld id="{4CEE9FC5-A85C-4366-93B5-9F0FBACB00B5}" type="datetimeFigureOut">
               <a:rPr lang="zh-TW" altLang="en-US" smtClean="0"/>
-              <a:t>2026/4/22</a:t>
+              <a:t>2026/5/20</a:t>
             </a:fld>
             <a:endParaRPr lang="zh-TW" altLang="en-US"/>
           </a:p>
@@ -2406,7 +2406,7 @@
     </p:spTree>
     <p:extLst>
       <p:ext uri="{BB962C8B-B14F-4D97-AF65-F5344CB8AC3E}">
-        <p14:creationId xmlns:p14="http://schemas.microsoft.com/office/powerpoint/2010/main" val="3322819549"/>
+        <p14:creationId xmlns:p14="http://schemas.microsoft.com/office/powerpoint/2010/main" val="2659060106"/>
       </p:ext>
     </p:extLst>
   </p:cSld>
@@ -2450,8 +2450,8 @@
         </p:nvSpPr>
         <p:spPr>
           <a:xfrm>
-            <a:off x="569278" y="277901"/>
-            <a:ext cx="7141845" cy="1008901"/>
+            <a:off x="681038" y="325824"/>
+            <a:ext cx="8543925" cy="1182881"/>
           </a:xfrm>
           <a:prstGeom prst="rect">
             <a:avLst/>
@@ -2483,8 +2483,8 @@
         </p:nvSpPr>
         <p:spPr>
           <a:xfrm>
-            <a:off x="569278" y="1389503"/>
-            <a:ext cx="7141845" cy="3311852"/>
+            <a:off x="681038" y="1629117"/>
+            <a:ext cx="8543925" cy="3882965"/>
           </a:xfrm>
           <a:prstGeom prst="rect">
             <a:avLst/>
@@ -2545,8 +2545,8 @@
         </p:nvSpPr>
         <p:spPr>
           <a:xfrm>
-            <a:off x="569278" y="4837889"/>
-            <a:ext cx="1863090" cy="277901"/>
+            <a:off x="681038" y="5672161"/>
+            <a:ext cx="2228850" cy="325823"/>
           </a:xfrm>
           <a:prstGeom prst="rect">
             <a:avLst/>
@@ -2556,7 +2556,7 @@
           <a:bodyPr vert="horz" lIns="91440" tIns="45720" rIns="91440" bIns="45720" rtlCol="0" anchor="ctr"/>
           <a:lstStyle>
             <a:lvl1pPr algn="l">
-              <a:defRPr sz="815">
+              <a:defRPr sz="975">
                 <a:solidFill>
                   <a:schemeClr val="tx1">
                     <a:tint val="75000"/>
@@ -2568,7 +2568,7 @@
           <a:p>
             <a:fld id="{4CEE9FC5-A85C-4366-93B5-9F0FBACB00B5}" type="datetimeFigureOut">
               <a:rPr lang="zh-TW" altLang="en-US" smtClean="0"/>
-              <a:t>2026/4/22</a:t>
+              <a:t>2026/5/20</a:t>
             </a:fld>
             <a:endParaRPr lang="zh-TW" altLang="en-US"/>
           </a:p>
@@ -2586,8 +2586,8 @@
         </p:nvSpPr>
         <p:spPr>
           <a:xfrm>
-            <a:off x="2742883" y="4837889"/>
-            <a:ext cx="2794635" cy="277901"/>
+            <a:off x="3281363" y="5672161"/>
+            <a:ext cx="3343275" cy="325823"/>
           </a:xfrm>
           <a:prstGeom prst="rect">
             <a:avLst/>
@@ -2597,7 +2597,7 @@
           <a:bodyPr vert="horz" lIns="91440" tIns="45720" rIns="91440" bIns="45720" rtlCol="0" anchor="ctr"/>
           <a:lstStyle>
             <a:lvl1pPr algn="ctr">
-              <a:defRPr sz="815">
+              <a:defRPr sz="975">
                 <a:solidFill>
                   <a:schemeClr val="tx1">
                     <a:tint val="75000"/>
@@ -2623,8 +2623,8 @@
         </p:nvSpPr>
         <p:spPr>
           <a:xfrm>
-            <a:off x="5848033" y="4837889"/>
-            <a:ext cx="1863090" cy="277901"/>
+            <a:off x="6996113" y="5672161"/>
+            <a:ext cx="2228850" cy="325823"/>
           </a:xfrm>
           <a:prstGeom prst="rect">
             <a:avLst/>
@@ -2634,7 +2634,7 @@
           <a:bodyPr vert="horz" lIns="91440" tIns="45720" rIns="91440" bIns="45720" rtlCol="0" anchor="ctr"/>
           <a:lstStyle>
             <a:lvl1pPr algn="r">
-              <a:defRPr sz="815">
+              <a:defRPr sz="975">
                 <a:solidFill>
                   <a:schemeClr val="tx1">
                     <a:tint val="75000"/>
@@ -2655,27 +2655,27 @@
     </p:spTree>
     <p:extLst>
       <p:ext uri="{BB962C8B-B14F-4D97-AF65-F5344CB8AC3E}">
-        <p14:creationId xmlns:p14="http://schemas.microsoft.com/office/powerpoint/2010/main" val="2713665136"/>
+        <p14:creationId xmlns:p14="http://schemas.microsoft.com/office/powerpoint/2010/main" val="2693361601"/>
       </p:ext>
     </p:extLst>
   </p:cSld>
   <p:clrMap bg1="lt1" tx1="dk1" bg2="lt2" tx2="dk2" accent1="accent1" accent2="accent2" accent3="accent3" accent4="accent4" accent5="accent5" accent6="accent6" hlink="hlink" folHlink="folHlink"/>
   <p:sldLayoutIdLst>
-    <p:sldLayoutId id="2147483793" r:id="rId1"/>
-    <p:sldLayoutId id="2147483794" r:id="rId2"/>
-    <p:sldLayoutId id="2147483795" r:id="rId3"/>
-    <p:sldLayoutId id="2147483796" r:id="rId4"/>
-    <p:sldLayoutId id="2147483797" r:id="rId5"/>
-    <p:sldLayoutId id="2147483798" r:id="rId6"/>
-    <p:sldLayoutId id="2147483799" r:id="rId7"/>
-    <p:sldLayoutId id="2147483800" r:id="rId8"/>
-    <p:sldLayoutId id="2147483801" r:id="rId9"/>
-    <p:sldLayoutId id="2147483802" r:id="rId10"/>
-    <p:sldLayoutId id="2147483803" r:id="rId11"/>
+    <p:sldLayoutId id="2147483817" r:id="rId1"/>
+    <p:sldLayoutId id="2147483818" r:id="rId2"/>
+    <p:sldLayoutId id="2147483819" r:id="rId3"/>
+    <p:sldLayoutId id="2147483820" r:id="rId4"/>
+    <p:sldLayoutId id="2147483821" r:id="rId5"/>
+    <p:sldLayoutId id="2147483822" r:id="rId6"/>
+    <p:sldLayoutId id="2147483823" r:id="rId7"/>
+    <p:sldLayoutId id="2147483824" r:id="rId8"/>
+    <p:sldLayoutId id="2147483825" r:id="rId9"/>
+    <p:sldLayoutId id="2147483826" r:id="rId10"/>
+    <p:sldLayoutId id="2147483827" r:id="rId11"/>
   </p:sldLayoutIdLst>
   <p:txStyles>
     <p:titleStyle>
-      <a:lvl1pPr algn="l" defTabSz="621060" rtl="0" eaLnBrk="1" latinLnBrk="0" hangingPunct="1">
+      <a:lvl1pPr algn="l" defTabSz="742950" rtl="0" eaLnBrk="1" latinLnBrk="0" hangingPunct="1">
         <a:lnSpc>
           <a:spcPct val="90000"/>
         </a:lnSpc>
@@ -2683,7 +2683,7 @@
           <a:spcPct val="0"/>
         </a:spcBef>
         <a:buNone/>
-        <a:defRPr sz="2988" kern="1200">
+        <a:defRPr sz="3575" kern="1200">
           <a:solidFill>
             <a:schemeClr val="tx1"/>
           </a:solidFill>
@@ -2694,16 +2694,16 @@
       </a:lvl1pPr>
     </p:titleStyle>
     <p:bodyStyle>
-      <a:lvl1pPr marL="155265" indent="-155265" algn="l" defTabSz="621060" rtl="0" eaLnBrk="1" latinLnBrk="0" hangingPunct="1">
+      <a:lvl1pPr marL="185738" indent="-185738" algn="l" defTabSz="742950" rtl="0" eaLnBrk="1" latinLnBrk="0" hangingPunct="1">
         <a:lnSpc>
           <a:spcPct val="90000"/>
         </a:lnSpc>
         <a:spcBef>
-          <a:spcPts val="679"/>
+          <a:spcPts val="813"/>
         </a:spcBef>
         <a:buFont typeface="Arial" panose="020B0604020202020204" pitchFamily="34" charset="0"/>
         <a:buChar char="•"/>
-        <a:defRPr sz="1902" kern="1200">
+        <a:defRPr sz="2275" kern="1200">
           <a:solidFill>
             <a:schemeClr val="tx1"/>
           </a:solidFill>
@@ -2712,16 +2712,16 @@
           <a:cs typeface="+mn-cs"/>
         </a:defRPr>
       </a:lvl1pPr>
-      <a:lvl2pPr marL="465795" indent="-155265" algn="l" defTabSz="621060" rtl="0" eaLnBrk="1" latinLnBrk="0" hangingPunct="1">
+      <a:lvl2pPr marL="557213" indent="-185738" algn="l" defTabSz="742950" rtl="0" eaLnBrk="1" latinLnBrk="0" hangingPunct="1">
         <a:lnSpc>
           <a:spcPct val="90000"/>
         </a:lnSpc>
         <a:spcBef>
-          <a:spcPts val="340"/>
+          <a:spcPts val="406"/>
         </a:spcBef>
         <a:buFont typeface="Arial" panose="020B0604020202020204" pitchFamily="34" charset="0"/>
         <a:buChar char="•"/>
-        <a:defRPr sz="1630" kern="1200">
+        <a:defRPr sz="1950" kern="1200">
           <a:solidFill>
             <a:schemeClr val="tx1"/>
           </a:solidFill>
@@ -2730,16 +2730,16 @@
           <a:cs typeface="+mn-cs"/>
         </a:defRPr>
       </a:lvl2pPr>
-      <a:lvl3pPr marL="776326" indent="-155265" algn="l" defTabSz="621060" rtl="0" eaLnBrk="1" latinLnBrk="0" hangingPunct="1">
+      <a:lvl3pPr marL="928688" indent="-185738" algn="l" defTabSz="742950" rtl="0" eaLnBrk="1" latinLnBrk="0" hangingPunct="1">
         <a:lnSpc>
           <a:spcPct val="90000"/>
         </a:lnSpc>
         <a:spcBef>
-          <a:spcPts val="340"/>
+          <a:spcPts val="406"/>
         </a:spcBef>
         <a:buFont typeface="Arial" panose="020B0604020202020204" pitchFamily="34" charset="0"/>
         <a:buChar char="•"/>
-        <a:defRPr sz="1358" kern="1200">
+        <a:defRPr sz="1625" kern="1200">
           <a:solidFill>
             <a:schemeClr val="tx1"/>
           </a:solidFill>
@@ -2748,16 +2748,16 @@
           <a:cs typeface="+mn-cs"/>
         </a:defRPr>
       </a:lvl3pPr>
-      <a:lvl4pPr marL="1086856" indent="-155265" algn="l" defTabSz="621060" rtl="0" eaLnBrk="1" latinLnBrk="0" hangingPunct="1">
+      <a:lvl4pPr marL="1300163" indent="-185738" algn="l" defTabSz="742950" rtl="0" eaLnBrk="1" latinLnBrk="0" hangingPunct="1">
         <a:lnSpc>
           <a:spcPct val="90000"/>
         </a:lnSpc>
         <a:spcBef>
-          <a:spcPts val="340"/>
+          <a:spcPts val="406"/>
         </a:spcBef>
         <a:buFont typeface="Arial" panose="020B0604020202020204" pitchFamily="34" charset="0"/>
         <a:buChar char="•"/>
-        <a:defRPr sz="1223" kern="1200">
+        <a:defRPr sz="1463" kern="1200">
           <a:solidFill>
             <a:schemeClr val="tx1"/>
           </a:solidFill>
@@ -2766,16 +2766,16 @@
           <a:cs typeface="+mn-cs"/>
         </a:defRPr>
       </a:lvl4pPr>
-      <a:lvl5pPr marL="1397386" indent="-155265" algn="l" defTabSz="621060" rtl="0" eaLnBrk="1" latinLnBrk="0" hangingPunct="1">
+      <a:lvl5pPr marL="1671638" indent="-185738" algn="l" defTabSz="742950" rtl="0" eaLnBrk="1" latinLnBrk="0" hangingPunct="1">
         <a:lnSpc>
           <a:spcPct val="90000"/>
         </a:lnSpc>
         <a:spcBef>
-          <a:spcPts val="340"/>
+          <a:spcPts val="406"/>
         </a:spcBef>
         <a:buFont typeface="Arial" panose="020B0604020202020204" pitchFamily="34" charset="0"/>
         <a:buChar char="•"/>
-        <a:defRPr sz="1223" kern="1200">
+        <a:defRPr sz="1463" kern="1200">
           <a:solidFill>
             <a:schemeClr val="tx1"/>
           </a:solidFill>
@@ -2784,16 +2784,16 @@
           <a:cs typeface="+mn-cs"/>
         </a:defRPr>
       </a:lvl5pPr>
-      <a:lvl6pPr marL="1707916" indent="-155265" algn="l" defTabSz="621060" rtl="0" eaLnBrk="1" latinLnBrk="0" hangingPunct="1">
+      <a:lvl6pPr marL="2043113" indent="-185738" algn="l" defTabSz="742950" rtl="0" eaLnBrk="1" latinLnBrk="0" hangingPunct="1">
         <a:lnSpc>
           <a:spcPct val="90000"/>
         </a:lnSpc>
         <a:spcBef>
-          <a:spcPts val="340"/>
+          <a:spcPts val="406"/>
         </a:spcBef>
         <a:buFont typeface="Arial" panose="020B0604020202020204" pitchFamily="34" charset="0"/>
         <a:buChar char="•"/>
-        <a:defRPr sz="1223" kern="1200">
+        <a:defRPr sz="1463" kern="1200">
           <a:solidFill>
             <a:schemeClr val="tx1"/>
           </a:solidFill>
@@ -2802,16 +2802,16 @@
           <a:cs typeface="+mn-cs"/>
         </a:defRPr>
       </a:lvl6pPr>
-      <a:lvl7pPr marL="2018447" indent="-155265" algn="l" defTabSz="621060" rtl="0" eaLnBrk="1" latinLnBrk="0" hangingPunct="1">
+      <a:lvl7pPr marL="2414588" indent="-185738" algn="l" defTabSz="742950" rtl="0" eaLnBrk="1" latinLnBrk="0" hangingPunct="1">
         <a:lnSpc>
           <a:spcPct val="90000"/>
         </a:lnSpc>
         <a:spcBef>
-          <a:spcPts val="340"/>
+          <a:spcPts val="406"/>
         </a:spcBef>
         <a:buFont typeface="Arial" panose="020B0604020202020204" pitchFamily="34" charset="0"/>
         <a:buChar char="•"/>
-        <a:defRPr sz="1223" kern="1200">
+        <a:defRPr sz="1463" kern="1200">
           <a:solidFill>
             <a:schemeClr val="tx1"/>
           </a:solidFill>
@@ -2820,16 +2820,16 @@
           <a:cs typeface="+mn-cs"/>
         </a:defRPr>
       </a:lvl7pPr>
-      <a:lvl8pPr marL="2328977" indent="-155265" algn="l" defTabSz="621060" rtl="0" eaLnBrk="1" latinLnBrk="0" hangingPunct="1">
+      <a:lvl8pPr marL="2786063" indent="-185738" algn="l" defTabSz="742950" rtl="0" eaLnBrk="1" latinLnBrk="0" hangingPunct="1">
         <a:lnSpc>
           <a:spcPct val="90000"/>
         </a:lnSpc>
         <a:spcBef>
-          <a:spcPts val="340"/>
+          <a:spcPts val="406"/>
         </a:spcBef>
         <a:buFont typeface="Arial" panose="020B0604020202020204" pitchFamily="34" charset="0"/>
         <a:buChar char="•"/>
-        <a:defRPr sz="1223" kern="1200">
+        <a:defRPr sz="1463" kern="1200">
           <a:solidFill>
             <a:schemeClr val="tx1"/>
           </a:solidFill>
@@ -2838,16 +2838,16 @@
           <a:cs typeface="+mn-cs"/>
         </a:defRPr>
       </a:lvl8pPr>
-      <a:lvl9pPr marL="2639507" indent="-155265" algn="l" defTabSz="621060" rtl="0" eaLnBrk="1" latinLnBrk="0" hangingPunct="1">
+      <a:lvl9pPr marL="3157538" indent="-185738" algn="l" defTabSz="742950" rtl="0" eaLnBrk="1" latinLnBrk="0" hangingPunct="1">
         <a:lnSpc>
           <a:spcPct val="90000"/>
         </a:lnSpc>
         <a:spcBef>
-          <a:spcPts val="340"/>
+          <a:spcPts val="406"/>
         </a:spcBef>
         <a:buFont typeface="Arial" panose="020B0604020202020204" pitchFamily="34" charset="0"/>
         <a:buChar char="•"/>
-        <a:defRPr sz="1223" kern="1200">
+        <a:defRPr sz="1463" kern="1200">
           <a:solidFill>
             <a:schemeClr val="tx1"/>
           </a:solidFill>
@@ -2861,8 +2861,8 @@
       <a:defPPr>
         <a:defRPr lang="en-US"/>
       </a:defPPr>
-      <a:lvl1pPr marL="0" algn="l" defTabSz="621060" rtl="0" eaLnBrk="1" latinLnBrk="0" hangingPunct="1">
-        <a:defRPr sz="1223" kern="1200">
+      <a:lvl1pPr marL="0" algn="l" defTabSz="742950" rtl="0" eaLnBrk="1" latinLnBrk="0" hangingPunct="1">
+        <a:defRPr sz="1463" kern="1200">
           <a:solidFill>
             <a:schemeClr val="tx1"/>
           </a:solidFill>
@@ -2871,8 +2871,8 @@
           <a:cs typeface="+mn-cs"/>
         </a:defRPr>
       </a:lvl1pPr>
-      <a:lvl2pPr marL="310530" algn="l" defTabSz="621060" rtl="0" eaLnBrk="1" latinLnBrk="0" hangingPunct="1">
-        <a:defRPr sz="1223" kern="1200">
+      <a:lvl2pPr marL="371475" algn="l" defTabSz="742950" rtl="0" eaLnBrk="1" latinLnBrk="0" hangingPunct="1">
+        <a:defRPr sz="1463" kern="1200">
           <a:solidFill>
             <a:schemeClr val="tx1"/>
           </a:solidFill>
@@ -2881,8 +2881,8 @@
           <a:cs typeface="+mn-cs"/>
         </a:defRPr>
       </a:lvl2pPr>
-      <a:lvl3pPr marL="621060" algn="l" defTabSz="621060" rtl="0" eaLnBrk="1" latinLnBrk="0" hangingPunct="1">
-        <a:defRPr sz="1223" kern="1200">
+      <a:lvl3pPr marL="742950" algn="l" defTabSz="742950" rtl="0" eaLnBrk="1" latinLnBrk="0" hangingPunct="1">
+        <a:defRPr sz="1463" kern="1200">
           <a:solidFill>
             <a:schemeClr val="tx1"/>
           </a:solidFill>
@@ -2891,8 +2891,8 @@
           <a:cs typeface="+mn-cs"/>
         </a:defRPr>
       </a:lvl3pPr>
-      <a:lvl4pPr marL="931591" algn="l" defTabSz="621060" rtl="0" eaLnBrk="1" latinLnBrk="0" hangingPunct="1">
-        <a:defRPr sz="1223" kern="1200">
+      <a:lvl4pPr marL="1114425" algn="l" defTabSz="742950" rtl="0" eaLnBrk="1" latinLnBrk="0" hangingPunct="1">
+        <a:defRPr sz="1463" kern="1200">
           <a:solidFill>
             <a:schemeClr val="tx1"/>
           </a:solidFill>
@@ -2901,8 +2901,8 @@
           <a:cs typeface="+mn-cs"/>
         </a:defRPr>
       </a:lvl4pPr>
-      <a:lvl5pPr marL="1242121" algn="l" defTabSz="621060" rtl="0" eaLnBrk="1" latinLnBrk="0" hangingPunct="1">
-        <a:defRPr sz="1223" kern="1200">
+      <a:lvl5pPr marL="1485900" algn="l" defTabSz="742950" rtl="0" eaLnBrk="1" latinLnBrk="0" hangingPunct="1">
+        <a:defRPr sz="1463" kern="1200">
           <a:solidFill>
             <a:schemeClr val="tx1"/>
           </a:solidFill>
@@ -2911,8 +2911,8 @@
           <a:cs typeface="+mn-cs"/>
         </a:defRPr>
       </a:lvl5pPr>
-      <a:lvl6pPr marL="1552651" algn="l" defTabSz="621060" rtl="0" eaLnBrk="1" latinLnBrk="0" hangingPunct="1">
-        <a:defRPr sz="1223" kern="1200">
+      <a:lvl6pPr marL="1857375" algn="l" defTabSz="742950" rtl="0" eaLnBrk="1" latinLnBrk="0" hangingPunct="1">
+        <a:defRPr sz="1463" kern="1200">
           <a:solidFill>
             <a:schemeClr val="tx1"/>
           </a:solidFill>
@@ -2921,8 +2921,8 @@
           <a:cs typeface="+mn-cs"/>
         </a:defRPr>
       </a:lvl6pPr>
-      <a:lvl7pPr marL="1863181" algn="l" defTabSz="621060" rtl="0" eaLnBrk="1" latinLnBrk="0" hangingPunct="1">
-        <a:defRPr sz="1223" kern="1200">
+      <a:lvl7pPr marL="2228850" algn="l" defTabSz="742950" rtl="0" eaLnBrk="1" latinLnBrk="0" hangingPunct="1">
+        <a:defRPr sz="1463" kern="1200">
           <a:solidFill>
             <a:schemeClr val="tx1"/>
           </a:solidFill>
@@ -2931,8 +2931,8 @@
           <a:cs typeface="+mn-cs"/>
         </a:defRPr>
       </a:lvl7pPr>
-      <a:lvl8pPr marL="2173712" algn="l" defTabSz="621060" rtl="0" eaLnBrk="1" latinLnBrk="0" hangingPunct="1">
-        <a:defRPr sz="1223" kern="1200">
+      <a:lvl8pPr marL="2600325" algn="l" defTabSz="742950" rtl="0" eaLnBrk="1" latinLnBrk="0" hangingPunct="1">
+        <a:defRPr sz="1463" kern="1200">
           <a:solidFill>
             <a:schemeClr val="tx1"/>
           </a:solidFill>
@@ -2941,8 +2941,8 @@
           <a:cs typeface="+mn-cs"/>
         </a:defRPr>
       </a:lvl8pPr>
-      <a:lvl9pPr marL="2484242" algn="l" defTabSz="621060" rtl="0" eaLnBrk="1" latinLnBrk="0" hangingPunct="1">
-        <a:defRPr sz="1223" kern="1200">
+      <a:lvl9pPr marL="2971800" algn="l" defTabSz="742950" rtl="0" eaLnBrk="1" latinLnBrk="0" hangingPunct="1">
+        <a:defRPr sz="1463" kern="1200">
           <a:solidFill>
             <a:schemeClr val="tx1"/>
           </a:solidFill>
@@ -2973,505 +2973,12 @@
           <a:chExt cx="0" cy="0"/>
         </a:xfrm>
       </p:grpSpPr>
-      <p:sp>
-        <p:nvSpPr>
-          <p:cNvPr id="40" name="矩形: 圓角 39">
+      <p:grpSp>
+        <p:nvGrpSpPr>
+          <p:cNvPr id="2" name="群組 1">
             <a:extLst>
               <a:ext uri="{FF2B5EF4-FFF2-40B4-BE49-F238E27FC236}">
-                <a16:creationId xmlns:a16="http://schemas.microsoft.com/office/drawing/2014/main" id="{AE5C4EE9-7B12-4557-9064-3ED2A0A070C8}"/>
-              </a:ext>
-            </a:extLst>
-          </p:cNvPr>
-          <p:cNvSpPr/>
-          <p:nvPr/>
-        </p:nvSpPr>
-        <p:spPr>
-          <a:xfrm>
-            <a:off x="31416" y="3195412"/>
-            <a:ext cx="8222464" cy="1976964"/>
-          </a:xfrm>
-          <a:prstGeom prst="roundRect">
-            <a:avLst/>
-          </a:prstGeom>
-          <a:solidFill>
-            <a:schemeClr val="bg1"/>
-          </a:solidFill>
-          <a:ln w="19050">
-            <a:solidFill>
-              <a:schemeClr val="tx1">
-                <a:lumMod val="50000"/>
-                <a:lumOff val="50000"/>
-              </a:schemeClr>
-            </a:solidFill>
-          </a:ln>
-        </p:spPr>
-        <p:style>
-          <a:lnRef idx="2">
-            <a:schemeClr val="accent1">
-              <a:shade val="50000"/>
-            </a:schemeClr>
-          </a:lnRef>
-          <a:fillRef idx="1">
-            <a:schemeClr val="accent1"/>
-          </a:fillRef>
-          <a:effectRef idx="0">
-            <a:schemeClr val="accent1"/>
-          </a:effectRef>
-          <a:fontRef idx="minor">
-            <a:schemeClr val="lt1"/>
-          </a:fontRef>
-        </p:style>
-        <p:txBody>
-          <a:bodyPr rot="0" spcFirstLastPara="0" vertOverflow="overflow" horzOverflow="overflow" vert="horz" wrap="square" lIns="91440" tIns="45720" rIns="91440" bIns="45720" numCol="1" spcCol="0" rtlCol="0" fromWordArt="0" anchor="ctr" anchorCtr="0" forceAA="0" compatLnSpc="1">
-            <a:prstTxWarp prst="textNoShape">
-              <a:avLst/>
-            </a:prstTxWarp>
-            <a:noAutofit/>
-          </a:bodyPr>
-          <a:lstStyle/>
-          <a:p>
-            <a:pPr algn="ctr"/>
-            <a:endParaRPr lang="zh-TW" altLang="en-US"/>
-          </a:p>
-        </p:txBody>
-      </p:sp>
-      <p:sp>
-        <p:nvSpPr>
-          <p:cNvPr id="42" name="矩形: 圓角 41">
-            <a:extLst>
-              <a:ext uri="{FF2B5EF4-FFF2-40B4-BE49-F238E27FC236}">
-                <a16:creationId xmlns:a16="http://schemas.microsoft.com/office/drawing/2014/main" id="{C9FF13C6-480E-4AEE-A544-DEBAF6747026}"/>
-              </a:ext>
-            </a:extLst>
-          </p:cNvPr>
-          <p:cNvSpPr/>
-          <p:nvPr/>
-        </p:nvSpPr>
-        <p:spPr>
-          <a:xfrm>
-            <a:off x="26520" y="1217819"/>
-            <a:ext cx="8222464" cy="1976964"/>
-          </a:xfrm>
-          <a:prstGeom prst="roundRect">
-            <a:avLst/>
-          </a:prstGeom>
-          <a:solidFill>
-            <a:schemeClr val="bg1"/>
-          </a:solidFill>
-          <a:ln w="19050">
-            <a:solidFill>
-              <a:schemeClr val="tx1">
-                <a:lumMod val="50000"/>
-                <a:lumOff val="50000"/>
-              </a:schemeClr>
-            </a:solidFill>
-          </a:ln>
-        </p:spPr>
-        <p:style>
-          <a:lnRef idx="2">
-            <a:schemeClr val="accent1">
-              <a:shade val="50000"/>
-            </a:schemeClr>
-          </a:lnRef>
-          <a:fillRef idx="1">
-            <a:schemeClr val="accent1"/>
-          </a:fillRef>
-          <a:effectRef idx="0">
-            <a:schemeClr val="accent1"/>
-          </a:effectRef>
-          <a:fontRef idx="minor">
-            <a:schemeClr val="lt1"/>
-          </a:fontRef>
-        </p:style>
-        <p:txBody>
-          <a:bodyPr rot="0" spcFirstLastPara="0" vertOverflow="overflow" horzOverflow="overflow" vert="horz" wrap="square" lIns="91440" tIns="45720" rIns="91440" bIns="45720" numCol="1" spcCol="0" rtlCol="0" fromWordArt="0" anchor="ctr" anchorCtr="0" forceAA="0" compatLnSpc="1">
-            <a:prstTxWarp prst="textNoShape">
-              <a:avLst/>
-            </a:prstTxWarp>
-            <a:noAutofit/>
-          </a:bodyPr>
-          <a:lstStyle/>
-          <a:p>
-            <a:pPr algn="ctr"/>
-            <a:endParaRPr lang="zh-TW" altLang="en-US"/>
-          </a:p>
-        </p:txBody>
-      </p:sp>
-      <mc:AlternateContent xmlns:mc="http://schemas.openxmlformats.org/markup-compatibility/2006">
-        <mc:Choice xmlns:a14="http://schemas.microsoft.com/office/drawing/2010/main" Requires="a14">
-          <p:sp>
-            <p:nvSpPr>
-              <p:cNvPr id="6" name="文字方塊 5">
-                <a:extLst>
-                  <a:ext uri="{FF2B5EF4-FFF2-40B4-BE49-F238E27FC236}">
-                    <a16:creationId xmlns:a16="http://schemas.microsoft.com/office/drawing/2014/main" id="{D6A0354B-E6EA-4011-B8D8-356E01B0B0E9}"/>
-                  </a:ext>
-                </a:extLst>
-              </p:cNvPr>
-              <p:cNvSpPr txBox="1"/>
-              <p:nvPr/>
-            </p:nvSpPr>
-            <p:spPr>
-              <a:xfrm>
-                <a:off x="1289404" y="399799"/>
-                <a:ext cx="4477178" cy="458331"/>
-              </a:xfrm>
-              <a:prstGeom prst="rect">
-                <a:avLst/>
-              </a:prstGeom>
-              <a:noFill/>
-            </p:spPr>
-            <p:txBody>
-              <a:bodyPr wrap="square" rtlCol="0">
-                <a:spAutoFit/>
-              </a:bodyPr>
-              <a:lstStyle/>
-              <a:p>
-                <a:pPr/>
-                <a14:m>
-                  <m:oMathPara xmlns:m="http://schemas.openxmlformats.org/officeDocument/2006/math">
-                    <m:oMathParaPr>
-                      <m:jc m:val="centerGroup"/>
-                    </m:oMathParaPr>
-                    <m:oMath xmlns:m="http://schemas.openxmlformats.org/officeDocument/2006/math">
-                      <m:sSubSup>
-                        <m:sSubSupPr>
-                          <m:ctrlPr>
-                            <a:rPr lang="en-US" altLang="zh-TW" b="1" i="1">
-                              <a:latin typeface="Cambria Math" panose="02040503050406030204" pitchFamily="18" charset="0"/>
-                            </a:rPr>
-                          </m:ctrlPr>
-                        </m:sSubSupPr>
-                        <m:e>
-                          <m:r>
-                            <a:rPr lang="en-US" altLang="zh-TW" b="1" i="1">
-                              <a:latin typeface="Cambria Math" panose="02040503050406030204" pitchFamily="18" charset="0"/>
-                            </a:rPr>
-                            <m:t>𝑨</m:t>
-                          </m:r>
-                        </m:e>
-                        <m:sub>
-                          <m:sSub>
-                            <m:sSubPr>
-                              <m:ctrlPr>
-                                <a:rPr lang="en-US" altLang="zh-TW" i="1">
-                                  <a:latin typeface="Cambria Math" panose="02040503050406030204" pitchFamily="18" charset="0"/>
-                                </a:rPr>
-                              </m:ctrlPr>
-                            </m:sSubPr>
-                            <m:e>
-                              <m:r>
-                                <a:rPr lang="en-US" altLang="zh-TW" b="1" i="1">
-                                  <a:latin typeface="Cambria Math" panose="02040503050406030204" pitchFamily="18" charset="0"/>
-                                </a:rPr>
-                                <m:t>𝒒</m:t>
-                              </m:r>
-                            </m:e>
-                            <m:sub>
-                              <m:r>
-                                <a:rPr lang="en-US" altLang="zh-TW" i="1">
-                                  <a:latin typeface="Cambria Math" panose="02040503050406030204" pitchFamily="18" charset="0"/>
-                                </a:rPr>
-                                <m:t>0</m:t>
-                              </m:r>
-                            </m:sub>
-                          </m:sSub>
-                        </m:sub>
-                        <m:sup>
-                          <m:acc>
-                            <m:accPr>
-                              <m:chr m:val="̂"/>
-                              <m:ctrlPr>
-                                <a:rPr lang="en-US" altLang="zh-TW" i="1">
-                                  <a:latin typeface="Cambria Math" panose="02040503050406030204" pitchFamily="18" charset="0"/>
-                                </a:rPr>
-                              </m:ctrlPr>
-                            </m:accPr>
-                            <m:e>
-                              <m:r>
-                                <a:rPr lang="en-US" altLang="zh-TW" i="1">
-                                  <a:latin typeface="Cambria Math" panose="02040503050406030204" pitchFamily="18" charset="0"/>
-                                </a:rPr>
-                                <m:t>𝜀</m:t>
-                              </m:r>
-                            </m:e>
-                          </m:acc>
-                          <m:r>
-                            <a:rPr lang="en-US" altLang="zh-TW" i="1">
-                              <a:latin typeface="Cambria Math" panose="02040503050406030204" pitchFamily="18" charset="0"/>
-                            </a:rPr>
-                            <m:t>, ℓ, </m:t>
-                          </m:r>
-                          <m:r>
-                            <a:rPr lang="en-US" altLang="zh-TW" i="1">
-                              <a:latin typeface="Cambria Math" panose="02040503050406030204" pitchFamily="18" charset="0"/>
-                            </a:rPr>
-                            <m:t>𝑝</m:t>
-                          </m:r>
-                          <m:r>
-                            <a:rPr lang="en-US" altLang="zh-TW" i="1">
-                              <a:latin typeface="Cambria Math" panose="02040503050406030204" pitchFamily="18" charset="0"/>
-                            </a:rPr>
-                            <m:t>=0</m:t>
-                          </m:r>
-                          <m:r>
-                            <a:rPr lang="en-US" altLang="zh-TW" b="1" i="1">
-                              <a:latin typeface="Cambria Math" panose="02040503050406030204" pitchFamily="18" charset="0"/>
-                            </a:rPr>
-                            <m:t>;</m:t>
-                          </m:r>
-                          <m:r>
-                            <a:rPr lang="en-US" altLang="zh-TW" i="1">
-                              <a:latin typeface="Cambria Math" panose="02040503050406030204" pitchFamily="18" charset="0"/>
-                            </a:rPr>
-                            <m:t>𝐶</m:t>
-                          </m:r>
-                        </m:sup>
-                      </m:sSubSup>
-                      <m:d>
-                        <m:dPr>
-                          <m:ctrlPr>
-                            <a:rPr lang="en-US" altLang="zh-TW" b="1" i="1">
-                              <a:latin typeface="Cambria Math" panose="02040503050406030204" pitchFamily="18" charset="0"/>
-                            </a:rPr>
-                          </m:ctrlPr>
-                        </m:dPr>
-                        <m:e>
-                          <m:r>
-                            <a:rPr lang="en-US" altLang="zh-TW" i="1">
-                              <a:latin typeface="Cambria Math" panose="02040503050406030204" pitchFamily="18" charset="0"/>
-                            </a:rPr>
-                            <m:t>𝜌</m:t>
-                          </m:r>
-                          <m:r>
-                            <a:rPr lang="en-US" altLang="zh-TW" b="1" i="1">
-                              <a:latin typeface="Cambria Math" panose="02040503050406030204" pitchFamily="18" charset="0"/>
-                            </a:rPr>
-                            <m:t>,</m:t>
-                          </m:r>
-                          <m:r>
-                            <a:rPr lang="en-US" altLang="zh-TW" i="1">
-                              <a:latin typeface="Cambria Math" panose="02040503050406030204" pitchFamily="18" charset="0"/>
-                            </a:rPr>
-                            <m:t> </m:t>
-                          </m:r>
-                          <m:r>
-                            <a:rPr lang="en-US" altLang="zh-TW" i="1">
-                              <a:latin typeface="Cambria Math" panose="02040503050406030204" pitchFamily="18" charset="0"/>
-                            </a:rPr>
-                            <m:t>𝜙</m:t>
-                          </m:r>
-                          <m:r>
-                            <a:rPr lang="en-US" altLang="zh-TW" i="1">
-                              <a:latin typeface="Cambria Math" panose="02040503050406030204" pitchFamily="18" charset="0"/>
-                            </a:rPr>
-                            <m:t>=0, </m:t>
-                          </m:r>
-                          <m:r>
-                            <a:rPr lang="en-US" altLang="zh-TW" i="1">
-                              <a:latin typeface="Cambria Math" panose="02040503050406030204" pitchFamily="18" charset="0"/>
-                            </a:rPr>
-                            <m:t>𝑧</m:t>
-                          </m:r>
-                          <m:r>
-                            <a:rPr lang="en-US" altLang="zh-TW" i="1">
-                              <a:latin typeface="Cambria Math" panose="02040503050406030204" pitchFamily="18" charset="0"/>
-                            </a:rPr>
-                            <m:t>=0</m:t>
-                          </m:r>
-                        </m:e>
-                      </m:d>
-                      <m:r>
-                        <a:rPr lang="en-US" altLang="zh-TW" b="1" i="1">
-                          <a:latin typeface="Cambria Math" panose="02040503050406030204" pitchFamily="18" charset="0"/>
-                        </a:rPr>
-                        <m:t>=</m:t>
-                      </m:r>
-                      <m:sSubSup>
-                        <m:sSubSupPr>
-                          <m:ctrlPr>
-                            <a:rPr lang="en-US" altLang="zh-TW" b="1" i="1">
-                              <a:latin typeface="Cambria Math" panose="02040503050406030204" pitchFamily="18" charset="0"/>
-                            </a:rPr>
-                          </m:ctrlPr>
-                        </m:sSubSupPr>
-                        <m:e>
-                          <m:r>
-                            <a:rPr lang="en-US" altLang="zh-TW" b="1" i="1">
-                              <a:latin typeface="Cambria Math" panose="02040503050406030204" pitchFamily="18" charset="0"/>
-                            </a:rPr>
-                            <m:t>𝑨</m:t>
-                          </m:r>
-                        </m:e>
-                        <m:sub>
-                          <m:r>
-                            <a:rPr lang="en-US" altLang="zh-TW" b="1" i="1">
-                              <a:latin typeface="Cambria Math" panose="02040503050406030204" pitchFamily="18" charset="0"/>
-                            </a:rPr>
-                            <m:t>∥</m:t>
-                          </m:r>
-                        </m:sub>
-                        <m:sup>
-                          <m:r>
-                            <a:rPr lang="en-US" altLang="zh-TW" b="1" i="1">
-                              <a:latin typeface="Cambria Math" panose="02040503050406030204" pitchFamily="18" charset="0"/>
-                            </a:rPr>
-                            <m:t>ℓ</m:t>
-                          </m:r>
-                        </m:sup>
-                      </m:sSubSup>
-                      <m:acc>
-                        <m:accPr>
-                          <m:chr m:val="̂"/>
-                          <m:ctrlPr>
-                            <a:rPr lang="en-US" altLang="zh-TW" i="1">
-                              <a:latin typeface="Cambria Math" panose="02040503050406030204" pitchFamily="18" charset="0"/>
-                            </a:rPr>
-                          </m:ctrlPr>
-                        </m:accPr>
-                        <m:e>
-                          <m:r>
-                            <a:rPr lang="en-US" altLang="zh-TW" i="1">
-                              <a:latin typeface="Cambria Math" panose="02040503050406030204" pitchFamily="18" charset="0"/>
-                            </a:rPr>
-                            <m:t>𝜀</m:t>
-                          </m:r>
-                        </m:e>
-                      </m:acc>
-                      <m:r>
-                        <a:rPr lang="en-US" altLang="zh-TW" i="1">
-                          <a:latin typeface="Cambria Math" panose="02040503050406030204" pitchFamily="18" charset="0"/>
-                        </a:rPr>
-                        <m:t>+</m:t>
-                      </m:r>
-                      <m:sSubSup>
-                        <m:sSubSupPr>
-                          <m:ctrlPr>
-                            <a:rPr lang="en-US" altLang="zh-TW" i="1">
-                              <a:latin typeface="Cambria Math" panose="02040503050406030204" pitchFamily="18" charset="0"/>
-                            </a:rPr>
-                          </m:ctrlPr>
-                        </m:sSubSupPr>
-                        <m:e>
-                          <m:r>
-                            <a:rPr lang="en-US" altLang="zh-TW" b="1" i="1">
-                              <a:latin typeface="Cambria Math" panose="02040503050406030204" pitchFamily="18" charset="0"/>
-                            </a:rPr>
-                            <m:t>𝑨</m:t>
-                          </m:r>
-                        </m:e>
-                        <m:sub>
-                          <m:r>
-                            <a:rPr lang="en-US" altLang="zh-TW" b="1" i="1">
-                              <a:latin typeface="Cambria Math" panose="02040503050406030204" pitchFamily="18" charset="0"/>
-                            </a:rPr>
-                            <m:t>𝒛</m:t>
-                          </m:r>
-                        </m:sub>
-                        <m:sup>
-                          <m:acc>
-                            <m:accPr>
-                              <m:chr m:val="̂"/>
-                              <m:ctrlPr>
-                                <a:rPr lang="en-US" altLang="zh-TW" i="1">
-                                  <a:latin typeface="Cambria Math" panose="02040503050406030204" pitchFamily="18" charset="0"/>
-                                </a:rPr>
-                              </m:ctrlPr>
-                            </m:accPr>
-                            <m:e>
-                              <m:r>
-                                <a:rPr lang="en-US" altLang="zh-TW" i="1">
-                                  <a:latin typeface="Cambria Math" panose="02040503050406030204" pitchFamily="18" charset="0"/>
-                                </a:rPr>
-                                <m:t>𝜀</m:t>
-                              </m:r>
-                            </m:e>
-                          </m:acc>
-                          <m:r>
-                            <a:rPr lang="en-US" altLang="zh-TW" i="1">
-                              <a:latin typeface="Cambria Math" panose="02040503050406030204" pitchFamily="18" charset="0"/>
-                            </a:rPr>
-                            <m:t>, ℓ</m:t>
-                          </m:r>
-                        </m:sup>
-                      </m:sSubSup>
-                      <m:acc>
-                        <m:accPr>
-                          <m:chr m:val="̂"/>
-                          <m:ctrlPr>
-                            <a:rPr lang="en-US" altLang="zh-TW" i="1">
-                              <a:latin typeface="Cambria Math" panose="02040503050406030204" pitchFamily="18" charset="0"/>
-                            </a:rPr>
-                          </m:ctrlPr>
-                        </m:accPr>
-                        <m:e>
-                          <m:r>
-                            <a:rPr lang="en-US" altLang="zh-TW" i="1">
-                              <a:latin typeface="Cambria Math" panose="02040503050406030204" pitchFamily="18" charset="0"/>
-                            </a:rPr>
-                            <m:t>𝑧</m:t>
-                          </m:r>
-                        </m:e>
-                      </m:acc>
-                    </m:oMath>
-                  </m:oMathPara>
-                </a14:m>
-                <a:endParaRPr lang="zh-TW" altLang="en-US" b="1" dirty="0"/>
-              </a:p>
-            </p:txBody>
-          </p:sp>
-        </mc:Choice>
-        <mc:Fallback>
-          <p:sp>
-            <p:nvSpPr>
-              <p:cNvPr id="6" name="文字方塊 5">
-                <a:extLst>
-                  <a:ext uri="{FF2B5EF4-FFF2-40B4-BE49-F238E27FC236}">
-                    <a16:creationId xmlns:a16="http://schemas.microsoft.com/office/drawing/2014/main" id="{D6A0354B-E6EA-4011-B8D8-356E01B0B0E9}"/>
-                  </a:ext>
-                </a:extLst>
-              </p:cNvPr>
-              <p:cNvSpPr txBox="1">
-                <a:spLocks noRot="1" noChangeAspect="1" noMove="1" noResize="1" noEditPoints="1" noAdjustHandles="1" noChangeArrowheads="1" noChangeShapeType="1" noTextEdit="1"/>
-              </p:cNvSpPr>
-              <p:nvPr/>
-            </p:nvSpPr>
-            <p:spPr>
-              <a:xfrm>
-                <a:off x="1289404" y="399799"/>
-                <a:ext cx="4477178" cy="458331"/>
-              </a:xfrm>
-              <a:prstGeom prst="rect">
-                <a:avLst/>
-              </a:prstGeom>
-              <a:blipFill>
-                <a:blip r:embed="rId2"/>
-                <a:stretch>
-                  <a:fillRect r="-1635" b="-4000"/>
-                </a:stretch>
-              </a:blipFill>
-            </p:spPr>
-            <p:txBody>
-              <a:bodyPr/>
-              <a:lstStyle/>
-              <a:p>
-                <a:r>
-                  <a:rPr lang="zh-TW" altLang="en-US">
-                    <a:noFill/>
-                  </a:rPr>
-                  <a:t> </a:t>
-                </a:r>
-              </a:p>
-            </p:txBody>
-          </p:sp>
-        </mc:Fallback>
-      </mc:AlternateContent>
-      <p:grpSp>
-        <p:nvGrpSpPr>
-          <p:cNvPr id="22" name="群組 21">
-            <a:extLst>
-              <a:ext uri="{FF2B5EF4-FFF2-40B4-BE49-F238E27FC236}">
-                <a16:creationId xmlns:a16="http://schemas.microsoft.com/office/drawing/2014/main" id="{7F747199-E3E7-4C71-BAA6-01CDE0E71DB8}"/>
+                <a16:creationId xmlns:a16="http://schemas.microsoft.com/office/drawing/2014/main" id="{2EC8B194-AD9E-4BD5-8CB2-597BC0BB39FF}"/>
               </a:ext>
             </a:extLst>
           </p:cNvPr>
@@ -3480,316 +2987,18 @@
         </p:nvGrpSpPr>
         <p:grpSpPr>
           <a:xfrm>
-            <a:off x="5793358" y="23584"/>
-            <a:ext cx="1596600" cy="1135074"/>
-            <a:chOff x="6039273" y="-281233"/>
-            <a:chExt cx="1718499" cy="1120593"/>
+            <a:off x="20504" y="35311"/>
+            <a:ext cx="9847396" cy="6136274"/>
+            <a:chOff x="20504" y="723901"/>
+            <a:chExt cx="9847396" cy="6136274"/>
           </a:xfrm>
         </p:grpSpPr>
-        <p:pic>
-          <p:nvPicPr>
-            <p:cNvPr id="7" name="圖片 6">
+        <p:sp>
+          <p:nvSpPr>
+            <p:cNvPr id="40" name="矩形: 圓角 39">
               <a:extLst>
                 <a:ext uri="{FF2B5EF4-FFF2-40B4-BE49-F238E27FC236}">
-                  <a16:creationId xmlns:a16="http://schemas.microsoft.com/office/drawing/2014/main" id="{E53272F7-A213-44CF-8A55-4DE640703315}"/>
-                </a:ext>
-              </a:extLst>
-            </p:cNvPr>
-            <p:cNvPicPr>
-              <a:picLocks noChangeAspect="1"/>
-            </p:cNvPicPr>
-            <p:nvPr/>
-          </p:nvPicPr>
-          <p:blipFill>
-            <a:blip r:embed="rId3"/>
-            <a:stretch>
-              <a:fillRect/>
-            </a:stretch>
-          </p:blipFill>
-          <p:spPr>
-            <a:xfrm>
-              <a:off x="6126181" y="-139026"/>
-              <a:ext cx="534369" cy="850550"/>
-            </a:xfrm>
-            <a:prstGeom prst="rect">
-              <a:avLst/>
-            </a:prstGeom>
-          </p:spPr>
-        </p:pic>
-        <mc:AlternateContent xmlns:mc="http://schemas.openxmlformats.org/markup-compatibility/2006">
-          <mc:Choice xmlns:a14="http://schemas.microsoft.com/office/drawing/2010/main" Requires="a14">
-            <p:sp>
-              <p:nvSpPr>
-                <p:cNvPr id="8" name="文字方塊 7">
-                  <a:extLst>
-                    <a:ext uri="{FF2B5EF4-FFF2-40B4-BE49-F238E27FC236}">
-                      <a16:creationId xmlns:a16="http://schemas.microsoft.com/office/drawing/2014/main" id="{865164BF-B68E-473A-A921-4C3623AE9C50}"/>
-                    </a:ext>
-                  </a:extLst>
-                </p:cNvPr>
-                <p:cNvSpPr txBox="1"/>
-                <p:nvPr/>
-              </p:nvSpPr>
-              <p:spPr>
-                <a:xfrm>
-                  <a:off x="6701354" y="-281233"/>
-                  <a:ext cx="990700" cy="1062716"/>
-                </a:xfrm>
-                <a:prstGeom prst="rect">
-                  <a:avLst/>
-                </a:prstGeom>
-                <a:noFill/>
-              </p:spPr>
-              <p:txBody>
-                <a:bodyPr wrap="square" rtlCol="0">
-                  <a:spAutoFit/>
-                </a:bodyPr>
-                <a:lstStyle/>
-                <a:p>
-                  <a:pPr algn="ctr"/>
-                  <a14:m>
-                    <m:oMathPara xmlns:m="http://schemas.openxmlformats.org/officeDocument/2006/math">
-                      <m:oMathParaPr>
-                        <m:jc m:val="centerGroup"/>
-                      </m:oMathParaPr>
-                      <m:oMath xmlns:m="http://schemas.openxmlformats.org/officeDocument/2006/math">
-                        <m:d>
-                          <m:dPr>
-                            <m:begChr m:val="|"/>
-                            <m:endChr m:val="|"/>
-                            <m:ctrlPr>
-                              <a:rPr lang="en-US" altLang="zh-TW" i="1">
-                                <a:latin typeface="Cambria Math" panose="02040503050406030204" pitchFamily="18" charset="0"/>
-                              </a:rPr>
-                            </m:ctrlPr>
-                          </m:dPr>
-                          <m:e>
-                            <m:sSubSup>
-                              <m:sSubSupPr>
-                                <m:ctrlPr>
-                                  <a:rPr lang="en-US" altLang="zh-TW" b="1" i="1">
-                                    <a:latin typeface="Cambria Math" panose="02040503050406030204" pitchFamily="18" charset="0"/>
-                                  </a:rPr>
-                                </m:ctrlPr>
-                              </m:sSubSupPr>
-                              <m:e>
-                                <m:r>
-                                  <a:rPr lang="en-US" altLang="zh-TW" b="1" i="1">
-                                    <a:latin typeface="Cambria Math" panose="02040503050406030204" pitchFamily="18" charset="0"/>
-                                  </a:rPr>
-                                  <m:t>𝑨</m:t>
-                                </m:r>
-                              </m:e>
-                              <m:sub>
-                                <m:r>
-                                  <a:rPr lang="en-US" altLang="zh-TW" b="1" i="1">
-                                    <a:latin typeface="Cambria Math" panose="02040503050406030204" pitchFamily="18" charset="0"/>
-                                  </a:rPr>
-                                  <m:t>∥</m:t>
-                                </m:r>
-                              </m:sub>
-                              <m:sup>
-                                <m:r>
-                                  <a:rPr lang="en-US" altLang="zh-TW" b="1" i="1">
-                                    <a:latin typeface="Cambria Math" panose="02040503050406030204" pitchFamily="18" charset="0"/>
-                                  </a:rPr>
-                                  <m:t>ℓ</m:t>
-                                </m:r>
-                              </m:sup>
-                            </m:sSubSup>
-                          </m:e>
-                        </m:d>
-                      </m:oMath>
-                    </m:oMathPara>
-                  </a14:m>
-                  <a:endParaRPr lang="en-US" altLang="zh-TW" i="1" dirty="0">
-                    <a:latin typeface="Cambria Math" panose="02040503050406030204" pitchFamily="18" charset="0"/>
-                  </a:endParaRPr>
-                </a:p>
-                <a:p>
-                  <a:pPr algn="ctr"/>
-                  <a14:m>
-                    <m:oMathPara xmlns:m="http://schemas.openxmlformats.org/officeDocument/2006/math">
-                      <m:oMathParaPr>
-                        <m:jc m:val="centerGroup"/>
-                      </m:oMathParaPr>
-                      <m:oMath xmlns:m="http://schemas.openxmlformats.org/officeDocument/2006/math">
-                        <m:d>
-                          <m:dPr>
-                            <m:begChr m:val="|"/>
-                            <m:endChr m:val="|"/>
-                            <m:ctrlPr>
-                              <a:rPr lang="en-US" altLang="zh-TW" i="1">
-                                <a:latin typeface="Cambria Math" panose="02040503050406030204" pitchFamily="18" charset="0"/>
-                              </a:rPr>
-                            </m:ctrlPr>
-                          </m:dPr>
-                          <m:e>
-                            <m:sSubSup>
-                              <m:sSubSupPr>
-                                <m:ctrlPr>
-                                  <a:rPr lang="en-US" altLang="zh-TW" i="1">
-                                    <a:latin typeface="Cambria Math" panose="02040503050406030204" pitchFamily="18" charset="0"/>
-                                  </a:rPr>
-                                </m:ctrlPr>
-                              </m:sSubSupPr>
-                              <m:e>
-                                <m:r>
-                                  <a:rPr lang="en-US" altLang="zh-TW" b="1" i="1">
-                                    <a:latin typeface="Cambria Math" panose="02040503050406030204" pitchFamily="18" charset="0"/>
-                                  </a:rPr>
-                                  <m:t>𝑨</m:t>
-                                </m:r>
-                              </m:e>
-                              <m:sub>
-                                <m:r>
-                                  <a:rPr lang="en-US" altLang="zh-TW" b="1" i="1">
-                                    <a:latin typeface="Cambria Math" panose="02040503050406030204" pitchFamily="18" charset="0"/>
-                                  </a:rPr>
-                                  <m:t>𝒛</m:t>
-                                </m:r>
-                              </m:sub>
-                              <m:sup>
-                                <m:r>
-                                  <a:rPr lang="en-US" altLang="zh-TW" i="1">
-                                    <a:latin typeface="Cambria Math" panose="02040503050406030204" pitchFamily="18" charset="0"/>
-                                  </a:rPr>
-                                  <m:t>𝜎</m:t>
-                                </m:r>
-                                <m:r>
-                                  <a:rPr lang="en-US" altLang="zh-TW" i="1">
-                                    <a:latin typeface="Cambria Math" panose="02040503050406030204" pitchFamily="18" charset="0"/>
-                                  </a:rPr>
-                                  <m:t>=1, ℓ</m:t>
-                                </m:r>
-                              </m:sup>
-                            </m:sSubSup>
-                          </m:e>
-                        </m:d>
-                      </m:oMath>
-                    </m:oMathPara>
-                  </a14:m>
-                  <a:endParaRPr lang="en-US" altLang="zh-TW" dirty="0"/>
-                </a:p>
-                <a:p>
-                  <a:pPr algn="ctr"/>
-                  <a14:m>
-                    <m:oMathPara xmlns:m="http://schemas.openxmlformats.org/officeDocument/2006/math">
-                      <m:oMathParaPr>
-                        <m:jc m:val="centerGroup"/>
-                      </m:oMathParaPr>
-                      <m:oMath xmlns:m="http://schemas.openxmlformats.org/officeDocument/2006/math">
-                        <m:d>
-                          <m:dPr>
-                            <m:begChr m:val="|"/>
-                            <m:endChr m:val="|"/>
-                            <m:ctrlPr>
-                              <a:rPr lang="en-US" altLang="zh-TW" i="1">
-                                <a:latin typeface="Cambria Math" panose="02040503050406030204" pitchFamily="18" charset="0"/>
-                              </a:rPr>
-                            </m:ctrlPr>
-                          </m:dPr>
-                          <m:e>
-                            <m:sSubSup>
-                              <m:sSubSupPr>
-                                <m:ctrlPr>
-                                  <a:rPr lang="en-US" altLang="zh-TW" i="1">
-                                    <a:latin typeface="Cambria Math" panose="02040503050406030204" pitchFamily="18" charset="0"/>
-                                  </a:rPr>
-                                </m:ctrlPr>
-                              </m:sSubSupPr>
-                              <m:e>
-                                <m:r>
-                                  <a:rPr lang="en-US" altLang="zh-TW" b="1" i="1">
-                                    <a:latin typeface="Cambria Math" panose="02040503050406030204" pitchFamily="18" charset="0"/>
-                                  </a:rPr>
-                                  <m:t>𝑨</m:t>
-                                </m:r>
-                              </m:e>
-                              <m:sub>
-                                <m:r>
-                                  <a:rPr lang="en-US" altLang="zh-TW" b="1" i="1">
-                                    <a:latin typeface="Cambria Math" panose="02040503050406030204" pitchFamily="18" charset="0"/>
-                                  </a:rPr>
-                                  <m:t>𝒛</m:t>
-                                </m:r>
-                              </m:sub>
-                              <m:sup>
-                                <m:r>
-                                  <a:rPr lang="en-US" altLang="zh-TW" i="1">
-                                    <a:latin typeface="Cambria Math" panose="02040503050406030204" pitchFamily="18" charset="0"/>
-                                  </a:rPr>
-                                  <m:t>𝜎</m:t>
-                                </m:r>
-                                <m:r>
-                                  <a:rPr lang="en-US" altLang="zh-TW" i="1">
-                                    <a:latin typeface="Cambria Math" panose="02040503050406030204" pitchFamily="18" charset="0"/>
-                                  </a:rPr>
-                                  <m:t>=−1, ℓ</m:t>
-                                </m:r>
-                              </m:sup>
-                            </m:sSubSup>
-                          </m:e>
-                        </m:d>
-                      </m:oMath>
-                    </m:oMathPara>
-                  </a14:m>
-                  <a:endParaRPr lang="zh-TW" altLang="en-US" b="1" dirty="0"/>
-                </a:p>
-              </p:txBody>
-            </p:sp>
-          </mc:Choice>
-          <mc:Fallback>
-            <p:sp>
-              <p:nvSpPr>
-                <p:cNvPr id="8" name="文字方塊 7">
-                  <a:extLst>
-                    <a:ext uri="{FF2B5EF4-FFF2-40B4-BE49-F238E27FC236}">
-                      <a16:creationId xmlns:a16="http://schemas.microsoft.com/office/drawing/2014/main" id="{865164BF-B68E-473A-A921-4C3623AE9C50}"/>
-                    </a:ext>
-                  </a:extLst>
-                </p:cNvPr>
-                <p:cNvSpPr txBox="1">
-                  <a:spLocks noRot="1" noChangeAspect="1" noMove="1" noResize="1" noEditPoints="1" noAdjustHandles="1" noChangeArrowheads="1" noChangeShapeType="1" noTextEdit="1"/>
-                </p:cNvSpPr>
-                <p:nvPr/>
-              </p:nvSpPr>
-              <p:spPr>
-                <a:xfrm>
-                  <a:off x="6701354" y="-281233"/>
-                  <a:ext cx="990700" cy="1062716"/>
-                </a:xfrm>
-                <a:prstGeom prst="rect">
-                  <a:avLst/>
-                </a:prstGeom>
-                <a:blipFill>
-                  <a:blip r:embed="rId4"/>
-                  <a:stretch>
-                    <a:fillRect l="-1325"/>
-                  </a:stretch>
-                </a:blipFill>
-              </p:spPr>
-              <p:txBody>
-                <a:bodyPr/>
-                <a:lstStyle/>
-                <a:p>
-                  <a:r>
-                    <a:rPr lang="zh-TW" altLang="en-US">
-                      <a:noFill/>
-                    </a:rPr>
-                    <a:t> </a:t>
-                  </a:r>
-                </a:p>
-              </p:txBody>
-            </p:sp>
-          </mc:Fallback>
-        </mc:AlternateContent>
-        <p:sp>
-          <p:nvSpPr>
-            <p:cNvPr id="10" name="矩形: 圓角 9">
-              <a:extLst>
-                <a:ext uri="{FF2B5EF4-FFF2-40B4-BE49-F238E27FC236}">
-                  <a16:creationId xmlns:a16="http://schemas.microsoft.com/office/drawing/2014/main" id="{1ED60B65-DF32-45CC-88AD-193710422870}"/>
+                  <a16:creationId xmlns:a16="http://schemas.microsoft.com/office/drawing/2014/main" id="{AE5C4EE9-7B12-4557-9064-3ED2A0A070C8}"/>
                 </a:ext>
               </a:extLst>
             </p:cNvPr>
@@ -3798,14 +3007,16 @@
           </p:nvSpPr>
           <p:spPr>
             <a:xfrm>
-              <a:off x="6039273" y="-260656"/>
-              <a:ext cx="1718499" cy="1100016"/>
+              <a:off x="25400" y="4408261"/>
+              <a:ext cx="9842500" cy="2366477"/>
             </a:xfrm>
             <a:prstGeom prst="roundRect">
               <a:avLst/>
             </a:prstGeom>
-            <a:noFill/>
-            <a:ln w="28575">
+            <a:solidFill>
+              <a:schemeClr val="bg1"/>
+            </a:solidFill>
+            <a:ln w="19050">
               <a:solidFill>
                 <a:schemeClr val="tx1">
                   <a:lumMod val="50000"/>
@@ -3831,7 +3042,7 @@
             </a:fontRef>
           </p:style>
           <p:txBody>
-            <a:bodyPr rot="0" spcFirstLastPara="0" vertOverflow="overflow" horzOverflow="overflow" vert="horz" wrap="square" lIns="80998" tIns="40499" rIns="80998" bIns="40499" numCol="1" spcCol="0" rtlCol="0" fromWordArt="0" anchor="ctr" anchorCtr="0" forceAA="0" compatLnSpc="1">
+            <a:bodyPr rot="0" spcFirstLastPara="0" vertOverflow="overflow" horzOverflow="overflow" vert="horz" wrap="square" lIns="91440" tIns="45720" rIns="91440" bIns="45720" numCol="1" spcCol="0" rtlCol="0" fromWordArt="0" anchor="ctr" anchorCtr="0" forceAA="0" compatLnSpc="1">
               <a:prstTxWarp prst="textNoShape">
                 <a:avLst/>
               </a:prstTxWarp>
@@ -3840,635 +3051,857 @@
             <a:lstStyle/>
             <a:p>
               <a:pPr algn="ctr"/>
-              <a:endParaRPr lang="zh-TW" altLang="en-US" dirty="0"/>
+              <a:endParaRPr lang="zh-TW" altLang="en-US"/>
             </a:p>
           </p:txBody>
         </p:sp>
-      </p:grpSp>
-      <mc:AlternateContent xmlns:mc="http://schemas.openxmlformats.org/markup-compatibility/2006">
-        <mc:Choice xmlns:a14="http://schemas.microsoft.com/office/drawing/2010/main" Requires="a14">
-          <p:sp>
-            <p:nvSpPr>
-              <p:cNvPr id="11" name="文字方塊 10">
+        <p:sp>
+          <p:nvSpPr>
+            <p:cNvPr id="42" name="矩形: 圓角 41">
+              <a:extLst>
+                <a:ext uri="{FF2B5EF4-FFF2-40B4-BE49-F238E27FC236}">
+                  <a16:creationId xmlns:a16="http://schemas.microsoft.com/office/drawing/2014/main" id="{C9FF13C6-480E-4AEE-A544-DEBAF6747026}"/>
+                </a:ext>
+              </a:extLst>
+            </p:cNvPr>
+            <p:cNvSpPr/>
+            <p:nvPr/>
+          </p:nvSpPr>
+          <p:spPr>
+            <a:xfrm>
+              <a:off x="20504" y="2036968"/>
+              <a:ext cx="9842500" cy="2366477"/>
+            </a:xfrm>
+            <a:prstGeom prst="roundRect">
+              <a:avLst/>
+            </a:prstGeom>
+            <a:solidFill>
+              <a:schemeClr val="bg1"/>
+            </a:solidFill>
+            <a:ln w="19050">
+              <a:solidFill>
+                <a:schemeClr val="tx1">
+                  <a:lumMod val="50000"/>
+                  <a:lumOff val="50000"/>
+                </a:schemeClr>
+              </a:solidFill>
+            </a:ln>
+          </p:spPr>
+          <p:style>
+            <a:lnRef idx="2">
+              <a:schemeClr val="accent1">
+                <a:shade val="50000"/>
+              </a:schemeClr>
+            </a:lnRef>
+            <a:fillRef idx="1">
+              <a:schemeClr val="accent1"/>
+            </a:fillRef>
+            <a:effectRef idx="0">
+              <a:schemeClr val="accent1"/>
+            </a:effectRef>
+            <a:fontRef idx="minor">
+              <a:schemeClr val="lt1"/>
+            </a:fontRef>
+          </p:style>
+          <p:txBody>
+            <a:bodyPr rot="0" spcFirstLastPara="0" vertOverflow="overflow" horzOverflow="overflow" vert="horz" wrap="square" lIns="91440" tIns="45720" rIns="91440" bIns="45720" numCol="1" spcCol="0" rtlCol="0" fromWordArt="0" anchor="ctr" anchorCtr="0" forceAA="0" compatLnSpc="1">
+              <a:prstTxWarp prst="textNoShape">
+                <a:avLst/>
+              </a:prstTxWarp>
+              <a:noAutofit/>
+            </a:bodyPr>
+            <a:lstStyle/>
+            <a:p>
+              <a:pPr algn="ctr"/>
+              <a:endParaRPr lang="zh-TW" altLang="en-US"/>
+            </a:p>
+          </p:txBody>
+        </p:sp>
+        <p:pic>
+          <p:nvPicPr>
+            <p:cNvPr id="49" name="圖片 48">
+              <a:extLst>
+                <a:ext uri="{FF2B5EF4-FFF2-40B4-BE49-F238E27FC236}">
+                  <a16:creationId xmlns:a16="http://schemas.microsoft.com/office/drawing/2014/main" id="{43039747-3351-45D4-A7D9-4A0F2F4E8023}"/>
+                </a:ext>
+              </a:extLst>
+            </p:cNvPr>
+            <p:cNvPicPr>
+              <a:picLocks noChangeAspect="1"/>
+            </p:cNvPicPr>
+            <p:nvPr/>
+          </p:nvPicPr>
+          <p:blipFill>
+            <a:blip r:embed="rId2">
+              <a:clrChange>
+                <a:clrFrom>
+                  <a:srgbClr val="FFFFFF"/>
+                </a:clrFrom>
+                <a:clrTo>
+                  <a:srgbClr val="FFFFFF">
+                    <a:alpha val="0"/>
+                  </a:srgbClr>
+                </a:clrTo>
+              </a:clrChange>
+              <a:extLst>
+                <a:ext uri="{28A0092B-C50C-407E-A947-70E740481C1C}">
+                  <a14:useLocalDpi xmlns:a14="http://schemas.microsoft.com/office/drawing/2010/main" val="0"/>
+                </a:ext>
+              </a:extLst>
+            </a:blip>
+            <a:stretch>
+              <a:fillRect/>
+            </a:stretch>
+          </p:blipFill>
+          <p:spPr>
+            <a:xfrm>
+              <a:off x="262455" y="2124158"/>
+              <a:ext cx="9458896" cy="2364724"/>
+            </a:xfrm>
+            <a:prstGeom prst="rect">
+              <a:avLst/>
+            </a:prstGeom>
+          </p:spPr>
+        </p:pic>
+        <p:pic>
+          <p:nvPicPr>
+            <p:cNvPr id="51" name="圖片 50">
+              <a:extLst>
+                <a:ext uri="{FF2B5EF4-FFF2-40B4-BE49-F238E27FC236}">
+                  <a16:creationId xmlns:a16="http://schemas.microsoft.com/office/drawing/2014/main" id="{6E627D55-FAFF-4B4D-BA11-25189DE629DC}"/>
+                </a:ext>
+              </a:extLst>
+            </p:cNvPr>
+            <p:cNvPicPr>
+              <a:picLocks noChangeAspect="1"/>
+            </p:cNvPicPr>
+            <p:nvPr/>
+          </p:nvPicPr>
+          <p:blipFill>
+            <a:blip r:embed="rId3">
+              <a:clrChange>
+                <a:clrFrom>
+                  <a:srgbClr val="FFFFFF"/>
+                </a:clrFrom>
+                <a:clrTo>
+                  <a:srgbClr val="FFFFFF">
+                    <a:alpha val="0"/>
+                  </a:srgbClr>
+                </a:clrTo>
+              </a:clrChange>
+              <a:extLst>
+                <a:ext uri="{28A0092B-C50C-407E-A947-70E740481C1C}">
+                  <a14:useLocalDpi xmlns:a14="http://schemas.microsoft.com/office/drawing/2010/main" val="0"/>
+                </a:ext>
+              </a:extLst>
+            </a:blip>
+            <a:stretch>
+              <a:fillRect/>
+            </a:stretch>
+          </p:blipFill>
+          <p:spPr>
+            <a:xfrm>
+              <a:off x="262455" y="4495451"/>
+              <a:ext cx="9458896" cy="2364724"/>
+            </a:xfrm>
+            <a:prstGeom prst="rect">
+              <a:avLst/>
+            </a:prstGeom>
+          </p:spPr>
+        </p:pic>
+        <mc:AlternateContent xmlns:mc="http://schemas.openxmlformats.org/markup-compatibility/2006">
+          <mc:Choice xmlns:a14="http://schemas.microsoft.com/office/drawing/2010/main" Requires="a14">
+            <p:sp>
+              <p:nvSpPr>
+                <p:cNvPr id="6" name="文字方塊 5">
+                  <a:extLst>
+                    <a:ext uri="{FF2B5EF4-FFF2-40B4-BE49-F238E27FC236}">
+                      <a16:creationId xmlns:a16="http://schemas.microsoft.com/office/drawing/2014/main" id="{D6A0354B-E6EA-4011-B8D8-356E01B0B0E9}"/>
+                    </a:ext>
+                  </a:extLst>
+                </p:cNvPr>
+                <p:cNvSpPr txBox="1"/>
+                <p:nvPr/>
+              </p:nvSpPr>
+              <p:spPr>
+                <a:xfrm>
+                  <a:off x="1764299" y="1218950"/>
+                  <a:ext cx="4815083" cy="498855"/>
+                </a:xfrm>
+                <a:prstGeom prst="rect">
+                  <a:avLst/>
+                </a:prstGeom>
+                <a:noFill/>
+              </p:spPr>
+              <p:txBody>
+                <a:bodyPr wrap="square" rtlCol="0">
+                  <a:spAutoFit/>
+                </a:bodyPr>
+                <a:lstStyle/>
+                <a:p>
+                  <a:pPr/>
+                  <a14:m>
+                    <m:oMathPara xmlns:m="http://schemas.openxmlformats.org/officeDocument/2006/math">
+                      <m:oMathParaPr>
+                        <m:jc m:val="centerGroup"/>
+                      </m:oMathParaPr>
+                      <m:oMath xmlns:m="http://schemas.openxmlformats.org/officeDocument/2006/math">
+                        <m:sSubSup>
+                          <m:sSubSupPr>
+                            <m:ctrlPr>
+                              <a:rPr lang="en-US" altLang="zh-TW" sz="2000" b="1" i="1">
+                                <a:latin typeface="Cambria Math" panose="02040503050406030204" pitchFamily="18" charset="0"/>
+                              </a:rPr>
+                            </m:ctrlPr>
+                          </m:sSubSupPr>
+                          <m:e>
+                            <m:r>
+                              <a:rPr lang="en-US" altLang="zh-TW" sz="2000" b="1" i="1">
+                                <a:latin typeface="Cambria Math" panose="02040503050406030204" pitchFamily="18" charset="0"/>
+                              </a:rPr>
+                              <m:t>𝑨</m:t>
+                            </m:r>
+                          </m:e>
+                          <m:sub>
+                            <m:sSub>
+                              <m:sSubPr>
+                                <m:ctrlPr>
+                                  <a:rPr lang="en-US" altLang="zh-TW" sz="2000" i="1">
+                                    <a:latin typeface="Cambria Math" panose="02040503050406030204" pitchFamily="18" charset="0"/>
+                                  </a:rPr>
+                                </m:ctrlPr>
+                              </m:sSubPr>
+                              <m:e>
+                                <m:r>
+                                  <a:rPr lang="en-US" altLang="zh-TW" sz="2000" b="1" i="1">
+                                    <a:latin typeface="Cambria Math" panose="02040503050406030204" pitchFamily="18" charset="0"/>
+                                  </a:rPr>
+                                  <m:t>𝒒</m:t>
+                                </m:r>
+                              </m:e>
+                              <m:sub>
+                                <m:r>
+                                  <a:rPr lang="en-US" altLang="zh-TW" sz="2000" i="1">
+                                    <a:latin typeface="Cambria Math" panose="02040503050406030204" pitchFamily="18" charset="0"/>
+                                  </a:rPr>
+                                  <m:t>0</m:t>
+                                </m:r>
+                              </m:sub>
+                            </m:sSub>
+                          </m:sub>
+                          <m:sup>
+                            <m:acc>
+                              <m:accPr>
+                                <m:chr m:val="̂"/>
+                                <m:ctrlPr>
+                                  <a:rPr lang="en-US" altLang="zh-TW" sz="2000" i="1">
+                                    <a:latin typeface="Cambria Math" panose="02040503050406030204" pitchFamily="18" charset="0"/>
+                                  </a:rPr>
+                                </m:ctrlPr>
+                              </m:accPr>
+                              <m:e>
+                                <m:r>
+                                  <a:rPr lang="en-US" altLang="zh-TW" sz="2000" i="1">
+                                    <a:latin typeface="Cambria Math" panose="02040503050406030204" pitchFamily="18" charset="0"/>
+                                  </a:rPr>
+                                  <m:t>𝜀</m:t>
+                                </m:r>
+                              </m:e>
+                            </m:acc>
+                            <m:r>
+                              <a:rPr lang="en-US" altLang="zh-TW" sz="2000" i="1">
+                                <a:latin typeface="Cambria Math" panose="02040503050406030204" pitchFamily="18" charset="0"/>
+                              </a:rPr>
+                              <m:t>, ℓ, </m:t>
+                            </m:r>
+                            <m:r>
+                              <a:rPr lang="en-US" altLang="zh-TW" sz="2000" i="1">
+                                <a:latin typeface="Cambria Math" panose="02040503050406030204" pitchFamily="18" charset="0"/>
+                              </a:rPr>
+                              <m:t>𝑝</m:t>
+                            </m:r>
+                            <m:r>
+                              <a:rPr lang="en-US" altLang="zh-TW" sz="2000" i="1">
+                                <a:latin typeface="Cambria Math" panose="02040503050406030204" pitchFamily="18" charset="0"/>
+                              </a:rPr>
+                              <m:t>=0</m:t>
+                            </m:r>
+                            <m:r>
+                              <a:rPr lang="en-US" altLang="zh-TW" sz="2000" b="1" i="1">
+                                <a:latin typeface="Cambria Math" panose="02040503050406030204" pitchFamily="18" charset="0"/>
+                              </a:rPr>
+                              <m:t>;</m:t>
+                            </m:r>
+                            <m:r>
+                              <a:rPr lang="en-US" altLang="zh-TW" sz="2000" i="1">
+                                <a:latin typeface="Cambria Math" panose="02040503050406030204" pitchFamily="18" charset="0"/>
+                              </a:rPr>
+                              <m:t>𝐶</m:t>
+                            </m:r>
+                          </m:sup>
+                        </m:sSubSup>
+                        <m:d>
+                          <m:dPr>
+                            <m:ctrlPr>
+                              <a:rPr lang="en-US" altLang="zh-TW" sz="2000" b="1" i="1">
+                                <a:latin typeface="Cambria Math" panose="02040503050406030204" pitchFamily="18" charset="0"/>
+                              </a:rPr>
+                            </m:ctrlPr>
+                          </m:dPr>
+                          <m:e>
+                            <m:r>
+                              <a:rPr lang="en-US" altLang="zh-TW" sz="2000" i="1">
+                                <a:latin typeface="Cambria Math" panose="02040503050406030204" pitchFamily="18" charset="0"/>
+                              </a:rPr>
+                              <m:t>𝜌</m:t>
+                            </m:r>
+                            <m:r>
+                              <a:rPr lang="en-US" altLang="zh-TW" sz="2000" b="1" i="1">
+                                <a:latin typeface="Cambria Math" panose="02040503050406030204" pitchFamily="18" charset="0"/>
+                              </a:rPr>
+                              <m:t>,</m:t>
+                            </m:r>
+                            <m:r>
+                              <a:rPr lang="en-US" altLang="zh-TW" sz="2000" i="1">
+                                <a:latin typeface="Cambria Math" panose="02040503050406030204" pitchFamily="18" charset="0"/>
+                              </a:rPr>
+                              <m:t> </m:t>
+                            </m:r>
+                            <m:r>
+                              <a:rPr lang="en-US" altLang="zh-TW" sz="2000" i="1">
+                                <a:latin typeface="Cambria Math" panose="02040503050406030204" pitchFamily="18" charset="0"/>
+                              </a:rPr>
+                              <m:t>𝜙</m:t>
+                            </m:r>
+                            <m:r>
+                              <a:rPr lang="en-US" altLang="zh-TW" sz="2000" i="1">
+                                <a:latin typeface="Cambria Math" panose="02040503050406030204" pitchFamily="18" charset="0"/>
+                              </a:rPr>
+                              <m:t>=0, </m:t>
+                            </m:r>
+                            <m:r>
+                              <a:rPr lang="en-US" altLang="zh-TW" sz="2000" i="1">
+                                <a:latin typeface="Cambria Math" panose="02040503050406030204" pitchFamily="18" charset="0"/>
+                              </a:rPr>
+                              <m:t>𝑧</m:t>
+                            </m:r>
+                            <m:r>
+                              <a:rPr lang="en-US" altLang="zh-TW" sz="2000" i="1">
+                                <a:latin typeface="Cambria Math" panose="02040503050406030204" pitchFamily="18" charset="0"/>
+                              </a:rPr>
+                              <m:t>=0</m:t>
+                            </m:r>
+                          </m:e>
+                        </m:d>
+                        <m:r>
+                          <a:rPr lang="en-US" altLang="zh-TW" sz="2000" b="1" i="1">
+                            <a:latin typeface="Cambria Math" panose="02040503050406030204" pitchFamily="18" charset="0"/>
+                          </a:rPr>
+                          <m:t>=</m:t>
+                        </m:r>
+                        <m:sSubSup>
+                          <m:sSubSupPr>
+                            <m:ctrlPr>
+                              <a:rPr lang="en-US" altLang="zh-TW" sz="2000" b="1" i="1">
+                                <a:latin typeface="Cambria Math" panose="02040503050406030204" pitchFamily="18" charset="0"/>
+                              </a:rPr>
+                            </m:ctrlPr>
+                          </m:sSubSupPr>
+                          <m:e>
+                            <m:r>
+                              <a:rPr lang="en-US" altLang="zh-TW" sz="2000" b="1" i="1">
+                                <a:latin typeface="Cambria Math" panose="02040503050406030204" pitchFamily="18" charset="0"/>
+                              </a:rPr>
+                              <m:t>𝑨</m:t>
+                            </m:r>
+                          </m:e>
+                          <m:sub>
+                            <m:r>
+                              <a:rPr lang="en-US" altLang="zh-TW" sz="2000" b="1" i="1">
+                                <a:latin typeface="Cambria Math" panose="02040503050406030204" pitchFamily="18" charset="0"/>
+                              </a:rPr>
+                              <m:t>∥</m:t>
+                            </m:r>
+                          </m:sub>
+                          <m:sup>
+                            <m:r>
+                              <a:rPr lang="en-US" altLang="zh-TW" sz="2000" b="1" i="1">
+                                <a:latin typeface="Cambria Math" panose="02040503050406030204" pitchFamily="18" charset="0"/>
+                              </a:rPr>
+                              <m:t>ℓ</m:t>
+                            </m:r>
+                          </m:sup>
+                        </m:sSubSup>
+                        <m:acc>
+                          <m:accPr>
+                            <m:chr m:val="̂"/>
+                            <m:ctrlPr>
+                              <a:rPr lang="en-US" altLang="zh-TW" sz="2000" i="1">
+                                <a:latin typeface="Cambria Math" panose="02040503050406030204" pitchFamily="18" charset="0"/>
+                              </a:rPr>
+                            </m:ctrlPr>
+                          </m:accPr>
+                          <m:e>
+                            <m:r>
+                              <a:rPr lang="en-US" altLang="zh-TW" sz="2000" i="1">
+                                <a:latin typeface="Cambria Math" panose="02040503050406030204" pitchFamily="18" charset="0"/>
+                              </a:rPr>
+                              <m:t>𝜀</m:t>
+                            </m:r>
+                          </m:e>
+                        </m:acc>
+                        <m:r>
+                          <a:rPr lang="en-US" altLang="zh-TW" sz="2000" i="1">
+                            <a:latin typeface="Cambria Math" panose="02040503050406030204" pitchFamily="18" charset="0"/>
+                          </a:rPr>
+                          <m:t>+</m:t>
+                        </m:r>
+                        <m:sSubSup>
+                          <m:sSubSupPr>
+                            <m:ctrlPr>
+                              <a:rPr lang="en-US" altLang="zh-TW" sz="2000" i="1">
+                                <a:latin typeface="Cambria Math" panose="02040503050406030204" pitchFamily="18" charset="0"/>
+                              </a:rPr>
+                            </m:ctrlPr>
+                          </m:sSubSupPr>
+                          <m:e>
+                            <m:r>
+                              <a:rPr lang="en-US" altLang="zh-TW" sz="2000" b="1" i="1">
+                                <a:latin typeface="Cambria Math" panose="02040503050406030204" pitchFamily="18" charset="0"/>
+                              </a:rPr>
+                              <m:t>𝑨</m:t>
+                            </m:r>
+                          </m:e>
+                          <m:sub>
+                            <m:r>
+                              <a:rPr lang="en-US" altLang="zh-TW" sz="2000" b="1" i="1">
+                                <a:latin typeface="Cambria Math" panose="02040503050406030204" pitchFamily="18" charset="0"/>
+                              </a:rPr>
+                              <m:t>𝒛</m:t>
+                            </m:r>
+                          </m:sub>
+                          <m:sup>
+                            <m:acc>
+                              <m:accPr>
+                                <m:chr m:val="̂"/>
+                                <m:ctrlPr>
+                                  <a:rPr lang="en-US" altLang="zh-TW" sz="2000" i="1">
+                                    <a:latin typeface="Cambria Math" panose="02040503050406030204" pitchFamily="18" charset="0"/>
+                                  </a:rPr>
+                                </m:ctrlPr>
+                              </m:accPr>
+                              <m:e>
+                                <m:r>
+                                  <a:rPr lang="en-US" altLang="zh-TW" sz="2000" i="1">
+                                    <a:latin typeface="Cambria Math" panose="02040503050406030204" pitchFamily="18" charset="0"/>
+                                  </a:rPr>
+                                  <m:t>𝜀</m:t>
+                                </m:r>
+                              </m:e>
+                            </m:acc>
+                            <m:r>
+                              <a:rPr lang="en-US" altLang="zh-TW" sz="2000" i="1">
+                                <a:latin typeface="Cambria Math" panose="02040503050406030204" pitchFamily="18" charset="0"/>
+                              </a:rPr>
+                              <m:t>, ℓ</m:t>
+                            </m:r>
+                          </m:sup>
+                        </m:sSubSup>
+                        <m:acc>
+                          <m:accPr>
+                            <m:chr m:val="̂"/>
+                            <m:ctrlPr>
+                              <a:rPr lang="en-US" altLang="zh-TW" sz="2000" i="1">
+                                <a:latin typeface="Cambria Math" panose="02040503050406030204" pitchFamily="18" charset="0"/>
+                              </a:rPr>
+                            </m:ctrlPr>
+                          </m:accPr>
+                          <m:e>
+                            <m:r>
+                              <a:rPr lang="en-US" altLang="zh-TW" sz="2000" i="1">
+                                <a:latin typeface="Cambria Math" panose="02040503050406030204" pitchFamily="18" charset="0"/>
+                              </a:rPr>
+                              <m:t>𝑧</m:t>
+                            </m:r>
+                          </m:e>
+                        </m:acc>
+                      </m:oMath>
+                    </m:oMathPara>
+                  </a14:m>
+                  <a:endParaRPr lang="zh-TW" altLang="en-US" b="1" dirty="0"/>
+                </a:p>
+              </p:txBody>
+            </p:sp>
+          </mc:Choice>
+          <mc:Fallback>
+            <p:sp>
+              <p:nvSpPr>
+                <p:cNvPr id="6" name="文字方塊 5">
+                  <a:extLst>
+                    <a:ext uri="{FF2B5EF4-FFF2-40B4-BE49-F238E27FC236}">
+                      <a16:creationId xmlns:a16="http://schemas.microsoft.com/office/drawing/2014/main" id="{D6A0354B-E6EA-4011-B8D8-356E01B0B0E9}"/>
+                    </a:ext>
+                  </a:extLst>
+                </p:cNvPr>
+                <p:cNvSpPr txBox="1">
+                  <a:spLocks noRot="1" noChangeAspect="1" noMove="1" noResize="1" noEditPoints="1" noAdjustHandles="1" noChangeArrowheads="1" noChangeShapeType="1" noTextEdit="1"/>
+                </p:cNvSpPr>
+                <p:nvPr/>
+              </p:nvSpPr>
+              <p:spPr>
+                <a:xfrm>
+                  <a:off x="1764299" y="1218950"/>
+                  <a:ext cx="4815083" cy="498855"/>
+                </a:xfrm>
+                <a:prstGeom prst="rect">
+                  <a:avLst/>
+                </a:prstGeom>
+                <a:blipFill>
+                  <a:blip r:embed="rId4"/>
+                  <a:stretch>
+                    <a:fillRect t="-3659" r="-3291" b="-6098"/>
+                  </a:stretch>
+                </a:blipFill>
+              </p:spPr>
+              <p:txBody>
+                <a:bodyPr/>
+                <a:lstStyle/>
+                <a:p>
+                  <a:r>
+                    <a:rPr lang="zh-TW" altLang="en-US">
+                      <a:noFill/>
+                    </a:rPr>
+                    <a:t> </a:t>
+                  </a:r>
+                </a:p>
+              </p:txBody>
+            </p:sp>
+          </mc:Fallback>
+        </mc:AlternateContent>
+        <p:grpSp>
+          <p:nvGrpSpPr>
+            <p:cNvPr id="22" name="群組 21">
+              <a:extLst>
+                <a:ext uri="{FF2B5EF4-FFF2-40B4-BE49-F238E27FC236}">
+                  <a16:creationId xmlns:a16="http://schemas.microsoft.com/office/drawing/2014/main" id="{7F747199-E3E7-4C71-BAA6-01CDE0E71DB8}"/>
+                </a:ext>
+              </a:extLst>
+            </p:cNvPr>
+            <p:cNvGrpSpPr/>
+            <p:nvPr/>
+          </p:nvGrpSpPr>
+          <p:grpSpPr>
+            <a:xfrm>
+              <a:off x="6606158" y="723901"/>
+              <a:ext cx="1750442" cy="1248852"/>
+              <a:chOff x="6039273" y="-281233"/>
+              <a:chExt cx="1718499" cy="1120593"/>
+            </a:xfrm>
+          </p:grpSpPr>
+          <p:pic>
+            <p:nvPicPr>
+              <p:cNvPr id="7" name="圖片 6">
                 <a:extLst>
                   <a:ext uri="{FF2B5EF4-FFF2-40B4-BE49-F238E27FC236}">
-                    <a16:creationId xmlns:a16="http://schemas.microsoft.com/office/drawing/2014/main" id="{D8C96163-9767-4688-A88E-C1794AF3BBF5}"/>
+                    <a16:creationId xmlns:a16="http://schemas.microsoft.com/office/drawing/2014/main" id="{E53272F7-A213-44CF-8A55-4DE640703315}"/>
                   </a:ext>
                 </a:extLst>
               </p:cNvPr>
-              <p:cNvSpPr txBox="1"/>
+              <p:cNvPicPr>
+                <a:picLocks noChangeAspect="1"/>
+              </p:cNvPicPr>
               <p:nvPr/>
-            </p:nvSpPr>
+            </p:nvPicPr>
+            <p:blipFill>
+              <a:blip r:embed="rId5"/>
+              <a:stretch>
+                <a:fillRect/>
+              </a:stretch>
+            </p:blipFill>
             <p:spPr>
               <a:xfrm>
-                <a:off x="3881501" y="1543537"/>
-                <a:ext cx="946882" cy="369332"/>
+                <a:off x="6126181" y="-139026"/>
+                <a:ext cx="534369" cy="850550"/>
               </a:xfrm>
               <a:prstGeom prst="rect">
                 <a:avLst/>
               </a:prstGeom>
-              <a:noFill/>
             </p:spPr>
-            <p:txBody>
-              <a:bodyPr wrap="square" rtlCol="0">
-                <a:spAutoFit/>
-              </a:bodyPr>
-              <a:lstStyle/>
-              <a:p>
-                <a:pPr/>
-                <a14:m>
-                  <m:oMathPara xmlns:m="http://schemas.openxmlformats.org/officeDocument/2006/math">
-                    <m:oMathParaPr>
-                      <m:jc m:val="centerGroup"/>
-                    </m:oMathParaPr>
-                    <m:oMath xmlns:m="http://schemas.openxmlformats.org/officeDocument/2006/math">
-                      <m:r>
-                        <a:rPr lang="en-US" altLang="zh-TW" i="1">
-                          <a:latin typeface="Cambria Math" panose="02040503050406030204" pitchFamily="18" charset="0"/>
-                        </a:rPr>
-                        <m:t>ℓ=0</m:t>
-                      </m:r>
-                    </m:oMath>
-                  </m:oMathPara>
-                </a14:m>
-                <a:endParaRPr lang="zh-TW" altLang="en-US" dirty="0"/>
-              </a:p>
-            </p:txBody>
-          </p:sp>
-        </mc:Choice>
-        <mc:Fallback>
+          </p:pic>
+          <mc:AlternateContent xmlns:mc="http://schemas.openxmlformats.org/markup-compatibility/2006">
+            <mc:Choice xmlns:a14="http://schemas.microsoft.com/office/drawing/2010/main" Requires="a14">
+              <p:sp>
+                <p:nvSpPr>
+                  <p:cNvPr id="8" name="文字方塊 7">
+                    <a:extLst>
+                      <a:ext uri="{FF2B5EF4-FFF2-40B4-BE49-F238E27FC236}">
+                        <a16:creationId xmlns:a16="http://schemas.microsoft.com/office/drawing/2014/main" id="{865164BF-B68E-473A-A921-4C3623AE9C50}"/>
+                      </a:ext>
+                    </a:extLst>
+                  </p:cNvPr>
+                  <p:cNvSpPr txBox="1"/>
+                  <p:nvPr/>
+                </p:nvSpPr>
+                <p:spPr>
+                  <a:xfrm>
+                    <a:off x="6701354" y="-281233"/>
+                    <a:ext cx="990700" cy="1063763"/>
+                  </a:xfrm>
+                  <a:prstGeom prst="rect">
+                    <a:avLst/>
+                  </a:prstGeom>
+                  <a:noFill/>
+                </p:spPr>
+                <p:txBody>
+                  <a:bodyPr wrap="square" rtlCol="0">
+                    <a:spAutoFit/>
+                  </a:bodyPr>
+                  <a:lstStyle/>
+                  <a:p>
+                    <a:pPr algn="ctr"/>
+                    <a14:m>
+                      <m:oMathPara xmlns:m="http://schemas.openxmlformats.org/officeDocument/2006/math">
+                        <m:oMathParaPr>
+                          <m:jc m:val="centerGroup"/>
+                        </m:oMathParaPr>
+                        <m:oMath xmlns:m="http://schemas.openxmlformats.org/officeDocument/2006/math">
+                          <m:d>
+                            <m:dPr>
+                              <m:begChr m:val="|"/>
+                              <m:endChr m:val="|"/>
+                              <m:ctrlPr>
+                                <a:rPr lang="en-US" altLang="zh-TW" sz="2000" i="1">
+                                  <a:latin typeface="Cambria Math" panose="02040503050406030204" pitchFamily="18" charset="0"/>
+                                </a:rPr>
+                              </m:ctrlPr>
+                            </m:dPr>
+                            <m:e>
+                              <m:sSubSup>
+                                <m:sSubSupPr>
+                                  <m:ctrlPr>
+                                    <a:rPr lang="en-US" altLang="zh-TW" sz="2000" b="1" i="1">
+                                      <a:latin typeface="Cambria Math" panose="02040503050406030204" pitchFamily="18" charset="0"/>
+                                    </a:rPr>
+                                  </m:ctrlPr>
+                                </m:sSubSupPr>
+                                <m:e>
+                                  <m:r>
+                                    <a:rPr lang="en-US" altLang="zh-TW" sz="2000" b="1" i="1">
+                                      <a:latin typeface="Cambria Math" panose="02040503050406030204" pitchFamily="18" charset="0"/>
+                                    </a:rPr>
+                                    <m:t>𝑨</m:t>
+                                  </m:r>
+                                </m:e>
+                                <m:sub>
+                                  <m:r>
+                                    <a:rPr lang="en-US" altLang="zh-TW" sz="2000" b="1" i="1">
+                                      <a:latin typeface="Cambria Math" panose="02040503050406030204" pitchFamily="18" charset="0"/>
+                                    </a:rPr>
+                                    <m:t>∥</m:t>
+                                  </m:r>
+                                </m:sub>
+                                <m:sup>
+                                  <m:r>
+                                    <a:rPr lang="en-US" altLang="zh-TW" sz="2000" b="1" i="1">
+                                      <a:latin typeface="Cambria Math" panose="02040503050406030204" pitchFamily="18" charset="0"/>
+                                    </a:rPr>
+                                    <m:t>ℓ</m:t>
+                                  </m:r>
+                                </m:sup>
+                              </m:sSubSup>
+                            </m:e>
+                          </m:d>
+                        </m:oMath>
+                      </m:oMathPara>
+                    </a14:m>
+                    <a:endParaRPr lang="en-US" altLang="zh-TW" sz="2000" i="1" dirty="0">
+                      <a:latin typeface="Cambria Math" panose="02040503050406030204" pitchFamily="18" charset="0"/>
+                    </a:endParaRPr>
+                  </a:p>
+                  <a:p>
+                    <a:pPr algn="ctr"/>
+                    <a14:m>
+                      <m:oMathPara xmlns:m="http://schemas.openxmlformats.org/officeDocument/2006/math">
+                        <m:oMathParaPr>
+                          <m:jc m:val="centerGroup"/>
+                        </m:oMathParaPr>
+                        <m:oMath xmlns:m="http://schemas.openxmlformats.org/officeDocument/2006/math">
+                          <m:d>
+                            <m:dPr>
+                              <m:begChr m:val="|"/>
+                              <m:endChr m:val="|"/>
+                              <m:ctrlPr>
+                                <a:rPr lang="en-US" altLang="zh-TW" sz="2000" i="1">
+                                  <a:latin typeface="Cambria Math" panose="02040503050406030204" pitchFamily="18" charset="0"/>
+                                </a:rPr>
+                              </m:ctrlPr>
+                            </m:dPr>
+                            <m:e>
+                              <m:sSubSup>
+                                <m:sSubSupPr>
+                                  <m:ctrlPr>
+                                    <a:rPr lang="en-US" altLang="zh-TW" sz="2000" i="1">
+                                      <a:latin typeface="Cambria Math" panose="02040503050406030204" pitchFamily="18" charset="0"/>
+                                    </a:rPr>
+                                  </m:ctrlPr>
+                                </m:sSubSupPr>
+                                <m:e>
+                                  <m:r>
+                                    <a:rPr lang="en-US" altLang="zh-TW" sz="2000" b="1" i="1">
+                                      <a:latin typeface="Cambria Math" panose="02040503050406030204" pitchFamily="18" charset="0"/>
+                                    </a:rPr>
+                                    <m:t>𝑨</m:t>
+                                  </m:r>
+                                </m:e>
+                                <m:sub>
+                                  <m:r>
+                                    <a:rPr lang="en-US" altLang="zh-TW" sz="2000" b="1" i="1">
+                                      <a:latin typeface="Cambria Math" panose="02040503050406030204" pitchFamily="18" charset="0"/>
+                                    </a:rPr>
+                                    <m:t>𝒛</m:t>
+                                  </m:r>
+                                </m:sub>
+                                <m:sup>
+                                  <m:r>
+                                    <a:rPr lang="en-US" altLang="zh-TW" sz="2000" i="1">
+                                      <a:latin typeface="Cambria Math" panose="02040503050406030204" pitchFamily="18" charset="0"/>
+                                    </a:rPr>
+                                    <m:t>𝜎</m:t>
+                                  </m:r>
+                                  <m:r>
+                                    <a:rPr lang="en-US" altLang="zh-TW" sz="2000" i="1">
+                                      <a:latin typeface="Cambria Math" panose="02040503050406030204" pitchFamily="18" charset="0"/>
+                                    </a:rPr>
+                                    <m:t>=1, ℓ</m:t>
+                                  </m:r>
+                                </m:sup>
+                              </m:sSubSup>
+                            </m:e>
+                          </m:d>
+                        </m:oMath>
+                      </m:oMathPara>
+                    </a14:m>
+                    <a:endParaRPr lang="en-US" altLang="zh-TW" sz="2000" dirty="0"/>
+                  </a:p>
+                  <a:p>
+                    <a:pPr algn="ctr"/>
+                    <a14:m>
+                      <m:oMathPara xmlns:m="http://schemas.openxmlformats.org/officeDocument/2006/math">
+                        <m:oMathParaPr>
+                          <m:jc m:val="centerGroup"/>
+                        </m:oMathParaPr>
+                        <m:oMath xmlns:m="http://schemas.openxmlformats.org/officeDocument/2006/math">
+                          <m:d>
+                            <m:dPr>
+                              <m:begChr m:val="|"/>
+                              <m:endChr m:val="|"/>
+                              <m:ctrlPr>
+                                <a:rPr lang="en-US" altLang="zh-TW" sz="2000" i="1">
+                                  <a:latin typeface="Cambria Math" panose="02040503050406030204" pitchFamily="18" charset="0"/>
+                                </a:rPr>
+                              </m:ctrlPr>
+                            </m:dPr>
+                            <m:e>
+                              <m:sSubSup>
+                                <m:sSubSupPr>
+                                  <m:ctrlPr>
+                                    <a:rPr lang="en-US" altLang="zh-TW" sz="2000" i="1">
+                                      <a:latin typeface="Cambria Math" panose="02040503050406030204" pitchFamily="18" charset="0"/>
+                                    </a:rPr>
+                                  </m:ctrlPr>
+                                </m:sSubSupPr>
+                                <m:e>
+                                  <m:r>
+                                    <a:rPr lang="en-US" altLang="zh-TW" sz="2000" b="1" i="1">
+                                      <a:latin typeface="Cambria Math" panose="02040503050406030204" pitchFamily="18" charset="0"/>
+                                    </a:rPr>
+                                    <m:t>𝑨</m:t>
+                                  </m:r>
+                                </m:e>
+                                <m:sub>
+                                  <m:r>
+                                    <a:rPr lang="en-US" altLang="zh-TW" sz="2000" b="1" i="1">
+                                      <a:latin typeface="Cambria Math" panose="02040503050406030204" pitchFamily="18" charset="0"/>
+                                    </a:rPr>
+                                    <m:t>𝒛</m:t>
+                                  </m:r>
+                                </m:sub>
+                                <m:sup>
+                                  <m:r>
+                                    <a:rPr lang="en-US" altLang="zh-TW" sz="2000" i="1">
+                                      <a:latin typeface="Cambria Math" panose="02040503050406030204" pitchFamily="18" charset="0"/>
+                                    </a:rPr>
+                                    <m:t>𝜎</m:t>
+                                  </m:r>
+                                  <m:r>
+                                    <a:rPr lang="en-US" altLang="zh-TW" sz="2000" i="1">
+                                      <a:latin typeface="Cambria Math" panose="02040503050406030204" pitchFamily="18" charset="0"/>
+                                    </a:rPr>
+                                    <m:t>=−1, ℓ</m:t>
+                                  </m:r>
+                                </m:sup>
+                              </m:sSubSup>
+                            </m:e>
+                          </m:d>
+                        </m:oMath>
+                      </m:oMathPara>
+                    </a14:m>
+                    <a:endParaRPr lang="zh-TW" altLang="en-US" b="1" dirty="0"/>
+                  </a:p>
+                </p:txBody>
+              </p:sp>
+            </mc:Choice>
+            <mc:Fallback>
+              <p:sp>
+                <p:nvSpPr>
+                  <p:cNvPr id="8" name="文字方塊 7">
+                    <a:extLst>
+                      <a:ext uri="{FF2B5EF4-FFF2-40B4-BE49-F238E27FC236}">
+                        <a16:creationId xmlns:a16="http://schemas.microsoft.com/office/drawing/2014/main" id="{865164BF-B68E-473A-A921-4C3623AE9C50}"/>
+                      </a:ext>
+                    </a:extLst>
+                  </p:cNvPr>
+                  <p:cNvSpPr txBox="1">
+                    <a:spLocks noRot="1" noChangeAspect="1" noMove="1" noResize="1" noEditPoints="1" noAdjustHandles="1" noChangeArrowheads="1" noChangeShapeType="1" noTextEdit="1"/>
+                  </p:cNvSpPr>
+                  <p:nvPr/>
+                </p:nvSpPr>
+                <p:spPr>
+                  <a:xfrm>
+                    <a:off x="6701354" y="-281233"/>
+                    <a:ext cx="990700" cy="1063763"/>
+                  </a:xfrm>
+                  <a:prstGeom prst="rect">
+                    <a:avLst/>
+                  </a:prstGeom>
+                  <a:blipFill>
+                    <a:blip r:embed="rId6"/>
+                    <a:stretch>
+                      <a:fillRect l="-1807"/>
+                    </a:stretch>
+                  </a:blipFill>
+                </p:spPr>
+                <p:txBody>
+                  <a:bodyPr/>
+                  <a:lstStyle/>
+                  <a:p>
+                    <a:r>
+                      <a:rPr lang="zh-TW" altLang="en-US">
+                        <a:noFill/>
+                      </a:rPr>
+                      <a:t> </a:t>
+                    </a:r>
+                  </a:p>
+                </p:txBody>
+              </p:sp>
+            </mc:Fallback>
+          </mc:AlternateContent>
           <p:sp>
             <p:nvSpPr>
-              <p:cNvPr id="11" name="文字方塊 10">
+              <p:cNvPr id="10" name="矩形: 圓角 9">
                 <a:extLst>
                   <a:ext uri="{FF2B5EF4-FFF2-40B4-BE49-F238E27FC236}">
-                    <a16:creationId xmlns:a16="http://schemas.microsoft.com/office/drawing/2014/main" id="{D8C96163-9767-4688-A88E-C1794AF3BBF5}"/>
-                  </a:ext>
-                </a:extLst>
-              </p:cNvPr>
-              <p:cNvSpPr txBox="1">
-                <a:spLocks noRot="1" noChangeAspect="1" noMove="1" noResize="1" noEditPoints="1" noAdjustHandles="1" noChangeArrowheads="1" noChangeShapeType="1" noTextEdit="1"/>
-              </p:cNvSpPr>
-              <p:nvPr/>
-            </p:nvSpPr>
-            <p:spPr>
-              <a:xfrm>
-                <a:off x="3881501" y="1543537"/>
-                <a:ext cx="946882" cy="369332"/>
-              </a:xfrm>
-              <a:prstGeom prst="rect">
-                <a:avLst/>
-              </a:prstGeom>
-              <a:blipFill>
-                <a:blip r:embed="rId5"/>
-                <a:stretch>
-                  <a:fillRect/>
-                </a:stretch>
-              </a:blipFill>
-            </p:spPr>
-            <p:txBody>
-              <a:bodyPr/>
-              <a:lstStyle/>
-              <a:p>
-                <a:r>
-                  <a:rPr lang="zh-TW" altLang="en-US">
-                    <a:noFill/>
-                  </a:rPr>
-                  <a:t> </a:t>
-                </a:r>
-              </a:p>
-            </p:txBody>
-          </p:sp>
-        </mc:Fallback>
-      </mc:AlternateContent>
-      <mc:AlternateContent xmlns:mc="http://schemas.openxmlformats.org/markup-compatibility/2006">
-        <mc:Choice xmlns:a14="http://schemas.microsoft.com/office/drawing/2010/main" Requires="a14">
-          <p:sp>
-            <p:nvSpPr>
-              <p:cNvPr id="14" name="文字方塊 13">
-                <a:extLst>
-                  <a:ext uri="{FF2B5EF4-FFF2-40B4-BE49-F238E27FC236}">
-                    <a16:creationId xmlns:a16="http://schemas.microsoft.com/office/drawing/2014/main" id="{3D28BAA9-20DD-40ED-A46F-E45991C2EDCA}"/>
-                  </a:ext>
-                </a:extLst>
-              </p:cNvPr>
-              <p:cNvSpPr txBox="1"/>
-              <p:nvPr/>
-            </p:nvSpPr>
-            <p:spPr>
-              <a:xfrm>
-                <a:off x="6856734" y="1543537"/>
-                <a:ext cx="946882" cy="369332"/>
-              </a:xfrm>
-              <a:prstGeom prst="rect">
-                <a:avLst/>
-              </a:prstGeom>
-              <a:noFill/>
-            </p:spPr>
-            <p:txBody>
-              <a:bodyPr wrap="square" rtlCol="0">
-                <a:spAutoFit/>
-              </a:bodyPr>
-              <a:lstStyle/>
-              <a:p>
-                <a:pPr/>
-                <a14:m>
-                  <m:oMathPara xmlns:m="http://schemas.openxmlformats.org/officeDocument/2006/math">
-                    <m:oMathParaPr>
-                      <m:jc m:val="centerGroup"/>
-                    </m:oMathParaPr>
-                    <m:oMath xmlns:m="http://schemas.openxmlformats.org/officeDocument/2006/math">
-                      <m:r>
-                        <a:rPr lang="en-US" altLang="zh-TW" i="1">
-                          <a:latin typeface="Cambria Math" panose="02040503050406030204" pitchFamily="18" charset="0"/>
-                        </a:rPr>
-                        <m:t>ℓ=2</m:t>
-                      </m:r>
-                    </m:oMath>
-                  </m:oMathPara>
-                </a14:m>
-                <a:endParaRPr lang="zh-TW" altLang="en-US" dirty="0"/>
-              </a:p>
-            </p:txBody>
-          </p:sp>
-        </mc:Choice>
-        <mc:Fallback>
-          <p:sp>
-            <p:nvSpPr>
-              <p:cNvPr id="14" name="文字方塊 13">
-                <a:extLst>
-                  <a:ext uri="{FF2B5EF4-FFF2-40B4-BE49-F238E27FC236}">
-                    <a16:creationId xmlns:a16="http://schemas.microsoft.com/office/drawing/2014/main" id="{3D28BAA9-20DD-40ED-A46F-E45991C2EDCA}"/>
-                  </a:ext>
-                </a:extLst>
-              </p:cNvPr>
-              <p:cNvSpPr txBox="1">
-                <a:spLocks noRot="1" noChangeAspect="1" noMove="1" noResize="1" noEditPoints="1" noAdjustHandles="1" noChangeArrowheads="1" noChangeShapeType="1" noTextEdit="1"/>
-              </p:cNvSpPr>
-              <p:nvPr/>
-            </p:nvSpPr>
-            <p:spPr>
-              <a:xfrm>
-                <a:off x="6856734" y="1543537"/>
-                <a:ext cx="946882" cy="369332"/>
-              </a:xfrm>
-              <a:prstGeom prst="rect">
-                <a:avLst/>
-              </a:prstGeom>
-              <a:blipFill>
-                <a:blip r:embed="rId6"/>
-                <a:stretch>
-                  <a:fillRect/>
-                </a:stretch>
-              </a:blipFill>
-            </p:spPr>
-            <p:txBody>
-              <a:bodyPr/>
-              <a:lstStyle/>
-              <a:p>
-                <a:r>
-                  <a:rPr lang="zh-TW" altLang="en-US">
-                    <a:noFill/>
-                  </a:rPr>
-                  <a:t> </a:t>
-                </a:r>
-              </a:p>
-            </p:txBody>
-          </p:sp>
-        </mc:Fallback>
-      </mc:AlternateContent>
-      <mc:AlternateContent xmlns:mc="http://schemas.openxmlformats.org/markup-compatibility/2006">
-        <mc:Choice xmlns:a14="http://schemas.microsoft.com/office/drawing/2010/main" Requires="a14">
-          <p:sp>
-            <p:nvSpPr>
-              <p:cNvPr id="15" name="文字方塊 14">
-                <a:extLst>
-                  <a:ext uri="{FF2B5EF4-FFF2-40B4-BE49-F238E27FC236}">
-                    <a16:creationId xmlns:a16="http://schemas.microsoft.com/office/drawing/2014/main" id="{994AA1D4-41BC-4D85-814F-70CD2F0BDD39}"/>
-                  </a:ext>
-                </a:extLst>
-              </p:cNvPr>
-              <p:cNvSpPr txBox="1"/>
-              <p:nvPr/>
-            </p:nvSpPr>
-            <p:spPr>
-              <a:xfrm>
-                <a:off x="5369118" y="1543537"/>
-                <a:ext cx="946882" cy="369332"/>
-              </a:xfrm>
-              <a:prstGeom prst="rect">
-                <a:avLst/>
-              </a:prstGeom>
-              <a:noFill/>
-            </p:spPr>
-            <p:txBody>
-              <a:bodyPr wrap="square" rtlCol="0">
-                <a:spAutoFit/>
-              </a:bodyPr>
-              <a:lstStyle/>
-              <a:p>
-                <a:pPr/>
-                <a14:m>
-                  <m:oMathPara xmlns:m="http://schemas.openxmlformats.org/officeDocument/2006/math">
-                    <m:oMathParaPr>
-                      <m:jc m:val="centerGroup"/>
-                    </m:oMathParaPr>
-                    <m:oMath xmlns:m="http://schemas.openxmlformats.org/officeDocument/2006/math">
-                      <m:r>
-                        <a:rPr lang="en-US" altLang="zh-TW" i="1">
-                          <a:latin typeface="Cambria Math" panose="02040503050406030204" pitchFamily="18" charset="0"/>
-                        </a:rPr>
-                        <m:t>ℓ=1</m:t>
-                      </m:r>
-                    </m:oMath>
-                  </m:oMathPara>
-                </a14:m>
-                <a:endParaRPr lang="zh-TW" altLang="en-US" dirty="0"/>
-              </a:p>
-            </p:txBody>
-          </p:sp>
-        </mc:Choice>
-        <mc:Fallback>
-          <p:sp>
-            <p:nvSpPr>
-              <p:cNvPr id="15" name="文字方塊 14">
-                <a:extLst>
-                  <a:ext uri="{FF2B5EF4-FFF2-40B4-BE49-F238E27FC236}">
-                    <a16:creationId xmlns:a16="http://schemas.microsoft.com/office/drawing/2014/main" id="{994AA1D4-41BC-4D85-814F-70CD2F0BDD39}"/>
-                  </a:ext>
-                </a:extLst>
-              </p:cNvPr>
-              <p:cNvSpPr txBox="1">
-                <a:spLocks noRot="1" noChangeAspect="1" noMove="1" noResize="1" noEditPoints="1" noAdjustHandles="1" noChangeArrowheads="1" noChangeShapeType="1" noTextEdit="1"/>
-              </p:cNvSpPr>
-              <p:nvPr/>
-            </p:nvSpPr>
-            <p:spPr>
-              <a:xfrm>
-                <a:off x="5369118" y="1543537"/>
-                <a:ext cx="946882" cy="369332"/>
-              </a:xfrm>
-              <a:prstGeom prst="rect">
-                <a:avLst/>
-              </a:prstGeom>
-              <a:blipFill>
-                <a:blip r:embed="rId7"/>
-                <a:stretch>
-                  <a:fillRect/>
-                </a:stretch>
-              </a:blipFill>
-            </p:spPr>
-            <p:txBody>
-              <a:bodyPr/>
-              <a:lstStyle/>
-              <a:p>
-                <a:r>
-                  <a:rPr lang="zh-TW" altLang="en-US">
-                    <a:noFill/>
-                  </a:rPr>
-                  <a:t> </a:t>
-                </a:r>
-              </a:p>
-            </p:txBody>
-          </p:sp>
-        </mc:Fallback>
-      </mc:AlternateContent>
-      <mc:AlternateContent xmlns:mc="http://schemas.openxmlformats.org/markup-compatibility/2006">
-        <mc:Choice xmlns:a14="http://schemas.microsoft.com/office/drawing/2010/main" Requires="a14">
-          <p:sp>
-            <p:nvSpPr>
-              <p:cNvPr id="16" name="文字方塊 15">
-                <a:extLst>
-                  <a:ext uri="{FF2B5EF4-FFF2-40B4-BE49-F238E27FC236}">
-                    <a16:creationId xmlns:a16="http://schemas.microsoft.com/office/drawing/2014/main" id="{2117F2F0-7B2F-4A91-A6BA-E5D10798CAEA}"/>
-                  </a:ext>
-                </a:extLst>
-              </p:cNvPr>
-              <p:cNvSpPr txBox="1"/>
-              <p:nvPr/>
-            </p:nvSpPr>
-            <p:spPr>
-              <a:xfrm>
-                <a:off x="2393885" y="1543537"/>
-                <a:ext cx="946882" cy="369332"/>
-              </a:xfrm>
-              <a:prstGeom prst="rect">
-                <a:avLst/>
-              </a:prstGeom>
-              <a:noFill/>
-            </p:spPr>
-            <p:txBody>
-              <a:bodyPr wrap="square" rtlCol="0">
-                <a:spAutoFit/>
-              </a:bodyPr>
-              <a:lstStyle/>
-              <a:p>
-                <a:pPr/>
-                <a14:m>
-                  <m:oMathPara xmlns:m="http://schemas.openxmlformats.org/officeDocument/2006/math">
-                    <m:oMathParaPr>
-                      <m:jc m:val="centerGroup"/>
-                    </m:oMathParaPr>
-                    <m:oMath xmlns:m="http://schemas.openxmlformats.org/officeDocument/2006/math">
-                      <m:r>
-                        <a:rPr lang="en-US" altLang="zh-TW" i="1">
-                          <a:latin typeface="Cambria Math" panose="02040503050406030204" pitchFamily="18" charset="0"/>
-                        </a:rPr>
-                        <m:t>ℓ=−1</m:t>
-                      </m:r>
-                    </m:oMath>
-                  </m:oMathPara>
-                </a14:m>
-                <a:endParaRPr lang="zh-TW" altLang="en-US" dirty="0"/>
-              </a:p>
-            </p:txBody>
-          </p:sp>
-        </mc:Choice>
-        <mc:Fallback>
-          <p:sp>
-            <p:nvSpPr>
-              <p:cNvPr id="16" name="文字方塊 15">
-                <a:extLst>
-                  <a:ext uri="{FF2B5EF4-FFF2-40B4-BE49-F238E27FC236}">
-                    <a16:creationId xmlns:a16="http://schemas.microsoft.com/office/drawing/2014/main" id="{2117F2F0-7B2F-4A91-A6BA-E5D10798CAEA}"/>
-                  </a:ext>
-                </a:extLst>
-              </p:cNvPr>
-              <p:cNvSpPr txBox="1">
-                <a:spLocks noRot="1" noChangeAspect="1" noMove="1" noResize="1" noEditPoints="1" noAdjustHandles="1" noChangeArrowheads="1" noChangeShapeType="1" noTextEdit="1"/>
-              </p:cNvSpPr>
-              <p:nvPr/>
-            </p:nvSpPr>
-            <p:spPr>
-              <a:xfrm>
-                <a:off x="2393885" y="1543537"/>
-                <a:ext cx="946882" cy="369332"/>
-              </a:xfrm>
-              <a:prstGeom prst="rect">
-                <a:avLst/>
-              </a:prstGeom>
-              <a:blipFill>
-                <a:blip r:embed="rId8"/>
-                <a:stretch>
-                  <a:fillRect/>
-                </a:stretch>
-              </a:blipFill>
-            </p:spPr>
-            <p:txBody>
-              <a:bodyPr/>
-              <a:lstStyle/>
-              <a:p>
-                <a:r>
-                  <a:rPr lang="zh-TW" altLang="en-US">
-                    <a:noFill/>
-                  </a:rPr>
-                  <a:t> </a:t>
-                </a:r>
-              </a:p>
-            </p:txBody>
-          </p:sp>
-        </mc:Fallback>
-      </mc:AlternateContent>
-      <mc:AlternateContent xmlns:mc="http://schemas.openxmlformats.org/markup-compatibility/2006">
-        <mc:Choice xmlns:a14="http://schemas.microsoft.com/office/drawing/2010/main" Requires="a14">
-          <p:sp>
-            <p:nvSpPr>
-              <p:cNvPr id="17" name="文字方塊 16">
-                <a:extLst>
-                  <a:ext uri="{FF2B5EF4-FFF2-40B4-BE49-F238E27FC236}">
-                    <a16:creationId xmlns:a16="http://schemas.microsoft.com/office/drawing/2014/main" id="{DA50C79D-1CDD-453A-9616-E6E2E9AF781A}"/>
-                  </a:ext>
-                </a:extLst>
-              </p:cNvPr>
-              <p:cNvSpPr txBox="1"/>
-              <p:nvPr/>
-            </p:nvSpPr>
-            <p:spPr>
-              <a:xfrm>
-                <a:off x="906268" y="1543537"/>
-                <a:ext cx="946882" cy="369332"/>
-              </a:xfrm>
-              <a:prstGeom prst="rect">
-                <a:avLst/>
-              </a:prstGeom>
-              <a:noFill/>
-            </p:spPr>
-            <p:txBody>
-              <a:bodyPr wrap="square" rtlCol="0">
-                <a:spAutoFit/>
-              </a:bodyPr>
-              <a:lstStyle/>
-              <a:p>
-                <a:pPr/>
-                <a14:m>
-                  <m:oMathPara xmlns:m="http://schemas.openxmlformats.org/officeDocument/2006/math">
-                    <m:oMathParaPr>
-                      <m:jc m:val="centerGroup"/>
-                    </m:oMathParaPr>
-                    <m:oMath xmlns:m="http://schemas.openxmlformats.org/officeDocument/2006/math">
-                      <m:r>
-                        <a:rPr lang="en-US" altLang="zh-TW" i="1">
-                          <a:latin typeface="Cambria Math" panose="02040503050406030204" pitchFamily="18" charset="0"/>
-                        </a:rPr>
-                        <m:t>ℓ=−2</m:t>
-                      </m:r>
-                    </m:oMath>
-                  </m:oMathPara>
-                </a14:m>
-                <a:endParaRPr lang="zh-TW" altLang="en-US" dirty="0"/>
-              </a:p>
-            </p:txBody>
-          </p:sp>
-        </mc:Choice>
-        <mc:Fallback>
-          <p:sp>
-            <p:nvSpPr>
-              <p:cNvPr id="17" name="文字方塊 16">
-                <a:extLst>
-                  <a:ext uri="{FF2B5EF4-FFF2-40B4-BE49-F238E27FC236}">
-                    <a16:creationId xmlns:a16="http://schemas.microsoft.com/office/drawing/2014/main" id="{DA50C79D-1CDD-453A-9616-E6E2E9AF781A}"/>
-                  </a:ext>
-                </a:extLst>
-              </p:cNvPr>
-              <p:cNvSpPr txBox="1">
-                <a:spLocks noRot="1" noChangeAspect="1" noMove="1" noResize="1" noEditPoints="1" noAdjustHandles="1" noChangeArrowheads="1" noChangeShapeType="1" noTextEdit="1"/>
-              </p:cNvSpPr>
-              <p:nvPr/>
-            </p:nvSpPr>
-            <p:spPr>
-              <a:xfrm>
-                <a:off x="906268" y="1543537"/>
-                <a:ext cx="946882" cy="369332"/>
-              </a:xfrm>
-              <a:prstGeom prst="rect">
-                <a:avLst/>
-              </a:prstGeom>
-              <a:blipFill>
-                <a:blip r:embed="rId9"/>
-                <a:stretch>
-                  <a:fillRect/>
-                </a:stretch>
-              </a:blipFill>
-            </p:spPr>
-            <p:txBody>
-              <a:bodyPr/>
-              <a:lstStyle/>
-              <a:p>
-                <a:r>
-                  <a:rPr lang="zh-TW" altLang="en-US">
-                    <a:noFill/>
-                  </a:rPr>
-                  <a:t> </a:t>
-                </a:r>
-              </a:p>
-            </p:txBody>
-          </p:sp>
-        </mc:Fallback>
-      </mc:AlternateContent>
-      <mc:AlternateContent xmlns:mc="http://schemas.openxmlformats.org/markup-compatibility/2006">
-        <mc:Choice xmlns:a14="http://schemas.microsoft.com/office/drawing/2010/main" Requires="a14">
-          <p:sp>
-            <p:nvSpPr>
-              <p:cNvPr id="19" name="文字方塊 18">
-                <a:extLst>
-                  <a:ext uri="{FF2B5EF4-FFF2-40B4-BE49-F238E27FC236}">
-                    <a16:creationId xmlns:a16="http://schemas.microsoft.com/office/drawing/2014/main" id="{464B4E54-4144-40A8-8AAB-0B5CEB8C51DA}"/>
-                  </a:ext>
-                </a:extLst>
-              </p:cNvPr>
-              <p:cNvSpPr txBox="1"/>
-              <p:nvPr/>
-            </p:nvSpPr>
-            <p:spPr>
-              <a:xfrm>
-                <a:off x="1836330" y="2859335"/>
-                <a:ext cx="424768" cy="369332"/>
-              </a:xfrm>
-              <a:prstGeom prst="rect">
-                <a:avLst/>
-              </a:prstGeom>
-              <a:noFill/>
-            </p:spPr>
-            <p:txBody>
-              <a:bodyPr wrap="square" rtlCol="0">
-                <a:spAutoFit/>
-              </a:bodyPr>
-              <a:lstStyle/>
-              <a:p>
-                <a:pPr/>
-                <a14:m>
-                  <m:oMathPara xmlns:m="http://schemas.openxmlformats.org/officeDocument/2006/math">
-                    <m:oMathParaPr>
-                      <m:jc m:val="centerGroup"/>
-                    </m:oMathParaPr>
-                    <m:oMath xmlns:m="http://schemas.openxmlformats.org/officeDocument/2006/math">
-                      <m:r>
-                        <m:rPr>
-                          <m:sty m:val="p"/>
-                        </m:rPr>
-                        <a:rPr lang="en-US" altLang="zh-TW">
-                          <a:latin typeface="Cambria Math" panose="02040503050406030204" pitchFamily="18" charset="0"/>
-                        </a:rPr>
-                        <m:t>um</m:t>
-                      </m:r>
-                    </m:oMath>
-                  </m:oMathPara>
-                </a14:m>
-                <a:endParaRPr lang="zh-TW" altLang="en-US" dirty="0"/>
-              </a:p>
-            </p:txBody>
-          </p:sp>
-        </mc:Choice>
-        <mc:Fallback>
-          <p:sp>
-            <p:nvSpPr>
-              <p:cNvPr id="19" name="文字方塊 18">
-                <a:extLst>
-                  <a:ext uri="{FF2B5EF4-FFF2-40B4-BE49-F238E27FC236}">
-                    <a16:creationId xmlns:a16="http://schemas.microsoft.com/office/drawing/2014/main" id="{464B4E54-4144-40A8-8AAB-0B5CEB8C51DA}"/>
-                  </a:ext>
-                </a:extLst>
-              </p:cNvPr>
-              <p:cNvSpPr txBox="1">
-                <a:spLocks noRot="1" noChangeAspect="1" noMove="1" noResize="1" noEditPoints="1" noAdjustHandles="1" noChangeArrowheads="1" noChangeShapeType="1" noTextEdit="1"/>
-              </p:cNvSpPr>
-              <p:nvPr/>
-            </p:nvSpPr>
-            <p:spPr>
-              <a:xfrm>
-                <a:off x="1836330" y="2859335"/>
-                <a:ext cx="424768" cy="369332"/>
-              </a:xfrm>
-              <a:prstGeom prst="rect">
-                <a:avLst/>
-              </a:prstGeom>
-              <a:blipFill>
-                <a:blip r:embed="rId10"/>
-                <a:stretch>
-                  <a:fillRect r="-11429"/>
-                </a:stretch>
-              </a:blipFill>
-            </p:spPr>
-            <p:txBody>
-              <a:bodyPr/>
-              <a:lstStyle/>
-              <a:p>
-                <a:r>
-                  <a:rPr lang="zh-TW" altLang="en-US">
-                    <a:noFill/>
-                  </a:rPr>
-                  <a:t> </a:t>
-                </a:r>
-              </a:p>
-            </p:txBody>
-          </p:sp>
-        </mc:Fallback>
-      </mc:AlternateContent>
-      <p:sp>
-        <p:nvSpPr>
-          <p:cNvPr id="28" name="文字方塊 27">
-            <a:extLst>
-              <a:ext uri="{FF2B5EF4-FFF2-40B4-BE49-F238E27FC236}">
-                <a16:creationId xmlns:a16="http://schemas.microsoft.com/office/drawing/2014/main" id="{96FB43A9-3278-4E56-912E-CFF2E8562ACF}"/>
-              </a:ext>
-            </a:extLst>
-          </p:cNvPr>
-          <p:cNvSpPr txBox="1"/>
-          <p:nvPr/>
-        </p:nvSpPr>
-        <p:spPr>
-          <a:xfrm rot="16200000">
-            <a:off x="-597161" y="4017419"/>
-            <a:ext cx="1696978" cy="369332"/>
-          </a:xfrm>
-          <a:prstGeom prst="rect">
-            <a:avLst/>
-          </a:prstGeom>
-          <a:noFill/>
-        </p:spPr>
-        <p:txBody>
-          <a:bodyPr wrap="square" rtlCol="0">
-            <a:spAutoFit/>
-          </a:bodyPr>
-          <a:lstStyle/>
-          <a:p>
-            <a:pPr algn="ctr"/>
-            <a:r>
-              <a:rPr lang="en-US" altLang="zh-TW" dirty="0"/>
-              <a:t>arbitrary units</a:t>
-            </a:r>
-            <a:endParaRPr lang="zh-TW" altLang="en-US" dirty="0"/>
-          </a:p>
-        </p:txBody>
-      </p:sp>
-      <mc:AlternateContent xmlns:mc="http://schemas.openxmlformats.org/markup-compatibility/2006">
-        <mc:Choice xmlns:a14="http://schemas.microsoft.com/office/drawing/2010/main" Requires="a14">
-          <p:sp>
-            <p:nvSpPr>
-              <p:cNvPr id="24" name="矩形 23">
-                <a:extLst>
-                  <a:ext uri="{FF2B5EF4-FFF2-40B4-BE49-F238E27FC236}">
-                    <a16:creationId xmlns:a16="http://schemas.microsoft.com/office/drawing/2014/main" id="{85C75D81-2733-4604-A08E-3B935881865C}"/>
+                    <a16:creationId xmlns:a16="http://schemas.microsoft.com/office/drawing/2014/main" id="{1ED60B65-DF32-45CC-88AD-193710422870}"/>
                   </a:ext>
                 </a:extLst>
               </p:cNvPr>
@@ -4477,969 +3910,1559 @@
             </p:nvSpPr>
             <p:spPr>
               <a:xfrm>
-                <a:off x="3563247" y="1217819"/>
-                <a:ext cx="1511696" cy="369332"/>
+                <a:off x="6039273" y="-260656"/>
+                <a:ext cx="1718499" cy="1100016"/>
               </a:xfrm>
-              <a:prstGeom prst="rect">
+              <a:prstGeom prst="roundRect">
                 <a:avLst/>
               </a:prstGeom>
+              <a:noFill/>
+              <a:ln w="28575">
+                <a:solidFill>
+                  <a:schemeClr val="tx1">
+                    <a:lumMod val="50000"/>
+                    <a:lumOff val="50000"/>
+                  </a:schemeClr>
+                </a:solidFill>
+              </a:ln>
             </p:spPr>
+            <p:style>
+              <a:lnRef idx="2">
+                <a:schemeClr val="accent1">
+                  <a:shade val="50000"/>
+                </a:schemeClr>
+              </a:lnRef>
+              <a:fillRef idx="1">
+                <a:schemeClr val="accent1"/>
+              </a:fillRef>
+              <a:effectRef idx="0">
+                <a:schemeClr val="accent1"/>
+              </a:effectRef>
+              <a:fontRef idx="minor">
+                <a:schemeClr val="lt1"/>
+              </a:fontRef>
+            </p:style>
             <p:txBody>
-              <a:bodyPr wrap="none">
-                <a:spAutoFit/>
+              <a:bodyPr rot="0" spcFirstLastPara="0" vertOverflow="overflow" horzOverflow="overflow" vert="horz" wrap="square" lIns="80998" tIns="40499" rIns="80998" bIns="40499" numCol="1" spcCol="0" rtlCol="0" fromWordArt="0" anchor="ctr" anchorCtr="0" forceAA="0" compatLnSpc="1">
+                <a:prstTxWarp prst="textNoShape">
+                  <a:avLst/>
+                </a:prstTxWarp>
+                <a:noAutofit/>
               </a:bodyPr>
               <a:lstStyle/>
               <a:p>
-                <a14:m>
-                  <m:oMathPara xmlns:m="http://schemas.openxmlformats.org/officeDocument/2006/math">
-                    <m:oMathParaPr>
-                      <m:jc m:val="centerGroup"/>
-                    </m:oMathParaPr>
-                    <m:oMath xmlns:m="http://schemas.openxmlformats.org/officeDocument/2006/math">
-                      <m:sSub>
-                        <m:sSubPr>
-                          <m:ctrlPr>
-                            <a:rPr lang="en-US" altLang="zh-TW" i="1">
-                              <a:latin typeface="Cambria Math" panose="02040503050406030204" pitchFamily="18" charset="0"/>
-                            </a:rPr>
-                          </m:ctrlPr>
-                        </m:sSubPr>
-                        <m:e>
-                          <m:r>
-                            <a:rPr lang="en-US" altLang="zh-TW" i="1">
-                              <a:latin typeface="Cambria Math" panose="02040503050406030204" pitchFamily="18" charset="0"/>
-                            </a:rPr>
-                            <m:t>𝑊</m:t>
-                          </m:r>
-                        </m:e>
-                        <m:sub>
-                          <m:r>
-                            <a:rPr lang="en-US" altLang="zh-TW" i="1">
-                              <a:latin typeface="Cambria Math" panose="02040503050406030204" pitchFamily="18" charset="0"/>
-                            </a:rPr>
-                            <m:t>0</m:t>
-                          </m:r>
-                        </m:sub>
-                      </m:sSub>
-                      <m:r>
-                        <a:rPr lang="en-US" altLang="zh-TW" i="1">
-                          <a:latin typeface="Cambria Math" panose="02040503050406030204" pitchFamily="18" charset="0"/>
-                        </a:rPr>
-                        <m:t>=1.5</m:t>
-                      </m:r>
-                      <m:r>
-                        <a:rPr lang="en-US" altLang="zh-TW">
-                          <a:latin typeface="Cambria Math" panose="02040503050406030204" pitchFamily="18" charset="0"/>
-                        </a:rPr>
-                        <m:t> </m:t>
-                      </m:r>
-                      <m:r>
-                        <m:rPr>
-                          <m:sty m:val="p"/>
-                        </m:rPr>
-                        <a:rPr lang="en-US" altLang="zh-TW">
-                          <a:latin typeface="Cambria Math" panose="02040503050406030204" pitchFamily="18" charset="0"/>
-                        </a:rPr>
-                        <m:t>um</m:t>
-                      </m:r>
-                    </m:oMath>
-                  </m:oMathPara>
-                </a14:m>
+                <a:pPr algn="ctr"/>
                 <a:endParaRPr lang="zh-TW" altLang="en-US" dirty="0"/>
               </a:p>
             </p:txBody>
           </p:sp>
-        </mc:Choice>
-        <mc:Fallback>
-          <p:sp>
-            <p:nvSpPr>
-              <p:cNvPr id="24" name="矩形 23">
-                <a:extLst>
-                  <a:ext uri="{FF2B5EF4-FFF2-40B4-BE49-F238E27FC236}">
-                    <a16:creationId xmlns:a16="http://schemas.microsoft.com/office/drawing/2014/main" id="{85C75D81-2733-4604-A08E-3B935881865C}"/>
-                  </a:ext>
-                </a:extLst>
-              </p:cNvPr>
-              <p:cNvSpPr>
-                <a:spLocks noRot="1" noChangeAspect="1" noMove="1" noResize="1" noEditPoints="1" noAdjustHandles="1" noChangeArrowheads="1" noChangeShapeType="1" noTextEdit="1"/>
-              </p:cNvSpPr>
-              <p:nvPr/>
-            </p:nvSpPr>
-            <p:spPr>
-              <a:xfrm>
-                <a:off x="3563247" y="1217819"/>
-                <a:ext cx="1511696" cy="369332"/>
-              </a:xfrm>
-              <a:prstGeom prst="rect">
-                <a:avLst/>
-              </a:prstGeom>
-              <a:blipFill>
-                <a:blip r:embed="rId11"/>
-                <a:stretch>
-                  <a:fillRect/>
-                </a:stretch>
-              </a:blipFill>
-            </p:spPr>
-            <p:txBody>
-              <a:bodyPr/>
-              <a:lstStyle/>
-              <a:p>
-                <a:r>
-                  <a:rPr lang="zh-TW" altLang="en-US">
-                    <a:noFill/>
-                  </a:rPr>
-                  <a:t> </a:t>
-                </a:r>
-              </a:p>
-            </p:txBody>
-          </p:sp>
-        </mc:Fallback>
-      </mc:AlternateContent>
-      <p:sp>
-        <p:nvSpPr>
-          <p:cNvPr id="26" name="文字方塊 25">
-            <a:extLst>
-              <a:ext uri="{FF2B5EF4-FFF2-40B4-BE49-F238E27FC236}">
-                <a16:creationId xmlns:a16="http://schemas.microsoft.com/office/drawing/2014/main" id="{83A5726D-6BB7-44DA-A5F4-030C4EF7D79B}"/>
-              </a:ext>
-            </a:extLst>
-          </p:cNvPr>
-          <p:cNvSpPr txBox="1"/>
-          <p:nvPr/>
-        </p:nvSpPr>
-        <p:spPr>
-          <a:xfrm rot="16200000">
-            <a:off x="-617413" y="2038142"/>
-            <a:ext cx="1696978" cy="369332"/>
-          </a:xfrm>
-          <a:prstGeom prst="rect">
-            <a:avLst/>
-          </a:prstGeom>
-          <a:noFill/>
-        </p:spPr>
-        <p:txBody>
-          <a:bodyPr wrap="square" rtlCol="0">
-            <a:spAutoFit/>
-          </a:bodyPr>
-          <a:lstStyle/>
-          <a:p>
-            <a:pPr algn="ctr"/>
-            <a:r>
-              <a:rPr lang="en-US" altLang="zh-TW" dirty="0"/>
-              <a:t>arbitrary units</a:t>
-            </a:r>
-            <a:endParaRPr lang="zh-TW" altLang="en-US" dirty="0"/>
-          </a:p>
-        </p:txBody>
-      </p:sp>
-      <mc:AlternateContent xmlns:mc="http://schemas.openxmlformats.org/markup-compatibility/2006">
-        <mc:Choice xmlns:a14="http://schemas.microsoft.com/office/drawing/2010/main" Requires="a14">
-          <p:sp>
-            <p:nvSpPr>
-              <p:cNvPr id="27" name="矩形 26">
-                <a:extLst>
-                  <a:ext uri="{FF2B5EF4-FFF2-40B4-BE49-F238E27FC236}">
-                    <a16:creationId xmlns:a16="http://schemas.microsoft.com/office/drawing/2014/main" id="{E45021D2-AA8E-4751-8F35-CECE862330D7}"/>
-                  </a:ext>
-                </a:extLst>
-              </p:cNvPr>
-              <p:cNvSpPr/>
-              <p:nvPr/>
-            </p:nvSpPr>
-            <p:spPr>
-              <a:xfrm>
-                <a:off x="3612417" y="3195412"/>
-                <a:ext cx="1511696" cy="369332"/>
-              </a:xfrm>
-              <a:prstGeom prst="rect">
-                <a:avLst/>
-              </a:prstGeom>
-            </p:spPr>
-            <p:txBody>
-              <a:bodyPr wrap="none">
-                <a:spAutoFit/>
-              </a:bodyPr>
-              <a:lstStyle/>
-              <a:p>
-                <a14:m>
-                  <m:oMathPara xmlns:m="http://schemas.openxmlformats.org/officeDocument/2006/math">
-                    <m:oMathParaPr>
-                      <m:jc m:val="centerGroup"/>
-                    </m:oMathParaPr>
-                    <m:oMath xmlns:m="http://schemas.openxmlformats.org/officeDocument/2006/math">
-                      <m:sSub>
-                        <m:sSubPr>
-                          <m:ctrlPr>
-                            <a:rPr lang="en-US" altLang="zh-TW" i="1">
-                              <a:latin typeface="Cambria Math" panose="02040503050406030204" pitchFamily="18" charset="0"/>
-                            </a:rPr>
-                          </m:ctrlPr>
-                        </m:sSubPr>
-                        <m:e>
-                          <m:r>
-                            <a:rPr lang="en-US" altLang="zh-TW" i="1">
-                              <a:latin typeface="Cambria Math" panose="02040503050406030204" pitchFamily="18" charset="0"/>
-                            </a:rPr>
-                            <m:t>𝑊</m:t>
-                          </m:r>
-                        </m:e>
-                        <m:sub>
-                          <m:r>
-                            <a:rPr lang="en-US" altLang="zh-TW" i="1">
-                              <a:latin typeface="Cambria Math" panose="02040503050406030204" pitchFamily="18" charset="0"/>
-                            </a:rPr>
-                            <m:t>0</m:t>
-                          </m:r>
-                        </m:sub>
-                      </m:sSub>
-                      <m:r>
-                        <a:rPr lang="en-US" altLang="zh-TW" i="1">
-                          <a:latin typeface="Cambria Math" panose="02040503050406030204" pitchFamily="18" charset="0"/>
-                          <a:ea typeface="Cambria Math" panose="02040503050406030204" pitchFamily="18" charset="0"/>
-                        </a:rPr>
-                        <m:t>=0</m:t>
-                      </m:r>
-                      <m:r>
-                        <a:rPr lang="en-US" altLang="zh-TW">
-                          <a:latin typeface="Cambria Math" panose="02040503050406030204" pitchFamily="18" charset="0"/>
-                          <a:ea typeface="Cambria Math" panose="02040503050406030204" pitchFamily="18" charset="0"/>
-                        </a:rPr>
-                        <m:t>.5 </m:t>
-                      </m:r>
-                      <m:r>
-                        <m:rPr>
-                          <m:sty m:val="p"/>
-                        </m:rPr>
-                        <a:rPr lang="en-US" altLang="zh-TW">
-                          <a:latin typeface="Cambria Math" panose="02040503050406030204" pitchFamily="18" charset="0"/>
-                          <a:ea typeface="Cambria Math" panose="02040503050406030204" pitchFamily="18" charset="0"/>
-                        </a:rPr>
-                        <m:t>um</m:t>
-                      </m:r>
-                    </m:oMath>
-                  </m:oMathPara>
-                </a14:m>
-                <a:endParaRPr lang="zh-TW" altLang="en-US" dirty="0"/>
-              </a:p>
-            </p:txBody>
-          </p:sp>
-        </mc:Choice>
-        <mc:Fallback>
-          <p:sp>
-            <p:nvSpPr>
-              <p:cNvPr id="27" name="矩形 26">
-                <a:extLst>
-                  <a:ext uri="{FF2B5EF4-FFF2-40B4-BE49-F238E27FC236}">
-                    <a16:creationId xmlns:a16="http://schemas.microsoft.com/office/drawing/2014/main" id="{E45021D2-AA8E-4751-8F35-CECE862330D7}"/>
-                  </a:ext>
-                </a:extLst>
-              </p:cNvPr>
-              <p:cNvSpPr>
-                <a:spLocks noRot="1" noChangeAspect="1" noMove="1" noResize="1" noEditPoints="1" noAdjustHandles="1" noChangeArrowheads="1" noChangeShapeType="1" noTextEdit="1"/>
-              </p:cNvSpPr>
-              <p:nvPr/>
-            </p:nvSpPr>
-            <p:spPr>
-              <a:xfrm>
-                <a:off x="3612417" y="3195412"/>
-                <a:ext cx="1511696" cy="369332"/>
-              </a:xfrm>
-              <a:prstGeom prst="rect">
-                <a:avLst/>
-              </a:prstGeom>
-              <a:blipFill>
-                <a:blip r:embed="rId12"/>
-                <a:stretch>
-                  <a:fillRect/>
-                </a:stretch>
-              </a:blipFill>
-            </p:spPr>
-            <p:txBody>
-              <a:bodyPr/>
-              <a:lstStyle/>
-              <a:p>
-                <a:r>
-                  <a:rPr lang="zh-TW" altLang="en-US">
-                    <a:noFill/>
-                  </a:rPr>
-                  <a:t> </a:t>
-                </a:r>
-              </a:p>
-            </p:txBody>
-          </p:sp>
-        </mc:Fallback>
-      </mc:AlternateContent>
-      <mc:AlternateContent xmlns:mc="http://schemas.openxmlformats.org/markup-compatibility/2006">
-        <mc:Choice xmlns:a14="http://schemas.microsoft.com/office/drawing/2010/main" Requires="a14">
-          <p:sp>
-            <p:nvSpPr>
-              <p:cNvPr id="32" name="文字方塊 31">
-                <a:extLst>
-                  <a:ext uri="{FF2B5EF4-FFF2-40B4-BE49-F238E27FC236}">
-                    <a16:creationId xmlns:a16="http://schemas.microsoft.com/office/drawing/2014/main" id="{68CC5F03-FE23-49D4-934E-34231E7D27F3}"/>
-                  </a:ext>
-                </a:extLst>
-              </p:cNvPr>
-              <p:cNvSpPr txBox="1"/>
-              <p:nvPr/>
-            </p:nvSpPr>
-            <p:spPr>
-              <a:xfrm>
-                <a:off x="1885961" y="4835837"/>
-                <a:ext cx="424768" cy="369332"/>
-              </a:xfrm>
-              <a:prstGeom prst="rect">
-                <a:avLst/>
-              </a:prstGeom>
-              <a:noFill/>
-            </p:spPr>
-            <p:txBody>
-              <a:bodyPr wrap="square" rtlCol="0">
-                <a:spAutoFit/>
-              </a:bodyPr>
-              <a:lstStyle/>
-              <a:p>
-                <a:pPr/>
-                <a14:m>
-                  <m:oMathPara xmlns:m="http://schemas.openxmlformats.org/officeDocument/2006/math">
-                    <m:oMathParaPr>
-                      <m:jc m:val="centerGroup"/>
-                    </m:oMathParaPr>
-                    <m:oMath xmlns:m="http://schemas.openxmlformats.org/officeDocument/2006/math">
-                      <m:r>
-                        <m:rPr>
-                          <m:sty m:val="p"/>
-                        </m:rPr>
-                        <a:rPr lang="en-US" altLang="zh-TW">
-                          <a:latin typeface="Cambria Math" panose="02040503050406030204" pitchFamily="18" charset="0"/>
-                        </a:rPr>
-                        <m:t>um</m:t>
-                      </m:r>
-                    </m:oMath>
-                  </m:oMathPara>
-                </a14:m>
-                <a:endParaRPr lang="zh-TW" altLang="en-US" dirty="0"/>
-              </a:p>
-            </p:txBody>
-          </p:sp>
-        </mc:Choice>
-        <mc:Fallback>
-          <p:sp>
-            <p:nvSpPr>
-              <p:cNvPr id="32" name="文字方塊 31">
-                <a:extLst>
-                  <a:ext uri="{FF2B5EF4-FFF2-40B4-BE49-F238E27FC236}">
-                    <a16:creationId xmlns:a16="http://schemas.microsoft.com/office/drawing/2014/main" id="{68CC5F03-FE23-49D4-934E-34231E7D27F3}"/>
-                  </a:ext>
-                </a:extLst>
-              </p:cNvPr>
-              <p:cNvSpPr txBox="1">
-                <a:spLocks noRot="1" noChangeAspect="1" noMove="1" noResize="1" noEditPoints="1" noAdjustHandles="1" noChangeArrowheads="1" noChangeShapeType="1" noTextEdit="1"/>
-              </p:cNvSpPr>
-              <p:nvPr/>
-            </p:nvSpPr>
-            <p:spPr>
-              <a:xfrm>
-                <a:off x="1885961" y="4835837"/>
-                <a:ext cx="424768" cy="369332"/>
-              </a:xfrm>
-              <a:prstGeom prst="rect">
-                <a:avLst/>
-              </a:prstGeom>
-              <a:blipFill>
-                <a:blip r:embed="rId13"/>
-                <a:stretch>
-                  <a:fillRect r="-11429"/>
-                </a:stretch>
-              </a:blipFill>
-            </p:spPr>
-            <p:txBody>
-              <a:bodyPr/>
-              <a:lstStyle/>
-              <a:p>
-                <a:r>
-                  <a:rPr lang="zh-TW" altLang="en-US">
-                    <a:noFill/>
-                  </a:rPr>
-                  <a:t> </a:t>
-                </a:r>
-              </a:p>
-            </p:txBody>
-          </p:sp>
-        </mc:Fallback>
-      </mc:AlternateContent>
-      <mc:AlternateContent xmlns:mc="http://schemas.openxmlformats.org/markup-compatibility/2006">
-        <mc:Choice xmlns:a14="http://schemas.microsoft.com/office/drawing/2010/main" Requires="a14">
-          <p:sp>
-            <p:nvSpPr>
-              <p:cNvPr id="35" name="文字方塊 34">
-                <a:extLst>
-                  <a:ext uri="{FF2B5EF4-FFF2-40B4-BE49-F238E27FC236}">
-                    <a16:creationId xmlns:a16="http://schemas.microsoft.com/office/drawing/2014/main" id="{43F95930-E1A0-4A18-AA43-293BA5F27B78}"/>
-                  </a:ext>
-                </a:extLst>
-              </p:cNvPr>
-              <p:cNvSpPr txBox="1"/>
-              <p:nvPr/>
-            </p:nvSpPr>
-            <p:spPr>
-              <a:xfrm>
-                <a:off x="3881501" y="3558803"/>
-                <a:ext cx="946882" cy="369332"/>
-              </a:xfrm>
-              <a:prstGeom prst="rect">
-                <a:avLst/>
-              </a:prstGeom>
-              <a:noFill/>
-            </p:spPr>
-            <p:txBody>
-              <a:bodyPr wrap="square" rtlCol="0">
-                <a:spAutoFit/>
-              </a:bodyPr>
-              <a:lstStyle/>
-              <a:p>
-                <a:pPr/>
-                <a14:m>
-                  <m:oMathPara xmlns:m="http://schemas.openxmlformats.org/officeDocument/2006/math">
-                    <m:oMathParaPr>
-                      <m:jc m:val="centerGroup"/>
-                    </m:oMathParaPr>
-                    <m:oMath xmlns:m="http://schemas.openxmlformats.org/officeDocument/2006/math">
-                      <m:r>
-                        <a:rPr lang="en-US" altLang="zh-TW" i="1">
-                          <a:latin typeface="Cambria Math" panose="02040503050406030204" pitchFamily="18" charset="0"/>
-                        </a:rPr>
-                        <m:t>ℓ=0</m:t>
-                      </m:r>
-                    </m:oMath>
-                  </m:oMathPara>
-                </a14:m>
-                <a:endParaRPr lang="zh-TW" altLang="en-US" dirty="0"/>
-              </a:p>
-            </p:txBody>
-          </p:sp>
-        </mc:Choice>
-        <mc:Fallback>
-          <p:sp>
-            <p:nvSpPr>
-              <p:cNvPr id="35" name="文字方塊 34">
-                <a:extLst>
-                  <a:ext uri="{FF2B5EF4-FFF2-40B4-BE49-F238E27FC236}">
-                    <a16:creationId xmlns:a16="http://schemas.microsoft.com/office/drawing/2014/main" id="{43F95930-E1A0-4A18-AA43-293BA5F27B78}"/>
-                  </a:ext>
-                </a:extLst>
-              </p:cNvPr>
-              <p:cNvSpPr txBox="1">
-                <a:spLocks noRot="1" noChangeAspect="1" noMove="1" noResize="1" noEditPoints="1" noAdjustHandles="1" noChangeArrowheads="1" noChangeShapeType="1" noTextEdit="1"/>
-              </p:cNvSpPr>
-              <p:nvPr/>
-            </p:nvSpPr>
-            <p:spPr>
-              <a:xfrm>
-                <a:off x="3881501" y="3558803"/>
-                <a:ext cx="946882" cy="369332"/>
-              </a:xfrm>
-              <a:prstGeom prst="rect">
-                <a:avLst/>
-              </a:prstGeom>
-              <a:blipFill>
-                <a:blip r:embed="rId14"/>
-                <a:stretch>
-                  <a:fillRect/>
-                </a:stretch>
-              </a:blipFill>
-            </p:spPr>
-            <p:txBody>
-              <a:bodyPr/>
-              <a:lstStyle/>
-              <a:p>
-                <a:r>
-                  <a:rPr lang="zh-TW" altLang="en-US">
-                    <a:noFill/>
-                  </a:rPr>
-                  <a:t> </a:t>
-                </a:r>
-              </a:p>
-            </p:txBody>
-          </p:sp>
-        </mc:Fallback>
-      </mc:AlternateContent>
-      <mc:AlternateContent xmlns:mc="http://schemas.openxmlformats.org/markup-compatibility/2006">
-        <mc:Choice xmlns:a14="http://schemas.microsoft.com/office/drawing/2010/main" Requires="a14">
-          <p:sp>
-            <p:nvSpPr>
-              <p:cNvPr id="36" name="文字方塊 35">
-                <a:extLst>
-                  <a:ext uri="{FF2B5EF4-FFF2-40B4-BE49-F238E27FC236}">
-                    <a16:creationId xmlns:a16="http://schemas.microsoft.com/office/drawing/2014/main" id="{BDB64F1F-26FF-4383-BC09-17687EA19021}"/>
-                  </a:ext>
-                </a:extLst>
-              </p:cNvPr>
-              <p:cNvSpPr txBox="1"/>
-              <p:nvPr/>
-            </p:nvSpPr>
-            <p:spPr>
-              <a:xfrm>
-                <a:off x="6856734" y="3558803"/>
-                <a:ext cx="946882" cy="369332"/>
-              </a:xfrm>
-              <a:prstGeom prst="rect">
-                <a:avLst/>
-              </a:prstGeom>
-              <a:noFill/>
-            </p:spPr>
-            <p:txBody>
-              <a:bodyPr wrap="square" rtlCol="0">
-                <a:spAutoFit/>
-              </a:bodyPr>
-              <a:lstStyle/>
-              <a:p>
-                <a:pPr/>
-                <a14:m>
-                  <m:oMathPara xmlns:m="http://schemas.openxmlformats.org/officeDocument/2006/math">
-                    <m:oMathParaPr>
-                      <m:jc m:val="centerGroup"/>
-                    </m:oMathParaPr>
-                    <m:oMath xmlns:m="http://schemas.openxmlformats.org/officeDocument/2006/math">
-                      <m:r>
-                        <a:rPr lang="en-US" altLang="zh-TW" i="1">
-                          <a:latin typeface="Cambria Math" panose="02040503050406030204" pitchFamily="18" charset="0"/>
-                        </a:rPr>
-                        <m:t>ℓ=2</m:t>
-                      </m:r>
-                    </m:oMath>
-                  </m:oMathPara>
-                </a14:m>
-                <a:endParaRPr lang="zh-TW" altLang="en-US" dirty="0"/>
-              </a:p>
-            </p:txBody>
-          </p:sp>
-        </mc:Choice>
-        <mc:Fallback>
-          <p:sp>
-            <p:nvSpPr>
-              <p:cNvPr id="36" name="文字方塊 35">
-                <a:extLst>
-                  <a:ext uri="{FF2B5EF4-FFF2-40B4-BE49-F238E27FC236}">
-                    <a16:creationId xmlns:a16="http://schemas.microsoft.com/office/drawing/2014/main" id="{BDB64F1F-26FF-4383-BC09-17687EA19021}"/>
-                  </a:ext>
-                </a:extLst>
-              </p:cNvPr>
-              <p:cNvSpPr txBox="1">
-                <a:spLocks noRot="1" noChangeAspect="1" noMove="1" noResize="1" noEditPoints="1" noAdjustHandles="1" noChangeArrowheads="1" noChangeShapeType="1" noTextEdit="1"/>
-              </p:cNvSpPr>
-              <p:nvPr/>
-            </p:nvSpPr>
-            <p:spPr>
-              <a:xfrm>
-                <a:off x="6856734" y="3558803"/>
-                <a:ext cx="946882" cy="369332"/>
-              </a:xfrm>
-              <a:prstGeom prst="rect">
-                <a:avLst/>
-              </a:prstGeom>
-              <a:blipFill>
-                <a:blip r:embed="rId15"/>
-                <a:stretch>
-                  <a:fillRect/>
-                </a:stretch>
-              </a:blipFill>
-            </p:spPr>
-            <p:txBody>
-              <a:bodyPr/>
-              <a:lstStyle/>
-              <a:p>
-                <a:r>
-                  <a:rPr lang="zh-TW" altLang="en-US">
-                    <a:noFill/>
-                  </a:rPr>
-                  <a:t> </a:t>
-                </a:r>
-              </a:p>
-            </p:txBody>
-          </p:sp>
-        </mc:Fallback>
-      </mc:AlternateContent>
-      <mc:AlternateContent xmlns:mc="http://schemas.openxmlformats.org/markup-compatibility/2006">
-        <mc:Choice xmlns:a14="http://schemas.microsoft.com/office/drawing/2010/main" Requires="a14">
-          <p:sp>
-            <p:nvSpPr>
-              <p:cNvPr id="37" name="文字方塊 36">
-                <a:extLst>
-                  <a:ext uri="{FF2B5EF4-FFF2-40B4-BE49-F238E27FC236}">
-                    <a16:creationId xmlns:a16="http://schemas.microsoft.com/office/drawing/2014/main" id="{F07B4362-4894-4DC3-A118-F912BAA3ABC9}"/>
-                  </a:ext>
-                </a:extLst>
-              </p:cNvPr>
-              <p:cNvSpPr txBox="1"/>
-              <p:nvPr/>
-            </p:nvSpPr>
-            <p:spPr>
-              <a:xfrm>
-                <a:off x="5369118" y="3558803"/>
-                <a:ext cx="946882" cy="369332"/>
-              </a:xfrm>
-              <a:prstGeom prst="rect">
-                <a:avLst/>
-              </a:prstGeom>
-              <a:noFill/>
-            </p:spPr>
-            <p:txBody>
-              <a:bodyPr wrap="square" rtlCol="0">
-                <a:spAutoFit/>
-              </a:bodyPr>
-              <a:lstStyle/>
-              <a:p>
-                <a:pPr/>
-                <a14:m>
-                  <m:oMathPara xmlns:m="http://schemas.openxmlformats.org/officeDocument/2006/math">
-                    <m:oMathParaPr>
-                      <m:jc m:val="centerGroup"/>
-                    </m:oMathParaPr>
-                    <m:oMath xmlns:m="http://schemas.openxmlformats.org/officeDocument/2006/math">
-                      <m:r>
-                        <a:rPr lang="en-US" altLang="zh-TW" i="1">
-                          <a:latin typeface="Cambria Math" panose="02040503050406030204" pitchFamily="18" charset="0"/>
-                        </a:rPr>
-                        <m:t>ℓ=1</m:t>
-                      </m:r>
-                    </m:oMath>
-                  </m:oMathPara>
-                </a14:m>
-                <a:endParaRPr lang="zh-TW" altLang="en-US" dirty="0"/>
-              </a:p>
-            </p:txBody>
-          </p:sp>
-        </mc:Choice>
-        <mc:Fallback>
-          <p:sp>
-            <p:nvSpPr>
-              <p:cNvPr id="37" name="文字方塊 36">
-                <a:extLst>
-                  <a:ext uri="{FF2B5EF4-FFF2-40B4-BE49-F238E27FC236}">
-                    <a16:creationId xmlns:a16="http://schemas.microsoft.com/office/drawing/2014/main" id="{F07B4362-4894-4DC3-A118-F912BAA3ABC9}"/>
-                  </a:ext>
-                </a:extLst>
-              </p:cNvPr>
-              <p:cNvSpPr txBox="1">
-                <a:spLocks noRot="1" noChangeAspect="1" noMove="1" noResize="1" noEditPoints="1" noAdjustHandles="1" noChangeArrowheads="1" noChangeShapeType="1" noTextEdit="1"/>
-              </p:cNvSpPr>
-              <p:nvPr/>
-            </p:nvSpPr>
-            <p:spPr>
-              <a:xfrm>
-                <a:off x="5369118" y="3558803"/>
-                <a:ext cx="946882" cy="369332"/>
-              </a:xfrm>
-              <a:prstGeom prst="rect">
-                <a:avLst/>
-              </a:prstGeom>
-              <a:blipFill>
-                <a:blip r:embed="rId16"/>
-                <a:stretch>
-                  <a:fillRect/>
-                </a:stretch>
-              </a:blipFill>
-            </p:spPr>
-            <p:txBody>
-              <a:bodyPr/>
-              <a:lstStyle/>
-              <a:p>
-                <a:r>
-                  <a:rPr lang="zh-TW" altLang="en-US">
-                    <a:noFill/>
-                  </a:rPr>
-                  <a:t> </a:t>
-                </a:r>
-              </a:p>
-            </p:txBody>
-          </p:sp>
-        </mc:Fallback>
-      </mc:AlternateContent>
-      <mc:AlternateContent xmlns:mc="http://schemas.openxmlformats.org/markup-compatibility/2006">
-        <mc:Choice xmlns:a14="http://schemas.microsoft.com/office/drawing/2010/main" Requires="a14">
-          <p:sp>
-            <p:nvSpPr>
-              <p:cNvPr id="38" name="文字方塊 37">
-                <a:extLst>
-                  <a:ext uri="{FF2B5EF4-FFF2-40B4-BE49-F238E27FC236}">
-                    <a16:creationId xmlns:a16="http://schemas.microsoft.com/office/drawing/2014/main" id="{2909D8F5-F03B-46FF-BBC8-3EDC3936EC45}"/>
-                  </a:ext>
-                </a:extLst>
-              </p:cNvPr>
-              <p:cNvSpPr txBox="1"/>
-              <p:nvPr/>
-            </p:nvSpPr>
-            <p:spPr>
-              <a:xfrm>
-                <a:off x="2393885" y="3558803"/>
-                <a:ext cx="946882" cy="369332"/>
-              </a:xfrm>
-              <a:prstGeom prst="rect">
-                <a:avLst/>
-              </a:prstGeom>
-              <a:noFill/>
-            </p:spPr>
-            <p:txBody>
-              <a:bodyPr wrap="square" rtlCol="0">
-                <a:spAutoFit/>
-              </a:bodyPr>
-              <a:lstStyle/>
-              <a:p>
-                <a:pPr/>
-                <a14:m>
-                  <m:oMathPara xmlns:m="http://schemas.openxmlformats.org/officeDocument/2006/math">
-                    <m:oMathParaPr>
-                      <m:jc m:val="centerGroup"/>
-                    </m:oMathParaPr>
-                    <m:oMath xmlns:m="http://schemas.openxmlformats.org/officeDocument/2006/math">
-                      <m:r>
-                        <a:rPr lang="en-US" altLang="zh-TW" i="1">
-                          <a:latin typeface="Cambria Math" panose="02040503050406030204" pitchFamily="18" charset="0"/>
-                        </a:rPr>
-                        <m:t>ℓ=−1</m:t>
-                      </m:r>
-                    </m:oMath>
-                  </m:oMathPara>
-                </a14:m>
-                <a:endParaRPr lang="zh-TW" altLang="en-US" dirty="0"/>
-              </a:p>
-            </p:txBody>
-          </p:sp>
-        </mc:Choice>
-        <mc:Fallback>
-          <p:sp>
-            <p:nvSpPr>
-              <p:cNvPr id="38" name="文字方塊 37">
-                <a:extLst>
-                  <a:ext uri="{FF2B5EF4-FFF2-40B4-BE49-F238E27FC236}">
-                    <a16:creationId xmlns:a16="http://schemas.microsoft.com/office/drawing/2014/main" id="{2909D8F5-F03B-46FF-BBC8-3EDC3936EC45}"/>
-                  </a:ext>
-                </a:extLst>
-              </p:cNvPr>
-              <p:cNvSpPr txBox="1">
-                <a:spLocks noRot="1" noChangeAspect="1" noMove="1" noResize="1" noEditPoints="1" noAdjustHandles="1" noChangeArrowheads="1" noChangeShapeType="1" noTextEdit="1"/>
-              </p:cNvSpPr>
-              <p:nvPr/>
-            </p:nvSpPr>
-            <p:spPr>
-              <a:xfrm>
-                <a:off x="2393885" y="3558803"/>
-                <a:ext cx="946882" cy="369332"/>
-              </a:xfrm>
-              <a:prstGeom prst="rect">
-                <a:avLst/>
-              </a:prstGeom>
-              <a:blipFill>
-                <a:blip r:embed="rId17"/>
-                <a:stretch>
-                  <a:fillRect/>
-                </a:stretch>
-              </a:blipFill>
-            </p:spPr>
-            <p:txBody>
-              <a:bodyPr/>
-              <a:lstStyle/>
-              <a:p>
-                <a:r>
-                  <a:rPr lang="zh-TW" altLang="en-US">
-                    <a:noFill/>
-                  </a:rPr>
-                  <a:t> </a:t>
-                </a:r>
-              </a:p>
-            </p:txBody>
-          </p:sp>
-        </mc:Fallback>
-      </mc:AlternateContent>
-      <mc:AlternateContent xmlns:mc="http://schemas.openxmlformats.org/markup-compatibility/2006">
-        <mc:Choice xmlns:a14="http://schemas.microsoft.com/office/drawing/2010/main" Requires="a14">
-          <p:sp>
-            <p:nvSpPr>
-              <p:cNvPr id="39" name="文字方塊 38">
-                <a:extLst>
-                  <a:ext uri="{FF2B5EF4-FFF2-40B4-BE49-F238E27FC236}">
-                    <a16:creationId xmlns:a16="http://schemas.microsoft.com/office/drawing/2014/main" id="{50B0F240-614A-4711-95EA-805943FA3629}"/>
-                  </a:ext>
-                </a:extLst>
-              </p:cNvPr>
-              <p:cNvSpPr txBox="1"/>
-              <p:nvPr/>
-            </p:nvSpPr>
-            <p:spPr>
-              <a:xfrm>
-                <a:off x="906268" y="3558803"/>
-                <a:ext cx="946882" cy="369332"/>
-              </a:xfrm>
-              <a:prstGeom prst="rect">
-                <a:avLst/>
-              </a:prstGeom>
-              <a:noFill/>
-            </p:spPr>
-            <p:txBody>
-              <a:bodyPr wrap="square" rtlCol="0">
-                <a:spAutoFit/>
-              </a:bodyPr>
-              <a:lstStyle/>
-              <a:p>
-                <a:pPr/>
-                <a14:m>
-                  <m:oMathPara xmlns:m="http://schemas.openxmlformats.org/officeDocument/2006/math">
-                    <m:oMathParaPr>
-                      <m:jc m:val="centerGroup"/>
-                    </m:oMathParaPr>
-                    <m:oMath xmlns:m="http://schemas.openxmlformats.org/officeDocument/2006/math">
-                      <m:r>
-                        <a:rPr lang="en-US" altLang="zh-TW" i="1">
-                          <a:latin typeface="Cambria Math" panose="02040503050406030204" pitchFamily="18" charset="0"/>
-                        </a:rPr>
-                        <m:t>ℓ=−2</m:t>
-                      </m:r>
-                    </m:oMath>
-                  </m:oMathPara>
-                </a14:m>
-                <a:endParaRPr lang="zh-TW" altLang="en-US" dirty="0"/>
-              </a:p>
-            </p:txBody>
-          </p:sp>
-        </mc:Choice>
-        <mc:Fallback>
-          <p:sp>
-            <p:nvSpPr>
-              <p:cNvPr id="39" name="文字方塊 38">
-                <a:extLst>
-                  <a:ext uri="{FF2B5EF4-FFF2-40B4-BE49-F238E27FC236}">
-                    <a16:creationId xmlns:a16="http://schemas.microsoft.com/office/drawing/2014/main" id="{50B0F240-614A-4711-95EA-805943FA3629}"/>
-                  </a:ext>
-                </a:extLst>
-              </p:cNvPr>
-              <p:cNvSpPr txBox="1">
-                <a:spLocks noRot="1" noChangeAspect="1" noMove="1" noResize="1" noEditPoints="1" noAdjustHandles="1" noChangeArrowheads="1" noChangeShapeType="1" noTextEdit="1"/>
-              </p:cNvSpPr>
-              <p:nvPr/>
-            </p:nvSpPr>
-            <p:spPr>
-              <a:xfrm>
-                <a:off x="906268" y="3558803"/>
-                <a:ext cx="946882" cy="369332"/>
-              </a:xfrm>
-              <a:prstGeom prst="rect">
-                <a:avLst/>
-              </a:prstGeom>
-              <a:blipFill>
-                <a:blip r:embed="rId18"/>
-                <a:stretch>
-                  <a:fillRect/>
-                </a:stretch>
-              </a:blipFill>
-            </p:spPr>
-            <p:txBody>
-              <a:bodyPr/>
-              <a:lstStyle/>
-              <a:p>
-                <a:r>
-                  <a:rPr lang="zh-TW" altLang="en-US">
-                    <a:noFill/>
-                  </a:rPr>
-                  <a:t> </a:t>
-                </a:r>
-              </a:p>
-            </p:txBody>
-          </p:sp>
-        </mc:Fallback>
-      </mc:AlternateContent>
-      <p:pic>
-        <p:nvPicPr>
-          <p:cNvPr id="49" name="圖片 48">
-            <a:extLst>
-              <a:ext uri="{FF2B5EF4-FFF2-40B4-BE49-F238E27FC236}">
-                <a16:creationId xmlns:a16="http://schemas.microsoft.com/office/drawing/2014/main" id="{43039747-3351-45D4-A7D9-4A0F2F4E8023}"/>
-              </a:ext>
-            </a:extLst>
-          </p:cNvPr>
-          <p:cNvPicPr>
-            <a:picLocks noChangeAspect="1"/>
-          </p:cNvPicPr>
-          <p:nvPr/>
-        </p:nvPicPr>
-        <p:blipFill>
-          <a:blip r:embed="rId19">
-            <a:clrChange>
-              <a:clrFrom>
-                <a:srgbClr val="FFFFFF"/>
-              </a:clrFrom>
-              <a:clrTo>
-                <a:srgbClr val="FFFFFF">
-                  <a:alpha val="0"/>
-                </a:srgbClr>
-              </a:clrTo>
-            </a:clrChange>
-            <a:extLst>
-              <a:ext uri="{28A0092B-C50C-407E-A947-70E740481C1C}">
-                <a14:useLocalDpi xmlns:a14="http://schemas.microsoft.com/office/drawing/2010/main" val="0"/>
-              </a:ext>
-            </a:extLst>
-          </a:blip>
-          <a:stretch>
-            <a:fillRect/>
-          </a:stretch>
-        </p:blipFill>
-        <p:spPr>
-          <a:xfrm>
-            <a:off x="236558" y="1305008"/>
-            <a:ext cx="7902000" cy="1975500"/>
-          </a:xfrm>
-          <a:prstGeom prst="rect">
-            <a:avLst/>
-          </a:prstGeom>
-        </p:spPr>
-      </p:pic>
-      <p:pic>
-        <p:nvPicPr>
-          <p:cNvPr id="51" name="圖片 50">
-            <a:extLst>
-              <a:ext uri="{FF2B5EF4-FFF2-40B4-BE49-F238E27FC236}">
-                <a16:creationId xmlns:a16="http://schemas.microsoft.com/office/drawing/2014/main" id="{6E627D55-FAFF-4B4D-BA11-25189DE629DC}"/>
-              </a:ext>
-            </a:extLst>
-          </p:cNvPr>
-          <p:cNvPicPr>
-            <a:picLocks noChangeAspect="1"/>
-          </p:cNvPicPr>
-          <p:nvPr/>
-        </p:nvPicPr>
-        <p:blipFill>
-          <a:blip r:embed="rId20">
-            <a:clrChange>
-              <a:clrFrom>
-                <a:srgbClr val="FFFFFF"/>
-              </a:clrFrom>
-              <a:clrTo>
-                <a:srgbClr val="FFFFFF">
-                  <a:alpha val="0"/>
-                </a:srgbClr>
-              </a:clrTo>
-            </a:clrChange>
-            <a:extLst>
-              <a:ext uri="{28A0092B-C50C-407E-A947-70E740481C1C}">
-                <a14:useLocalDpi xmlns:a14="http://schemas.microsoft.com/office/drawing/2010/main" val="0"/>
-              </a:ext>
-            </a:extLst>
-          </a:blip>
-          <a:stretch>
-            <a:fillRect/>
-          </a:stretch>
-        </p:blipFill>
-        <p:spPr>
-          <a:xfrm>
-            <a:off x="236558" y="3282601"/>
-            <a:ext cx="7902000" cy="1975500"/>
-          </a:xfrm>
-          <a:prstGeom prst="rect">
-            <a:avLst/>
-          </a:prstGeom>
-        </p:spPr>
-      </p:pic>
+        </p:grpSp>
+        <mc:AlternateContent xmlns:mc="http://schemas.openxmlformats.org/markup-compatibility/2006">
+          <mc:Choice xmlns:a14="http://schemas.microsoft.com/office/drawing/2010/main" Requires="a14">
+            <p:sp>
+              <p:nvSpPr>
+                <p:cNvPr id="11" name="文字方塊 10">
+                  <a:extLst>
+                    <a:ext uri="{FF2B5EF4-FFF2-40B4-BE49-F238E27FC236}">
+                      <a16:creationId xmlns:a16="http://schemas.microsoft.com/office/drawing/2014/main" id="{D8C96163-9767-4688-A88E-C1794AF3BBF5}"/>
+                    </a:ext>
+                  </a:extLst>
+                </p:cNvPr>
+                <p:cNvSpPr txBox="1"/>
+                <p:nvPr/>
+              </p:nvSpPr>
+              <p:spPr>
+                <a:xfrm>
+                  <a:off x="4612708" y="2476987"/>
+                  <a:ext cx="1133442" cy="369332"/>
+                </a:xfrm>
+                <a:prstGeom prst="rect">
+                  <a:avLst/>
+                </a:prstGeom>
+                <a:noFill/>
+              </p:spPr>
+              <p:txBody>
+                <a:bodyPr wrap="square" rtlCol="0">
+                  <a:spAutoFit/>
+                </a:bodyPr>
+                <a:lstStyle/>
+                <a:p>
+                  <a:pPr/>
+                  <a14:m>
+                    <m:oMathPara xmlns:m="http://schemas.openxmlformats.org/officeDocument/2006/math">
+                      <m:oMathParaPr>
+                        <m:jc m:val="centerGroup"/>
+                      </m:oMathParaPr>
+                      <m:oMath xmlns:m="http://schemas.openxmlformats.org/officeDocument/2006/math">
+                        <m:r>
+                          <a:rPr lang="en-US" altLang="zh-TW" i="1">
+                            <a:latin typeface="Cambria Math" panose="02040503050406030204" pitchFamily="18" charset="0"/>
+                          </a:rPr>
+                          <m:t>ℓ=0</m:t>
+                        </m:r>
+                      </m:oMath>
+                    </m:oMathPara>
+                  </a14:m>
+                  <a:endParaRPr lang="zh-TW" altLang="en-US" dirty="0"/>
+                </a:p>
+              </p:txBody>
+            </p:sp>
+          </mc:Choice>
+          <mc:Fallback>
+            <p:sp>
+              <p:nvSpPr>
+                <p:cNvPr id="11" name="文字方塊 10">
+                  <a:extLst>
+                    <a:ext uri="{FF2B5EF4-FFF2-40B4-BE49-F238E27FC236}">
+                      <a16:creationId xmlns:a16="http://schemas.microsoft.com/office/drawing/2014/main" id="{D8C96163-9767-4688-A88E-C1794AF3BBF5}"/>
+                    </a:ext>
+                  </a:extLst>
+                </p:cNvPr>
+                <p:cNvSpPr txBox="1">
+                  <a:spLocks noRot="1" noChangeAspect="1" noMove="1" noResize="1" noEditPoints="1" noAdjustHandles="1" noChangeArrowheads="1" noChangeShapeType="1" noTextEdit="1"/>
+                </p:cNvSpPr>
+                <p:nvPr/>
+              </p:nvSpPr>
+              <p:spPr>
+                <a:xfrm>
+                  <a:off x="4612708" y="2476987"/>
+                  <a:ext cx="1133442" cy="369332"/>
+                </a:xfrm>
+                <a:prstGeom prst="rect">
+                  <a:avLst/>
+                </a:prstGeom>
+                <a:blipFill>
+                  <a:blip r:embed="rId7"/>
+                  <a:stretch>
+                    <a:fillRect/>
+                  </a:stretch>
+                </a:blipFill>
+              </p:spPr>
+              <p:txBody>
+                <a:bodyPr/>
+                <a:lstStyle/>
+                <a:p>
+                  <a:r>
+                    <a:rPr lang="zh-TW" altLang="en-US">
+                      <a:noFill/>
+                    </a:rPr>
+                    <a:t> </a:t>
+                  </a:r>
+                </a:p>
+              </p:txBody>
+            </p:sp>
+          </mc:Fallback>
+        </mc:AlternateContent>
+        <mc:AlternateContent xmlns:mc="http://schemas.openxmlformats.org/markup-compatibility/2006">
+          <mc:Choice xmlns:a14="http://schemas.microsoft.com/office/drawing/2010/main" Requires="a14">
+            <p:sp>
+              <p:nvSpPr>
+                <p:cNvPr id="14" name="文字方塊 13">
+                  <a:extLst>
+                    <a:ext uri="{FF2B5EF4-FFF2-40B4-BE49-F238E27FC236}">
+                      <a16:creationId xmlns:a16="http://schemas.microsoft.com/office/drawing/2014/main" id="{3D28BAA9-20DD-40ED-A46F-E45991C2EDCA}"/>
+                    </a:ext>
+                  </a:extLst>
+                </p:cNvPr>
+                <p:cNvSpPr txBox="1"/>
+                <p:nvPr/>
+              </p:nvSpPr>
+              <p:spPr>
+                <a:xfrm>
+                  <a:off x="8184841" y="2476987"/>
+                  <a:ext cx="1133442" cy="369332"/>
+                </a:xfrm>
+                <a:prstGeom prst="rect">
+                  <a:avLst/>
+                </a:prstGeom>
+                <a:noFill/>
+              </p:spPr>
+              <p:txBody>
+                <a:bodyPr wrap="square" rtlCol="0">
+                  <a:spAutoFit/>
+                </a:bodyPr>
+                <a:lstStyle/>
+                <a:p>
+                  <a:pPr/>
+                  <a14:m>
+                    <m:oMathPara xmlns:m="http://schemas.openxmlformats.org/officeDocument/2006/math">
+                      <m:oMathParaPr>
+                        <m:jc m:val="centerGroup"/>
+                      </m:oMathParaPr>
+                      <m:oMath xmlns:m="http://schemas.openxmlformats.org/officeDocument/2006/math">
+                        <m:r>
+                          <a:rPr lang="en-US" altLang="zh-TW" i="1">
+                            <a:latin typeface="Cambria Math" panose="02040503050406030204" pitchFamily="18" charset="0"/>
+                          </a:rPr>
+                          <m:t>ℓ=2</m:t>
+                        </m:r>
+                      </m:oMath>
+                    </m:oMathPara>
+                  </a14:m>
+                  <a:endParaRPr lang="zh-TW" altLang="en-US" dirty="0"/>
+                </a:p>
+              </p:txBody>
+            </p:sp>
+          </mc:Choice>
+          <mc:Fallback>
+            <p:sp>
+              <p:nvSpPr>
+                <p:cNvPr id="14" name="文字方塊 13">
+                  <a:extLst>
+                    <a:ext uri="{FF2B5EF4-FFF2-40B4-BE49-F238E27FC236}">
+                      <a16:creationId xmlns:a16="http://schemas.microsoft.com/office/drawing/2014/main" id="{3D28BAA9-20DD-40ED-A46F-E45991C2EDCA}"/>
+                    </a:ext>
+                  </a:extLst>
+                </p:cNvPr>
+                <p:cNvSpPr txBox="1">
+                  <a:spLocks noRot="1" noChangeAspect="1" noMove="1" noResize="1" noEditPoints="1" noAdjustHandles="1" noChangeArrowheads="1" noChangeShapeType="1" noTextEdit="1"/>
+                </p:cNvSpPr>
+                <p:nvPr/>
+              </p:nvSpPr>
+              <p:spPr>
+                <a:xfrm>
+                  <a:off x="8184841" y="2476987"/>
+                  <a:ext cx="1133442" cy="369332"/>
+                </a:xfrm>
+                <a:prstGeom prst="rect">
+                  <a:avLst/>
+                </a:prstGeom>
+                <a:blipFill>
+                  <a:blip r:embed="rId8"/>
+                  <a:stretch>
+                    <a:fillRect/>
+                  </a:stretch>
+                </a:blipFill>
+              </p:spPr>
+              <p:txBody>
+                <a:bodyPr/>
+                <a:lstStyle/>
+                <a:p>
+                  <a:r>
+                    <a:rPr lang="zh-TW" altLang="en-US">
+                      <a:noFill/>
+                    </a:rPr>
+                    <a:t> </a:t>
+                  </a:r>
+                </a:p>
+              </p:txBody>
+            </p:sp>
+          </mc:Fallback>
+        </mc:AlternateContent>
+        <mc:AlternateContent xmlns:mc="http://schemas.openxmlformats.org/markup-compatibility/2006">
+          <mc:Choice xmlns:a14="http://schemas.microsoft.com/office/drawing/2010/main" Requires="a14">
+            <p:sp>
+              <p:nvSpPr>
+                <p:cNvPr id="15" name="文字方塊 14">
+                  <a:extLst>
+                    <a:ext uri="{FF2B5EF4-FFF2-40B4-BE49-F238E27FC236}">
+                      <a16:creationId xmlns:a16="http://schemas.microsoft.com/office/drawing/2014/main" id="{994AA1D4-41BC-4D85-814F-70CD2F0BDD39}"/>
+                    </a:ext>
+                  </a:extLst>
+                </p:cNvPr>
+                <p:cNvSpPr txBox="1"/>
+                <p:nvPr/>
+              </p:nvSpPr>
+              <p:spPr>
+                <a:xfrm>
+                  <a:off x="6398775" y="2476987"/>
+                  <a:ext cx="1133442" cy="369332"/>
+                </a:xfrm>
+                <a:prstGeom prst="rect">
+                  <a:avLst/>
+                </a:prstGeom>
+                <a:noFill/>
+              </p:spPr>
+              <p:txBody>
+                <a:bodyPr wrap="square" rtlCol="0">
+                  <a:spAutoFit/>
+                </a:bodyPr>
+                <a:lstStyle/>
+                <a:p>
+                  <a:pPr/>
+                  <a14:m>
+                    <m:oMathPara xmlns:m="http://schemas.openxmlformats.org/officeDocument/2006/math">
+                      <m:oMathParaPr>
+                        <m:jc m:val="centerGroup"/>
+                      </m:oMathParaPr>
+                      <m:oMath xmlns:m="http://schemas.openxmlformats.org/officeDocument/2006/math">
+                        <m:r>
+                          <a:rPr lang="en-US" altLang="zh-TW" i="1">
+                            <a:latin typeface="Cambria Math" panose="02040503050406030204" pitchFamily="18" charset="0"/>
+                          </a:rPr>
+                          <m:t>ℓ=1</m:t>
+                        </m:r>
+                      </m:oMath>
+                    </m:oMathPara>
+                  </a14:m>
+                  <a:endParaRPr lang="zh-TW" altLang="en-US" dirty="0"/>
+                </a:p>
+              </p:txBody>
+            </p:sp>
+          </mc:Choice>
+          <mc:Fallback>
+            <p:sp>
+              <p:nvSpPr>
+                <p:cNvPr id="15" name="文字方塊 14">
+                  <a:extLst>
+                    <a:ext uri="{FF2B5EF4-FFF2-40B4-BE49-F238E27FC236}">
+                      <a16:creationId xmlns:a16="http://schemas.microsoft.com/office/drawing/2014/main" id="{994AA1D4-41BC-4D85-814F-70CD2F0BDD39}"/>
+                    </a:ext>
+                  </a:extLst>
+                </p:cNvPr>
+                <p:cNvSpPr txBox="1">
+                  <a:spLocks noRot="1" noChangeAspect="1" noMove="1" noResize="1" noEditPoints="1" noAdjustHandles="1" noChangeArrowheads="1" noChangeShapeType="1" noTextEdit="1"/>
+                </p:cNvSpPr>
+                <p:nvPr/>
+              </p:nvSpPr>
+              <p:spPr>
+                <a:xfrm>
+                  <a:off x="6398775" y="2476987"/>
+                  <a:ext cx="1133442" cy="369332"/>
+                </a:xfrm>
+                <a:prstGeom prst="rect">
+                  <a:avLst/>
+                </a:prstGeom>
+                <a:blipFill>
+                  <a:blip r:embed="rId9"/>
+                  <a:stretch>
+                    <a:fillRect/>
+                  </a:stretch>
+                </a:blipFill>
+              </p:spPr>
+              <p:txBody>
+                <a:bodyPr/>
+                <a:lstStyle/>
+                <a:p>
+                  <a:r>
+                    <a:rPr lang="zh-TW" altLang="en-US">
+                      <a:noFill/>
+                    </a:rPr>
+                    <a:t> </a:t>
+                  </a:r>
+                </a:p>
+              </p:txBody>
+            </p:sp>
+          </mc:Fallback>
+        </mc:AlternateContent>
+        <mc:AlternateContent xmlns:mc="http://schemas.openxmlformats.org/markup-compatibility/2006">
+          <mc:Choice xmlns:a14="http://schemas.microsoft.com/office/drawing/2010/main" Requires="a14">
+            <p:sp>
+              <p:nvSpPr>
+                <p:cNvPr id="16" name="文字方塊 15">
+                  <a:extLst>
+                    <a:ext uri="{FF2B5EF4-FFF2-40B4-BE49-F238E27FC236}">
+                      <a16:creationId xmlns:a16="http://schemas.microsoft.com/office/drawing/2014/main" id="{2117F2F0-7B2F-4A91-A6BA-E5D10798CAEA}"/>
+                    </a:ext>
+                  </a:extLst>
+                </p:cNvPr>
+                <p:cNvSpPr txBox="1"/>
+                <p:nvPr/>
+              </p:nvSpPr>
+              <p:spPr>
+                <a:xfrm>
+                  <a:off x="2826641" y="2476987"/>
+                  <a:ext cx="1133442" cy="369332"/>
+                </a:xfrm>
+                <a:prstGeom prst="rect">
+                  <a:avLst/>
+                </a:prstGeom>
+                <a:noFill/>
+              </p:spPr>
+              <p:txBody>
+                <a:bodyPr wrap="square" rtlCol="0">
+                  <a:spAutoFit/>
+                </a:bodyPr>
+                <a:lstStyle/>
+                <a:p>
+                  <a:pPr/>
+                  <a14:m>
+                    <m:oMathPara xmlns:m="http://schemas.openxmlformats.org/officeDocument/2006/math">
+                      <m:oMathParaPr>
+                        <m:jc m:val="centerGroup"/>
+                      </m:oMathParaPr>
+                      <m:oMath xmlns:m="http://schemas.openxmlformats.org/officeDocument/2006/math">
+                        <m:r>
+                          <a:rPr lang="en-US" altLang="zh-TW" i="1">
+                            <a:latin typeface="Cambria Math" panose="02040503050406030204" pitchFamily="18" charset="0"/>
+                          </a:rPr>
+                          <m:t>ℓ=−1</m:t>
+                        </m:r>
+                      </m:oMath>
+                    </m:oMathPara>
+                  </a14:m>
+                  <a:endParaRPr lang="zh-TW" altLang="en-US" dirty="0"/>
+                </a:p>
+              </p:txBody>
+            </p:sp>
+          </mc:Choice>
+          <mc:Fallback>
+            <p:sp>
+              <p:nvSpPr>
+                <p:cNvPr id="16" name="文字方塊 15">
+                  <a:extLst>
+                    <a:ext uri="{FF2B5EF4-FFF2-40B4-BE49-F238E27FC236}">
+                      <a16:creationId xmlns:a16="http://schemas.microsoft.com/office/drawing/2014/main" id="{2117F2F0-7B2F-4A91-A6BA-E5D10798CAEA}"/>
+                    </a:ext>
+                  </a:extLst>
+                </p:cNvPr>
+                <p:cNvSpPr txBox="1">
+                  <a:spLocks noRot="1" noChangeAspect="1" noMove="1" noResize="1" noEditPoints="1" noAdjustHandles="1" noChangeArrowheads="1" noChangeShapeType="1" noTextEdit="1"/>
+                </p:cNvSpPr>
+                <p:nvPr/>
+              </p:nvSpPr>
+              <p:spPr>
+                <a:xfrm>
+                  <a:off x="2826641" y="2476987"/>
+                  <a:ext cx="1133442" cy="369332"/>
+                </a:xfrm>
+                <a:prstGeom prst="rect">
+                  <a:avLst/>
+                </a:prstGeom>
+                <a:blipFill>
+                  <a:blip r:embed="rId10"/>
+                  <a:stretch>
+                    <a:fillRect/>
+                  </a:stretch>
+                </a:blipFill>
+              </p:spPr>
+              <p:txBody>
+                <a:bodyPr/>
+                <a:lstStyle/>
+                <a:p>
+                  <a:r>
+                    <a:rPr lang="zh-TW" altLang="en-US">
+                      <a:noFill/>
+                    </a:rPr>
+                    <a:t> </a:t>
+                  </a:r>
+                </a:p>
+              </p:txBody>
+            </p:sp>
+          </mc:Fallback>
+        </mc:AlternateContent>
+        <mc:AlternateContent xmlns:mc="http://schemas.openxmlformats.org/markup-compatibility/2006">
+          <mc:Choice xmlns:a14="http://schemas.microsoft.com/office/drawing/2010/main" Requires="a14">
+            <p:sp>
+              <p:nvSpPr>
+                <p:cNvPr id="17" name="文字方塊 16">
+                  <a:extLst>
+                    <a:ext uri="{FF2B5EF4-FFF2-40B4-BE49-F238E27FC236}">
+                      <a16:creationId xmlns:a16="http://schemas.microsoft.com/office/drawing/2014/main" id="{DA50C79D-1CDD-453A-9616-E6E2E9AF781A}"/>
+                    </a:ext>
+                  </a:extLst>
+                </p:cNvPr>
+                <p:cNvSpPr txBox="1"/>
+                <p:nvPr/>
+              </p:nvSpPr>
+              <p:spPr>
+                <a:xfrm>
+                  <a:off x="1040575" y="2476987"/>
+                  <a:ext cx="1133442" cy="369332"/>
+                </a:xfrm>
+                <a:prstGeom prst="rect">
+                  <a:avLst/>
+                </a:prstGeom>
+                <a:noFill/>
+              </p:spPr>
+              <p:txBody>
+                <a:bodyPr wrap="square" rtlCol="0">
+                  <a:spAutoFit/>
+                </a:bodyPr>
+                <a:lstStyle/>
+                <a:p>
+                  <a:pPr/>
+                  <a14:m>
+                    <m:oMathPara xmlns:m="http://schemas.openxmlformats.org/officeDocument/2006/math">
+                      <m:oMathParaPr>
+                        <m:jc m:val="centerGroup"/>
+                      </m:oMathParaPr>
+                      <m:oMath xmlns:m="http://schemas.openxmlformats.org/officeDocument/2006/math">
+                        <m:r>
+                          <a:rPr lang="en-US" altLang="zh-TW" i="1">
+                            <a:latin typeface="Cambria Math" panose="02040503050406030204" pitchFamily="18" charset="0"/>
+                          </a:rPr>
+                          <m:t>ℓ=−2</m:t>
+                        </m:r>
+                      </m:oMath>
+                    </m:oMathPara>
+                  </a14:m>
+                  <a:endParaRPr lang="zh-TW" altLang="en-US" dirty="0"/>
+                </a:p>
+              </p:txBody>
+            </p:sp>
+          </mc:Choice>
+          <mc:Fallback>
+            <p:sp>
+              <p:nvSpPr>
+                <p:cNvPr id="17" name="文字方塊 16">
+                  <a:extLst>
+                    <a:ext uri="{FF2B5EF4-FFF2-40B4-BE49-F238E27FC236}">
+                      <a16:creationId xmlns:a16="http://schemas.microsoft.com/office/drawing/2014/main" id="{DA50C79D-1CDD-453A-9616-E6E2E9AF781A}"/>
+                    </a:ext>
+                  </a:extLst>
+                </p:cNvPr>
+                <p:cNvSpPr txBox="1">
+                  <a:spLocks noRot="1" noChangeAspect="1" noMove="1" noResize="1" noEditPoints="1" noAdjustHandles="1" noChangeArrowheads="1" noChangeShapeType="1" noTextEdit="1"/>
+                </p:cNvSpPr>
+                <p:nvPr/>
+              </p:nvSpPr>
+              <p:spPr>
+                <a:xfrm>
+                  <a:off x="1040575" y="2476987"/>
+                  <a:ext cx="1133442" cy="369332"/>
+                </a:xfrm>
+                <a:prstGeom prst="rect">
+                  <a:avLst/>
+                </a:prstGeom>
+                <a:blipFill>
+                  <a:blip r:embed="rId11"/>
+                  <a:stretch>
+                    <a:fillRect/>
+                  </a:stretch>
+                </a:blipFill>
+              </p:spPr>
+              <p:txBody>
+                <a:bodyPr/>
+                <a:lstStyle/>
+                <a:p>
+                  <a:r>
+                    <a:rPr lang="zh-TW" altLang="en-US">
+                      <a:noFill/>
+                    </a:rPr>
+                    <a:t> </a:t>
+                  </a:r>
+                </a:p>
+              </p:txBody>
+            </p:sp>
+          </mc:Fallback>
+        </mc:AlternateContent>
+        <mc:AlternateContent xmlns:mc="http://schemas.openxmlformats.org/markup-compatibility/2006">
+          <mc:Choice xmlns:a14="http://schemas.microsoft.com/office/drawing/2010/main" Requires="a14">
+            <p:sp>
+              <p:nvSpPr>
+                <p:cNvPr id="19" name="文字方塊 18">
+                  <a:extLst>
+                    <a:ext uri="{FF2B5EF4-FFF2-40B4-BE49-F238E27FC236}">
+                      <a16:creationId xmlns:a16="http://schemas.microsoft.com/office/drawing/2014/main" id="{464B4E54-4144-40A8-8AAB-0B5CEB8C51DA}"/>
+                    </a:ext>
+                  </a:extLst>
+                </p:cNvPr>
+                <p:cNvSpPr txBox="1"/>
+                <p:nvPr/>
+              </p:nvSpPr>
+              <p:spPr>
+                <a:xfrm>
+                  <a:off x="2606829" y="3678486"/>
+                  <a:ext cx="508459" cy="369332"/>
+                </a:xfrm>
+                <a:prstGeom prst="rect">
+                  <a:avLst/>
+                </a:prstGeom>
+                <a:noFill/>
+              </p:spPr>
+              <p:txBody>
+                <a:bodyPr wrap="square" rtlCol="0">
+                  <a:spAutoFit/>
+                </a:bodyPr>
+                <a:lstStyle/>
+                <a:p>
+                  <a:pPr/>
+                  <a14:m>
+                    <m:oMathPara xmlns:m="http://schemas.openxmlformats.org/officeDocument/2006/math">
+                      <m:oMathParaPr>
+                        <m:jc m:val="centerGroup"/>
+                      </m:oMathParaPr>
+                      <m:oMath xmlns:m="http://schemas.openxmlformats.org/officeDocument/2006/math">
+                        <m:r>
+                          <m:rPr>
+                            <m:sty m:val="p"/>
+                          </m:rPr>
+                          <a:rPr lang="en-US" altLang="zh-TW">
+                            <a:latin typeface="Cambria Math" panose="02040503050406030204" pitchFamily="18" charset="0"/>
+                          </a:rPr>
+                          <m:t>um</m:t>
+                        </m:r>
+                      </m:oMath>
+                    </m:oMathPara>
+                  </a14:m>
+                  <a:endParaRPr lang="zh-TW" altLang="en-US" dirty="0"/>
+                </a:p>
+              </p:txBody>
+            </p:sp>
+          </mc:Choice>
+          <mc:Fallback>
+            <p:sp>
+              <p:nvSpPr>
+                <p:cNvPr id="19" name="文字方塊 18">
+                  <a:extLst>
+                    <a:ext uri="{FF2B5EF4-FFF2-40B4-BE49-F238E27FC236}">
+                      <a16:creationId xmlns:a16="http://schemas.microsoft.com/office/drawing/2014/main" id="{464B4E54-4144-40A8-8AAB-0B5CEB8C51DA}"/>
+                    </a:ext>
+                  </a:extLst>
+                </p:cNvPr>
+                <p:cNvSpPr txBox="1">
+                  <a:spLocks noRot="1" noChangeAspect="1" noMove="1" noResize="1" noEditPoints="1" noAdjustHandles="1" noChangeArrowheads="1" noChangeShapeType="1" noTextEdit="1"/>
+                </p:cNvSpPr>
+                <p:nvPr/>
+              </p:nvSpPr>
+              <p:spPr>
+                <a:xfrm>
+                  <a:off x="2606829" y="3678486"/>
+                  <a:ext cx="508459" cy="369332"/>
+                </a:xfrm>
+                <a:prstGeom prst="rect">
+                  <a:avLst/>
+                </a:prstGeom>
+                <a:blipFill>
+                  <a:blip r:embed="rId12"/>
+                  <a:stretch>
+                    <a:fillRect/>
+                  </a:stretch>
+                </a:blipFill>
+              </p:spPr>
+              <p:txBody>
+                <a:bodyPr/>
+                <a:lstStyle/>
+                <a:p>
+                  <a:r>
+                    <a:rPr lang="zh-TW" altLang="en-US">
+                      <a:noFill/>
+                    </a:rPr>
+                    <a:t> </a:t>
+                  </a:r>
+                </a:p>
+              </p:txBody>
+            </p:sp>
+          </mc:Fallback>
+        </mc:AlternateContent>
+        <p:sp>
+          <p:nvSpPr>
+            <p:cNvPr id="28" name="文字方塊 27">
+              <a:extLst>
+                <a:ext uri="{FF2B5EF4-FFF2-40B4-BE49-F238E27FC236}">
+                  <a16:creationId xmlns:a16="http://schemas.microsoft.com/office/drawing/2014/main" id="{96FB43A9-3278-4E56-912E-CFF2E8562ACF}"/>
+                </a:ext>
+              </a:extLst>
+            </p:cNvPr>
+            <p:cNvSpPr txBox="1"/>
+            <p:nvPr/>
+          </p:nvSpPr>
+          <p:spPr>
+            <a:xfrm rot="16200000">
+              <a:off x="-743076" y="5382051"/>
+              <a:ext cx="2031323" cy="400110"/>
+            </a:xfrm>
+            <a:prstGeom prst="rect">
+              <a:avLst/>
+            </a:prstGeom>
+            <a:noFill/>
+          </p:spPr>
+          <p:txBody>
+            <a:bodyPr wrap="square" rtlCol="0">
+              <a:spAutoFit/>
+            </a:bodyPr>
+            <a:lstStyle/>
+            <a:p>
+              <a:pPr algn="ctr"/>
+              <a:r>
+                <a:rPr lang="en-US" altLang="zh-TW" sz="2000" dirty="0"/>
+                <a:t>arbitrary units</a:t>
+              </a:r>
+              <a:endParaRPr lang="zh-TW" altLang="en-US" sz="2000" dirty="0"/>
+            </a:p>
+          </p:txBody>
+        </p:sp>
+        <mc:AlternateContent xmlns:mc="http://schemas.openxmlformats.org/markup-compatibility/2006">
+          <mc:Choice xmlns:a14="http://schemas.microsoft.com/office/drawing/2010/main" Requires="a14">
+            <p:sp>
+              <p:nvSpPr>
+                <p:cNvPr id="24" name="矩形 23">
+                  <a:extLst>
+                    <a:ext uri="{FF2B5EF4-FFF2-40B4-BE49-F238E27FC236}">
+                      <a16:creationId xmlns:a16="http://schemas.microsoft.com/office/drawing/2014/main" id="{85C75D81-2733-4604-A08E-3B935881865C}"/>
+                    </a:ext>
+                  </a:extLst>
+                </p:cNvPr>
+                <p:cNvSpPr/>
+                <p:nvPr/>
+              </p:nvSpPr>
+              <p:spPr>
+                <a:xfrm>
+                  <a:off x="4194028" y="2036969"/>
+                  <a:ext cx="2187933" cy="369332"/>
+                </a:xfrm>
+                <a:prstGeom prst="rect">
+                  <a:avLst/>
+                </a:prstGeom>
+              </p:spPr>
+              <p:txBody>
+                <a:bodyPr wrap="square">
+                  <a:spAutoFit/>
+                </a:bodyPr>
+                <a:lstStyle/>
+                <a:p>
+                  <a:pPr/>
+                  <a14:m>
+                    <m:oMathPara xmlns:m="http://schemas.openxmlformats.org/officeDocument/2006/math">
+                      <m:oMathParaPr>
+                        <m:jc m:val="centerGroup"/>
+                      </m:oMathParaPr>
+                      <m:oMath xmlns:m="http://schemas.openxmlformats.org/officeDocument/2006/math">
+                        <m:sSub>
+                          <m:sSubPr>
+                            <m:ctrlPr>
+                              <a:rPr lang="en-US" altLang="zh-TW" i="1">
+                                <a:latin typeface="Cambria Math" panose="02040503050406030204" pitchFamily="18" charset="0"/>
+                              </a:rPr>
+                            </m:ctrlPr>
+                          </m:sSubPr>
+                          <m:e>
+                            <m:r>
+                              <a:rPr lang="en-US" altLang="zh-TW" i="1">
+                                <a:latin typeface="Cambria Math" panose="02040503050406030204" pitchFamily="18" charset="0"/>
+                              </a:rPr>
+                              <m:t>𝑊</m:t>
+                            </m:r>
+                          </m:e>
+                          <m:sub>
+                            <m:r>
+                              <a:rPr lang="en-US" altLang="zh-TW" i="1">
+                                <a:latin typeface="Cambria Math" panose="02040503050406030204" pitchFamily="18" charset="0"/>
+                              </a:rPr>
+                              <m:t>0</m:t>
+                            </m:r>
+                          </m:sub>
+                        </m:sSub>
+                        <m:r>
+                          <a:rPr lang="en-US" altLang="zh-TW" i="1">
+                            <a:latin typeface="Cambria Math" panose="02040503050406030204" pitchFamily="18" charset="0"/>
+                          </a:rPr>
+                          <m:t>=1.5</m:t>
+                        </m:r>
+                        <m:r>
+                          <a:rPr lang="en-US" altLang="zh-TW">
+                            <a:latin typeface="Cambria Math" panose="02040503050406030204" pitchFamily="18" charset="0"/>
+                          </a:rPr>
+                          <m:t> </m:t>
+                        </m:r>
+                        <m:r>
+                          <m:rPr>
+                            <m:sty m:val="p"/>
+                          </m:rPr>
+                          <a:rPr lang="en-US" altLang="zh-TW">
+                            <a:latin typeface="Cambria Math" panose="02040503050406030204" pitchFamily="18" charset="0"/>
+                          </a:rPr>
+                          <m:t>um</m:t>
+                        </m:r>
+                      </m:oMath>
+                    </m:oMathPara>
+                  </a14:m>
+                  <a:endParaRPr lang="zh-TW" altLang="en-US" dirty="0"/>
+                </a:p>
+              </p:txBody>
+            </p:sp>
+          </mc:Choice>
+          <mc:Fallback>
+            <p:sp>
+              <p:nvSpPr>
+                <p:cNvPr id="24" name="矩形 23">
+                  <a:extLst>
+                    <a:ext uri="{FF2B5EF4-FFF2-40B4-BE49-F238E27FC236}">
+                      <a16:creationId xmlns:a16="http://schemas.microsoft.com/office/drawing/2014/main" id="{85C75D81-2733-4604-A08E-3B935881865C}"/>
+                    </a:ext>
+                  </a:extLst>
+                </p:cNvPr>
+                <p:cNvSpPr>
+                  <a:spLocks noRot="1" noChangeAspect="1" noMove="1" noResize="1" noEditPoints="1" noAdjustHandles="1" noChangeArrowheads="1" noChangeShapeType="1" noTextEdit="1"/>
+                </p:cNvSpPr>
+                <p:nvPr/>
+              </p:nvSpPr>
+              <p:spPr>
+                <a:xfrm>
+                  <a:off x="4194028" y="2036969"/>
+                  <a:ext cx="2187933" cy="369332"/>
+                </a:xfrm>
+                <a:prstGeom prst="rect">
+                  <a:avLst/>
+                </a:prstGeom>
+                <a:blipFill>
+                  <a:blip r:embed="rId13"/>
+                  <a:stretch>
+                    <a:fillRect/>
+                  </a:stretch>
+                </a:blipFill>
+              </p:spPr>
+              <p:txBody>
+                <a:bodyPr/>
+                <a:lstStyle/>
+                <a:p>
+                  <a:r>
+                    <a:rPr lang="zh-TW" altLang="en-US">
+                      <a:noFill/>
+                    </a:rPr>
+                    <a:t> </a:t>
+                  </a:r>
+                </a:p>
+              </p:txBody>
+            </p:sp>
+          </mc:Fallback>
+        </mc:AlternateContent>
+        <p:sp>
+          <p:nvSpPr>
+            <p:cNvPr id="26" name="文字方塊 25">
+              <a:extLst>
+                <a:ext uri="{FF2B5EF4-FFF2-40B4-BE49-F238E27FC236}">
+                  <a16:creationId xmlns:a16="http://schemas.microsoft.com/office/drawing/2014/main" id="{83A5726D-6BB7-44DA-A5F4-030C4EF7D79B}"/>
+                </a:ext>
+              </a:extLst>
+            </p:cNvPr>
+            <p:cNvSpPr txBox="1"/>
+            <p:nvPr/>
+          </p:nvSpPr>
+          <p:spPr>
+            <a:xfrm rot="16200000">
+              <a:off x="-763328" y="3009074"/>
+              <a:ext cx="2031323" cy="400110"/>
+            </a:xfrm>
+            <a:prstGeom prst="rect">
+              <a:avLst/>
+            </a:prstGeom>
+            <a:noFill/>
+          </p:spPr>
+          <p:txBody>
+            <a:bodyPr wrap="square" rtlCol="0">
+              <a:spAutoFit/>
+            </a:bodyPr>
+            <a:lstStyle/>
+            <a:p>
+              <a:pPr algn="ctr"/>
+              <a:r>
+                <a:rPr lang="en-US" altLang="zh-TW" sz="2000" dirty="0"/>
+                <a:t>arbitrary units</a:t>
+              </a:r>
+              <a:endParaRPr lang="zh-TW" altLang="en-US" sz="2000" dirty="0"/>
+            </a:p>
+          </p:txBody>
+        </p:sp>
+        <mc:AlternateContent xmlns:mc="http://schemas.openxmlformats.org/markup-compatibility/2006">
+          <mc:Choice xmlns:a14="http://schemas.microsoft.com/office/drawing/2010/main" Requires="a14">
+            <p:sp>
+              <p:nvSpPr>
+                <p:cNvPr id="27" name="矩形 26">
+                  <a:extLst>
+                    <a:ext uri="{FF2B5EF4-FFF2-40B4-BE49-F238E27FC236}">
+                      <a16:creationId xmlns:a16="http://schemas.microsoft.com/office/drawing/2014/main" id="{E45021D2-AA8E-4751-8F35-CECE862330D7}"/>
+                    </a:ext>
+                  </a:extLst>
+                </p:cNvPr>
+                <p:cNvSpPr/>
+                <p:nvPr/>
+              </p:nvSpPr>
+              <p:spPr>
+                <a:xfrm>
+                  <a:off x="4243198" y="4408262"/>
+                  <a:ext cx="2187933" cy="369332"/>
+                </a:xfrm>
+                <a:prstGeom prst="rect">
+                  <a:avLst/>
+                </a:prstGeom>
+              </p:spPr>
+              <p:txBody>
+                <a:bodyPr wrap="square">
+                  <a:spAutoFit/>
+                </a:bodyPr>
+                <a:lstStyle/>
+                <a:p>
+                  <a:pPr/>
+                  <a14:m>
+                    <m:oMathPara xmlns:m="http://schemas.openxmlformats.org/officeDocument/2006/math">
+                      <m:oMathParaPr>
+                        <m:jc m:val="centerGroup"/>
+                      </m:oMathParaPr>
+                      <m:oMath xmlns:m="http://schemas.openxmlformats.org/officeDocument/2006/math">
+                        <m:sSub>
+                          <m:sSubPr>
+                            <m:ctrlPr>
+                              <a:rPr lang="en-US" altLang="zh-TW" i="1">
+                                <a:latin typeface="Cambria Math" panose="02040503050406030204" pitchFamily="18" charset="0"/>
+                              </a:rPr>
+                            </m:ctrlPr>
+                          </m:sSubPr>
+                          <m:e>
+                            <m:r>
+                              <a:rPr lang="en-US" altLang="zh-TW" i="1">
+                                <a:latin typeface="Cambria Math" panose="02040503050406030204" pitchFamily="18" charset="0"/>
+                              </a:rPr>
+                              <m:t>𝑊</m:t>
+                            </m:r>
+                          </m:e>
+                          <m:sub>
+                            <m:r>
+                              <a:rPr lang="en-US" altLang="zh-TW" i="1">
+                                <a:latin typeface="Cambria Math" panose="02040503050406030204" pitchFamily="18" charset="0"/>
+                              </a:rPr>
+                              <m:t>0</m:t>
+                            </m:r>
+                          </m:sub>
+                        </m:sSub>
+                        <m:r>
+                          <a:rPr lang="en-US" altLang="zh-TW" i="1">
+                            <a:latin typeface="Cambria Math" panose="02040503050406030204" pitchFamily="18" charset="0"/>
+                            <a:ea typeface="Cambria Math" panose="02040503050406030204" pitchFamily="18" charset="0"/>
+                          </a:rPr>
+                          <m:t>=0</m:t>
+                        </m:r>
+                        <m:r>
+                          <a:rPr lang="en-US" altLang="zh-TW">
+                            <a:latin typeface="Cambria Math" panose="02040503050406030204" pitchFamily="18" charset="0"/>
+                            <a:ea typeface="Cambria Math" panose="02040503050406030204" pitchFamily="18" charset="0"/>
+                          </a:rPr>
+                          <m:t>.5 </m:t>
+                        </m:r>
+                        <m:r>
+                          <m:rPr>
+                            <m:sty m:val="p"/>
+                          </m:rPr>
+                          <a:rPr lang="en-US" altLang="zh-TW">
+                            <a:latin typeface="Cambria Math" panose="02040503050406030204" pitchFamily="18" charset="0"/>
+                            <a:ea typeface="Cambria Math" panose="02040503050406030204" pitchFamily="18" charset="0"/>
+                          </a:rPr>
+                          <m:t>um</m:t>
+                        </m:r>
+                      </m:oMath>
+                    </m:oMathPara>
+                  </a14:m>
+                  <a:endParaRPr lang="zh-TW" altLang="en-US" dirty="0"/>
+                </a:p>
+              </p:txBody>
+            </p:sp>
+          </mc:Choice>
+          <mc:Fallback>
+            <p:sp>
+              <p:nvSpPr>
+                <p:cNvPr id="27" name="矩形 26">
+                  <a:extLst>
+                    <a:ext uri="{FF2B5EF4-FFF2-40B4-BE49-F238E27FC236}">
+                      <a16:creationId xmlns:a16="http://schemas.microsoft.com/office/drawing/2014/main" id="{E45021D2-AA8E-4751-8F35-CECE862330D7}"/>
+                    </a:ext>
+                  </a:extLst>
+                </p:cNvPr>
+                <p:cNvSpPr>
+                  <a:spLocks noRot="1" noChangeAspect="1" noMove="1" noResize="1" noEditPoints="1" noAdjustHandles="1" noChangeArrowheads="1" noChangeShapeType="1" noTextEdit="1"/>
+                </p:cNvSpPr>
+                <p:nvPr/>
+              </p:nvSpPr>
+              <p:spPr>
+                <a:xfrm>
+                  <a:off x="4243198" y="4408262"/>
+                  <a:ext cx="2187933" cy="369332"/>
+                </a:xfrm>
+                <a:prstGeom prst="rect">
+                  <a:avLst/>
+                </a:prstGeom>
+                <a:blipFill>
+                  <a:blip r:embed="rId14"/>
+                  <a:stretch>
+                    <a:fillRect/>
+                  </a:stretch>
+                </a:blipFill>
+              </p:spPr>
+              <p:txBody>
+                <a:bodyPr/>
+                <a:lstStyle/>
+                <a:p>
+                  <a:r>
+                    <a:rPr lang="zh-TW" altLang="en-US">
+                      <a:noFill/>
+                    </a:rPr>
+                    <a:t> </a:t>
+                  </a:r>
+                </a:p>
+              </p:txBody>
+            </p:sp>
+          </mc:Fallback>
+        </mc:AlternateContent>
+        <mc:AlternateContent xmlns:mc="http://schemas.openxmlformats.org/markup-compatibility/2006">
+          <mc:Choice xmlns:a14="http://schemas.microsoft.com/office/drawing/2010/main" Requires="a14">
+            <p:sp>
+              <p:nvSpPr>
+                <p:cNvPr id="32" name="文字方塊 31">
+                  <a:extLst>
+                    <a:ext uri="{FF2B5EF4-FFF2-40B4-BE49-F238E27FC236}">
+                      <a16:creationId xmlns:a16="http://schemas.microsoft.com/office/drawing/2014/main" id="{68CC5F03-FE23-49D4-934E-34231E7D27F3}"/>
+                    </a:ext>
+                  </a:extLst>
+                </p:cNvPr>
+                <p:cNvSpPr txBox="1"/>
+                <p:nvPr/>
+              </p:nvSpPr>
+              <p:spPr>
+                <a:xfrm>
+                  <a:off x="2656460" y="6048688"/>
+                  <a:ext cx="508459" cy="369332"/>
+                </a:xfrm>
+                <a:prstGeom prst="rect">
+                  <a:avLst/>
+                </a:prstGeom>
+                <a:noFill/>
+              </p:spPr>
+              <p:txBody>
+                <a:bodyPr wrap="square" rtlCol="0">
+                  <a:spAutoFit/>
+                </a:bodyPr>
+                <a:lstStyle/>
+                <a:p>
+                  <a:pPr/>
+                  <a14:m>
+                    <m:oMathPara xmlns:m="http://schemas.openxmlformats.org/officeDocument/2006/math">
+                      <m:oMathParaPr>
+                        <m:jc m:val="centerGroup"/>
+                      </m:oMathParaPr>
+                      <m:oMath xmlns:m="http://schemas.openxmlformats.org/officeDocument/2006/math">
+                        <m:r>
+                          <m:rPr>
+                            <m:sty m:val="p"/>
+                          </m:rPr>
+                          <a:rPr lang="en-US" altLang="zh-TW">
+                            <a:latin typeface="Cambria Math" panose="02040503050406030204" pitchFamily="18" charset="0"/>
+                          </a:rPr>
+                          <m:t>um</m:t>
+                        </m:r>
+                      </m:oMath>
+                    </m:oMathPara>
+                  </a14:m>
+                  <a:endParaRPr lang="zh-TW" altLang="en-US" dirty="0"/>
+                </a:p>
+              </p:txBody>
+            </p:sp>
+          </mc:Choice>
+          <mc:Fallback>
+            <p:sp>
+              <p:nvSpPr>
+                <p:cNvPr id="32" name="文字方塊 31">
+                  <a:extLst>
+                    <a:ext uri="{FF2B5EF4-FFF2-40B4-BE49-F238E27FC236}">
+                      <a16:creationId xmlns:a16="http://schemas.microsoft.com/office/drawing/2014/main" id="{68CC5F03-FE23-49D4-934E-34231E7D27F3}"/>
+                    </a:ext>
+                  </a:extLst>
+                </p:cNvPr>
+                <p:cNvSpPr txBox="1">
+                  <a:spLocks noRot="1" noChangeAspect="1" noMove="1" noResize="1" noEditPoints="1" noAdjustHandles="1" noChangeArrowheads="1" noChangeShapeType="1" noTextEdit="1"/>
+                </p:cNvSpPr>
+                <p:nvPr/>
+              </p:nvSpPr>
+              <p:spPr>
+                <a:xfrm>
+                  <a:off x="2656460" y="6048688"/>
+                  <a:ext cx="508459" cy="369332"/>
+                </a:xfrm>
+                <a:prstGeom prst="rect">
+                  <a:avLst/>
+                </a:prstGeom>
+                <a:blipFill>
+                  <a:blip r:embed="rId15"/>
+                  <a:stretch>
+                    <a:fillRect/>
+                  </a:stretch>
+                </a:blipFill>
+              </p:spPr>
+              <p:txBody>
+                <a:bodyPr/>
+                <a:lstStyle/>
+                <a:p>
+                  <a:r>
+                    <a:rPr lang="zh-TW" altLang="en-US">
+                      <a:noFill/>
+                    </a:rPr>
+                    <a:t> </a:t>
+                  </a:r>
+                </a:p>
+              </p:txBody>
+            </p:sp>
+          </mc:Fallback>
+        </mc:AlternateContent>
+        <mc:AlternateContent xmlns:mc="http://schemas.openxmlformats.org/markup-compatibility/2006">
+          <mc:Choice xmlns:a14="http://schemas.microsoft.com/office/drawing/2010/main" Requires="a14">
+            <p:sp>
+              <p:nvSpPr>
+                <p:cNvPr id="35" name="文字方塊 34">
+                  <a:extLst>
+                    <a:ext uri="{FF2B5EF4-FFF2-40B4-BE49-F238E27FC236}">
+                      <a16:creationId xmlns:a16="http://schemas.microsoft.com/office/drawing/2014/main" id="{43F95930-E1A0-4A18-AA43-293BA5F27B78}"/>
+                    </a:ext>
+                  </a:extLst>
+                </p:cNvPr>
+                <p:cNvSpPr txBox="1"/>
+                <p:nvPr/>
+              </p:nvSpPr>
+              <p:spPr>
+                <a:xfrm>
+                  <a:off x="4612708" y="4847853"/>
+                  <a:ext cx="1133442" cy="369332"/>
+                </a:xfrm>
+                <a:prstGeom prst="rect">
+                  <a:avLst/>
+                </a:prstGeom>
+                <a:noFill/>
+              </p:spPr>
+              <p:txBody>
+                <a:bodyPr wrap="square" rtlCol="0">
+                  <a:spAutoFit/>
+                </a:bodyPr>
+                <a:lstStyle/>
+                <a:p>
+                  <a:pPr/>
+                  <a14:m>
+                    <m:oMathPara xmlns:m="http://schemas.openxmlformats.org/officeDocument/2006/math">
+                      <m:oMathParaPr>
+                        <m:jc m:val="centerGroup"/>
+                      </m:oMathParaPr>
+                      <m:oMath xmlns:m="http://schemas.openxmlformats.org/officeDocument/2006/math">
+                        <m:r>
+                          <a:rPr lang="en-US" altLang="zh-TW" i="1">
+                            <a:latin typeface="Cambria Math" panose="02040503050406030204" pitchFamily="18" charset="0"/>
+                          </a:rPr>
+                          <m:t>ℓ=0</m:t>
+                        </m:r>
+                      </m:oMath>
+                    </m:oMathPara>
+                  </a14:m>
+                  <a:endParaRPr lang="zh-TW" altLang="en-US" dirty="0"/>
+                </a:p>
+              </p:txBody>
+            </p:sp>
+          </mc:Choice>
+          <mc:Fallback>
+            <p:sp>
+              <p:nvSpPr>
+                <p:cNvPr id="35" name="文字方塊 34">
+                  <a:extLst>
+                    <a:ext uri="{FF2B5EF4-FFF2-40B4-BE49-F238E27FC236}">
+                      <a16:creationId xmlns:a16="http://schemas.microsoft.com/office/drawing/2014/main" id="{43F95930-E1A0-4A18-AA43-293BA5F27B78}"/>
+                    </a:ext>
+                  </a:extLst>
+                </p:cNvPr>
+                <p:cNvSpPr txBox="1">
+                  <a:spLocks noRot="1" noChangeAspect="1" noMove="1" noResize="1" noEditPoints="1" noAdjustHandles="1" noChangeArrowheads="1" noChangeShapeType="1" noTextEdit="1"/>
+                </p:cNvSpPr>
+                <p:nvPr/>
+              </p:nvSpPr>
+              <p:spPr>
+                <a:xfrm>
+                  <a:off x="4612708" y="4847853"/>
+                  <a:ext cx="1133442" cy="369332"/>
+                </a:xfrm>
+                <a:prstGeom prst="rect">
+                  <a:avLst/>
+                </a:prstGeom>
+                <a:blipFill>
+                  <a:blip r:embed="rId16"/>
+                  <a:stretch>
+                    <a:fillRect/>
+                  </a:stretch>
+                </a:blipFill>
+              </p:spPr>
+              <p:txBody>
+                <a:bodyPr/>
+                <a:lstStyle/>
+                <a:p>
+                  <a:r>
+                    <a:rPr lang="zh-TW" altLang="en-US">
+                      <a:noFill/>
+                    </a:rPr>
+                    <a:t> </a:t>
+                  </a:r>
+                </a:p>
+              </p:txBody>
+            </p:sp>
+          </mc:Fallback>
+        </mc:AlternateContent>
+        <mc:AlternateContent xmlns:mc="http://schemas.openxmlformats.org/markup-compatibility/2006">
+          <mc:Choice xmlns:a14="http://schemas.microsoft.com/office/drawing/2010/main" Requires="a14">
+            <p:sp>
+              <p:nvSpPr>
+                <p:cNvPr id="36" name="文字方塊 35">
+                  <a:extLst>
+                    <a:ext uri="{FF2B5EF4-FFF2-40B4-BE49-F238E27FC236}">
+                      <a16:creationId xmlns:a16="http://schemas.microsoft.com/office/drawing/2014/main" id="{BDB64F1F-26FF-4383-BC09-17687EA19021}"/>
+                    </a:ext>
+                  </a:extLst>
+                </p:cNvPr>
+                <p:cNvSpPr txBox="1"/>
+                <p:nvPr/>
+              </p:nvSpPr>
+              <p:spPr>
+                <a:xfrm>
+                  <a:off x="8184841" y="4847853"/>
+                  <a:ext cx="1133442" cy="369332"/>
+                </a:xfrm>
+                <a:prstGeom prst="rect">
+                  <a:avLst/>
+                </a:prstGeom>
+                <a:noFill/>
+              </p:spPr>
+              <p:txBody>
+                <a:bodyPr wrap="square" rtlCol="0">
+                  <a:spAutoFit/>
+                </a:bodyPr>
+                <a:lstStyle/>
+                <a:p>
+                  <a:pPr/>
+                  <a14:m>
+                    <m:oMathPara xmlns:m="http://schemas.openxmlformats.org/officeDocument/2006/math">
+                      <m:oMathParaPr>
+                        <m:jc m:val="centerGroup"/>
+                      </m:oMathParaPr>
+                      <m:oMath xmlns:m="http://schemas.openxmlformats.org/officeDocument/2006/math">
+                        <m:r>
+                          <a:rPr lang="en-US" altLang="zh-TW" i="1">
+                            <a:latin typeface="Cambria Math" panose="02040503050406030204" pitchFamily="18" charset="0"/>
+                          </a:rPr>
+                          <m:t>ℓ=2</m:t>
+                        </m:r>
+                      </m:oMath>
+                    </m:oMathPara>
+                  </a14:m>
+                  <a:endParaRPr lang="zh-TW" altLang="en-US" dirty="0"/>
+                </a:p>
+              </p:txBody>
+            </p:sp>
+          </mc:Choice>
+          <mc:Fallback>
+            <p:sp>
+              <p:nvSpPr>
+                <p:cNvPr id="36" name="文字方塊 35">
+                  <a:extLst>
+                    <a:ext uri="{FF2B5EF4-FFF2-40B4-BE49-F238E27FC236}">
+                      <a16:creationId xmlns:a16="http://schemas.microsoft.com/office/drawing/2014/main" id="{BDB64F1F-26FF-4383-BC09-17687EA19021}"/>
+                    </a:ext>
+                  </a:extLst>
+                </p:cNvPr>
+                <p:cNvSpPr txBox="1">
+                  <a:spLocks noRot="1" noChangeAspect="1" noMove="1" noResize="1" noEditPoints="1" noAdjustHandles="1" noChangeArrowheads="1" noChangeShapeType="1" noTextEdit="1"/>
+                </p:cNvSpPr>
+                <p:nvPr/>
+              </p:nvSpPr>
+              <p:spPr>
+                <a:xfrm>
+                  <a:off x="8184841" y="4847853"/>
+                  <a:ext cx="1133442" cy="369332"/>
+                </a:xfrm>
+                <a:prstGeom prst="rect">
+                  <a:avLst/>
+                </a:prstGeom>
+                <a:blipFill>
+                  <a:blip r:embed="rId17"/>
+                  <a:stretch>
+                    <a:fillRect/>
+                  </a:stretch>
+                </a:blipFill>
+              </p:spPr>
+              <p:txBody>
+                <a:bodyPr/>
+                <a:lstStyle/>
+                <a:p>
+                  <a:r>
+                    <a:rPr lang="zh-TW" altLang="en-US">
+                      <a:noFill/>
+                    </a:rPr>
+                    <a:t> </a:t>
+                  </a:r>
+                </a:p>
+              </p:txBody>
+            </p:sp>
+          </mc:Fallback>
+        </mc:AlternateContent>
+        <mc:AlternateContent xmlns:mc="http://schemas.openxmlformats.org/markup-compatibility/2006">
+          <mc:Choice xmlns:a14="http://schemas.microsoft.com/office/drawing/2010/main" Requires="a14">
+            <p:sp>
+              <p:nvSpPr>
+                <p:cNvPr id="37" name="文字方塊 36">
+                  <a:extLst>
+                    <a:ext uri="{FF2B5EF4-FFF2-40B4-BE49-F238E27FC236}">
+                      <a16:creationId xmlns:a16="http://schemas.microsoft.com/office/drawing/2014/main" id="{F07B4362-4894-4DC3-A118-F912BAA3ABC9}"/>
+                    </a:ext>
+                  </a:extLst>
+                </p:cNvPr>
+                <p:cNvSpPr txBox="1"/>
+                <p:nvPr/>
+              </p:nvSpPr>
+              <p:spPr>
+                <a:xfrm>
+                  <a:off x="6398775" y="4847853"/>
+                  <a:ext cx="1133442" cy="369332"/>
+                </a:xfrm>
+                <a:prstGeom prst="rect">
+                  <a:avLst/>
+                </a:prstGeom>
+                <a:noFill/>
+              </p:spPr>
+              <p:txBody>
+                <a:bodyPr wrap="square" rtlCol="0">
+                  <a:spAutoFit/>
+                </a:bodyPr>
+                <a:lstStyle/>
+                <a:p>
+                  <a:pPr/>
+                  <a14:m>
+                    <m:oMathPara xmlns:m="http://schemas.openxmlformats.org/officeDocument/2006/math">
+                      <m:oMathParaPr>
+                        <m:jc m:val="centerGroup"/>
+                      </m:oMathParaPr>
+                      <m:oMath xmlns:m="http://schemas.openxmlformats.org/officeDocument/2006/math">
+                        <m:r>
+                          <a:rPr lang="en-US" altLang="zh-TW" i="1">
+                            <a:latin typeface="Cambria Math" panose="02040503050406030204" pitchFamily="18" charset="0"/>
+                          </a:rPr>
+                          <m:t>ℓ=1</m:t>
+                        </m:r>
+                      </m:oMath>
+                    </m:oMathPara>
+                  </a14:m>
+                  <a:endParaRPr lang="zh-TW" altLang="en-US" dirty="0"/>
+                </a:p>
+              </p:txBody>
+            </p:sp>
+          </mc:Choice>
+          <mc:Fallback>
+            <p:sp>
+              <p:nvSpPr>
+                <p:cNvPr id="37" name="文字方塊 36">
+                  <a:extLst>
+                    <a:ext uri="{FF2B5EF4-FFF2-40B4-BE49-F238E27FC236}">
+                      <a16:creationId xmlns:a16="http://schemas.microsoft.com/office/drawing/2014/main" id="{F07B4362-4894-4DC3-A118-F912BAA3ABC9}"/>
+                    </a:ext>
+                  </a:extLst>
+                </p:cNvPr>
+                <p:cNvSpPr txBox="1">
+                  <a:spLocks noRot="1" noChangeAspect="1" noMove="1" noResize="1" noEditPoints="1" noAdjustHandles="1" noChangeArrowheads="1" noChangeShapeType="1" noTextEdit="1"/>
+                </p:cNvSpPr>
+                <p:nvPr/>
+              </p:nvSpPr>
+              <p:spPr>
+                <a:xfrm>
+                  <a:off x="6398775" y="4847853"/>
+                  <a:ext cx="1133442" cy="369332"/>
+                </a:xfrm>
+                <a:prstGeom prst="rect">
+                  <a:avLst/>
+                </a:prstGeom>
+                <a:blipFill>
+                  <a:blip r:embed="rId18"/>
+                  <a:stretch>
+                    <a:fillRect/>
+                  </a:stretch>
+                </a:blipFill>
+              </p:spPr>
+              <p:txBody>
+                <a:bodyPr/>
+                <a:lstStyle/>
+                <a:p>
+                  <a:r>
+                    <a:rPr lang="zh-TW" altLang="en-US">
+                      <a:noFill/>
+                    </a:rPr>
+                    <a:t> </a:t>
+                  </a:r>
+                </a:p>
+              </p:txBody>
+            </p:sp>
+          </mc:Fallback>
+        </mc:AlternateContent>
+        <mc:AlternateContent xmlns:mc="http://schemas.openxmlformats.org/markup-compatibility/2006">
+          <mc:Choice xmlns:a14="http://schemas.microsoft.com/office/drawing/2010/main" Requires="a14">
+            <p:sp>
+              <p:nvSpPr>
+                <p:cNvPr id="38" name="文字方塊 37">
+                  <a:extLst>
+                    <a:ext uri="{FF2B5EF4-FFF2-40B4-BE49-F238E27FC236}">
+                      <a16:creationId xmlns:a16="http://schemas.microsoft.com/office/drawing/2014/main" id="{2909D8F5-F03B-46FF-BBC8-3EDC3936EC45}"/>
+                    </a:ext>
+                  </a:extLst>
+                </p:cNvPr>
+                <p:cNvSpPr txBox="1"/>
+                <p:nvPr/>
+              </p:nvSpPr>
+              <p:spPr>
+                <a:xfrm>
+                  <a:off x="2826641" y="4847853"/>
+                  <a:ext cx="1133442" cy="369332"/>
+                </a:xfrm>
+                <a:prstGeom prst="rect">
+                  <a:avLst/>
+                </a:prstGeom>
+                <a:noFill/>
+              </p:spPr>
+              <p:txBody>
+                <a:bodyPr wrap="square" rtlCol="0">
+                  <a:spAutoFit/>
+                </a:bodyPr>
+                <a:lstStyle/>
+                <a:p>
+                  <a:pPr/>
+                  <a14:m>
+                    <m:oMathPara xmlns:m="http://schemas.openxmlformats.org/officeDocument/2006/math">
+                      <m:oMathParaPr>
+                        <m:jc m:val="centerGroup"/>
+                      </m:oMathParaPr>
+                      <m:oMath xmlns:m="http://schemas.openxmlformats.org/officeDocument/2006/math">
+                        <m:r>
+                          <a:rPr lang="en-US" altLang="zh-TW" i="1">
+                            <a:latin typeface="Cambria Math" panose="02040503050406030204" pitchFamily="18" charset="0"/>
+                          </a:rPr>
+                          <m:t>ℓ=−1</m:t>
+                        </m:r>
+                      </m:oMath>
+                    </m:oMathPara>
+                  </a14:m>
+                  <a:endParaRPr lang="zh-TW" altLang="en-US" dirty="0"/>
+                </a:p>
+              </p:txBody>
+            </p:sp>
+          </mc:Choice>
+          <mc:Fallback>
+            <p:sp>
+              <p:nvSpPr>
+                <p:cNvPr id="38" name="文字方塊 37">
+                  <a:extLst>
+                    <a:ext uri="{FF2B5EF4-FFF2-40B4-BE49-F238E27FC236}">
+                      <a16:creationId xmlns:a16="http://schemas.microsoft.com/office/drawing/2014/main" id="{2909D8F5-F03B-46FF-BBC8-3EDC3936EC45}"/>
+                    </a:ext>
+                  </a:extLst>
+                </p:cNvPr>
+                <p:cNvSpPr txBox="1">
+                  <a:spLocks noRot="1" noChangeAspect="1" noMove="1" noResize="1" noEditPoints="1" noAdjustHandles="1" noChangeArrowheads="1" noChangeShapeType="1" noTextEdit="1"/>
+                </p:cNvSpPr>
+                <p:nvPr/>
+              </p:nvSpPr>
+              <p:spPr>
+                <a:xfrm>
+                  <a:off x="2826641" y="4847853"/>
+                  <a:ext cx="1133442" cy="369332"/>
+                </a:xfrm>
+                <a:prstGeom prst="rect">
+                  <a:avLst/>
+                </a:prstGeom>
+                <a:blipFill>
+                  <a:blip r:embed="rId19"/>
+                  <a:stretch>
+                    <a:fillRect/>
+                  </a:stretch>
+                </a:blipFill>
+              </p:spPr>
+              <p:txBody>
+                <a:bodyPr/>
+                <a:lstStyle/>
+                <a:p>
+                  <a:r>
+                    <a:rPr lang="zh-TW" altLang="en-US">
+                      <a:noFill/>
+                    </a:rPr>
+                    <a:t> </a:t>
+                  </a:r>
+                </a:p>
+              </p:txBody>
+            </p:sp>
+          </mc:Fallback>
+        </mc:AlternateContent>
+        <mc:AlternateContent xmlns:mc="http://schemas.openxmlformats.org/markup-compatibility/2006">
+          <mc:Choice xmlns:a14="http://schemas.microsoft.com/office/drawing/2010/main" Requires="a14">
+            <p:sp>
+              <p:nvSpPr>
+                <p:cNvPr id="39" name="文字方塊 38">
+                  <a:extLst>
+                    <a:ext uri="{FF2B5EF4-FFF2-40B4-BE49-F238E27FC236}">
+                      <a16:creationId xmlns:a16="http://schemas.microsoft.com/office/drawing/2014/main" id="{50B0F240-614A-4711-95EA-805943FA3629}"/>
+                    </a:ext>
+                  </a:extLst>
+                </p:cNvPr>
+                <p:cNvSpPr txBox="1"/>
+                <p:nvPr/>
+              </p:nvSpPr>
+              <p:spPr>
+                <a:xfrm>
+                  <a:off x="1040575" y="4847853"/>
+                  <a:ext cx="1133442" cy="369332"/>
+                </a:xfrm>
+                <a:prstGeom prst="rect">
+                  <a:avLst/>
+                </a:prstGeom>
+                <a:noFill/>
+              </p:spPr>
+              <p:txBody>
+                <a:bodyPr wrap="square" rtlCol="0">
+                  <a:spAutoFit/>
+                </a:bodyPr>
+                <a:lstStyle/>
+                <a:p>
+                  <a:pPr/>
+                  <a14:m>
+                    <m:oMathPara xmlns:m="http://schemas.openxmlformats.org/officeDocument/2006/math">
+                      <m:oMathParaPr>
+                        <m:jc m:val="centerGroup"/>
+                      </m:oMathParaPr>
+                      <m:oMath xmlns:m="http://schemas.openxmlformats.org/officeDocument/2006/math">
+                        <m:r>
+                          <a:rPr lang="en-US" altLang="zh-TW" i="1">
+                            <a:latin typeface="Cambria Math" panose="02040503050406030204" pitchFamily="18" charset="0"/>
+                          </a:rPr>
+                          <m:t>ℓ=−2</m:t>
+                        </m:r>
+                      </m:oMath>
+                    </m:oMathPara>
+                  </a14:m>
+                  <a:endParaRPr lang="zh-TW" altLang="en-US" dirty="0"/>
+                </a:p>
+              </p:txBody>
+            </p:sp>
+          </mc:Choice>
+          <mc:Fallback>
+            <p:sp>
+              <p:nvSpPr>
+                <p:cNvPr id="39" name="文字方塊 38">
+                  <a:extLst>
+                    <a:ext uri="{FF2B5EF4-FFF2-40B4-BE49-F238E27FC236}">
+                      <a16:creationId xmlns:a16="http://schemas.microsoft.com/office/drawing/2014/main" id="{50B0F240-614A-4711-95EA-805943FA3629}"/>
+                    </a:ext>
+                  </a:extLst>
+                </p:cNvPr>
+                <p:cNvSpPr txBox="1">
+                  <a:spLocks noRot="1" noChangeAspect="1" noMove="1" noResize="1" noEditPoints="1" noAdjustHandles="1" noChangeArrowheads="1" noChangeShapeType="1" noTextEdit="1"/>
+                </p:cNvSpPr>
+                <p:nvPr/>
+              </p:nvSpPr>
+              <p:spPr>
+                <a:xfrm>
+                  <a:off x="1040575" y="4847853"/>
+                  <a:ext cx="1133442" cy="369332"/>
+                </a:xfrm>
+                <a:prstGeom prst="rect">
+                  <a:avLst/>
+                </a:prstGeom>
+                <a:blipFill>
+                  <a:blip r:embed="rId20"/>
+                  <a:stretch>
+                    <a:fillRect/>
+                  </a:stretch>
+                </a:blipFill>
+              </p:spPr>
+              <p:txBody>
+                <a:bodyPr/>
+                <a:lstStyle/>
+                <a:p>
+                  <a:r>
+                    <a:rPr lang="zh-TW" altLang="en-US">
+                      <a:noFill/>
+                    </a:rPr>
+                    <a:t> </a:t>
+                  </a:r>
+                </a:p>
+              </p:txBody>
+            </p:sp>
+          </mc:Fallback>
+        </mc:AlternateContent>
+      </p:grpSp>
     </p:spTree>
     <p:extLst>
       <p:ext uri="{BB962C8B-B14F-4D97-AF65-F5344CB8AC3E}">

--- a/Final/Figures/AinRinC.pptx
+++ b/Final/Figures/AinRinC.pptx
@@ -2,12 +2,12 @@
 <file path=ppt/presentation.xml><?xml version="1.0" encoding="utf-8"?>
 <p:presentation xmlns:a="http://schemas.openxmlformats.org/drawingml/2006/main" xmlns:r="http://schemas.openxmlformats.org/officeDocument/2006/relationships" xmlns:p="http://schemas.openxmlformats.org/presentationml/2006/main" saveSubsetFonts="1">
   <p:sldMasterIdLst>
-    <p:sldMasterId id="2147483816" r:id="rId1"/>
+    <p:sldMasterId id="2147483840" r:id="rId1"/>
   </p:sldMasterIdLst>
   <p:sldIdLst>
     <p:sldId id="256" r:id="rId2"/>
   </p:sldIdLst>
-  <p:sldSz cx="9906000" cy="6119813"/>
+  <p:sldSz cx="9906000" cy="6300788"/>
   <p:notesSz cx="6858000" cy="9144000"/>
   <p:defaultTextStyle>
     <a:defPPr>
@@ -141,8 +141,8 @@
         </p:nvSpPr>
         <p:spPr>
           <a:xfrm>
-            <a:off x="1238250" y="1001553"/>
-            <a:ext cx="7429500" cy="2130602"/>
+            <a:off x="1238250" y="1031171"/>
+            <a:ext cx="7429500" cy="2193608"/>
           </a:xfrm>
         </p:spPr>
         <p:txBody>
@@ -173,8 +173,8 @@
         </p:nvSpPr>
         <p:spPr>
           <a:xfrm>
-            <a:off x="1238250" y="3214319"/>
-            <a:ext cx="7429500" cy="1477538"/>
+            <a:off x="1238250" y="3309373"/>
+            <a:ext cx="7429500" cy="1521231"/>
           </a:xfrm>
         </p:spPr>
         <p:txBody>
@@ -243,7 +243,7 @@
           <a:p>
             <a:fld id="{4CEE9FC5-A85C-4366-93B5-9F0FBACB00B5}" type="datetimeFigureOut">
               <a:rPr lang="zh-TW" altLang="en-US" smtClean="0"/>
-              <a:t>2026/5/20</a:t>
+              <a:t>2026/5/27</a:t>
             </a:fld>
             <a:endParaRPr lang="zh-TW" altLang="en-US"/>
           </a:p>
@@ -294,7 +294,7 @@
     </p:spTree>
     <p:extLst>
       <p:ext uri="{BB962C8B-B14F-4D97-AF65-F5344CB8AC3E}">
-        <p14:creationId xmlns:p14="http://schemas.microsoft.com/office/powerpoint/2010/main" val="2031102659"/>
+        <p14:creationId xmlns:p14="http://schemas.microsoft.com/office/powerpoint/2010/main" val="1189323920"/>
       </p:ext>
     </p:extLst>
   </p:cSld>
@@ -413,7 +413,7 @@
           <a:p>
             <a:fld id="{4CEE9FC5-A85C-4366-93B5-9F0FBACB00B5}" type="datetimeFigureOut">
               <a:rPr lang="zh-TW" altLang="en-US" smtClean="0"/>
-              <a:t>2026/5/20</a:t>
+              <a:t>2026/5/27</a:t>
             </a:fld>
             <a:endParaRPr lang="zh-TW" altLang="en-US"/>
           </a:p>
@@ -464,7 +464,7 @@
     </p:spTree>
     <p:extLst>
       <p:ext uri="{BB962C8B-B14F-4D97-AF65-F5344CB8AC3E}">
-        <p14:creationId xmlns:p14="http://schemas.microsoft.com/office/powerpoint/2010/main" val="3261366319"/>
+        <p14:creationId xmlns:p14="http://schemas.microsoft.com/office/powerpoint/2010/main" val="2187475317"/>
       </p:ext>
     </p:extLst>
   </p:cSld>
@@ -503,8 +503,8 @@
         </p:nvSpPr>
         <p:spPr>
           <a:xfrm>
-            <a:off x="7088981" y="325823"/>
-            <a:ext cx="2135981" cy="5186259"/>
+            <a:off x="7088981" y="335458"/>
+            <a:ext cx="2135981" cy="5339627"/>
           </a:xfrm>
         </p:spPr>
         <p:txBody>
@@ -531,8 +531,8 @@
         </p:nvSpPr>
         <p:spPr>
           <a:xfrm>
-            <a:off x="681037" y="325823"/>
-            <a:ext cx="6284119" cy="5186259"/>
+            <a:off x="681037" y="335458"/>
+            <a:ext cx="6284119" cy="5339627"/>
           </a:xfrm>
         </p:spPr>
         <p:txBody>
@@ -593,7 +593,7 @@
           <a:p>
             <a:fld id="{4CEE9FC5-A85C-4366-93B5-9F0FBACB00B5}" type="datetimeFigureOut">
               <a:rPr lang="zh-TW" altLang="en-US" smtClean="0"/>
-              <a:t>2026/5/20</a:t>
+              <a:t>2026/5/27</a:t>
             </a:fld>
             <a:endParaRPr lang="zh-TW" altLang="en-US"/>
           </a:p>
@@ -644,7 +644,7 @@
     </p:spTree>
     <p:extLst>
       <p:ext uri="{BB962C8B-B14F-4D97-AF65-F5344CB8AC3E}">
-        <p14:creationId xmlns:p14="http://schemas.microsoft.com/office/powerpoint/2010/main" val="3324413089"/>
+        <p14:creationId xmlns:p14="http://schemas.microsoft.com/office/powerpoint/2010/main" val="2405153409"/>
       </p:ext>
     </p:extLst>
   </p:cSld>
@@ -763,7 +763,7 @@
           <a:p>
             <a:fld id="{4CEE9FC5-A85C-4366-93B5-9F0FBACB00B5}" type="datetimeFigureOut">
               <a:rPr lang="zh-TW" altLang="en-US" smtClean="0"/>
-              <a:t>2026/5/20</a:t>
+              <a:t>2026/5/27</a:t>
             </a:fld>
             <a:endParaRPr lang="zh-TW" altLang="en-US"/>
           </a:p>
@@ -814,7 +814,7 @@
     </p:spTree>
     <p:extLst>
       <p:ext uri="{BB962C8B-B14F-4D97-AF65-F5344CB8AC3E}">
-        <p14:creationId xmlns:p14="http://schemas.microsoft.com/office/powerpoint/2010/main" val="103063121"/>
+        <p14:creationId xmlns:p14="http://schemas.microsoft.com/office/powerpoint/2010/main" val="4074106288"/>
       </p:ext>
     </p:extLst>
   </p:cSld>
@@ -853,8 +853,8 @@
         </p:nvSpPr>
         <p:spPr>
           <a:xfrm>
-            <a:off x="675878" y="1525704"/>
-            <a:ext cx="8543925" cy="2545672"/>
+            <a:off x="675878" y="1570823"/>
+            <a:ext cx="8543925" cy="2620952"/>
           </a:xfrm>
         </p:spPr>
         <p:txBody>
@@ -885,8 +885,8 @@
         </p:nvSpPr>
         <p:spPr>
           <a:xfrm>
-            <a:off x="675878" y="4095459"/>
-            <a:ext cx="8543925" cy="1338709"/>
+            <a:off x="675878" y="4216570"/>
+            <a:ext cx="8543925" cy="1378297"/>
           </a:xfrm>
         </p:spPr>
         <p:txBody>
@@ -1009,7 +1009,7 @@
           <a:p>
             <a:fld id="{4CEE9FC5-A85C-4366-93B5-9F0FBACB00B5}" type="datetimeFigureOut">
               <a:rPr lang="zh-TW" altLang="en-US" smtClean="0"/>
-              <a:t>2026/5/20</a:t>
+              <a:t>2026/5/27</a:t>
             </a:fld>
             <a:endParaRPr lang="zh-TW" altLang="en-US"/>
           </a:p>
@@ -1060,7 +1060,7 @@
     </p:spTree>
     <p:extLst>
       <p:ext uri="{BB962C8B-B14F-4D97-AF65-F5344CB8AC3E}">
-        <p14:creationId xmlns:p14="http://schemas.microsoft.com/office/powerpoint/2010/main" val="2848199447"/>
+        <p14:creationId xmlns:p14="http://schemas.microsoft.com/office/powerpoint/2010/main" val="2908391425"/>
       </p:ext>
     </p:extLst>
   </p:cSld>
@@ -1122,8 +1122,8 @@
         </p:nvSpPr>
         <p:spPr>
           <a:xfrm>
-            <a:off x="681038" y="1629117"/>
-            <a:ext cx="4210050" cy="3882965"/>
+            <a:off x="681038" y="1677293"/>
+            <a:ext cx="4210050" cy="3997792"/>
           </a:xfrm>
         </p:spPr>
         <p:txBody>
@@ -1179,8 +1179,8 @@
         </p:nvSpPr>
         <p:spPr>
           <a:xfrm>
-            <a:off x="5014913" y="1629117"/>
-            <a:ext cx="4210050" cy="3882965"/>
+            <a:off x="5014913" y="1677293"/>
+            <a:ext cx="4210050" cy="3997792"/>
           </a:xfrm>
         </p:spPr>
         <p:txBody>
@@ -1241,7 +1241,7 @@
           <a:p>
             <a:fld id="{4CEE9FC5-A85C-4366-93B5-9F0FBACB00B5}" type="datetimeFigureOut">
               <a:rPr lang="zh-TW" altLang="en-US" smtClean="0"/>
-              <a:t>2026/5/20</a:t>
+              <a:t>2026/5/27</a:t>
             </a:fld>
             <a:endParaRPr lang="zh-TW" altLang="en-US"/>
           </a:p>
@@ -1292,7 +1292,7 @@
     </p:spTree>
     <p:extLst>
       <p:ext uri="{BB962C8B-B14F-4D97-AF65-F5344CB8AC3E}">
-        <p14:creationId xmlns:p14="http://schemas.microsoft.com/office/powerpoint/2010/main" val="2623452726"/>
+        <p14:creationId xmlns:p14="http://schemas.microsoft.com/office/powerpoint/2010/main" val="1191181411"/>
       </p:ext>
     </p:extLst>
   </p:cSld>
@@ -1331,8 +1331,8 @@
         </p:nvSpPr>
         <p:spPr>
           <a:xfrm>
-            <a:off x="682328" y="325824"/>
-            <a:ext cx="8543925" cy="1182881"/>
+            <a:off x="682328" y="335459"/>
+            <a:ext cx="8543925" cy="1217861"/>
           </a:xfrm>
         </p:spPr>
         <p:txBody>
@@ -1359,8 +1359,8 @@
         </p:nvSpPr>
         <p:spPr>
           <a:xfrm>
-            <a:off x="682328" y="1500205"/>
-            <a:ext cx="4190702" cy="735227"/>
+            <a:off x="682328" y="1544569"/>
+            <a:ext cx="4190702" cy="756969"/>
           </a:xfrm>
         </p:spPr>
         <p:txBody>
@@ -1424,8 +1424,8 @@
         </p:nvSpPr>
         <p:spPr>
           <a:xfrm>
-            <a:off x="682328" y="2235432"/>
-            <a:ext cx="4190702" cy="3287983"/>
+            <a:off x="682328" y="2301538"/>
+            <a:ext cx="4190702" cy="3385215"/>
           </a:xfrm>
         </p:spPr>
         <p:txBody>
@@ -1481,8 +1481,8 @@
         </p:nvSpPr>
         <p:spPr>
           <a:xfrm>
-            <a:off x="5014913" y="1500205"/>
-            <a:ext cx="4211340" cy="735227"/>
+            <a:off x="5014913" y="1544569"/>
+            <a:ext cx="4211340" cy="756969"/>
           </a:xfrm>
         </p:spPr>
         <p:txBody>
@@ -1546,8 +1546,8 @@
         </p:nvSpPr>
         <p:spPr>
           <a:xfrm>
-            <a:off x="5014913" y="2235432"/>
-            <a:ext cx="4211340" cy="3287983"/>
+            <a:off x="5014913" y="2301538"/>
+            <a:ext cx="4211340" cy="3385215"/>
           </a:xfrm>
         </p:spPr>
         <p:txBody>
@@ -1608,7 +1608,7 @@
           <a:p>
             <a:fld id="{4CEE9FC5-A85C-4366-93B5-9F0FBACB00B5}" type="datetimeFigureOut">
               <a:rPr lang="zh-TW" altLang="en-US" smtClean="0"/>
-              <a:t>2026/5/20</a:t>
+              <a:t>2026/5/27</a:t>
             </a:fld>
             <a:endParaRPr lang="zh-TW" altLang="en-US"/>
           </a:p>
@@ -1659,7 +1659,7 @@
     </p:spTree>
     <p:extLst>
       <p:ext uri="{BB962C8B-B14F-4D97-AF65-F5344CB8AC3E}">
-        <p14:creationId xmlns:p14="http://schemas.microsoft.com/office/powerpoint/2010/main" val="1781611527"/>
+        <p14:creationId xmlns:p14="http://schemas.microsoft.com/office/powerpoint/2010/main" val="516729311"/>
       </p:ext>
     </p:extLst>
   </p:cSld>
@@ -1726,7 +1726,7 @@
           <a:p>
             <a:fld id="{4CEE9FC5-A85C-4366-93B5-9F0FBACB00B5}" type="datetimeFigureOut">
               <a:rPr lang="zh-TW" altLang="en-US" smtClean="0"/>
-              <a:t>2026/5/20</a:t>
+              <a:t>2026/5/27</a:t>
             </a:fld>
             <a:endParaRPr lang="zh-TW" altLang="en-US"/>
           </a:p>
@@ -1777,7 +1777,7 @@
     </p:spTree>
     <p:extLst>
       <p:ext uri="{BB962C8B-B14F-4D97-AF65-F5344CB8AC3E}">
-        <p14:creationId xmlns:p14="http://schemas.microsoft.com/office/powerpoint/2010/main" val="1042832829"/>
+        <p14:creationId xmlns:p14="http://schemas.microsoft.com/office/powerpoint/2010/main" val="189146478"/>
       </p:ext>
     </p:extLst>
   </p:cSld>
@@ -1821,7 +1821,7 @@
           <a:p>
             <a:fld id="{4CEE9FC5-A85C-4366-93B5-9F0FBACB00B5}" type="datetimeFigureOut">
               <a:rPr lang="zh-TW" altLang="en-US" smtClean="0"/>
-              <a:t>2026/5/20</a:t>
+              <a:t>2026/5/27</a:t>
             </a:fld>
             <a:endParaRPr lang="zh-TW" altLang="en-US"/>
           </a:p>
@@ -1872,7 +1872,7 @@
     </p:spTree>
     <p:extLst>
       <p:ext uri="{BB962C8B-B14F-4D97-AF65-F5344CB8AC3E}">
-        <p14:creationId xmlns:p14="http://schemas.microsoft.com/office/powerpoint/2010/main" val="3424337325"/>
+        <p14:creationId xmlns:p14="http://schemas.microsoft.com/office/powerpoint/2010/main" val="2206496813"/>
       </p:ext>
     </p:extLst>
   </p:cSld>
@@ -1911,8 +1911,8 @@
         </p:nvSpPr>
         <p:spPr>
           <a:xfrm>
-            <a:off x="682328" y="407988"/>
-            <a:ext cx="3194943" cy="1427956"/>
+            <a:off x="682328" y="420052"/>
+            <a:ext cx="3194943" cy="1470184"/>
           </a:xfrm>
         </p:spPr>
         <p:txBody>
@@ -1943,8 +1943,8 @@
         </p:nvSpPr>
         <p:spPr>
           <a:xfrm>
-            <a:off x="4211340" y="881140"/>
-            <a:ext cx="5014913" cy="4349034"/>
+            <a:off x="4211340" y="907197"/>
+            <a:ext cx="5014913" cy="4477643"/>
           </a:xfrm>
         </p:spPr>
         <p:txBody>
@@ -2028,8 +2028,8 @@
         </p:nvSpPr>
         <p:spPr>
           <a:xfrm>
-            <a:off x="682328" y="1835944"/>
-            <a:ext cx="3194943" cy="3401313"/>
+            <a:off x="682328" y="1890236"/>
+            <a:ext cx="3194943" cy="3501897"/>
           </a:xfrm>
         </p:spPr>
         <p:txBody>
@@ -2098,7 +2098,7 @@
           <a:p>
             <a:fld id="{4CEE9FC5-A85C-4366-93B5-9F0FBACB00B5}" type="datetimeFigureOut">
               <a:rPr lang="zh-TW" altLang="en-US" smtClean="0"/>
-              <a:t>2026/5/20</a:t>
+              <a:t>2026/5/27</a:t>
             </a:fld>
             <a:endParaRPr lang="zh-TW" altLang="en-US"/>
           </a:p>
@@ -2149,7 +2149,7 @@
     </p:spTree>
     <p:extLst>
       <p:ext uri="{BB962C8B-B14F-4D97-AF65-F5344CB8AC3E}">
-        <p14:creationId xmlns:p14="http://schemas.microsoft.com/office/powerpoint/2010/main" val="499261763"/>
+        <p14:creationId xmlns:p14="http://schemas.microsoft.com/office/powerpoint/2010/main" val="815807490"/>
       </p:ext>
     </p:extLst>
   </p:cSld>
@@ -2188,8 +2188,8 @@
         </p:nvSpPr>
         <p:spPr>
           <a:xfrm>
-            <a:off x="682328" y="407988"/>
-            <a:ext cx="3194943" cy="1427956"/>
+            <a:off x="682328" y="420052"/>
+            <a:ext cx="3194943" cy="1470184"/>
           </a:xfrm>
         </p:spPr>
         <p:txBody>
@@ -2220,8 +2220,8 @@
         </p:nvSpPr>
         <p:spPr>
           <a:xfrm>
-            <a:off x="4211340" y="881140"/>
-            <a:ext cx="5014913" cy="4349034"/>
+            <a:off x="4211340" y="907197"/>
+            <a:ext cx="5014913" cy="4477643"/>
           </a:xfrm>
         </p:spPr>
         <p:txBody>
@@ -2285,8 +2285,8 @@
         </p:nvSpPr>
         <p:spPr>
           <a:xfrm>
-            <a:off x="682328" y="1835944"/>
-            <a:ext cx="3194943" cy="3401313"/>
+            <a:off x="682328" y="1890236"/>
+            <a:ext cx="3194943" cy="3501897"/>
           </a:xfrm>
         </p:spPr>
         <p:txBody>
@@ -2355,7 +2355,7 @@
           <a:p>
             <a:fld id="{4CEE9FC5-A85C-4366-93B5-9F0FBACB00B5}" type="datetimeFigureOut">
               <a:rPr lang="zh-TW" altLang="en-US" smtClean="0"/>
-              <a:t>2026/5/20</a:t>
+              <a:t>2026/5/27</a:t>
             </a:fld>
             <a:endParaRPr lang="zh-TW" altLang="en-US"/>
           </a:p>
@@ -2406,7 +2406,7 @@
     </p:spTree>
     <p:extLst>
       <p:ext uri="{BB962C8B-B14F-4D97-AF65-F5344CB8AC3E}">
-        <p14:creationId xmlns:p14="http://schemas.microsoft.com/office/powerpoint/2010/main" val="2659060106"/>
+        <p14:creationId xmlns:p14="http://schemas.microsoft.com/office/powerpoint/2010/main" val="1620912418"/>
       </p:ext>
     </p:extLst>
   </p:cSld>
@@ -2450,8 +2450,8 @@
         </p:nvSpPr>
         <p:spPr>
           <a:xfrm>
-            <a:off x="681038" y="325824"/>
-            <a:ext cx="8543925" cy="1182881"/>
+            <a:off x="681038" y="335459"/>
+            <a:ext cx="8543925" cy="1217861"/>
           </a:xfrm>
           <a:prstGeom prst="rect">
             <a:avLst/>
@@ -2483,8 +2483,8 @@
         </p:nvSpPr>
         <p:spPr>
           <a:xfrm>
-            <a:off x="681038" y="1629117"/>
-            <a:ext cx="8543925" cy="3882965"/>
+            <a:off x="681038" y="1677293"/>
+            <a:ext cx="8543925" cy="3997792"/>
           </a:xfrm>
           <a:prstGeom prst="rect">
             <a:avLst/>
@@ -2545,8 +2545,8 @@
         </p:nvSpPr>
         <p:spPr>
           <a:xfrm>
-            <a:off x="681038" y="5672161"/>
-            <a:ext cx="2228850" cy="325823"/>
+            <a:off x="681038" y="5839897"/>
+            <a:ext cx="2228850" cy="335459"/>
           </a:xfrm>
           <a:prstGeom prst="rect">
             <a:avLst/>
@@ -2568,7 +2568,7 @@
           <a:p>
             <a:fld id="{4CEE9FC5-A85C-4366-93B5-9F0FBACB00B5}" type="datetimeFigureOut">
               <a:rPr lang="zh-TW" altLang="en-US" smtClean="0"/>
-              <a:t>2026/5/20</a:t>
+              <a:t>2026/5/27</a:t>
             </a:fld>
             <a:endParaRPr lang="zh-TW" altLang="en-US"/>
           </a:p>
@@ -2586,8 +2586,8 @@
         </p:nvSpPr>
         <p:spPr>
           <a:xfrm>
-            <a:off x="3281363" y="5672161"/>
-            <a:ext cx="3343275" cy="325823"/>
+            <a:off x="3281363" y="5839897"/>
+            <a:ext cx="3343275" cy="335459"/>
           </a:xfrm>
           <a:prstGeom prst="rect">
             <a:avLst/>
@@ -2623,8 +2623,8 @@
         </p:nvSpPr>
         <p:spPr>
           <a:xfrm>
-            <a:off x="6996113" y="5672161"/>
-            <a:ext cx="2228850" cy="325823"/>
+            <a:off x="6996113" y="5839897"/>
+            <a:ext cx="2228850" cy="335459"/>
           </a:xfrm>
           <a:prstGeom prst="rect">
             <a:avLst/>
@@ -2655,23 +2655,23 @@
     </p:spTree>
     <p:extLst>
       <p:ext uri="{BB962C8B-B14F-4D97-AF65-F5344CB8AC3E}">
-        <p14:creationId xmlns:p14="http://schemas.microsoft.com/office/powerpoint/2010/main" val="2693361601"/>
+        <p14:creationId xmlns:p14="http://schemas.microsoft.com/office/powerpoint/2010/main" val="4032741947"/>
       </p:ext>
     </p:extLst>
   </p:cSld>
   <p:clrMap bg1="lt1" tx1="dk1" bg2="lt2" tx2="dk2" accent1="accent1" accent2="accent2" accent3="accent3" accent4="accent4" accent5="accent5" accent6="accent6" hlink="hlink" folHlink="folHlink"/>
   <p:sldLayoutIdLst>
-    <p:sldLayoutId id="2147483817" r:id="rId1"/>
-    <p:sldLayoutId id="2147483818" r:id="rId2"/>
-    <p:sldLayoutId id="2147483819" r:id="rId3"/>
-    <p:sldLayoutId id="2147483820" r:id="rId4"/>
-    <p:sldLayoutId id="2147483821" r:id="rId5"/>
-    <p:sldLayoutId id="2147483822" r:id="rId6"/>
-    <p:sldLayoutId id="2147483823" r:id="rId7"/>
-    <p:sldLayoutId id="2147483824" r:id="rId8"/>
-    <p:sldLayoutId id="2147483825" r:id="rId9"/>
-    <p:sldLayoutId id="2147483826" r:id="rId10"/>
-    <p:sldLayoutId id="2147483827" r:id="rId11"/>
+    <p:sldLayoutId id="2147483841" r:id="rId1"/>
+    <p:sldLayoutId id="2147483842" r:id="rId2"/>
+    <p:sldLayoutId id="2147483843" r:id="rId3"/>
+    <p:sldLayoutId id="2147483844" r:id="rId4"/>
+    <p:sldLayoutId id="2147483845" r:id="rId5"/>
+    <p:sldLayoutId id="2147483846" r:id="rId6"/>
+    <p:sldLayoutId id="2147483847" r:id="rId7"/>
+    <p:sldLayoutId id="2147483848" r:id="rId8"/>
+    <p:sldLayoutId id="2147483849" r:id="rId9"/>
+    <p:sldLayoutId id="2147483850" r:id="rId10"/>
+    <p:sldLayoutId id="2147483851" r:id="rId11"/>
   </p:sldLayoutIdLst>
   <p:txStyles>
     <p:titleStyle>
@@ -2973,12 +2973,614 @@
           <a:chExt cx="0" cy="0"/>
         </a:xfrm>
       </p:grpSpPr>
+      <p:sp>
+        <p:nvSpPr>
+          <p:cNvPr id="29" name="矩形: 圓角 28">
+            <a:extLst>
+              <a:ext uri="{FF2B5EF4-FFF2-40B4-BE49-F238E27FC236}">
+                <a16:creationId xmlns:a16="http://schemas.microsoft.com/office/drawing/2014/main" id="{12A747F0-4A58-4A15-AB9D-2DB0BA632A37}"/>
+              </a:ext>
+            </a:extLst>
+          </p:cNvPr>
+          <p:cNvSpPr/>
+          <p:nvPr/>
+        </p:nvSpPr>
+        <p:spPr>
+          <a:xfrm>
+            <a:off x="25400" y="4136038"/>
+            <a:ext cx="9842500" cy="2085648"/>
+          </a:xfrm>
+          <a:prstGeom prst="roundRect">
+            <a:avLst>
+              <a:gd name="adj" fmla="val 5706"/>
+            </a:avLst>
+          </a:prstGeom>
+          <a:solidFill>
+            <a:schemeClr val="bg1">
+              <a:lumMod val="95000"/>
+            </a:schemeClr>
+          </a:solidFill>
+          <a:ln w="19050">
+            <a:solidFill>
+              <a:schemeClr val="tx1">
+                <a:lumMod val="50000"/>
+                <a:lumOff val="50000"/>
+              </a:schemeClr>
+            </a:solidFill>
+          </a:ln>
+        </p:spPr>
+        <p:style>
+          <a:lnRef idx="2">
+            <a:schemeClr val="accent1">
+              <a:shade val="50000"/>
+            </a:schemeClr>
+          </a:lnRef>
+          <a:fillRef idx="1">
+            <a:schemeClr val="accent1"/>
+          </a:fillRef>
+          <a:effectRef idx="0">
+            <a:schemeClr val="accent1"/>
+          </a:effectRef>
+          <a:fontRef idx="minor">
+            <a:schemeClr val="lt1"/>
+          </a:fontRef>
+        </p:style>
+        <p:txBody>
+          <a:bodyPr rot="0" spcFirstLastPara="0" vertOverflow="overflow" horzOverflow="overflow" vert="horz" wrap="square" lIns="91440" tIns="45720" rIns="91440" bIns="45720" numCol="1" spcCol="0" rtlCol="0" fromWordArt="0" anchor="ctr" anchorCtr="0" forceAA="0" compatLnSpc="1">
+            <a:prstTxWarp prst="textNoShape">
+              <a:avLst/>
+            </a:prstTxWarp>
+            <a:noAutofit/>
+          </a:bodyPr>
+          <a:lstStyle/>
+          <a:p>
+            <a:pPr algn="ctr"/>
+            <a:endParaRPr lang="zh-TW" altLang="en-US">
+              <a:latin typeface="Times New Roman" panose="02020603050405020304" pitchFamily="18" charset="0"/>
+              <a:cs typeface="Times New Roman" panose="02020603050405020304" pitchFamily="18" charset="0"/>
+            </a:endParaRPr>
+          </a:p>
+        </p:txBody>
+      </p:sp>
+      <p:sp>
+        <p:nvSpPr>
+          <p:cNvPr id="30" name="矩形: 圓角 29">
+            <a:extLst>
+              <a:ext uri="{FF2B5EF4-FFF2-40B4-BE49-F238E27FC236}">
+                <a16:creationId xmlns:a16="http://schemas.microsoft.com/office/drawing/2014/main" id="{B93E4F7D-C584-48A1-8746-F7F6E909DF40}"/>
+              </a:ext>
+            </a:extLst>
+          </p:cNvPr>
+          <p:cNvSpPr/>
+          <p:nvPr/>
+        </p:nvSpPr>
+        <p:spPr>
+          <a:xfrm>
+            <a:off x="20504" y="1586945"/>
+            <a:ext cx="9842500" cy="2085648"/>
+          </a:xfrm>
+          <a:prstGeom prst="roundRect">
+            <a:avLst>
+              <a:gd name="adj" fmla="val 6163"/>
+            </a:avLst>
+          </a:prstGeom>
+          <a:solidFill>
+            <a:schemeClr val="bg1">
+              <a:lumMod val="95000"/>
+            </a:schemeClr>
+          </a:solidFill>
+          <a:ln w="19050">
+            <a:solidFill>
+              <a:schemeClr val="tx1">
+                <a:lumMod val="50000"/>
+                <a:lumOff val="50000"/>
+              </a:schemeClr>
+            </a:solidFill>
+          </a:ln>
+        </p:spPr>
+        <p:style>
+          <a:lnRef idx="2">
+            <a:schemeClr val="accent1">
+              <a:shade val="50000"/>
+            </a:schemeClr>
+          </a:lnRef>
+          <a:fillRef idx="1">
+            <a:schemeClr val="accent1"/>
+          </a:fillRef>
+          <a:effectRef idx="0">
+            <a:schemeClr val="accent1"/>
+          </a:effectRef>
+          <a:fontRef idx="minor">
+            <a:schemeClr val="lt1"/>
+          </a:fontRef>
+        </p:style>
+        <p:txBody>
+          <a:bodyPr rot="0" spcFirstLastPara="0" vertOverflow="overflow" horzOverflow="overflow" vert="horz" wrap="square" lIns="91440" tIns="45720" rIns="91440" bIns="45720" numCol="1" spcCol="0" rtlCol="0" fromWordArt="0" anchor="ctr" anchorCtr="0" forceAA="0" compatLnSpc="1">
+            <a:prstTxWarp prst="textNoShape">
+              <a:avLst/>
+            </a:prstTxWarp>
+            <a:noAutofit/>
+          </a:bodyPr>
+          <a:lstStyle/>
+          <a:p>
+            <a:pPr algn="ctr"/>
+            <a:endParaRPr lang="zh-TW" altLang="en-US">
+              <a:latin typeface="Times New Roman" panose="02020603050405020304" pitchFamily="18" charset="0"/>
+              <a:cs typeface="Times New Roman" panose="02020603050405020304" pitchFamily="18" charset="0"/>
+            </a:endParaRPr>
+          </a:p>
+        </p:txBody>
+      </p:sp>
+      <p:pic>
+        <p:nvPicPr>
+          <p:cNvPr id="31" name="圖片 30">
+            <a:extLst>
+              <a:ext uri="{FF2B5EF4-FFF2-40B4-BE49-F238E27FC236}">
+                <a16:creationId xmlns:a16="http://schemas.microsoft.com/office/drawing/2014/main" id="{0A20F05F-DE5D-4B95-9A04-BE488B56881C}"/>
+              </a:ext>
+            </a:extLst>
+          </p:cNvPr>
+          <p:cNvPicPr>
+            <a:picLocks noChangeAspect="1"/>
+          </p:cNvPicPr>
+          <p:nvPr/>
+        </p:nvPicPr>
+        <p:blipFill>
+          <a:blip r:embed="rId2">
+            <a:clrChange>
+              <a:clrFrom>
+                <a:srgbClr val="FFFFFF"/>
+              </a:clrFrom>
+              <a:clrTo>
+                <a:srgbClr val="FFFFFF">
+                  <a:alpha val="0"/>
+                </a:srgbClr>
+              </a:clrTo>
+            </a:clrChange>
+            <a:extLst>
+              <a:ext uri="{28A0092B-C50C-407E-A947-70E740481C1C}">
+                <a14:useLocalDpi xmlns:a14="http://schemas.microsoft.com/office/drawing/2010/main" val="0"/>
+              </a:ext>
+            </a:extLst>
+          </a:blip>
+          <a:stretch>
+            <a:fillRect/>
+          </a:stretch>
+        </p:blipFill>
+        <p:spPr>
+          <a:xfrm>
+            <a:off x="262455" y="1393306"/>
+            <a:ext cx="9458896" cy="2364724"/>
+          </a:xfrm>
+          <a:prstGeom prst="rect">
+            <a:avLst/>
+          </a:prstGeom>
+        </p:spPr>
+      </p:pic>
+      <p:pic>
+        <p:nvPicPr>
+          <p:cNvPr id="33" name="圖片 32">
+            <a:extLst>
+              <a:ext uri="{FF2B5EF4-FFF2-40B4-BE49-F238E27FC236}">
+                <a16:creationId xmlns:a16="http://schemas.microsoft.com/office/drawing/2014/main" id="{CB7675AA-6FEC-4CC7-AA8D-71934DD9ECBA}"/>
+              </a:ext>
+            </a:extLst>
+          </p:cNvPr>
+          <p:cNvPicPr>
+            <a:picLocks noChangeAspect="1"/>
+          </p:cNvPicPr>
+          <p:nvPr/>
+        </p:nvPicPr>
+        <p:blipFill>
+          <a:blip r:embed="rId3">
+            <a:clrChange>
+              <a:clrFrom>
+                <a:srgbClr val="FFFFFF"/>
+              </a:clrFrom>
+              <a:clrTo>
+                <a:srgbClr val="FFFFFF">
+                  <a:alpha val="0"/>
+                </a:srgbClr>
+              </a:clrTo>
+            </a:clrChange>
+            <a:extLst>
+              <a:ext uri="{28A0092B-C50C-407E-A947-70E740481C1C}">
+                <a14:useLocalDpi xmlns:a14="http://schemas.microsoft.com/office/drawing/2010/main" val="0"/>
+              </a:ext>
+            </a:extLst>
+          </a:blip>
+          <a:stretch>
+            <a:fillRect/>
+          </a:stretch>
+        </p:blipFill>
+        <p:spPr>
+          <a:xfrm>
+            <a:off x="262455" y="3942399"/>
+            <a:ext cx="9458896" cy="2364724"/>
+          </a:xfrm>
+          <a:prstGeom prst="rect">
+            <a:avLst/>
+          </a:prstGeom>
+        </p:spPr>
+      </p:pic>
+      <mc:AlternateContent xmlns:mc="http://schemas.openxmlformats.org/markup-compatibility/2006">
+        <mc:Choice xmlns:a14="http://schemas.microsoft.com/office/drawing/2010/main" Requires="a14">
+          <p:sp>
+            <p:nvSpPr>
+              <p:cNvPr id="34" name="文字方塊 33">
+                <a:extLst>
+                  <a:ext uri="{FF2B5EF4-FFF2-40B4-BE49-F238E27FC236}">
+                    <a16:creationId xmlns:a16="http://schemas.microsoft.com/office/drawing/2014/main" id="{CC458388-0659-49B5-B51D-C20CBBEF338D}"/>
+                  </a:ext>
+                </a:extLst>
+              </p:cNvPr>
+              <p:cNvSpPr txBox="1"/>
+              <p:nvPr/>
+            </p:nvSpPr>
+            <p:spPr>
+              <a:xfrm>
+                <a:off x="1928617" y="394065"/>
+                <a:ext cx="4815083" cy="498855"/>
+              </a:xfrm>
+              <a:prstGeom prst="rect">
+                <a:avLst/>
+              </a:prstGeom>
+              <a:noFill/>
+            </p:spPr>
+            <p:txBody>
+              <a:bodyPr wrap="square" rtlCol="0">
+                <a:spAutoFit/>
+              </a:bodyPr>
+              <a:lstStyle/>
+              <a:p>
+                <a:pPr/>
+                <a14:m>
+                  <m:oMathPara xmlns:m="http://schemas.openxmlformats.org/officeDocument/2006/math">
+                    <m:oMathParaPr>
+                      <m:jc m:val="centerGroup"/>
+                    </m:oMathParaPr>
+                    <m:oMath xmlns:m="http://schemas.openxmlformats.org/officeDocument/2006/math">
+                      <m:sSubSup>
+                        <m:sSubSupPr>
+                          <m:ctrlPr>
+                            <a:rPr lang="en-US" altLang="zh-TW" sz="2000" b="1" i="1">
+                              <a:latin typeface="Cambria Math" panose="02040503050406030204" pitchFamily="18" charset="0"/>
+                            </a:rPr>
+                          </m:ctrlPr>
+                        </m:sSubSupPr>
+                        <m:e>
+                          <m:r>
+                            <a:rPr lang="en-US" altLang="zh-TW" sz="2000" b="1" i="1">
+                              <a:latin typeface="Cambria Math" panose="02040503050406030204" pitchFamily="18" charset="0"/>
+                            </a:rPr>
+                            <m:t>𝑨</m:t>
+                          </m:r>
+                        </m:e>
+                        <m:sub>
+                          <m:sSub>
+                            <m:sSubPr>
+                              <m:ctrlPr>
+                                <a:rPr lang="en-US" altLang="zh-TW" sz="2000" i="1">
+                                  <a:latin typeface="Cambria Math" panose="02040503050406030204" pitchFamily="18" charset="0"/>
+                                </a:rPr>
+                              </m:ctrlPr>
+                            </m:sSubPr>
+                            <m:e>
+                              <m:r>
+                                <a:rPr lang="en-US" altLang="zh-TW" sz="2000" b="1" i="1">
+                                  <a:latin typeface="Cambria Math" panose="02040503050406030204" pitchFamily="18" charset="0"/>
+                                </a:rPr>
+                                <m:t>𝒒</m:t>
+                              </m:r>
+                            </m:e>
+                            <m:sub>
+                              <m:r>
+                                <a:rPr lang="en-US" altLang="zh-TW" sz="2000" i="1">
+                                  <a:latin typeface="Cambria Math" panose="02040503050406030204" pitchFamily="18" charset="0"/>
+                                </a:rPr>
+                                <m:t>0</m:t>
+                              </m:r>
+                            </m:sub>
+                          </m:sSub>
+                        </m:sub>
+                        <m:sup>
+                          <m:acc>
+                            <m:accPr>
+                              <m:chr m:val="̂"/>
+                              <m:ctrlPr>
+                                <a:rPr lang="en-US" altLang="zh-TW" sz="2000" i="1">
+                                  <a:latin typeface="Cambria Math" panose="02040503050406030204" pitchFamily="18" charset="0"/>
+                                </a:rPr>
+                              </m:ctrlPr>
+                            </m:accPr>
+                            <m:e>
+                              <m:r>
+                                <a:rPr lang="en-US" altLang="zh-TW" sz="2000" i="1">
+                                  <a:latin typeface="Cambria Math" panose="02040503050406030204" pitchFamily="18" charset="0"/>
+                                </a:rPr>
+                                <m:t>𝜀</m:t>
+                              </m:r>
+                            </m:e>
+                          </m:acc>
+                          <m:r>
+                            <a:rPr lang="en-US" altLang="zh-TW" sz="2000" i="1">
+                              <a:latin typeface="Cambria Math" panose="02040503050406030204" pitchFamily="18" charset="0"/>
+                            </a:rPr>
+                            <m:t>, ℓ, </m:t>
+                          </m:r>
+                          <m:r>
+                            <a:rPr lang="en-US" altLang="zh-TW" sz="2000" i="1">
+                              <a:latin typeface="Cambria Math" panose="02040503050406030204" pitchFamily="18" charset="0"/>
+                            </a:rPr>
+                            <m:t>𝑝</m:t>
+                          </m:r>
+                          <m:r>
+                            <a:rPr lang="en-US" altLang="zh-TW" sz="2000" i="1">
+                              <a:latin typeface="Cambria Math" panose="02040503050406030204" pitchFamily="18" charset="0"/>
+                            </a:rPr>
+                            <m:t>=0</m:t>
+                          </m:r>
+                          <m:r>
+                            <a:rPr lang="en-US" altLang="zh-TW" sz="2000" b="1" i="1">
+                              <a:latin typeface="Cambria Math" panose="02040503050406030204" pitchFamily="18" charset="0"/>
+                            </a:rPr>
+                            <m:t>;</m:t>
+                          </m:r>
+                          <m:r>
+                            <a:rPr lang="en-US" altLang="zh-TW" sz="2000" i="1">
+                              <a:latin typeface="Cambria Math" panose="02040503050406030204" pitchFamily="18" charset="0"/>
+                            </a:rPr>
+                            <m:t>𝐶</m:t>
+                          </m:r>
+                        </m:sup>
+                      </m:sSubSup>
+                      <m:d>
+                        <m:dPr>
+                          <m:ctrlPr>
+                            <a:rPr lang="en-US" altLang="zh-TW" sz="2000" b="1" i="1">
+                              <a:latin typeface="Cambria Math" panose="02040503050406030204" pitchFamily="18" charset="0"/>
+                            </a:rPr>
+                          </m:ctrlPr>
+                        </m:dPr>
+                        <m:e>
+                          <m:r>
+                            <a:rPr lang="en-US" altLang="zh-TW" sz="2000" i="1">
+                              <a:latin typeface="Cambria Math" panose="02040503050406030204" pitchFamily="18" charset="0"/>
+                            </a:rPr>
+                            <m:t>𝜌</m:t>
+                          </m:r>
+                          <m:r>
+                            <a:rPr lang="en-US" altLang="zh-TW" sz="2000" b="1" i="1">
+                              <a:latin typeface="Cambria Math" panose="02040503050406030204" pitchFamily="18" charset="0"/>
+                            </a:rPr>
+                            <m:t>,</m:t>
+                          </m:r>
+                          <m:r>
+                            <a:rPr lang="en-US" altLang="zh-TW" sz="2000" i="1">
+                              <a:latin typeface="Cambria Math" panose="02040503050406030204" pitchFamily="18" charset="0"/>
+                            </a:rPr>
+                            <m:t> </m:t>
+                          </m:r>
+                          <m:r>
+                            <a:rPr lang="en-US" altLang="zh-TW" sz="2000" i="1">
+                              <a:latin typeface="Cambria Math" panose="02040503050406030204" pitchFamily="18" charset="0"/>
+                            </a:rPr>
+                            <m:t>𝜙</m:t>
+                          </m:r>
+                          <m:r>
+                            <a:rPr lang="en-US" altLang="zh-TW" sz="2000" i="1">
+                              <a:latin typeface="Cambria Math" panose="02040503050406030204" pitchFamily="18" charset="0"/>
+                            </a:rPr>
+                            <m:t>=0, </m:t>
+                          </m:r>
+                          <m:r>
+                            <a:rPr lang="en-US" altLang="zh-TW" sz="2000" i="1">
+                              <a:latin typeface="Cambria Math" panose="02040503050406030204" pitchFamily="18" charset="0"/>
+                            </a:rPr>
+                            <m:t>𝑧</m:t>
+                          </m:r>
+                          <m:r>
+                            <a:rPr lang="en-US" altLang="zh-TW" sz="2000" i="1">
+                              <a:latin typeface="Cambria Math" panose="02040503050406030204" pitchFamily="18" charset="0"/>
+                            </a:rPr>
+                            <m:t>=0</m:t>
+                          </m:r>
+                        </m:e>
+                      </m:d>
+                      <m:r>
+                        <a:rPr lang="en-US" altLang="zh-TW" sz="2000" b="1" i="1">
+                          <a:latin typeface="Cambria Math" panose="02040503050406030204" pitchFamily="18" charset="0"/>
+                        </a:rPr>
+                        <m:t>=</m:t>
+                      </m:r>
+                      <m:sSubSup>
+                        <m:sSubSupPr>
+                          <m:ctrlPr>
+                            <a:rPr lang="en-US" altLang="zh-TW" sz="2000" b="1" i="1">
+                              <a:latin typeface="Cambria Math" panose="02040503050406030204" pitchFamily="18" charset="0"/>
+                            </a:rPr>
+                          </m:ctrlPr>
+                        </m:sSubSupPr>
+                        <m:e>
+                          <m:r>
+                            <a:rPr lang="en-US" altLang="zh-TW" sz="2000" b="1" i="1">
+                              <a:latin typeface="Cambria Math" panose="02040503050406030204" pitchFamily="18" charset="0"/>
+                            </a:rPr>
+                            <m:t>𝑨</m:t>
+                          </m:r>
+                        </m:e>
+                        <m:sub>
+                          <m:r>
+                            <a:rPr lang="en-US" altLang="zh-TW" sz="2000" b="1" i="1">
+                              <a:latin typeface="Cambria Math" panose="02040503050406030204" pitchFamily="18" charset="0"/>
+                            </a:rPr>
+                            <m:t>∥</m:t>
+                          </m:r>
+                        </m:sub>
+                        <m:sup>
+                          <m:r>
+                            <a:rPr lang="en-US" altLang="zh-TW" sz="2000" b="1" i="1">
+                              <a:latin typeface="Cambria Math" panose="02040503050406030204" pitchFamily="18" charset="0"/>
+                            </a:rPr>
+                            <m:t>ℓ</m:t>
+                          </m:r>
+                        </m:sup>
+                      </m:sSubSup>
+                      <m:acc>
+                        <m:accPr>
+                          <m:chr m:val="̂"/>
+                          <m:ctrlPr>
+                            <a:rPr lang="en-US" altLang="zh-TW" sz="2000" i="1">
+                              <a:latin typeface="Cambria Math" panose="02040503050406030204" pitchFamily="18" charset="0"/>
+                            </a:rPr>
+                          </m:ctrlPr>
+                        </m:accPr>
+                        <m:e>
+                          <m:r>
+                            <a:rPr lang="en-US" altLang="zh-TW" sz="2000" i="1">
+                              <a:latin typeface="Cambria Math" panose="02040503050406030204" pitchFamily="18" charset="0"/>
+                            </a:rPr>
+                            <m:t>𝜀</m:t>
+                          </m:r>
+                        </m:e>
+                      </m:acc>
+                      <m:r>
+                        <a:rPr lang="en-US" altLang="zh-TW" sz="2000" i="1">
+                          <a:latin typeface="Cambria Math" panose="02040503050406030204" pitchFamily="18" charset="0"/>
+                        </a:rPr>
+                        <m:t>+</m:t>
+                      </m:r>
+                      <m:sSubSup>
+                        <m:sSubSupPr>
+                          <m:ctrlPr>
+                            <a:rPr lang="en-US" altLang="zh-TW" sz="2000" i="1">
+                              <a:latin typeface="Cambria Math" panose="02040503050406030204" pitchFamily="18" charset="0"/>
+                            </a:rPr>
+                          </m:ctrlPr>
+                        </m:sSubSupPr>
+                        <m:e>
+                          <m:r>
+                            <a:rPr lang="en-US" altLang="zh-TW" sz="2000" b="1" i="1">
+                              <a:latin typeface="Cambria Math" panose="02040503050406030204" pitchFamily="18" charset="0"/>
+                            </a:rPr>
+                            <m:t>𝑨</m:t>
+                          </m:r>
+                        </m:e>
+                        <m:sub>
+                          <m:r>
+                            <a:rPr lang="en-US" altLang="zh-TW" sz="2000" b="1" i="1">
+                              <a:latin typeface="Cambria Math" panose="02040503050406030204" pitchFamily="18" charset="0"/>
+                            </a:rPr>
+                            <m:t>𝒛</m:t>
+                          </m:r>
+                        </m:sub>
+                        <m:sup>
+                          <m:acc>
+                            <m:accPr>
+                              <m:chr m:val="̂"/>
+                              <m:ctrlPr>
+                                <a:rPr lang="en-US" altLang="zh-TW" sz="2000" i="1">
+                                  <a:latin typeface="Cambria Math" panose="02040503050406030204" pitchFamily="18" charset="0"/>
+                                </a:rPr>
+                              </m:ctrlPr>
+                            </m:accPr>
+                            <m:e>
+                              <m:r>
+                                <a:rPr lang="en-US" altLang="zh-TW" sz="2000" i="1">
+                                  <a:latin typeface="Cambria Math" panose="02040503050406030204" pitchFamily="18" charset="0"/>
+                                </a:rPr>
+                                <m:t>𝜀</m:t>
+                              </m:r>
+                            </m:e>
+                          </m:acc>
+                          <m:r>
+                            <a:rPr lang="en-US" altLang="zh-TW" sz="2000" i="1">
+                              <a:latin typeface="Cambria Math" panose="02040503050406030204" pitchFamily="18" charset="0"/>
+                            </a:rPr>
+                            <m:t>, ℓ</m:t>
+                          </m:r>
+                        </m:sup>
+                      </m:sSubSup>
+                      <m:acc>
+                        <m:accPr>
+                          <m:chr m:val="̂"/>
+                          <m:ctrlPr>
+                            <a:rPr lang="en-US" altLang="zh-TW" sz="2000" i="1">
+                              <a:latin typeface="Cambria Math" panose="02040503050406030204" pitchFamily="18" charset="0"/>
+                            </a:rPr>
+                          </m:ctrlPr>
+                        </m:accPr>
+                        <m:e>
+                          <m:r>
+                            <a:rPr lang="en-US" altLang="zh-TW" sz="2000" i="1">
+                              <a:latin typeface="Cambria Math" panose="02040503050406030204" pitchFamily="18" charset="0"/>
+                            </a:rPr>
+                            <m:t>𝑧</m:t>
+                          </m:r>
+                        </m:e>
+                      </m:acc>
+                    </m:oMath>
+                  </m:oMathPara>
+                </a14:m>
+                <a:endParaRPr lang="zh-TW" altLang="en-US" b="1" dirty="0">
+                  <a:latin typeface="Times New Roman" panose="02020603050405020304" pitchFamily="18" charset="0"/>
+                  <a:cs typeface="Times New Roman" panose="02020603050405020304" pitchFamily="18" charset="0"/>
+                </a:endParaRPr>
+              </a:p>
+            </p:txBody>
+          </p:sp>
+        </mc:Choice>
+        <mc:Fallback>
+          <p:sp>
+            <p:nvSpPr>
+              <p:cNvPr id="34" name="文字方塊 33">
+                <a:extLst>
+                  <a:ext uri="{FF2B5EF4-FFF2-40B4-BE49-F238E27FC236}">
+                    <a16:creationId xmlns:a16="http://schemas.microsoft.com/office/drawing/2014/main" id="{CC458388-0659-49B5-B51D-C20CBBEF338D}"/>
+                  </a:ext>
+                </a:extLst>
+              </p:cNvPr>
+              <p:cNvSpPr txBox="1">
+                <a:spLocks noRot="1" noChangeAspect="1" noMove="1" noResize="1" noEditPoints="1" noAdjustHandles="1" noChangeArrowheads="1" noChangeShapeType="1" noTextEdit="1"/>
+              </p:cNvSpPr>
+              <p:nvPr/>
+            </p:nvSpPr>
+            <p:spPr>
+              <a:xfrm>
+                <a:off x="1928617" y="394065"/>
+                <a:ext cx="4815083" cy="498855"/>
+              </a:xfrm>
+              <a:prstGeom prst="rect">
+                <a:avLst/>
+              </a:prstGeom>
+              <a:blipFill>
+                <a:blip r:embed="rId4"/>
+                <a:stretch>
+                  <a:fillRect t="-3704" r="-3291" b="-7407"/>
+                </a:stretch>
+              </a:blipFill>
+            </p:spPr>
+            <p:txBody>
+              <a:bodyPr/>
+              <a:lstStyle/>
+              <a:p>
+                <a:r>
+                  <a:rPr lang="zh-TW" altLang="en-US">
+                    <a:noFill/>
+                  </a:rPr>
+                  <a:t> </a:t>
+                </a:r>
+              </a:p>
+            </p:txBody>
+          </p:sp>
+        </mc:Fallback>
+      </mc:AlternateContent>
       <p:grpSp>
         <p:nvGrpSpPr>
-          <p:cNvPr id="2" name="群組 1">
+          <p:cNvPr id="41" name="群組 40">
             <a:extLst>
               <a:ext uri="{FF2B5EF4-FFF2-40B4-BE49-F238E27FC236}">
-                <a16:creationId xmlns:a16="http://schemas.microsoft.com/office/drawing/2014/main" id="{2EC8B194-AD9E-4BD5-8CB2-597BC0BB39FF}"/>
+                <a16:creationId xmlns:a16="http://schemas.microsoft.com/office/drawing/2014/main" id="{09E59E93-E82C-4AAA-8C80-0F97C39D1F64}"/>
               </a:ext>
             </a:extLst>
           </p:cNvPr>
@@ -2987,18 +3589,323 @@
         </p:nvGrpSpPr>
         <p:grpSpPr>
           <a:xfrm>
-            <a:off x="20504" y="35311"/>
-            <a:ext cx="9847396" cy="6136274"/>
-            <a:chOff x="20504" y="723901"/>
-            <a:chExt cx="9847396" cy="6136274"/>
+            <a:off x="6743700" y="19066"/>
+            <a:ext cx="1750442" cy="1248852"/>
+            <a:chOff x="6039273" y="-281233"/>
+            <a:chExt cx="1718499" cy="1120593"/>
           </a:xfrm>
         </p:grpSpPr>
+        <p:pic>
+          <p:nvPicPr>
+            <p:cNvPr id="43" name="圖片 42">
+              <a:extLst>
+                <a:ext uri="{FF2B5EF4-FFF2-40B4-BE49-F238E27FC236}">
+                  <a16:creationId xmlns:a16="http://schemas.microsoft.com/office/drawing/2014/main" id="{2F1191E6-1B21-4D7B-B5C5-7EB7C4875FC3}"/>
+                </a:ext>
+              </a:extLst>
+            </p:cNvPr>
+            <p:cNvPicPr>
+              <a:picLocks noChangeAspect="1"/>
+            </p:cNvPicPr>
+            <p:nvPr/>
+          </p:nvPicPr>
+          <p:blipFill>
+            <a:blip r:embed="rId5"/>
+            <a:stretch>
+              <a:fillRect/>
+            </a:stretch>
+          </p:blipFill>
+          <p:spPr>
+            <a:xfrm>
+              <a:off x="6126181" y="-139026"/>
+              <a:ext cx="534369" cy="850550"/>
+            </a:xfrm>
+            <a:prstGeom prst="rect">
+              <a:avLst/>
+            </a:prstGeom>
+          </p:spPr>
+        </p:pic>
+        <mc:AlternateContent xmlns:mc="http://schemas.openxmlformats.org/markup-compatibility/2006" xmlns:a14="http://schemas.microsoft.com/office/drawing/2010/main">
+          <mc:Choice Requires="a14">
+            <p:sp>
+              <p:nvSpPr>
+                <p:cNvPr id="44" name="文字方塊 43">
+                  <a:extLst>
+                    <a:ext uri="{FF2B5EF4-FFF2-40B4-BE49-F238E27FC236}">
+                      <a16:creationId xmlns:a16="http://schemas.microsoft.com/office/drawing/2014/main" id="{0EECDBE0-B06E-400E-ACE6-C5E5DE9C003D}"/>
+                    </a:ext>
+                  </a:extLst>
+                </p:cNvPr>
+                <p:cNvSpPr txBox="1"/>
+                <p:nvPr/>
+              </p:nvSpPr>
+              <p:spPr>
+                <a:xfrm>
+                  <a:off x="6701354" y="-281233"/>
+                  <a:ext cx="990700" cy="1063763"/>
+                </a:xfrm>
+                <a:prstGeom prst="rect">
+                  <a:avLst/>
+                </a:prstGeom>
+                <a:noFill/>
+              </p:spPr>
+              <p:txBody>
+                <a:bodyPr wrap="square" rtlCol="0">
+                  <a:spAutoFit/>
+                </a:bodyPr>
+                <a:lstStyle/>
+                <a:p>
+                  <a:pPr algn="ctr"/>
+                  <a14:m>
+                    <m:oMathPara xmlns:m="http://schemas.openxmlformats.org/officeDocument/2006/math">
+                      <m:oMathParaPr>
+                        <m:jc m:val="centerGroup"/>
+                      </m:oMathParaPr>
+                      <m:oMath xmlns:m="http://schemas.openxmlformats.org/officeDocument/2006/math">
+                        <m:d>
+                          <m:dPr>
+                            <m:begChr m:val="|"/>
+                            <m:endChr m:val="|"/>
+                            <m:ctrlPr>
+                              <a:rPr lang="en-US" altLang="zh-TW" sz="2000" i="1">
+                                <a:latin typeface="Cambria Math" panose="02040503050406030204" pitchFamily="18" charset="0"/>
+                              </a:rPr>
+                            </m:ctrlPr>
+                          </m:dPr>
+                          <m:e>
+                            <m:sSubSup>
+                              <m:sSubSupPr>
+                                <m:ctrlPr>
+                                  <a:rPr lang="en-US" altLang="zh-TW" sz="2000" b="1" i="1">
+                                    <a:latin typeface="Cambria Math" panose="02040503050406030204" pitchFamily="18" charset="0"/>
+                                  </a:rPr>
+                                </m:ctrlPr>
+                              </m:sSubSupPr>
+                              <m:e>
+                                <m:r>
+                                  <a:rPr lang="en-US" altLang="zh-TW" sz="2000" b="1" i="1">
+                                    <a:latin typeface="Cambria Math" panose="02040503050406030204" pitchFamily="18" charset="0"/>
+                                  </a:rPr>
+                                  <m:t>𝑨</m:t>
+                                </m:r>
+                              </m:e>
+                              <m:sub>
+                                <m:r>
+                                  <a:rPr lang="en-US" altLang="zh-TW" sz="2000" b="1" i="1">
+                                    <a:latin typeface="Cambria Math" panose="02040503050406030204" pitchFamily="18" charset="0"/>
+                                  </a:rPr>
+                                  <m:t>∥</m:t>
+                                </m:r>
+                              </m:sub>
+                              <m:sup>
+                                <m:r>
+                                  <a:rPr lang="en-US" altLang="zh-TW" sz="2000" b="1" i="1">
+                                    <a:latin typeface="Cambria Math" panose="02040503050406030204" pitchFamily="18" charset="0"/>
+                                  </a:rPr>
+                                  <m:t>ℓ</m:t>
+                                </m:r>
+                              </m:sup>
+                            </m:sSubSup>
+                          </m:e>
+                        </m:d>
+                      </m:oMath>
+                    </m:oMathPara>
+                  </a14:m>
+                  <a:endParaRPr lang="en-US" altLang="zh-TW" sz="2000" i="1" dirty="0">
+                    <a:latin typeface="Times New Roman" panose="02020603050405020304" pitchFamily="18" charset="0"/>
+                    <a:cs typeface="Times New Roman" panose="02020603050405020304" pitchFamily="18" charset="0"/>
+                  </a:endParaRPr>
+                </a:p>
+                <a:p>
+                  <a:pPr algn="ctr"/>
+                  <a14:m>
+                    <m:oMathPara xmlns:m="http://schemas.openxmlformats.org/officeDocument/2006/math">
+                      <m:oMathParaPr>
+                        <m:jc m:val="centerGroup"/>
+                      </m:oMathParaPr>
+                      <m:oMath xmlns:m="http://schemas.openxmlformats.org/officeDocument/2006/math">
+                        <m:d>
+                          <m:dPr>
+                            <m:begChr m:val="|"/>
+                            <m:endChr m:val="|"/>
+                            <m:ctrlPr>
+                              <a:rPr lang="en-US" altLang="zh-TW" sz="2000" i="1">
+                                <a:latin typeface="Cambria Math" panose="02040503050406030204" pitchFamily="18" charset="0"/>
+                              </a:rPr>
+                            </m:ctrlPr>
+                          </m:dPr>
+                          <m:e>
+                            <m:sSubSup>
+                              <m:sSubSupPr>
+                                <m:ctrlPr>
+                                  <a:rPr lang="en-US" altLang="zh-TW" sz="2000" i="1">
+                                    <a:latin typeface="Cambria Math" panose="02040503050406030204" pitchFamily="18" charset="0"/>
+                                  </a:rPr>
+                                </m:ctrlPr>
+                              </m:sSubSupPr>
+                              <m:e>
+                                <m:r>
+                                  <a:rPr lang="en-US" altLang="zh-TW" sz="2000" b="1" i="1">
+                                    <a:latin typeface="Cambria Math" panose="02040503050406030204" pitchFamily="18" charset="0"/>
+                                  </a:rPr>
+                                  <m:t>𝑨</m:t>
+                                </m:r>
+                              </m:e>
+                              <m:sub>
+                                <m:r>
+                                  <a:rPr lang="en-US" altLang="zh-TW" sz="2000" b="1" i="1">
+                                    <a:latin typeface="Cambria Math" panose="02040503050406030204" pitchFamily="18" charset="0"/>
+                                  </a:rPr>
+                                  <m:t>𝒛</m:t>
+                                </m:r>
+                              </m:sub>
+                              <m:sup>
+                                <m:r>
+                                  <a:rPr lang="en-US" altLang="zh-TW" sz="2000" i="1">
+                                    <a:latin typeface="Cambria Math" panose="02040503050406030204" pitchFamily="18" charset="0"/>
+                                  </a:rPr>
+                                  <m:t>𝜎</m:t>
+                                </m:r>
+                                <m:r>
+                                  <a:rPr lang="en-US" altLang="zh-TW" sz="2000" i="1">
+                                    <a:latin typeface="Cambria Math" panose="02040503050406030204" pitchFamily="18" charset="0"/>
+                                  </a:rPr>
+                                  <m:t>=1, ℓ</m:t>
+                                </m:r>
+                              </m:sup>
+                            </m:sSubSup>
+                          </m:e>
+                        </m:d>
+                      </m:oMath>
+                    </m:oMathPara>
+                  </a14:m>
+                  <a:endParaRPr lang="en-US" altLang="zh-TW" sz="2000" dirty="0">
+                    <a:latin typeface="Times New Roman" panose="02020603050405020304" pitchFamily="18" charset="0"/>
+                    <a:cs typeface="Times New Roman" panose="02020603050405020304" pitchFamily="18" charset="0"/>
+                  </a:endParaRPr>
+                </a:p>
+                <a:p>
+                  <a:pPr algn="ctr"/>
+                  <a14:m>
+                    <m:oMathPara xmlns:m="http://schemas.openxmlformats.org/officeDocument/2006/math">
+                      <m:oMathParaPr>
+                        <m:jc m:val="centerGroup"/>
+                      </m:oMathParaPr>
+                      <m:oMath xmlns:m="http://schemas.openxmlformats.org/officeDocument/2006/math">
+                        <m:d>
+                          <m:dPr>
+                            <m:begChr m:val="|"/>
+                            <m:endChr m:val="|"/>
+                            <m:ctrlPr>
+                              <a:rPr lang="en-US" altLang="zh-TW" sz="2000" i="1">
+                                <a:latin typeface="Cambria Math" panose="02040503050406030204" pitchFamily="18" charset="0"/>
+                              </a:rPr>
+                            </m:ctrlPr>
+                          </m:dPr>
+                          <m:e>
+                            <m:sSubSup>
+                              <m:sSubSupPr>
+                                <m:ctrlPr>
+                                  <a:rPr lang="en-US" altLang="zh-TW" sz="2000" i="1">
+                                    <a:latin typeface="Cambria Math" panose="02040503050406030204" pitchFamily="18" charset="0"/>
+                                  </a:rPr>
+                                </m:ctrlPr>
+                              </m:sSubSupPr>
+                              <m:e>
+                                <m:r>
+                                  <a:rPr lang="en-US" altLang="zh-TW" sz="2000" b="1" i="1">
+                                    <a:latin typeface="Cambria Math" panose="02040503050406030204" pitchFamily="18" charset="0"/>
+                                  </a:rPr>
+                                  <m:t>𝑨</m:t>
+                                </m:r>
+                              </m:e>
+                              <m:sub>
+                                <m:r>
+                                  <a:rPr lang="en-US" altLang="zh-TW" sz="2000" b="1" i="1">
+                                    <a:latin typeface="Cambria Math" panose="02040503050406030204" pitchFamily="18" charset="0"/>
+                                  </a:rPr>
+                                  <m:t>𝒛</m:t>
+                                </m:r>
+                              </m:sub>
+                              <m:sup>
+                                <m:r>
+                                  <a:rPr lang="en-US" altLang="zh-TW" sz="2000" i="1">
+                                    <a:latin typeface="Cambria Math" panose="02040503050406030204" pitchFamily="18" charset="0"/>
+                                  </a:rPr>
+                                  <m:t>𝜎</m:t>
+                                </m:r>
+                                <m:r>
+                                  <a:rPr lang="en-US" altLang="zh-TW" sz="2000" i="1">
+                                    <a:latin typeface="Cambria Math" panose="02040503050406030204" pitchFamily="18" charset="0"/>
+                                  </a:rPr>
+                                  <m:t>=−1, ℓ</m:t>
+                                </m:r>
+                              </m:sup>
+                            </m:sSubSup>
+                          </m:e>
+                        </m:d>
+                      </m:oMath>
+                    </m:oMathPara>
+                  </a14:m>
+                  <a:endParaRPr lang="zh-TW" altLang="en-US" b="1" dirty="0">
+                    <a:latin typeface="Times New Roman" panose="02020603050405020304" pitchFamily="18" charset="0"/>
+                    <a:cs typeface="Times New Roman" panose="02020603050405020304" pitchFamily="18" charset="0"/>
+                  </a:endParaRPr>
+                </a:p>
+              </p:txBody>
+            </p:sp>
+          </mc:Choice>
+          <mc:Fallback xmlns="">
+            <p:sp>
+              <p:nvSpPr>
+                <p:cNvPr id="8" name="文字方塊 7">
+                  <a:extLst>
+                    <a:ext uri="{FF2B5EF4-FFF2-40B4-BE49-F238E27FC236}">
+                      <a16:creationId xmlns:a16="http://schemas.microsoft.com/office/drawing/2014/main" id="{865164BF-B68E-473A-A921-4C3623AE9C50}"/>
+                    </a:ext>
+                  </a:extLst>
+                </p:cNvPr>
+                <p:cNvSpPr txBox="1">
+                  <a:spLocks noRot="1" noChangeAspect="1" noMove="1" noResize="1" noEditPoints="1" noAdjustHandles="1" noChangeArrowheads="1" noChangeShapeType="1" noTextEdit="1"/>
+                </p:cNvSpPr>
+                <p:nvPr/>
+              </p:nvSpPr>
+              <p:spPr>
+                <a:xfrm>
+                  <a:off x="6701354" y="-281233"/>
+                  <a:ext cx="990700" cy="1063763"/>
+                </a:xfrm>
+                <a:prstGeom prst="rect">
+                  <a:avLst/>
+                </a:prstGeom>
+                <a:blipFill>
+                  <a:blip r:embed="rId6"/>
+                  <a:stretch>
+                    <a:fillRect l="-1807"/>
+                  </a:stretch>
+                </a:blipFill>
+              </p:spPr>
+              <p:txBody>
+                <a:bodyPr/>
+                <a:lstStyle/>
+                <a:p>
+                  <a:r>
+                    <a:rPr lang="zh-TW" altLang="en-US">
+                      <a:noFill/>
+                    </a:rPr>
+                    <a:t> </a:t>
+                  </a:r>
+                </a:p>
+              </p:txBody>
+            </p:sp>
+          </mc:Fallback>
+        </mc:AlternateContent>
         <p:sp>
           <p:nvSpPr>
-            <p:cNvPr id="40" name="矩形: 圓角 39">
+            <p:cNvPr id="45" name="矩形: 圓角 44">
               <a:extLst>
                 <a:ext uri="{FF2B5EF4-FFF2-40B4-BE49-F238E27FC236}">
-                  <a16:creationId xmlns:a16="http://schemas.microsoft.com/office/drawing/2014/main" id="{AE5C4EE9-7B12-4557-9064-3ED2A0A070C8}"/>
+                  <a16:creationId xmlns:a16="http://schemas.microsoft.com/office/drawing/2014/main" id="{D3F319D8-58DC-40A7-AD41-E91DC1E9F8DE}"/>
                 </a:ext>
               </a:extLst>
             </p:cNvPr>
@@ -3007,16 +3914,14 @@
           </p:nvSpPr>
           <p:spPr>
             <a:xfrm>
-              <a:off x="25400" y="4408261"/>
-              <a:ext cx="9842500" cy="2366477"/>
+              <a:off x="6039273" y="-260656"/>
+              <a:ext cx="1718499" cy="1100016"/>
             </a:xfrm>
             <a:prstGeom prst="roundRect">
               <a:avLst/>
             </a:prstGeom>
-            <a:solidFill>
-              <a:schemeClr val="bg1"/>
-            </a:solidFill>
-            <a:ln w="19050">
+            <a:noFill/>
+            <a:ln w="28575">
               <a:solidFill>
                 <a:schemeClr val="tx1">
                   <a:lumMod val="50000"/>
@@ -3042,7 +3947,7 @@
             </a:fontRef>
           </p:style>
           <p:txBody>
-            <a:bodyPr rot="0" spcFirstLastPara="0" vertOverflow="overflow" horzOverflow="overflow" vert="horz" wrap="square" lIns="91440" tIns="45720" rIns="91440" bIns="45720" numCol="1" spcCol="0" rtlCol="0" fromWordArt="0" anchor="ctr" anchorCtr="0" forceAA="0" compatLnSpc="1">
+            <a:bodyPr rot="0" spcFirstLastPara="0" vertOverflow="overflow" horzOverflow="overflow" vert="horz" wrap="square" lIns="80998" tIns="40499" rIns="80998" bIns="40499" numCol="1" spcCol="0" rtlCol="0" fromWordArt="0" anchor="ctr" anchorCtr="0" forceAA="0" compatLnSpc="1">
               <a:prstTxWarp prst="textNoShape">
                 <a:avLst/>
               </a:prstTxWarp>
@@ -3051,857 +3956,662 @@
             <a:lstStyle/>
             <a:p>
               <a:pPr algn="ctr"/>
-              <a:endParaRPr lang="zh-TW" altLang="en-US"/>
+              <a:endParaRPr lang="zh-TW" altLang="en-US" dirty="0">
+                <a:latin typeface="Times New Roman" panose="02020603050405020304" pitchFamily="18" charset="0"/>
+                <a:cs typeface="Times New Roman" panose="02020603050405020304" pitchFamily="18" charset="0"/>
+              </a:endParaRPr>
             </a:p>
           </p:txBody>
         </p:sp>
-        <p:sp>
-          <p:nvSpPr>
-            <p:cNvPr id="42" name="矩形: 圓角 41">
-              <a:extLst>
-                <a:ext uri="{FF2B5EF4-FFF2-40B4-BE49-F238E27FC236}">
-                  <a16:creationId xmlns:a16="http://schemas.microsoft.com/office/drawing/2014/main" id="{C9FF13C6-480E-4AEE-A544-DEBAF6747026}"/>
-                </a:ext>
-              </a:extLst>
-            </p:cNvPr>
-            <p:cNvSpPr/>
-            <p:nvPr/>
-          </p:nvSpPr>
-          <p:spPr>
-            <a:xfrm>
-              <a:off x="20504" y="2036968"/>
-              <a:ext cx="9842500" cy="2366477"/>
-            </a:xfrm>
-            <a:prstGeom prst="roundRect">
-              <a:avLst/>
-            </a:prstGeom>
-            <a:solidFill>
-              <a:schemeClr val="bg1"/>
-            </a:solidFill>
-            <a:ln w="19050">
-              <a:solidFill>
-                <a:schemeClr val="tx1">
-                  <a:lumMod val="50000"/>
-                  <a:lumOff val="50000"/>
-                </a:schemeClr>
-              </a:solidFill>
-            </a:ln>
-          </p:spPr>
-          <p:style>
-            <a:lnRef idx="2">
-              <a:schemeClr val="accent1">
-                <a:shade val="50000"/>
-              </a:schemeClr>
-            </a:lnRef>
-            <a:fillRef idx="1">
-              <a:schemeClr val="accent1"/>
-            </a:fillRef>
-            <a:effectRef idx="0">
-              <a:schemeClr val="accent1"/>
-            </a:effectRef>
-            <a:fontRef idx="minor">
-              <a:schemeClr val="lt1"/>
-            </a:fontRef>
-          </p:style>
-          <p:txBody>
-            <a:bodyPr rot="0" spcFirstLastPara="0" vertOverflow="overflow" horzOverflow="overflow" vert="horz" wrap="square" lIns="91440" tIns="45720" rIns="91440" bIns="45720" numCol="1" spcCol="0" rtlCol="0" fromWordArt="0" anchor="ctr" anchorCtr="0" forceAA="0" compatLnSpc="1">
-              <a:prstTxWarp prst="textNoShape">
-                <a:avLst/>
-              </a:prstTxWarp>
-              <a:noAutofit/>
-            </a:bodyPr>
-            <a:lstStyle/>
-            <a:p>
-              <a:pPr algn="ctr"/>
-              <a:endParaRPr lang="zh-TW" altLang="en-US"/>
-            </a:p>
-          </p:txBody>
-        </p:sp>
-        <p:pic>
-          <p:nvPicPr>
-            <p:cNvPr id="49" name="圖片 48">
-              <a:extLst>
-                <a:ext uri="{FF2B5EF4-FFF2-40B4-BE49-F238E27FC236}">
-                  <a16:creationId xmlns:a16="http://schemas.microsoft.com/office/drawing/2014/main" id="{43039747-3351-45D4-A7D9-4A0F2F4E8023}"/>
-                </a:ext>
-              </a:extLst>
-            </p:cNvPr>
-            <p:cNvPicPr>
-              <a:picLocks noChangeAspect="1"/>
-            </p:cNvPicPr>
-            <p:nvPr/>
-          </p:nvPicPr>
-          <p:blipFill>
-            <a:blip r:embed="rId2">
-              <a:clrChange>
-                <a:clrFrom>
-                  <a:srgbClr val="FFFFFF"/>
-                </a:clrFrom>
-                <a:clrTo>
-                  <a:srgbClr val="FFFFFF">
-                    <a:alpha val="0"/>
-                  </a:srgbClr>
-                </a:clrTo>
-              </a:clrChange>
-              <a:extLst>
-                <a:ext uri="{28A0092B-C50C-407E-A947-70E740481C1C}">
-                  <a14:useLocalDpi xmlns:a14="http://schemas.microsoft.com/office/drawing/2010/main" val="0"/>
-                </a:ext>
-              </a:extLst>
-            </a:blip>
-            <a:stretch>
-              <a:fillRect/>
-            </a:stretch>
-          </p:blipFill>
-          <p:spPr>
-            <a:xfrm>
-              <a:off x="262455" y="2124158"/>
-              <a:ext cx="9458896" cy="2364724"/>
-            </a:xfrm>
-            <a:prstGeom prst="rect">
-              <a:avLst/>
-            </a:prstGeom>
-          </p:spPr>
-        </p:pic>
-        <p:pic>
-          <p:nvPicPr>
-            <p:cNvPr id="51" name="圖片 50">
-              <a:extLst>
-                <a:ext uri="{FF2B5EF4-FFF2-40B4-BE49-F238E27FC236}">
-                  <a16:creationId xmlns:a16="http://schemas.microsoft.com/office/drawing/2014/main" id="{6E627D55-FAFF-4B4D-BA11-25189DE629DC}"/>
-                </a:ext>
-              </a:extLst>
-            </p:cNvPr>
-            <p:cNvPicPr>
-              <a:picLocks noChangeAspect="1"/>
-            </p:cNvPicPr>
-            <p:nvPr/>
-          </p:nvPicPr>
-          <p:blipFill>
-            <a:blip r:embed="rId3">
-              <a:clrChange>
-                <a:clrFrom>
-                  <a:srgbClr val="FFFFFF"/>
-                </a:clrFrom>
-                <a:clrTo>
-                  <a:srgbClr val="FFFFFF">
-                    <a:alpha val="0"/>
-                  </a:srgbClr>
-                </a:clrTo>
-              </a:clrChange>
-              <a:extLst>
-                <a:ext uri="{28A0092B-C50C-407E-A947-70E740481C1C}">
-                  <a14:useLocalDpi xmlns:a14="http://schemas.microsoft.com/office/drawing/2010/main" val="0"/>
-                </a:ext>
-              </a:extLst>
-            </a:blip>
-            <a:stretch>
-              <a:fillRect/>
-            </a:stretch>
-          </p:blipFill>
-          <p:spPr>
-            <a:xfrm>
-              <a:off x="262455" y="4495451"/>
-              <a:ext cx="9458896" cy="2364724"/>
-            </a:xfrm>
-            <a:prstGeom prst="rect">
-              <a:avLst/>
-            </a:prstGeom>
-          </p:spPr>
-        </p:pic>
-        <mc:AlternateContent xmlns:mc="http://schemas.openxmlformats.org/markup-compatibility/2006">
-          <mc:Choice xmlns:a14="http://schemas.microsoft.com/office/drawing/2010/main" Requires="a14">
-            <p:sp>
-              <p:nvSpPr>
-                <p:cNvPr id="6" name="文字方塊 5">
-                  <a:extLst>
-                    <a:ext uri="{FF2B5EF4-FFF2-40B4-BE49-F238E27FC236}">
-                      <a16:creationId xmlns:a16="http://schemas.microsoft.com/office/drawing/2014/main" id="{D6A0354B-E6EA-4011-B8D8-356E01B0B0E9}"/>
-                    </a:ext>
-                  </a:extLst>
-                </p:cNvPr>
-                <p:cNvSpPr txBox="1"/>
-                <p:nvPr/>
-              </p:nvSpPr>
-              <p:spPr>
-                <a:xfrm>
-                  <a:off x="1764299" y="1218950"/>
-                  <a:ext cx="4815083" cy="498855"/>
-                </a:xfrm>
-                <a:prstGeom prst="rect">
-                  <a:avLst/>
-                </a:prstGeom>
-                <a:noFill/>
-              </p:spPr>
-              <p:txBody>
-                <a:bodyPr wrap="square" rtlCol="0">
-                  <a:spAutoFit/>
-                </a:bodyPr>
-                <a:lstStyle/>
-                <a:p>
-                  <a:pPr/>
-                  <a14:m>
-                    <m:oMathPara xmlns:m="http://schemas.openxmlformats.org/officeDocument/2006/math">
-                      <m:oMathParaPr>
-                        <m:jc m:val="centerGroup"/>
-                      </m:oMathParaPr>
-                      <m:oMath xmlns:m="http://schemas.openxmlformats.org/officeDocument/2006/math">
-                        <m:sSubSup>
-                          <m:sSubSupPr>
-                            <m:ctrlPr>
-                              <a:rPr lang="en-US" altLang="zh-TW" sz="2000" b="1" i="1">
-                                <a:latin typeface="Cambria Math" panose="02040503050406030204" pitchFamily="18" charset="0"/>
-                              </a:rPr>
-                            </m:ctrlPr>
-                          </m:sSubSupPr>
-                          <m:e>
-                            <m:r>
-                              <a:rPr lang="en-US" altLang="zh-TW" sz="2000" b="1" i="1">
-                                <a:latin typeface="Cambria Math" panose="02040503050406030204" pitchFamily="18" charset="0"/>
-                              </a:rPr>
-                              <m:t>𝑨</m:t>
-                            </m:r>
-                          </m:e>
-                          <m:sub>
-                            <m:sSub>
-                              <m:sSubPr>
-                                <m:ctrlPr>
-                                  <a:rPr lang="en-US" altLang="zh-TW" sz="2000" i="1">
-                                    <a:latin typeface="Cambria Math" panose="02040503050406030204" pitchFamily="18" charset="0"/>
-                                  </a:rPr>
-                                </m:ctrlPr>
-                              </m:sSubPr>
-                              <m:e>
-                                <m:r>
-                                  <a:rPr lang="en-US" altLang="zh-TW" sz="2000" b="1" i="1">
-                                    <a:latin typeface="Cambria Math" panose="02040503050406030204" pitchFamily="18" charset="0"/>
-                                  </a:rPr>
-                                  <m:t>𝒒</m:t>
-                                </m:r>
-                              </m:e>
-                              <m:sub>
-                                <m:r>
-                                  <a:rPr lang="en-US" altLang="zh-TW" sz="2000" i="1">
-                                    <a:latin typeface="Cambria Math" panose="02040503050406030204" pitchFamily="18" charset="0"/>
-                                  </a:rPr>
-                                  <m:t>0</m:t>
-                                </m:r>
-                              </m:sub>
-                            </m:sSub>
-                          </m:sub>
-                          <m:sup>
-                            <m:acc>
-                              <m:accPr>
-                                <m:chr m:val="̂"/>
-                                <m:ctrlPr>
-                                  <a:rPr lang="en-US" altLang="zh-TW" sz="2000" i="1">
-                                    <a:latin typeface="Cambria Math" panose="02040503050406030204" pitchFamily="18" charset="0"/>
-                                  </a:rPr>
-                                </m:ctrlPr>
-                              </m:accPr>
-                              <m:e>
-                                <m:r>
-                                  <a:rPr lang="en-US" altLang="zh-TW" sz="2000" i="1">
-                                    <a:latin typeface="Cambria Math" panose="02040503050406030204" pitchFamily="18" charset="0"/>
-                                  </a:rPr>
-                                  <m:t>𝜀</m:t>
-                                </m:r>
-                              </m:e>
-                            </m:acc>
-                            <m:r>
-                              <a:rPr lang="en-US" altLang="zh-TW" sz="2000" i="1">
-                                <a:latin typeface="Cambria Math" panose="02040503050406030204" pitchFamily="18" charset="0"/>
-                              </a:rPr>
-                              <m:t>, ℓ, </m:t>
-                            </m:r>
-                            <m:r>
-                              <a:rPr lang="en-US" altLang="zh-TW" sz="2000" i="1">
-                                <a:latin typeface="Cambria Math" panose="02040503050406030204" pitchFamily="18" charset="0"/>
-                              </a:rPr>
-                              <m:t>𝑝</m:t>
-                            </m:r>
-                            <m:r>
-                              <a:rPr lang="en-US" altLang="zh-TW" sz="2000" i="1">
-                                <a:latin typeface="Cambria Math" panose="02040503050406030204" pitchFamily="18" charset="0"/>
-                              </a:rPr>
-                              <m:t>=0</m:t>
-                            </m:r>
-                            <m:r>
-                              <a:rPr lang="en-US" altLang="zh-TW" sz="2000" b="1" i="1">
-                                <a:latin typeface="Cambria Math" panose="02040503050406030204" pitchFamily="18" charset="0"/>
-                              </a:rPr>
-                              <m:t>;</m:t>
-                            </m:r>
-                            <m:r>
-                              <a:rPr lang="en-US" altLang="zh-TW" sz="2000" i="1">
-                                <a:latin typeface="Cambria Math" panose="02040503050406030204" pitchFamily="18" charset="0"/>
-                              </a:rPr>
-                              <m:t>𝐶</m:t>
-                            </m:r>
-                          </m:sup>
-                        </m:sSubSup>
-                        <m:d>
-                          <m:dPr>
-                            <m:ctrlPr>
-                              <a:rPr lang="en-US" altLang="zh-TW" sz="2000" b="1" i="1">
-                                <a:latin typeface="Cambria Math" panose="02040503050406030204" pitchFamily="18" charset="0"/>
-                              </a:rPr>
-                            </m:ctrlPr>
-                          </m:dPr>
-                          <m:e>
-                            <m:r>
-                              <a:rPr lang="en-US" altLang="zh-TW" sz="2000" i="1">
-                                <a:latin typeface="Cambria Math" panose="02040503050406030204" pitchFamily="18" charset="0"/>
-                              </a:rPr>
-                              <m:t>𝜌</m:t>
-                            </m:r>
-                            <m:r>
-                              <a:rPr lang="en-US" altLang="zh-TW" sz="2000" b="1" i="1">
-                                <a:latin typeface="Cambria Math" panose="02040503050406030204" pitchFamily="18" charset="0"/>
-                              </a:rPr>
-                              <m:t>,</m:t>
-                            </m:r>
-                            <m:r>
-                              <a:rPr lang="en-US" altLang="zh-TW" sz="2000" i="1">
-                                <a:latin typeface="Cambria Math" panose="02040503050406030204" pitchFamily="18" charset="0"/>
-                              </a:rPr>
-                              <m:t> </m:t>
-                            </m:r>
-                            <m:r>
-                              <a:rPr lang="en-US" altLang="zh-TW" sz="2000" i="1">
-                                <a:latin typeface="Cambria Math" panose="02040503050406030204" pitchFamily="18" charset="0"/>
-                              </a:rPr>
-                              <m:t>𝜙</m:t>
-                            </m:r>
-                            <m:r>
-                              <a:rPr lang="en-US" altLang="zh-TW" sz="2000" i="1">
-                                <a:latin typeface="Cambria Math" panose="02040503050406030204" pitchFamily="18" charset="0"/>
-                              </a:rPr>
-                              <m:t>=0, </m:t>
-                            </m:r>
-                            <m:r>
-                              <a:rPr lang="en-US" altLang="zh-TW" sz="2000" i="1">
-                                <a:latin typeface="Cambria Math" panose="02040503050406030204" pitchFamily="18" charset="0"/>
-                              </a:rPr>
-                              <m:t>𝑧</m:t>
-                            </m:r>
-                            <m:r>
-                              <a:rPr lang="en-US" altLang="zh-TW" sz="2000" i="1">
-                                <a:latin typeface="Cambria Math" panose="02040503050406030204" pitchFamily="18" charset="0"/>
-                              </a:rPr>
-                              <m:t>=0</m:t>
-                            </m:r>
-                          </m:e>
-                        </m:d>
-                        <m:r>
-                          <a:rPr lang="en-US" altLang="zh-TW" sz="2000" b="1" i="1">
-                            <a:latin typeface="Cambria Math" panose="02040503050406030204" pitchFamily="18" charset="0"/>
-                          </a:rPr>
-                          <m:t>=</m:t>
-                        </m:r>
-                        <m:sSubSup>
-                          <m:sSubSupPr>
-                            <m:ctrlPr>
-                              <a:rPr lang="en-US" altLang="zh-TW" sz="2000" b="1" i="1">
-                                <a:latin typeface="Cambria Math" panose="02040503050406030204" pitchFamily="18" charset="0"/>
-                              </a:rPr>
-                            </m:ctrlPr>
-                          </m:sSubSupPr>
-                          <m:e>
-                            <m:r>
-                              <a:rPr lang="en-US" altLang="zh-TW" sz="2000" b="1" i="1">
-                                <a:latin typeface="Cambria Math" panose="02040503050406030204" pitchFamily="18" charset="0"/>
-                              </a:rPr>
-                              <m:t>𝑨</m:t>
-                            </m:r>
-                          </m:e>
-                          <m:sub>
-                            <m:r>
-                              <a:rPr lang="en-US" altLang="zh-TW" sz="2000" b="1" i="1">
-                                <a:latin typeface="Cambria Math" panose="02040503050406030204" pitchFamily="18" charset="0"/>
-                              </a:rPr>
-                              <m:t>∥</m:t>
-                            </m:r>
-                          </m:sub>
-                          <m:sup>
-                            <m:r>
-                              <a:rPr lang="en-US" altLang="zh-TW" sz="2000" b="1" i="1">
-                                <a:latin typeface="Cambria Math" panose="02040503050406030204" pitchFamily="18" charset="0"/>
-                              </a:rPr>
-                              <m:t>ℓ</m:t>
-                            </m:r>
-                          </m:sup>
-                        </m:sSubSup>
-                        <m:acc>
-                          <m:accPr>
-                            <m:chr m:val="̂"/>
-                            <m:ctrlPr>
-                              <a:rPr lang="en-US" altLang="zh-TW" sz="2000" i="1">
-                                <a:latin typeface="Cambria Math" panose="02040503050406030204" pitchFamily="18" charset="0"/>
-                              </a:rPr>
-                            </m:ctrlPr>
-                          </m:accPr>
-                          <m:e>
-                            <m:r>
-                              <a:rPr lang="en-US" altLang="zh-TW" sz="2000" i="1">
-                                <a:latin typeface="Cambria Math" panose="02040503050406030204" pitchFamily="18" charset="0"/>
-                              </a:rPr>
-                              <m:t>𝜀</m:t>
-                            </m:r>
-                          </m:e>
-                        </m:acc>
-                        <m:r>
-                          <a:rPr lang="en-US" altLang="zh-TW" sz="2000" i="1">
-                            <a:latin typeface="Cambria Math" panose="02040503050406030204" pitchFamily="18" charset="0"/>
-                          </a:rPr>
-                          <m:t>+</m:t>
-                        </m:r>
-                        <m:sSubSup>
-                          <m:sSubSupPr>
-                            <m:ctrlPr>
-                              <a:rPr lang="en-US" altLang="zh-TW" sz="2000" i="1">
-                                <a:latin typeface="Cambria Math" panose="02040503050406030204" pitchFamily="18" charset="0"/>
-                              </a:rPr>
-                            </m:ctrlPr>
-                          </m:sSubSupPr>
-                          <m:e>
-                            <m:r>
-                              <a:rPr lang="en-US" altLang="zh-TW" sz="2000" b="1" i="1">
-                                <a:latin typeface="Cambria Math" panose="02040503050406030204" pitchFamily="18" charset="0"/>
-                              </a:rPr>
-                              <m:t>𝑨</m:t>
-                            </m:r>
-                          </m:e>
-                          <m:sub>
-                            <m:r>
-                              <a:rPr lang="en-US" altLang="zh-TW" sz="2000" b="1" i="1">
-                                <a:latin typeface="Cambria Math" panose="02040503050406030204" pitchFamily="18" charset="0"/>
-                              </a:rPr>
-                              <m:t>𝒛</m:t>
-                            </m:r>
-                          </m:sub>
-                          <m:sup>
-                            <m:acc>
-                              <m:accPr>
-                                <m:chr m:val="̂"/>
-                                <m:ctrlPr>
-                                  <a:rPr lang="en-US" altLang="zh-TW" sz="2000" i="1">
-                                    <a:latin typeface="Cambria Math" panose="02040503050406030204" pitchFamily="18" charset="0"/>
-                                  </a:rPr>
-                                </m:ctrlPr>
-                              </m:accPr>
-                              <m:e>
-                                <m:r>
-                                  <a:rPr lang="en-US" altLang="zh-TW" sz="2000" i="1">
-                                    <a:latin typeface="Cambria Math" panose="02040503050406030204" pitchFamily="18" charset="0"/>
-                                  </a:rPr>
-                                  <m:t>𝜀</m:t>
-                                </m:r>
-                              </m:e>
-                            </m:acc>
-                            <m:r>
-                              <a:rPr lang="en-US" altLang="zh-TW" sz="2000" i="1">
-                                <a:latin typeface="Cambria Math" panose="02040503050406030204" pitchFamily="18" charset="0"/>
-                              </a:rPr>
-                              <m:t>, ℓ</m:t>
-                            </m:r>
-                          </m:sup>
-                        </m:sSubSup>
-                        <m:acc>
-                          <m:accPr>
-                            <m:chr m:val="̂"/>
-                            <m:ctrlPr>
-                              <a:rPr lang="en-US" altLang="zh-TW" sz="2000" i="1">
-                                <a:latin typeface="Cambria Math" panose="02040503050406030204" pitchFamily="18" charset="0"/>
-                              </a:rPr>
-                            </m:ctrlPr>
-                          </m:accPr>
-                          <m:e>
-                            <m:r>
-                              <a:rPr lang="en-US" altLang="zh-TW" sz="2000" i="1">
-                                <a:latin typeface="Cambria Math" panose="02040503050406030204" pitchFamily="18" charset="0"/>
-                              </a:rPr>
-                              <m:t>𝑧</m:t>
-                            </m:r>
-                          </m:e>
-                        </m:acc>
-                      </m:oMath>
-                    </m:oMathPara>
-                  </a14:m>
-                  <a:endParaRPr lang="zh-TW" altLang="en-US" b="1" dirty="0"/>
-                </a:p>
-              </p:txBody>
-            </p:sp>
-          </mc:Choice>
-          <mc:Fallback>
-            <p:sp>
-              <p:nvSpPr>
-                <p:cNvPr id="6" name="文字方塊 5">
-                  <a:extLst>
-                    <a:ext uri="{FF2B5EF4-FFF2-40B4-BE49-F238E27FC236}">
-                      <a16:creationId xmlns:a16="http://schemas.microsoft.com/office/drawing/2014/main" id="{D6A0354B-E6EA-4011-B8D8-356E01B0B0E9}"/>
-                    </a:ext>
-                  </a:extLst>
-                </p:cNvPr>
-                <p:cNvSpPr txBox="1">
-                  <a:spLocks noRot="1" noChangeAspect="1" noMove="1" noResize="1" noEditPoints="1" noAdjustHandles="1" noChangeArrowheads="1" noChangeShapeType="1" noTextEdit="1"/>
-                </p:cNvSpPr>
-                <p:nvPr/>
-              </p:nvSpPr>
-              <p:spPr>
-                <a:xfrm>
-                  <a:off x="1764299" y="1218950"/>
-                  <a:ext cx="4815083" cy="498855"/>
-                </a:xfrm>
-                <a:prstGeom prst="rect">
-                  <a:avLst/>
-                </a:prstGeom>
-                <a:blipFill>
-                  <a:blip r:embed="rId4"/>
-                  <a:stretch>
-                    <a:fillRect t="-3659" r="-3291" b="-6098"/>
-                  </a:stretch>
-                </a:blipFill>
-              </p:spPr>
-              <p:txBody>
-                <a:bodyPr/>
-                <a:lstStyle/>
-                <a:p>
-                  <a:r>
-                    <a:rPr lang="zh-TW" altLang="en-US">
-                      <a:noFill/>
-                    </a:rPr>
-                    <a:t> </a:t>
-                  </a:r>
-                </a:p>
-              </p:txBody>
-            </p:sp>
-          </mc:Fallback>
-        </mc:AlternateContent>
-        <p:grpSp>
-          <p:nvGrpSpPr>
-            <p:cNvPr id="22" name="群組 21">
-              <a:extLst>
-                <a:ext uri="{FF2B5EF4-FFF2-40B4-BE49-F238E27FC236}">
-                  <a16:creationId xmlns:a16="http://schemas.microsoft.com/office/drawing/2014/main" id="{7F747199-E3E7-4C71-BAA6-01CDE0E71DB8}"/>
-                </a:ext>
-              </a:extLst>
-            </p:cNvPr>
-            <p:cNvGrpSpPr/>
-            <p:nvPr/>
-          </p:nvGrpSpPr>
-          <p:grpSpPr>
-            <a:xfrm>
-              <a:off x="6606158" y="723901"/>
-              <a:ext cx="1750442" cy="1248852"/>
-              <a:chOff x="6039273" y="-281233"/>
-              <a:chExt cx="1718499" cy="1120593"/>
-            </a:xfrm>
-          </p:grpSpPr>
-          <p:pic>
-            <p:nvPicPr>
-              <p:cNvPr id="7" name="圖片 6">
+      </p:grpSp>
+      <mc:AlternateContent xmlns:mc="http://schemas.openxmlformats.org/markup-compatibility/2006">
+        <mc:Choice xmlns:a14="http://schemas.microsoft.com/office/drawing/2010/main" Requires="a14">
+          <p:sp>
+            <p:nvSpPr>
+              <p:cNvPr id="46" name="文字方塊 45">
                 <a:extLst>
                   <a:ext uri="{FF2B5EF4-FFF2-40B4-BE49-F238E27FC236}">
-                    <a16:creationId xmlns:a16="http://schemas.microsoft.com/office/drawing/2014/main" id="{E53272F7-A213-44CF-8A55-4DE640703315}"/>
+                    <a16:creationId xmlns:a16="http://schemas.microsoft.com/office/drawing/2014/main" id="{D139B888-3F1C-498F-88E9-BE66C800874E}"/>
                   </a:ext>
                 </a:extLst>
               </p:cNvPr>
-              <p:cNvPicPr>
-                <a:picLocks noChangeAspect="1"/>
-              </p:cNvPicPr>
+              <p:cNvSpPr txBox="1"/>
               <p:nvPr/>
-            </p:nvPicPr>
-            <p:blipFill>
-              <a:blip r:embed="rId5"/>
-              <a:stretch>
-                <a:fillRect/>
-              </a:stretch>
-            </p:blipFill>
+            </p:nvSpPr>
             <p:spPr>
               <a:xfrm>
-                <a:off x="6126181" y="-139026"/>
-                <a:ext cx="534369" cy="850550"/>
+                <a:off x="4612708" y="1746135"/>
+                <a:ext cx="1133442" cy="369332"/>
               </a:xfrm>
               <a:prstGeom prst="rect">
                 <a:avLst/>
               </a:prstGeom>
+              <a:noFill/>
             </p:spPr>
-          </p:pic>
-          <mc:AlternateContent xmlns:mc="http://schemas.openxmlformats.org/markup-compatibility/2006">
-            <mc:Choice xmlns:a14="http://schemas.microsoft.com/office/drawing/2010/main" Requires="a14">
-              <p:sp>
-                <p:nvSpPr>
-                  <p:cNvPr id="8" name="文字方塊 7">
-                    <a:extLst>
-                      <a:ext uri="{FF2B5EF4-FFF2-40B4-BE49-F238E27FC236}">
-                        <a16:creationId xmlns:a16="http://schemas.microsoft.com/office/drawing/2014/main" id="{865164BF-B68E-473A-A921-4C3623AE9C50}"/>
-                      </a:ext>
-                    </a:extLst>
-                  </p:cNvPr>
-                  <p:cNvSpPr txBox="1"/>
-                  <p:nvPr/>
-                </p:nvSpPr>
-                <p:spPr>
-                  <a:xfrm>
-                    <a:off x="6701354" y="-281233"/>
-                    <a:ext cx="990700" cy="1063763"/>
-                  </a:xfrm>
-                  <a:prstGeom prst="rect">
-                    <a:avLst/>
-                  </a:prstGeom>
-                  <a:noFill/>
-                </p:spPr>
-                <p:txBody>
-                  <a:bodyPr wrap="square" rtlCol="0">
-                    <a:spAutoFit/>
-                  </a:bodyPr>
-                  <a:lstStyle/>
-                  <a:p>
-                    <a:pPr algn="ctr"/>
-                    <a14:m>
-                      <m:oMathPara xmlns:m="http://schemas.openxmlformats.org/officeDocument/2006/math">
-                        <m:oMathParaPr>
-                          <m:jc m:val="centerGroup"/>
-                        </m:oMathParaPr>
-                        <m:oMath xmlns:m="http://schemas.openxmlformats.org/officeDocument/2006/math">
-                          <m:d>
-                            <m:dPr>
-                              <m:begChr m:val="|"/>
-                              <m:endChr m:val="|"/>
-                              <m:ctrlPr>
-                                <a:rPr lang="en-US" altLang="zh-TW" sz="2000" i="1">
-                                  <a:latin typeface="Cambria Math" panose="02040503050406030204" pitchFamily="18" charset="0"/>
-                                </a:rPr>
-                              </m:ctrlPr>
-                            </m:dPr>
-                            <m:e>
-                              <m:sSubSup>
-                                <m:sSubSupPr>
-                                  <m:ctrlPr>
-                                    <a:rPr lang="en-US" altLang="zh-TW" sz="2000" b="1" i="1">
-                                      <a:latin typeface="Cambria Math" panose="02040503050406030204" pitchFamily="18" charset="0"/>
-                                    </a:rPr>
-                                  </m:ctrlPr>
-                                </m:sSubSupPr>
-                                <m:e>
-                                  <m:r>
-                                    <a:rPr lang="en-US" altLang="zh-TW" sz="2000" b="1" i="1">
-                                      <a:latin typeface="Cambria Math" panose="02040503050406030204" pitchFamily="18" charset="0"/>
-                                    </a:rPr>
-                                    <m:t>𝑨</m:t>
-                                  </m:r>
-                                </m:e>
-                                <m:sub>
-                                  <m:r>
-                                    <a:rPr lang="en-US" altLang="zh-TW" sz="2000" b="1" i="1">
-                                      <a:latin typeface="Cambria Math" panose="02040503050406030204" pitchFamily="18" charset="0"/>
-                                    </a:rPr>
-                                    <m:t>∥</m:t>
-                                  </m:r>
-                                </m:sub>
-                                <m:sup>
-                                  <m:r>
-                                    <a:rPr lang="en-US" altLang="zh-TW" sz="2000" b="1" i="1">
-                                      <a:latin typeface="Cambria Math" panose="02040503050406030204" pitchFamily="18" charset="0"/>
-                                    </a:rPr>
-                                    <m:t>ℓ</m:t>
-                                  </m:r>
-                                </m:sup>
-                              </m:sSubSup>
-                            </m:e>
-                          </m:d>
-                        </m:oMath>
-                      </m:oMathPara>
-                    </a14:m>
-                    <a:endParaRPr lang="en-US" altLang="zh-TW" sz="2000" i="1" dirty="0">
-                      <a:latin typeface="Cambria Math" panose="02040503050406030204" pitchFamily="18" charset="0"/>
-                    </a:endParaRPr>
-                  </a:p>
-                  <a:p>
-                    <a:pPr algn="ctr"/>
-                    <a14:m>
-                      <m:oMathPara xmlns:m="http://schemas.openxmlformats.org/officeDocument/2006/math">
-                        <m:oMathParaPr>
-                          <m:jc m:val="centerGroup"/>
-                        </m:oMathParaPr>
-                        <m:oMath xmlns:m="http://schemas.openxmlformats.org/officeDocument/2006/math">
-                          <m:d>
-                            <m:dPr>
-                              <m:begChr m:val="|"/>
-                              <m:endChr m:val="|"/>
-                              <m:ctrlPr>
-                                <a:rPr lang="en-US" altLang="zh-TW" sz="2000" i="1">
-                                  <a:latin typeface="Cambria Math" panose="02040503050406030204" pitchFamily="18" charset="0"/>
-                                </a:rPr>
-                              </m:ctrlPr>
-                            </m:dPr>
-                            <m:e>
-                              <m:sSubSup>
-                                <m:sSubSupPr>
-                                  <m:ctrlPr>
-                                    <a:rPr lang="en-US" altLang="zh-TW" sz="2000" i="1">
-                                      <a:latin typeface="Cambria Math" panose="02040503050406030204" pitchFamily="18" charset="0"/>
-                                    </a:rPr>
-                                  </m:ctrlPr>
-                                </m:sSubSupPr>
-                                <m:e>
-                                  <m:r>
-                                    <a:rPr lang="en-US" altLang="zh-TW" sz="2000" b="1" i="1">
-                                      <a:latin typeface="Cambria Math" panose="02040503050406030204" pitchFamily="18" charset="0"/>
-                                    </a:rPr>
-                                    <m:t>𝑨</m:t>
-                                  </m:r>
-                                </m:e>
-                                <m:sub>
-                                  <m:r>
-                                    <a:rPr lang="en-US" altLang="zh-TW" sz="2000" b="1" i="1">
-                                      <a:latin typeface="Cambria Math" panose="02040503050406030204" pitchFamily="18" charset="0"/>
-                                    </a:rPr>
-                                    <m:t>𝒛</m:t>
-                                  </m:r>
-                                </m:sub>
-                                <m:sup>
-                                  <m:r>
-                                    <a:rPr lang="en-US" altLang="zh-TW" sz="2000" i="1">
-                                      <a:latin typeface="Cambria Math" panose="02040503050406030204" pitchFamily="18" charset="0"/>
-                                    </a:rPr>
-                                    <m:t>𝜎</m:t>
-                                  </m:r>
-                                  <m:r>
-                                    <a:rPr lang="en-US" altLang="zh-TW" sz="2000" i="1">
-                                      <a:latin typeface="Cambria Math" panose="02040503050406030204" pitchFamily="18" charset="0"/>
-                                    </a:rPr>
-                                    <m:t>=1, ℓ</m:t>
-                                  </m:r>
-                                </m:sup>
-                              </m:sSubSup>
-                            </m:e>
-                          </m:d>
-                        </m:oMath>
-                      </m:oMathPara>
-                    </a14:m>
-                    <a:endParaRPr lang="en-US" altLang="zh-TW" sz="2000" dirty="0"/>
-                  </a:p>
-                  <a:p>
-                    <a:pPr algn="ctr"/>
-                    <a14:m>
-                      <m:oMathPara xmlns:m="http://schemas.openxmlformats.org/officeDocument/2006/math">
-                        <m:oMathParaPr>
-                          <m:jc m:val="centerGroup"/>
-                        </m:oMathParaPr>
-                        <m:oMath xmlns:m="http://schemas.openxmlformats.org/officeDocument/2006/math">
-                          <m:d>
-                            <m:dPr>
-                              <m:begChr m:val="|"/>
-                              <m:endChr m:val="|"/>
-                              <m:ctrlPr>
-                                <a:rPr lang="en-US" altLang="zh-TW" sz="2000" i="1">
-                                  <a:latin typeface="Cambria Math" panose="02040503050406030204" pitchFamily="18" charset="0"/>
-                                </a:rPr>
-                              </m:ctrlPr>
-                            </m:dPr>
-                            <m:e>
-                              <m:sSubSup>
-                                <m:sSubSupPr>
-                                  <m:ctrlPr>
-                                    <a:rPr lang="en-US" altLang="zh-TW" sz="2000" i="1">
-                                      <a:latin typeface="Cambria Math" panose="02040503050406030204" pitchFamily="18" charset="0"/>
-                                    </a:rPr>
-                                  </m:ctrlPr>
-                                </m:sSubSupPr>
-                                <m:e>
-                                  <m:r>
-                                    <a:rPr lang="en-US" altLang="zh-TW" sz="2000" b="1" i="1">
-                                      <a:latin typeface="Cambria Math" panose="02040503050406030204" pitchFamily="18" charset="0"/>
-                                    </a:rPr>
-                                    <m:t>𝑨</m:t>
-                                  </m:r>
-                                </m:e>
-                                <m:sub>
-                                  <m:r>
-                                    <a:rPr lang="en-US" altLang="zh-TW" sz="2000" b="1" i="1">
-                                      <a:latin typeface="Cambria Math" panose="02040503050406030204" pitchFamily="18" charset="0"/>
-                                    </a:rPr>
-                                    <m:t>𝒛</m:t>
-                                  </m:r>
-                                </m:sub>
-                                <m:sup>
-                                  <m:r>
-                                    <a:rPr lang="en-US" altLang="zh-TW" sz="2000" i="1">
-                                      <a:latin typeface="Cambria Math" panose="02040503050406030204" pitchFamily="18" charset="0"/>
-                                    </a:rPr>
-                                    <m:t>𝜎</m:t>
-                                  </m:r>
-                                  <m:r>
-                                    <a:rPr lang="en-US" altLang="zh-TW" sz="2000" i="1">
-                                      <a:latin typeface="Cambria Math" panose="02040503050406030204" pitchFamily="18" charset="0"/>
-                                    </a:rPr>
-                                    <m:t>=−1, ℓ</m:t>
-                                  </m:r>
-                                </m:sup>
-                              </m:sSubSup>
-                            </m:e>
-                          </m:d>
-                        </m:oMath>
-                      </m:oMathPara>
-                    </a14:m>
-                    <a:endParaRPr lang="zh-TW" altLang="en-US" b="1" dirty="0"/>
-                  </a:p>
-                </p:txBody>
-              </p:sp>
-            </mc:Choice>
-            <mc:Fallback>
-              <p:sp>
-                <p:nvSpPr>
-                  <p:cNvPr id="8" name="文字方塊 7">
-                    <a:extLst>
-                      <a:ext uri="{FF2B5EF4-FFF2-40B4-BE49-F238E27FC236}">
-                        <a16:creationId xmlns:a16="http://schemas.microsoft.com/office/drawing/2014/main" id="{865164BF-B68E-473A-A921-4C3623AE9C50}"/>
-                      </a:ext>
-                    </a:extLst>
-                  </p:cNvPr>
-                  <p:cNvSpPr txBox="1">
-                    <a:spLocks noRot="1" noChangeAspect="1" noMove="1" noResize="1" noEditPoints="1" noAdjustHandles="1" noChangeArrowheads="1" noChangeShapeType="1" noTextEdit="1"/>
-                  </p:cNvSpPr>
-                  <p:nvPr/>
-                </p:nvSpPr>
-                <p:spPr>
-                  <a:xfrm>
-                    <a:off x="6701354" y="-281233"/>
-                    <a:ext cx="990700" cy="1063763"/>
-                  </a:xfrm>
-                  <a:prstGeom prst="rect">
-                    <a:avLst/>
-                  </a:prstGeom>
-                  <a:blipFill>
-                    <a:blip r:embed="rId6"/>
-                    <a:stretch>
-                      <a:fillRect l="-1807"/>
-                    </a:stretch>
-                  </a:blipFill>
-                </p:spPr>
-                <p:txBody>
-                  <a:bodyPr/>
-                  <a:lstStyle/>
-                  <a:p>
-                    <a:r>
-                      <a:rPr lang="zh-TW" altLang="en-US">
-                        <a:noFill/>
-                      </a:rPr>
-                      <a:t> </a:t>
-                    </a:r>
-                  </a:p>
-                </p:txBody>
-              </p:sp>
-            </mc:Fallback>
-          </mc:AlternateContent>
+            <p:txBody>
+              <a:bodyPr wrap="square" rtlCol="0">
+                <a:spAutoFit/>
+              </a:bodyPr>
+              <a:lstStyle/>
+              <a:p>
+                <a:pPr/>
+                <a14:m>
+                  <m:oMathPara xmlns:m="http://schemas.openxmlformats.org/officeDocument/2006/math">
+                    <m:oMathParaPr>
+                      <m:jc m:val="centerGroup"/>
+                    </m:oMathParaPr>
+                    <m:oMath xmlns:m="http://schemas.openxmlformats.org/officeDocument/2006/math">
+                      <m:r>
+                        <a:rPr lang="en-US" altLang="zh-TW" i="1">
+                          <a:latin typeface="Cambria Math" panose="02040503050406030204" pitchFamily="18" charset="0"/>
+                        </a:rPr>
+                        <m:t>ℓ=0</m:t>
+                      </m:r>
+                    </m:oMath>
+                  </m:oMathPara>
+                </a14:m>
+                <a:endParaRPr lang="zh-TW" altLang="en-US" dirty="0">
+                  <a:latin typeface="Times New Roman" panose="02020603050405020304" pitchFamily="18" charset="0"/>
+                  <a:cs typeface="Times New Roman" panose="02020603050405020304" pitchFamily="18" charset="0"/>
+                </a:endParaRPr>
+              </a:p>
+            </p:txBody>
+          </p:sp>
+        </mc:Choice>
+        <mc:Fallback>
           <p:sp>
             <p:nvSpPr>
-              <p:cNvPr id="10" name="矩形: 圓角 9">
+              <p:cNvPr id="46" name="文字方塊 45">
                 <a:extLst>
                   <a:ext uri="{FF2B5EF4-FFF2-40B4-BE49-F238E27FC236}">
-                    <a16:creationId xmlns:a16="http://schemas.microsoft.com/office/drawing/2014/main" id="{1ED60B65-DF32-45CC-88AD-193710422870}"/>
+                    <a16:creationId xmlns:a16="http://schemas.microsoft.com/office/drawing/2014/main" id="{D139B888-3F1C-498F-88E9-BE66C800874E}"/>
+                  </a:ext>
+                </a:extLst>
+              </p:cNvPr>
+              <p:cNvSpPr txBox="1">
+                <a:spLocks noRot="1" noChangeAspect="1" noMove="1" noResize="1" noEditPoints="1" noAdjustHandles="1" noChangeArrowheads="1" noChangeShapeType="1" noTextEdit="1"/>
+              </p:cNvSpPr>
+              <p:nvPr/>
+            </p:nvSpPr>
+            <p:spPr>
+              <a:xfrm>
+                <a:off x="4612708" y="1746135"/>
+                <a:ext cx="1133442" cy="369332"/>
+              </a:xfrm>
+              <a:prstGeom prst="rect">
+                <a:avLst/>
+              </a:prstGeom>
+              <a:blipFill>
+                <a:blip r:embed="rId7"/>
+                <a:stretch>
+                  <a:fillRect/>
+                </a:stretch>
+              </a:blipFill>
+            </p:spPr>
+            <p:txBody>
+              <a:bodyPr/>
+              <a:lstStyle/>
+              <a:p>
+                <a:r>
+                  <a:rPr lang="zh-TW" altLang="en-US">
+                    <a:noFill/>
+                  </a:rPr>
+                  <a:t> </a:t>
+                </a:r>
+              </a:p>
+            </p:txBody>
+          </p:sp>
+        </mc:Fallback>
+      </mc:AlternateContent>
+      <mc:AlternateContent xmlns:mc="http://schemas.openxmlformats.org/markup-compatibility/2006">
+        <mc:Choice xmlns:a14="http://schemas.microsoft.com/office/drawing/2010/main" Requires="a14">
+          <p:sp>
+            <p:nvSpPr>
+              <p:cNvPr id="47" name="文字方塊 46">
+                <a:extLst>
+                  <a:ext uri="{FF2B5EF4-FFF2-40B4-BE49-F238E27FC236}">
+                    <a16:creationId xmlns:a16="http://schemas.microsoft.com/office/drawing/2014/main" id="{4F245FA2-4DBE-46ED-9B8D-44919FF47C9F}"/>
+                  </a:ext>
+                </a:extLst>
+              </p:cNvPr>
+              <p:cNvSpPr txBox="1"/>
+              <p:nvPr/>
+            </p:nvSpPr>
+            <p:spPr>
+              <a:xfrm>
+                <a:off x="8184841" y="1746135"/>
+                <a:ext cx="1133442" cy="369332"/>
+              </a:xfrm>
+              <a:prstGeom prst="rect">
+                <a:avLst/>
+              </a:prstGeom>
+              <a:noFill/>
+            </p:spPr>
+            <p:txBody>
+              <a:bodyPr wrap="square" rtlCol="0">
+                <a:spAutoFit/>
+              </a:bodyPr>
+              <a:lstStyle/>
+              <a:p>
+                <a:pPr/>
+                <a14:m>
+                  <m:oMathPara xmlns:m="http://schemas.openxmlformats.org/officeDocument/2006/math">
+                    <m:oMathParaPr>
+                      <m:jc m:val="centerGroup"/>
+                    </m:oMathParaPr>
+                    <m:oMath xmlns:m="http://schemas.openxmlformats.org/officeDocument/2006/math">
+                      <m:r>
+                        <a:rPr lang="en-US" altLang="zh-TW" i="1">
+                          <a:latin typeface="Cambria Math" panose="02040503050406030204" pitchFamily="18" charset="0"/>
+                        </a:rPr>
+                        <m:t>ℓ=2</m:t>
+                      </m:r>
+                    </m:oMath>
+                  </m:oMathPara>
+                </a14:m>
+                <a:endParaRPr lang="zh-TW" altLang="en-US" dirty="0">
+                  <a:latin typeface="Times New Roman" panose="02020603050405020304" pitchFamily="18" charset="0"/>
+                  <a:cs typeface="Times New Roman" panose="02020603050405020304" pitchFamily="18" charset="0"/>
+                </a:endParaRPr>
+              </a:p>
+            </p:txBody>
+          </p:sp>
+        </mc:Choice>
+        <mc:Fallback>
+          <p:sp>
+            <p:nvSpPr>
+              <p:cNvPr id="47" name="文字方塊 46">
+                <a:extLst>
+                  <a:ext uri="{FF2B5EF4-FFF2-40B4-BE49-F238E27FC236}">
+                    <a16:creationId xmlns:a16="http://schemas.microsoft.com/office/drawing/2014/main" id="{4F245FA2-4DBE-46ED-9B8D-44919FF47C9F}"/>
+                  </a:ext>
+                </a:extLst>
+              </p:cNvPr>
+              <p:cNvSpPr txBox="1">
+                <a:spLocks noRot="1" noChangeAspect="1" noMove="1" noResize="1" noEditPoints="1" noAdjustHandles="1" noChangeArrowheads="1" noChangeShapeType="1" noTextEdit="1"/>
+              </p:cNvSpPr>
+              <p:nvPr/>
+            </p:nvSpPr>
+            <p:spPr>
+              <a:xfrm>
+                <a:off x="8184841" y="1746135"/>
+                <a:ext cx="1133442" cy="369332"/>
+              </a:xfrm>
+              <a:prstGeom prst="rect">
+                <a:avLst/>
+              </a:prstGeom>
+              <a:blipFill>
+                <a:blip r:embed="rId8"/>
+                <a:stretch>
+                  <a:fillRect/>
+                </a:stretch>
+              </a:blipFill>
+            </p:spPr>
+            <p:txBody>
+              <a:bodyPr/>
+              <a:lstStyle/>
+              <a:p>
+                <a:r>
+                  <a:rPr lang="zh-TW" altLang="en-US">
+                    <a:noFill/>
+                  </a:rPr>
+                  <a:t> </a:t>
+                </a:r>
+              </a:p>
+            </p:txBody>
+          </p:sp>
+        </mc:Fallback>
+      </mc:AlternateContent>
+      <mc:AlternateContent xmlns:mc="http://schemas.openxmlformats.org/markup-compatibility/2006">
+        <mc:Choice xmlns:a14="http://schemas.microsoft.com/office/drawing/2010/main" Requires="a14">
+          <p:sp>
+            <p:nvSpPr>
+              <p:cNvPr id="48" name="文字方塊 47">
+                <a:extLst>
+                  <a:ext uri="{FF2B5EF4-FFF2-40B4-BE49-F238E27FC236}">
+                    <a16:creationId xmlns:a16="http://schemas.microsoft.com/office/drawing/2014/main" id="{58B10F4E-2C32-473F-9973-42D224D7247B}"/>
+                  </a:ext>
+                </a:extLst>
+              </p:cNvPr>
+              <p:cNvSpPr txBox="1"/>
+              <p:nvPr/>
+            </p:nvSpPr>
+            <p:spPr>
+              <a:xfrm>
+                <a:off x="6398775" y="1746135"/>
+                <a:ext cx="1133442" cy="369332"/>
+              </a:xfrm>
+              <a:prstGeom prst="rect">
+                <a:avLst/>
+              </a:prstGeom>
+              <a:noFill/>
+            </p:spPr>
+            <p:txBody>
+              <a:bodyPr wrap="square" rtlCol="0">
+                <a:spAutoFit/>
+              </a:bodyPr>
+              <a:lstStyle/>
+              <a:p>
+                <a:pPr/>
+                <a14:m>
+                  <m:oMathPara xmlns:m="http://schemas.openxmlformats.org/officeDocument/2006/math">
+                    <m:oMathParaPr>
+                      <m:jc m:val="centerGroup"/>
+                    </m:oMathParaPr>
+                    <m:oMath xmlns:m="http://schemas.openxmlformats.org/officeDocument/2006/math">
+                      <m:r>
+                        <a:rPr lang="en-US" altLang="zh-TW" i="1">
+                          <a:latin typeface="Cambria Math" panose="02040503050406030204" pitchFamily="18" charset="0"/>
+                        </a:rPr>
+                        <m:t>ℓ=1</m:t>
+                      </m:r>
+                    </m:oMath>
+                  </m:oMathPara>
+                </a14:m>
+                <a:endParaRPr lang="zh-TW" altLang="en-US" dirty="0">
+                  <a:latin typeface="Times New Roman" panose="02020603050405020304" pitchFamily="18" charset="0"/>
+                  <a:cs typeface="Times New Roman" panose="02020603050405020304" pitchFamily="18" charset="0"/>
+                </a:endParaRPr>
+              </a:p>
+            </p:txBody>
+          </p:sp>
+        </mc:Choice>
+        <mc:Fallback>
+          <p:sp>
+            <p:nvSpPr>
+              <p:cNvPr id="48" name="文字方塊 47">
+                <a:extLst>
+                  <a:ext uri="{FF2B5EF4-FFF2-40B4-BE49-F238E27FC236}">
+                    <a16:creationId xmlns:a16="http://schemas.microsoft.com/office/drawing/2014/main" id="{58B10F4E-2C32-473F-9973-42D224D7247B}"/>
+                  </a:ext>
+                </a:extLst>
+              </p:cNvPr>
+              <p:cNvSpPr txBox="1">
+                <a:spLocks noRot="1" noChangeAspect="1" noMove="1" noResize="1" noEditPoints="1" noAdjustHandles="1" noChangeArrowheads="1" noChangeShapeType="1" noTextEdit="1"/>
+              </p:cNvSpPr>
+              <p:nvPr/>
+            </p:nvSpPr>
+            <p:spPr>
+              <a:xfrm>
+                <a:off x="6398775" y="1746135"/>
+                <a:ext cx="1133442" cy="369332"/>
+              </a:xfrm>
+              <a:prstGeom prst="rect">
+                <a:avLst/>
+              </a:prstGeom>
+              <a:blipFill>
+                <a:blip r:embed="rId9"/>
+                <a:stretch>
+                  <a:fillRect/>
+                </a:stretch>
+              </a:blipFill>
+            </p:spPr>
+            <p:txBody>
+              <a:bodyPr/>
+              <a:lstStyle/>
+              <a:p>
+                <a:r>
+                  <a:rPr lang="zh-TW" altLang="en-US">
+                    <a:noFill/>
+                  </a:rPr>
+                  <a:t> </a:t>
+                </a:r>
+              </a:p>
+            </p:txBody>
+          </p:sp>
+        </mc:Fallback>
+      </mc:AlternateContent>
+      <mc:AlternateContent xmlns:mc="http://schemas.openxmlformats.org/markup-compatibility/2006">
+        <mc:Choice xmlns:a14="http://schemas.microsoft.com/office/drawing/2010/main" Requires="a14">
+          <p:sp>
+            <p:nvSpPr>
+              <p:cNvPr id="50" name="文字方塊 49">
+                <a:extLst>
+                  <a:ext uri="{FF2B5EF4-FFF2-40B4-BE49-F238E27FC236}">
+                    <a16:creationId xmlns:a16="http://schemas.microsoft.com/office/drawing/2014/main" id="{9BF2C953-92CE-4A9A-B6D5-E85DE4B362FA}"/>
+                  </a:ext>
+                </a:extLst>
+              </p:cNvPr>
+              <p:cNvSpPr txBox="1"/>
+              <p:nvPr/>
+            </p:nvSpPr>
+            <p:spPr>
+              <a:xfrm>
+                <a:off x="2826641" y="1746135"/>
+                <a:ext cx="1133442" cy="369332"/>
+              </a:xfrm>
+              <a:prstGeom prst="rect">
+                <a:avLst/>
+              </a:prstGeom>
+              <a:noFill/>
+            </p:spPr>
+            <p:txBody>
+              <a:bodyPr wrap="square" rtlCol="0">
+                <a:spAutoFit/>
+              </a:bodyPr>
+              <a:lstStyle/>
+              <a:p>
+                <a:pPr/>
+                <a14:m>
+                  <m:oMathPara xmlns:m="http://schemas.openxmlformats.org/officeDocument/2006/math">
+                    <m:oMathParaPr>
+                      <m:jc m:val="centerGroup"/>
+                    </m:oMathParaPr>
+                    <m:oMath xmlns:m="http://schemas.openxmlformats.org/officeDocument/2006/math">
+                      <m:r>
+                        <a:rPr lang="en-US" altLang="zh-TW" i="1">
+                          <a:latin typeface="Cambria Math" panose="02040503050406030204" pitchFamily="18" charset="0"/>
+                        </a:rPr>
+                        <m:t>ℓ=−1</m:t>
+                      </m:r>
+                    </m:oMath>
+                  </m:oMathPara>
+                </a14:m>
+                <a:endParaRPr lang="zh-TW" altLang="en-US" dirty="0">
+                  <a:latin typeface="Times New Roman" panose="02020603050405020304" pitchFamily="18" charset="0"/>
+                  <a:cs typeface="Times New Roman" panose="02020603050405020304" pitchFamily="18" charset="0"/>
+                </a:endParaRPr>
+              </a:p>
+            </p:txBody>
+          </p:sp>
+        </mc:Choice>
+        <mc:Fallback>
+          <p:sp>
+            <p:nvSpPr>
+              <p:cNvPr id="50" name="文字方塊 49">
+                <a:extLst>
+                  <a:ext uri="{FF2B5EF4-FFF2-40B4-BE49-F238E27FC236}">
+                    <a16:creationId xmlns:a16="http://schemas.microsoft.com/office/drawing/2014/main" id="{9BF2C953-92CE-4A9A-B6D5-E85DE4B362FA}"/>
+                  </a:ext>
+                </a:extLst>
+              </p:cNvPr>
+              <p:cNvSpPr txBox="1">
+                <a:spLocks noRot="1" noChangeAspect="1" noMove="1" noResize="1" noEditPoints="1" noAdjustHandles="1" noChangeArrowheads="1" noChangeShapeType="1" noTextEdit="1"/>
+              </p:cNvSpPr>
+              <p:nvPr/>
+            </p:nvSpPr>
+            <p:spPr>
+              <a:xfrm>
+                <a:off x="2826641" y="1746135"/>
+                <a:ext cx="1133442" cy="369332"/>
+              </a:xfrm>
+              <a:prstGeom prst="rect">
+                <a:avLst/>
+              </a:prstGeom>
+              <a:blipFill>
+                <a:blip r:embed="rId10"/>
+                <a:stretch>
+                  <a:fillRect/>
+                </a:stretch>
+              </a:blipFill>
+            </p:spPr>
+            <p:txBody>
+              <a:bodyPr/>
+              <a:lstStyle/>
+              <a:p>
+                <a:r>
+                  <a:rPr lang="zh-TW" altLang="en-US">
+                    <a:noFill/>
+                  </a:rPr>
+                  <a:t> </a:t>
+                </a:r>
+              </a:p>
+            </p:txBody>
+          </p:sp>
+        </mc:Fallback>
+      </mc:AlternateContent>
+      <mc:AlternateContent xmlns:mc="http://schemas.openxmlformats.org/markup-compatibility/2006">
+        <mc:Choice xmlns:a14="http://schemas.microsoft.com/office/drawing/2010/main" Requires="a14">
+          <p:sp>
+            <p:nvSpPr>
+              <p:cNvPr id="52" name="文字方塊 51">
+                <a:extLst>
+                  <a:ext uri="{FF2B5EF4-FFF2-40B4-BE49-F238E27FC236}">
+                    <a16:creationId xmlns:a16="http://schemas.microsoft.com/office/drawing/2014/main" id="{FA6A6B30-6EBE-419A-8F73-1E8B0B28748C}"/>
+                  </a:ext>
+                </a:extLst>
+              </p:cNvPr>
+              <p:cNvSpPr txBox="1"/>
+              <p:nvPr/>
+            </p:nvSpPr>
+            <p:spPr>
+              <a:xfrm>
+                <a:off x="1040575" y="1746135"/>
+                <a:ext cx="1133442" cy="369332"/>
+              </a:xfrm>
+              <a:prstGeom prst="rect">
+                <a:avLst/>
+              </a:prstGeom>
+              <a:noFill/>
+            </p:spPr>
+            <p:txBody>
+              <a:bodyPr wrap="square" rtlCol="0">
+                <a:spAutoFit/>
+              </a:bodyPr>
+              <a:lstStyle/>
+              <a:p>
+                <a:pPr/>
+                <a14:m>
+                  <m:oMathPara xmlns:m="http://schemas.openxmlformats.org/officeDocument/2006/math">
+                    <m:oMathParaPr>
+                      <m:jc m:val="centerGroup"/>
+                    </m:oMathParaPr>
+                    <m:oMath xmlns:m="http://schemas.openxmlformats.org/officeDocument/2006/math">
+                      <m:r>
+                        <a:rPr lang="en-US" altLang="zh-TW" i="1">
+                          <a:latin typeface="Cambria Math" panose="02040503050406030204" pitchFamily="18" charset="0"/>
+                        </a:rPr>
+                        <m:t>ℓ=−2</m:t>
+                      </m:r>
+                    </m:oMath>
+                  </m:oMathPara>
+                </a14:m>
+                <a:endParaRPr lang="zh-TW" altLang="en-US" dirty="0">
+                  <a:latin typeface="Times New Roman" panose="02020603050405020304" pitchFamily="18" charset="0"/>
+                  <a:cs typeface="Times New Roman" panose="02020603050405020304" pitchFamily="18" charset="0"/>
+                </a:endParaRPr>
+              </a:p>
+            </p:txBody>
+          </p:sp>
+        </mc:Choice>
+        <mc:Fallback>
+          <p:sp>
+            <p:nvSpPr>
+              <p:cNvPr id="52" name="文字方塊 51">
+                <a:extLst>
+                  <a:ext uri="{FF2B5EF4-FFF2-40B4-BE49-F238E27FC236}">
+                    <a16:creationId xmlns:a16="http://schemas.microsoft.com/office/drawing/2014/main" id="{FA6A6B30-6EBE-419A-8F73-1E8B0B28748C}"/>
+                  </a:ext>
+                </a:extLst>
+              </p:cNvPr>
+              <p:cNvSpPr txBox="1">
+                <a:spLocks noRot="1" noChangeAspect="1" noMove="1" noResize="1" noEditPoints="1" noAdjustHandles="1" noChangeArrowheads="1" noChangeShapeType="1" noTextEdit="1"/>
+              </p:cNvSpPr>
+              <p:nvPr/>
+            </p:nvSpPr>
+            <p:spPr>
+              <a:xfrm>
+                <a:off x="1040575" y="1746135"/>
+                <a:ext cx="1133442" cy="369332"/>
+              </a:xfrm>
+              <a:prstGeom prst="rect">
+                <a:avLst/>
+              </a:prstGeom>
+              <a:blipFill>
+                <a:blip r:embed="rId11"/>
+                <a:stretch>
+                  <a:fillRect/>
+                </a:stretch>
+              </a:blipFill>
+            </p:spPr>
+            <p:txBody>
+              <a:bodyPr/>
+              <a:lstStyle/>
+              <a:p>
+                <a:r>
+                  <a:rPr lang="zh-TW" altLang="en-US">
+                    <a:noFill/>
+                  </a:rPr>
+                  <a:t> </a:t>
+                </a:r>
+              </a:p>
+            </p:txBody>
+          </p:sp>
+        </mc:Fallback>
+      </mc:AlternateContent>
+      <mc:AlternateContent xmlns:mc="http://schemas.openxmlformats.org/markup-compatibility/2006">
+        <mc:Choice xmlns:a14="http://schemas.microsoft.com/office/drawing/2010/main" Requires="a14">
+          <p:sp>
+            <p:nvSpPr>
+              <p:cNvPr id="53" name="文字方塊 52">
+                <a:extLst>
+                  <a:ext uri="{FF2B5EF4-FFF2-40B4-BE49-F238E27FC236}">
+                    <a16:creationId xmlns:a16="http://schemas.microsoft.com/office/drawing/2014/main" id="{7FE76E93-B02D-4EC3-9A0D-9DB35AB83345}"/>
+                  </a:ext>
+                </a:extLst>
+              </p:cNvPr>
+              <p:cNvSpPr txBox="1"/>
+              <p:nvPr/>
+            </p:nvSpPr>
+            <p:spPr>
+              <a:xfrm>
+                <a:off x="2035329" y="3347684"/>
+                <a:ext cx="508459" cy="369332"/>
+              </a:xfrm>
+              <a:prstGeom prst="rect">
+                <a:avLst/>
+              </a:prstGeom>
+              <a:noFill/>
+            </p:spPr>
+            <p:txBody>
+              <a:bodyPr wrap="square" rtlCol="0">
+                <a:spAutoFit/>
+              </a:bodyPr>
+              <a:lstStyle/>
+              <a:p>
+                <a:pPr/>
+                <a14:m>
+                  <m:oMathPara xmlns:m="http://schemas.openxmlformats.org/officeDocument/2006/math">
+                    <m:oMathParaPr>
+                      <m:jc m:val="centerGroup"/>
+                    </m:oMathParaPr>
+                    <m:oMath xmlns:m="http://schemas.openxmlformats.org/officeDocument/2006/math">
+                      <m:r>
+                        <m:rPr>
+                          <m:sty m:val="p"/>
+                        </m:rPr>
+                        <a:rPr lang="en-US" altLang="zh-TW">
+                          <a:latin typeface="Cambria Math" panose="02040503050406030204" pitchFamily="18" charset="0"/>
+                        </a:rPr>
+                        <m:t>um</m:t>
+                      </m:r>
+                    </m:oMath>
+                  </m:oMathPara>
+                </a14:m>
+                <a:endParaRPr lang="zh-TW" altLang="en-US" dirty="0">
+                  <a:latin typeface="Times New Roman" panose="02020603050405020304" pitchFamily="18" charset="0"/>
+                  <a:cs typeface="Times New Roman" panose="02020603050405020304" pitchFamily="18" charset="0"/>
+                </a:endParaRPr>
+              </a:p>
+            </p:txBody>
+          </p:sp>
+        </mc:Choice>
+        <mc:Fallback>
+          <p:sp>
+            <p:nvSpPr>
+              <p:cNvPr id="53" name="文字方塊 52">
+                <a:extLst>
+                  <a:ext uri="{FF2B5EF4-FFF2-40B4-BE49-F238E27FC236}">
+                    <a16:creationId xmlns:a16="http://schemas.microsoft.com/office/drawing/2014/main" id="{7FE76E93-B02D-4EC3-9A0D-9DB35AB83345}"/>
+                  </a:ext>
+                </a:extLst>
+              </p:cNvPr>
+              <p:cNvSpPr txBox="1">
+                <a:spLocks noRot="1" noChangeAspect="1" noMove="1" noResize="1" noEditPoints="1" noAdjustHandles="1" noChangeArrowheads="1" noChangeShapeType="1" noTextEdit="1"/>
+              </p:cNvSpPr>
+              <p:nvPr/>
+            </p:nvSpPr>
+            <p:spPr>
+              <a:xfrm>
+                <a:off x="2035329" y="3347684"/>
+                <a:ext cx="508459" cy="369332"/>
+              </a:xfrm>
+              <a:prstGeom prst="rect">
+                <a:avLst/>
+              </a:prstGeom>
+              <a:blipFill>
+                <a:blip r:embed="rId12"/>
+                <a:stretch>
+                  <a:fillRect/>
+                </a:stretch>
+              </a:blipFill>
+            </p:spPr>
+            <p:txBody>
+              <a:bodyPr/>
+              <a:lstStyle/>
+              <a:p>
+                <a:r>
+                  <a:rPr lang="zh-TW" altLang="en-US">
+                    <a:noFill/>
+                  </a:rPr>
+                  <a:t> </a:t>
+                </a:r>
+              </a:p>
+            </p:txBody>
+          </p:sp>
+        </mc:Fallback>
+      </mc:AlternateContent>
+      <p:sp>
+        <p:nvSpPr>
+          <p:cNvPr id="54" name="文字方塊 53">
+            <a:extLst>
+              <a:ext uri="{FF2B5EF4-FFF2-40B4-BE49-F238E27FC236}">
+                <a16:creationId xmlns:a16="http://schemas.microsoft.com/office/drawing/2014/main" id="{5862E318-61FC-4C34-8EAE-6C2CADB3295A}"/>
+              </a:ext>
+            </a:extLst>
+          </p:cNvPr>
+          <p:cNvSpPr txBox="1"/>
+          <p:nvPr/>
+        </p:nvSpPr>
+        <p:spPr>
+          <a:xfrm rot="16200000">
+            <a:off x="-755775" y="4956000"/>
+            <a:ext cx="2031323" cy="400110"/>
+          </a:xfrm>
+          <a:prstGeom prst="rect">
+            <a:avLst/>
+          </a:prstGeom>
+          <a:noFill/>
+        </p:spPr>
+        <p:txBody>
+          <a:bodyPr wrap="square" rtlCol="0">
+            <a:spAutoFit/>
+          </a:bodyPr>
+          <a:lstStyle/>
+          <a:p>
+            <a:pPr algn="ctr"/>
+            <a:r>
+              <a:rPr lang="en-US" altLang="zh-TW" sz="2000" dirty="0">
+                <a:latin typeface="Times New Roman" panose="02020603050405020304" pitchFamily="18" charset="0"/>
+                <a:cs typeface="Times New Roman" panose="02020603050405020304" pitchFamily="18" charset="0"/>
+              </a:rPr>
+              <a:t>arbitrary units</a:t>
+            </a:r>
+            <a:endParaRPr lang="zh-TW" altLang="en-US" sz="2000" dirty="0">
+              <a:latin typeface="Times New Roman" panose="02020603050405020304" pitchFamily="18" charset="0"/>
+              <a:cs typeface="Times New Roman" panose="02020603050405020304" pitchFamily="18" charset="0"/>
+            </a:endParaRPr>
+          </a:p>
+        </p:txBody>
+      </p:sp>
+      <mc:AlternateContent xmlns:mc="http://schemas.openxmlformats.org/markup-compatibility/2006">
+        <mc:Choice xmlns:a14="http://schemas.microsoft.com/office/drawing/2010/main" Requires="a14">
+          <p:sp>
+            <p:nvSpPr>
+              <p:cNvPr id="55" name="矩形 54">
+                <a:extLst>
+                  <a:ext uri="{FF2B5EF4-FFF2-40B4-BE49-F238E27FC236}">
+                    <a16:creationId xmlns:a16="http://schemas.microsoft.com/office/drawing/2014/main" id="{152BF3A2-AEA0-485D-9EFB-ED42184338EC}"/>
                   </a:ext>
                 </a:extLst>
               </p:cNvPr>
@@ -3910,1559 +4620,909 @@
             </p:nvSpPr>
             <p:spPr>
               <a:xfrm>
-                <a:off x="6039273" y="-260656"/>
-                <a:ext cx="1718499" cy="1100016"/>
+                <a:off x="-76199" y="1191817"/>
+                <a:ext cx="3835398" cy="400110"/>
               </a:xfrm>
-              <a:prstGeom prst="roundRect">
+              <a:prstGeom prst="rect">
+                <a:avLst/>
+              </a:prstGeom>
+            </p:spPr>
+            <p:txBody>
+              <a:bodyPr wrap="square">
+                <a:spAutoFit/>
+              </a:bodyPr>
+              <a:lstStyle/>
+              <a:p>
+                <a:pPr/>
+                <a:r>
+                  <a:rPr lang="en-US" altLang="zh-TW" sz="2000" dirty="0"/>
+                  <a:t>Normally focused : </a:t>
+                </a:r>
+                <a14:m>
+                  <m:oMath xmlns:m="http://schemas.openxmlformats.org/officeDocument/2006/math">
+                    <m:sSub>
+                      <m:sSubPr>
+                        <m:ctrlPr>
+                          <a:rPr lang="en-US" altLang="zh-TW" sz="2000" i="1">
+                            <a:latin typeface="Cambria Math" panose="02040503050406030204" pitchFamily="18" charset="0"/>
+                          </a:rPr>
+                        </m:ctrlPr>
+                      </m:sSubPr>
+                      <m:e>
+                        <m:r>
+                          <a:rPr lang="en-US" altLang="zh-TW" sz="2000" i="1">
+                            <a:latin typeface="Cambria Math" panose="02040503050406030204" pitchFamily="18" charset="0"/>
+                          </a:rPr>
+                          <m:t>𝑊</m:t>
+                        </m:r>
+                      </m:e>
+                      <m:sub>
+                        <m:r>
+                          <a:rPr lang="en-US" altLang="zh-TW" sz="2000" i="1">
+                            <a:latin typeface="Cambria Math" panose="02040503050406030204" pitchFamily="18" charset="0"/>
+                          </a:rPr>
+                          <m:t>0</m:t>
+                        </m:r>
+                      </m:sub>
+                    </m:sSub>
+                    <m:r>
+                      <a:rPr lang="en-US" altLang="zh-TW" sz="2000" i="1">
+                        <a:latin typeface="Cambria Math" panose="02040503050406030204" pitchFamily="18" charset="0"/>
+                      </a:rPr>
+                      <m:t>=1.5</m:t>
+                    </m:r>
+                    <m:r>
+                      <a:rPr lang="en-US" altLang="zh-TW" sz="2000">
+                        <a:latin typeface="Cambria Math" panose="02040503050406030204" pitchFamily="18" charset="0"/>
+                      </a:rPr>
+                      <m:t> </m:t>
+                    </m:r>
+                    <m:r>
+                      <m:rPr>
+                        <m:sty m:val="p"/>
+                      </m:rPr>
+                      <a:rPr lang="en-US" altLang="zh-TW" sz="2000">
+                        <a:latin typeface="Cambria Math" panose="02040503050406030204" pitchFamily="18" charset="0"/>
+                      </a:rPr>
+                      <m:t>um</m:t>
+                    </m:r>
+                  </m:oMath>
+                </a14:m>
+                <a:endParaRPr lang="zh-TW" altLang="en-US" sz="2000" dirty="0">
+                  <a:latin typeface="Times New Roman" panose="02020603050405020304" pitchFamily="18" charset="0"/>
+                  <a:cs typeface="Times New Roman" panose="02020603050405020304" pitchFamily="18" charset="0"/>
+                </a:endParaRPr>
+              </a:p>
+            </p:txBody>
+          </p:sp>
+        </mc:Choice>
+        <mc:Fallback>
+          <p:sp>
+            <p:nvSpPr>
+              <p:cNvPr id="55" name="矩形 54">
+                <a:extLst>
+                  <a:ext uri="{FF2B5EF4-FFF2-40B4-BE49-F238E27FC236}">
+                    <a16:creationId xmlns:a16="http://schemas.microsoft.com/office/drawing/2014/main" id="{152BF3A2-AEA0-485D-9EFB-ED42184338EC}"/>
+                  </a:ext>
+                </a:extLst>
+              </p:cNvPr>
+              <p:cNvSpPr>
+                <a:spLocks noRot="1" noChangeAspect="1" noMove="1" noResize="1" noEditPoints="1" noAdjustHandles="1" noChangeArrowheads="1" noChangeShapeType="1" noTextEdit="1"/>
+              </p:cNvSpPr>
+              <p:nvPr/>
+            </p:nvSpPr>
+            <p:spPr>
+              <a:xfrm>
+                <a:off x="-76199" y="1191817"/>
+                <a:ext cx="3835398" cy="400110"/>
+              </a:xfrm>
+              <a:prstGeom prst="rect">
+                <a:avLst/>
+              </a:prstGeom>
+              <a:blipFill>
+                <a:blip r:embed="rId13"/>
+                <a:stretch>
+                  <a:fillRect l="-1749" t="-9231" b="-27692"/>
+                </a:stretch>
+              </a:blipFill>
+            </p:spPr>
+            <p:txBody>
+              <a:bodyPr/>
+              <a:lstStyle/>
+              <a:p>
+                <a:r>
+                  <a:rPr lang="zh-TW" altLang="en-US">
+                    <a:noFill/>
+                  </a:rPr>
+                  <a:t> </a:t>
+                </a:r>
+              </a:p>
+            </p:txBody>
+          </p:sp>
+        </mc:Fallback>
+      </mc:AlternateContent>
+      <p:sp>
+        <p:nvSpPr>
+          <p:cNvPr id="56" name="文字方塊 55">
+            <a:extLst>
+              <a:ext uri="{FF2B5EF4-FFF2-40B4-BE49-F238E27FC236}">
+                <a16:creationId xmlns:a16="http://schemas.microsoft.com/office/drawing/2014/main" id="{BEBC67A4-EA79-47CD-B98A-0F70535FE411}"/>
+              </a:ext>
+            </a:extLst>
+          </p:cNvPr>
+          <p:cNvSpPr txBox="1"/>
+          <p:nvPr/>
+        </p:nvSpPr>
+        <p:spPr>
+          <a:xfrm rot="16200000">
+            <a:off x="-776027" y="2405223"/>
+            <a:ext cx="2031323" cy="400110"/>
+          </a:xfrm>
+          <a:prstGeom prst="rect">
+            <a:avLst/>
+          </a:prstGeom>
+          <a:noFill/>
+        </p:spPr>
+        <p:txBody>
+          <a:bodyPr wrap="square" rtlCol="0">
+            <a:spAutoFit/>
+          </a:bodyPr>
+          <a:lstStyle/>
+          <a:p>
+            <a:pPr algn="ctr"/>
+            <a:r>
+              <a:rPr lang="en-US" altLang="zh-TW" sz="2000" dirty="0">
+                <a:latin typeface="Times New Roman" panose="02020603050405020304" pitchFamily="18" charset="0"/>
+                <a:cs typeface="Times New Roman" panose="02020603050405020304" pitchFamily="18" charset="0"/>
+              </a:rPr>
+              <a:t>arbitrary units</a:t>
+            </a:r>
+            <a:endParaRPr lang="zh-TW" altLang="en-US" sz="2000" dirty="0">
+              <a:latin typeface="Times New Roman" panose="02020603050405020304" pitchFamily="18" charset="0"/>
+              <a:cs typeface="Times New Roman" panose="02020603050405020304" pitchFamily="18" charset="0"/>
+            </a:endParaRPr>
+          </a:p>
+        </p:txBody>
+      </p:sp>
+      <mc:AlternateContent xmlns:mc="http://schemas.openxmlformats.org/markup-compatibility/2006">
+        <mc:Choice xmlns:a14="http://schemas.microsoft.com/office/drawing/2010/main" Requires="a14">
+          <p:sp>
+            <p:nvSpPr>
+              <p:cNvPr id="57" name="矩形 56">
+                <a:extLst>
+                  <a:ext uri="{FF2B5EF4-FFF2-40B4-BE49-F238E27FC236}">
+                    <a16:creationId xmlns:a16="http://schemas.microsoft.com/office/drawing/2014/main" id="{04EE70F6-14B4-4E90-989B-144ABE438097}"/>
+                  </a:ext>
+                </a:extLst>
+              </p:cNvPr>
+              <p:cNvSpPr/>
+              <p:nvPr/>
+            </p:nvSpPr>
+            <p:spPr>
+              <a:xfrm>
+                <a:off x="-76199" y="3753610"/>
+                <a:ext cx="3581400" cy="400110"/>
+              </a:xfrm>
+              <a:prstGeom prst="rect">
+                <a:avLst/>
+              </a:prstGeom>
+            </p:spPr>
+            <p:txBody>
+              <a:bodyPr wrap="square">
+                <a:spAutoFit/>
+              </a:bodyPr>
+              <a:lstStyle/>
+              <a:p>
+                <a:r>
+                  <a:rPr lang="en-US" altLang="zh-TW" sz="2000" dirty="0"/>
+                  <a:t>highly focused : </a:t>
+                </a:r>
+                <a14:m>
+                  <m:oMath xmlns:m="http://schemas.openxmlformats.org/officeDocument/2006/math">
+                    <m:sSub>
+                      <m:sSubPr>
+                        <m:ctrlPr>
+                          <a:rPr lang="en-US" altLang="zh-TW" sz="2000" i="1">
+                            <a:latin typeface="Cambria Math" panose="02040503050406030204" pitchFamily="18" charset="0"/>
+                          </a:rPr>
+                        </m:ctrlPr>
+                      </m:sSubPr>
+                      <m:e>
+                        <m:r>
+                          <a:rPr lang="en-US" altLang="zh-TW" sz="2000" i="1">
+                            <a:latin typeface="Cambria Math" panose="02040503050406030204" pitchFamily="18" charset="0"/>
+                          </a:rPr>
+                          <m:t>𝑊</m:t>
+                        </m:r>
+                      </m:e>
+                      <m:sub>
+                        <m:r>
+                          <a:rPr lang="en-US" altLang="zh-TW" sz="2000" i="1">
+                            <a:latin typeface="Cambria Math" panose="02040503050406030204" pitchFamily="18" charset="0"/>
+                          </a:rPr>
+                          <m:t>0</m:t>
+                        </m:r>
+                      </m:sub>
+                    </m:sSub>
+                    <m:r>
+                      <a:rPr lang="en-US" altLang="zh-TW" sz="2000" i="1">
+                        <a:latin typeface="Cambria Math" panose="02040503050406030204" pitchFamily="18" charset="0"/>
+                      </a:rPr>
+                      <m:t>=</m:t>
+                    </m:r>
+                    <m:r>
+                      <a:rPr lang="en-US" altLang="zh-TW" sz="2000">
+                        <a:latin typeface="Cambria Math" panose="02040503050406030204" pitchFamily="18" charset="0"/>
+                      </a:rPr>
+                      <m:t>0.5</m:t>
+                    </m:r>
+                    <m:r>
+                      <a:rPr lang="en-US" altLang="zh-TW" sz="2000">
+                        <a:latin typeface="Cambria Math" panose="02040503050406030204" pitchFamily="18" charset="0"/>
+                      </a:rPr>
+                      <m:t> </m:t>
+                    </m:r>
+                    <m:r>
+                      <m:rPr>
+                        <m:sty m:val="p"/>
+                      </m:rPr>
+                      <a:rPr lang="en-US" altLang="zh-TW" sz="2000">
+                        <a:latin typeface="Cambria Math" panose="02040503050406030204" pitchFamily="18" charset="0"/>
+                      </a:rPr>
+                      <m:t>um</m:t>
+                    </m:r>
+                  </m:oMath>
+                </a14:m>
+                <a:endParaRPr lang="zh-TW" altLang="en-US" sz="2000" dirty="0">
+                  <a:latin typeface="Times New Roman" panose="02020603050405020304" pitchFamily="18" charset="0"/>
+                  <a:cs typeface="Times New Roman" panose="02020603050405020304" pitchFamily="18" charset="0"/>
+                </a:endParaRPr>
+              </a:p>
+            </p:txBody>
+          </p:sp>
+        </mc:Choice>
+        <mc:Fallback>
+          <p:sp>
+            <p:nvSpPr>
+              <p:cNvPr id="57" name="矩形 56">
+                <a:extLst>
+                  <a:ext uri="{FF2B5EF4-FFF2-40B4-BE49-F238E27FC236}">
+                    <a16:creationId xmlns:a16="http://schemas.microsoft.com/office/drawing/2014/main" id="{04EE70F6-14B4-4E90-989B-144ABE438097}"/>
+                  </a:ext>
+                </a:extLst>
+              </p:cNvPr>
+              <p:cNvSpPr>
+                <a:spLocks noRot="1" noChangeAspect="1" noMove="1" noResize="1" noEditPoints="1" noAdjustHandles="1" noChangeArrowheads="1" noChangeShapeType="1" noTextEdit="1"/>
+              </p:cNvSpPr>
+              <p:nvPr/>
+            </p:nvSpPr>
+            <p:spPr>
+              <a:xfrm>
+                <a:off x="-76199" y="3753610"/>
+                <a:ext cx="3581400" cy="400110"/>
+              </a:xfrm>
+              <a:prstGeom prst="rect">
+                <a:avLst/>
+              </a:prstGeom>
+              <a:blipFill>
+                <a:blip r:embed="rId14"/>
+                <a:stretch>
+                  <a:fillRect l="-1874" t="-9231" b="-27692"/>
+                </a:stretch>
+              </a:blipFill>
+            </p:spPr>
+            <p:txBody>
+              <a:bodyPr/>
+              <a:lstStyle/>
+              <a:p>
+                <a:r>
+                  <a:rPr lang="zh-TW" altLang="en-US">
+                    <a:noFill/>
+                  </a:rPr>
+                  <a:t> </a:t>
+                </a:r>
+              </a:p>
+            </p:txBody>
+          </p:sp>
+        </mc:Fallback>
+      </mc:AlternateContent>
+      <mc:AlternateContent xmlns:mc="http://schemas.openxmlformats.org/markup-compatibility/2006">
+        <mc:Choice xmlns:a14="http://schemas.microsoft.com/office/drawing/2010/main" Requires="a14">
+          <p:sp>
+            <p:nvSpPr>
+              <p:cNvPr id="58" name="文字方塊 57">
+                <a:extLst>
+                  <a:ext uri="{FF2B5EF4-FFF2-40B4-BE49-F238E27FC236}">
+                    <a16:creationId xmlns:a16="http://schemas.microsoft.com/office/drawing/2014/main" id="{E3120A0E-484F-44A1-8C52-4CC6C83FEDA5}"/>
+                  </a:ext>
+                </a:extLst>
+              </p:cNvPr>
+              <p:cNvSpPr txBox="1"/>
+              <p:nvPr/>
+            </p:nvSpPr>
+            <p:spPr>
+              <a:xfrm>
+                <a:off x="2084960" y="5895686"/>
+                <a:ext cx="508459" cy="369332"/>
+              </a:xfrm>
+              <a:prstGeom prst="rect">
                 <a:avLst/>
               </a:prstGeom>
               <a:noFill/>
-              <a:ln w="28575">
-                <a:solidFill>
-                  <a:schemeClr val="tx1">
-                    <a:lumMod val="50000"/>
-                    <a:lumOff val="50000"/>
-                  </a:schemeClr>
-                </a:solidFill>
-              </a:ln>
             </p:spPr>
-            <p:style>
-              <a:lnRef idx="2">
-                <a:schemeClr val="accent1">
-                  <a:shade val="50000"/>
-                </a:schemeClr>
-              </a:lnRef>
-              <a:fillRef idx="1">
-                <a:schemeClr val="accent1"/>
-              </a:fillRef>
-              <a:effectRef idx="0">
-                <a:schemeClr val="accent1"/>
-              </a:effectRef>
-              <a:fontRef idx="minor">
-                <a:schemeClr val="lt1"/>
-              </a:fontRef>
-            </p:style>
             <p:txBody>
-              <a:bodyPr rot="0" spcFirstLastPara="0" vertOverflow="overflow" horzOverflow="overflow" vert="horz" wrap="square" lIns="80998" tIns="40499" rIns="80998" bIns="40499" numCol="1" spcCol="0" rtlCol="0" fromWordArt="0" anchor="ctr" anchorCtr="0" forceAA="0" compatLnSpc="1">
-                <a:prstTxWarp prst="textNoShape">
-                  <a:avLst/>
-                </a:prstTxWarp>
-                <a:noAutofit/>
+              <a:bodyPr wrap="square" rtlCol="0">
+                <a:spAutoFit/>
               </a:bodyPr>
               <a:lstStyle/>
               <a:p>
-                <a:pPr algn="ctr"/>
-                <a:endParaRPr lang="zh-TW" altLang="en-US" dirty="0"/>
+                <a:pPr/>
+                <a14:m>
+                  <m:oMathPara xmlns:m="http://schemas.openxmlformats.org/officeDocument/2006/math">
+                    <m:oMathParaPr>
+                      <m:jc m:val="centerGroup"/>
+                    </m:oMathParaPr>
+                    <m:oMath xmlns:m="http://schemas.openxmlformats.org/officeDocument/2006/math">
+                      <m:r>
+                        <m:rPr>
+                          <m:sty m:val="p"/>
+                        </m:rPr>
+                        <a:rPr lang="en-US" altLang="zh-TW">
+                          <a:latin typeface="Cambria Math" panose="02040503050406030204" pitchFamily="18" charset="0"/>
+                        </a:rPr>
+                        <m:t>um</m:t>
+                      </m:r>
+                    </m:oMath>
+                  </m:oMathPara>
+                </a14:m>
+                <a:endParaRPr lang="zh-TW" altLang="en-US" dirty="0">
+                  <a:latin typeface="Times New Roman" panose="02020603050405020304" pitchFamily="18" charset="0"/>
+                  <a:cs typeface="Times New Roman" panose="02020603050405020304" pitchFamily="18" charset="0"/>
+                </a:endParaRPr>
               </a:p>
             </p:txBody>
           </p:sp>
-        </p:grpSp>
-        <mc:AlternateContent xmlns:mc="http://schemas.openxmlformats.org/markup-compatibility/2006">
-          <mc:Choice xmlns:a14="http://schemas.microsoft.com/office/drawing/2010/main" Requires="a14">
-            <p:sp>
-              <p:nvSpPr>
-                <p:cNvPr id="11" name="文字方塊 10">
-                  <a:extLst>
-                    <a:ext uri="{FF2B5EF4-FFF2-40B4-BE49-F238E27FC236}">
-                      <a16:creationId xmlns:a16="http://schemas.microsoft.com/office/drawing/2014/main" id="{D8C96163-9767-4688-A88E-C1794AF3BBF5}"/>
-                    </a:ext>
-                  </a:extLst>
-                </p:cNvPr>
-                <p:cNvSpPr txBox="1"/>
-                <p:nvPr/>
-              </p:nvSpPr>
-              <p:spPr>
-                <a:xfrm>
-                  <a:off x="4612708" y="2476987"/>
-                  <a:ext cx="1133442" cy="369332"/>
-                </a:xfrm>
-                <a:prstGeom prst="rect">
-                  <a:avLst/>
-                </a:prstGeom>
-                <a:noFill/>
-              </p:spPr>
-              <p:txBody>
-                <a:bodyPr wrap="square" rtlCol="0">
-                  <a:spAutoFit/>
-                </a:bodyPr>
-                <a:lstStyle/>
-                <a:p>
-                  <a:pPr/>
-                  <a14:m>
-                    <m:oMathPara xmlns:m="http://schemas.openxmlformats.org/officeDocument/2006/math">
-                      <m:oMathParaPr>
-                        <m:jc m:val="centerGroup"/>
-                      </m:oMathParaPr>
-                      <m:oMath xmlns:m="http://schemas.openxmlformats.org/officeDocument/2006/math">
-                        <m:r>
-                          <a:rPr lang="en-US" altLang="zh-TW" i="1">
-                            <a:latin typeface="Cambria Math" panose="02040503050406030204" pitchFamily="18" charset="0"/>
-                          </a:rPr>
-                          <m:t>ℓ=0</m:t>
-                        </m:r>
-                      </m:oMath>
-                    </m:oMathPara>
-                  </a14:m>
-                  <a:endParaRPr lang="zh-TW" altLang="en-US" dirty="0"/>
-                </a:p>
-              </p:txBody>
-            </p:sp>
-          </mc:Choice>
-          <mc:Fallback>
-            <p:sp>
-              <p:nvSpPr>
-                <p:cNvPr id="11" name="文字方塊 10">
-                  <a:extLst>
-                    <a:ext uri="{FF2B5EF4-FFF2-40B4-BE49-F238E27FC236}">
-                      <a16:creationId xmlns:a16="http://schemas.microsoft.com/office/drawing/2014/main" id="{D8C96163-9767-4688-A88E-C1794AF3BBF5}"/>
-                    </a:ext>
-                  </a:extLst>
-                </p:cNvPr>
-                <p:cNvSpPr txBox="1">
-                  <a:spLocks noRot="1" noChangeAspect="1" noMove="1" noResize="1" noEditPoints="1" noAdjustHandles="1" noChangeArrowheads="1" noChangeShapeType="1" noTextEdit="1"/>
-                </p:cNvSpPr>
-                <p:nvPr/>
-              </p:nvSpPr>
-              <p:spPr>
-                <a:xfrm>
-                  <a:off x="4612708" y="2476987"/>
-                  <a:ext cx="1133442" cy="369332"/>
-                </a:xfrm>
-                <a:prstGeom prst="rect">
-                  <a:avLst/>
-                </a:prstGeom>
-                <a:blipFill>
-                  <a:blip r:embed="rId7"/>
-                  <a:stretch>
-                    <a:fillRect/>
-                  </a:stretch>
-                </a:blipFill>
-              </p:spPr>
-              <p:txBody>
-                <a:bodyPr/>
-                <a:lstStyle/>
-                <a:p>
-                  <a:r>
-                    <a:rPr lang="zh-TW" altLang="en-US">
-                      <a:noFill/>
-                    </a:rPr>
-                    <a:t> </a:t>
-                  </a:r>
-                </a:p>
-              </p:txBody>
-            </p:sp>
-          </mc:Fallback>
-        </mc:AlternateContent>
-        <mc:AlternateContent xmlns:mc="http://schemas.openxmlformats.org/markup-compatibility/2006">
-          <mc:Choice xmlns:a14="http://schemas.microsoft.com/office/drawing/2010/main" Requires="a14">
-            <p:sp>
-              <p:nvSpPr>
-                <p:cNvPr id="14" name="文字方塊 13">
-                  <a:extLst>
-                    <a:ext uri="{FF2B5EF4-FFF2-40B4-BE49-F238E27FC236}">
-                      <a16:creationId xmlns:a16="http://schemas.microsoft.com/office/drawing/2014/main" id="{3D28BAA9-20DD-40ED-A46F-E45991C2EDCA}"/>
-                    </a:ext>
-                  </a:extLst>
-                </p:cNvPr>
-                <p:cNvSpPr txBox="1"/>
-                <p:nvPr/>
-              </p:nvSpPr>
-              <p:spPr>
-                <a:xfrm>
-                  <a:off x="8184841" y="2476987"/>
-                  <a:ext cx="1133442" cy="369332"/>
-                </a:xfrm>
-                <a:prstGeom prst="rect">
-                  <a:avLst/>
-                </a:prstGeom>
-                <a:noFill/>
-              </p:spPr>
-              <p:txBody>
-                <a:bodyPr wrap="square" rtlCol="0">
-                  <a:spAutoFit/>
-                </a:bodyPr>
-                <a:lstStyle/>
-                <a:p>
-                  <a:pPr/>
-                  <a14:m>
-                    <m:oMathPara xmlns:m="http://schemas.openxmlformats.org/officeDocument/2006/math">
-                      <m:oMathParaPr>
-                        <m:jc m:val="centerGroup"/>
-                      </m:oMathParaPr>
-                      <m:oMath xmlns:m="http://schemas.openxmlformats.org/officeDocument/2006/math">
-                        <m:r>
-                          <a:rPr lang="en-US" altLang="zh-TW" i="1">
-                            <a:latin typeface="Cambria Math" panose="02040503050406030204" pitchFamily="18" charset="0"/>
-                          </a:rPr>
-                          <m:t>ℓ=2</m:t>
-                        </m:r>
-                      </m:oMath>
-                    </m:oMathPara>
-                  </a14:m>
-                  <a:endParaRPr lang="zh-TW" altLang="en-US" dirty="0"/>
-                </a:p>
-              </p:txBody>
-            </p:sp>
-          </mc:Choice>
-          <mc:Fallback>
-            <p:sp>
-              <p:nvSpPr>
-                <p:cNvPr id="14" name="文字方塊 13">
-                  <a:extLst>
-                    <a:ext uri="{FF2B5EF4-FFF2-40B4-BE49-F238E27FC236}">
-                      <a16:creationId xmlns:a16="http://schemas.microsoft.com/office/drawing/2014/main" id="{3D28BAA9-20DD-40ED-A46F-E45991C2EDCA}"/>
-                    </a:ext>
-                  </a:extLst>
-                </p:cNvPr>
-                <p:cNvSpPr txBox="1">
-                  <a:spLocks noRot="1" noChangeAspect="1" noMove="1" noResize="1" noEditPoints="1" noAdjustHandles="1" noChangeArrowheads="1" noChangeShapeType="1" noTextEdit="1"/>
-                </p:cNvSpPr>
-                <p:nvPr/>
-              </p:nvSpPr>
-              <p:spPr>
-                <a:xfrm>
-                  <a:off x="8184841" y="2476987"/>
-                  <a:ext cx="1133442" cy="369332"/>
-                </a:xfrm>
-                <a:prstGeom prst="rect">
-                  <a:avLst/>
-                </a:prstGeom>
-                <a:blipFill>
-                  <a:blip r:embed="rId8"/>
-                  <a:stretch>
-                    <a:fillRect/>
-                  </a:stretch>
-                </a:blipFill>
-              </p:spPr>
-              <p:txBody>
-                <a:bodyPr/>
-                <a:lstStyle/>
-                <a:p>
-                  <a:r>
-                    <a:rPr lang="zh-TW" altLang="en-US">
-                      <a:noFill/>
-                    </a:rPr>
-                    <a:t> </a:t>
-                  </a:r>
-                </a:p>
-              </p:txBody>
-            </p:sp>
-          </mc:Fallback>
-        </mc:AlternateContent>
-        <mc:AlternateContent xmlns:mc="http://schemas.openxmlformats.org/markup-compatibility/2006">
-          <mc:Choice xmlns:a14="http://schemas.microsoft.com/office/drawing/2010/main" Requires="a14">
-            <p:sp>
-              <p:nvSpPr>
-                <p:cNvPr id="15" name="文字方塊 14">
-                  <a:extLst>
-                    <a:ext uri="{FF2B5EF4-FFF2-40B4-BE49-F238E27FC236}">
-                      <a16:creationId xmlns:a16="http://schemas.microsoft.com/office/drawing/2014/main" id="{994AA1D4-41BC-4D85-814F-70CD2F0BDD39}"/>
-                    </a:ext>
-                  </a:extLst>
-                </p:cNvPr>
-                <p:cNvSpPr txBox="1"/>
-                <p:nvPr/>
-              </p:nvSpPr>
-              <p:spPr>
-                <a:xfrm>
-                  <a:off x="6398775" y="2476987"/>
-                  <a:ext cx="1133442" cy="369332"/>
-                </a:xfrm>
-                <a:prstGeom prst="rect">
-                  <a:avLst/>
-                </a:prstGeom>
-                <a:noFill/>
-              </p:spPr>
-              <p:txBody>
-                <a:bodyPr wrap="square" rtlCol="0">
-                  <a:spAutoFit/>
-                </a:bodyPr>
-                <a:lstStyle/>
-                <a:p>
-                  <a:pPr/>
-                  <a14:m>
-                    <m:oMathPara xmlns:m="http://schemas.openxmlformats.org/officeDocument/2006/math">
-                      <m:oMathParaPr>
-                        <m:jc m:val="centerGroup"/>
-                      </m:oMathParaPr>
-                      <m:oMath xmlns:m="http://schemas.openxmlformats.org/officeDocument/2006/math">
-                        <m:r>
-                          <a:rPr lang="en-US" altLang="zh-TW" i="1">
-                            <a:latin typeface="Cambria Math" panose="02040503050406030204" pitchFamily="18" charset="0"/>
-                          </a:rPr>
-                          <m:t>ℓ=1</m:t>
-                        </m:r>
-                      </m:oMath>
-                    </m:oMathPara>
-                  </a14:m>
-                  <a:endParaRPr lang="zh-TW" altLang="en-US" dirty="0"/>
-                </a:p>
-              </p:txBody>
-            </p:sp>
-          </mc:Choice>
-          <mc:Fallback>
-            <p:sp>
-              <p:nvSpPr>
-                <p:cNvPr id="15" name="文字方塊 14">
-                  <a:extLst>
-                    <a:ext uri="{FF2B5EF4-FFF2-40B4-BE49-F238E27FC236}">
-                      <a16:creationId xmlns:a16="http://schemas.microsoft.com/office/drawing/2014/main" id="{994AA1D4-41BC-4D85-814F-70CD2F0BDD39}"/>
-                    </a:ext>
-                  </a:extLst>
-                </p:cNvPr>
-                <p:cNvSpPr txBox="1">
-                  <a:spLocks noRot="1" noChangeAspect="1" noMove="1" noResize="1" noEditPoints="1" noAdjustHandles="1" noChangeArrowheads="1" noChangeShapeType="1" noTextEdit="1"/>
-                </p:cNvSpPr>
-                <p:nvPr/>
-              </p:nvSpPr>
-              <p:spPr>
-                <a:xfrm>
-                  <a:off x="6398775" y="2476987"/>
-                  <a:ext cx="1133442" cy="369332"/>
-                </a:xfrm>
-                <a:prstGeom prst="rect">
-                  <a:avLst/>
-                </a:prstGeom>
-                <a:blipFill>
-                  <a:blip r:embed="rId9"/>
-                  <a:stretch>
-                    <a:fillRect/>
-                  </a:stretch>
-                </a:blipFill>
-              </p:spPr>
-              <p:txBody>
-                <a:bodyPr/>
-                <a:lstStyle/>
-                <a:p>
-                  <a:r>
-                    <a:rPr lang="zh-TW" altLang="en-US">
-                      <a:noFill/>
-                    </a:rPr>
-                    <a:t> </a:t>
-                  </a:r>
-                </a:p>
-              </p:txBody>
-            </p:sp>
-          </mc:Fallback>
-        </mc:AlternateContent>
-        <mc:AlternateContent xmlns:mc="http://schemas.openxmlformats.org/markup-compatibility/2006">
-          <mc:Choice xmlns:a14="http://schemas.microsoft.com/office/drawing/2010/main" Requires="a14">
-            <p:sp>
-              <p:nvSpPr>
-                <p:cNvPr id="16" name="文字方塊 15">
-                  <a:extLst>
-                    <a:ext uri="{FF2B5EF4-FFF2-40B4-BE49-F238E27FC236}">
-                      <a16:creationId xmlns:a16="http://schemas.microsoft.com/office/drawing/2014/main" id="{2117F2F0-7B2F-4A91-A6BA-E5D10798CAEA}"/>
-                    </a:ext>
-                  </a:extLst>
-                </p:cNvPr>
-                <p:cNvSpPr txBox="1"/>
-                <p:nvPr/>
-              </p:nvSpPr>
-              <p:spPr>
-                <a:xfrm>
-                  <a:off x="2826641" y="2476987"/>
-                  <a:ext cx="1133442" cy="369332"/>
-                </a:xfrm>
-                <a:prstGeom prst="rect">
-                  <a:avLst/>
-                </a:prstGeom>
-                <a:noFill/>
-              </p:spPr>
-              <p:txBody>
-                <a:bodyPr wrap="square" rtlCol="0">
-                  <a:spAutoFit/>
-                </a:bodyPr>
-                <a:lstStyle/>
-                <a:p>
-                  <a:pPr/>
-                  <a14:m>
-                    <m:oMathPara xmlns:m="http://schemas.openxmlformats.org/officeDocument/2006/math">
-                      <m:oMathParaPr>
-                        <m:jc m:val="centerGroup"/>
-                      </m:oMathParaPr>
-                      <m:oMath xmlns:m="http://schemas.openxmlformats.org/officeDocument/2006/math">
-                        <m:r>
-                          <a:rPr lang="en-US" altLang="zh-TW" i="1">
-                            <a:latin typeface="Cambria Math" panose="02040503050406030204" pitchFamily="18" charset="0"/>
-                          </a:rPr>
-                          <m:t>ℓ=−1</m:t>
-                        </m:r>
-                      </m:oMath>
-                    </m:oMathPara>
-                  </a14:m>
-                  <a:endParaRPr lang="zh-TW" altLang="en-US" dirty="0"/>
-                </a:p>
-              </p:txBody>
-            </p:sp>
-          </mc:Choice>
-          <mc:Fallback>
-            <p:sp>
-              <p:nvSpPr>
-                <p:cNvPr id="16" name="文字方塊 15">
-                  <a:extLst>
-                    <a:ext uri="{FF2B5EF4-FFF2-40B4-BE49-F238E27FC236}">
-                      <a16:creationId xmlns:a16="http://schemas.microsoft.com/office/drawing/2014/main" id="{2117F2F0-7B2F-4A91-A6BA-E5D10798CAEA}"/>
-                    </a:ext>
-                  </a:extLst>
-                </p:cNvPr>
-                <p:cNvSpPr txBox="1">
-                  <a:spLocks noRot="1" noChangeAspect="1" noMove="1" noResize="1" noEditPoints="1" noAdjustHandles="1" noChangeArrowheads="1" noChangeShapeType="1" noTextEdit="1"/>
-                </p:cNvSpPr>
-                <p:nvPr/>
-              </p:nvSpPr>
-              <p:spPr>
-                <a:xfrm>
-                  <a:off x="2826641" y="2476987"/>
-                  <a:ext cx="1133442" cy="369332"/>
-                </a:xfrm>
-                <a:prstGeom prst="rect">
-                  <a:avLst/>
-                </a:prstGeom>
-                <a:blipFill>
-                  <a:blip r:embed="rId10"/>
-                  <a:stretch>
-                    <a:fillRect/>
-                  </a:stretch>
-                </a:blipFill>
-              </p:spPr>
-              <p:txBody>
-                <a:bodyPr/>
-                <a:lstStyle/>
-                <a:p>
-                  <a:r>
-                    <a:rPr lang="zh-TW" altLang="en-US">
-                      <a:noFill/>
-                    </a:rPr>
-                    <a:t> </a:t>
-                  </a:r>
-                </a:p>
-              </p:txBody>
-            </p:sp>
-          </mc:Fallback>
-        </mc:AlternateContent>
-        <mc:AlternateContent xmlns:mc="http://schemas.openxmlformats.org/markup-compatibility/2006">
-          <mc:Choice xmlns:a14="http://schemas.microsoft.com/office/drawing/2010/main" Requires="a14">
-            <p:sp>
-              <p:nvSpPr>
-                <p:cNvPr id="17" name="文字方塊 16">
-                  <a:extLst>
-                    <a:ext uri="{FF2B5EF4-FFF2-40B4-BE49-F238E27FC236}">
-                      <a16:creationId xmlns:a16="http://schemas.microsoft.com/office/drawing/2014/main" id="{DA50C79D-1CDD-453A-9616-E6E2E9AF781A}"/>
-                    </a:ext>
-                  </a:extLst>
-                </p:cNvPr>
-                <p:cNvSpPr txBox="1"/>
-                <p:nvPr/>
-              </p:nvSpPr>
-              <p:spPr>
-                <a:xfrm>
-                  <a:off x="1040575" y="2476987"/>
-                  <a:ext cx="1133442" cy="369332"/>
-                </a:xfrm>
-                <a:prstGeom prst="rect">
-                  <a:avLst/>
-                </a:prstGeom>
-                <a:noFill/>
-              </p:spPr>
-              <p:txBody>
-                <a:bodyPr wrap="square" rtlCol="0">
-                  <a:spAutoFit/>
-                </a:bodyPr>
-                <a:lstStyle/>
-                <a:p>
-                  <a:pPr/>
-                  <a14:m>
-                    <m:oMathPara xmlns:m="http://schemas.openxmlformats.org/officeDocument/2006/math">
-                      <m:oMathParaPr>
-                        <m:jc m:val="centerGroup"/>
-                      </m:oMathParaPr>
-                      <m:oMath xmlns:m="http://schemas.openxmlformats.org/officeDocument/2006/math">
-                        <m:r>
-                          <a:rPr lang="en-US" altLang="zh-TW" i="1">
-                            <a:latin typeface="Cambria Math" panose="02040503050406030204" pitchFamily="18" charset="0"/>
-                          </a:rPr>
-                          <m:t>ℓ=−2</m:t>
-                        </m:r>
-                      </m:oMath>
-                    </m:oMathPara>
-                  </a14:m>
-                  <a:endParaRPr lang="zh-TW" altLang="en-US" dirty="0"/>
-                </a:p>
-              </p:txBody>
-            </p:sp>
-          </mc:Choice>
-          <mc:Fallback>
-            <p:sp>
-              <p:nvSpPr>
-                <p:cNvPr id="17" name="文字方塊 16">
-                  <a:extLst>
-                    <a:ext uri="{FF2B5EF4-FFF2-40B4-BE49-F238E27FC236}">
-                      <a16:creationId xmlns:a16="http://schemas.microsoft.com/office/drawing/2014/main" id="{DA50C79D-1CDD-453A-9616-E6E2E9AF781A}"/>
-                    </a:ext>
-                  </a:extLst>
-                </p:cNvPr>
-                <p:cNvSpPr txBox="1">
-                  <a:spLocks noRot="1" noChangeAspect="1" noMove="1" noResize="1" noEditPoints="1" noAdjustHandles="1" noChangeArrowheads="1" noChangeShapeType="1" noTextEdit="1"/>
-                </p:cNvSpPr>
-                <p:nvPr/>
-              </p:nvSpPr>
-              <p:spPr>
-                <a:xfrm>
-                  <a:off x="1040575" y="2476987"/>
-                  <a:ext cx="1133442" cy="369332"/>
-                </a:xfrm>
-                <a:prstGeom prst="rect">
-                  <a:avLst/>
-                </a:prstGeom>
-                <a:blipFill>
-                  <a:blip r:embed="rId11"/>
-                  <a:stretch>
-                    <a:fillRect/>
-                  </a:stretch>
-                </a:blipFill>
-              </p:spPr>
-              <p:txBody>
-                <a:bodyPr/>
-                <a:lstStyle/>
-                <a:p>
-                  <a:r>
-                    <a:rPr lang="zh-TW" altLang="en-US">
-                      <a:noFill/>
-                    </a:rPr>
-                    <a:t> </a:t>
-                  </a:r>
-                </a:p>
-              </p:txBody>
-            </p:sp>
-          </mc:Fallback>
-        </mc:AlternateContent>
-        <mc:AlternateContent xmlns:mc="http://schemas.openxmlformats.org/markup-compatibility/2006">
-          <mc:Choice xmlns:a14="http://schemas.microsoft.com/office/drawing/2010/main" Requires="a14">
-            <p:sp>
-              <p:nvSpPr>
-                <p:cNvPr id="19" name="文字方塊 18">
-                  <a:extLst>
-                    <a:ext uri="{FF2B5EF4-FFF2-40B4-BE49-F238E27FC236}">
-                      <a16:creationId xmlns:a16="http://schemas.microsoft.com/office/drawing/2014/main" id="{464B4E54-4144-40A8-8AAB-0B5CEB8C51DA}"/>
-                    </a:ext>
-                  </a:extLst>
-                </p:cNvPr>
-                <p:cNvSpPr txBox="1"/>
-                <p:nvPr/>
-              </p:nvSpPr>
-              <p:spPr>
-                <a:xfrm>
-                  <a:off x="2606829" y="3678486"/>
-                  <a:ext cx="508459" cy="369332"/>
-                </a:xfrm>
-                <a:prstGeom prst="rect">
-                  <a:avLst/>
-                </a:prstGeom>
-                <a:noFill/>
-              </p:spPr>
-              <p:txBody>
-                <a:bodyPr wrap="square" rtlCol="0">
-                  <a:spAutoFit/>
-                </a:bodyPr>
-                <a:lstStyle/>
-                <a:p>
-                  <a:pPr/>
-                  <a14:m>
-                    <m:oMathPara xmlns:m="http://schemas.openxmlformats.org/officeDocument/2006/math">
-                      <m:oMathParaPr>
-                        <m:jc m:val="centerGroup"/>
-                      </m:oMathParaPr>
-                      <m:oMath xmlns:m="http://schemas.openxmlformats.org/officeDocument/2006/math">
-                        <m:r>
-                          <m:rPr>
-                            <m:sty m:val="p"/>
-                          </m:rPr>
-                          <a:rPr lang="en-US" altLang="zh-TW">
-                            <a:latin typeface="Cambria Math" panose="02040503050406030204" pitchFamily="18" charset="0"/>
-                          </a:rPr>
-                          <m:t>um</m:t>
-                        </m:r>
-                      </m:oMath>
-                    </m:oMathPara>
-                  </a14:m>
-                  <a:endParaRPr lang="zh-TW" altLang="en-US" dirty="0"/>
-                </a:p>
-              </p:txBody>
-            </p:sp>
-          </mc:Choice>
-          <mc:Fallback>
-            <p:sp>
-              <p:nvSpPr>
-                <p:cNvPr id="19" name="文字方塊 18">
-                  <a:extLst>
-                    <a:ext uri="{FF2B5EF4-FFF2-40B4-BE49-F238E27FC236}">
-                      <a16:creationId xmlns:a16="http://schemas.microsoft.com/office/drawing/2014/main" id="{464B4E54-4144-40A8-8AAB-0B5CEB8C51DA}"/>
-                    </a:ext>
-                  </a:extLst>
-                </p:cNvPr>
-                <p:cNvSpPr txBox="1">
-                  <a:spLocks noRot="1" noChangeAspect="1" noMove="1" noResize="1" noEditPoints="1" noAdjustHandles="1" noChangeArrowheads="1" noChangeShapeType="1" noTextEdit="1"/>
-                </p:cNvSpPr>
-                <p:nvPr/>
-              </p:nvSpPr>
-              <p:spPr>
-                <a:xfrm>
-                  <a:off x="2606829" y="3678486"/>
-                  <a:ext cx="508459" cy="369332"/>
-                </a:xfrm>
-                <a:prstGeom prst="rect">
-                  <a:avLst/>
-                </a:prstGeom>
-                <a:blipFill>
-                  <a:blip r:embed="rId12"/>
-                  <a:stretch>
-                    <a:fillRect/>
-                  </a:stretch>
-                </a:blipFill>
-              </p:spPr>
-              <p:txBody>
-                <a:bodyPr/>
-                <a:lstStyle/>
-                <a:p>
-                  <a:r>
-                    <a:rPr lang="zh-TW" altLang="en-US">
-                      <a:noFill/>
-                    </a:rPr>
-                    <a:t> </a:t>
-                  </a:r>
-                </a:p>
-              </p:txBody>
-            </p:sp>
-          </mc:Fallback>
-        </mc:AlternateContent>
-        <p:sp>
-          <p:nvSpPr>
-            <p:cNvPr id="28" name="文字方塊 27">
-              <a:extLst>
-                <a:ext uri="{FF2B5EF4-FFF2-40B4-BE49-F238E27FC236}">
-                  <a16:creationId xmlns:a16="http://schemas.microsoft.com/office/drawing/2014/main" id="{96FB43A9-3278-4E56-912E-CFF2E8562ACF}"/>
-                </a:ext>
-              </a:extLst>
-            </p:cNvPr>
-            <p:cNvSpPr txBox="1"/>
-            <p:nvPr/>
-          </p:nvSpPr>
-          <p:spPr>
-            <a:xfrm rot="16200000">
-              <a:off x="-743076" y="5382051"/>
-              <a:ext cx="2031323" cy="400110"/>
-            </a:xfrm>
-            <a:prstGeom prst="rect">
-              <a:avLst/>
-            </a:prstGeom>
-            <a:noFill/>
-          </p:spPr>
-          <p:txBody>
-            <a:bodyPr wrap="square" rtlCol="0">
-              <a:spAutoFit/>
-            </a:bodyPr>
-            <a:lstStyle/>
-            <a:p>
-              <a:pPr algn="ctr"/>
-              <a:r>
-                <a:rPr lang="en-US" altLang="zh-TW" sz="2000" dirty="0"/>
-                <a:t>arbitrary units</a:t>
-              </a:r>
-              <a:endParaRPr lang="zh-TW" altLang="en-US" sz="2000" dirty="0"/>
-            </a:p>
-          </p:txBody>
-        </p:sp>
-        <mc:AlternateContent xmlns:mc="http://schemas.openxmlformats.org/markup-compatibility/2006">
-          <mc:Choice xmlns:a14="http://schemas.microsoft.com/office/drawing/2010/main" Requires="a14">
-            <p:sp>
-              <p:nvSpPr>
-                <p:cNvPr id="24" name="矩形 23">
-                  <a:extLst>
-                    <a:ext uri="{FF2B5EF4-FFF2-40B4-BE49-F238E27FC236}">
-                      <a16:creationId xmlns:a16="http://schemas.microsoft.com/office/drawing/2014/main" id="{85C75D81-2733-4604-A08E-3B935881865C}"/>
-                    </a:ext>
-                  </a:extLst>
-                </p:cNvPr>
-                <p:cNvSpPr/>
-                <p:nvPr/>
-              </p:nvSpPr>
-              <p:spPr>
-                <a:xfrm>
-                  <a:off x="4194028" y="2036969"/>
-                  <a:ext cx="2187933" cy="369332"/>
-                </a:xfrm>
-                <a:prstGeom prst="rect">
-                  <a:avLst/>
-                </a:prstGeom>
-              </p:spPr>
-              <p:txBody>
-                <a:bodyPr wrap="square">
-                  <a:spAutoFit/>
-                </a:bodyPr>
-                <a:lstStyle/>
-                <a:p>
-                  <a:pPr/>
-                  <a14:m>
-                    <m:oMathPara xmlns:m="http://schemas.openxmlformats.org/officeDocument/2006/math">
-                      <m:oMathParaPr>
-                        <m:jc m:val="centerGroup"/>
-                      </m:oMathParaPr>
-                      <m:oMath xmlns:m="http://schemas.openxmlformats.org/officeDocument/2006/math">
-                        <m:sSub>
-                          <m:sSubPr>
-                            <m:ctrlPr>
-                              <a:rPr lang="en-US" altLang="zh-TW" i="1">
-                                <a:latin typeface="Cambria Math" panose="02040503050406030204" pitchFamily="18" charset="0"/>
-                              </a:rPr>
-                            </m:ctrlPr>
-                          </m:sSubPr>
-                          <m:e>
-                            <m:r>
-                              <a:rPr lang="en-US" altLang="zh-TW" i="1">
-                                <a:latin typeface="Cambria Math" panose="02040503050406030204" pitchFamily="18" charset="0"/>
-                              </a:rPr>
-                              <m:t>𝑊</m:t>
-                            </m:r>
-                          </m:e>
-                          <m:sub>
-                            <m:r>
-                              <a:rPr lang="en-US" altLang="zh-TW" i="1">
-                                <a:latin typeface="Cambria Math" panose="02040503050406030204" pitchFamily="18" charset="0"/>
-                              </a:rPr>
-                              <m:t>0</m:t>
-                            </m:r>
-                          </m:sub>
-                        </m:sSub>
-                        <m:r>
-                          <a:rPr lang="en-US" altLang="zh-TW" i="1">
-                            <a:latin typeface="Cambria Math" panose="02040503050406030204" pitchFamily="18" charset="0"/>
-                          </a:rPr>
-                          <m:t>=1.5</m:t>
-                        </m:r>
-                        <m:r>
-                          <a:rPr lang="en-US" altLang="zh-TW">
-                            <a:latin typeface="Cambria Math" panose="02040503050406030204" pitchFamily="18" charset="0"/>
-                          </a:rPr>
-                          <m:t> </m:t>
-                        </m:r>
-                        <m:r>
-                          <m:rPr>
-                            <m:sty m:val="p"/>
-                          </m:rPr>
-                          <a:rPr lang="en-US" altLang="zh-TW">
-                            <a:latin typeface="Cambria Math" panose="02040503050406030204" pitchFamily="18" charset="0"/>
-                          </a:rPr>
-                          <m:t>um</m:t>
-                        </m:r>
-                      </m:oMath>
-                    </m:oMathPara>
-                  </a14:m>
-                  <a:endParaRPr lang="zh-TW" altLang="en-US" dirty="0"/>
-                </a:p>
-              </p:txBody>
-            </p:sp>
-          </mc:Choice>
-          <mc:Fallback>
-            <p:sp>
-              <p:nvSpPr>
-                <p:cNvPr id="24" name="矩形 23">
-                  <a:extLst>
-                    <a:ext uri="{FF2B5EF4-FFF2-40B4-BE49-F238E27FC236}">
-                      <a16:creationId xmlns:a16="http://schemas.microsoft.com/office/drawing/2014/main" id="{85C75D81-2733-4604-A08E-3B935881865C}"/>
-                    </a:ext>
-                  </a:extLst>
-                </p:cNvPr>
-                <p:cNvSpPr>
-                  <a:spLocks noRot="1" noChangeAspect="1" noMove="1" noResize="1" noEditPoints="1" noAdjustHandles="1" noChangeArrowheads="1" noChangeShapeType="1" noTextEdit="1"/>
-                </p:cNvSpPr>
-                <p:nvPr/>
-              </p:nvSpPr>
-              <p:spPr>
-                <a:xfrm>
-                  <a:off x="4194028" y="2036969"/>
-                  <a:ext cx="2187933" cy="369332"/>
-                </a:xfrm>
-                <a:prstGeom prst="rect">
-                  <a:avLst/>
-                </a:prstGeom>
-                <a:blipFill>
-                  <a:blip r:embed="rId13"/>
-                  <a:stretch>
-                    <a:fillRect/>
-                  </a:stretch>
-                </a:blipFill>
-              </p:spPr>
-              <p:txBody>
-                <a:bodyPr/>
-                <a:lstStyle/>
-                <a:p>
-                  <a:r>
-                    <a:rPr lang="zh-TW" altLang="en-US">
-                      <a:noFill/>
-                    </a:rPr>
-                    <a:t> </a:t>
-                  </a:r>
-                </a:p>
-              </p:txBody>
-            </p:sp>
-          </mc:Fallback>
-        </mc:AlternateContent>
-        <p:sp>
-          <p:nvSpPr>
-            <p:cNvPr id="26" name="文字方塊 25">
-              <a:extLst>
-                <a:ext uri="{FF2B5EF4-FFF2-40B4-BE49-F238E27FC236}">
-                  <a16:creationId xmlns:a16="http://schemas.microsoft.com/office/drawing/2014/main" id="{83A5726D-6BB7-44DA-A5F4-030C4EF7D79B}"/>
-                </a:ext>
-              </a:extLst>
-            </p:cNvPr>
-            <p:cNvSpPr txBox="1"/>
-            <p:nvPr/>
-          </p:nvSpPr>
-          <p:spPr>
-            <a:xfrm rot="16200000">
-              <a:off x="-763328" y="3009074"/>
-              <a:ext cx="2031323" cy="400110"/>
-            </a:xfrm>
-            <a:prstGeom prst="rect">
-              <a:avLst/>
-            </a:prstGeom>
-            <a:noFill/>
-          </p:spPr>
-          <p:txBody>
-            <a:bodyPr wrap="square" rtlCol="0">
-              <a:spAutoFit/>
-            </a:bodyPr>
-            <a:lstStyle/>
-            <a:p>
-              <a:pPr algn="ctr"/>
-              <a:r>
-                <a:rPr lang="en-US" altLang="zh-TW" sz="2000" dirty="0"/>
-                <a:t>arbitrary units</a:t>
-              </a:r>
-              <a:endParaRPr lang="zh-TW" altLang="en-US" sz="2000" dirty="0"/>
-            </a:p>
-          </p:txBody>
-        </p:sp>
-        <mc:AlternateContent xmlns:mc="http://schemas.openxmlformats.org/markup-compatibility/2006">
-          <mc:Choice xmlns:a14="http://schemas.microsoft.com/office/drawing/2010/main" Requires="a14">
-            <p:sp>
-              <p:nvSpPr>
-                <p:cNvPr id="27" name="矩形 26">
-                  <a:extLst>
-                    <a:ext uri="{FF2B5EF4-FFF2-40B4-BE49-F238E27FC236}">
-                      <a16:creationId xmlns:a16="http://schemas.microsoft.com/office/drawing/2014/main" id="{E45021D2-AA8E-4751-8F35-CECE862330D7}"/>
-                    </a:ext>
-                  </a:extLst>
-                </p:cNvPr>
-                <p:cNvSpPr/>
-                <p:nvPr/>
-              </p:nvSpPr>
-              <p:spPr>
-                <a:xfrm>
-                  <a:off x="4243198" y="4408262"/>
-                  <a:ext cx="2187933" cy="369332"/>
-                </a:xfrm>
-                <a:prstGeom prst="rect">
-                  <a:avLst/>
-                </a:prstGeom>
-              </p:spPr>
-              <p:txBody>
-                <a:bodyPr wrap="square">
-                  <a:spAutoFit/>
-                </a:bodyPr>
-                <a:lstStyle/>
-                <a:p>
-                  <a:pPr/>
-                  <a14:m>
-                    <m:oMathPara xmlns:m="http://schemas.openxmlformats.org/officeDocument/2006/math">
-                      <m:oMathParaPr>
-                        <m:jc m:val="centerGroup"/>
-                      </m:oMathParaPr>
-                      <m:oMath xmlns:m="http://schemas.openxmlformats.org/officeDocument/2006/math">
-                        <m:sSub>
-                          <m:sSubPr>
-                            <m:ctrlPr>
-                              <a:rPr lang="en-US" altLang="zh-TW" i="1">
-                                <a:latin typeface="Cambria Math" panose="02040503050406030204" pitchFamily="18" charset="0"/>
-                              </a:rPr>
-                            </m:ctrlPr>
-                          </m:sSubPr>
-                          <m:e>
-                            <m:r>
-                              <a:rPr lang="en-US" altLang="zh-TW" i="1">
-                                <a:latin typeface="Cambria Math" panose="02040503050406030204" pitchFamily="18" charset="0"/>
-                              </a:rPr>
-                              <m:t>𝑊</m:t>
-                            </m:r>
-                          </m:e>
-                          <m:sub>
-                            <m:r>
-                              <a:rPr lang="en-US" altLang="zh-TW" i="1">
-                                <a:latin typeface="Cambria Math" panose="02040503050406030204" pitchFamily="18" charset="0"/>
-                              </a:rPr>
-                              <m:t>0</m:t>
-                            </m:r>
-                          </m:sub>
-                        </m:sSub>
-                        <m:r>
-                          <a:rPr lang="en-US" altLang="zh-TW" i="1">
-                            <a:latin typeface="Cambria Math" panose="02040503050406030204" pitchFamily="18" charset="0"/>
-                            <a:ea typeface="Cambria Math" panose="02040503050406030204" pitchFamily="18" charset="0"/>
-                          </a:rPr>
-                          <m:t>=0</m:t>
-                        </m:r>
-                        <m:r>
-                          <a:rPr lang="en-US" altLang="zh-TW">
-                            <a:latin typeface="Cambria Math" panose="02040503050406030204" pitchFamily="18" charset="0"/>
-                            <a:ea typeface="Cambria Math" panose="02040503050406030204" pitchFamily="18" charset="0"/>
-                          </a:rPr>
-                          <m:t>.5 </m:t>
-                        </m:r>
-                        <m:r>
-                          <m:rPr>
-                            <m:sty m:val="p"/>
-                          </m:rPr>
-                          <a:rPr lang="en-US" altLang="zh-TW">
-                            <a:latin typeface="Cambria Math" panose="02040503050406030204" pitchFamily="18" charset="0"/>
-                            <a:ea typeface="Cambria Math" panose="02040503050406030204" pitchFamily="18" charset="0"/>
-                          </a:rPr>
-                          <m:t>um</m:t>
-                        </m:r>
-                      </m:oMath>
-                    </m:oMathPara>
-                  </a14:m>
-                  <a:endParaRPr lang="zh-TW" altLang="en-US" dirty="0"/>
-                </a:p>
-              </p:txBody>
-            </p:sp>
-          </mc:Choice>
-          <mc:Fallback>
-            <p:sp>
-              <p:nvSpPr>
-                <p:cNvPr id="27" name="矩形 26">
-                  <a:extLst>
-                    <a:ext uri="{FF2B5EF4-FFF2-40B4-BE49-F238E27FC236}">
-                      <a16:creationId xmlns:a16="http://schemas.microsoft.com/office/drawing/2014/main" id="{E45021D2-AA8E-4751-8F35-CECE862330D7}"/>
-                    </a:ext>
-                  </a:extLst>
-                </p:cNvPr>
-                <p:cNvSpPr>
-                  <a:spLocks noRot="1" noChangeAspect="1" noMove="1" noResize="1" noEditPoints="1" noAdjustHandles="1" noChangeArrowheads="1" noChangeShapeType="1" noTextEdit="1"/>
-                </p:cNvSpPr>
-                <p:nvPr/>
-              </p:nvSpPr>
-              <p:spPr>
-                <a:xfrm>
-                  <a:off x="4243198" y="4408262"/>
-                  <a:ext cx="2187933" cy="369332"/>
-                </a:xfrm>
-                <a:prstGeom prst="rect">
-                  <a:avLst/>
-                </a:prstGeom>
-                <a:blipFill>
-                  <a:blip r:embed="rId14"/>
-                  <a:stretch>
-                    <a:fillRect/>
-                  </a:stretch>
-                </a:blipFill>
-              </p:spPr>
-              <p:txBody>
-                <a:bodyPr/>
-                <a:lstStyle/>
-                <a:p>
-                  <a:r>
-                    <a:rPr lang="zh-TW" altLang="en-US">
-                      <a:noFill/>
-                    </a:rPr>
-                    <a:t> </a:t>
-                  </a:r>
-                </a:p>
-              </p:txBody>
-            </p:sp>
-          </mc:Fallback>
-        </mc:AlternateContent>
-        <mc:AlternateContent xmlns:mc="http://schemas.openxmlformats.org/markup-compatibility/2006">
-          <mc:Choice xmlns:a14="http://schemas.microsoft.com/office/drawing/2010/main" Requires="a14">
-            <p:sp>
-              <p:nvSpPr>
-                <p:cNvPr id="32" name="文字方塊 31">
-                  <a:extLst>
-                    <a:ext uri="{FF2B5EF4-FFF2-40B4-BE49-F238E27FC236}">
-                      <a16:creationId xmlns:a16="http://schemas.microsoft.com/office/drawing/2014/main" id="{68CC5F03-FE23-49D4-934E-34231E7D27F3}"/>
-                    </a:ext>
-                  </a:extLst>
-                </p:cNvPr>
-                <p:cNvSpPr txBox="1"/>
-                <p:nvPr/>
-              </p:nvSpPr>
-              <p:spPr>
-                <a:xfrm>
-                  <a:off x="2656460" y="6048688"/>
-                  <a:ext cx="508459" cy="369332"/>
-                </a:xfrm>
-                <a:prstGeom prst="rect">
-                  <a:avLst/>
-                </a:prstGeom>
-                <a:noFill/>
-              </p:spPr>
-              <p:txBody>
-                <a:bodyPr wrap="square" rtlCol="0">
-                  <a:spAutoFit/>
-                </a:bodyPr>
-                <a:lstStyle/>
-                <a:p>
-                  <a:pPr/>
-                  <a14:m>
-                    <m:oMathPara xmlns:m="http://schemas.openxmlformats.org/officeDocument/2006/math">
-                      <m:oMathParaPr>
-                        <m:jc m:val="centerGroup"/>
-                      </m:oMathParaPr>
-                      <m:oMath xmlns:m="http://schemas.openxmlformats.org/officeDocument/2006/math">
-                        <m:r>
-                          <m:rPr>
-                            <m:sty m:val="p"/>
-                          </m:rPr>
-                          <a:rPr lang="en-US" altLang="zh-TW">
-                            <a:latin typeface="Cambria Math" panose="02040503050406030204" pitchFamily="18" charset="0"/>
-                          </a:rPr>
-                          <m:t>um</m:t>
-                        </m:r>
-                      </m:oMath>
-                    </m:oMathPara>
-                  </a14:m>
-                  <a:endParaRPr lang="zh-TW" altLang="en-US" dirty="0"/>
-                </a:p>
-              </p:txBody>
-            </p:sp>
-          </mc:Choice>
-          <mc:Fallback>
-            <p:sp>
-              <p:nvSpPr>
-                <p:cNvPr id="32" name="文字方塊 31">
-                  <a:extLst>
-                    <a:ext uri="{FF2B5EF4-FFF2-40B4-BE49-F238E27FC236}">
-                      <a16:creationId xmlns:a16="http://schemas.microsoft.com/office/drawing/2014/main" id="{68CC5F03-FE23-49D4-934E-34231E7D27F3}"/>
-                    </a:ext>
-                  </a:extLst>
-                </p:cNvPr>
-                <p:cNvSpPr txBox="1">
-                  <a:spLocks noRot="1" noChangeAspect="1" noMove="1" noResize="1" noEditPoints="1" noAdjustHandles="1" noChangeArrowheads="1" noChangeShapeType="1" noTextEdit="1"/>
-                </p:cNvSpPr>
-                <p:nvPr/>
-              </p:nvSpPr>
-              <p:spPr>
-                <a:xfrm>
-                  <a:off x="2656460" y="6048688"/>
-                  <a:ext cx="508459" cy="369332"/>
-                </a:xfrm>
-                <a:prstGeom prst="rect">
-                  <a:avLst/>
-                </a:prstGeom>
-                <a:blipFill>
-                  <a:blip r:embed="rId15"/>
-                  <a:stretch>
-                    <a:fillRect/>
-                  </a:stretch>
-                </a:blipFill>
-              </p:spPr>
-              <p:txBody>
-                <a:bodyPr/>
-                <a:lstStyle/>
-                <a:p>
-                  <a:r>
-                    <a:rPr lang="zh-TW" altLang="en-US">
-                      <a:noFill/>
-                    </a:rPr>
-                    <a:t> </a:t>
-                  </a:r>
-                </a:p>
-              </p:txBody>
-            </p:sp>
-          </mc:Fallback>
-        </mc:AlternateContent>
-        <mc:AlternateContent xmlns:mc="http://schemas.openxmlformats.org/markup-compatibility/2006">
-          <mc:Choice xmlns:a14="http://schemas.microsoft.com/office/drawing/2010/main" Requires="a14">
-            <p:sp>
-              <p:nvSpPr>
-                <p:cNvPr id="35" name="文字方塊 34">
-                  <a:extLst>
-                    <a:ext uri="{FF2B5EF4-FFF2-40B4-BE49-F238E27FC236}">
-                      <a16:creationId xmlns:a16="http://schemas.microsoft.com/office/drawing/2014/main" id="{43F95930-E1A0-4A18-AA43-293BA5F27B78}"/>
-                    </a:ext>
-                  </a:extLst>
-                </p:cNvPr>
-                <p:cNvSpPr txBox="1"/>
-                <p:nvPr/>
-              </p:nvSpPr>
-              <p:spPr>
-                <a:xfrm>
-                  <a:off x="4612708" y="4847853"/>
-                  <a:ext cx="1133442" cy="369332"/>
-                </a:xfrm>
-                <a:prstGeom prst="rect">
-                  <a:avLst/>
-                </a:prstGeom>
-                <a:noFill/>
-              </p:spPr>
-              <p:txBody>
-                <a:bodyPr wrap="square" rtlCol="0">
-                  <a:spAutoFit/>
-                </a:bodyPr>
-                <a:lstStyle/>
-                <a:p>
-                  <a:pPr/>
-                  <a14:m>
-                    <m:oMathPara xmlns:m="http://schemas.openxmlformats.org/officeDocument/2006/math">
-                      <m:oMathParaPr>
-                        <m:jc m:val="centerGroup"/>
-                      </m:oMathParaPr>
-                      <m:oMath xmlns:m="http://schemas.openxmlformats.org/officeDocument/2006/math">
-                        <m:r>
-                          <a:rPr lang="en-US" altLang="zh-TW" i="1">
-                            <a:latin typeface="Cambria Math" panose="02040503050406030204" pitchFamily="18" charset="0"/>
-                          </a:rPr>
-                          <m:t>ℓ=0</m:t>
-                        </m:r>
-                      </m:oMath>
-                    </m:oMathPara>
-                  </a14:m>
-                  <a:endParaRPr lang="zh-TW" altLang="en-US" dirty="0"/>
-                </a:p>
-              </p:txBody>
-            </p:sp>
-          </mc:Choice>
-          <mc:Fallback>
-            <p:sp>
-              <p:nvSpPr>
-                <p:cNvPr id="35" name="文字方塊 34">
-                  <a:extLst>
-                    <a:ext uri="{FF2B5EF4-FFF2-40B4-BE49-F238E27FC236}">
-                      <a16:creationId xmlns:a16="http://schemas.microsoft.com/office/drawing/2014/main" id="{43F95930-E1A0-4A18-AA43-293BA5F27B78}"/>
-                    </a:ext>
-                  </a:extLst>
-                </p:cNvPr>
-                <p:cNvSpPr txBox="1">
-                  <a:spLocks noRot="1" noChangeAspect="1" noMove="1" noResize="1" noEditPoints="1" noAdjustHandles="1" noChangeArrowheads="1" noChangeShapeType="1" noTextEdit="1"/>
-                </p:cNvSpPr>
-                <p:nvPr/>
-              </p:nvSpPr>
-              <p:spPr>
-                <a:xfrm>
-                  <a:off x="4612708" y="4847853"/>
-                  <a:ext cx="1133442" cy="369332"/>
-                </a:xfrm>
-                <a:prstGeom prst="rect">
-                  <a:avLst/>
-                </a:prstGeom>
-                <a:blipFill>
-                  <a:blip r:embed="rId16"/>
-                  <a:stretch>
-                    <a:fillRect/>
-                  </a:stretch>
-                </a:blipFill>
-              </p:spPr>
-              <p:txBody>
-                <a:bodyPr/>
-                <a:lstStyle/>
-                <a:p>
-                  <a:r>
-                    <a:rPr lang="zh-TW" altLang="en-US">
-                      <a:noFill/>
-                    </a:rPr>
-                    <a:t> </a:t>
-                  </a:r>
-                </a:p>
-              </p:txBody>
-            </p:sp>
-          </mc:Fallback>
-        </mc:AlternateContent>
-        <mc:AlternateContent xmlns:mc="http://schemas.openxmlformats.org/markup-compatibility/2006">
-          <mc:Choice xmlns:a14="http://schemas.microsoft.com/office/drawing/2010/main" Requires="a14">
-            <p:sp>
-              <p:nvSpPr>
-                <p:cNvPr id="36" name="文字方塊 35">
-                  <a:extLst>
-                    <a:ext uri="{FF2B5EF4-FFF2-40B4-BE49-F238E27FC236}">
-                      <a16:creationId xmlns:a16="http://schemas.microsoft.com/office/drawing/2014/main" id="{BDB64F1F-26FF-4383-BC09-17687EA19021}"/>
-                    </a:ext>
-                  </a:extLst>
-                </p:cNvPr>
-                <p:cNvSpPr txBox="1"/>
-                <p:nvPr/>
-              </p:nvSpPr>
-              <p:spPr>
-                <a:xfrm>
-                  <a:off x="8184841" y="4847853"/>
-                  <a:ext cx="1133442" cy="369332"/>
-                </a:xfrm>
-                <a:prstGeom prst="rect">
-                  <a:avLst/>
-                </a:prstGeom>
-                <a:noFill/>
-              </p:spPr>
-              <p:txBody>
-                <a:bodyPr wrap="square" rtlCol="0">
-                  <a:spAutoFit/>
-                </a:bodyPr>
-                <a:lstStyle/>
-                <a:p>
-                  <a:pPr/>
-                  <a14:m>
-                    <m:oMathPara xmlns:m="http://schemas.openxmlformats.org/officeDocument/2006/math">
-                      <m:oMathParaPr>
-                        <m:jc m:val="centerGroup"/>
-                      </m:oMathParaPr>
-                      <m:oMath xmlns:m="http://schemas.openxmlformats.org/officeDocument/2006/math">
-                        <m:r>
-                          <a:rPr lang="en-US" altLang="zh-TW" i="1">
-                            <a:latin typeface="Cambria Math" panose="02040503050406030204" pitchFamily="18" charset="0"/>
-                          </a:rPr>
-                          <m:t>ℓ=2</m:t>
-                        </m:r>
-                      </m:oMath>
-                    </m:oMathPara>
-                  </a14:m>
-                  <a:endParaRPr lang="zh-TW" altLang="en-US" dirty="0"/>
-                </a:p>
-              </p:txBody>
-            </p:sp>
-          </mc:Choice>
-          <mc:Fallback>
-            <p:sp>
-              <p:nvSpPr>
-                <p:cNvPr id="36" name="文字方塊 35">
-                  <a:extLst>
-                    <a:ext uri="{FF2B5EF4-FFF2-40B4-BE49-F238E27FC236}">
-                      <a16:creationId xmlns:a16="http://schemas.microsoft.com/office/drawing/2014/main" id="{BDB64F1F-26FF-4383-BC09-17687EA19021}"/>
-                    </a:ext>
-                  </a:extLst>
-                </p:cNvPr>
-                <p:cNvSpPr txBox="1">
-                  <a:spLocks noRot="1" noChangeAspect="1" noMove="1" noResize="1" noEditPoints="1" noAdjustHandles="1" noChangeArrowheads="1" noChangeShapeType="1" noTextEdit="1"/>
-                </p:cNvSpPr>
-                <p:nvPr/>
-              </p:nvSpPr>
-              <p:spPr>
-                <a:xfrm>
-                  <a:off x="8184841" y="4847853"/>
-                  <a:ext cx="1133442" cy="369332"/>
-                </a:xfrm>
-                <a:prstGeom prst="rect">
-                  <a:avLst/>
-                </a:prstGeom>
-                <a:blipFill>
-                  <a:blip r:embed="rId17"/>
-                  <a:stretch>
-                    <a:fillRect/>
-                  </a:stretch>
-                </a:blipFill>
-              </p:spPr>
-              <p:txBody>
-                <a:bodyPr/>
-                <a:lstStyle/>
-                <a:p>
-                  <a:r>
-                    <a:rPr lang="zh-TW" altLang="en-US">
-                      <a:noFill/>
-                    </a:rPr>
-                    <a:t> </a:t>
-                  </a:r>
-                </a:p>
-              </p:txBody>
-            </p:sp>
-          </mc:Fallback>
-        </mc:AlternateContent>
-        <mc:AlternateContent xmlns:mc="http://schemas.openxmlformats.org/markup-compatibility/2006">
-          <mc:Choice xmlns:a14="http://schemas.microsoft.com/office/drawing/2010/main" Requires="a14">
-            <p:sp>
-              <p:nvSpPr>
-                <p:cNvPr id="37" name="文字方塊 36">
-                  <a:extLst>
-                    <a:ext uri="{FF2B5EF4-FFF2-40B4-BE49-F238E27FC236}">
-                      <a16:creationId xmlns:a16="http://schemas.microsoft.com/office/drawing/2014/main" id="{F07B4362-4894-4DC3-A118-F912BAA3ABC9}"/>
-                    </a:ext>
-                  </a:extLst>
-                </p:cNvPr>
-                <p:cNvSpPr txBox="1"/>
-                <p:nvPr/>
-              </p:nvSpPr>
-              <p:spPr>
-                <a:xfrm>
-                  <a:off x="6398775" y="4847853"/>
-                  <a:ext cx="1133442" cy="369332"/>
-                </a:xfrm>
-                <a:prstGeom prst="rect">
-                  <a:avLst/>
-                </a:prstGeom>
-                <a:noFill/>
-              </p:spPr>
-              <p:txBody>
-                <a:bodyPr wrap="square" rtlCol="0">
-                  <a:spAutoFit/>
-                </a:bodyPr>
-                <a:lstStyle/>
-                <a:p>
-                  <a:pPr/>
-                  <a14:m>
-                    <m:oMathPara xmlns:m="http://schemas.openxmlformats.org/officeDocument/2006/math">
-                      <m:oMathParaPr>
-                        <m:jc m:val="centerGroup"/>
-                      </m:oMathParaPr>
-                      <m:oMath xmlns:m="http://schemas.openxmlformats.org/officeDocument/2006/math">
-                        <m:r>
-                          <a:rPr lang="en-US" altLang="zh-TW" i="1">
-                            <a:latin typeface="Cambria Math" panose="02040503050406030204" pitchFamily="18" charset="0"/>
-                          </a:rPr>
-                          <m:t>ℓ=1</m:t>
-                        </m:r>
-                      </m:oMath>
-                    </m:oMathPara>
-                  </a14:m>
-                  <a:endParaRPr lang="zh-TW" altLang="en-US" dirty="0"/>
-                </a:p>
-              </p:txBody>
-            </p:sp>
-          </mc:Choice>
-          <mc:Fallback>
-            <p:sp>
-              <p:nvSpPr>
-                <p:cNvPr id="37" name="文字方塊 36">
-                  <a:extLst>
-                    <a:ext uri="{FF2B5EF4-FFF2-40B4-BE49-F238E27FC236}">
-                      <a16:creationId xmlns:a16="http://schemas.microsoft.com/office/drawing/2014/main" id="{F07B4362-4894-4DC3-A118-F912BAA3ABC9}"/>
-                    </a:ext>
-                  </a:extLst>
-                </p:cNvPr>
-                <p:cNvSpPr txBox="1">
-                  <a:spLocks noRot="1" noChangeAspect="1" noMove="1" noResize="1" noEditPoints="1" noAdjustHandles="1" noChangeArrowheads="1" noChangeShapeType="1" noTextEdit="1"/>
-                </p:cNvSpPr>
-                <p:nvPr/>
-              </p:nvSpPr>
-              <p:spPr>
-                <a:xfrm>
-                  <a:off x="6398775" y="4847853"/>
-                  <a:ext cx="1133442" cy="369332"/>
-                </a:xfrm>
-                <a:prstGeom prst="rect">
-                  <a:avLst/>
-                </a:prstGeom>
-                <a:blipFill>
-                  <a:blip r:embed="rId18"/>
-                  <a:stretch>
-                    <a:fillRect/>
-                  </a:stretch>
-                </a:blipFill>
-              </p:spPr>
-              <p:txBody>
-                <a:bodyPr/>
-                <a:lstStyle/>
-                <a:p>
-                  <a:r>
-                    <a:rPr lang="zh-TW" altLang="en-US">
-                      <a:noFill/>
-                    </a:rPr>
-                    <a:t> </a:t>
-                  </a:r>
-                </a:p>
-              </p:txBody>
-            </p:sp>
-          </mc:Fallback>
-        </mc:AlternateContent>
-        <mc:AlternateContent xmlns:mc="http://schemas.openxmlformats.org/markup-compatibility/2006">
-          <mc:Choice xmlns:a14="http://schemas.microsoft.com/office/drawing/2010/main" Requires="a14">
-            <p:sp>
-              <p:nvSpPr>
-                <p:cNvPr id="38" name="文字方塊 37">
-                  <a:extLst>
-                    <a:ext uri="{FF2B5EF4-FFF2-40B4-BE49-F238E27FC236}">
-                      <a16:creationId xmlns:a16="http://schemas.microsoft.com/office/drawing/2014/main" id="{2909D8F5-F03B-46FF-BBC8-3EDC3936EC45}"/>
-                    </a:ext>
-                  </a:extLst>
-                </p:cNvPr>
-                <p:cNvSpPr txBox="1"/>
-                <p:nvPr/>
-              </p:nvSpPr>
-              <p:spPr>
-                <a:xfrm>
-                  <a:off x="2826641" y="4847853"/>
-                  <a:ext cx="1133442" cy="369332"/>
-                </a:xfrm>
-                <a:prstGeom prst="rect">
-                  <a:avLst/>
-                </a:prstGeom>
-                <a:noFill/>
-              </p:spPr>
-              <p:txBody>
-                <a:bodyPr wrap="square" rtlCol="0">
-                  <a:spAutoFit/>
-                </a:bodyPr>
-                <a:lstStyle/>
-                <a:p>
-                  <a:pPr/>
-                  <a14:m>
-                    <m:oMathPara xmlns:m="http://schemas.openxmlformats.org/officeDocument/2006/math">
-                      <m:oMathParaPr>
-                        <m:jc m:val="centerGroup"/>
-                      </m:oMathParaPr>
-                      <m:oMath xmlns:m="http://schemas.openxmlformats.org/officeDocument/2006/math">
-                        <m:r>
-                          <a:rPr lang="en-US" altLang="zh-TW" i="1">
-                            <a:latin typeface="Cambria Math" panose="02040503050406030204" pitchFamily="18" charset="0"/>
-                          </a:rPr>
-                          <m:t>ℓ=−1</m:t>
-                        </m:r>
-                      </m:oMath>
-                    </m:oMathPara>
-                  </a14:m>
-                  <a:endParaRPr lang="zh-TW" altLang="en-US" dirty="0"/>
-                </a:p>
-              </p:txBody>
-            </p:sp>
-          </mc:Choice>
-          <mc:Fallback>
-            <p:sp>
-              <p:nvSpPr>
-                <p:cNvPr id="38" name="文字方塊 37">
-                  <a:extLst>
-                    <a:ext uri="{FF2B5EF4-FFF2-40B4-BE49-F238E27FC236}">
-                      <a16:creationId xmlns:a16="http://schemas.microsoft.com/office/drawing/2014/main" id="{2909D8F5-F03B-46FF-BBC8-3EDC3936EC45}"/>
-                    </a:ext>
-                  </a:extLst>
-                </p:cNvPr>
-                <p:cNvSpPr txBox="1">
-                  <a:spLocks noRot="1" noChangeAspect="1" noMove="1" noResize="1" noEditPoints="1" noAdjustHandles="1" noChangeArrowheads="1" noChangeShapeType="1" noTextEdit="1"/>
-                </p:cNvSpPr>
-                <p:nvPr/>
-              </p:nvSpPr>
-              <p:spPr>
-                <a:xfrm>
-                  <a:off x="2826641" y="4847853"/>
-                  <a:ext cx="1133442" cy="369332"/>
-                </a:xfrm>
-                <a:prstGeom prst="rect">
-                  <a:avLst/>
-                </a:prstGeom>
-                <a:blipFill>
-                  <a:blip r:embed="rId19"/>
-                  <a:stretch>
-                    <a:fillRect/>
-                  </a:stretch>
-                </a:blipFill>
-              </p:spPr>
-              <p:txBody>
-                <a:bodyPr/>
-                <a:lstStyle/>
-                <a:p>
-                  <a:r>
-                    <a:rPr lang="zh-TW" altLang="en-US">
-                      <a:noFill/>
-                    </a:rPr>
-                    <a:t> </a:t>
-                  </a:r>
-                </a:p>
-              </p:txBody>
-            </p:sp>
-          </mc:Fallback>
-        </mc:AlternateContent>
-        <mc:AlternateContent xmlns:mc="http://schemas.openxmlformats.org/markup-compatibility/2006">
-          <mc:Choice xmlns:a14="http://schemas.microsoft.com/office/drawing/2010/main" Requires="a14">
-            <p:sp>
-              <p:nvSpPr>
-                <p:cNvPr id="39" name="文字方塊 38">
-                  <a:extLst>
-                    <a:ext uri="{FF2B5EF4-FFF2-40B4-BE49-F238E27FC236}">
-                      <a16:creationId xmlns:a16="http://schemas.microsoft.com/office/drawing/2014/main" id="{50B0F240-614A-4711-95EA-805943FA3629}"/>
-                    </a:ext>
-                  </a:extLst>
-                </p:cNvPr>
-                <p:cNvSpPr txBox="1"/>
-                <p:nvPr/>
-              </p:nvSpPr>
-              <p:spPr>
-                <a:xfrm>
-                  <a:off x="1040575" y="4847853"/>
-                  <a:ext cx="1133442" cy="369332"/>
-                </a:xfrm>
-                <a:prstGeom prst="rect">
-                  <a:avLst/>
-                </a:prstGeom>
-                <a:noFill/>
-              </p:spPr>
-              <p:txBody>
-                <a:bodyPr wrap="square" rtlCol="0">
-                  <a:spAutoFit/>
-                </a:bodyPr>
-                <a:lstStyle/>
-                <a:p>
-                  <a:pPr/>
-                  <a14:m>
-                    <m:oMathPara xmlns:m="http://schemas.openxmlformats.org/officeDocument/2006/math">
-                      <m:oMathParaPr>
-                        <m:jc m:val="centerGroup"/>
-                      </m:oMathParaPr>
-                      <m:oMath xmlns:m="http://schemas.openxmlformats.org/officeDocument/2006/math">
-                        <m:r>
-                          <a:rPr lang="en-US" altLang="zh-TW" i="1">
-                            <a:latin typeface="Cambria Math" panose="02040503050406030204" pitchFamily="18" charset="0"/>
-                          </a:rPr>
-                          <m:t>ℓ=−2</m:t>
-                        </m:r>
-                      </m:oMath>
-                    </m:oMathPara>
-                  </a14:m>
-                  <a:endParaRPr lang="zh-TW" altLang="en-US" dirty="0"/>
-                </a:p>
-              </p:txBody>
-            </p:sp>
-          </mc:Choice>
-          <mc:Fallback>
-            <p:sp>
-              <p:nvSpPr>
-                <p:cNvPr id="39" name="文字方塊 38">
-                  <a:extLst>
-                    <a:ext uri="{FF2B5EF4-FFF2-40B4-BE49-F238E27FC236}">
-                      <a16:creationId xmlns:a16="http://schemas.microsoft.com/office/drawing/2014/main" id="{50B0F240-614A-4711-95EA-805943FA3629}"/>
-                    </a:ext>
-                  </a:extLst>
-                </p:cNvPr>
-                <p:cNvSpPr txBox="1">
-                  <a:spLocks noRot="1" noChangeAspect="1" noMove="1" noResize="1" noEditPoints="1" noAdjustHandles="1" noChangeArrowheads="1" noChangeShapeType="1" noTextEdit="1"/>
-                </p:cNvSpPr>
-                <p:nvPr/>
-              </p:nvSpPr>
-              <p:spPr>
-                <a:xfrm>
-                  <a:off x="1040575" y="4847853"/>
-                  <a:ext cx="1133442" cy="369332"/>
-                </a:xfrm>
-                <a:prstGeom prst="rect">
-                  <a:avLst/>
-                </a:prstGeom>
-                <a:blipFill>
-                  <a:blip r:embed="rId20"/>
-                  <a:stretch>
-                    <a:fillRect/>
-                  </a:stretch>
-                </a:blipFill>
-              </p:spPr>
-              <p:txBody>
-                <a:bodyPr/>
-                <a:lstStyle/>
-                <a:p>
-                  <a:r>
-                    <a:rPr lang="zh-TW" altLang="en-US">
-                      <a:noFill/>
-                    </a:rPr>
-                    <a:t> </a:t>
-                  </a:r>
-                </a:p>
-              </p:txBody>
-            </p:sp>
-          </mc:Fallback>
-        </mc:AlternateContent>
-      </p:grpSp>
+        </mc:Choice>
+        <mc:Fallback>
+          <p:sp>
+            <p:nvSpPr>
+              <p:cNvPr id="58" name="文字方塊 57">
+                <a:extLst>
+                  <a:ext uri="{FF2B5EF4-FFF2-40B4-BE49-F238E27FC236}">
+                    <a16:creationId xmlns:a16="http://schemas.microsoft.com/office/drawing/2014/main" id="{E3120A0E-484F-44A1-8C52-4CC6C83FEDA5}"/>
+                  </a:ext>
+                </a:extLst>
+              </p:cNvPr>
+              <p:cNvSpPr txBox="1">
+                <a:spLocks noRot="1" noChangeAspect="1" noMove="1" noResize="1" noEditPoints="1" noAdjustHandles="1" noChangeArrowheads="1" noChangeShapeType="1" noTextEdit="1"/>
+              </p:cNvSpPr>
+              <p:nvPr/>
+            </p:nvSpPr>
+            <p:spPr>
+              <a:xfrm>
+                <a:off x="2084960" y="5895686"/>
+                <a:ext cx="508459" cy="369332"/>
+              </a:xfrm>
+              <a:prstGeom prst="rect">
+                <a:avLst/>
+              </a:prstGeom>
+              <a:blipFill>
+                <a:blip r:embed="rId15"/>
+                <a:stretch>
+                  <a:fillRect/>
+                </a:stretch>
+              </a:blipFill>
+            </p:spPr>
+            <p:txBody>
+              <a:bodyPr/>
+              <a:lstStyle/>
+              <a:p>
+                <a:r>
+                  <a:rPr lang="zh-TW" altLang="en-US">
+                    <a:noFill/>
+                  </a:rPr>
+                  <a:t> </a:t>
+                </a:r>
+              </a:p>
+            </p:txBody>
+          </p:sp>
+        </mc:Fallback>
+      </mc:AlternateContent>
+      <mc:AlternateContent xmlns:mc="http://schemas.openxmlformats.org/markup-compatibility/2006">
+        <mc:Choice xmlns:a14="http://schemas.microsoft.com/office/drawing/2010/main" Requires="a14">
+          <p:sp>
+            <p:nvSpPr>
+              <p:cNvPr id="59" name="文字方塊 58">
+                <a:extLst>
+                  <a:ext uri="{FF2B5EF4-FFF2-40B4-BE49-F238E27FC236}">
+                    <a16:creationId xmlns:a16="http://schemas.microsoft.com/office/drawing/2014/main" id="{CE297881-E961-4B5E-83EB-928F44B50082}"/>
+                  </a:ext>
+                </a:extLst>
+              </p:cNvPr>
+              <p:cNvSpPr txBox="1"/>
+              <p:nvPr/>
+            </p:nvSpPr>
+            <p:spPr>
+              <a:xfrm>
+                <a:off x="4612708" y="4294801"/>
+                <a:ext cx="1133442" cy="369332"/>
+              </a:xfrm>
+              <a:prstGeom prst="rect">
+                <a:avLst/>
+              </a:prstGeom>
+              <a:noFill/>
+            </p:spPr>
+            <p:txBody>
+              <a:bodyPr wrap="square" rtlCol="0">
+                <a:spAutoFit/>
+              </a:bodyPr>
+              <a:lstStyle/>
+              <a:p>
+                <a:pPr/>
+                <a14:m>
+                  <m:oMathPara xmlns:m="http://schemas.openxmlformats.org/officeDocument/2006/math">
+                    <m:oMathParaPr>
+                      <m:jc m:val="centerGroup"/>
+                    </m:oMathParaPr>
+                    <m:oMath xmlns:m="http://schemas.openxmlformats.org/officeDocument/2006/math">
+                      <m:r>
+                        <a:rPr lang="en-US" altLang="zh-TW" i="1">
+                          <a:latin typeface="Cambria Math" panose="02040503050406030204" pitchFamily="18" charset="0"/>
+                        </a:rPr>
+                        <m:t>ℓ=0</m:t>
+                      </m:r>
+                    </m:oMath>
+                  </m:oMathPara>
+                </a14:m>
+                <a:endParaRPr lang="zh-TW" altLang="en-US" dirty="0">
+                  <a:latin typeface="Times New Roman" panose="02020603050405020304" pitchFamily="18" charset="0"/>
+                  <a:cs typeface="Times New Roman" panose="02020603050405020304" pitchFamily="18" charset="0"/>
+                </a:endParaRPr>
+              </a:p>
+            </p:txBody>
+          </p:sp>
+        </mc:Choice>
+        <mc:Fallback>
+          <p:sp>
+            <p:nvSpPr>
+              <p:cNvPr id="59" name="文字方塊 58">
+                <a:extLst>
+                  <a:ext uri="{FF2B5EF4-FFF2-40B4-BE49-F238E27FC236}">
+                    <a16:creationId xmlns:a16="http://schemas.microsoft.com/office/drawing/2014/main" id="{CE297881-E961-4B5E-83EB-928F44B50082}"/>
+                  </a:ext>
+                </a:extLst>
+              </p:cNvPr>
+              <p:cNvSpPr txBox="1">
+                <a:spLocks noRot="1" noChangeAspect="1" noMove="1" noResize="1" noEditPoints="1" noAdjustHandles="1" noChangeArrowheads="1" noChangeShapeType="1" noTextEdit="1"/>
+              </p:cNvSpPr>
+              <p:nvPr/>
+            </p:nvSpPr>
+            <p:spPr>
+              <a:xfrm>
+                <a:off x="4612708" y="4294801"/>
+                <a:ext cx="1133442" cy="369332"/>
+              </a:xfrm>
+              <a:prstGeom prst="rect">
+                <a:avLst/>
+              </a:prstGeom>
+              <a:blipFill>
+                <a:blip r:embed="rId16"/>
+                <a:stretch>
+                  <a:fillRect/>
+                </a:stretch>
+              </a:blipFill>
+            </p:spPr>
+            <p:txBody>
+              <a:bodyPr/>
+              <a:lstStyle/>
+              <a:p>
+                <a:r>
+                  <a:rPr lang="zh-TW" altLang="en-US">
+                    <a:noFill/>
+                  </a:rPr>
+                  <a:t> </a:t>
+                </a:r>
+              </a:p>
+            </p:txBody>
+          </p:sp>
+        </mc:Fallback>
+      </mc:AlternateContent>
+      <mc:AlternateContent xmlns:mc="http://schemas.openxmlformats.org/markup-compatibility/2006">
+        <mc:Choice xmlns:a14="http://schemas.microsoft.com/office/drawing/2010/main" Requires="a14">
+          <p:sp>
+            <p:nvSpPr>
+              <p:cNvPr id="60" name="文字方塊 59">
+                <a:extLst>
+                  <a:ext uri="{FF2B5EF4-FFF2-40B4-BE49-F238E27FC236}">
+                    <a16:creationId xmlns:a16="http://schemas.microsoft.com/office/drawing/2014/main" id="{1058910C-C900-415E-9577-4F2E6C6F0642}"/>
+                  </a:ext>
+                </a:extLst>
+              </p:cNvPr>
+              <p:cNvSpPr txBox="1"/>
+              <p:nvPr/>
+            </p:nvSpPr>
+            <p:spPr>
+              <a:xfrm>
+                <a:off x="8184841" y="4294801"/>
+                <a:ext cx="1133442" cy="369332"/>
+              </a:xfrm>
+              <a:prstGeom prst="rect">
+                <a:avLst/>
+              </a:prstGeom>
+              <a:noFill/>
+            </p:spPr>
+            <p:txBody>
+              <a:bodyPr wrap="square" rtlCol="0">
+                <a:spAutoFit/>
+              </a:bodyPr>
+              <a:lstStyle/>
+              <a:p>
+                <a:pPr/>
+                <a14:m>
+                  <m:oMathPara xmlns:m="http://schemas.openxmlformats.org/officeDocument/2006/math">
+                    <m:oMathParaPr>
+                      <m:jc m:val="centerGroup"/>
+                    </m:oMathParaPr>
+                    <m:oMath xmlns:m="http://schemas.openxmlformats.org/officeDocument/2006/math">
+                      <m:r>
+                        <a:rPr lang="en-US" altLang="zh-TW" i="1">
+                          <a:latin typeface="Cambria Math" panose="02040503050406030204" pitchFamily="18" charset="0"/>
+                        </a:rPr>
+                        <m:t>ℓ=2</m:t>
+                      </m:r>
+                    </m:oMath>
+                  </m:oMathPara>
+                </a14:m>
+                <a:endParaRPr lang="zh-TW" altLang="en-US" dirty="0">
+                  <a:latin typeface="Times New Roman" panose="02020603050405020304" pitchFamily="18" charset="0"/>
+                  <a:cs typeface="Times New Roman" panose="02020603050405020304" pitchFamily="18" charset="0"/>
+                </a:endParaRPr>
+              </a:p>
+            </p:txBody>
+          </p:sp>
+        </mc:Choice>
+        <mc:Fallback>
+          <p:sp>
+            <p:nvSpPr>
+              <p:cNvPr id="60" name="文字方塊 59">
+                <a:extLst>
+                  <a:ext uri="{FF2B5EF4-FFF2-40B4-BE49-F238E27FC236}">
+                    <a16:creationId xmlns:a16="http://schemas.microsoft.com/office/drawing/2014/main" id="{1058910C-C900-415E-9577-4F2E6C6F0642}"/>
+                  </a:ext>
+                </a:extLst>
+              </p:cNvPr>
+              <p:cNvSpPr txBox="1">
+                <a:spLocks noRot="1" noChangeAspect="1" noMove="1" noResize="1" noEditPoints="1" noAdjustHandles="1" noChangeArrowheads="1" noChangeShapeType="1" noTextEdit="1"/>
+              </p:cNvSpPr>
+              <p:nvPr/>
+            </p:nvSpPr>
+            <p:spPr>
+              <a:xfrm>
+                <a:off x="8184841" y="4294801"/>
+                <a:ext cx="1133442" cy="369332"/>
+              </a:xfrm>
+              <a:prstGeom prst="rect">
+                <a:avLst/>
+              </a:prstGeom>
+              <a:blipFill>
+                <a:blip r:embed="rId17"/>
+                <a:stretch>
+                  <a:fillRect/>
+                </a:stretch>
+              </a:blipFill>
+            </p:spPr>
+            <p:txBody>
+              <a:bodyPr/>
+              <a:lstStyle/>
+              <a:p>
+                <a:r>
+                  <a:rPr lang="zh-TW" altLang="en-US">
+                    <a:noFill/>
+                  </a:rPr>
+                  <a:t> </a:t>
+                </a:r>
+              </a:p>
+            </p:txBody>
+          </p:sp>
+        </mc:Fallback>
+      </mc:AlternateContent>
+      <mc:AlternateContent xmlns:mc="http://schemas.openxmlformats.org/markup-compatibility/2006">
+        <mc:Choice xmlns:a14="http://schemas.microsoft.com/office/drawing/2010/main" Requires="a14">
+          <p:sp>
+            <p:nvSpPr>
+              <p:cNvPr id="61" name="文字方塊 60">
+                <a:extLst>
+                  <a:ext uri="{FF2B5EF4-FFF2-40B4-BE49-F238E27FC236}">
+                    <a16:creationId xmlns:a16="http://schemas.microsoft.com/office/drawing/2014/main" id="{F9D57B0F-D9B1-4F26-8293-A741864DAF18}"/>
+                  </a:ext>
+                </a:extLst>
+              </p:cNvPr>
+              <p:cNvSpPr txBox="1"/>
+              <p:nvPr/>
+            </p:nvSpPr>
+            <p:spPr>
+              <a:xfrm>
+                <a:off x="6398775" y="4294801"/>
+                <a:ext cx="1133442" cy="369332"/>
+              </a:xfrm>
+              <a:prstGeom prst="rect">
+                <a:avLst/>
+              </a:prstGeom>
+              <a:noFill/>
+            </p:spPr>
+            <p:txBody>
+              <a:bodyPr wrap="square" rtlCol="0">
+                <a:spAutoFit/>
+              </a:bodyPr>
+              <a:lstStyle/>
+              <a:p>
+                <a:pPr/>
+                <a14:m>
+                  <m:oMathPara xmlns:m="http://schemas.openxmlformats.org/officeDocument/2006/math">
+                    <m:oMathParaPr>
+                      <m:jc m:val="centerGroup"/>
+                    </m:oMathParaPr>
+                    <m:oMath xmlns:m="http://schemas.openxmlformats.org/officeDocument/2006/math">
+                      <m:r>
+                        <a:rPr lang="en-US" altLang="zh-TW" i="1">
+                          <a:latin typeface="Cambria Math" panose="02040503050406030204" pitchFamily="18" charset="0"/>
+                        </a:rPr>
+                        <m:t>ℓ=1</m:t>
+                      </m:r>
+                    </m:oMath>
+                  </m:oMathPara>
+                </a14:m>
+                <a:endParaRPr lang="zh-TW" altLang="en-US" dirty="0">
+                  <a:latin typeface="Times New Roman" panose="02020603050405020304" pitchFamily="18" charset="0"/>
+                  <a:cs typeface="Times New Roman" panose="02020603050405020304" pitchFamily="18" charset="0"/>
+                </a:endParaRPr>
+              </a:p>
+            </p:txBody>
+          </p:sp>
+        </mc:Choice>
+        <mc:Fallback>
+          <p:sp>
+            <p:nvSpPr>
+              <p:cNvPr id="61" name="文字方塊 60">
+                <a:extLst>
+                  <a:ext uri="{FF2B5EF4-FFF2-40B4-BE49-F238E27FC236}">
+                    <a16:creationId xmlns:a16="http://schemas.microsoft.com/office/drawing/2014/main" id="{F9D57B0F-D9B1-4F26-8293-A741864DAF18}"/>
+                  </a:ext>
+                </a:extLst>
+              </p:cNvPr>
+              <p:cNvSpPr txBox="1">
+                <a:spLocks noRot="1" noChangeAspect="1" noMove="1" noResize="1" noEditPoints="1" noAdjustHandles="1" noChangeArrowheads="1" noChangeShapeType="1" noTextEdit="1"/>
+              </p:cNvSpPr>
+              <p:nvPr/>
+            </p:nvSpPr>
+            <p:spPr>
+              <a:xfrm>
+                <a:off x="6398775" y="4294801"/>
+                <a:ext cx="1133442" cy="369332"/>
+              </a:xfrm>
+              <a:prstGeom prst="rect">
+                <a:avLst/>
+              </a:prstGeom>
+              <a:blipFill>
+                <a:blip r:embed="rId18"/>
+                <a:stretch>
+                  <a:fillRect/>
+                </a:stretch>
+              </a:blipFill>
+            </p:spPr>
+            <p:txBody>
+              <a:bodyPr/>
+              <a:lstStyle/>
+              <a:p>
+                <a:r>
+                  <a:rPr lang="zh-TW" altLang="en-US">
+                    <a:noFill/>
+                  </a:rPr>
+                  <a:t> </a:t>
+                </a:r>
+              </a:p>
+            </p:txBody>
+          </p:sp>
+        </mc:Fallback>
+      </mc:AlternateContent>
+      <mc:AlternateContent xmlns:mc="http://schemas.openxmlformats.org/markup-compatibility/2006">
+        <mc:Choice xmlns:a14="http://schemas.microsoft.com/office/drawing/2010/main" Requires="a14">
+          <p:sp>
+            <p:nvSpPr>
+              <p:cNvPr id="62" name="文字方塊 61">
+                <a:extLst>
+                  <a:ext uri="{FF2B5EF4-FFF2-40B4-BE49-F238E27FC236}">
+                    <a16:creationId xmlns:a16="http://schemas.microsoft.com/office/drawing/2014/main" id="{AAA00F8E-F9E9-49E8-A5F3-CBB433CACFF6}"/>
+                  </a:ext>
+                </a:extLst>
+              </p:cNvPr>
+              <p:cNvSpPr txBox="1"/>
+              <p:nvPr/>
+            </p:nvSpPr>
+            <p:spPr>
+              <a:xfrm>
+                <a:off x="2826641" y="4294801"/>
+                <a:ext cx="1133442" cy="369332"/>
+              </a:xfrm>
+              <a:prstGeom prst="rect">
+                <a:avLst/>
+              </a:prstGeom>
+              <a:noFill/>
+            </p:spPr>
+            <p:txBody>
+              <a:bodyPr wrap="square" rtlCol="0">
+                <a:spAutoFit/>
+              </a:bodyPr>
+              <a:lstStyle/>
+              <a:p>
+                <a:pPr/>
+                <a14:m>
+                  <m:oMathPara xmlns:m="http://schemas.openxmlformats.org/officeDocument/2006/math">
+                    <m:oMathParaPr>
+                      <m:jc m:val="centerGroup"/>
+                    </m:oMathParaPr>
+                    <m:oMath xmlns:m="http://schemas.openxmlformats.org/officeDocument/2006/math">
+                      <m:r>
+                        <a:rPr lang="en-US" altLang="zh-TW" i="1">
+                          <a:latin typeface="Cambria Math" panose="02040503050406030204" pitchFamily="18" charset="0"/>
+                        </a:rPr>
+                        <m:t>ℓ=−1</m:t>
+                      </m:r>
+                    </m:oMath>
+                  </m:oMathPara>
+                </a14:m>
+                <a:endParaRPr lang="zh-TW" altLang="en-US" dirty="0">
+                  <a:latin typeface="Times New Roman" panose="02020603050405020304" pitchFamily="18" charset="0"/>
+                  <a:cs typeface="Times New Roman" panose="02020603050405020304" pitchFamily="18" charset="0"/>
+                </a:endParaRPr>
+              </a:p>
+            </p:txBody>
+          </p:sp>
+        </mc:Choice>
+        <mc:Fallback>
+          <p:sp>
+            <p:nvSpPr>
+              <p:cNvPr id="62" name="文字方塊 61">
+                <a:extLst>
+                  <a:ext uri="{FF2B5EF4-FFF2-40B4-BE49-F238E27FC236}">
+                    <a16:creationId xmlns:a16="http://schemas.microsoft.com/office/drawing/2014/main" id="{AAA00F8E-F9E9-49E8-A5F3-CBB433CACFF6}"/>
+                  </a:ext>
+                </a:extLst>
+              </p:cNvPr>
+              <p:cNvSpPr txBox="1">
+                <a:spLocks noRot="1" noChangeAspect="1" noMove="1" noResize="1" noEditPoints="1" noAdjustHandles="1" noChangeArrowheads="1" noChangeShapeType="1" noTextEdit="1"/>
+              </p:cNvSpPr>
+              <p:nvPr/>
+            </p:nvSpPr>
+            <p:spPr>
+              <a:xfrm>
+                <a:off x="2826641" y="4294801"/>
+                <a:ext cx="1133442" cy="369332"/>
+              </a:xfrm>
+              <a:prstGeom prst="rect">
+                <a:avLst/>
+              </a:prstGeom>
+              <a:blipFill>
+                <a:blip r:embed="rId19"/>
+                <a:stretch>
+                  <a:fillRect/>
+                </a:stretch>
+              </a:blipFill>
+            </p:spPr>
+            <p:txBody>
+              <a:bodyPr/>
+              <a:lstStyle/>
+              <a:p>
+                <a:r>
+                  <a:rPr lang="zh-TW" altLang="en-US">
+                    <a:noFill/>
+                  </a:rPr>
+                  <a:t> </a:t>
+                </a:r>
+              </a:p>
+            </p:txBody>
+          </p:sp>
+        </mc:Fallback>
+      </mc:AlternateContent>
+      <mc:AlternateContent xmlns:mc="http://schemas.openxmlformats.org/markup-compatibility/2006">
+        <mc:Choice xmlns:a14="http://schemas.microsoft.com/office/drawing/2010/main" Requires="a14">
+          <p:sp>
+            <p:nvSpPr>
+              <p:cNvPr id="63" name="文字方塊 62">
+                <a:extLst>
+                  <a:ext uri="{FF2B5EF4-FFF2-40B4-BE49-F238E27FC236}">
+                    <a16:creationId xmlns:a16="http://schemas.microsoft.com/office/drawing/2014/main" id="{A4D67281-D7F6-40E7-B0DE-82DF71F1DA52}"/>
+                  </a:ext>
+                </a:extLst>
+              </p:cNvPr>
+              <p:cNvSpPr txBox="1"/>
+              <p:nvPr/>
+            </p:nvSpPr>
+            <p:spPr>
+              <a:xfrm>
+                <a:off x="1040575" y="4294801"/>
+                <a:ext cx="1133442" cy="369332"/>
+              </a:xfrm>
+              <a:prstGeom prst="rect">
+                <a:avLst/>
+              </a:prstGeom>
+              <a:noFill/>
+            </p:spPr>
+            <p:txBody>
+              <a:bodyPr wrap="square" rtlCol="0">
+                <a:spAutoFit/>
+              </a:bodyPr>
+              <a:lstStyle/>
+              <a:p>
+                <a:pPr/>
+                <a14:m>
+                  <m:oMathPara xmlns:m="http://schemas.openxmlformats.org/officeDocument/2006/math">
+                    <m:oMathParaPr>
+                      <m:jc m:val="centerGroup"/>
+                    </m:oMathParaPr>
+                    <m:oMath xmlns:m="http://schemas.openxmlformats.org/officeDocument/2006/math">
+                      <m:r>
+                        <a:rPr lang="en-US" altLang="zh-TW" i="1">
+                          <a:latin typeface="Cambria Math" panose="02040503050406030204" pitchFamily="18" charset="0"/>
+                        </a:rPr>
+                        <m:t>ℓ=−2</m:t>
+                      </m:r>
+                    </m:oMath>
+                  </m:oMathPara>
+                </a14:m>
+                <a:endParaRPr lang="zh-TW" altLang="en-US" dirty="0">
+                  <a:latin typeface="Times New Roman" panose="02020603050405020304" pitchFamily="18" charset="0"/>
+                  <a:cs typeface="Times New Roman" panose="02020603050405020304" pitchFamily="18" charset="0"/>
+                </a:endParaRPr>
+              </a:p>
+            </p:txBody>
+          </p:sp>
+        </mc:Choice>
+        <mc:Fallback>
+          <p:sp>
+            <p:nvSpPr>
+              <p:cNvPr id="63" name="文字方塊 62">
+                <a:extLst>
+                  <a:ext uri="{FF2B5EF4-FFF2-40B4-BE49-F238E27FC236}">
+                    <a16:creationId xmlns:a16="http://schemas.microsoft.com/office/drawing/2014/main" id="{A4D67281-D7F6-40E7-B0DE-82DF71F1DA52}"/>
+                  </a:ext>
+                </a:extLst>
+              </p:cNvPr>
+              <p:cNvSpPr txBox="1">
+                <a:spLocks noRot="1" noChangeAspect="1" noMove="1" noResize="1" noEditPoints="1" noAdjustHandles="1" noChangeArrowheads="1" noChangeShapeType="1" noTextEdit="1"/>
+              </p:cNvSpPr>
+              <p:nvPr/>
+            </p:nvSpPr>
+            <p:spPr>
+              <a:xfrm>
+                <a:off x="1040575" y="4294801"/>
+                <a:ext cx="1133442" cy="369332"/>
+              </a:xfrm>
+              <a:prstGeom prst="rect">
+                <a:avLst/>
+              </a:prstGeom>
+              <a:blipFill>
+                <a:blip r:embed="rId20"/>
+                <a:stretch>
+                  <a:fillRect/>
+                </a:stretch>
+              </a:blipFill>
+            </p:spPr>
+            <p:txBody>
+              <a:bodyPr/>
+              <a:lstStyle/>
+              <a:p>
+                <a:r>
+                  <a:rPr lang="zh-TW" altLang="en-US">
+                    <a:noFill/>
+                  </a:rPr>
+                  <a:t> </a:t>
+                </a:r>
+              </a:p>
+            </p:txBody>
+          </p:sp>
+        </mc:Fallback>
+      </mc:AlternateContent>
     </p:spTree>
     <p:extLst>
       <p:ext uri="{BB962C8B-B14F-4D97-AF65-F5344CB8AC3E}">

--- a/Final/Figures/AinRinC.pptx
+++ b/Final/Figures/AinRinC.pptx
@@ -2,12 +2,12 @@
 <file path=ppt/presentation.xml><?xml version="1.0" encoding="utf-8"?>
 <p:presentation xmlns:a="http://schemas.openxmlformats.org/drawingml/2006/main" xmlns:r="http://schemas.openxmlformats.org/officeDocument/2006/relationships" xmlns:p="http://schemas.openxmlformats.org/presentationml/2006/main" saveSubsetFonts="1">
   <p:sldMasterIdLst>
-    <p:sldMasterId id="2147483840" r:id="rId1"/>
+    <p:sldMasterId id="2147483876" r:id="rId1"/>
   </p:sldMasterIdLst>
   <p:sldIdLst>
     <p:sldId id="256" r:id="rId2"/>
   </p:sldIdLst>
-  <p:sldSz cx="9906000" cy="6300788"/>
+  <p:sldSz cx="9906000" cy="4859338"/>
   <p:notesSz cx="6858000" cy="9144000"/>
   <p:defaultTextStyle>
     <a:defPPr>
@@ -141,15 +141,15 @@
         </p:nvSpPr>
         <p:spPr>
           <a:xfrm>
-            <a:off x="1238250" y="1031171"/>
-            <a:ext cx="7429500" cy="2193608"/>
+            <a:off x="1238250" y="795267"/>
+            <a:ext cx="7429500" cy="1691770"/>
           </a:xfrm>
         </p:spPr>
         <p:txBody>
           <a:bodyPr anchor="b"/>
           <a:lstStyle>
             <a:lvl1pPr algn="ctr">
-              <a:defRPr sz="4875"/>
+              <a:defRPr sz="4252"/>
             </a:lvl1pPr>
           </a:lstStyle>
           <a:p>
@@ -173,8 +173,8 @@
         </p:nvSpPr>
         <p:spPr>
           <a:xfrm>
-            <a:off x="1238250" y="3309373"/>
-            <a:ext cx="7429500" cy="1521231"/>
+            <a:off x="1238250" y="2552278"/>
+            <a:ext cx="7429500" cy="1173215"/>
           </a:xfrm>
         </p:spPr>
         <p:txBody>
@@ -182,39 +182,39 @@
           <a:lstStyle>
             <a:lvl1pPr marL="0" indent="0" algn="ctr">
               <a:buNone/>
-              <a:defRPr sz="1950"/>
+              <a:defRPr sz="1701"/>
             </a:lvl1pPr>
-            <a:lvl2pPr marL="371475" indent="0" algn="ctr">
-              <a:buNone/>
-              <a:defRPr sz="1625"/>
+            <a:lvl2pPr marL="323972" indent="0" algn="ctr">
+              <a:buNone/>
+              <a:defRPr sz="1417"/>
             </a:lvl2pPr>
-            <a:lvl3pPr marL="742950" indent="0" algn="ctr">
-              <a:buNone/>
-              <a:defRPr sz="1463"/>
+            <a:lvl3pPr marL="647944" indent="0" algn="ctr">
+              <a:buNone/>
+              <a:defRPr sz="1275"/>
             </a:lvl3pPr>
-            <a:lvl4pPr marL="1114425" indent="0" algn="ctr">
-              <a:buNone/>
-              <a:defRPr sz="1300"/>
+            <a:lvl4pPr marL="971916" indent="0" algn="ctr">
+              <a:buNone/>
+              <a:defRPr sz="1134"/>
             </a:lvl4pPr>
-            <a:lvl5pPr marL="1485900" indent="0" algn="ctr">
-              <a:buNone/>
-              <a:defRPr sz="1300"/>
+            <a:lvl5pPr marL="1295888" indent="0" algn="ctr">
+              <a:buNone/>
+              <a:defRPr sz="1134"/>
             </a:lvl5pPr>
-            <a:lvl6pPr marL="1857375" indent="0" algn="ctr">
-              <a:buNone/>
-              <a:defRPr sz="1300"/>
+            <a:lvl6pPr marL="1619860" indent="0" algn="ctr">
+              <a:buNone/>
+              <a:defRPr sz="1134"/>
             </a:lvl6pPr>
-            <a:lvl7pPr marL="2228850" indent="0" algn="ctr">
-              <a:buNone/>
-              <a:defRPr sz="1300"/>
+            <a:lvl7pPr marL="1943832" indent="0" algn="ctr">
+              <a:buNone/>
+              <a:defRPr sz="1134"/>
             </a:lvl7pPr>
-            <a:lvl8pPr marL="2600325" indent="0" algn="ctr">
-              <a:buNone/>
-              <a:defRPr sz="1300"/>
+            <a:lvl8pPr marL="2267803" indent="0" algn="ctr">
+              <a:buNone/>
+              <a:defRPr sz="1134"/>
             </a:lvl8pPr>
-            <a:lvl9pPr marL="2971800" indent="0" algn="ctr">
-              <a:buNone/>
-              <a:defRPr sz="1300"/>
+            <a:lvl9pPr marL="2591775" indent="0" algn="ctr">
+              <a:buNone/>
+              <a:defRPr sz="1134"/>
             </a:lvl9pPr>
           </a:lstStyle>
           <a:p>
@@ -243,7 +243,7 @@
           <a:p>
             <a:fld id="{4CEE9FC5-A85C-4366-93B5-9F0FBACB00B5}" type="datetimeFigureOut">
               <a:rPr lang="zh-TW" altLang="en-US" smtClean="0"/>
-              <a:t>2026/5/27</a:t>
+              <a:t>2026/6/18</a:t>
             </a:fld>
             <a:endParaRPr lang="zh-TW" altLang="en-US"/>
           </a:p>
@@ -294,7 +294,7 @@
     </p:spTree>
     <p:extLst>
       <p:ext uri="{BB962C8B-B14F-4D97-AF65-F5344CB8AC3E}">
-        <p14:creationId xmlns:p14="http://schemas.microsoft.com/office/powerpoint/2010/main" val="1189323920"/>
+        <p14:creationId xmlns:p14="http://schemas.microsoft.com/office/powerpoint/2010/main" val="4184661297"/>
       </p:ext>
     </p:extLst>
   </p:cSld>
@@ -413,7 +413,7 @@
           <a:p>
             <a:fld id="{4CEE9FC5-A85C-4366-93B5-9F0FBACB00B5}" type="datetimeFigureOut">
               <a:rPr lang="zh-TW" altLang="en-US" smtClean="0"/>
-              <a:t>2026/5/27</a:t>
+              <a:t>2026/6/18</a:t>
             </a:fld>
             <a:endParaRPr lang="zh-TW" altLang="en-US"/>
           </a:p>
@@ -464,7 +464,7 @@
     </p:spTree>
     <p:extLst>
       <p:ext uri="{BB962C8B-B14F-4D97-AF65-F5344CB8AC3E}">
-        <p14:creationId xmlns:p14="http://schemas.microsoft.com/office/powerpoint/2010/main" val="2187475317"/>
+        <p14:creationId xmlns:p14="http://schemas.microsoft.com/office/powerpoint/2010/main" val="956922698"/>
       </p:ext>
     </p:extLst>
   </p:cSld>
@@ -503,8 +503,8 @@
         </p:nvSpPr>
         <p:spPr>
           <a:xfrm>
-            <a:off x="7088981" y="335458"/>
-            <a:ext cx="2135981" cy="5339627"/>
+            <a:off x="7088981" y="258715"/>
+            <a:ext cx="2135981" cy="4118064"/>
           </a:xfrm>
         </p:spPr>
         <p:txBody>
@@ -531,8 +531,8 @@
         </p:nvSpPr>
         <p:spPr>
           <a:xfrm>
-            <a:off x="681037" y="335458"/>
-            <a:ext cx="6284119" cy="5339627"/>
+            <a:off x="681037" y="258715"/>
+            <a:ext cx="6284119" cy="4118064"/>
           </a:xfrm>
         </p:spPr>
         <p:txBody>
@@ -593,7 +593,7 @@
           <a:p>
             <a:fld id="{4CEE9FC5-A85C-4366-93B5-9F0FBACB00B5}" type="datetimeFigureOut">
               <a:rPr lang="zh-TW" altLang="en-US" smtClean="0"/>
-              <a:t>2026/5/27</a:t>
+              <a:t>2026/6/18</a:t>
             </a:fld>
             <a:endParaRPr lang="zh-TW" altLang="en-US"/>
           </a:p>
@@ -644,7 +644,7 @@
     </p:spTree>
     <p:extLst>
       <p:ext uri="{BB962C8B-B14F-4D97-AF65-F5344CB8AC3E}">
-        <p14:creationId xmlns:p14="http://schemas.microsoft.com/office/powerpoint/2010/main" val="2405153409"/>
+        <p14:creationId xmlns:p14="http://schemas.microsoft.com/office/powerpoint/2010/main" val="2128412600"/>
       </p:ext>
     </p:extLst>
   </p:cSld>
@@ -763,7 +763,7 @@
           <a:p>
             <a:fld id="{4CEE9FC5-A85C-4366-93B5-9F0FBACB00B5}" type="datetimeFigureOut">
               <a:rPr lang="zh-TW" altLang="en-US" smtClean="0"/>
-              <a:t>2026/5/27</a:t>
+              <a:t>2026/6/18</a:t>
             </a:fld>
             <a:endParaRPr lang="zh-TW" altLang="en-US"/>
           </a:p>
@@ -814,7 +814,7 @@
     </p:spTree>
     <p:extLst>
       <p:ext uri="{BB962C8B-B14F-4D97-AF65-F5344CB8AC3E}">
-        <p14:creationId xmlns:p14="http://schemas.microsoft.com/office/powerpoint/2010/main" val="4074106288"/>
+        <p14:creationId xmlns:p14="http://schemas.microsoft.com/office/powerpoint/2010/main" val="2018336084"/>
       </p:ext>
     </p:extLst>
   </p:cSld>
@@ -853,15 +853,15 @@
         </p:nvSpPr>
         <p:spPr>
           <a:xfrm>
-            <a:off x="675878" y="1570823"/>
-            <a:ext cx="8543925" cy="2620952"/>
+            <a:off x="675878" y="1211461"/>
+            <a:ext cx="8543925" cy="2021349"/>
           </a:xfrm>
         </p:spPr>
         <p:txBody>
           <a:bodyPr anchor="b"/>
           <a:lstStyle>
             <a:lvl1pPr>
-              <a:defRPr sz="4875"/>
+              <a:defRPr sz="4252"/>
             </a:lvl1pPr>
           </a:lstStyle>
           <a:p>
@@ -885,8 +885,8 @@
         </p:nvSpPr>
         <p:spPr>
           <a:xfrm>
-            <a:off x="675878" y="4216570"/>
-            <a:ext cx="8543925" cy="1378297"/>
+            <a:off x="675878" y="3251933"/>
+            <a:ext cx="8543925" cy="1062980"/>
           </a:xfrm>
         </p:spPr>
         <p:txBody>
@@ -894,7 +894,7 @@
           <a:lstStyle>
             <a:lvl1pPr marL="0" indent="0">
               <a:buNone/>
-              <a:defRPr sz="1950">
+              <a:defRPr sz="1701">
                 <a:solidFill>
                   <a:schemeClr val="tx1">
                     <a:tint val="75000"/>
@@ -902,9 +902,9 @@
                 </a:solidFill>
               </a:defRPr>
             </a:lvl1pPr>
-            <a:lvl2pPr marL="371475" indent="0">
-              <a:buNone/>
-              <a:defRPr sz="1625">
+            <a:lvl2pPr marL="323972" indent="0">
+              <a:buNone/>
+              <a:defRPr sz="1417">
                 <a:solidFill>
                   <a:schemeClr val="tx1">
                     <a:tint val="75000"/>
@@ -912,9 +912,9 @@
                 </a:solidFill>
               </a:defRPr>
             </a:lvl2pPr>
-            <a:lvl3pPr marL="742950" indent="0">
-              <a:buNone/>
-              <a:defRPr sz="1463">
+            <a:lvl3pPr marL="647944" indent="0">
+              <a:buNone/>
+              <a:defRPr sz="1275">
                 <a:solidFill>
                   <a:schemeClr val="tx1">
                     <a:tint val="75000"/>
@@ -922,9 +922,9 @@
                 </a:solidFill>
               </a:defRPr>
             </a:lvl3pPr>
-            <a:lvl4pPr marL="1114425" indent="0">
-              <a:buNone/>
-              <a:defRPr sz="1300">
+            <a:lvl4pPr marL="971916" indent="0">
+              <a:buNone/>
+              <a:defRPr sz="1134">
                 <a:solidFill>
                   <a:schemeClr val="tx1">
                     <a:tint val="75000"/>
@@ -932,9 +932,9 @@
                 </a:solidFill>
               </a:defRPr>
             </a:lvl4pPr>
-            <a:lvl5pPr marL="1485900" indent="0">
-              <a:buNone/>
-              <a:defRPr sz="1300">
+            <a:lvl5pPr marL="1295888" indent="0">
+              <a:buNone/>
+              <a:defRPr sz="1134">
                 <a:solidFill>
                   <a:schemeClr val="tx1">
                     <a:tint val="75000"/>
@@ -942,9 +942,9 @@
                 </a:solidFill>
               </a:defRPr>
             </a:lvl5pPr>
-            <a:lvl6pPr marL="1857375" indent="0">
-              <a:buNone/>
-              <a:defRPr sz="1300">
+            <a:lvl6pPr marL="1619860" indent="0">
+              <a:buNone/>
+              <a:defRPr sz="1134">
                 <a:solidFill>
                   <a:schemeClr val="tx1">
                     <a:tint val="75000"/>
@@ -952,9 +952,9 @@
                 </a:solidFill>
               </a:defRPr>
             </a:lvl6pPr>
-            <a:lvl7pPr marL="2228850" indent="0">
-              <a:buNone/>
-              <a:defRPr sz="1300">
+            <a:lvl7pPr marL="1943832" indent="0">
+              <a:buNone/>
+              <a:defRPr sz="1134">
                 <a:solidFill>
                   <a:schemeClr val="tx1">
                     <a:tint val="75000"/>
@@ -962,9 +962,9 @@
                 </a:solidFill>
               </a:defRPr>
             </a:lvl7pPr>
-            <a:lvl8pPr marL="2600325" indent="0">
-              <a:buNone/>
-              <a:defRPr sz="1300">
+            <a:lvl8pPr marL="2267803" indent="0">
+              <a:buNone/>
+              <a:defRPr sz="1134">
                 <a:solidFill>
                   <a:schemeClr val="tx1">
                     <a:tint val="75000"/>
@@ -972,9 +972,9 @@
                 </a:solidFill>
               </a:defRPr>
             </a:lvl8pPr>
-            <a:lvl9pPr marL="2971800" indent="0">
-              <a:buNone/>
-              <a:defRPr sz="1300">
+            <a:lvl9pPr marL="2591775" indent="0">
+              <a:buNone/>
+              <a:defRPr sz="1134">
                 <a:solidFill>
                   <a:schemeClr val="tx1">
                     <a:tint val="75000"/>
@@ -1009,7 +1009,7 @@
           <a:p>
             <a:fld id="{4CEE9FC5-A85C-4366-93B5-9F0FBACB00B5}" type="datetimeFigureOut">
               <a:rPr lang="zh-TW" altLang="en-US" smtClean="0"/>
-              <a:t>2026/5/27</a:t>
+              <a:t>2026/6/18</a:t>
             </a:fld>
             <a:endParaRPr lang="zh-TW" altLang="en-US"/>
           </a:p>
@@ -1060,7 +1060,7 @@
     </p:spTree>
     <p:extLst>
       <p:ext uri="{BB962C8B-B14F-4D97-AF65-F5344CB8AC3E}">
-        <p14:creationId xmlns:p14="http://schemas.microsoft.com/office/powerpoint/2010/main" val="2908391425"/>
+        <p14:creationId xmlns:p14="http://schemas.microsoft.com/office/powerpoint/2010/main" val="743042071"/>
       </p:ext>
     </p:extLst>
   </p:cSld>
@@ -1122,8 +1122,8 @@
         </p:nvSpPr>
         <p:spPr>
           <a:xfrm>
-            <a:off x="681038" y="1677293"/>
-            <a:ext cx="4210050" cy="3997792"/>
+            <a:off x="681038" y="1293574"/>
+            <a:ext cx="4210050" cy="3083205"/>
           </a:xfrm>
         </p:spPr>
         <p:txBody>
@@ -1179,8 +1179,8 @@
         </p:nvSpPr>
         <p:spPr>
           <a:xfrm>
-            <a:off x="5014913" y="1677293"/>
-            <a:ext cx="4210050" cy="3997792"/>
+            <a:off x="5014913" y="1293574"/>
+            <a:ext cx="4210050" cy="3083205"/>
           </a:xfrm>
         </p:spPr>
         <p:txBody>
@@ -1241,7 +1241,7 @@
           <a:p>
             <a:fld id="{4CEE9FC5-A85C-4366-93B5-9F0FBACB00B5}" type="datetimeFigureOut">
               <a:rPr lang="zh-TW" altLang="en-US" smtClean="0"/>
-              <a:t>2026/5/27</a:t>
+              <a:t>2026/6/18</a:t>
             </a:fld>
             <a:endParaRPr lang="zh-TW" altLang="en-US"/>
           </a:p>
@@ -1292,7 +1292,7 @@
     </p:spTree>
     <p:extLst>
       <p:ext uri="{BB962C8B-B14F-4D97-AF65-F5344CB8AC3E}">
-        <p14:creationId xmlns:p14="http://schemas.microsoft.com/office/powerpoint/2010/main" val="1191181411"/>
+        <p14:creationId xmlns:p14="http://schemas.microsoft.com/office/powerpoint/2010/main" val="863910596"/>
       </p:ext>
     </p:extLst>
   </p:cSld>
@@ -1331,8 +1331,8 @@
         </p:nvSpPr>
         <p:spPr>
           <a:xfrm>
-            <a:off x="682328" y="335459"/>
-            <a:ext cx="8543925" cy="1217861"/>
+            <a:off x="682328" y="258715"/>
+            <a:ext cx="8543925" cy="939247"/>
           </a:xfrm>
         </p:spPr>
         <p:txBody>
@@ -1359,8 +1359,8 @@
         </p:nvSpPr>
         <p:spPr>
           <a:xfrm>
-            <a:off x="682328" y="1544569"/>
-            <a:ext cx="4190702" cy="756969"/>
+            <a:off x="682328" y="1191213"/>
+            <a:ext cx="4190702" cy="583795"/>
           </a:xfrm>
         </p:spPr>
         <p:txBody>
@@ -1368,39 +1368,39 @@
           <a:lstStyle>
             <a:lvl1pPr marL="0" indent="0">
               <a:buNone/>
-              <a:defRPr sz="1950" b="1"/>
+              <a:defRPr sz="1701" b="1"/>
             </a:lvl1pPr>
-            <a:lvl2pPr marL="371475" indent="0">
-              <a:buNone/>
-              <a:defRPr sz="1625" b="1"/>
+            <a:lvl2pPr marL="323972" indent="0">
+              <a:buNone/>
+              <a:defRPr sz="1417" b="1"/>
             </a:lvl2pPr>
-            <a:lvl3pPr marL="742950" indent="0">
-              <a:buNone/>
-              <a:defRPr sz="1463" b="1"/>
+            <a:lvl3pPr marL="647944" indent="0">
+              <a:buNone/>
+              <a:defRPr sz="1275" b="1"/>
             </a:lvl3pPr>
-            <a:lvl4pPr marL="1114425" indent="0">
-              <a:buNone/>
-              <a:defRPr sz="1300" b="1"/>
+            <a:lvl4pPr marL="971916" indent="0">
+              <a:buNone/>
+              <a:defRPr sz="1134" b="1"/>
             </a:lvl4pPr>
-            <a:lvl5pPr marL="1485900" indent="0">
-              <a:buNone/>
-              <a:defRPr sz="1300" b="1"/>
+            <a:lvl5pPr marL="1295888" indent="0">
+              <a:buNone/>
+              <a:defRPr sz="1134" b="1"/>
             </a:lvl5pPr>
-            <a:lvl6pPr marL="1857375" indent="0">
-              <a:buNone/>
-              <a:defRPr sz="1300" b="1"/>
+            <a:lvl6pPr marL="1619860" indent="0">
+              <a:buNone/>
+              <a:defRPr sz="1134" b="1"/>
             </a:lvl6pPr>
-            <a:lvl7pPr marL="2228850" indent="0">
-              <a:buNone/>
-              <a:defRPr sz="1300" b="1"/>
+            <a:lvl7pPr marL="1943832" indent="0">
+              <a:buNone/>
+              <a:defRPr sz="1134" b="1"/>
             </a:lvl7pPr>
-            <a:lvl8pPr marL="2600325" indent="0">
-              <a:buNone/>
-              <a:defRPr sz="1300" b="1"/>
+            <a:lvl8pPr marL="2267803" indent="0">
+              <a:buNone/>
+              <a:defRPr sz="1134" b="1"/>
             </a:lvl8pPr>
-            <a:lvl9pPr marL="2971800" indent="0">
-              <a:buNone/>
-              <a:defRPr sz="1300" b="1"/>
+            <a:lvl9pPr marL="2591775" indent="0">
+              <a:buNone/>
+              <a:defRPr sz="1134" b="1"/>
             </a:lvl9pPr>
           </a:lstStyle>
           <a:p>
@@ -1424,8 +1424,8 @@
         </p:nvSpPr>
         <p:spPr>
           <a:xfrm>
-            <a:off x="682328" y="2301538"/>
-            <a:ext cx="4190702" cy="3385215"/>
+            <a:off x="682328" y="1775008"/>
+            <a:ext cx="4190702" cy="2610770"/>
           </a:xfrm>
         </p:spPr>
         <p:txBody>
@@ -1481,8 +1481,8 @@
         </p:nvSpPr>
         <p:spPr>
           <a:xfrm>
-            <a:off x="5014913" y="1544569"/>
-            <a:ext cx="4211340" cy="756969"/>
+            <a:off x="5014913" y="1191213"/>
+            <a:ext cx="4211340" cy="583795"/>
           </a:xfrm>
         </p:spPr>
         <p:txBody>
@@ -1490,39 +1490,39 @@
           <a:lstStyle>
             <a:lvl1pPr marL="0" indent="0">
               <a:buNone/>
-              <a:defRPr sz="1950" b="1"/>
+              <a:defRPr sz="1701" b="1"/>
             </a:lvl1pPr>
-            <a:lvl2pPr marL="371475" indent="0">
-              <a:buNone/>
-              <a:defRPr sz="1625" b="1"/>
+            <a:lvl2pPr marL="323972" indent="0">
+              <a:buNone/>
+              <a:defRPr sz="1417" b="1"/>
             </a:lvl2pPr>
-            <a:lvl3pPr marL="742950" indent="0">
-              <a:buNone/>
-              <a:defRPr sz="1463" b="1"/>
+            <a:lvl3pPr marL="647944" indent="0">
+              <a:buNone/>
+              <a:defRPr sz="1275" b="1"/>
             </a:lvl3pPr>
-            <a:lvl4pPr marL="1114425" indent="0">
-              <a:buNone/>
-              <a:defRPr sz="1300" b="1"/>
+            <a:lvl4pPr marL="971916" indent="0">
+              <a:buNone/>
+              <a:defRPr sz="1134" b="1"/>
             </a:lvl4pPr>
-            <a:lvl5pPr marL="1485900" indent="0">
-              <a:buNone/>
-              <a:defRPr sz="1300" b="1"/>
+            <a:lvl5pPr marL="1295888" indent="0">
+              <a:buNone/>
+              <a:defRPr sz="1134" b="1"/>
             </a:lvl5pPr>
-            <a:lvl6pPr marL="1857375" indent="0">
-              <a:buNone/>
-              <a:defRPr sz="1300" b="1"/>
+            <a:lvl6pPr marL="1619860" indent="0">
+              <a:buNone/>
+              <a:defRPr sz="1134" b="1"/>
             </a:lvl6pPr>
-            <a:lvl7pPr marL="2228850" indent="0">
-              <a:buNone/>
-              <a:defRPr sz="1300" b="1"/>
+            <a:lvl7pPr marL="1943832" indent="0">
+              <a:buNone/>
+              <a:defRPr sz="1134" b="1"/>
             </a:lvl7pPr>
-            <a:lvl8pPr marL="2600325" indent="0">
-              <a:buNone/>
-              <a:defRPr sz="1300" b="1"/>
+            <a:lvl8pPr marL="2267803" indent="0">
+              <a:buNone/>
+              <a:defRPr sz="1134" b="1"/>
             </a:lvl8pPr>
-            <a:lvl9pPr marL="2971800" indent="0">
-              <a:buNone/>
-              <a:defRPr sz="1300" b="1"/>
+            <a:lvl9pPr marL="2591775" indent="0">
+              <a:buNone/>
+              <a:defRPr sz="1134" b="1"/>
             </a:lvl9pPr>
           </a:lstStyle>
           <a:p>
@@ -1546,8 +1546,8 @@
         </p:nvSpPr>
         <p:spPr>
           <a:xfrm>
-            <a:off x="5014913" y="2301538"/>
-            <a:ext cx="4211340" cy="3385215"/>
+            <a:off x="5014913" y="1775008"/>
+            <a:ext cx="4211340" cy="2610770"/>
           </a:xfrm>
         </p:spPr>
         <p:txBody>
@@ -1608,7 +1608,7 @@
           <a:p>
             <a:fld id="{4CEE9FC5-A85C-4366-93B5-9F0FBACB00B5}" type="datetimeFigureOut">
               <a:rPr lang="zh-TW" altLang="en-US" smtClean="0"/>
-              <a:t>2026/5/27</a:t>
+              <a:t>2026/6/18</a:t>
             </a:fld>
             <a:endParaRPr lang="zh-TW" altLang="en-US"/>
           </a:p>
@@ -1659,7 +1659,7 @@
     </p:spTree>
     <p:extLst>
       <p:ext uri="{BB962C8B-B14F-4D97-AF65-F5344CB8AC3E}">
-        <p14:creationId xmlns:p14="http://schemas.microsoft.com/office/powerpoint/2010/main" val="516729311"/>
+        <p14:creationId xmlns:p14="http://schemas.microsoft.com/office/powerpoint/2010/main" val="3606116378"/>
       </p:ext>
     </p:extLst>
   </p:cSld>
@@ -1726,7 +1726,7 @@
           <a:p>
             <a:fld id="{4CEE9FC5-A85C-4366-93B5-9F0FBACB00B5}" type="datetimeFigureOut">
               <a:rPr lang="zh-TW" altLang="en-US" smtClean="0"/>
-              <a:t>2026/5/27</a:t>
+              <a:t>2026/6/18</a:t>
             </a:fld>
             <a:endParaRPr lang="zh-TW" altLang="en-US"/>
           </a:p>
@@ -1777,7 +1777,7 @@
     </p:spTree>
     <p:extLst>
       <p:ext uri="{BB962C8B-B14F-4D97-AF65-F5344CB8AC3E}">
-        <p14:creationId xmlns:p14="http://schemas.microsoft.com/office/powerpoint/2010/main" val="189146478"/>
+        <p14:creationId xmlns:p14="http://schemas.microsoft.com/office/powerpoint/2010/main" val="132654551"/>
       </p:ext>
     </p:extLst>
   </p:cSld>
@@ -1821,7 +1821,7 @@
           <a:p>
             <a:fld id="{4CEE9FC5-A85C-4366-93B5-9F0FBACB00B5}" type="datetimeFigureOut">
               <a:rPr lang="zh-TW" altLang="en-US" smtClean="0"/>
-              <a:t>2026/5/27</a:t>
+              <a:t>2026/6/18</a:t>
             </a:fld>
             <a:endParaRPr lang="zh-TW" altLang="en-US"/>
           </a:p>
@@ -1872,7 +1872,7 @@
     </p:spTree>
     <p:extLst>
       <p:ext uri="{BB962C8B-B14F-4D97-AF65-F5344CB8AC3E}">
-        <p14:creationId xmlns:p14="http://schemas.microsoft.com/office/powerpoint/2010/main" val="2206496813"/>
+        <p14:creationId xmlns:p14="http://schemas.microsoft.com/office/powerpoint/2010/main" val="1462246043"/>
       </p:ext>
     </p:extLst>
   </p:cSld>
@@ -1911,15 +1911,15 @@
         </p:nvSpPr>
         <p:spPr>
           <a:xfrm>
-            <a:off x="682328" y="420052"/>
-            <a:ext cx="3194943" cy="1470184"/>
+            <a:off x="682328" y="323956"/>
+            <a:ext cx="3194943" cy="1133846"/>
           </a:xfrm>
         </p:spPr>
         <p:txBody>
           <a:bodyPr anchor="b"/>
           <a:lstStyle>
             <a:lvl1pPr>
-              <a:defRPr sz="2600"/>
+              <a:defRPr sz="2268"/>
             </a:lvl1pPr>
           </a:lstStyle>
           <a:p>
@@ -1943,39 +1943,39 @@
         </p:nvSpPr>
         <p:spPr>
           <a:xfrm>
-            <a:off x="4211340" y="907197"/>
-            <a:ext cx="5014913" cy="4477643"/>
+            <a:off x="4211340" y="699655"/>
+            <a:ext cx="5014913" cy="3453280"/>
           </a:xfrm>
         </p:spPr>
         <p:txBody>
           <a:bodyPr/>
           <a:lstStyle>
             <a:lvl1pPr>
-              <a:defRPr sz="2600"/>
+              <a:defRPr sz="2268"/>
             </a:lvl1pPr>
             <a:lvl2pPr>
-              <a:defRPr sz="2275"/>
+              <a:defRPr sz="1984"/>
             </a:lvl2pPr>
             <a:lvl3pPr>
-              <a:defRPr sz="1950"/>
+              <a:defRPr sz="1701"/>
             </a:lvl3pPr>
             <a:lvl4pPr>
-              <a:defRPr sz="1625"/>
+              <a:defRPr sz="1417"/>
             </a:lvl4pPr>
             <a:lvl5pPr>
-              <a:defRPr sz="1625"/>
+              <a:defRPr sz="1417"/>
             </a:lvl5pPr>
             <a:lvl6pPr>
-              <a:defRPr sz="1625"/>
+              <a:defRPr sz="1417"/>
             </a:lvl6pPr>
             <a:lvl7pPr>
-              <a:defRPr sz="1625"/>
+              <a:defRPr sz="1417"/>
             </a:lvl7pPr>
             <a:lvl8pPr>
-              <a:defRPr sz="1625"/>
+              <a:defRPr sz="1417"/>
             </a:lvl8pPr>
             <a:lvl9pPr>
-              <a:defRPr sz="1625"/>
+              <a:defRPr sz="1417"/>
             </a:lvl9pPr>
           </a:lstStyle>
           <a:p>
@@ -2028,8 +2028,8 @@
         </p:nvSpPr>
         <p:spPr>
           <a:xfrm>
-            <a:off x="682328" y="1890236"/>
-            <a:ext cx="3194943" cy="3501897"/>
+            <a:off x="682328" y="1457802"/>
+            <a:ext cx="3194943" cy="2700757"/>
           </a:xfrm>
         </p:spPr>
         <p:txBody>
@@ -2037,39 +2037,39 @@
           <a:lstStyle>
             <a:lvl1pPr marL="0" indent="0">
               <a:buNone/>
-              <a:defRPr sz="1300"/>
+              <a:defRPr sz="1134"/>
             </a:lvl1pPr>
-            <a:lvl2pPr marL="371475" indent="0">
-              <a:buNone/>
-              <a:defRPr sz="1138"/>
+            <a:lvl2pPr marL="323972" indent="0">
+              <a:buNone/>
+              <a:defRPr sz="992"/>
             </a:lvl2pPr>
-            <a:lvl3pPr marL="742950" indent="0">
-              <a:buNone/>
-              <a:defRPr sz="975"/>
+            <a:lvl3pPr marL="647944" indent="0">
+              <a:buNone/>
+              <a:defRPr sz="850"/>
             </a:lvl3pPr>
-            <a:lvl4pPr marL="1114425" indent="0">
-              <a:buNone/>
-              <a:defRPr sz="813"/>
+            <a:lvl4pPr marL="971916" indent="0">
+              <a:buNone/>
+              <a:defRPr sz="709"/>
             </a:lvl4pPr>
-            <a:lvl5pPr marL="1485900" indent="0">
-              <a:buNone/>
-              <a:defRPr sz="813"/>
+            <a:lvl5pPr marL="1295888" indent="0">
+              <a:buNone/>
+              <a:defRPr sz="709"/>
             </a:lvl5pPr>
-            <a:lvl6pPr marL="1857375" indent="0">
-              <a:buNone/>
-              <a:defRPr sz="813"/>
+            <a:lvl6pPr marL="1619860" indent="0">
+              <a:buNone/>
+              <a:defRPr sz="709"/>
             </a:lvl6pPr>
-            <a:lvl7pPr marL="2228850" indent="0">
-              <a:buNone/>
-              <a:defRPr sz="813"/>
+            <a:lvl7pPr marL="1943832" indent="0">
+              <a:buNone/>
+              <a:defRPr sz="709"/>
             </a:lvl7pPr>
-            <a:lvl8pPr marL="2600325" indent="0">
-              <a:buNone/>
-              <a:defRPr sz="813"/>
+            <a:lvl8pPr marL="2267803" indent="0">
+              <a:buNone/>
+              <a:defRPr sz="709"/>
             </a:lvl8pPr>
-            <a:lvl9pPr marL="2971800" indent="0">
-              <a:buNone/>
-              <a:defRPr sz="813"/>
+            <a:lvl9pPr marL="2591775" indent="0">
+              <a:buNone/>
+              <a:defRPr sz="709"/>
             </a:lvl9pPr>
           </a:lstStyle>
           <a:p>
@@ -2098,7 +2098,7 @@
           <a:p>
             <a:fld id="{4CEE9FC5-A85C-4366-93B5-9F0FBACB00B5}" type="datetimeFigureOut">
               <a:rPr lang="zh-TW" altLang="en-US" smtClean="0"/>
-              <a:t>2026/5/27</a:t>
+              <a:t>2026/6/18</a:t>
             </a:fld>
             <a:endParaRPr lang="zh-TW" altLang="en-US"/>
           </a:p>
@@ -2149,7 +2149,7 @@
     </p:spTree>
     <p:extLst>
       <p:ext uri="{BB962C8B-B14F-4D97-AF65-F5344CB8AC3E}">
-        <p14:creationId xmlns:p14="http://schemas.microsoft.com/office/powerpoint/2010/main" val="815807490"/>
+        <p14:creationId xmlns:p14="http://schemas.microsoft.com/office/powerpoint/2010/main" val="1595013623"/>
       </p:ext>
     </p:extLst>
   </p:cSld>
@@ -2188,15 +2188,15 @@
         </p:nvSpPr>
         <p:spPr>
           <a:xfrm>
-            <a:off x="682328" y="420052"/>
-            <a:ext cx="3194943" cy="1470184"/>
+            <a:off x="682328" y="323956"/>
+            <a:ext cx="3194943" cy="1133846"/>
           </a:xfrm>
         </p:spPr>
         <p:txBody>
           <a:bodyPr anchor="b"/>
           <a:lstStyle>
             <a:lvl1pPr>
-              <a:defRPr sz="2600"/>
+              <a:defRPr sz="2268"/>
             </a:lvl1pPr>
           </a:lstStyle>
           <a:p>
@@ -2220,8 +2220,8 @@
         </p:nvSpPr>
         <p:spPr>
           <a:xfrm>
-            <a:off x="4211340" y="907197"/>
-            <a:ext cx="5014913" cy="4477643"/>
+            <a:off x="4211340" y="699655"/>
+            <a:ext cx="5014913" cy="3453280"/>
           </a:xfrm>
         </p:spPr>
         <p:txBody>
@@ -2229,39 +2229,39 @@
           <a:lstStyle>
             <a:lvl1pPr marL="0" indent="0">
               <a:buNone/>
-              <a:defRPr sz="2600"/>
+              <a:defRPr sz="2268"/>
             </a:lvl1pPr>
-            <a:lvl2pPr marL="371475" indent="0">
-              <a:buNone/>
-              <a:defRPr sz="2275"/>
+            <a:lvl2pPr marL="323972" indent="0">
+              <a:buNone/>
+              <a:defRPr sz="1984"/>
             </a:lvl2pPr>
-            <a:lvl3pPr marL="742950" indent="0">
-              <a:buNone/>
-              <a:defRPr sz="1950"/>
+            <a:lvl3pPr marL="647944" indent="0">
+              <a:buNone/>
+              <a:defRPr sz="1701"/>
             </a:lvl3pPr>
-            <a:lvl4pPr marL="1114425" indent="0">
-              <a:buNone/>
-              <a:defRPr sz="1625"/>
+            <a:lvl4pPr marL="971916" indent="0">
+              <a:buNone/>
+              <a:defRPr sz="1417"/>
             </a:lvl4pPr>
-            <a:lvl5pPr marL="1485900" indent="0">
-              <a:buNone/>
-              <a:defRPr sz="1625"/>
+            <a:lvl5pPr marL="1295888" indent="0">
+              <a:buNone/>
+              <a:defRPr sz="1417"/>
             </a:lvl5pPr>
-            <a:lvl6pPr marL="1857375" indent="0">
-              <a:buNone/>
-              <a:defRPr sz="1625"/>
+            <a:lvl6pPr marL="1619860" indent="0">
+              <a:buNone/>
+              <a:defRPr sz="1417"/>
             </a:lvl6pPr>
-            <a:lvl7pPr marL="2228850" indent="0">
-              <a:buNone/>
-              <a:defRPr sz="1625"/>
+            <a:lvl7pPr marL="1943832" indent="0">
+              <a:buNone/>
+              <a:defRPr sz="1417"/>
             </a:lvl7pPr>
-            <a:lvl8pPr marL="2600325" indent="0">
-              <a:buNone/>
-              <a:defRPr sz="1625"/>
+            <a:lvl8pPr marL="2267803" indent="0">
+              <a:buNone/>
+              <a:defRPr sz="1417"/>
             </a:lvl8pPr>
-            <a:lvl9pPr marL="2971800" indent="0">
-              <a:buNone/>
-              <a:defRPr sz="1625"/>
+            <a:lvl9pPr marL="2591775" indent="0">
+              <a:buNone/>
+              <a:defRPr sz="1417"/>
             </a:lvl9pPr>
           </a:lstStyle>
           <a:p>
@@ -2285,8 +2285,8 @@
         </p:nvSpPr>
         <p:spPr>
           <a:xfrm>
-            <a:off x="682328" y="1890236"/>
-            <a:ext cx="3194943" cy="3501897"/>
+            <a:off x="682328" y="1457802"/>
+            <a:ext cx="3194943" cy="2700757"/>
           </a:xfrm>
         </p:spPr>
         <p:txBody>
@@ -2294,39 +2294,39 @@
           <a:lstStyle>
             <a:lvl1pPr marL="0" indent="0">
               <a:buNone/>
-              <a:defRPr sz="1300"/>
+              <a:defRPr sz="1134"/>
             </a:lvl1pPr>
-            <a:lvl2pPr marL="371475" indent="0">
-              <a:buNone/>
-              <a:defRPr sz="1138"/>
+            <a:lvl2pPr marL="323972" indent="0">
+              <a:buNone/>
+              <a:defRPr sz="992"/>
             </a:lvl2pPr>
-            <a:lvl3pPr marL="742950" indent="0">
-              <a:buNone/>
-              <a:defRPr sz="975"/>
+            <a:lvl3pPr marL="647944" indent="0">
+              <a:buNone/>
+              <a:defRPr sz="850"/>
             </a:lvl3pPr>
-            <a:lvl4pPr marL="1114425" indent="0">
-              <a:buNone/>
-              <a:defRPr sz="813"/>
+            <a:lvl4pPr marL="971916" indent="0">
+              <a:buNone/>
+              <a:defRPr sz="709"/>
             </a:lvl4pPr>
-            <a:lvl5pPr marL="1485900" indent="0">
-              <a:buNone/>
-              <a:defRPr sz="813"/>
+            <a:lvl5pPr marL="1295888" indent="0">
+              <a:buNone/>
+              <a:defRPr sz="709"/>
             </a:lvl5pPr>
-            <a:lvl6pPr marL="1857375" indent="0">
-              <a:buNone/>
-              <a:defRPr sz="813"/>
+            <a:lvl6pPr marL="1619860" indent="0">
+              <a:buNone/>
+              <a:defRPr sz="709"/>
             </a:lvl6pPr>
-            <a:lvl7pPr marL="2228850" indent="0">
-              <a:buNone/>
-              <a:defRPr sz="813"/>
+            <a:lvl7pPr marL="1943832" indent="0">
+              <a:buNone/>
+              <a:defRPr sz="709"/>
             </a:lvl7pPr>
-            <a:lvl8pPr marL="2600325" indent="0">
-              <a:buNone/>
-              <a:defRPr sz="813"/>
+            <a:lvl8pPr marL="2267803" indent="0">
+              <a:buNone/>
+              <a:defRPr sz="709"/>
             </a:lvl8pPr>
-            <a:lvl9pPr marL="2971800" indent="0">
-              <a:buNone/>
-              <a:defRPr sz="813"/>
+            <a:lvl9pPr marL="2591775" indent="0">
+              <a:buNone/>
+              <a:defRPr sz="709"/>
             </a:lvl9pPr>
           </a:lstStyle>
           <a:p>
@@ -2355,7 +2355,7 @@
           <a:p>
             <a:fld id="{4CEE9FC5-A85C-4366-93B5-9F0FBACB00B5}" type="datetimeFigureOut">
               <a:rPr lang="zh-TW" altLang="en-US" smtClean="0"/>
-              <a:t>2026/5/27</a:t>
+              <a:t>2026/6/18</a:t>
             </a:fld>
             <a:endParaRPr lang="zh-TW" altLang="en-US"/>
           </a:p>
@@ -2406,7 +2406,7 @@
     </p:spTree>
     <p:extLst>
       <p:ext uri="{BB962C8B-B14F-4D97-AF65-F5344CB8AC3E}">
-        <p14:creationId xmlns:p14="http://schemas.microsoft.com/office/powerpoint/2010/main" val="1620912418"/>
+        <p14:creationId xmlns:p14="http://schemas.microsoft.com/office/powerpoint/2010/main" val="1605680756"/>
       </p:ext>
     </p:extLst>
   </p:cSld>
@@ -2450,8 +2450,8 @@
         </p:nvSpPr>
         <p:spPr>
           <a:xfrm>
-            <a:off x="681038" y="335459"/>
-            <a:ext cx="8543925" cy="1217861"/>
+            <a:off x="681038" y="258715"/>
+            <a:ext cx="8543925" cy="939247"/>
           </a:xfrm>
           <a:prstGeom prst="rect">
             <a:avLst/>
@@ -2483,8 +2483,8 @@
         </p:nvSpPr>
         <p:spPr>
           <a:xfrm>
-            <a:off x="681038" y="1677293"/>
-            <a:ext cx="8543925" cy="3997792"/>
+            <a:off x="681038" y="1293574"/>
+            <a:ext cx="8543925" cy="3083205"/>
           </a:xfrm>
           <a:prstGeom prst="rect">
             <a:avLst/>
@@ -2545,8 +2545,8 @@
         </p:nvSpPr>
         <p:spPr>
           <a:xfrm>
-            <a:off x="681038" y="5839897"/>
-            <a:ext cx="2228850" cy="335459"/>
+            <a:off x="681038" y="4503887"/>
+            <a:ext cx="2228850" cy="258715"/>
           </a:xfrm>
           <a:prstGeom prst="rect">
             <a:avLst/>
@@ -2556,7 +2556,7 @@
           <a:bodyPr vert="horz" lIns="91440" tIns="45720" rIns="91440" bIns="45720" rtlCol="0" anchor="ctr"/>
           <a:lstStyle>
             <a:lvl1pPr algn="l">
-              <a:defRPr sz="975">
+              <a:defRPr sz="850">
                 <a:solidFill>
                   <a:schemeClr val="tx1">
                     <a:tint val="75000"/>
@@ -2568,7 +2568,7 @@
           <a:p>
             <a:fld id="{4CEE9FC5-A85C-4366-93B5-9F0FBACB00B5}" type="datetimeFigureOut">
               <a:rPr lang="zh-TW" altLang="en-US" smtClean="0"/>
-              <a:t>2026/5/27</a:t>
+              <a:t>2026/6/18</a:t>
             </a:fld>
             <a:endParaRPr lang="zh-TW" altLang="en-US"/>
           </a:p>
@@ -2586,8 +2586,8 @@
         </p:nvSpPr>
         <p:spPr>
           <a:xfrm>
-            <a:off x="3281363" y="5839897"/>
-            <a:ext cx="3343275" cy="335459"/>
+            <a:off x="3281363" y="4503887"/>
+            <a:ext cx="3343275" cy="258715"/>
           </a:xfrm>
           <a:prstGeom prst="rect">
             <a:avLst/>
@@ -2597,7 +2597,7 @@
           <a:bodyPr vert="horz" lIns="91440" tIns="45720" rIns="91440" bIns="45720" rtlCol="0" anchor="ctr"/>
           <a:lstStyle>
             <a:lvl1pPr algn="ctr">
-              <a:defRPr sz="975">
+              <a:defRPr sz="850">
                 <a:solidFill>
                   <a:schemeClr val="tx1">
                     <a:tint val="75000"/>
@@ -2623,8 +2623,8 @@
         </p:nvSpPr>
         <p:spPr>
           <a:xfrm>
-            <a:off x="6996113" y="5839897"/>
-            <a:ext cx="2228850" cy="335459"/>
+            <a:off x="6996113" y="4503887"/>
+            <a:ext cx="2228850" cy="258715"/>
           </a:xfrm>
           <a:prstGeom prst="rect">
             <a:avLst/>
@@ -2634,7 +2634,7 @@
           <a:bodyPr vert="horz" lIns="91440" tIns="45720" rIns="91440" bIns="45720" rtlCol="0" anchor="ctr"/>
           <a:lstStyle>
             <a:lvl1pPr algn="r">
-              <a:defRPr sz="975">
+              <a:defRPr sz="850">
                 <a:solidFill>
                   <a:schemeClr val="tx1">
                     <a:tint val="75000"/>
@@ -2655,27 +2655,27 @@
     </p:spTree>
     <p:extLst>
       <p:ext uri="{BB962C8B-B14F-4D97-AF65-F5344CB8AC3E}">
-        <p14:creationId xmlns:p14="http://schemas.microsoft.com/office/powerpoint/2010/main" val="4032741947"/>
+        <p14:creationId xmlns:p14="http://schemas.microsoft.com/office/powerpoint/2010/main" val="1875366972"/>
       </p:ext>
     </p:extLst>
   </p:cSld>
   <p:clrMap bg1="lt1" tx1="dk1" bg2="lt2" tx2="dk2" accent1="accent1" accent2="accent2" accent3="accent3" accent4="accent4" accent5="accent5" accent6="accent6" hlink="hlink" folHlink="folHlink"/>
   <p:sldLayoutIdLst>
-    <p:sldLayoutId id="2147483841" r:id="rId1"/>
-    <p:sldLayoutId id="2147483842" r:id="rId2"/>
-    <p:sldLayoutId id="2147483843" r:id="rId3"/>
-    <p:sldLayoutId id="2147483844" r:id="rId4"/>
-    <p:sldLayoutId id="2147483845" r:id="rId5"/>
-    <p:sldLayoutId id="2147483846" r:id="rId6"/>
-    <p:sldLayoutId id="2147483847" r:id="rId7"/>
-    <p:sldLayoutId id="2147483848" r:id="rId8"/>
-    <p:sldLayoutId id="2147483849" r:id="rId9"/>
-    <p:sldLayoutId id="2147483850" r:id="rId10"/>
-    <p:sldLayoutId id="2147483851" r:id="rId11"/>
+    <p:sldLayoutId id="2147483877" r:id="rId1"/>
+    <p:sldLayoutId id="2147483878" r:id="rId2"/>
+    <p:sldLayoutId id="2147483879" r:id="rId3"/>
+    <p:sldLayoutId id="2147483880" r:id="rId4"/>
+    <p:sldLayoutId id="2147483881" r:id="rId5"/>
+    <p:sldLayoutId id="2147483882" r:id="rId6"/>
+    <p:sldLayoutId id="2147483883" r:id="rId7"/>
+    <p:sldLayoutId id="2147483884" r:id="rId8"/>
+    <p:sldLayoutId id="2147483885" r:id="rId9"/>
+    <p:sldLayoutId id="2147483886" r:id="rId10"/>
+    <p:sldLayoutId id="2147483887" r:id="rId11"/>
   </p:sldLayoutIdLst>
   <p:txStyles>
     <p:titleStyle>
-      <a:lvl1pPr algn="l" defTabSz="742950" rtl="0" eaLnBrk="1" latinLnBrk="0" hangingPunct="1">
+      <a:lvl1pPr algn="l" defTabSz="647944" rtl="0" eaLnBrk="1" latinLnBrk="0" hangingPunct="1">
         <a:lnSpc>
           <a:spcPct val="90000"/>
         </a:lnSpc>
@@ -2683,7 +2683,7 @@
           <a:spcPct val="0"/>
         </a:spcBef>
         <a:buNone/>
-        <a:defRPr sz="3575" kern="1200">
+        <a:defRPr sz="3118" kern="1200">
           <a:solidFill>
             <a:schemeClr val="tx1"/>
           </a:solidFill>
@@ -2694,16 +2694,16 @@
       </a:lvl1pPr>
     </p:titleStyle>
     <p:bodyStyle>
-      <a:lvl1pPr marL="185738" indent="-185738" algn="l" defTabSz="742950" rtl="0" eaLnBrk="1" latinLnBrk="0" hangingPunct="1">
+      <a:lvl1pPr marL="161986" indent="-161986" algn="l" defTabSz="647944" rtl="0" eaLnBrk="1" latinLnBrk="0" hangingPunct="1">
         <a:lnSpc>
           <a:spcPct val="90000"/>
         </a:lnSpc>
         <a:spcBef>
-          <a:spcPts val="813"/>
+          <a:spcPts val="709"/>
         </a:spcBef>
         <a:buFont typeface="Arial" panose="020B0604020202020204" pitchFamily="34" charset="0"/>
         <a:buChar char="•"/>
-        <a:defRPr sz="2275" kern="1200">
+        <a:defRPr sz="1984" kern="1200">
           <a:solidFill>
             <a:schemeClr val="tx1"/>
           </a:solidFill>
@@ -2712,16 +2712,16 @@
           <a:cs typeface="+mn-cs"/>
         </a:defRPr>
       </a:lvl1pPr>
-      <a:lvl2pPr marL="557213" indent="-185738" algn="l" defTabSz="742950" rtl="0" eaLnBrk="1" latinLnBrk="0" hangingPunct="1">
+      <a:lvl2pPr marL="485958" indent="-161986" algn="l" defTabSz="647944" rtl="0" eaLnBrk="1" latinLnBrk="0" hangingPunct="1">
         <a:lnSpc>
           <a:spcPct val="90000"/>
         </a:lnSpc>
         <a:spcBef>
-          <a:spcPts val="406"/>
+          <a:spcPts val="354"/>
         </a:spcBef>
         <a:buFont typeface="Arial" panose="020B0604020202020204" pitchFamily="34" charset="0"/>
         <a:buChar char="•"/>
-        <a:defRPr sz="1950" kern="1200">
+        <a:defRPr sz="1701" kern="1200">
           <a:solidFill>
             <a:schemeClr val="tx1"/>
           </a:solidFill>
@@ -2730,16 +2730,16 @@
           <a:cs typeface="+mn-cs"/>
         </a:defRPr>
       </a:lvl2pPr>
-      <a:lvl3pPr marL="928688" indent="-185738" algn="l" defTabSz="742950" rtl="0" eaLnBrk="1" latinLnBrk="0" hangingPunct="1">
+      <a:lvl3pPr marL="809930" indent="-161986" algn="l" defTabSz="647944" rtl="0" eaLnBrk="1" latinLnBrk="0" hangingPunct="1">
         <a:lnSpc>
           <a:spcPct val="90000"/>
         </a:lnSpc>
         <a:spcBef>
-          <a:spcPts val="406"/>
+          <a:spcPts val="354"/>
         </a:spcBef>
         <a:buFont typeface="Arial" panose="020B0604020202020204" pitchFamily="34" charset="0"/>
         <a:buChar char="•"/>
-        <a:defRPr sz="1625" kern="1200">
+        <a:defRPr sz="1417" kern="1200">
           <a:solidFill>
             <a:schemeClr val="tx1"/>
           </a:solidFill>
@@ -2748,16 +2748,16 @@
           <a:cs typeface="+mn-cs"/>
         </a:defRPr>
       </a:lvl3pPr>
-      <a:lvl4pPr marL="1300163" indent="-185738" algn="l" defTabSz="742950" rtl="0" eaLnBrk="1" latinLnBrk="0" hangingPunct="1">
+      <a:lvl4pPr marL="1133902" indent="-161986" algn="l" defTabSz="647944" rtl="0" eaLnBrk="1" latinLnBrk="0" hangingPunct="1">
         <a:lnSpc>
           <a:spcPct val="90000"/>
         </a:lnSpc>
         <a:spcBef>
-          <a:spcPts val="406"/>
+          <a:spcPts val="354"/>
         </a:spcBef>
         <a:buFont typeface="Arial" panose="020B0604020202020204" pitchFamily="34" charset="0"/>
         <a:buChar char="•"/>
-        <a:defRPr sz="1463" kern="1200">
+        <a:defRPr sz="1275" kern="1200">
           <a:solidFill>
             <a:schemeClr val="tx1"/>
           </a:solidFill>
@@ -2766,16 +2766,16 @@
           <a:cs typeface="+mn-cs"/>
         </a:defRPr>
       </a:lvl4pPr>
-      <a:lvl5pPr marL="1671638" indent="-185738" algn="l" defTabSz="742950" rtl="0" eaLnBrk="1" latinLnBrk="0" hangingPunct="1">
+      <a:lvl5pPr marL="1457874" indent="-161986" algn="l" defTabSz="647944" rtl="0" eaLnBrk="1" latinLnBrk="0" hangingPunct="1">
         <a:lnSpc>
           <a:spcPct val="90000"/>
         </a:lnSpc>
         <a:spcBef>
-          <a:spcPts val="406"/>
+          <a:spcPts val="354"/>
         </a:spcBef>
         <a:buFont typeface="Arial" panose="020B0604020202020204" pitchFamily="34" charset="0"/>
         <a:buChar char="•"/>
-        <a:defRPr sz="1463" kern="1200">
+        <a:defRPr sz="1275" kern="1200">
           <a:solidFill>
             <a:schemeClr val="tx1"/>
           </a:solidFill>
@@ -2784,16 +2784,16 @@
           <a:cs typeface="+mn-cs"/>
         </a:defRPr>
       </a:lvl5pPr>
-      <a:lvl6pPr marL="2043113" indent="-185738" algn="l" defTabSz="742950" rtl="0" eaLnBrk="1" latinLnBrk="0" hangingPunct="1">
+      <a:lvl6pPr marL="1781846" indent="-161986" algn="l" defTabSz="647944" rtl="0" eaLnBrk="1" latinLnBrk="0" hangingPunct="1">
         <a:lnSpc>
           <a:spcPct val="90000"/>
         </a:lnSpc>
         <a:spcBef>
-          <a:spcPts val="406"/>
+          <a:spcPts val="354"/>
         </a:spcBef>
         <a:buFont typeface="Arial" panose="020B0604020202020204" pitchFamily="34" charset="0"/>
         <a:buChar char="•"/>
-        <a:defRPr sz="1463" kern="1200">
+        <a:defRPr sz="1275" kern="1200">
           <a:solidFill>
             <a:schemeClr val="tx1"/>
           </a:solidFill>
@@ -2802,16 +2802,16 @@
           <a:cs typeface="+mn-cs"/>
         </a:defRPr>
       </a:lvl6pPr>
-      <a:lvl7pPr marL="2414588" indent="-185738" algn="l" defTabSz="742950" rtl="0" eaLnBrk="1" latinLnBrk="0" hangingPunct="1">
+      <a:lvl7pPr marL="2105817" indent="-161986" algn="l" defTabSz="647944" rtl="0" eaLnBrk="1" latinLnBrk="0" hangingPunct="1">
         <a:lnSpc>
           <a:spcPct val="90000"/>
         </a:lnSpc>
         <a:spcBef>
-          <a:spcPts val="406"/>
+          <a:spcPts val="354"/>
         </a:spcBef>
         <a:buFont typeface="Arial" panose="020B0604020202020204" pitchFamily="34" charset="0"/>
         <a:buChar char="•"/>
-        <a:defRPr sz="1463" kern="1200">
+        <a:defRPr sz="1275" kern="1200">
           <a:solidFill>
             <a:schemeClr val="tx1"/>
           </a:solidFill>
@@ -2820,16 +2820,16 @@
           <a:cs typeface="+mn-cs"/>
         </a:defRPr>
       </a:lvl7pPr>
-      <a:lvl8pPr marL="2786063" indent="-185738" algn="l" defTabSz="742950" rtl="0" eaLnBrk="1" latinLnBrk="0" hangingPunct="1">
+      <a:lvl8pPr marL="2429789" indent="-161986" algn="l" defTabSz="647944" rtl="0" eaLnBrk="1" latinLnBrk="0" hangingPunct="1">
         <a:lnSpc>
           <a:spcPct val="90000"/>
         </a:lnSpc>
         <a:spcBef>
-          <a:spcPts val="406"/>
+          <a:spcPts val="354"/>
         </a:spcBef>
         <a:buFont typeface="Arial" panose="020B0604020202020204" pitchFamily="34" charset="0"/>
         <a:buChar char="•"/>
-        <a:defRPr sz="1463" kern="1200">
+        <a:defRPr sz="1275" kern="1200">
           <a:solidFill>
             <a:schemeClr val="tx1"/>
           </a:solidFill>
@@ -2838,16 +2838,16 @@
           <a:cs typeface="+mn-cs"/>
         </a:defRPr>
       </a:lvl8pPr>
-      <a:lvl9pPr marL="3157538" indent="-185738" algn="l" defTabSz="742950" rtl="0" eaLnBrk="1" latinLnBrk="0" hangingPunct="1">
+      <a:lvl9pPr marL="2753761" indent="-161986" algn="l" defTabSz="647944" rtl="0" eaLnBrk="1" latinLnBrk="0" hangingPunct="1">
         <a:lnSpc>
           <a:spcPct val="90000"/>
         </a:lnSpc>
         <a:spcBef>
-          <a:spcPts val="406"/>
+          <a:spcPts val="354"/>
         </a:spcBef>
         <a:buFont typeface="Arial" panose="020B0604020202020204" pitchFamily="34" charset="0"/>
         <a:buChar char="•"/>
-        <a:defRPr sz="1463" kern="1200">
+        <a:defRPr sz="1275" kern="1200">
           <a:solidFill>
             <a:schemeClr val="tx1"/>
           </a:solidFill>
@@ -2861,8 +2861,8 @@
       <a:defPPr>
         <a:defRPr lang="en-US"/>
       </a:defPPr>
-      <a:lvl1pPr marL="0" algn="l" defTabSz="742950" rtl="0" eaLnBrk="1" latinLnBrk="0" hangingPunct="1">
-        <a:defRPr sz="1463" kern="1200">
+      <a:lvl1pPr marL="0" algn="l" defTabSz="647944" rtl="0" eaLnBrk="1" latinLnBrk="0" hangingPunct="1">
+        <a:defRPr sz="1275" kern="1200">
           <a:solidFill>
             <a:schemeClr val="tx1"/>
           </a:solidFill>
@@ -2871,8 +2871,8 @@
           <a:cs typeface="+mn-cs"/>
         </a:defRPr>
       </a:lvl1pPr>
-      <a:lvl2pPr marL="371475" algn="l" defTabSz="742950" rtl="0" eaLnBrk="1" latinLnBrk="0" hangingPunct="1">
-        <a:defRPr sz="1463" kern="1200">
+      <a:lvl2pPr marL="323972" algn="l" defTabSz="647944" rtl="0" eaLnBrk="1" latinLnBrk="0" hangingPunct="1">
+        <a:defRPr sz="1275" kern="1200">
           <a:solidFill>
             <a:schemeClr val="tx1"/>
           </a:solidFill>
@@ -2881,8 +2881,8 @@
           <a:cs typeface="+mn-cs"/>
         </a:defRPr>
       </a:lvl2pPr>
-      <a:lvl3pPr marL="742950" algn="l" defTabSz="742950" rtl="0" eaLnBrk="1" latinLnBrk="0" hangingPunct="1">
-        <a:defRPr sz="1463" kern="1200">
+      <a:lvl3pPr marL="647944" algn="l" defTabSz="647944" rtl="0" eaLnBrk="1" latinLnBrk="0" hangingPunct="1">
+        <a:defRPr sz="1275" kern="1200">
           <a:solidFill>
             <a:schemeClr val="tx1"/>
           </a:solidFill>
@@ -2891,8 +2891,8 @@
           <a:cs typeface="+mn-cs"/>
         </a:defRPr>
       </a:lvl3pPr>
-      <a:lvl4pPr marL="1114425" algn="l" defTabSz="742950" rtl="0" eaLnBrk="1" latinLnBrk="0" hangingPunct="1">
-        <a:defRPr sz="1463" kern="1200">
+      <a:lvl4pPr marL="971916" algn="l" defTabSz="647944" rtl="0" eaLnBrk="1" latinLnBrk="0" hangingPunct="1">
+        <a:defRPr sz="1275" kern="1200">
           <a:solidFill>
             <a:schemeClr val="tx1"/>
           </a:solidFill>
@@ -2901,8 +2901,8 @@
           <a:cs typeface="+mn-cs"/>
         </a:defRPr>
       </a:lvl4pPr>
-      <a:lvl5pPr marL="1485900" algn="l" defTabSz="742950" rtl="0" eaLnBrk="1" latinLnBrk="0" hangingPunct="1">
-        <a:defRPr sz="1463" kern="1200">
+      <a:lvl5pPr marL="1295888" algn="l" defTabSz="647944" rtl="0" eaLnBrk="1" latinLnBrk="0" hangingPunct="1">
+        <a:defRPr sz="1275" kern="1200">
           <a:solidFill>
             <a:schemeClr val="tx1"/>
           </a:solidFill>
@@ -2911,8 +2911,8 @@
           <a:cs typeface="+mn-cs"/>
         </a:defRPr>
       </a:lvl5pPr>
-      <a:lvl6pPr marL="1857375" algn="l" defTabSz="742950" rtl="0" eaLnBrk="1" latinLnBrk="0" hangingPunct="1">
-        <a:defRPr sz="1463" kern="1200">
+      <a:lvl6pPr marL="1619860" algn="l" defTabSz="647944" rtl="0" eaLnBrk="1" latinLnBrk="0" hangingPunct="1">
+        <a:defRPr sz="1275" kern="1200">
           <a:solidFill>
             <a:schemeClr val="tx1"/>
           </a:solidFill>
@@ -2921,8 +2921,8 @@
           <a:cs typeface="+mn-cs"/>
         </a:defRPr>
       </a:lvl6pPr>
-      <a:lvl7pPr marL="2228850" algn="l" defTabSz="742950" rtl="0" eaLnBrk="1" latinLnBrk="0" hangingPunct="1">
-        <a:defRPr sz="1463" kern="1200">
+      <a:lvl7pPr marL="1943832" algn="l" defTabSz="647944" rtl="0" eaLnBrk="1" latinLnBrk="0" hangingPunct="1">
+        <a:defRPr sz="1275" kern="1200">
           <a:solidFill>
             <a:schemeClr val="tx1"/>
           </a:solidFill>
@@ -2931,8 +2931,8 @@
           <a:cs typeface="+mn-cs"/>
         </a:defRPr>
       </a:lvl7pPr>
-      <a:lvl8pPr marL="2600325" algn="l" defTabSz="742950" rtl="0" eaLnBrk="1" latinLnBrk="0" hangingPunct="1">
-        <a:defRPr sz="1463" kern="1200">
+      <a:lvl8pPr marL="2267803" algn="l" defTabSz="647944" rtl="0" eaLnBrk="1" latinLnBrk="0" hangingPunct="1">
+        <a:defRPr sz="1275" kern="1200">
           <a:solidFill>
             <a:schemeClr val="tx1"/>
           </a:solidFill>
@@ -2941,8 +2941,8 @@
           <a:cs typeface="+mn-cs"/>
         </a:defRPr>
       </a:lvl8pPr>
-      <a:lvl9pPr marL="2971800" algn="l" defTabSz="742950" rtl="0" eaLnBrk="1" latinLnBrk="0" hangingPunct="1">
-        <a:defRPr sz="1463" kern="1200">
+      <a:lvl9pPr marL="2591775" algn="l" defTabSz="647944" rtl="0" eaLnBrk="1" latinLnBrk="0" hangingPunct="1">
+        <a:defRPr sz="1275" kern="1200">
           <a:solidFill>
             <a:schemeClr val="tx1"/>
           </a:solidFill>
@@ -2973,614 +2973,12 @@
           <a:chExt cx="0" cy="0"/>
         </a:xfrm>
       </p:grpSpPr>
-      <p:sp>
-        <p:nvSpPr>
-          <p:cNvPr id="29" name="矩形: 圓角 28">
+      <p:grpSp>
+        <p:nvGrpSpPr>
+          <p:cNvPr id="3" name="群組 2">
             <a:extLst>
               <a:ext uri="{FF2B5EF4-FFF2-40B4-BE49-F238E27FC236}">
-                <a16:creationId xmlns:a16="http://schemas.microsoft.com/office/drawing/2014/main" id="{12A747F0-4A58-4A15-AB9D-2DB0BA632A37}"/>
-              </a:ext>
-            </a:extLst>
-          </p:cNvPr>
-          <p:cNvSpPr/>
-          <p:nvPr/>
-        </p:nvSpPr>
-        <p:spPr>
-          <a:xfrm>
-            <a:off x="25400" y="4136038"/>
-            <a:ext cx="9842500" cy="2085648"/>
-          </a:xfrm>
-          <a:prstGeom prst="roundRect">
-            <a:avLst>
-              <a:gd name="adj" fmla="val 5706"/>
-            </a:avLst>
-          </a:prstGeom>
-          <a:solidFill>
-            <a:schemeClr val="bg1">
-              <a:lumMod val="95000"/>
-            </a:schemeClr>
-          </a:solidFill>
-          <a:ln w="19050">
-            <a:solidFill>
-              <a:schemeClr val="tx1">
-                <a:lumMod val="50000"/>
-                <a:lumOff val="50000"/>
-              </a:schemeClr>
-            </a:solidFill>
-          </a:ln>
-        </p:spPr>
-        <p:style>
-          <a:lnRef idx="2">
-            <a:schemeClr val="accent1">
-              <a:shade val="50000"/>
-            </a:schemeClr>
-          </a:lnRef>
-          <a:fillRef idx="1">
-            <a:schemeClr val="accent1"/>
-          </a:fillRef>
-          <a:effectRef idx="0">
-            <a:schemeClr val="accent1"/>
-          </a:effectRef>
-          <a:fontRef idx="minor">
-            <a:schemeClr val="lt1"/>
-          </a:fontRef>
-        </p:style>
-        <p:txBody>
-          <a:bodyPr rot="0" spcFirstLastPara="0" vertOverflow="overflow" horzOverflow="overflow" vert="horz" wrap="square" lIns="91440" tIns="45720" rIns="91440" bIns="45720" numCol="1" spcCol="0" rtlCol="0" fromWordArt="0" anchor="ctr" anchorCtr="0" forceAA="0" compatLnSpc="1">
-            <a:prstTxWarp prst="textNoShape">
-              <a:avLst/>
-            </a:prstTxWarp>
-            <a:noAutofit/>
-          </a:bodyPr>
-          <a:lstStyle/>
-          <a:p>
-            <a:pPr algn="ctr"/>
-            <a:endParaRPr lang="zh-TW" altLang="en-US">
-              <a:latin typeface="Times New Roman" panose="02020603050405020304" pitchFamily="18" charset="0"/>
-              <a:cs typeface="Times New Roman" panose="02020603050405020304" pitchFamily="18" charset="0"/>
-            </a:endParaRPr>
-          </a:p>
-        </p:txBody>
-      </p:sp>
-      <p:sp>
-        <p:nvSpPr>
-          <p:cNvPr id="30" name="矩形: 圓角 29">
-            <a:extLst>
-              <a:ext uri="{FF2B5EF4-FFF2-40B4-BE49-F238E27FC236}">
-                <a16:creationId xmlns:a16="http://schemas.microsoft.com/office/drawing/2014/main" id="{B93E4F7D-C584-48A1-8746-F7F6E909DF40}"/>
-              </a:ext>
-            </a:extLst>
-          </p:cNvPr>
-          <p:cNvSpPr/>
-          <p:nvPr/>
-        </p:nvSpPr>
-        <p:spPr>
-          <a:xfrm>
-            <a:off x="20504" y="1586945"/>
-            <a:ext cx="9842500" cy="2085648"/>
-          </a:xfrm>
-          <a:prstGeom prst="roundRect">
-            <a:avLst>
-              <a:gd name="adj" fmla="val 6163"/>
-            </a:avLst>
-          </a:prstGeom>
-          <a:solidFill>
-            <a:schemeClr val="bg1">
-              <a:lumMod val="95000"/>
-            </a:schemeClr>
-          </a:solidFill>
-          <a:ln w="19050">
-            <a:solidFill>
-              <a:schemeClr val="tx1">
-                <a:lumMod val="50000"/>
-                <a:lumOff val="50000"/>
-              </a:schemeClr>
-            </a:solidFill>
-          </a:ln>
-        </p:spPr>
-        <p:style>
-          <a:lnRef idx="2">
-            <a:schemeClr val="accent1">
-              <a:shade val="50000"/>
-            </a:schemeClr>
-          </a:lnRef>
-          <a:fillRef idx="1">
-            <a:schemeClr val="accent1"/>
-          </a:fillRef>
-          <a:effectRef idx="0">
-            <a:schemeClr val="accent1"/>
-          </a:effectRef>
-          <a:fontRef idx="minor">
-            <a:schemeClr val="lt1"/>
-          </a:fontRef>
-        </p:style>
-        <p:txBody>
-          <a:bodyPr rot="0" spcFirstLastPara="0" vertOverflow="overflow" horzOverflow="overflow" vert="horz" wrap="square" lIns="91440" tIns="45720" rIns="91440" bIns="45720" numCol="1" spcCol="0" rtlCol="0" fromWordArt="0" anchor="ctr" anchorCtr="0" forceAA="0" compatLnSpc="1">
-            <a:prstTxWarp prst="textNoShape">
-              <a:avLst/>
-            </a:prstTxWarp>
-            <a:noAutofit/>
-          </a:bodyPr>
-          <a:lstStyle/>
-          <a:p>
-            <a:pPr algn="ctr"/>
-            <a:endParaRPr lang="zh-TW" altLang="en-US">
-              <a:latin typeface="Times New Roman" panose="02020603050405020304" pitchFamily="18" charset="0"/>
-              <a:cs typeface="Times New Roman" panose="02020603050405020304" pitchFamily="18" charset="0"/>
-            </a:endParaRPr>
-          </a:p>
-        </p:txBody>
-      </p:sp>
-      <p:pic>
-        <p:nvPicPr>
-          <p:cNvPr id="31" name="圖片 30">
-            <a:extLst>
-              <a:ext uri="{FF2B5EF4-FFF2-40B4-BE49-F238E27FC236}">
-                <a16:creationId xmlns:a16="http://schemas.microsoft.com/office/drawing/2014/main" id="{0A20F05F-DE5D-4B95-9A04-BE488B56881C}"/>
-              </a:ext>
-            </a:extLst>
-          </p:cNvPr>
-          <p:cNvPicPr>
-            <a:picLocks noChangeAspect="1"/>
-          </p:cNvPicPr>
-          <p:nvPr/>
-        </p:nvPicPr>
-        <p:blipFill>
-          <a:blip r:embed="rId2">
-            <a:clrChange>
-              <a:clrFrom>
-                <a:srgbClr val="FFFFFF"/>
-              </a:clrFrom>
-              <a:clrTo>
-                <a:srgbClr val="FFFFFF">
-                  <a:alpha val="0"/>
-                </a:srgbClr>
-              </a:clrTo>
-            </a:clrChange>
-            <a:extLst>
-              <a:ext uri="{28A0092B-C50C-407E-A947-70E740481C1C}">
-                <a14:useLocalDpi xmlns:a14="http://schemas.microsoft.com/office/drawing/2010/main" val="0"/>
-              </a:ext>
-            </a:extLst>
-          </a:blip>
-          <a:stretch>
-            <a:fillRect/>
-          </a:stretch>
-        </p:blipFill>
-        <p:spPr>
-          <a:xfrm>
-            <a:off x="262455" y="1393306"/>
-            <a:ext cx="9458896" cy="2364724"/>
-          </a:xfrm>
-          <a:prstGeom prst="rect">
-            <a:avLst/>
-          </a:prstGeom>
-        </p:spPr>
-      </p:pic>
-      <p:pic>
-        <p:nvPicPr>
-          <p:cNvPr id="33" name="圖片 32">
-            <a:extLst>
-              <a:ext uri="{FF2B5EF4-FFF2-40B4-BE49-F238E27FC236}">
-                <a16:creationId xmlns:a16="http://schemas.microsoft.com/office/drawing/2014/main" id="{CB7675AA-6FEC-4CC7-AA8D-71934DD9ECBA}"/>
-              </a:ext>
-            </a:extLst>
-          </p:cNvPr>
-          <p:cNvPicPr>
-            <a:picLocks noChangeAspect="1"/>
-          </p:cNvPicPr>
-          <p:nvPr/>
-        </p:nvPicPr>
-        <p:blipFill>
-          <a:blip r:embed="rId3">
-            <a:clrChange>
-              <a:clrFrom>
-                <a:srgbClr val="FFFFFF"/>
-              </a:clrFrom>
-              <a:clrTo>
-                <a:srgbClr val="FFFFFF">
-                  <a:alpha val="0"/>
-                </a:srgbClr>
-              </a:clrTo>
-            </a:clrChange>
-            <a:extLst>
-              <a:ext uri="{28A0092B-C50C-407E-A947-70E740481C1C}">
-                <a14:useLocalDpi xmlns:a14="http://schemas.microsoft.com/office/drawing/2010/main" val="0"/>
-              </a:ext>
-            </a:extLst>
-          </a:blip>
-          <a:stretch>
-            <a:fillRect/>
-          </a:stretch>
-        </p:blipFill>
-        <p:spPr>
-          <a:xfrm>
-            <a:off x="262455" y="3942399"/>
-            <a:ext cx="9458896" cy="2364724"/>
-          </a:xfrm>
-          <a:prstGeom prst="rect">
-            <a:avLst/>
-          </a:prstGeom>
-        </p:spPr>
-      </p:pic>
-      <mc:AlternateContent xmlns:mc="http://schemas.openxmlformats.org/markup-compatibility/2006">
-        <mc:Choice xmlns:a14="http://schemas.microsoft.com/office/drawing/2010/main" Requires="a14">
-          <p:sp>
-            <p:nvSpPr>
-              <p:cNvPr id="34" name="文字方塊 33">
-                <a:extLst>
-                  <a:ext uri="{FF2B5EF4-FFF2-40B4-BE49-F238E27FC236}">
-                    <a16:creationId xmlns:a16="http://schemas.microsoft.com/office/drawing/2014/main" id="{CC458388-0659-49B5-B51D-C20CBBEF338D}"/>
-                  </a:ext>
-                </a:extLst>
-              </p:cNvPr>
-              <p:cNvSpPr txBox="1"/>
-              <p:nvPr/>
-            </p:nvSpPr>
-            <p:spPr>
-              <a:xfrm>
-                <a:off x="1928617" y="394065"/>
-                <a:ext cx="4815083" cy="498855"/>
-              </a:xfrm>
-              <a:prstGeom prst="rect">
-                <a:avLst/>
-              </a:prstGeom>
-              <a:noFill/>
-            </p:spPr>
-            <p:txBody>
-              <a:bodyPr wrap="square" rtlCol="0">
-                <a:spAutoFit/>
-              </a:bodyPr>
-              <a:lstStyle/>
-              <a:p>
-                <a:pPr/>
-                <a14:m>
-                  <m:oMathPara xmlns:m="http://schemas.openxmlformats.org/officeDocument/2006/math">
-                    <m:oMathParaPr>
-                      <m:jc m:val="centerGroup"/>
-                    </m:oMathParaPr>
-                    <m:oMath xmlns:m="http://schemas.openxmlformats.org/officeDocument/2006/math">
-                      <m:sSubSup>
-                        <m:sSubSupPr>
-                          <m:ctrlPr>
-                            <a:rPr lang="en-US" altLang="zh-TW" sz="2000" b="1" i="1">
-                              <a:latin typeface="Cambria Math" panose="02040503050406030204" pitchFamily="18" charset="0"/>
-                            </a:rPr>
-                          </m:ctrlPr>
-                        </m:sSubSupPr>
-                        <m:e>
-                          <m:r>
-                            <a:rPr lang="en-US" altLang="zh-TW" sz="2000" b="1" i="1">
-                              <a:latin typeface="Cambria Math" panose="02040503050406030204" pitchFamily="18" charset="0"/>
-                            </a:rPr>
-                            <m:t>𝑨</m:t>
-                          </m:r>
-                        </m:e>
-                        <m:sub>
-                          <m:sSub>
-                            <m:sSubPr>
-                              <m:ctrlPr>
-                                <a:rPr lang="en-US" altLang="zh-TW" sz="2000" i="1">
-                                  <a:latin typeface="Cambria Math" panose="02040503050406030204" pitchFamily="18" charset="0"/>
-                                </a:rPr>
-                              </m:ctrlPr>
-                            </m:sSubPr>
-                            <m:e>
-                              <m:r>
-                                <a:rPr lang="en-US" altLang="zh-TW" sz="2000" b="1" i="1">
-                                  <a:latin typeface="Cambria Math" panose="02040503050406030204" pitchFamily="18" charset="0"/>
-                                </a:rPr>
-                                <m:t>𝒒</m:t>
-                              </m:r>
-                            </m:e>
-                            <m:sub>
-                              <m:r>
-                                <a:rPr lang="en-US" altLang="zh-TW" sz="2000" i="1">
-                                  <a:latin typeface="Cambria Math" panose="02040503050406030204" pitchFamily="18" charset="0"/>
-                                </a:rPr>
-                                <m:t>0</m:t>
-                              </m:r>
-                            </m:sub>
-                          </m:sSub>
-                        </m:sub>
-                        <m:sup>
-                          <m:acc>
-                            <m:accPr>
-                              <m:chr m:val="̂"/>
-                              <m:ctrlPr>
-                                <a:rPr lang="en-US" altLang="zh-TW" sz="2000" i="1">
-                                  <a:latin typeface="Cambria Math" panose="02040503050406030204" pitchFamily="18" charset="0"/>
-                                </a:rPr>
-                              </m:ctrlPr>
-                            </m:accPr>
-                            <m:e>
-                              <m:r>
-                                <a:rPr lang="en-US" altLang="zh-TW" sz="2000" i="1">
-                                  <a:latin typeface="Cambria Math" panose="02040503050406030204" pitchFamily="18" charset="0"/>
-                                </a:rPr>
-                                <m:t>𝜀</m:t>
-                              </m:r>
-                            </m:e>
-                          </m:acc>
-                          <m:r>
-                            <a:rPr lang="en-US" altLang="zh-TW" sz="2000" i="1">
-                              <a:latin typeface="Cambria Math" panose="02040503050406030204" pitchFamily="18" charset="0"/>
-                            </a:rPr>
-                            <m:t>, ℓ, </m:t>
-                          </m:r>
-                          <m:r>
-                            <a:rPr lang="en-US" altLang="zh-TW" sz="2000" i="1">
-                              <a:latin typeface="Cambria Math" panose="02040503050406030204" pitchFamily="18" charset="0"/>
-                            </a:rPr>
-                            <m:t>𝑝</m:t>
-                          </m:r>
-                          <m:r>
-                            <a:rPr lang="en-US" altLang="zh-TW" sz="2000" i="1">
-                              <a:latin typeface="Cambria Math" panose="02040503050406030204" pitchFamily="18" charset="0"/>
-                            </a:rPr>
-                            <m:t>=0</m:t>
-                          </m:r>
-                          <m:r>
-                            <a:rPr lang="en-US" altLang="zh-TW" sz="2000" b="1" i="1">
-                              <a:latin typeface="Cambria Math" panose="02040503050406030204" pitchFamily="18" charset="0"/>
-                            </a:rPr>
-                            <m:t>;</m:t>
-                          </m:r>
-                          <m:r>
-                            <a:rPr lang="en-US" altLang="zh-TW" sz="2000" i="1">
-                              <a:latin typeface="Cambria Math" panose="02040503050406030204" pitchFamily="18" charset="0"/>
-                            </a:rPr>
-                            <m:t>𝐶</m:t>
-                          </m:r>
-                        </m:sup>
-                      </m:sSubSup>
-                      <m:d>
-                        <m:dPr>
-                          <m:ctrlPr>
-                            <a:rPr lang="en-US" altLang="zh-TW" sz="2000" b="1" i="1">
-                              <a:latin typeface="Cambria Math" panose="02040503050406030204" pitchFamily="18" charset="0"/>
-                            </a:rPr>
-                          </m:ctrlPr>
-                        </m:dPr>
-                        <m:e>
-                          <m:r>
-                            <a:rPr lang="en-US" altLang="zh-TW" sz="2000" i="1">
-                              <a:latin typeface="Cambria Math" panose="02040503050406030204" pitchFamily="18" charset="0"/>
-                            </a:rPr>
-                            <m:t>𝜌</m:t>
-                          </m:r>
-                          <m:r>
-                            <a:rPr lang="en-US" altLang="zh-TW" sz="2000" b="1" i="1">
-                              <a:latin typeface="Cambria Math" panose="02040503050406030204" pitchFamily="18" charset="0"/>
-                            </a:rPr>
-                            <m:t>,</m:t>
-                          </m:r>
-                          <m:r>
-                            <a:rPr lang="en-US" altLang="zh-TW" sz="2000" i="1">
-                              <a:latin typeface="Cambria Math" panose="02040503050406030204" pitchFamily="18" charset="0"/>
-                            </a:rPr>
-                            <m:t> </m:t>
-                          </m:r>
-                          <m:r>
-                            <a:rPr lang="en-US" altLang="zh-TW" sz="2000" i="1">
-                              <a:latin typeface="Cambria Math" panose="02040503050406030204" pitchFamily="18" charset="0"/>
-                            </a:rPr>
-                            <m:t>𝜙</m:t>
-                          </m:r>
-                          <m:r>
-                            <a:rPr lang="en-US" altLang="zh-TW" sz="2000" i="1">
-                              <a:latin typeface="Cambria Math" panose="02040503050406030204" pitchFamily="18" charset="0"/>
-                            </a:rPr>
-                            <m:t>=0, </m:t>
-                          </m:r>
-                          <m:r>
-                            <a:rPr lang="en-US" altLang="zh-TW" sz="2000" i="1">
-                              <a:latin typeface="Cambria Math" panose="02040503050406030204" pitchFamily="18" charset="0"/>
-                            </a:rPr>
-                            <m:t>𝑧</m:t>
-                          </m:r>
-                          <m:r>
-                            <a:rPr lang="en-US" altLang="zh-TW" sz="2000" i="1">
-                              <a:latin typeface="Cambria Math" panose="02040503050406030204" pitchFamily="18" charset="0"/>
-                            </a:rPr>
-                            <m:t>=0</m:t>
-                          </m:r>
-                        </m:e>
-                      </m:d>
-                      <m:r>
-                        <a:rPr lang="en-US" altLang="zh-TW" sz="2000" b="1" i="1">
-                          <a:latin typeface="Cambria Math" panose="02040503050406030204" pitchFamily="18" charset="0"/>
-                        </a:rPr>
-                        <m:t>=</m:t>
-                      </m:r>
-                      <m:sSubSup>
-                        <m:sSubSupPr>
-                          <m:ctrlPr>
-                            <a:rPr lang="en-US" altLang="zh-TW" sz="2000" b="1" i="1">
-                              <a:latin typeface="Cambria Math" panose="02040503050406030204" pitchFamily="18" charset="0"/>
-                            </a:rPr>
-                          </m:ctrlPr>
-                        </m:sSubSupPr>
-                        <m:e>
-                          <m:r>
-                            <a:rPr lang="en-US" altLang="zh-TW" sz="2000" b="1" i="1">
-                              <a:latin typeface="Cambria Math" panose="02040503050406030204" pitchFamily="18" charset="0"/>
-                            </a:rPr>
-                            <m:t>𝑨</m:t>
-                          </m:r>
-                        </m:e>
-                        <m:sub>
-                          <m:r>
-                            <a:rPr lang="en-US" altLang="zh-TW" sz="2000" b="1" i="1">
-                              <a:latin typeface="Cambria Math" panose="02040503050406030204" pitchFamily="18" charset="0"/>
-                            </a:rPr>
-                            <m:t>∥</m:t>
-                          </m:r>
-                        </m:sub>
-                        <m:sup>
-                          <m:r>
-                            <a:rPr lang="en-US" altLang="zh-TW" sz="2000" b="1" i="1">
-                              <a:latin typeface="Cambria Math" panose="02040503050406030204" pitchFamily="18" charset="0"/>
-                            </a:rPr>
-                            <m:t>ℓ</m:t>
-                          </m:r>
-                        </m:sup>
-                      </m:sSubSup>
-                      <m:acc>
-                        <m:accPr>
-                          <m:chr m:val="̂"/>
-                          <m:ctrlPr>
-                            <a:rPr lang="en-US" altLang="zh-TW" sz="2000" i="1">
-                              <a:latin typeface="Cambria Math" panose="02040503050406030204" pitchFamily="18" charset="0"/>
-                            </a:rPr>
-                          </m:ctrlPr>
-                        </m:accPr>
-                        <m:e>
-                          <m:r>
-                            <a:rPr lang="en-US" altLang="zh-TW" sz="2000" i="1">
-                              <a:latin typeface="Cambria Math" panose="02040503050406030204" pitchFamily="18" charset="0"/>
-                            </a:rPr>
-                            <m:t>𝜀</m:t>
-                          </m:r>
-                        </m:e>
-                      </m:acc>
-                      <m:r>
-                        <a:rPr lang="en-US" altLang="zh-TW" sz="2000" i="1">
-                          <a:latin typeface="Cambria Math" panose="02040503050406030204" pitchFamily="18" charset="0"/>
-                        </a:rPr>
-                        <m:t>+</m:t>
-                      </m:r>
-                      <m:sSubSup>
-                        <m:sSubSupPr>
-                          <m:ctrlPr>
-                            <a:rPr lang="en-US" altLang="zh-TW" sz="2000" i="1">
-                              <a:latin typeface="Cambria Math" panose="02040503050406030204" pitchFamily="18" charset="0"/>
-                            </a:rPr>
-                          </m:ctrlPr>
-                        </m:sSubSupPr>
-                        <m:e>
-                          <m:r>
-                            <a:rPr lang="en-US" altLang="zh-TW" sz="2000" b="1" i="1">
-                              <a:latin typeface="Cambria Math" panose="02040503050406030204" pitchFamily="18" charset="0"/>
-                            </a:rPr>
-                            <m:t>𝑨</m:t>
-                          </m:r>
-                        </m:e>
-                        <m:sub>
-                          <m:r>
-                            <a:rPr lang="en-US" altLang="zh-TW" sz="2000" b="1" i="1">
-                              <a:latin typeface="Cambria Math" panose="02040503050406030204" pitchFamily="18" charset="0"/>
-                            </a:rPr>
-                            <m:t>𝒛</m:t>
-                          </m:r>
-                        </m:sub>
-                        <m:sup>
-                          <m:acc>
-                            <m:accPr>
-                              <m:chr m:val="̂"/>
-                              <m:ctrlPr>
-                                <a:rPr lang="en-US" altLang="zh-TW" sz="2000" i="1">
-                                  <a:latin typeface="Cambria Math" panose="02040503050406030204" pitchFamily="18" charset="0"/>
-                                </a:rPr>
-                              </m:ctrlPr>
-                            </m:accPr>
-                            <m:e>
-                              <m:r>
-                                <a:rPr lang="en-US" altLang="zh-TW" sz="2000" i="1">
-                                  <a:latin typeface="Cambria Math" panose="02040503050406030204" pitchFamily="18" charset="0"/>
-                                </a:rPr>
-                                <m:t>𝜀</m:t>
-                              </m:r>
-                            </m:e>
-                          </m:acc>
-                          <m:r>
-                            <a:rPr lang="en-US" altLang="zh-TW" sz="2000" i="1">
-                              <a:latin typeface="Cambria Math" panose="02040503050406030204" pitchFamily="18" charset="0"/>
-                            </a:rPr>
-                            <m:t>, ℓ</m:t>
-                          </m:r>
-                        </m:sup>
-                      </m:sSubSup>
-                      <m:acc>
-                        <m:accPr>
-                          <m:chr m:val="̂"/>
-                          <m:ctrlPr>
-                            <a:rPr lang="en-US" altLang="zh-TW" sz="2000" i="1">
-                              <a:latin typeface="Cambria Math" panose="02040503050406030204" pitchFamily="18" charset="0"/>
-                            </a:rPr>
-                          </m:ctrlPr>
-                        </m:accPr>
-                        <m:e>
-                          <m:r>
-                            <a:rPr lang="en-US" altLang="zh-TW" sz="2000" i="1">
-                              <a:latin typeface="Cambria Math" panose="02040503050406030204" pitchFamily="18" charset="0"/>
-                            </a:rPr>
-                            <m:t>𝑧</m:t>
-                          </m:r>
-                        </m:e>
-                      </m:acc>
-                    </m:oMath>
-                  </m:oMathPara>
-                </a14:m>
-                <a:endParaRPr lang="zh-TW" altLang="en-US" b="1" dirty="0">
-                  <a:latin typeface="Times New Roman" panose="02020603050405020304" pitchFamily="18" charset="0"/>
-                  <a:cs typeface="Times New Roman" panose="02020603050405020304" pitchFamily="18" charset="0"/>
-                </a:endParaRPr>
-              </a:p>
-            </p:txBody>
-          </p:sp>
-        </mc:Choice>
-        <mc:Fallback>
-          <p:sp>
-            <p:nvSpPr>
-              <p:cNvPr id="34" name="文字方塊 33">
-                <a:extLst>
-                  <a:ext uri="{FF2B5EF4-FFF2-40B4-BE49-F238E27FC236}">
-                    <a16:creationId xmlns:a16="http://schemas.microsoft.com/office/drawing/2014/main" id="{CC458388-0659-49B5-B51D-C20CBBEF338D}"/>
-                  </a:ext>
-                </a:extLst>
-              </p:cNvPr>
-              <p:cNvSpPr txBox="1">
-                <a:spLocks noRot="1" noChangeAspect="1" noMove="1" noResize="1" noEditPoints="1" noAdjustHandles="1" noChangeArrowheads="1" noChangeShapeType="1" noTextEdit="1"/>
-              </p:cNvSpPr>
-              <p:nvPr/>
-            </p:nvSpPr>
-            <p:spPr>
-              <a:xfrm>
-                <a:off x="1928617" y="394065"/>
-                <a:ext cx="4815083" cy="498855"/>
-              </a:xfrm>
-              <a:prstGeom prst="rect">
-                <a:avLst/>
-              </a:prstGeom>
-              <a:blipFill>
-                <a:blip r:embed="rId4"/>
-                <a:stretch>
-                  <a:fillRect t="-3704" r="-3291" b="-7407"/>
-                </a:stretch>
-              </a:blipFill>
-            </p:spPr>
-            <p:txBody>
-              <a:bodyPr/>
-              <a:lstStyle/>
-              <a:p>
-                <a:r>
-                  <a:rPr lang="zh-TW" altLang="en-US">
-                    <a:noFill/>
-                  </a:rPr>
-                  <a:t> </a:t>
-                </a:r>
-              </a:p>
-            </p:txBody>
-          </p:sp>
-        </mc:Fallback>
-      </mc:AlternateContent>
-      <p:grpSp>
-        <p:nvGrpSpPr>
-          <p:cNvPr id="41" name="群組 40">
-            <a:extLst>
-              <a:ext uri="{FF2B5EF4-FFF2-40B4-BE49-F238E27FC236}">
-                <a16:creationId xmlns:a16="http://schemas.microsoft.com/office/drawing/2014/main" id="{09E59E93-E82C-4AAA-8C80-0F97C39D1F64}"/>
+                <a16:creationId xmlns:a16="http://schemas.microsoft.com/office/drawing/2014/main" id="{93A5FC45-3D03-4C17-9214-945C05010472}"/>
               </a:ext>
             </a:extLst>
           </p:cNvPr>
@@ -3589,323 +2987,18 @@
         </p:nvGrpSpPr>
         <p:grpSpPr>
           <a:xfrm>
-            <a:off x="6743700" y="19066"/>
-            <a:ext cx="1750442" cy="1248852"/>
-            <a:chOff x="6039273" y="-281233"/>
-            <a:chExt cx="1718499" cy="1120593"/>
+            <a:off x="22485" y="-50813"/>
+            <a:ext cx="9861030" cy="4833964"/>
+            <a:chOff x="38100" y="1198536"/>
+            <a:chExt cx="9861030" cy="4833964"/>
           </a:xfrm>
         </p:grpSpPr>
-        <p:pic>
-          <p:nvPicPr>
-            <p:cNvPr id="43" name="圖片 42">
+        <p:sp>
+          <p:nvSpPr>
+            <p:cNvPr id="29" name="矩形: 圓角 28">
               <a:extLst>
                 <a:ext uri="{FF2B5EF4-FFF2-40B4-BE49-F238E27FC236}">
-                  <a16:creationId xmlns:a16="http://schemas.microsoft.com/office/drawing/2014/main" id="{2F1191E6-1B21-4D7B-B5C5-7EB7C4875FC3}"/>
-                </a:ext>
-              </a:extLst>
-            </p:cNvPr>
-            <p:cNvPicPr>
-              <a:picLocks noChangeAspect="1"/>
-            </p:cNvPicPr>
-            <p:nvPr/>
-          </p:nvPicPr>
-          <p:blipFill>
-            <a:blip r:embed="rId5"/>
-            <a:stretch>
-              <a:fillRect/>
-            </a:stretch>
-          </p:blipFill>
-          <p:spPr>
-            <a:xfrm>
-              <a:off x="6126181" y="-139026"/>
-              <a:ext cx="534369" cy="850550"/>
-            </a:xfrm>
-            <a:prstGeom prst="rect">
-              <a:avLst/>
-            </a:prstGeom>
-          </p:spPr>
-        </p:pic>
-        <mc:AlternateContent xmlns:mc="http://schemas.openxmlformats.org/markup-compatibility/2006" xmlns:a14="http://schemas.microsoft.com/office/drawing/2010/main">
-          <mc:Choice Requires="a14">
-            <p:sp>
-              <p:nvSpPr>
-                <p:cNvPr id="44" name="文字方塊 43">
-                  <a:extLst>
-                    <a:ext uri="{FF2B5EF4-FFF2-40B4-BE49-F238E27FC236}">
-                      <a16:creationId xmlns:a16="http://schemas.microsoft.com/office/drawing/2014/main" id="{0EECDBE0-B06E-400E-ACE6-C5E5DE9C003D}"/>
-                    </a:ext>
-                  </a:extLst>
-                </p:cNvPr>
-                <p:cNvSpPr txBox="1"/>
-                <p:nvPr/>
-              </p:nvSpPr>
-              <p:spPr>
-                <a:xfrm>
-                  <a:off x="6701354" y="-281233"/>
-                  <a:ext cx="990700" cy="1063763"/>
-                </a:xfrm>
-                <a:prstGeom prst="rect">
-                  <a:avLst/>
-                </a:prstGeom>
-                <a:noFill/>
-              </p:spPr>
-              <p:txBody>
-                <a:bodyPr wrap="square" rtlCol="0">
-                  <a:spAutoFit/>
-                </a:bodyPr>
-                <a:lstStyle/>
-                <a:p>
-                  <a:pPr algn="ctr"/>
-                  <a14:m>
-                    <m:oMathPara xmlns:m="http://schemas.openxmlformats.org/officeDocument/2006/math">
-                      <m:oMathParaPr>
-                        <m:jc m:val="centerGroup"/>
-                      </m:oMathParaPr>
-                      <m:oMath xmlns:m="http://schemas.openxmlformats.org/officeDocument/2006/math">
-                        <m:d>
-                          <m:dPr>
-                            <m:begChr m:val="|"/>
-                            <m:endChr m:val="|"/>
-                            <m:ctrlPr>
-                              <a:rPr lang="en-US" altLang="zh-TW" sz="2000" i="1">
-                                <a:latin typeface="Cambria Math" panose="02040503050406030204" pitchFamily="18" charset="0"/>
-                              </a:rPr>
-                            </m:ctrlPr>
-                          </m:dPr>
-                          <m:e>
-                            <m:sSubSup>
-                              <m:sSubSupPr>
-                                <m:ctrlPr>
-                                  <a:rPr lang="en-US" altLang="zh-TW" sz="2000" b="1" i="1">
-                                    <a:latin typeface="Cambria Math" panose="02040503050406030204" pitchFamily="18" charset="0"/>
-                                  </a:rPr>
-                                </m:ctrlPr>
-                              </m:sSubSupPr>
-                              <m:e>
-                                <m:r>
-                                  <a:rPr lang="en-US" altLang="zh-TW" sz="2000" b="1" i="1">
-                                    <a:latin typeface="Cambria Math" panose="02040503050406030204" pitchFamily="18" charset="0"/>
-                                  </a:rPr>
-                                  <m:t>𝑨</m:t>
-                                </m:r>
-                              </m:e>
-                              <m:sub>
-                                <m:r>
-                                  <a:rPr lang="en-US" altLang="zh-TW" sz="2000" b="1" i="1">
-                                    <a:latin typeface="Cambria Math" panose="02040503050406030204" pitchFamily="18" charset="0"/>
-                                  </a:rPr>
-                                  <m:t>∥</m:t>
-                                </m:r>
-                              </m:sub>
-                              <m:sup>
-                                <m:r>
-                                  <a:rPr lang="en-US" altLang="zh-TW" sz="2000" b="1" i="1">
-                                    <a:latin typeface="Cambria Math" panose="02040503050406030204" pitchFamily="18" charset="0"/>
-                                  </a:rPr>
-                                  <m:t>ℓ</m:t>
-                                </m:r>
-                              </m:sup>
-                            </m:sSubSup>
-                          </m:e>
-                        </m:d>
-                      </m:oMath>
-                    </m:oMathPara>
-                  </a14:m>
-                  <a:endParaRPr lang="en-US" altLang="zh-TW" sz="2000" i="1" dirty="0">
-                    <a:latin typeface="Times New Roman" panose="02020603050405020304" pitchFamily="18" charset="0"/>
-                    <a:cs typeface="Times New Roman" panose="02020603050405020304" pitchFamily="18" charset="0"/>
-                  </a:endParaRPr>
-                </a:p>
-                <a:p>
-                  <a:pPr algn="ctr"/>
-                  <a14:m>
-                    <m:oMathPara xmlns:m="http://schemas.openxmlformats.org/officeDocument/2006/math">
-                      <m:oMathParaPr>
-                        <m:jc m:val="centerGroup"/>
-                      </m:oMathParaPr>
-                      <m:oMath xmlns:m="http://schemas.openxmlformats.org/officeDocument/2006/math">
-                        <m:d>
-                          <m:dPr>
-                            <m:begChr m:val="|"/>
-                            <m:endChr m:val="|"/>
-                            <m:ctrlPr>
-                              <a:rPr lang="en-US" altLang="zh-TW" sz="2000" i="1">
-                                <a:latin typeface="Cambria Math" panose="02040503050406030204" pitchFamily="18" charset="0"/>
-                              </a:rPr>
-                            </m:ctrlPr>
-                          </m:dPr>
-                          <m:e>
-                            <m:sSubSup>
-                              <m:sSubSupPr>
-                                <m:ctrlPr>
-                                  <a:rPr lang="en-US" altLang="zh-TW" sz="2000" i="1">
-                                    <a:latin typeface="Cambria Math" panose="02040503050406030204" pitchFamily="18" charset="0"/>
-                                  </a:rPr>
-                                </m:ctrlPr>
-                              </m:sSubSupPr>
-                              <m:e>
-                                <m:r>
-                                  <a:rPr lang="en-US" altLang="zh-TW" sz="2000" b="1" i="1">
-                                    <a:latin typeface="Cambria Math" panose="02040503050406030204" pitchFamily="18" charset="0"/>
-                                  </a:rPr>
-                                  <m:t>𝑨</m:t>
-                                </m:r>
-                              </m:e>
-                              <m:sub>
-                                <m:r>
-                                  <a:rPr lang="en-US" altLang="zh-TW" sz="2000" b="1" i="1">
-                                    <a:latin typeface="Cambria Math" panose="02040503050406030204" pitchFamily="18" charset="0"/>
-                                  </a:rPr>
-                                  <m:t>𝒛</m:t>
-                                </m:r>
-                              </m:sub>
-                              <m:sup>
-                                <m:r>
-                                  <a:rPr lang="en-US" altLang="zh-TW" sz="2000" i="1">
-                                    <a:latin typeface="Cambria Math" panose="02040503050406030204" pitchFamily="18" charset="0"/>
-                                  </a:rPr>
-                                  <m:t>𝜎</m:t>
-                                </m:r>
-                                <m:r>
-                                  <a:rPr lang="en-US" altLang="zh-TW" sz="2000" i="1">
-                                    <a:latin typeface="Cambria Math" panose="02040503050406030204" pitchFamily="18" charset="0"/>
-                                  </a:rPr>
-                                  <m:t>=1, ℓ</m:t>
-                                </m:r>
-                              </m:sup>
-                            </m:sSubSup>
-                          </m:e>
-                        </m:d>
-                      </m:oMath>
-                    </m:oMathPara>
-                  </a14:m>
-                  <a:endParaRPr lang="en-US" altLang="zh-TW" sz="2000" dirty="0">
-                    <a:latin typeface="Times New Roman" panose="02020603050405020304" pitchFamily="18" charset="0"/>
-                    <a:cs typeface="Times New Roman" panose="02020603050405020304" pitchFamily="18" charset="0"/>
-                  </a:endParaRPr>
-                </a:p>
-                <a:p>
-                  <a:pPr algn="ctr"/>
-                  <a14:m>
-                    <m:oMathPara xmlns:m="http://schemas.openxmlformats.org/officeDocument/2006/math">
-                      <m:oMathParaPr>
-                        <m:jc m:val="centerGroup"/>
-                      </m:oMathParaPr>
-                      <m:oMath xmlns:m="http://schemas.openxmlformats.org/officeDocument/2006/math">
-                        <m:d>
-                          <m:dPr>
-                            <m:begChr m:val="|"/>
-                            <m:endChr m:val="|"/>
-                            <m:ctrlPr>
-                              <a:rPr lang="en-US" altLang="zh-TW" sz="2000" i="1">
-                                <a:latin typeface="Cambria Math" panose="02040503050406030204" pitchFamily="18" charset="0"/>
-                              </a:rPr>
-                            </m:ctrlPr>
-                          </m:dPr>
-                          <m:e>
-                            <m:sSubSup>
-                              <m:sSubSupPr>
-                                <m:ctrlPr>
-                                  <a:rPr lang="en-US" altLang="zh-TW" sz="2000" i="1">
-                                    <a:latin typeface="Cambria Math" panose="02040503050406030204" pitchFamily="18" charset="0"/>
-                                  </a:rPr>
-                                </m:ctrlPr>
-                              </m:sSubSupPr>
-                              <m:e>
-                                <m:r>
-                                  <a:rPr lang="en-US" altLang="zh-TW" sz="2000" b="1" i="1">
-                                    <a:latin typeface="Cambria Math" panose="02040503050406030204" pitchFamily="18" charset="0"/>
-                                  </a:rPr>
-                                  <m:t>𝑨</m:t>
-                                </m:r>
-                              </m:e>
-                              <m:sub>
-                                <m:r>
-                                  <a:rPr lang="en-US" altLang="zh-TW" sz="2000" b="1" i="1">
-                                    <a:latin typeface="Cambria Math" panose="02040503050406030204" pitchFamily="18" charset="0"/>
-                                  </a:rPr>
-                                  <m:t>𝒛</m:t>
-                                </m:r>
-                              </m:sub>
-                              <m:sup>
-                                <m:r>
-                                  <a:rPr lang="en-US" altLang="zh-TW" sz="2000" i="1">
-                                    <a:latin typeface="Cambria Math" panose="02040503050406030204" pitchFamily="18" charset="0"/>
-                                  </a:rPr>
-                                  <m:t>𝜎</m:t>
-                                </m:r>
-                                <m:r>
-                                  <a:rPr lang="en-US" altLang="zh-TW" sz="2000" i="1">
-                                    <a:latin typeface="Cambria Math" panose="02040503050406030204" pitchFamily="18" charset="0"/>
-                                  </a:rPr>
-                                  <m:t>=−1, ℓ</m:t>
-                                </m:r>
-                              </m:sup>
-                            </m:sSubSup>
-                          </m:e>
-                        </m:d>
-                      </m:oMath>
-                    </m:oMathPara>
-                  </a14:m>
-                  <a:endParaRPr lang="zh-TW" altLang="en-US" b="1" dirty="0">
-                    <a:latin typeface="Times New Roman" panose="02020603050405020304" pitchFamily="18" charset="0"/>
-                    <a:cs typeface="Times New Roman" panose="02020603050405020304" pitchFamily="18" charset="0"/>
-                  </a:endParaRPr>
-                </a:p>
-              </p:txBody>
-            </p:sp>
-          </mc:Choice>
-          <mc:Fallback xmlns="">
-            <p:sp>
-              <p:nvSpPr>
-                <p:cNvPr id="8" name="文字方塊 7">
-                  <a:extLst>
-                    <a:ext uri="{FF2B5EF4-FFF2-40B4-BE49-F238E27FC236}">
-                      <a16:creationId xmlns:a16="http://schemas.microsoft.com/office/drawing/2014/main" id="{865164BF-B68E-473A-A921-4C3623AE9C50}"/>
-                    </a:ext>
-                  </a:extLst>
-                </p:cNvPr>
-                <p:cNvSpPr txBox="1">
-                  <a:spLocks noRot="1" noChangeAspect="1" noMove="1" noResize="1" noEditPoints="1" noAdjustHandles="1" noChangeArrowheads="1" noChangeShapeType="1" noTextEdit="1"/>
-                </p:cNvSpPr>
-                <p:nvPr/>
-              </p:nvSpPr>
-              <p:spPr>
-                <a:xfrm>
-                  <a:off x="6701354" y="-281233"/>
-                  <a:ext cx="990700" cy="1063763"/>
-                </a:xfrm>
-                <a:prstGeom prst="rect">
-                  <a:avLst/>
-                </a:prstGeom>
-                <a:blipFill>
-                  <a:blip r:embed="rId6"/>
-                  <a:stretch>
-                    <a:fillRect l="-1807"/>
-                  </a:stretch>
-                </a:blipFill>
-              </p:spPr>
-              <p:txBody>
-                <a:bodyPr/>
-                <a:lstStyle/>
-                <a:p>
-                  <a:r>
-                    <a:rPr lang="zh-TW" altLang="en-US">
-                      <a:noFill/>
-                    </a:rPr>
-                    <a:t> </a:t>
-                  </a:r>
-                </a:p>
-              </p:txBody>
-            </p:sp>
-          </mc:Fallback>
-        </mc:AlternateContent>
-        <p:sp>
-          <p:nvSpPr>
-            <p:cNvPr id="45" name="矩形: 圓角 44">
-              <a:extLst>
-                <a:ext uri="{FF2B5EF4-FFF2-40B4-BE49-F238E27FC236}">
-                  <a16:creationId xmlns:a16="http://schemas.microsoft.com/office/drawing/2014/main" id="{D3F319D8-58DC-40A7-AD41-E91DC1E9F8DE}"/>
+                  <a16:creationId xmlns:a16="http://schemas.microsoft.com/office/drawing/2014/main" id="{12A747F0-4A58-4A15-AB9D-2DB0BA632A37}"/>
                 </a:ext>
               </a:extLst>
             </p:cNvPr>
@@ -3914,14 +3007,20 @@
           </p:nvSpPr>
           <p:spPr>
             <a:xfrm>
-              <a:off x="6039273" y="-260656"/>
-              <a:ext cx="1718499" cy="1100016"/>
+              <a:off x="2405196" y="4130612"/>
+              <a:ext cx="7450004" cy="1901888"/>
             </a:xfrm>
             <a:prstGeom prst="roundRect">
-              <a:avLst/>
+              <a:avLst>
+                <a:gd name="adj" fmla="val 5706"/>
+              </a:avLst>
             </a:prstGeom>
-            <a:noFill/>
-            <a:ln w="28575">
+            <a:solidFill>
+              <a:schemeClr val="bg1">
+                <a:lumMod val="95000"/>
+              </a:schemeClr>
+            </a:solidFill>
+            <a:ln w="19050">
               <a:solidFill>
                 <a:schemeClr val="tx1">
                   <a:lumMod val="50000"/>
@@ -3947,7 +3046,76 @@
             </a:fontRef>
           </p:style>
           <p:txBody>
-            <a:bodyPr rot="0" spcFirstLastPara="0" vertOverflow="overflow" horzOverflow="overflow" vert="horz" wrap="square" lIns="80998" tIns="40499" rIns="80998" bIns="40499" numCol="1" spcCol="0" rtlCol="0" fromWordArt="0" anchor="ctr" anchorCtr="0" forceAA="0" compatLnSpc="1">
+            <a:bodyPr rot="0" spcFirstLastPara="0" vertOverflow="overflow" horzOverflow="overflow" vert="horz" wrap="square" lIns="91440" tIns="45720" rIns="91440" bIns="45720" numCol="1" spcCol="0" rtlCol="0" fromWordArt="0" anchor="ctr" anchorCtr="0" forceAA="0" compatLnSpc="1">
+              <a:prstTxWarp prst="textNoShape">
+                <a:avLst/>
+              </a:prstTxWarp>
+              <a:noAutofit/>
+            </a:bodyPr>
+            <a:lstStyle/>
+            <a:p>
+              <a:pPr algn="ctr"/>
+              <a:endParaRPr lang="zh-TW" altLang="en-US">
+                <a:latin typeface="Times New Roman" panose="02020603050405020304" pitchFamily="18" charset="0"/>
+                <a:cs typeface="Times New Roman" panose="02020603050405020304" pitchFamily="18" charset="0"/>
+              </a:endParaRPr>
+            </a:p>
+          </p:txBody>
+        </p:sp>
+        <p:sp>
+          <p:nvSpPr>
+            <p:cNvPr id="30" name="矩形: 圓角 29">
+              <a:extLst>
+                <a:ext uri="{FF2B5EF4-FFF2-40B4-BE49-F238E27FC236}">
+                  <a16:creationId xmlns:a16="http://schemas.microsoft.com/office/drawing/2014/main" id="{B93E4F7D-C584-48A1-8746-F7F6E909DF40}"/>
+                </a:ext>
+              </a:extLst>
+            </p:cNvPr>
+            <p:cNvSpPr/>
+            <p:nvPr/>
+          </p:nvSpPr>
+          <p:spPr>
+            <a:xfrm>
+              <a:off x="2400300" y="1581519"/>
+              <a:ext cx="7450004" cy="2065064"/>
+            </a:xfrm>
+            <a:prstGeom prst="roundRect">
+              <a:avLst>
+                <a:gd name="adj" fmla="val 6163"/>
+              </a:avLst>
+            </a:prstGeom>
+            <a:solidFill>
+              <a:schemeClr val="bg1">
+                <a:lumMod val="95000"/>
+              </a:schemeClr>
+            </a:solidFill>
+            <a:ln w="19050">
+              <a:solidFill>
+                <a:schemeClr val="tx1">
+                  <a:lumMod val="50000"/>
+                  <a:lumOff val="50000"/>
+                </a:schemeClr>
+              </a:solidFill>
+            </a:ln>
+          </p:spPr>
+          <p:style>
+            <a:lnRef idx="2">
+              <a:schemeClr val="accent1">
+                <a:shade val="50000"/>
+              </a:schemeClr>
+            </a:lnRef>
+            <a:fillRef idx="1">
+              <a:schemeClr val="accent1"/>
+            </a:fillRef>
+            <a:effectRef idx="0">
+              <a:schemeClr val="accent1"/>
+            </a:effectRef>
+            <a:fontRef idx="minor">
+              <a:schemeClr val="lt1"/>
+            </a:fontRef>
+          </p:style>
+          <p:txBody>
+            <a:bodyPr rot="0" spcFirstLastPara="0" vertOverflow="overflow" horzOverflow="overflow" vert="horz" wrap="square" lIns="91440" tIns="45720" rIns="91440" bIns="45720" numCol="1" spcCol="0" rtlCol="0" fromWordArt="0" anchor="ctr" anchorCtr="0" forceAA="0" compatLnSpc="1">
               <a:prstTxWarp prst="textNoShape">
                 <a:avLst/>
               </a:prstTxWarp>
@@ -3963,539 +3131,1334 @@
             </a:p>
           </p:txBody>
         </p:sp>
-      </p:grpSp>
-      <mc:AlternateContent xmlns:mc="http://schemas.openxmlformats.org/markup-compatibility/2006">
-        <mc:Choice xmlns:a14="http://schemas.microsoft.com/office/drawing/2010/main" Requires="a14">
-          <p:sp>
-            <p:nvSpPr>
-              <p:cNvPr id="46" name="文字方塊 45">
-                <a:extLst>
-                  <a:ext uri="{FF2B5EF4-FFF2-40B4-BE49-F238E27FC236}">
-                    <a16:creationId xmlns:a16="http://schemas.microsoft.com/office/drawing/2014/main" id="{D139B888-3F1C-498F-88E9-BE66C800874E}"/>
-                  </a:ext>
-                </a:extLst>
-              </p:cNvPr>
-              <p:cNvSpPr txBox="1"/>
-              <p:nvPr/>
-            </p:nvSpPr>
-            <p:spPr>
-              <a:xfrm>
-                <a:off x="4612708" y="1746135"/>
-                <a:ext cx="1133442" cy="369332"/>
-              </a:xfrm>
-              <a:prstGeom prst="rect">
-                <a:avLst/>
-              </a:prstGeom>
-              <a:noFill/>
-            </p:spPr>
-            <p:txBody>
-              <a:bodyPr wrap="square" rtlCol="0">
-                <a:spAutoFit/>
-              </a:bodyPr>
-              <a:lstStyle/>
-              <a:p>
-                <a:pPr/>
-                <a14:m>
-                  <m:oMathPara xmlns:m="http://schemas.openxmlformats.org/officeDocument/2006/math">
-                    <m:oMathParaPr>
-                      <m:jc m:val="centerGroup"/>
-                    </m:oMathParaPr>
+        <p:pic>
+          <p:nvPicPr>
+            <p:cNvPr id="7" name="圖片 6">
+              <a:extLst>
+                <a:ext uri="{FF2B5EF4-FFF2-40B4-BE49-F238E27FC236}">
+                  <a16:creationId xmlns:a16="http://schemas.microsoft.com/office/drawing/2014/main" id="{84826E07-676E-4A6F-8402-97871E4AD56C}"/>
+                </a:ext>
+              </a:extLst>
+            </p:cNvPr>
+            <p:cNvPicPr>
+              <a:picLocks noChangeAspect="1"/>
+            </p:cNvPicPr>
+            <p:nvPr/>
+          </p:nvPicPr>
+          <p:blipFill>
+            <a:blip r:embed="rId2">
+              <a:clrChange>
+                <a:clrFrom>
+                  <a:srgbClr val="FFFFFF"/>
+                </a:clrFrom>
+                <a:clrTo>
+                  <a:srgbClr val="FFFFFF">
+                    <a:alpha val="0"/>
+                  </a:srgbClr>
+                </a:clrTo>
+              </a:clrChange>
+              <a:extLst>
+                <a:ext uri="{28A0092B-C50C-407E-A947-70E740481C1C}">
+                  <a14:useLocalDpi xmlns:a14="http://schemas.microsoft.com/office/drawing/2010/main" val="0"/>
+                </a:ext>
+              </a:extLst>
+            </a:blip>
+            <a:stretch>
+              <a:fillRect/>
+            </a:stretch>
+          </p:blipFill>
+          <p:spPr>
+            <a:xfrm>
+              <a:off x="2346822" y="1464256"/>
+              <a:ext cx="7552308" cy="2000504"/>
+            </a:xfrm>
+            <a:prstGeom prst="rect">
+              <a:avLst/>
+            </a:prstGeom>
+          </p:spPr>
+        </p:pic>
+        <p:pic>
+          <p:nvPicPr>
+            <p:cNvPr id="9" name="圖片 8">
+              <a:extLst>
+                <a:ext uri="{FF2B5EF4-FFF2-40B4-BE49-F238E27FC236}">
+                  <a16:creationId xmlns:a16="http://schemas.microsoft.com/office/drawing/2014/main" id="{FDB0F021-B179-41EB-832A-F5FBB65DAECD}"/>
+                </a:ext>
+              </a:extLst>
+            </p:cNvPr>
+            <p:cNvPicPr>
+              <a:picLocks noChangeAspect="1"/>
+            </p:cNvPicPr>
+            <p:nvPr/>
+          </p:nvPicPr>
+          <p:blipFill>
+            <a:blip r:embed="rId3">
+              <a:clrChange>
+                <a:clrFrom>
+                  <a:srgbClr val="FFFFFF"/>
+                </a:clrFrom>
+                <a:clrTo>
+                  <a:srgbClr val="FFFFFF">
+                    <a:alpha val="0"/>
+                  </a:srgbClr>
+                </a:clrTo>
+              </a:clrChange>
+              <a:extLst>
+                <a:ext uri="{28A0092B-C50C-407E-A947-70E740481C1C}">
+                  <a14:useLocalDpi xmlns:a14="http://schemas.microsoft.com/office/drawing/2010/main" val="0"/>
+                </a:ext>
+              </a:extLst>
+            </a:blip>
+            <a:stretch>
+              <a:fillRect/>
+            </a:stretch>
+          </p:blipFill>
+          <p:spPr>
+            <a:xfrm>
+              <a:off x="2335576" y="4014706"/>
+              <a:ext cx="7552308" cy="2000504"/>
+            </a:xfrm>
+            <a:prstGeom prst="rect">
+              <a:avLst/>
+            </a:prstGeom>
+          </p:spPr>
+        </p:pic>
+        <mc:AlternateContent xmlns:mc="http://schemas.openxmlformats.org/markup-compatibility/2006">
+          <mc:Choice xmlns:a14="http://schemas.microsoft.com/office/drawing/2010/main" Requires="a14">
+            <p:sp>
+              <p:nvSpPr>
+                <p:cNvPr id="46" name="文字方塊 45">
+                  <a:extLst>
+                    <a:ext uri="{FF2B5EF4-FFF2-40B4-BE49-F238E27FC236}">
+                      <a16:creationId xmlns:a16="http://schemas.microsoft.com/office/drawing/2014/main" id="{D139B888-3F1C-498F-88E9-BE66C800874E}"/>
+                    </a:ext>
+                  </a:extLst>
+                </p:cNvPr>
+                <p:cNvSpPr txBox="1"/>
+                <p:nvPr/>
+              </p:nvSpPr>
+              <p:spPr>
+                <a:xfrm>
+                  <a:off x="5783807" y="1720419"/>
+                  <a:ext cx="1006558" cy="369332"/>
+                </a:xfrm>
+                <a:prstGeom prst="rect">
+                  <a:avLst/>
+                </a:prstGeom>
+                <a:noFill/>
+              </p:spPr>
+              <p:txBody>
+                <a:bodyPr wrap="square" rtlCol="0">
+                  <a:spAutoFit/>
+                </a:bodyPr>
+                <a:lstStyle/>
+                <a:p>
+                  <a:pPr algn="ctr"/>
+                  <a14:m>
+                    <m:oMathPara xmlns:m="http://schemas.openxmlformats.org/officeDocument/2006/math">
+                      <m:oMathParaPr>
+                        <m:jc m:val="centerGroup"/>
+                      </m:oMathParaPr>
+                      <m:oMath xmlns:m="http://schemas.openxmlformats.org/officeDocument/2006/math">
+                        <m:r>
+                          <a:rPr lang="en-US" altLang="zh-TW" i="1">
+                            <a:latin typeface="Cambria Math" panose="02040503050406030204" pitchFamily="18" charset="0"/>
+                          </a:rPr>
+                          <m:t>ℓ=0</m:t>
+                        </m:r>
+                      </m:oMath>
+                    </m:oMathPara>
+                  </a14:m>
+                  <a:endParaRPr lang="zh-TW" altLang="en-US" dirty="0">
+                    <a:latin typeface="Times New Roman" panose="02020603050405020304" pitchFamily="18" charset="0"/>
+                    <a:cs typeface="Times New Roman" panose="02020603050405020304" pitchFamily="18" charset="0"/>
+                  </a:endParaRPr>
+                </a:p>
+              </p:txBody>
+            </p:sp>
+          </mc:Choice>
+          <mc:Fallback>
+            <p:sp>
+              <p:nvSpPr>
+                <p:cNvPr id="46" name="文字方塊 45">
+                  <a:extLst>
+                    <a:ext uri="{FF2B5EF4-FFF2-40B4-BE49-F238E27FC236}">
+                      <a16:creationId xmlns:a16="http://schemas.microsoft.com/office/drawing/2014/main" id="{D139B888-3F1C-498F-88E9-BE66C800874E}"/>
+                    </a:ext>
+                  </a:extLst>
+                </p:cNvPr>
+                <p:cNvSpPr txBox="1">
+                  <a:spLocks noRot="1" noChangeAspect="1" noMove="1" noResize="1" noEditPoints="1" noAdjustHandles="1" noChangeArrowheads="1" noChangeShapeType="1" noTextEdit="1"/>
+                </p:cNvSpPr>
+                <p:nvPr/>
+              </p:nvSpPr>
+              <p:spPr>
+                <a:xfrm>
+                  <a:off x="5783807" y="1720419"/>
+                  <a:ext cx="1006558" cy="369332"/>
+                </a:xfrm>
+                <a:prstGeom prst="rect">
+                  <a:avLst/>
+                </a:prstGeom>
+                <a:blipFill>
+                  <a:blip r:embed="rId4"/>
+                  <a:stretch>
+                    <a:fillRect/>
+                  </a:stretch>
+                </a:blipFill>
+              </p:spPr>
+              <p:txBody>
+                <a:bodyPr/>
+                <a:lstStyle/>
+                <a:p>
+                  <a:r>
+                    <a:rPr lang="zh-TW" altLang="en-US">
+                      <a:noFill/>
+                    </a:rPr>
+                    <a:t> </a:t>
+                  </a:r>
+                </a:p>
+              </p:txBody>
+            </p:sp>
+          </mc:Fallback>
+        </mc:AlternateContent>
+        <mc:AlternateContent xmlns:mc="http://schemas.openxmlformats.org/markup-compatibility/2006">
+          <mc:Choice xmlns:a14="http://schemas.microsoft.com/office/drawing/2010/main" Requires="a14">
+            <p:sp>
+              <p:nvSpPr>
+                <p:cNvPr id="47" name="文字方塊 46">
+                  <a:extLst>
+                    <a:ext uri="{FF2B5EF4-FFF2-40B4-BE49-F238E27FC236}">
+                      <a16:creationId xmlns:a16="http://schemas.microsoft.com/office/drawing/2014/main" id="{4F245FA2-4DBE-46ED-9B8D-44919FF47C9F}"/>
+                    </a:ext>
+                  </a:extLst>
+                </p:cNvPr>
+                <p:cNvSpPr txBox="1"/>
+                <p:nvPr/>
+              </p:nvSpPr>
+              <p:spPr>
+                <a:xfrm>
+                  <a:off x="8637405" y="1720419"/>
+                  <a:ext cx="1006558" cy="369332"/>
+                </a:xfrm>
+                <a:prstGeom prst="rect">
+                  <a:avLst/>
+                </a:prstGeom>
+                <a:noFill/>
+              </p:spPr>
+              <p:txBody>
+                <a:bodyPr wrap="square" rtlCol="0">
+                  <a:spAutoFit/>
+                </a:bodyPr>
+                <a:lstStyle/>
+                <a:p>
+                  <a:pPr algn="ctr"/>
+                  <a14:m>
+                    <m:oMathPara xmlns:m="http://schemas.openxmlformats.org/officeDocument/2006/math">
+                      <m:oMathParaPr>
+                        <m:jc m:val="centerGroup"/>
+                      </m:oMathParaPr>
+                      <m:oMath xmlns:m="http://schemas.openxmlformats.org/officeDocument/2006/math">
+                        <m:r>
+                          <a:rPr lang="en-US" altLang="zh-TW" i="1">
+                            <a:latin typeface="Cambria Math" panose="02040503050406030204" pitchFamily="18" charset="0"/>
+                          </a:rPr>
+                          <m:t>ℓ=2</m:t>
+                        </m:r>
+                      </m:oMath>
+                    </m:oMathPara>
+                  </a14:m>
+                  <a:endParaRPr lang="zh-TW" altLang="en-US" dirty="0">
+                    <a:latin typeface="Times New Roman" panose="02020603050405020304" pitchFamily="18" charset="0"/>
+                    <a:cs typeface="Times New Roman" panose="02020603050405020304" pitchFamily="18" charset="0"/>
+                  </a:endParaRPr>
+                </a:p>
+              </p:txBody>
+            </p:sp>
+          </mc:Choice>
+          <mc:Fallback>
+            <p:sp>
+              <p:nvSpPr>
+                <p:cNvPr id="47" name="文字方塊 46">
+                  <a:extLst>
+                    <a:ext uri="{FF2B5EF4-FFF2-40B4-BE49-F238E27FC236}">
+                      <a16:creationId xmlns:a16="http://schemas.microsoft.com/office/drawing/2014/main" id="{4F245FA2-4DBE-46ED-9B8D-44919FF47C9F}"/>
+                    </a:ext>
+                  </a:extLst>
+                </p:cNvPr>
+                <p:cNvSpPr txBox="1">
+                  <a:spLocks noRot="1" noChangeAspect="1" noMove="1" noResize="1" noEditPoints="1" noAdjustHandles="1" noChangeArrowheads="1" noChangeShapeType="1" noTextEdit="1"/>
+                </p:cNvSpPr>
+                <p:nvPr/>
+              </p:nvSpPr>
+              <p:spPr>
+                <a:xfrm>
+                  <a:off x="8637405" y="1720419"/>
+                  <a:ext cx="1006558" cy="369332"/>
+                </a:xfrm>
+                <a:prstGeom prst="rect">
+                  <a:avLst/>
+                </a:prstGeom>
+                <a:blipFill>
+                  <a:blip r:embed="rId5"/>
+                  <a:stretch>
+                    <a:fillRect/>
+                  </a:stretch>
+                </a:blipFill>
+              </p:spPr>
+              <p:txBody>
+                <a:bodyPr/>
+                <a:lstStyle/>
+                <a:p>
+                  <a:r>
+                    <a:rPr lang="zh-TW" altLang="en-US">
+                      <a:noFill/>
+                    </a:rPr>
+                    <a:t> </a:t>
+                  </a:r>
+                </a:p>
+              </p:txBody>
+            </p:sp>
+          </mc:Fallback>
+        </mc:AlternateContent>
+        <mc:AlternateContent xmlns:mc="http://schemas.openxmlformats.org/markup-compatibility/2006">
+          <mc:Choice xmlns:a14="http://schemas.microsoft.com/office/drawing/2010/main" Requires="a14">
+            <p:sp>
+              <p:nvSpPr>
+                <p:cNvPr id="48" name="文字方塊 47">
+                  <a:extLst>
+                    <a:ext uri="{FF2B5EF4-FFF2-40B4-BE49-F238E27FC236}">
+                      <a16:creationId xmlns:a16="http://schemas.microsoft.com/office/drawing/2014/main" id="{58B10F4E-2C32-473F-9973-42D224D7247B}"/>
+                    </a:ext>
+                  </a:extLst>
+                </p:cNvPr>
+                <p:cNvSpPr txBox="1"/>
+                <p:nvPr/>
+              </p:nvSpPr>
+              <p:spPr>
+                <a:xfrm>
+                  <a:off x="7210605" y="1720419"/>
+                  <a:ext cx="1006558" cy="369332"/>
+                </a:xfrm>
+                <a:prstGeom prst="rect">
+                  <a:avLst/>
+                </a:prstGeom>
+                <a:noFill/>
+              </p:spPr>
+              <p:txBody>
+                <a:bodyPr wrap="square" rtlCol="0">
+                  <a:spAutoFit/>
+                </a:bodyPr>
+                <a:lstStyle/>
+                <a:p>
+                  <a:pPr algn="ctr"/>
+                  <a14:m>
+                    <m:oMathPara xmlns:m="http://schemas.openxmlformats.org/officeDocument/2006/math">
+                      <m:oMathParaPr>
+                        <m:jc m:val="centerGroup"/>
+                      </m:oMathParaPr>
+                      <m:oMath xmlns:m="http://schemas.openxmlformats.org/officeDocument/2006/math">
+                        <m:r>
+                          <a:rPr lang="en-US" altLang="zh-TW" i="1">
+                            <a:latin typeface="Cambria Math" panose="02040503050406030204" pitchFamily="18" charset="0"/>
+                          </a:rPr>
+                          <m:t>ℓ=1</m:t>
+                        </m:r>
+                      </m:oMath>
+                    </m:oMathPara>
+                  </a14:m>
+                  <a:endParaRPr lang="zh-TW" altLang="en-US" dirty="0">
+                    <a:latin typeface="Times New Roman" panose="02020603050405020304" pitchFamily="18" charset="0"/>
+                    <a:cs typeface="Times New Roman" panose="02020603050405020304" pitchFamily="18" charset="0"/>
+                  </a:endParaRPr>
+                </a:p>
+              </p:txBody>
+            </p:sp>
+          </mc:Choice>
+          <mc:Fallback>
+            <p:sp>
+              <p:nvSpPr>
+                <p:cNvPr id="48" name="文字方塊 47">
+                  <a:extLst>
+                    <a:ext uri="{FF2B5EF4-FFF2-40B4-BE49-F238E27FC236}">
+                      <a16:creationId xmlns:a16="http://schemas.microsoft.com/office/drawing/2014/main" id="{58B10F4E-2C32-473F-9973-42D224D7247B}"/>
+                    </a:ext>
+                  </a:extLst>
+                </p:cNvPr>
+                <p:cNvSpPr txBox="1">
+                  <a:spLocks noRot="1" noChangeAspect="1" noMove="1" noResize="1" noEditPoints="1" noAdjustHandles="1" noChangeArrowheads="1" noChangeShapeType="1" noTextEdit="1"/>
+                </p:cNvSpPr>
+                <p:nvPr/>
+              </p:nvSpPr>
+              <p:spPr>
+                <a:xfrm>
+                  <a:off x="7210605" y="1720419"/>
+                  <a:ext cx="1006558" cy="369332"/>
+                </a:xfrm>
+                <a:prstGeom prst="rect">
+                  <a:avLst/>
+                </a:prstGeom>
+                <a:blipFill>
+                  <a:blip r:embed="rId6"/>
+                  <a:stretch>
+                    <a:fillRect/>
+                  </a:stretch>
+                </a:blipFill>
+              </p:spPr>
+              <p:txBody>
+                <a:bodyPr/>
+                <a:lstStyle/>
+                <a:p>
+                  <a:r>
+                    <a:rPr lang="zh-TW" altLang="en-US">
+                      <a:noFill/>
+                    </a:rPr>
+                    <a:t> </a:t>
+                  </a:r>
+                </a:p>
+              </p:txBody>
+            </p:sp>
+          </mc:Fallback>
+        </mc:AlternateContent>
+        <mc:AlternateContent xmlns:mc="http://schemas.openxmlformats.org/markup-compatibility/2006">
+          <mc:Choice xmlns:a14="http://schemas.microsoft.com/office/drawing/2010/main" Requires="a14">
+            <p:sp>
+              <p:nvSpPr>
+                <p:cNvPr id="50" name="文字方塊 49">
+                  <a:extLst>
+                    <a:ext uri="{FF2B5EF4-FFF2-40B4-BE49-F238E27FC236}">
+                      <a16:creationId xmlns:a16="http://schemas.microsoft.com/office/drawing/2014/main" id="{9BF2C953-92CE-4A9A-B6D5-E85DE4B362FA}"/>
+                    </a:ext>
+                  </a:extLst>
+                </p:cNvPr>
+                <p:cNvSpPr txBox="1"/>
+                <p:nvPr/>
+              </p:nvSpPr>
+              <p:spPr>
+                <a:xfrm>
+                  <a:off x="4357009" y="1720419"/>
+                  <a:ext cx="1006558" cy="369332"/>
+                </a:xfrm>
+                <a:prstGeom prst="rect">
+                  <a:avLst/>
+                </a:prstGeom>
+                <a:noFill/>
+              </p:spPr>
+              <p:txBody>
+                <a:bodyPr wrap="square" rtlCol="0">
+                  <a:spAutoFit/>
+                </a:bodyPr>
+                <a:lstStyle/>
+                <a:p>
+                  <a:pPr algn="ctr"/>
+                  <a14:m>
+                    <m:oMathPara xmlns:m="http://schemas.openxmlformats.org/officeDocument/2006/math">
+                      <m:oMathParaPr>
+                        <m:jc m:val="centerGroup"/>
+                      </m:oMathParaPr>
+                      <m:oMath xmlns:m="http://schemas.openxmlformats.org/officeDocument/2006/math">
+                        <m:r>
+                          <a:rPr lang="en-US" altLang="zh-TW" i="1">
+                            <a:latin typeface="Cambria Math" panose="02040503050406030204" pitchFamily="18" charset="0"/>
+                          </a:rPr>
+                          <m:t>ℓ=−1</m:t>
+                        </m:r>
+                      </m:oMath>
+                    </m:oMathPara>
+                  </a14:m>
+                  <a:endParaRPr lang="zh-TW" altLang="en-US" dirty="0">
+                    <a:latin typeface="Times New Roman" panose="02020603050405020304" pitchFamily="18" charset="0"/>
+                    <a:cs typeface="Times New Roman" panose="02020603050405020304" pitchFamily="18" charset="0"/>
+                  </a:endParaRPr>
+                </a:p>
+              </p:txBody>
+            </p:sp>
+          </mc:Choice>
+          <mc:Fallback>
+            <p:sp>
+              <p:nvSpPr>
+                <p:cNvPr id="50" name="文字方塊 49">
+                  <a:extLst>
+                    <a:ext uri="{FF2B5EF4-FFF2-40B4-BE49-F238E27FC236}">
+                      <a16:creationId xmlns:a16="http://schemas.microsoft.com/office/drawing/2014/main" id="{9BF2C953-92CE-4A9A-B6D5-E85DE4B362FA}"/>
+                    </a:ext>
+                  </a:extLst>
+                </p:cNvPr>
+                <p:cNvSpPr txBox="1">
+                  <a:spLocks noRot="1" noChangeAspect="1" noMove="1" noResize="1" noEditPoints="1" noAdjustHandles="1" noChangeArrowheads="1" noChangeShapeType="1" noTextEdit="1"/>
+                </p:cNvSpPr>
+                <p:nvPr/>
+              </p:nvSpPr>
+              <p:spPr>
+                <a:xfrm>
+                  <a:off x="4357009" y="1720419"/>
+                  <a:ext cx="1006558" cy="369332"/>
+                </a:xfrm>
+                <a:prstGeom prst="rect">
+                  <a:avLst/>
+                </a:prstGeom>
+                <a:blipFill>
+                  <a:blip r:embed="rId7"/>
+                  <a:stretch>
+                    <a:fillRect/>
+                  </a:stretch>
+                </a:blipFill>
+              </p:spPr>
+              <p:txBody>
+                <a:bodyPr/>
+                <a:lstStyle/>
+                <a:p>
+                  <a:r>
+                    <a:rPr lang="zh-TW" altLang="en-US">
+                      <a:noFill/>
+                    </a:rPr>
+                    <a:t> </a:t>
+                  </a:r>
+                </a:p>
+              </p:txBody>
+            </p:sp>
+          </mc:Fallback>
+        </mc:AlternateContent>
+        <mc:AlternateContent xmlns:mc="http://schemas.openxmlformats.org/markup-compatibility/2006">
+          <mc:Choice xmlns:a14="http://schemas.microsoft.com/office/drawing/2010/main" Requires="a14">
+            <p:sp>
+              <p:nvSpPr>
+                <p:cNvPr id="52" name="文字方塊 51">
+                  <a:extLst>
+                    <a:ext uri="{FF2B5EF4-FFF2-40B4-BE49-F238E27FC236}">
+                      <a16:creationId xmlns:a16="http://schemas.microsoft.com/office/drawing/2014/main" id="{FA6A6B30-6EBE-419A-8F73-1E8B0B28748C}"/>
+                    </a:ext>
+                  </a:extLst>
+                </p:cNvPr>
+                <p:cNvSpPr txBox="1"/>
+                <p:nvPr/>
+              </p:nvSpPr>
+              <p:spPr>
+                <a:xfrm>
+                  <a:off x="2930211" y="1720419"/>
+                  <a:ext cx="1006558" cy="369332"/>
+                </a:xfrm>
+                <a:prstGeom prst="rect">
+                  <a:avLst/>
+                </a:prstGeom>
+                <a:noFill/>
+              </p:spPr>
+              <p:txBody>
+                <a:bodyPr wrap="square" rtlCol="0">
+                  <a:spAutoFit/>
+                </a:bodyPr>
+                <a:lstStyle/>
+                <a:p>
+                  <a:pPr algn="ctr"/>
+                  <a14:m>
+                    <m:oMathPara xmlns:m="http://schemas.openxmlformats.org/officeDocument/2006/math">
+                      <m:oMathParaPr>
+                        <m:jc m:val="centerGroup"/>
+                      </m:oMathParaPr>
+                      <m:oMath xmlns:m="http://schemas.openxmlformats.org/officeDocument/2006/math">
+                        <m:r>
+                          <a:rPr lang="en-US" altLang="zh-TW" i="1">
+                            <a:latin typeface="Cambria Math" panose="02040503050406030204" pitchFamily="18" charset="0"/>
+                          </a:rPr>
+                          <m:t>ℓ=−2</m:t>
+                        </m:r>
+                      </m:oMath>
+                    </m:oMathPara>
+                  </a14:m>
+                  <a:endParaRPr lang="zh-TW" altLang="en-US" dirty="0">
+                    <a:latin typeface="Times New Roman" panose="02020603050405020304" pitchFamily="18" charset="0"/>
+                    <a:cs typeface="Times New Roman" panose="02020603050405020304" pitchFamily="18" charset="0"/>
+                  </a:endParaRPr>
+                </a:p>
+              </p:txBody>
+            </p:sp>
+          </mc:Choice>
+          <mc:Fallback>
+            <p:sp>
+              <p:nvSpPr>
+                <p:cNvPr id="52" name="文字方塊 51">
+                  <a:extLst>
+                    <a:ext uri="{FF2B5EF4-FFF2-40B4-BE49-F238E27FC236}">
+                      <a16:creationId xmlns:a16="http://schemas.microsoft.com/office/drawing/2014/main" id="{FA6A6B30-6EBE-419A-8F73-1E8B0B28748C}"/>
+                    </a:ext>
+                  </a:extLst>
+                </p:cNvPr>
+                <p:cNvSpPr txBox="1">
+                  <a:spLocks noRot="1" noChangeAspect="1" noMove="1" noResize="1" noEditPoints="1" noAdjustHandles="1" noChangeArrowheads="1" noChangeShapeType="1" noTextEdit="1"/>
+                </p:cNvSpPr>
+                <p:nvPr/>
+              </p:nvSpPr>
+              <p:spPr>
+                <a:xfrm>
+                  <a:off x="2930211" y="1720419"/>
+                  <a:ext cx="1006558" cy="369332"/>
+                </a:xfrm>
+                <a:prstGeom prst="rect">
+                  <a:avLst/>
+                </a:prstGeom>
+                <a:blipFill>
+                  <a:blip r:embed="rId8"/>
+                  <a:stretch>
+                    <a:fillRect/>
+                  </a:stretch>
+                </a:blipFill>
+              </p:spPr>
+              <p:txBody>
+                <a:bodyPr/>
+                <a:lstStyle/>
+                <a:p>
+                  <a:r>
+                    <a:rPr lang="zh-TW" altLang="en-US">
+                      <a:noFill/>
+                    </a:rPr>
+                    <a:t> </a:t>
+                  </a:r>
+                </a:p>
+              </p:txBody>
+            </p:sp>
+          </mc:Fallback>
+        </mc:AlternateContent>
+        <mc:AlternateContent xmlns:mc="http://schemas.openxmlformats.org/markup-compatibility/2006">
+          <mc:Choice xmlns:a14="http://schemas.microsoft.com/office/drawing/2010/main" Requires="a14">
+            <p:sp>
+              <p:nvSpPr>
+                <p:cNvPr id="59" name="文字方塊 58">
+                  <a:extLst>
+                    <a:ext uri="{FF2B5EF4-FFF2-40B4-BE49-F238E27FC236}">
+                      <a16:creationId xmlns:a16="http://schemas.microsoft.com/office/drawing/2014/main" id="{CE297881-E961-4B5E-83EB-928F44B50082}"/>
+                    </a:ext>
+                  </a:extLst>
+                </p:cNvPr>
+                <p:cNvSpPr txBox="1"/>
+                <p:nvPr/>
+              </p:nvSpPr>
+              <p:spPr>
+                <a:xfrm>
+                  <a:off x="5783332" y="4281937"/>
+                  <a:ext cx="1006558" cy="369332"/>
+                </a:xfrm>
+                <a:prstGeom prst="rect">
+                  <a:avLst/>
+                </a:prstGeom>
+                <a:noFill/>
+              </p:spPr>
+              <p:txBody>
+                <a:bodyPr wrap="square" rtlCol="0">
+                  <a:spAutoFit/>
+                </a:bodyPr>
+                <a:lstStyle/>
+                <a:p>
+                  <a:pPr algn="ctr"/>
+                  <a14:m>
+                    <m:oMathPara xmlns:m="http://schemas.openxmlformats.org/officeDocument/2006/math">
+                      <m:oMathParaPr>
+                        <m:jc m:val="centerGroup"/>
+                      </m:oMathParaPr>
+                      <m:oMath xmlns:m="http://schemas.openxmlformats.org/officeDocument/2006/math">
+                        <m:r>
+                          <a:rPr lang="en-US" altLang="zh-TW" i="1">
+                            <a:latin typeface="Cambria Math" panose="02040503050406030204" pitchFamily="18" charset="0"/>
+                          </a:rPr>
+                          <m:t>ℓ=0</m:t>
+                        </m:r>
+                      </m:oMath>
+                    </m:oMathPara>
+                  </a14:m>
+                  <a:endParaRPr lang="zh-TW" altLang="en-US" dirty="0">
+                    <a:latin typeface="Times New Roman" panose="02020603050405020304" pitchFamily="18" charset="0"/>
+                    <a:cs typeface="Times New Roman" panose="02020603050405020304" pitchFamily="18" charset="0"/>
+                  </a:endParaRPr>
+                </a:p>
+              </p:txBody>
+            </p:sp>
+          </mc:Choice>
+          <mc:Fallback>
+            <p:sp>
+              <p:nvSpPr>
+                <p:cNvPr id="59" name="文字方塊 58">
+                  <a:extLst>
+                    <a:ext uri="{FF2B5EF4-FFF2-40B4-BE49-F238E27FC236}">
+                      <a16:creationId xmlns:a16="http://schemas.microsoft.com/office/drawing/2014/main" id="{CE297881-E961-4B5E-83EB-928F44B50082}"/>
+                    </a:ext>
+                  </a:extLst>
+                </p:cNvPr>
+                <p:cNvSpPr txBox="1">
+                  <a:spLocks noRot="1" noChangeAspect="1" noMove="1" noResize="1" noEditPoints="1" noAdjustHandles="1" noChangeArrowheads="1" noChangeShapeType="1" noTextEdit="1"/>
+                </p:cNvSpPr>
+                <p:nvPr/>
+              </p:nvSpPr>
+              <p:spPr>
+                <a:xfrm>
+                  <a:off x="5783332" y="4281937"/>
+                  <a:ext cx="1006558" cy="369332"/>
+                </a:xfrm>
+                <a:prstGeom prst="rect">
+                  <a:avLst/>
+                </a:prstGeom>
+                <a:blipFill>
+                  <a:blip r:embed="rId9"/>
+                  <a:stretch>
+                    <a:fillRect/>
+                  </a:stretch>
+                </a:blipFill>
+              </p:spPr>
+              <p:txBody>
+                <a:bodyPr/>
+                <a:lstStyle/>
+                <a:p>
+                  <a:r>
+                    <a:rPr lang="zh-TW" altLang="en-US">
+                      <a:noFill/>
+                    </a:rPr>
+                    <a:t> </a:t>
+                  </a:r>
+                </a:p>
+              </p:txBody>
+            </p:sp>
+          </mc:Fallback>
+        </mc:AlternateContent>
+        <mc:AlternateContent xmlns:mc="http://schemas.openxmlformats.org/markup-compatibility/2006">
+          <mc:Choice xmlns:a14="http://schemas.microsoft.com/office/drawing/2010/main" Requires="a14">
+            <p:sp>
+              <p:nvSpPr>
+                <p:cNvPr id="60" name="文字方塊 59">
+                  <a:extLst>
+                    <a:ext uri="{FF2B5EF4-FFF2-40B4-BE49-F238E27FC236}">
+                      <a16:creationId xmlns:a16="http://schemas.microsoft.com/office/drawing/2014/main" id="{1058910C-C900-415E-9577-4F2E6C6F0642}"/>
+                    </a:ext>
+                  </a:extLst>
+                </p:cNvPr>
+                <p:cNvSpPr txBox="1"/>
+                <p:nvPr/>
+              </p:nvSpPr>
+              <p:spPr>
+                <a:xfrm>
+                  <a:off x="8637405" y="4281937"/>
+                  <a:ext cx="1006558" cy="369332"/>
+                </a:xfrm>
+                <a:prstGeom prst="rect">
+                  <a:avLst/>
+                </a:prstGeom>
+                <a:noFill/>
+              </p:spPr>
+              <p:txBody>
+                <a:bodyPr wrap="square" rtlCol="0">
+                  <a:spAutoFit/>
+                </a:bodyPr>
+                <a:lstStyle/>
+                <a:p>
+                  <a:pPr algn="ctr"/>
+                  <a14:m>
+                    <m:oMathPara xmlns:m="http://schemas.openxmlformats.org/officeDocument/2006/math">
+                      <m:oMathParaPr>
+                        <m:jc m:val="centerGroup"/>
+                      </m:oMathParaPr>
+                      <m:oMath xmlns:m="http://schemas.openxmlformats.org/officeDocument/2006/math">
+                        <m:r>
+                          <a:rPr lang="en-US" altLang="zh-TW" i="1">
+                            <a:latin typeface="Cambria Math" panose="02040503050406030204" pitchFamily="18" charset="0"/>
+                          </a:rPr>
+                          <m:t>ℓ=2</m:t>
+                        </m:r>
+                      </m:oMath>
+                    </m:oMathPara>
+                  </a14:m>
+                  <a:endParaRPr lang="zh-TW" altLang="en-US" dirty="0">
+                    <a:latin typeface="Times New Roman" panose="02020603050405020304" pitchFamily="18" charset="0"/>
+                    <a:cs typeface="Times New Roman" panose="02020603050405020304" pitchFamily="18" charset="0"/>
+                  </a:endParaRPr>
+                </a:p>
+              </p:txBody>
+            </p:sp>
+          </mc:Choice>
+          <mc:Fallback>
+            <p:sp>
+              <p:nvSpPr>
+                <p:cNvPr id="60" name="文字方塊 59">
+                  <a:extLst>
+                    <a:ext uri="{FF2B5EF4-FFF2-40B4-BE49-F238E27FC236}">
+                      <a16:creationId xmlns:a16="http://schemas.microsoft.com/office/drawing/2014/main" id="{1058910C-C900-415E-9577-4F2E6C6F0642}"/>
+                    </a:ext>
+                  </a:extLst>
+                </p:cNvPr>
+                <p:cNvSpPr txBox="1">
+                  <a:spLocks noRot="1" noChangeAspect="1" noMove="1" noResize="1" noEditPoints="1" noAdjustHandles="1" noChangeArrowheads="1" noChangeShapeType="1" noTextEdit="1"/>
+                </p:cNvSpPr>
+                <p:nvPr/>
+              </p:nvSpPr>
+              <p:spPr>
+                <a:xfrm>
+                  <a:off x="8637405" y="4281937"/>
+                  <a:ext cx="1006558" cy="369332"/>
+                </a:xfrm>
+                <a:prstGeom prst="rect">
+                  <a:avLst/>
+                </a:prstGeom>
+                <a:blipFill>
+                  <a:blip r:embed="rId10"/>
+                  <a:stretch>
+                    <a:fillRect/>
+                  </a:stretch>
+                </a:blipFill>
+              </p:spPr>
+              <p:txBody>
+                <a:bodyPr/>
+                <a:lstStyle/>
+                <a:p>
+                  <a:r>
+                    <a:rPr lang="zh-TW" altLang="en-US">
+                      <a:noFill/>
+                    </a:rPr>
+                    <a:t> </a:t>
+                  </a:r>
+                </a:p>
+              </p:txBody>
+            </p:sp>
+          </mc:Fallback>
+        </mc:AlternateContent>
+        <mc:AlternateContent xmlns:mc="http://schemas.openxmlformats.org/markup-compatibility/2006">
+          <mc:Choice xmlns:a14="http://schemas.microsoft.com/office/drawing/2010/main" Requires="a14">
+            <p:sp>
+              <p:nvSpPr>
+                <p:cNvPr id="61" name="文字方塊 60">
+                  <a:extLst>
+                    <a:ext uri="{FF2B5EF4-FFF2-40B4-BE49-F238E27FC236}">
+                      <a16:creationId xmlns:a16="http://schemas.microsoft.com/office/drawing/2014/main" id="{F9D57B0F-D9B1-4F26-8293-A741864DAF18}"/>
+                    </a:ext>
+                  </a:extLst>
+                </p:cNvPr>
+                <p:cNvSpPr txBox="1"/>
+                <p:nvPr/>
+              </p:nvSpPr>
+              <p:spPr>
+                <a:xfrm>
+                  <a:off x="7210369" y="4281937"/>
+                  <a:ext cx="1006558" cy="369332"/>
+                </a:xfrm>
+                <a:prstGeom prst="rect">
+                  <a:avLst/>
+                </a:prstGeom>
+                <a:noFill/>
+              </p:spPr>
+              <p:txBody>
+                <a:bodyPr wrap="square" rtlCol="0">
+                  <a:spAutoFit/>
+                </a:bodyPr>
+                <a:lstStyle/>
+                <a:p>
+                  <a:pPr algn="ctr"/>
+                  <a14:m>
+                    <m:oMathPara xmlns:m="http://schemas.openxmlformats.org/officeDocument/2006/math">
+                      <m:oMathParaPr>
+                        <m:jc m:val="centerGroup"/>
+                      </m:oMathParaPr>
+                      <m:oMath xmlns:m="http://schemas.openxmlformats.org/officeDocument/2006/math">
+                        <m:r>
+                          <a:rPr lang="en-US" altLang="zh-TW" i="1">
+                            <a:latin typeface="Cambria Math" panose="02040503050406030204" pitchFamily="18" charset="0"/>
+                          </a:rPr>
+                          <m:t>ℓ=1</m:t>
+                        </m:r>
+                      </m:oMath>
+                    </m:oMathPara>
+                  </a14:m>
+                  <a:endParaRPr lang="zh-TW" altLang="en-US" dirty="0">
+                    <a:latin typeface="Times New Roman" panose="02020603050405020304" pitchFamily="18" charset="0"/>
+                    <a:cs typeface="Times New Roman" panose="02020603050405020304" pitchFamily="18" charset="0"/>
+                  </a:endParaRPr>
+                </a:p>
+              </p:txBody>
+            </p:sp>
+          </mc:Choice>
+          <mc:Fallback>
+            <p:sp>
+              <p:nvSpPr>
+                <p:cNvPr id="61" name="文字方塊 60">
+                  <a:extLst>
+                    <a:ext uri="{FF2B5EF4-FFF2-40B4-BE49-F238E27FC236}">
+                      <a16:creationId xmlns:a16="http://schemas.microsoft.com/office/drawing/2014/main" id="{F9D57B0F-D9B1-4F26-8293-A741864DAF18}"/>
+                    </a:ext>
+                  </a:extLst>
+                </p:cNvPr>
+                <p:cNvSpPr txBox="1">
+                  <a:spLocks noRot="1" noChangeAspect="1" noMove="1" noResize="1" noEditPoints="1" noAdjustHandles="1" noChangeArrowheads="1" noChangeShapeType="1" noTextEdit="1"/>
+                </p:cNvSpPr>
+                <p:nvPr/>
+              </p:nvSpPr>
+              <p:spPr>
+                <a:xfrm>
+                  <a:off x="7210369" y="4281937"/>
+                  <a:ext cx="1006558" cy="369332"/>
+                </a:xfrm>
+                <a:prstGeom prst="rect">
+                  <a:avLst/>
+                </a:prstGeom>
+                <a:blipFill>
+                  <a:blip r:embed="rId11"/>
+                  <a:stretch>
+                    <a:fillRect/>
+                  </a:stretch>
+                </a:blipFill>
+              </p:spPr>
+              <p:txBody>
+                <a:bodyPr/>
+                <a:lstStyle/>
+                <a:p>
+                  <a:r>
+                    <a:rPr lang="zh-TW" altLang="en-US">
+                      <a:noFill/>
+                    </a:rPr>
+                    <a:t> </a:t>
+                  </a:r>
+                </a:p>
+              </p:txBody>
+            </p:sp>
+          </mc:Fallback>
+        </mc:AlternateContent>
+        <mc:AlternateContent xmlns:mc="http://schemas.openxmlformats.org/markup-compatibility/2006">
+          <mc:Choice xmlns:a14="http://schemas.microsoft.com/office/drawing/2010/main" Requires="a14">
+            <p:sp>
+              <p:nvSpPr>
+                <p:cNvPr id="62" name="文字方塊 61">
+                  <a:extLst>
+                    <a:ext uri="{FF2B5EF4-FFF2-40B4-BE49-F238E27FC236}">
+                      <a16:creationId xmlns:a16="http://schemas.microsoft.com/office/drawing/2014/main" id="{AAA00F8E-F9E9-49E8-A5F3-CBB433CACFF6}"/>
+                    </a:ext>
+                  </a:extLst>
+                </p:cNvPr>
+                <p:cNvSpPr txBox="1"/>
+                <p:nvPr/>
+              </p:nvSpPr>
+              <p:spPr>
+                <a:xfrm>
+                  <a:off x="4356295" y="4281937"/>
+                  <a:ext cx="1006558" cy="369332"/>
+                </a:xfrm>
+                <a:prstGeom prst="rect">
+                  <a:avLst/>
+                </a:prstGeom>
+                <a:noFill/>
+              </p:spPr>
+              <p:txBody>
+                <a:bodyPr wrap="square" rtlCol="0">
+                  <a:spAutoFit/>
+                </a:bodyPr>
+                <a:lstStyle/>
+                <a:p>
+                  <a:pPr algn="ctr"/>
+                  <a14:m>
+                    <m:oMathPara xmlns:m="http://schemas.openxmlformats.org/officeDocument/2006/math">
+                      <m:oMathParaPr>
+                        <m:jc m:val="centerGroup"/>
+                      </m:oMathParaPr>
+                      <m:oMath xmlns:m="http://schemas.openxmlformats.org/officeDocument/2006/math">
+                        <m:r>
+                          <a:rPr lang="en-US" altLang="zh-TW" i="1">
+                            <a:latin typeface="Cambria Math" panose="02040503050406030204" pitchFamily="18" charset="0"/>
+                          </a:rPr>
+                          <m:t>ℓ=−1</m:t>
+                        </m:r>
+                      </m:oMath>
+                    </m:oMathPara>
+                  </a14:m>
+                  <a:endParaRPr lang="zh-TW" altLang="en-US" dirty="0">
+                    <a:latin typeface="Times New Roman" panose="02020603050405020304" pitchFamily="18" charset="0"/>
+                    <a:cs typeface="Times New Roman" panose="02020603050405020304" pitchFamily="18" charset="0"/>
+                  </a:endParaRPr>
+                </a:p>
+              </p:txBody>
+            </p:sp>
+          </mc:Choice>
+          <mc:Fallback>
+            <p:sp>
+              <p:nvSpPr>
+                <p:cNvPr id="62" name="文字方塊 61">
+                  <a:extLst>
+                    <a:ext uri="{FF2B5EF4-FFF2-40B4-BE49-F238E27FC236}">
+                      <a16:creationId xmlns:a16="http://schemas.microsoft.com/office/drawing/2014/main" id="{AAA00F8E-F9E9-49E8-A5F3-CBB433CACFF6}"/>
+                    </a:ext>
+                  </a:extLst>
+                </p:cNvPr>
+                <p:cNvSpPr txBox="1">
+                  <a:spLocks noRot="1" noChangeAspect="1" noMove="1" noResize="1" noEditPoints="1" noAdjustHandles="1" noChangeArrowheads="1" noChangeShapeType="1" noTextEdit="1"/>
+                </p:cNvSpPr>
+                <p:nvPr/>
+              </p:nvSpPr>
+              <p:spPr>
+                <a:xfrm>
+                  <a:off x="4356295" y="4281937"/>
+                  <a:ext cx="1006558" cy="369332"/>
+                </a:xfrm>
+                <a:prstGeom prst="rect">
+                  <a:avLst/>
+                </a:prstGeom>
+                <a:blipFill>
+                  <a:blip r:embed="rId12"/>
+                  <a:stretch>
+                    <a:fillRect/>
+                  </a:stretch>
+                </a:blipFill>
+              </p:spPr>
+              <p:txBody>
+                <a:bodyPr/>
+                <a:lstStyle/>
+                <a:p>
+                  <a:r>
+                    <a:rPr lang="zh-TW" altLang="en-US">
+                      <a:noFill/>
+                    </a:rPr>
+                    <a:t> </a:t>
+                  </a:r>
+                </a:p>
+              </p:txBody>
+            </p:sp>
+          </mc:Fallback>
+        </mc:AlternateContent>
+        <mc:AlternateContent xmlns:mc="http://schemas.openxmlformats.org/markup-compatibility/2006">
+          <mc:Choice xmlns:a14="http://schemas.microsoft.com/office/drawing/2010/main" Requires="a14">
+            <p:sp>
+              <p:nvSpPr>
+                <p:cNvPr id="63" name="文字方塊 62">
+                  <a:extLst>
+                    <a:ext uri="{FF2B5EF4-FFF2-40B4-BE49-F238E27FC236}">
+                      <a16:creationId xmlns:a16="http://schemas.microsoft.com/office/drawing/2014/main" id="{A4D67281-D7F6-40E7-B0DE-82DF71F1DA52}"/>
+                    </a:ext>
+                  </a:extLst>
+                </p:cNvPr>
+                <p:cNvSpPr txBox="1"/>
+                <p:nvPr/>
+              </p:nvSpPr>
+              <p:spPr>
+                <a:xfrm>
+                  <a:off x="2929258" y="4281937"/>
+                  <a:ext cx="1006558" cy="369332"/>
+                </a:xfrm>
+                <a:prstGeom prst="rect">
+                  <a:avLst/>
+                </a:prstGeom>
+                <a:noFill/>
+              </p:spPr>
+              <p:txBody>
+                <a:bodyPr wrap="square" rtlCol="0">
+                  <a:spAutoFit/>
+                </a:bodyPr>
+                <a:lstStyle/>
+                <a:p>
+                  <a:pPr algn="ctr"/>
+                  <a14:m>
+                    <m:oMathPara xmlns:m="http://schemas.openxmlformats.org/officeDocument/2006/math">
+                      <m:oMathParaPr>
+                        <m:jc m:val="centerGroup"/>
+                      </m:oMathParaPr>
+                      <m:oMath xmlns:m="http://schemas.openxmlformats.org/officeDocument/2006/math">
+                        <m:r>
+                          <a:rPr lang="en-US" altLang="zh-TW" i="1">
+                            <a:latin typeface="Cambria Math" panose="02040503050406030204" pitchFamily="18" charset="0"/>
+                          </a:rPr>
+                          <m:t>ℓ=−2</m:t>
+                        </m:r>
+                      </m:oMath>
+                    </m:oMathPara>
+                  </a14:m>
+                  <a:endParaRPr lang="zh-TW" altLang="en-US" dirty="0">
+                    <a:latin typeface="Times New Roman" panose="02020603050405020304" pitchFamily="18" charset="0"/>
+                    <a:cs typeface="Times New Roman" panose="02020603050405020304" pitchFamily="18" charset="0"/>
+                  </a:endParaRPr>
+                </a:p>
+              </p:txBody>
+            </p:sp>
+          </mc:Choice>
+          <mc:Fallback>
+            <p:sp>
+              <p:nvSpPr>
+                <p:cNvPr id="63" name="文字方塊 62">
+                  <a:extLst>
+                    <a:ext uri="{FF2B5EF4-FFF2-40B4-BE49-F238E27FC236}">
+                      <a16:creationId xmlns:a16="http://schemas.microsoft.com/office/drawing/2014/main" id="{A4D67281-D7F6-40E7-B0DE-82DF71F1DA52}"/>
+                    </a:ext>
+                  </a:extLst>
+                </p:cNvPr>
+                <p:cNvSpPr txBox="1">
+                  <a:spLocks noRot="1" noChangeAspect="1" noMove="1" noResize="1" noEditPoints="1" noAdjustHandles="1" noChangeArrowheads="1" noChangeShapeType="1" noTextEdit="1"/>
+                </p:cNvSpPr>
+                <p:nvPr/>
+              </p:nvSpPr>
+              <p:spPr>
+                <a:xfrm>
+                  <a:off x="2929258" y="4281937"/>
+                  <a:ext cx="1006558" cy="369332"/>
+                </a:xfrm>
+                <a:prstGeom prst="rect">
+                  <a:avLst/>
+                </a:prstGeom>
+                <a:blipFill>
+                  <a:blip r:embed="rId13"/>
+                  <a:stretch>
+                    <a:fillRect/>
+                  </a:stretch>
+                </a:blipFill>
+              </p:spPr>
+              <p:txBody>
+                <a:bodyPr/>
+                <a:lstStyle/>
+                <a:p>
+                  <a:r>
+                    <a:rPr lang="zh-TW" altLang="en-US">
+                      <a:noFill/>
+                    </a:rPr>
+                    <a:t> </a:t>
+                  </a:r>
+                </a:p>
+              </p:txBody>
+            </p:sp>
+          </mc:Fallback>
+        </mc:AlternateContent>
+        <mc:AlternateContent xmlns:mc="http://schemas.openxmlformats.org/markup-compatibility/2006">
+          <mc:Choice xmlns:a14="http://schemas.microsoft.com/office/drawing/2010/main" Requires="a14">
+            <p:sp>
+              <p:nvSpPr>
+                <p:cNvPr id="53" name="文字方塊 52">
+                  <a:extLst>
+                    <a:ext uri="{FF2B5EF4-FFF2-40B4-BE49-F238E27FC236}">
+                      <a16:creationId xmlns:a16="http://schemas.microsoft.com/office/drawing/2014/main" id="{7FE76E93-B02D-4EC3-9A0D-9DB35AB83345}"/>
+                    </a:ext>
+                  </a:extLst>
+                </p:cNvPr>
+                <p:cNvSpPr txBox="1"/>
+                <p:nvPr/>
+              </p:nvSpPr>
+              <p:spPr>
+                <a:xfrm>
+                  <a:off x="3079680" y="3268146"/>
+                  <a:ext cx="675585" cy="369332"/>
+                </a:xfrm>
+                <a:prstGeom prst="rect">
+                  <a:avLst/>
+                </a:prstGeom>
+                <a:noFill/>
+              </p:spPr>
+              <p:txBody>
+                <a:bodyPr wrap="square" rtlCol="0">
+                  <a:spAutoFit/>
+                </a:bodyPr>
+                <a:lstStyle/>
+                <a:p>
+                  <a:pPr algn="ctr"/>
+                  <a14:m>
+                    <m:oMathPara xmlns:m="http://schemas.openxmlformats.org/officeDocument/2006/math">
+                      <m:oMathParaPr>
+                        <m:jc m:val="centerGroup"/>
+                      </m:oMathParaPr>
+                      <m:oMath xmlns:m="http://schemas.openxmlformats.org/officeDocument/2006/math">
+                        <m:r>
+                          <a:rPr lang="en-US" altLang="zh-TW" i="1">
+                            <a:latin typeface="Cambria Math" panose="02040503050406030204" pitchFamily="18" charset="0"/>
+                          </a:rPr>
+                          <m:t>𝜌</m:t>
+                        </m:r>
+                        <m:d>
+                          <m:dPr>
+                            <m:ctrlPr>
+                              <a:rPr lang="en-US" altLang="zh-TW" i="1">
+                                <a:latin typeface="Cambria Math" panose="02040503050406030204" pitchFamily="18" charset="0"/>
+                              </a:rPr>
+                            </m:ctrlPr>
+                          </m:dPr>
+                          <m:e>
+                            <m:r>
+                              <a:rPr lang="en-US" altLang="zh-TW" i="1">
+                                <a:latin typeface="Cambria Math" panose="02040503050406030204" pitchFamily="18" charset="0"/>
+                              </a:rPr>
+                              <m:t>𝜇</m:t>
+                            </m:r>
+                            <m:r>
+                              <m:rPr>
+                                <m:sty m:val="p"/>
+                              </m:rPr>
+                              <a:rPr lang="en-US" altLang="zh-TW">
+                                <a:latin typeface="Cambria Math" panose="02040503050406030204" pitchFamily="18" charset="0"/>
+                              </a:rPr>
+                              <m:t>m</m:t>
+                            </m:r>
+                          </m:e>
+                        </m:d>
+                      </m:oMath>
+                    </m:oMathPara>
+                  </a14:m>
+                  <a:endParaRPr lang="zh-TW" altLang="en-US" dirty="0">
+                    <a:latin typeface="Times New Roman" panose="02020603050405020304" pitchFamily="18" charset="0"/>
+                    <a:cs typeface="Times New Roman" panose="02020603050405020304" pitchFamily="18" charset="0"/>
+                  </a:endParaRPr>
+                </a:p>
+              </p:txBody>
+            </p:sp>
+          </mc:Choice>
+          <mc:Fallback>
+            <p:sp>
+              <p:nvSpPr>
+                <p:cNvPr id="53" name="文字方塊 52">
+                  <a:extLst>
+                    <a:ext uri="{FF2B5EF4-FFF2-40B4-BE49-F238E27FC236}">
+                      <a16:creationId xmlns:a16="http://schemas.microsoft.com/office/drawing/2014/main" id="{7FE76E93-B02D-4EC3-9A0D-9DB35AB83345}"/>
+                    </a:ext>
+                  </a:extLst>
+                </p:cNvPr>
+                <p:cNvSpPr txBox="1">
+                  <a:spLocks noRot="1" noChangeAspect="1" noMove="1" noResize="1" noEditPoints="1" noAdjustHandles="1" noChangeArrowheads="1" noChangeShapeType="1" noTextEdit="1"/>
+                </p:cNvSpPr>
+                <p:nvPr/>
+              </p:nvSpPr>
+              <p:spPr>
+                <a:xfrm>
+                  <a:off x="3079680" y="3268146"/>
+                  <a:ext cx="675585" cy="369332"/>
+                </a:xfrm>
+                <a:prstGeom prst="rect">
+                  <a:avLst/>
+                </a:prstGeom>
+                <a:blipFill>
+                  <a:blip r:embed="rId14"/>
+                  <a:stretch>
+                    <a:fillRect l="-14545" b="-8197"/>
+                  </a:stretch>
+                </a:blipFill>
+              </p:spPr>
+              <p:txBody>
+                <a:bodyPr/>
+                <a:lstStyle/>
+                <a:p>
+                  <a:r>
+                    <a:rPr lang="zh-TW" altLang="en-US">
+                      <a:noFill/>
+                    </a:rPr>
+                    <a:t> </a:t>
+                  </a:r>
+                </a:p>
+              </p:txBody>
+            </p:sp>
+          </mc:Fallback>
+        </mc:AlternateContent>
+        <p:sp>
+          <p:nvSpPr>
+            <p:cNvPr id="54" name="文字方塊 53">
+              <a:extLst>
+                <a:ext uri="{FF2B5EF4-FFF2-40B4-BE49-F238E27FC236}">
+                  <a16:creationId xmlns:a16="http://schemas.microsoft.com/office/drawing/2014/main" id="{5862E318-61FC-4C34-8EAE-6C2CADB3295A}"/>
+                </a:ext>
+              </a:extLst>
+            </p:cNvPr>
+            <p:cNvSpPr txBox="1"/>
+            <p:nvPr/>
+          </p:nvSpPr>
+          <p:spPr>
+            <a:xfrm>
+              <a:off x="385307" y="3044600"/>
+              <a:ext cx="1643518" cy="369332"/>
+            </a:xfrm>
+            <a:prstGeom prst="rect">
+              <a:avLst/>
+            </a:prstGeom>
+            <a:noFill/>
+          </p:spPr>
+          <p:txBody>
+            <a:bodyPr wrap="square" rtlCol="0">
+              <a:spAutoFit/>
+            </a:bodyPr>
+            <a:lstStyle/>
+            <a:p>
+              <a:pPr algn="ctr"/>
+              <a:r>
+                <a:rPr lang="en-US" altLang="zh-TW" dirty="0">
+                  <a:latin typeface="Times New Roman" panose="02020603050405020304" pitchFamily="18" charset="0"/>
+                  <a:cs typeface="Times New Roman" panose="02020603050405020304" pitchFamily="18" charset="0"/>
+                </a:rPr>
+                <a:t>(arbitrary units)</a:t>
+              </a:r>
+              <a:endParaRPr lang="zh-TW" altLang="en-US" dirty="0">
+                <a:latin typeface="Times New Roman" panose="02020603050405020304" pitchFamily="18" charset="0"/>
+                <a:cs typeface="Times New Roman" panose="02020603050405020304" pitchFamily="18" charset="0"/>
+              </a:endParaRPr>
+            </a:p>
+          </p:txBody>
+        </p:sp>
+        <mc:AlternateContent xmlns:mc="http://schemas.openxmlformats.org/markup-compatibility/2006">
+          <mc:Choice xmlns:a14="http://schemas.microsoft.com/office/drawing/2010/main" Requires="a14">
+            <p:sp>
+              <p:nvSpPr>
+                <p:cNvPr id="55" name="矩形 54">
+                  <a:extLst>
+                    <a:ext uri="{FF2B5EF4-FFF2-40B4-BE49-F238E27FC236}">
+                      <a16:creationId xmlns:a16="http://schemas.microsoft.com/office/drawing/2014/main" id="{152BF3A2-AEA0-485D-9EFB-ED42184338EC}"/>
+                    </a:ext>
+                  </a:extLst>
+                </p:cNvPr>
+                <p:cNvSpPr/>
+                <p:nvPr/>
+              </p:nvSpPr>
+              <p:spPr>
+                <a:xfrm>
+                  <a:off x="2412525" y="1198536"/>
+                  <a:ext cx="3721573" cy="369332"/>
+                </a:xfrm>
+                <a:prstGeom prst="rect">
+                  <a:avLst/>
+                </a:prstGeom>
+              </p:spPr>
+              <p:txBody>
+                <a:bodyPr wrap="square">
+                  <a:spAutoFit/>
+                </a:bodyPr>
+                <a:lstStyle/>
+                <a:p>
+                  <a:r>
+                    <a:rPr lang="en-US" altLang="zh-TW" dirty="0"/>
+                    <a:t>Normally focused : </a:t>
+                  </a:r>
+                  <a14:m>
                     <m:oMath xmlns:m="http://schemas.openxmlformats.org/officeDocument/2006/math">
+                      <m:sSub>
+                        <m:sSubPr>
+                          <m:ctrlPr>
+                            <a:rPr lang="en-US" altLang="zh-TW" i="1">
+                              <a:latin typeface="Cambria Math" panose="02040503050406030204" pitchFamily="18" charset="0"/>
+                            </a:rPr>
+                          </m:ctrlPr>
+                        </m:sSubPr>
+                        <m:e>
+                          <m:r>
+                            <a:rPr lang="en-US" altLang="zh-TW" i="1">
+                              <a:latin typeface="Cambria Math" panose="02040503050406030204" pitchFamily="18" charset="0"/>
+                            </a:rPr>
+                            <m:t>𝑊</m:t>
+                          </m:r>
+                        </m:e>
+                        <m:sub>
+                          <m:r>
+                            <a:rPr lang="en-US" altLang="zh-TW" i="1">
+                              <a:latin typeface="Cambria Math" panose="02040503050406030204" pitchFamily="18" charset="0"/>
+                            </a:rPr>
+                            <m:t>0</m:t>
+                          </m:r>
+                        </m:sub>
+                      </m:sSub>
                       <m:r>
                         <a:rPr lang="en-US" altLang="zh-TW" i="1">
                           <a:latin typeface="Cambria Math" panose="02040503050406030204" pitchFamily="18" charset="0"/>
                         </a:rPr>
-                        <m:t>ℓ=0</m:t>
+                        <m:t>=1.5</m:t>
                       </m:r>
-                    </m:oMath>
-                  </m:oMathPara>
-                </a14:m>
-                <a:endParaRPr lang="zh-TW" altLang="en-US" dirty="0">
-                  <a:latin typeface="Times New Roman" panose="02020603050405020304" pitchFamily="18" charset="0"/>
-                  <a:cs typeface="Times New Roman" panose="02020603050405020304" pitchFamily="18" charset="0"/>
-                </a:endParaRPr>
-              </a:p>
-            </p:txBody>
-          </p:sp>
-        </mc:Choice>
-        <mc:Fallback>
-          <p:sp>
-            <p:nvSpPr>
-              <p:cNvPr id="46" name="文字方塊 45">
-                <a:extLst>
-                  <a:ext uri="{FF2B5EF4-FFF2-40B4-BE49-F238E27FC236}">
-                    <a16:creationId xmlns:a16="http://schemas.microsoft.com/office/drawing/2014/main" id="{D139B888-3F1C-498F-88E9-BE66C800874E}"/>
-                  </a:ext>
-                </a:extLst>
-              </p:cNvPr>
-              <p:cNvSpPr txBox="1">
-                <a:spLocks noRot="1" noChangeAspect="1" noMove="1" noResize="1" noEditPoints="1" noAdjustHandles="1" noChangeArrowheads="1" noChangeShapeType="1" noTextEdit="1"/>
-              </p:cNvSpPr>
-              <p:nvPr/>
-            </p:nvSpPr>
-            <p:spPr>
-              <a:xfrm>
-                <a:off x="4612708" y="1746135"/>
-                <a:ext cx="1133442" cy="369332"/>
-              </a:xfrm>
-              <a:prstGeom prst="rect">
-                <a:avLst/>
-              </a:prstGeom>
-              <a:blipFill>
-                <a:blip r:embed="rId7"/>
-                <a:stretch>
-                  <a:fillRect/>
-                </a:stretch>
-              </a:blipFill>
-            </p:spPr>
-            <p:txBody>
-              <a:bodyPr/>
-              <a:lstStyle/>
-              <a:p>
-                <a:r>
-                  <a:rPr lang="zh-TW" altLang="en-US">
-                    <a:noFill/>
-                  </a:rPr>
-                  <a:t> </a:t>
-                </a:r>
-              </a:p>
-            </p:txBody>
-          </p:sp>
-        </mc:Fallback>
-      </mc:AlternateContent>
-      <mc:AlternateContent xmlns:mc="http://schemas.openxmlformats.org/markup-compatibility/2006">
-        <mc:Choice xmlns:a14="http://schemas.microsoft.com/office/drawing/2010/main" Requires="a14">
-          <p:sp>
-            <p:nvSpPr>
-              <p:cNvPr id="47" name="文字方塊 46">
-                <a:extLst>
-                  <a:ext uri="{FF2B5EF4-FFF2-40B4-BE49-F238E27FC236}">
-                    <a16:creationId xmlns:a16="http://schemas.microsoft.com/office/drawing/2014/main" id="{4F245FA2-4DBE-46ED-9B8D-44919FF47C9F}"/>
-                  </a:ext>
-                </a:extLst>
-              </p:cNvPr>
-              <p:cNvSpPr txBox="1"/>
-              <p:nvPr/>
-            </p:nvSpPr>
-            <p:spPr>
-              <a:xfrm>
-                <a:off x="8184841" y="1746135"/>
-                <a:ext cx="1133442" cy="369332"/>
-              </a:xfrm>
-              <a:prstGeom prst="rect">
-                <a:avLst/>
-              </a:prstGeom>
-              <a:noFill/>
-            </p:spPr>
-            <p:txBody>
-              <a:bodyPr wrap="square" rtlCol="0">
-                <a:spAutoFit/>
-              </a:bodyPr>
-              <a:lstStyle/>
-              <a:p>
-                <a:pPr/>
-                <a14:m>
-                  <m:oMathPara xmlns:m="http://schemas.openxmlformats.org/officeDocument/2006/math">
-                    <m:oMathParaPr>
-                      <m:jc m:val="centerGroup"/>
-                    </m:oMathParaPr>
-                    <m:oMath xmlns:m="http://schemas.openxmlformats.org/officeDocument/2006/math">
                       <m:r>
                         <a:rPr lang="en-US" altLang="zh-TW" i="1">
                           <a:latin typeface="Cambria Math" panose="02040503050406030204" pitchFamily="18" charset="0"/>
                         </a:rPr>
-                        <m:t>ℓ=2</m:t>
+                        <m:t> </m:t>
                       </m:r>
-                    </m:oMath>
-                  </m:oMathPara>
-                </a14:m>
-                <a:endParaRPr lang="zh-TW" altLang="en-US" dirty="0">
-                  <a:latin typeface="Times New Roman" panose="02020603050405020304" pitchFamily="18" charset="0"/>
-                  <a:cs typeface="Times New Roman" panose="02020603050405020304" pitchFamily="18" charset="0"/>
-                </a:endParaRPr>
-              </a:p>
-            </p:txBody>
-          </p:sp>
-        </mc:Choice>
-        <mc:Fallback>
-          <p:sp>
-            <p:nvSpPr>
-              <p:cNvPr id="47" name="文字方塊 46">
-                <a:extLst>
-                  <a:ext uri="{FF2B5EF4-FFF2-40B4-BE49-F238E27FC236}">
-                    <a16:creationId xmlns:a16="http://schemas.microsoft.com/office/drawing/2014/main" id="{4F245FA2-4DBE-46ED-9B8D-44919FF47C9F}"/>
-                  </a:ext>
-                </a:extLst>
-              </p:cNvPr>
-              <p:cNvSpPr txBox="1">
-                <a:spLocks noRot="1" noChangeAspect="1" noMove="1" noResize="1" noEditPoints="1" noAdjustHandles="1" noChangeArrowheads="1" noChangeShapeType="1" noTextEdit="1"/>
-              </p:cNvSpPr>
-              <p:nvPr/>
-            </p:nvSpPr>
-            <p:spPr>
-              <a:xfrm>
-                <a:off x="8184841" y="1746135"/>
-                <a:ext cx="1133442" cy="369332"/>
-              </a:xfrm>
-              <a:prstGeom prst="rect">
-                <a:avLst/>
-              </a:prstGeom>
-              <a:blipFill>
-                <a:blip r:embed="rId8"/>
-                <a:stretch>
-                  <a:fillRect/>
-                </a:stretch>
-              </a:blipFill>
-            </p:spPr>
-            <p:txBody>
-              <a:bodyPr/>
-              <a:lstStyle/>
-              <a:p>
-                <a:r>
-                  <a:rPr lang="zh-TW" altLang="en-US">
-                    <a:noFill/>
-                  </a:rPr>
-                  <a:t> </a:t>
-                </a:r>
-              </a:p>
-            </p:txBody>
-          </p:sp>
-        </mc:Fallback>
-      </mc:AlternateContent>
-      <mc:AlternateContent xmlns:mc="http://schemas.openxmlformats.org/markup-compatibility/2006">
-        <mc:Choice xmlns:a14="http://schemas.microsoft.com/office/drawing/2010/main" Requires="a14">
-          <p:sp>
-            <p:nvSpPr>
-              <p:cNvPr id="48" name="文字方塊 47">
-                <a:extLst>
-                  <a:ext uri="{FF2B5EF4-FFF2-40B4-BE49-F238E27FC236}">
-                    <a16:creationId xmlns:a16="http://schemas.microsoft.com/office/drawing/2014/main" id="{58B10F4E-2C32-473F-9973-42D224D7247B}"/>
-                  </a:ext>
-                </a:extLst>
-              </p:cNvPr>
-              <p:cNvSpPr txBox="1"/>
-              <p:nvPr/>
-            </p:nvSpPr>
-            <p:spPr>
-              <a:xfrm>
-                <a:off x="6398775" y="1746135"/>
-                <a:ext cx="1133442" cy="369332"/>
-              </a:xfrm>
-              <a:prstGeom prst="rect">
-                <a:avLst/>
-              </a:prstGeom>
-              <a:noFill/>
-            </p:spPr>
-            <p:txBody>
-              <a:bodyPr wrap="square" rtlCol="0">
-                <a:spAutoFit/>
-              </a:bodyPr>
-              <a:lstStyle/>
-              <a:p>
-                <a:pPr/>
-                <a14:m>
-                  <m:oMathPara xmlns:m="http://schemas.openxmlformats.org/officeDocument/2006/math">
-                    <m:oMathParaPr>
-                      <m:jc m:val="centerGroup"/>
-                    </m:oMathParaPr>
-                    <m:oMath xmlns:m="http://schemas.openxmlformats.org/officeDocument/2006/math">
                       <m:r>
                         <a:rPr lang="en-US" altLang="zh-TW" i="1">
                           <a:latin typeface="Cambria Math" panose="02040503050406030204" pitchFamily="18" charset="0"/>
                         </a:rPr>
-                        <m:t>ℓ=1</m:t>
+                        <m:t>𝜇</m:t>
                       </m:r>
-                    </m:oMath>
-                  </m:oMathPara>
-                </a14:m>
-                <a:endParaRPr lang="zh-TW" altLang="en-US" dirty="0">
-                  <a:latin typeface="Times New Roman" panose="02020603050405020304" pitchFamily="18" charset="0"/>
-                  <a:cs typeface="Times New Roman" panose="02020603050405020304" pitchFamily="18" charset="0"/>
-                </a:endParaRPr>
-              </a:p>
-            </p:txBody>
-          </p:sp>
-        </mc:Choice>
-        <mc:Fallback>
-          <p:sp>
-            <p:nvSpPr>
-              <p:cNvPr id="48" name="文字方塊 47">
-                <a:extLst>
-                  <a:ext uri="{FF2B5EF4-FFF2-40B4-BE49-F238E27FC236}">
-                    <a16:creationId xmlns:a16="http://schemas.microsoft.com/office/drawing/2014/main" id="{58B10F4E-2C32-473F-9973-42D224D7247B}"/>
-                  </a:ext>
-                </a:extLst>
-              </p:cNvPr>
-              <p:cNvSpPr txBox="1">
-                <a:spLocks noRot="1" noChangeAspect="1" noMove="1" noResize="1" noEditPoints="1" noAdjustHandles="1" noChangeArrowheads="1" noChangeShapeType="1" noTextEdit="1"/>
-              </p:cNvSpPr>
-              <p:nvPr/>
-            </p:nvSpPr>
-            <p:spPr>
-              <a:xfrm>
-                <a:off x="6398775" y="1746135"/>
-                <a:ext cx="1133442" cy="369332"/>
-              </a:xfrm>
-              <a:prstGeom prst="rect">
-                <a:avLst/>
-              </a:prstGeom>
-              <a:blipFill>
-                <a:blip r:embed="rId9"/>
-                <a:stretch>
-                  <a:fillRect/>
-                </a:stretch>
-              </a:blipFill>
-            </p:spPr>
-            <p:txBody>
-              <a:bodyPr/>
-              <a:lstStyle/>
-              <a:p>
-                <a:r>
-                  <a:rPr lang="zh-TW" altLang="en-US">
-                    <a:noFill/>
-                  </a:rPr>
-                  <a:t> </a:t>
-                </a:r>
-              </a:p>
-            </p:txBody>
-          </p:sp>
-        </mc:Fallback>
-      </mc:AlternateContent>
-      <mc:AlternateContent xmlns:mc="http://schemas.openxmlformats.org/markup-compatibility/2006">
-        <mc:Choice xmlns:a14="http://schemas.microsoft.com/office/drawing/2010/main" Requires="a14">
-          <p:sp>
-            <p:nvSpPr>
-              <p:cNvPr id="50" name="文字方塊 49">
-                <a:extLst>
-                  <a:ext uri="{FF2B5EF4-FFF2-40B4-BE49-F238E27FC236}">
-                    <a16:creationId xmlns:a16="http://schemas.microsoft.com/office/drawing/2014/main" id="{9BF2C953-92CE-4A9A-B6D5-E85DE4B362FA}"/>
-                  </a:ext>
-                </a:extLst>
-              </p:cNvPr>
-              <p:cNvSpPr txBox="1"/>
-              <p:nvPr/>
-            </p:nvSpPr>
-            <p:spPr>
-              <a:xfrm>
-                <a:off x="2826641" y="1746135"/>
-                <a:ext cx="1133442" cy="369332"/>
-              </a:xfrm>
-              <a:prstGeom prst="rect">
-                <a:avLst/>
-              </a:prstGeom>
-              <a:noFill/>
-            </p:spPr>
-            <p:txBody>
-              <a:bodyPr wrap="square" rtlCol="0">
-                <a:spAutoFit/>
-              </a:bodyPr>
-              <a:lstStyle/>
-              <a:p>
-                <a:pPr/>
-                <a14:m>
-                  <m:oMathPara xmlns:m="http://schemas.openxmlformats.org/officeDocument/2006/math">
-                    <m:oMathParaPr>
-                      <m:jc m:val="centerGroup"/>
-                    </m:oMathParaPr>
-                    <m:oMath xmlns:m="http://schemas.openxmlformats.org/officeDocument/2006/math">
-                      <m:r>
-                        <a:rPr lang="en-US" altLang="zh-TW" i="1">
-                          <a:latin typeface="Cambria Math" panose="02040503050406030204" pitchFamily="18" charset="0"/>
-                        </a:rPr>
-                        <m:t>ℓ=−1</m:t>
-                      </m:r>
-                    </m:oMath>
-                  </m:oMathPara>
-                </a14:m>
-                <a:endParaRPr lang="zh-TW" altLang="en-US" dirty="0">
-                  <a:latin typeface="Times New Roman" panose="02020603050405020304" pitchFamily="18" charset="0"/>
-                  <a:cs typeface="Times New Roman" panose="02020603050405020304" pitchFamily="18" charset="0"/>
-                </a:endParaRPr>
-              </a:p>
-            </p:txBody>
-          </p:sp>
-        </mc:Choice>
-        <mc:Fallback>
-          <p:sp>
-            <p:nvSpPr>
-              <p:cNvPr id="50" name="文字方塊 49">
-                <a:extLst>
-                  <a:ext uri="{FF2B5EF4-FFF2-40B4-BE49-F238E27FC236}">
-                    <a16:creationId xmlns:a16="http://schemas.microsoft.com/office/drawing/2014/main" id="{9BF2C953-92CE-4A9A-B6D5-E85DE4B362FA}"/>
-                  </a:ext>
-                </a:extLst>
-              </p:cNvPr>
-              <p:cNvSpPr txBox="1">
-                <a:spLocks noRot="1" noChangeAspect="1" noMove="1" noResize="1" noEditPoints="1" noAdjustHandles="1" noChangeArrowheads="1" noChangeShapeType="1" noTextEdit="1"/>
-              </p:cNvSpPr>
-              <p:nvPr/>
-            </p:nvSpPr>
-            <p:spPr>
-              <a:xfrm>
-                <a:off x="2826641" y="1746135"/>
-                <a:ext cx="1133442" cy="369332"/>
-              </a:xfrm>
-              <a:prstGeom prst="rect">
-                <a:avLst/>
-              </a:prstGeom>
-              <a:blipFill>
-                <a:blip r:embed="rId10"/>
-                <a:stretch>
-                  <a:fillRect/>
-                </a:stretch>
-              </a:blipFill>
-            </p:spPr>
-            <p:txBody>
-              <a:bodyPr/>
-              <a:lstStyle/>
-              <a:p>
-                <a:r>
-                  <a:rPr lang="zh-TW" altLang="en-US">
-                    <a:noFill/>
-                  </a:rPr>
-                  <a:t> </a:t>
-                </a:r>
-              </a:p>
-            </p:txBody>
-          </p:sp>
-        </mc:Fallback>
-      </mc:AlternateContent>
-      <mc:AlternateContent xmlns:mc="http://schemas.openxmlformats.org/markup-compatibility/2006">
-        <mc:Choice xmlns:a14="http://schemas.microsoft.com/office/drawing/2010/main" Requires="a14">
-          <p:sp>
-            <p:nvSpPr>
-              <p:cNvPr id="52" name="文字方塊 51">
-                <a:extLst>
-                  <a:ext uri="{FF2B5EF4-FFF2-40B4-BE49-F238E27FC236}">
-                    <a16:creationId xmlns:a16="http://schemas.microsoft.com/office/drawing/2014/main" id="{FA6A6B30-6EBE-419A-8F73-1E8B0B28748C}"/>
-                  </a:ext>
-                </a:extLst>
-              </p:cNvPr>
-              <p:cNvSpPr txBox="1"/>
-              <p:nvPr/>
-            </p:nvSpPr>
-            <p:spPr>
-              <a:xfrm>
-                <a:off x="1040575" y="1746135"/>
-                <a:ext cx="1133442" cy="369332"/>
-              </a:xfrm>
-              <a:prstGeom prst="rect">
-                <a:avLst/>
-              </a:prstGeom>
-              <a:noFill/>
-            </p:spPr>
-            <p:txBody>
-              <a:bodyPr wrap="square" rtlCol="0">
-                <a:spAutoFit/>
-              </a:bodyPr>
-              <a:lstStyle/>
-              <a:p>
-                <a:pPr/>
-                <a14:m>
-                  <m:oMathPara xmlns:m="http://schemas.openxmlformats.org/officeDocument/2006/math">
-                    <m:oMathParaPr>
-                      <m:jc m:val="centerGroup"/>
-                    </m:oMathParaPr>
-                    <m:oMath xmlns:m="http://schemas.openxmlformats.org/officeDocument/2006/math">
-                      <m:r>
-                        <a:rPr lang="en-US" altLang="zh-TW" i="1">
-                          <a:latin typeface="Cambria Math" panose="02040503050406030204" pitchFamily="18" charset="0"/>
-                        </a:rPr>
-                        <m:t>ℓ=−2</m:t>
-                      </m:r>
-                    </m:oMath>
-                  </m:oMathPara>
-                </a14:m>
-                <a:endParaRPr lang="zh-TW" altLang="en-US" dirty="0">
-                  <a:latin typeface="Times New Roman" panose="02020603050405020304" pitchFamily="18" charset="0"/>
-                  <a:cs typeface="Times New Roman" panose="02020603050405020304" pitchFamily="18" charset="0"/>
-                </a:endParaRPr>
-              </a:p>
-            </p:txBody>
-          </p:sp>
-        </mc:Choice>
-        <mc:Fallback>
-          <p:sp>
-            <p:nvSpPr>
-              <p:cNvPr id="52" name="文字方塊 51">
-                <a:extLst>
-                  <a:ext uri="{FF2B5EF4-FFF2-40B4-BE49-F238E27FC236}">
-                    <a16:creationId xmlns:a16="http://schemas.microsoft.com/office/drawing/2014/main" id="{FA6A6B30-6EBE-419A-8F73-1E8B0B28748C}"/>
-                  </a:ext>
-                </a:extLst>
-              </p:cNvPr>
-              <p:cNvSpPr txBox="1">
-                <a:spLocks noRot="1" noChangeAspect="1" noMove="1" noResize="1" noEditPoints="1" noAdjustHandles="1" noChangeArrowheads="1" noChangeShapeType="1" noTextEdit="1"/>
-              </p:cNvSpPr>
-              <p:nvPr/>
-            </p:nvSpPr>
-            <p:spPr>
-              <a:xfrm>
-                <a:off x="1040575" y="1746135"/>
-                <a:ext cx="1133442" cy="369332"/>
-              </a:xfrm>
-              <a:prstGeom prst="rect">
-                <a:avLst/>
-              </a:prstGeom>
-              <a:blipFill>
-                <a:blip r:embed="rId11"/>
-                <a:stretch>
-                  <a:fillRect/>
-                </a:stretch>
-              </a:blipFill>
-            </p:spPr>
-            <p:txBody>
-              <a:bodyPr/>
-              <a:lstStyle/>
-              <a:p>
-                <a:r>
-                  <a:rPr lang="zh-TW" altLang="en-US">
-                    <a:noFill/>
-                  </a:rPr>
-                  <a:t> </a:t>
-                </a:r>
-              </a:p>
-            </p:txBody>
-          </p:sp>
-        </mc:Fallback>
-      </mc:AlternateContent>
-      <mc:AlternateContent xmlns:mc="http://schemas.openxmlformats.org/markup-compatibility/2006">
-        <mc:Choice xmlns:a14="http://schemas.microsoft.com/office/drawing/2010/main" Requires="a14">
-          <p:sp>
-            <p:nvSpPr>
-              <p:cNvPr id="53" name="文字方塊 52">
-                <a:extLst>
-                  <a:ext uri="{FF2B5EF4-FFF2-40B4-BE49-F238E27FC236}">
-                    <a16:creationId xmlns:a16="http://schemas.microsoft.com/office/drawing/2014/main" id="{7FE76E93-B02D-4EC3-9A0D-9DB35AB83345}"/>
-                  </a:ext>
-                </a:extLst>
-              </p:cNvPr>
-              <p:cNvSpPr txBox="1"/>
-              <p:nvPr/>
-            </p:nvSpPr>
-            <p:spPr>
-              <a:xfrm>
-                <a:off x="2035329" y="3347684"/>
-                <a:ext cx="508459" cy="369332"/>
-              </a:xfrm>
-              <a:prstGeom prst="rect">
-                <a:avLst/>
-              </a:prstGeom>
-              <a:noFill/>
-            </p:spPr>
-            <p:txBody>
-              <a:bodyPr wrap="square" rtlCol="0">
-                <a:spAutoFit/>
-              </a:bodyPr>
-              <a:lstStyle/>
-              <a:p>
-                <a:pPr/>
-                <a14:m>
-                  <m:oMathPara xmlns:m="http://schemas.openxmlformats.org/officeDocument/2006/math">
-                    <m:oMathParaPr>
-                      <m:jc m:val="centerGroup"/>
-                    </m:oMathParaPr>
-                    <m:oMath xmlns:m="http://schemas.openxmlformats.org/officeDocument/2006/math">
                       <m:r>
                         <m:rPr>
                           <m:sty m:val="p"/>
@@ -4503,466 +4466,147 @@
                         <a:rPr lang="en-US" altLang="zh-TW">
                           <a:latin typeface="Cambria Math" panose="02040503050406030204" pitchFamily="18" charset="0"/>
                         </a:rPr>
-                        <m:t>um</m:t>
+                        <m:t>m</m:t>
                       </m:r>
                     </m:oMath>
-                  </m:oMathPara>
-                </a14:m>
-                <a:endParaRPr lang="zh-TW" altLang="en-US" dirty="0">
-                  <a:latin typeface="Times New Roman" panose="02020603050405020304" pitchFamily="18" charset="0"/>
-                  <a:cs typeface="Times New Roman" panose="02020603050405020304" pitchFamily="18" charset="0"/>
-                </a:endParaRPr>
-              </a:p>
-            </p:txBody>
-          </p:sp>
-        </mc:Choice>
-        <mc:Fallback>
-          <p:sp>
-            <p:nvSpPr>
-              <p:cNvPr id="53" name="文字方塊 52">
-                <a:extLst>
-                  <a:ext uri="{FF2B5EF4-FFF2-40B4-BE49-F238E27FC236}">
-                    <a16:creationId xmlns:a16="http://schemas.microsoft.com/office/drawing/2014/main" id="{7FE76E93-B02D-4EC3-9A0D-9DB35AB83345}"/>
-                  </a:ext>
-                </a:extLst>
-              </p:cNvPr>
-              <p:cNvSpPr txBox="1">
-                <a:spLocks noRot="1" noChangeAspect="1" noMove="1" noResize="1" noEditPoints="1" noAdjustHandles="1" noChangeArrowheads="1" noChangeShapeType="1" noTextEdit="1"/>
-              </p:cNvSpPr>
-              <p:nvPr/>
-            </p:nvSpPr>
-            <p:spPr>
-              <a:xfrm>
-                <a:off x="2035329" y="3347684"/>
-                <a:ext cx="508459" cy="369332"/>
-              </a:xfrm>
-              <a:prstGeom prst="rect">
-                <a:avLst/>
-              </a:prstGeom>
-              <a:blipFill>
-                <a:blip r:embed="rId12"/>
-                <a:stretch>
-                  <a:fillRect/>
-                </a:stretch>
-              </a:blipFill>
-            </p:spPr>
-            <p:txBody>
-              <a:bodyPr/>
-              <a:lstStyle/>
-              <a:p>
-                <a:r>
-                  <a:rPr lang="zh-TW" altLang="en-US">
-                    <a:noFill/>
-                  </a:rPr>
-                  <a:t> </a:t>
-                </a:r>
-              </a:p>
-            </p:txBody>
-          </p:sp>
-        </mc:Fallback>
-      </mc:AlternateContent>
-      <p:sp>
-        <p:nvSpPr>
-          <p:cNvPr id="54" name="文字方塊 53">
-            <a:extLst>
-              <a:ext uri="{FF2B5EF4-FFF2-40B4-BE49-F238E27FC236}">
-                <a16:creationId xmlns:a16="http://schemas.microsoft.com/office/drawing/2014/main" id="{5862E318-61FC-4C34-8EAE-6C2CADB3295A}"/>
-              </a:ext>
-            </a:extLst>
-          </p:cNvPr>
-          <p:cNvSpPr txBox="1"/>
-          <p:nvPr/>
-        </p:nvSpPr>
-        <p:spPr>
-          <a:xfrm rot="16200000">
-            <a:off x="-755775" y="4956000"/>
-            <a:ext cx="2031323" cy="400110"/>
-          </a:xfrm>
-          <a:prstGeom prst="rect">
-            <a:avLst/>
-          </a:prstGeom>
-          <a:noFill/>
-        </p:spPr>
-        <p:txBody>
-          <a:bodyPr wrap="square" rtlCol="0">
-            <a:spAutoFit/>
-          </a:bodyPr>
-          <a:lstStyle/>
-          <a:p>
-            <a:pPr algn="ctr"/>
-            <a:r>
-              <a:rPr lang="en-US" altLang="zh-TW" sz="2000" dirty="0">
-                <a:latin typeface="Times New Roman" panose="02020603050405020304" pitchFamily="18" charset="0"/>
-                <a:cs typeface="Times New Roman" panose="02020603050405020304" pitchFamily="18" charset="0"/>
-              </a:rPr>
-              <a:t>arbitrary units</a:t>
-            </a:r>
-            <a:endParaRPr lang="zh-TW" altLang="en-US" sz="2000" dirty="0">
-              <a:latin typeface="Times New Roman" panose="02020603050405020304" pitchFamily="18" charset="0"/>
-              <a:cs typeface="Times New Roman" panose="02020603050405020304" pitchFamily="18" charset="0"/>
-            </a:endParaRPr>
-          </a:p>
-        </p:txBody>
-      </p:sp>
-      <mc:AlternateContent xmlns:mc="http://schemas.openxmlformats.org/markup-compatibility/2006">
-        <mc:Choice xmlns:a14="http://schemas.microsoft.com/office/drawing/2010/main" Requires="a14">
-          <p:sp>
-            <p:nvSpPr>
-              <p:cNvPr id="55" name="矩形 54">
-                <a:extLst>
-                  <a:ext uri="{FF2B5EF4-FFF2-40B4-BE49-F238E27FC236}">
-                    <a16:creationId xmlns:a16="http://schemas.microsoft.com/office/drawing/2014/main" id="{152BF3A2-AEA0-485D-9EFB-ED42184338EC}"/>
-                  </a:ext>
-                </a:extLst>
-              </p:cNvPr>
-              <p:cNvSpPr/>
-              <p:nvPr/>
-            </p:nvSpPr>
-            <p:spPr>
-              <a:xfrm>
-                <a:off x="-76199" y="1191817"/>
-                <a:ext cx="3835398" cy="400110"/>
-              </a:xfrm>
-              <a:prstGeom prst="rect">
-                <a:avLst/>
-              </a:prstGeom>
-            </p:spPr>
-            <p:txBody>
-              <a:bodyPr wrap="square">
-                <a:spAutoFit/>
-              </a:bodyPr>
-              <a:lstStyle/>
-              <a:p>
-                <a:pPr/>
-                <a:r>
-                  <a:rPr lang="en-US" altLang="zh-TW" sz="2000" dirty="0"/>
-                  <a:t>Normally focused : </a:t>
-                </a:r>
-                <a14:m>
-                  <m:oMath xmlns:m="http://schemas.openxmlformats.org/officeDocument/2006/math">
-                    <m:sSub>
-                      <m:sSubPr>
-                        <m:ctrlPr>
-                          <a:rPr lang="en-US" altLang="zh-TW" sz="2000" i="1">
-                            <a:latin typeface="Cambria Math" panose="02040503050406030204" pitchFamily="18" charset="0"/>
-                          </a:rPr>
-                        </m:ctrlPr>
-                      </m:sSubPr>
-                      <m:e>
-                        <m:r>
-                          <a:rPr lang="en-US" altLang="zh-TW" sz="2000" i="1">
-                            <a:latin typeface="Cambria Math" panose="02040503050406030204" pitchFamily="18" charset="0"/>
-                          </a:rPr>
-                          <m:t>𝑊</m:t>
-                        </m:r>
-                      </m:e>
-                      <m:sub>
-                        <m:r>
-                          <a:rPr lang="en-US" altLang="zh-TW" sz="2000" i="1">
-                            <a:latin typeface="Cambria Math" panose="02040503050406030204" pitchFamily="18" charset="0"/>
-                          </a:rPr>
-                          <m:t>0</m:t>
-                        </m:r>
-                      </m:sub>
-                    </m:sSub>
-                    <m:r>
-                      <a:rPr lang="en-US" altLang="zh-TW" sz="2000" i="1">
-                        <a:latin typeface="Cambria Math" panose="02040503050406030204" pitchFamily="18" charset="0"/>
-                      </a:rPr>
-                      <m:t>=1.5</m:t>
-                    </m:r>
-                    <m:r>
-                      <a:rPr lang="en-US" altLang="zh-TW" sz="2000">
-                        <a:latin typeface="Cambria Math" panose="02040503050406030204" pitchFamily="18" charset="0"/>
-                      </a:rPr>
-                      <m:t> </m:t>
-                    </m:r>
-                    <m:r>
-                      <m:rPr>
-                        <m:sty m:val="p"/>
-                      </m:rPr>
-                      <a:rPr lang="en-US" altLang="zh-TW" sz="2000">
-                        <a:latin typeface="Cambria Math" panose="02040503050406030204" pitchFamily="18" charset="0"/>
-                      </a:rPr>
-                      <m:t>um</m:t>
-                    </m:r>
-                  </m:oMath>
-                </a14:m>
-                <a:endParaRPr lang="zh-TW" altLang="en-US" sz="2000" dirty="0">
-                  <a:latin typeface="Times New Roman" panose="02020603050405020304" pitchFamily="18" charset="0"/>
-                  <a:cs typeface="Times New Roman" panose="02020603050405020304" pitchFamily="18" charset="0"/>
-                </a:endParaRPr>
-              </a:p>
-            </p:txBody>
-          </p:sp>
-        </mc:Choice>
-        <mc:Fallback>
-          <p:sp>
-            <p:nvSpPr>
-              <p:cNvPr id="55" name="矩形 54">
-                <a:extLst>
-                  <a:ext uri="{FF2B5EF4-FFF2-40B4-BE49-F238E27FC236}">
-                    <a16:creationId xmlns:a16="http://schemas.microsoft.com/office/drawing/2014/main" id="{152BF3A2-AEA0-485D-9EFB-ED42184338EC}"/>
-                  </a:ext>
-                </a:extLst>
-              </p:cNvPr>
-              <p:cNvSpPr>
-                <a:spLocks noRot="1" noChangeAspect="1" noMove="1" noResize="1" noEditPoints="1" noAdjustHandles="1" noChangeArrowheads="1" noChangeShapeType="1" noTextEdit="1"/>
-              </p:cNvSpPr>
-              <p:nvPr/>
-            </p:nvSpPr>
-            <p:spPr>
-              <a:xfrm>
-                <a:off x="-76199" y="1191817"/>
-                <a:ext cx="3835398" cy="400110"/>
-              </a:xfrm>
-              <a:prstGeom prst="rect">
-                <a:avLst/>
-              </a:prstGeom>
-              <a:blipFill>
-                <a:blip r:embed="rId13"/>
-                <a:stretch>
-                  <a:fillRect l="-1749" t="-9231" b="-27692"/>
-                </a:stretch>
-              </a:blipFill>
-            </p:spPr>
-            <p:txBody>
-              <a:bodyPr/>
-              <a:lstStyle/>
-              <a:p>
-                <a:r>
-                  <a:rPr lang="zh-TW" altLang="en-US">
-                    <a:noFill/>
-                  </a:rPr>
-                  <a:t> </a:t>
-                </a:r>
-              </a:p>
-            </p:txBody>
-          </p:sp>
-        </mc:Fallback>
-      </mc:AlternateContent>
-      <p:sp>
-        <p:nvSpPr>
-          <p:cNvPr id="56" name="文字方塊 55">
-            <a:extLst>
-              <a:ext uri="{FF2B5EF4-FFF2-40B4-BE49-F238E27FC236}">
-                <a16:creationId xmlns:a16="http://schemas.microsoft.com/office/drawing/2014/main" id="{BEBC67A4-EA79-47CD-B98A-0F70535FE411}"/>
-              </a:ext>
-            </a:extLst>
-          </p:cNvPr>
-          <p:cNvSpPr txBox="1"/>
-          <p:nvPr/>
-        </p:nvSpPr>
-        <p:spPr>
-          <a:xfrm rot="16200000">
-            <a:off x="-776027" y="2405223"/>
-            <a:ext cx="2031323" cy="400110"/>
-          </a:xfrm>
-          <a:prstGeom prst="rect">
-            <a:avLst/>
-          </a:prstGeom>
-          <a:noFill/>
-        </p:spPr>
-        <p:txBody>
-          <a:bodyPr wrap="square" rtlCol="0">
-            <a:spAutoFit/>
-          </a:bodyPr>
-          <a:lstStyle/>
-          <a:p>
-            <a:pPr algn="ctr"/>
-            <a:r>
-              <a:rPr lang="en-US" altLang="zh-TW" sz="2000" dirty="0">
-                <a:latin typeface="Times New Roman" panose="02020603050405020304" pitchFamily="18" charset="0"/>
-                <a:cs typeface="Times New Roman" panose="02020603050405020304" pitchFamily="18" charset="0"/>
-              </a:rPr>
-              <a:t>arbitrary units</a:t>
-            </a:r>
-            <a:endParaRPr lang="zh-TW" altLang="en-US" sz="2000" dirty="0">
-              <a:latin typeface="Times New Roman" panose="02020603050405020304" pitchFamily="18" charset="0"/>
-              <a:cs typeface="Times New Roman" panose="02020603050405020304" pitchFamily="18" charset="0"/>
-            </a:endParaRPr>
-          </a:p>
-        </p:txBody>
-      </p:sp>
-      <mc:AlternateContent xmlns:mc="http://schemas.openxmlformats.org/markup-compatibility/2006">
-        <mc:Choice xmlns:a14="http://schemas.microsoft.com/office/drawing/2010/main" Requires="a14">
-          <p:sp>
-            <p:nvSpPr>
-              <p:cNvPr id="57" name="矩形 56">
-                <a:extLst>
-                  <a:ext uri="{FF2B5EF4-FFF2-40B4-BE49-F238E27FC236}">
-                    <a16:creationId xmlns:a16="http://schemas.microsoft.com/office/drawing/2014/main" id="{04EE70F6-14B4-4E90-989B-144ABE438097}"/>
-                  </a:ext>
-                </a:extLst>
-              </p:cNvPr>
-              <p:cNvSpPr/>
-              <p:nvPr/>
-            </p:nvSpPr>
-            <p:spPr>
-              <a:xfrm>
-                <a:off x="-76199" y="3753610"/>
-                <a:ext cx="3581400" cy="400110"/>
-              </a:xfrm>
-              <a:prstGeom prst="rect">
-                <a:avLst/>
-              </a:prstGeom>
-            </p:spPr>
-            <p:txBody>
-              <a:bodyPr wrap="square">
-                <a:spAutoFit/>
-              </a:bodyPr>
-              <a:lstStyle/>
-              <a:p>
-                <a:r>
-                  <a:rPr lang="en-US" altLang="zh-TW" sz="2000" dirty="0"/>
-                  <a:t>highly focused : </a:t>
-                </a:r>
-                <a14:m>
-                  <m:oMath xmlns:m="http://schemas.openxmlformats.org/officeDocument/2006/math">
-                    <m:sSub>
-                      <m:sSubPr>
-                        <m:ctrlPr>
-                          <a:rPr lang="en-US" altLang="zh-TW" sz="2000" i="1">
-                            <a:latin typeface="Cambria Math" panose="02040503050406030204" pitchFamily="18" charset="0"/>
-                          </a:rPr>
-                        </m:ctrlPr>
-                      </m:sSubPr>
-                      <m:e>
-                        <m:r>
-                          <a:rPr lang="en-US" altLang="zh-TW" sz="2000" i="1">
-                            <a:latin typeface="Cambria Math" panose="02040503050406030204" pitchFamily="18" charset="0"/>
-                          </a:rPr>
-                          <m:t>𝑊</m:t>
-                        </m:r>
-                      </m:e>
-                      <m:sub>
-                        <m:r>
-                          <a:rPr lang="en-US" altLang="zh-TW" sz="2000" i="1">
-                            <a:latin typeface="Cambria Math" panose="02040503050406030204" pitchFamily="18" charset="0"/>
-                          </a:rPr>
-                          <m:t>0</m:t>
-                        </m:r>
-                      </m:sub>
-                    </m:sSub>
-                    <m:r>
-                      <a:rPr lang="en-US" altLang="zh-TW" sz="2000" i="1">
-                        <a:latin typeface="Cambria Math" panose="02040503050406030204" pitchFamily="18" charset="0"/>
-                      </a:rPr>
-                      <m:t>=</m:t>
-                    </m:r>
-                    <m:r>
-                      <a:rPr lang="en-US" altLang="zh-TW" sz="2000">
-                        <a:latin typeface="Cambria Math" panose="02040503050406030204" pitchFamily="18" charset="0"/>
-                      </a:rPr>
-                      <m:t>0.5</m:t>
-                    </m:r>
-                    <m:r>
-                      <a:rPr lang="en-US" altLang="zh-TW" sz="2000">
-                        <a:latin typeface="Cambria Math" panose="02040503050406030204" pitchFamily="18" charset="0"/>
-                      </a:rPr>
-                      <m:t> </m:t>
-                    </m:r>
-                    <m:r>
-                      <m:rPr>
-                        <m:sty m:val="p"/>
-                      </m:rPr>
-                      <a:rPr lang="en-US" altLang="zh-TW" sz="2000">
-                        <a:latin typeface="Cambria Math" panose="02040503050406030204" pitchFamily="18" charset="0"/>
-                      </a:rPr>
-                      <m:t>um</m:t>
-                    </m:r>
-                  </m:oMath>
-                </a14:m>
-                <a:endParaRPr lang="zh-TW" altLang="en-US" sz="2000" dirty="0">
-                  <a:latin typeface="Times New Roman" panose="02020603050405020304" pitchFamily="18" charset="0"/>
-                  <a:cs typeface="Times New Roman" panose="02020603050405020304" pitchFamily="18" charset="0"/>
-                </a:endParaRPr>
-              </a:p>
-            </p:txBody>
-          </p:sp>
-        </mc:Choice>
-        <mc:Fallback>
-          <p:sp>
-            <p:nvSpPr>
-              <p:cNvPr id="57" name="矩形 56">
-                <a:extLst>
-                  <a:ext uri="{FF2B5EF4-FFF2-40B4-BE49-F238E27FC236}">
-                    <a16:creationId xmlns:a16="http://schemas.microsoft.com/office/drawing/2014/main" id="{04EE70F6-14B4-4E90-989B-144ABE438097}"/>
-                  </a:ext>
-                </a:extLst>
-              </p:cNvPr>
-              <p:cNvSpPr>
-                <a:spLocks noRot="1" noChangeAspect="1" noMove="1" noResize="1" noEditPoints="1" noAdjustHandles="1" noChangeArrowheads="1" noChangeShapeType="1" noTextEdit="1"/>
-              </p:cNvSpPr>
-              <p:nvPr/>
-            </p:nvSpPr>
-            <p:spPr>
-              <a:xfrm>
-                <a:off x="-76199" y="3753610"/>
-                <a:ext cx="3581400" cy="400110"/>
-              </a:xfrm>
-              <a:prstGeom prst="rect">
-                <a:avLst/>
-              </a:prstGeom>
-              <a:blipFill>
-                <a:blip r:embed="rId14"/>
-                <a:stretch>
-                  <a:fillRect l="-1874" t="-9231" b="-27692"/>
-                </a:stretch>
-              </a:blipFill>
-            </p:spPr>
-            <p:txBody>
-              <a:bodyPr/>
-              <a:lstStyle/>
-              <a:p>
-                <a:r>
-                  <a:rPr lang="zh-TW" altLang="en-US">
-                    <a:noFill/>
-                  </a:rPr>
-                  <a:t> </a:t>
-                </a:r>
-              </a:p>
-            </p:txBody>
-          </p:sp>
-        </mc:Fallback>
-      </mc:AlternateContent>
-      <mc:AlternateContent xmlns:mc="http://schemas.openxmlformats.org/markup-compatibility/2006">
-        <mc:Choice xmlns:a14="http://schemas.microsoft.com/office/drawing/2010/main" Requires="a14">
-          <p:sp>
-            <p:nvSpPr>
-              <p:cNvPr id="58" name="文字方塊 57">
-                <a:extLst>
-                  <a:ext uri="{FF2B5EF4-FFF2-40B4-BE49-F238E27FC236}">
-                    <a16:creationId xmlns:a16="http://schemas.microsoft.com/office/drawing/2014/main" id="{E3120A0E-484F-44A1-8C52-4CC6C83FEDA5}"/>
-                  </a:ext>
-                </a:extLst>
-              </p:cNvPr>
-              <p:cNvSpPr txBox="1"/>
-              <p:nvPr/>
-            </p:nvSpPr>
-            <p:spPr>
-              <a:xfrm>
-                <a:off x="2084960" y="5895686"/>
-                <a:ext cx="508459" cy="369332"/>
-              </a:xfrm>
-              <a:prstGeom prst="rect">
-                <a:avLst/>
-              </a:prstGeom>
-              <a:noFill/>
-            </p:spPr>
-            <p:txBody>
-              <a:bodyPr wrap="square" rtlCol="0">
-                <a:spAutoFit/>
-              </a:bodyPr>
-              <a:lstStyle/>
-              <a:p>
-                <a:pPr/>
-                <a14:m>
-                  <m:oMathPara xmlns:m="http://schemas.openxmlformats.org/officeDocument/2006/math">
-                    <m:oMathParaPr>
-                      <m:jc m:val="centerGroup"/>
-                    </m:oMathParaPr>
+                  </a14:m>
+                  <a:endParaRPr lang="zh-TW" altLang="en-US" dirty="0">
+                    <a:latin typeface="Times New Roman" panose="02020603050405020304" pitchFamily="18" charset="0"/>
+                    <a:cs typeface="Times New Roman" panose="02020603050405020304" pitchFamily="18" charset="0"/>
+                  </a:endParaRPr>
+                </a:p>
+              </p:txBody>
+            </p:sp>
+          </mc:Choice>
+          <mc:Fallback>
+            <p:sp>
+              <p:nvSpPr>
+                <p:cNvPr id="55" name="矩形 54">
+                  <a:extLst>
+                    <a:ext uri="{FF2B5EF4-FFF2-40B4-BE49-F238E27FC236}">
+                      <a16:creationId xmlns:a16="http://schemas.microsoft.com/office/drawing/2014/main" id="{152BF3A2-AEA0-485D-9EFB-ED42184338EC}"/>
+                    </a:ext>
+                  </a:extLst>
+                </p:cNvPr>
+                <p:cNvSpPr>
+                  <a:spLocks noRot="1" noChangeAspect="1" noMove="1" noResize="1" noEditPoints="1" noAdjustHandles="1" noChangeArrowheads="1" noChangeShapeType="1" noTextEdit="1"/>
+                </p:cNvSpPr>
+                <p:nvPr/>
+              </p:nvSpPr>
+              <p:spPr>
+                <a:xfrm>
+                  <a:off x="2412525" y="1198536"/>
+                  <a:ext cx="3721573" cy="369332"/>
+                </a:xfrm>
+                <a:prstGeom prst="rect">
+                  <a:avLst/>
+                </a:prstGeom>
+                <a:blipFill>
+                  <a:blip r:embed="rId15"/>
+                  <a:stretch>
+                    <a:fillRect l="-1309" t="-10000" b="-26667"/>
+                  </a:stretch>
+                </a:blipFill>
+              </p:spPr>
+              <p:txBody>
+                <a:bodyPr/>
+                <a:lstStyle/>
+                <a:p>
+                  <a:r>
+                    <a:rPr lang="zh-TW" altLang="en-US">
+                      <a:noFill/>
+                    </a:rPr>
+                    <a:t> </a:t>
+                  </a:r>
+                </a:p>
+              </p:txBody>
+            </p:sp>
+          </mc:Fallback>
+        </mc:AlternateContent>
+        <mc:AlternateContent xmlns:mc="http://schemas.openxmlformats.org/markup-compatibility/2006">
+          <mc:Choice xmlns:a14="http://schemas.microsoft.com/office/drawing/2010/main" Requires="a14">
+            <p:sp>
+              <p:nvSpPr>
+                <p:cNvPr id="57" name="矩形 56">
+                  <a:extLst>
+                    <a:ext uri="{FF2B5EF4-FFF2-40B4-BE49-F238E27FC236}">
+                      <a16:creationId xmlns:a16="http://schemas.microsoft.com/office/drawing/2014/main" id="{04EE70F6-14B4-4E90-989B-144ABE438097}"/>
+                    </a:ext>
+                  </a:extLst>
+                </p:cNvPr>
+                <p:cNvSpPr/>
+                <p:nvPr/>
+              </p:nvSpPr>
+              <p:spPr>
+                <a:xfrm>
+                  <a:off x="2404987" y="3760329"/>
+                  <a:ext cx="3475113" cy="369332"/>
+                </a:xfrm>
+                <a:prstGeom prst="rect">
+                  <a:avLst/>
+                </a:prstGeom>
+              </p:spPr>
+              <p:txBody>
+                <a:bodyPr wrap="square">
+                  <a:spAutoFit/>
+                </a:bodyPr>
+                <a:lstStyle/>
+                <a:p>
+                  <a:r>
+                    <a:rPr lang="en-US" altLang="zh-TW" dirty="0"/>
+                    <a:t>highly focused : </a:t>
+                  </a:r>
+                  <a14:m>
                     <m:oMath xmlns:m="http://schemas.openxmlformats.org/officeDocument/2006/math">
+                      <m:sSub>
+                        <m:sSubPr>
+                          <m:ctrlPr>
+                            <a:rPr lang="en-US" altLang="zh-TW" i="1">
+                              <a:latin typeface="Cambria Math" panose="02040503050406030204" pitchFamily="18" charset="0"/>
+                            </a:rPr>
+                          </m:ctrlPr>
+                        </m:sSubPr>
+                        <m:e>
+                          <m:r>
+                            <a:rPr lang="en-US" altLang="zh-TW" i="1">
+                              <a:latin typeface="Cambria Math" panose="02040503050406030204" pitchFamily="18" charset="0"/>
+                            </a:rPr>
+                            <m:t>𝑊</m:t>
+                          </m:r>
+                        </m:e>
+                        <m:sub>
+                          <m:r>
+                            <a:rPr lang="en-US" altLang="zh-TW" i="1">
+                              <a:latin typeface="Cambria Math" panose="02040503050406030204" pitchFamily="18" charset="0"/>
+                            </a:rPr>
+                            <m:t>0</m:t>
+                          </m:r>
+                        </m:sub>
+                      </m:sSub>
+                      <m:r>
+                        <a:rPr lang="en-US" altLang="zh-TW" i="1">
+                          <a:latin typeface="Cambria Math" panose="02040503050406030204" pitchFamily="18" charset="0"/>
+                        </a:rPr>
+                        <m:t>=</m:t>
+                      </m:r>
+                      <m:r>
+                        <a:rPr lang="en-US" altLang="zh-TW">
+                          <a:latin typeface="Cambria Math" panose="02040503050406030204" pitchFamily="18" charset="0"/>
+                        </a:rPr>
+                        <m:t>0.5</m:t>
+                      </m:r>
+                      <m:r>
+                        <a:rPr lang="en-US" altLang="zh-TW" i="1">
+                          <a:latin typeface="Cambria Math" panose="02040503050406030204" pitchFamily="18" charset="0"/>
+                        </a:rPr>
+                        <m:t> </m:t>
+                      </m:r>
+                      <m:r>
+                        <a:rPr lang="en-US" altLang="zh-TW" i="1">
+                          <a:latin typeface="Cambria Math" panose="02040503050406030204" pitchFamily="18" charset="0"/>
+                        </a:rPr>
+                        <m:t>𝜇</m:t>
+                      </m:r>
                       <m:r>
                         <m:rPr>
                           <m:sty m:val="p"/>
@@ -4970,559 +4614,608 @@
                         <a:rPr lang="en-US" altLang="zh-TW">
                           <a:latin typeface="Cambria Math" panose="02040503050406030204" pitchFamily="18" charset="0"/>
                         </a:rPr>
-                        <m:t>um</m:t>
+                        <m:t>m</m:t>
                       </m:r>
                     </m:oMath>
-                  </m:oMathPara>
-                </a14:m>
-                <a:endParaRPr lang="zh-TW" altLang="en-US" dirty="0">
-                  <a:latin typeface="Times New Roman" panose="02020603050405020304" pitchFamily="18" charset="0"/>
-                  <a:cs typeface="Times New Roman" panose="02020603050405020304" pitchFamily="18" charset="0"/>
-                </a:endParaRPr>
-              </a:p>
-            </p:txBody>
-          </p:sp>
-        </mc:Choice>
-        <mc:Fallback>
-          <p:sp>
-            <p:nvSpPr>
-              <p:cNvPr id="58" name="文字方塊 57">
+                  </a14:m>
+                  <a:endParaRPr lang="zh-TW" altLang="en-US" dirty="0">
+                    <a:latin typeface="Times New Roman" panose="02020603050405020304" pitchFamily="18" charset="0"/>
+                    <a:cs typeface="Times New Roman" panose="02020603050405020304" pitchFamily="18" charset="0"/>
+                  </a:endParaRPr>
+                </a:p>
+              </p:txBody>
+            </p:sp>
+          </mc:Choice>
+          <mc:Fallback>
+            <p:sp>
+              <p:nvSpPr>
+                <p:cNvPr id="57" name="矩形 56">
+                  <a:extLst>
+                    <a:ext uri="{FF2B5EF4-FFF2-40B4-BE49-F238E27FC236}">
+                      <a16:creationId xmlns:a16="http://schemas.microsoft.com/office/drawing/2014/main" id="{04EE70F6-14B4-4E90-989B-144ABE438097}"/>
+                    </a:ext>
+                  </a:extLst>
+                </p:cNvPr>
+                <p:cNvSpPr>
+                  <a:spLocks noRot="1" noChangeAspect="1" noMove="1" noResize="1" noEditPoints="1" noAdjustHandles="1" noChangeArrowheads="1" noChangeShapeType="1" noTextEdit="1"/>
+                </p:cNvSpPr>
+                <p:nvPr/>
+              </p:nvSpPr>
+              <p:spPr>
+                <a:xfrm>
+                  <a:off x="2404987" y="3760329"/>
+                  <a:ext cx="3475113" cy="369332"/>
+                </a:xfrm>
+                <a:prstGeom prst="rect">
+                  <a:avLst/>
+                </a:prstGeom>
+                <a:blipFill>
+                  <a:blip r:embed="rId16"/>
+                  <a:stretch>
+                    <a:fillRect l="-1579" t="-10000" b="-26667"/>
+                  </a:stretch>
+                </a:blipFill>
+              </p:spPr>
+              <p:txBody>
+                <a:bodyPr/>
+                <a:lstStyle/>
+                <a:p>
+                  <a:r>
+                    <a:rPr lang="zh-TW" altLang="en-US">
+                      <a:noFill/>
+                    </a:rPr>
+                    <a:t> </a:t>
+                  </a:r>
+                </a:p>
+              </p:txBody>
+            </p:sp>
+          </mc:Fallback>
+        </mc:AlternateContent>
+        <p:grpSp>
+          <p:nvGrpSpPr>
+            <p:cNvPr id="2" name="群組 1">
+              <a:extLst>
+                <a:ext uri="{FF2B5EF4-FFF2-40B4-BE49-F238E27FC236}">
+                  <a16:creationId xmlns:a16="http://schemas.microsoft.com/office/drawing/2014/main" id="{FFE07388-8444-4F28-9AB7-B0F8604B6660}"/>
+                </a:ext>
+              </a:extLst>
+            </p:cNvPr>
+            <p:cNvGrpSpPr/>
+            <p:nvPr/>
+          </p:nvGrpSpPr>
+          <p:grpSpPr>
+            <a:xfrm>
+              <a:off x="38100" y="1924795"/>
+              <a:ext cx="2445204" cy="1127530"/>
+              <a:chOff x="6759573" y="-18665"/>
+              <a:chExt cx="2445204" cy="1127530"/>
+            </a:xfrm>
+          </p:grpSpPr>
+          <p:grpSp>
+            <p:nvGrpSpPr>
+              <p:cNvPr id="41" name="群組 40">
                 <a:extLst>
                   <a:ext uri="{FF2B5EF4-FFF2-40B4-BE49-F238E27FC236}">
-                    <a16:creationId xmlns:a16="http://schemas.microsoft.com/office/drawing/2014/main" id="{E3120A0E-484F-44A1-8C52-4CC6C83FEDA5}"/>
+                    <a16:creationId xmlns:a16="http://schemas.microsoft.com/office/drawing/2014/main" id="{09E59E93-E82C-4AAA-8C80-0F97C39D1F64}"/>
                   </a:ext>
                 </a:extLst>
               </p:cNvPr>
-              <p:cNvSpPr txBox="1">
-                <a:spLocks noRot="1" noChangeAspect="1" noMove="1" noResize="1" noEditPoints="1" noAdjustHandles="1" noChangeArrowheads="1" noChangeShapeType="1" noTextEdit="1"/>
-              </p:cNvSpPr>
+              <p:cNvGrpSpPr/>
               <p:nvPr/>
-            </p:nvSpPr>
+            </p:nvGrpSpPr>
+            <p:grpSpPr>
+              <a:xfrm>
+                <a:off x="6759573" y="-18665"/>
+                <a:ext cx="2445204" cy="1127530"/>
+                <a:chOff x="6067325" y="-300721"/>
+                <a:chExt cx="2400583" cy="1153504"/>
+              </a:xfrm>
+            </p:grpSpPr>
+            <mc:AlternateContent xmlns:mc="http://schemas.openxmlformats.org/markup-compatibility/2006">
+              <mc:Choice xmlns:a14="http://schemas.microsoft.com/office/drawing/2010/main" Requires="a14">
+                <p:sp>
+                  <p:nvSpPr>
+                    <p:cNvPr id="44" name="文字方塊 43">
+                      <a:extLst>
+                        <a:ext uri="{FF2B5EF4-FFF2-40B4-BE49-F238E27FC236}">
+                          <a16:creationId xmlns:a16="http://schemas.microsoft.com/office/drawing/2014/main" id="{0EECDBE0-B06E-400E-ACE6-C5E5DE9C003D}"/>
+                        </a:ext>
+                      </a:extLst>
+                    </p:cNvPr>
+                    <p:cNvSpPr txBox="1"/>
+                    <p:nvPr/>
+                  </p:nvSpPr>
+                  <p:spPr>
+                    <a:xfrm>
+                      <a:off x="6645248" y="-300721"/>
+                      <a:ext cx="1822660" cy="1119155"/>
+                    </a:xfrm>
+                    <a:prstGeom prst="rect">
+                      <a:avLst/>
+                    </a:prstGeom>
+                    <a:noFill/>
+                  </p:spPr>
+                  <p:txBody>
+                    <a:bodyPr wrap="square" rtlCol="0">
+                      <a:spAutoFit/>
+                    </a:bodyPr>
+                    <a:lstStyle/>
+                    <a:p>
+                      <a:pPr/>
+                      <a14:m>
+                        <m:oMathPara xmlns:m="http://schemas.openxmlformats.org/officeDocument/2006/math">
+                          <m:oMathParaPr>
+                            <m:jc m:val="left"/>
+                          </m:oMathParaPr>
+                          <m:oMath xmlns:m="http://schemas.openxmlformats.org/officeDocument/2006/math">
+                            <m:d>
+                              <m:dPr>
+                                <m:begChr m:val="|"/>
+                                <m:endChr m:val="|"/>
+                                <m:ctrlPr>
+                                  <a:rPr lang="en-US" altLang="zh-TW" i="1" smtClean="0">
+                                    <a:latin typeface="Cambria Math" panose="02040503050406030204" pitchFamily="18" charset="0"/>
+                                  </a:rPr>
+                                </m:ctrlPr>
+                              </m:dPr>
+                              <m:e>
+                                <m:sSubSup>
+                                  <m:sSubSupPr>
+                                    <m:ctrlPr>
+                                      <a:rPr lang="en-US" altLang="zh-TW" b="1" i="1">
+                                        <a:latin typeface="Cambria Math" panose="02040503050406030204" pitchFamily="18" charset="0"/>
+                                      </a:rPr>
+                                    </m:ctrlPr>
+                                  </m:sSubSupPr>
+                                  <m:e>
+                                    <m:acc>
+                                      <m:accPr>
+                                        <m:chr m:val="̃"/>
+                                        <m:ctrlPr>
+                                          <a:rPr lang="en-US" altLang="zh-TW" i="1" smtClean="0">
+                                            <a:latin typeface="Cambria Math" panose="02040503050406030204" pitchFamily="18" charset="0"/>
+                                          </a:rPr>
+                                        </m:ctrlPr>
+                                      </m:accPr>
+                                      <m:e>
+                                        <m:r>
+                                          <a:rPr lang="en-US" altLang="zh-TW" b="0" i="1" smtClean="0">
+                                            <a:latin typeface="Cambria Math" panose="02040503050406030204" pitchFamily="18" charset="0"/>
+                                          </a:rPr>
+                                          <m:t>𝐴</m:t>
+                                        </m:r>
+                                      </m:e>
+                                    </m:acc>
+                                  </m:e>
+                                  <m:sub>
+                                    <m:r>
+                                      <a:rPr lang="en-US" altLang="zh-TW" i="1">
+                                        <a:latin typeface="Cambria Math" panose="02040503050406030204" pitchFamily="18" charset="0"/>
+                                      </a:rPr>
+                                      <m:t>ℓ, </m:t>
+                                    </m:r>
+                                    <m:r>
+                                      <a:rPr lang="en-US" altLang="zh-TW" i="1">
+                                        <a:latin typeface="Cambria Math" panose="02040503050406030204" pitchFamily="18" charset="0"/>
+                                      </a:rPr>
+                                      <m:t>𝑝</m:t>
+                                    </m:r>
+                                    <m:r>
+                                      <a:rPr lang="en-US" altLang="zh-TW" i="1">
+                                        <a:latin typeface="Cambria Math" panose="02040503050406030204" pitchFamily="18" charset="0"/>
+                                      </a:rPr>
+                                      <m:t>=0</m:t>
+                                    </m:r>
+                                  </m:sub>
+                                  <m:sup>
+                                    <m:r>
+                                      <a:rPr lang="en-US" altLang="zh-TW" i="1">
+                                        <a:latin typeface="Cambria Math" panose="02040503050406030204" pitchFamily="18" charset="0"/>
+                                      </a:rPr>
+                                      <m:t>∥</m:t>
+                                    </m:r>
+                                  </m:sup>
+                                </m:sSubSup>
+                                <m:d>
+                                  <m:dPr>
+                                    <m:ctrlPr>
+                                      <a:rPr lang="en-US" altLang="zh-TW" b="1" i="1">
+                                        <a:latin typeface="Cambria Math" panose="02040503050406030204" pitchFamily="18" charset="0"/>
+                                      </a:rPr>
+                                    </m:ctrlPr>
+                                  </m:dPr>
+                                  <m:e>
+                                    <m:r>
+                                      <a:rPr lang="en-US" altLang="zh-TW" i="1">
+                                        <a:latin typeface="Cambria Math" panose="02040503050406030204" pitchFamily="18" charset="0"/>
+                                      </a:rPr>
+                                      <m:t>𝑟</m:t>
+                                    </m:r>
+                                  </m:e>
+                                </m:d>
+                              </m:e>
+                            </m:d>
+                          </m:oMath>
+                        </m:oMathPara>
+                      </a14:m>
+                      <a:endParaRPr lang="en-US" altLang="zh-TW" i="1" dirty="0">
+                        <a:latin typeface="Times New Roman" panose="02020603050405020304" pitchFamily="18" charset="0"/>
+                        <a:cs typeface="Times New Roman" panose="02020603050405020304" pitchFamily="18" charset="0"/>
+                      </a:endParaRPr>
+                    </a:p>
+                    <a:p>
+                      <a:pPr/>
+                      <a14:m>
+                        <m:oMathPara xmlns:m="http://schemas.openxmlformats.org/officeDocument/2006/math">
+                          <m:oMathParaPr>
+                            <m:jc m:val="left"/>
+                          </m:oMathParaPr>
+                          <m:oMath xmlns:m="http://schemas.openxmlformats.org/officeDocument/2006/math">
+                            <m:d>
+                              <m:dPr>
+                                <m:begChr m:val="|"/>
+                                <m:endChr m:val="|"/>
+                                <m:ctrlPr>
+                                  <a:rPr lang="en-US" altLang="zh-TW" i="1">
+                                    <a:latin typeface="Cambria Math" panose="02040503050406030204" pitchFamily="18" charset="0"/>
+                                  </a:rPr>
+                                </m:ctrlPr>
+                              </m:dPr>
+                              <m:e>
+                                <m:sSubSup>
+                                  <m:sSubSupPr>
+                                    <m:ctrlPr>
+                                      <a:rPr lang="en-US" altLang="zh-TW" b="1" i="1">
+                                        <a:latin typeface="Cambria Math" panose="02040503050406030204" pitchFamily="18" charset="0"/>
+                                      </a:rPr>
+                                    </m:ctrlPr>
+                                  </m:sSubSupPr>
+                                  <m:e>
+                                    <m:acc>
+                                      <m:accPr>
+                                        <m:chr m:val="̃"/>
+                                        <m:ctrlPr>
+                                          <a:rPr lang="en-US" altLang="zh-TW" i="1">
+                                            <a:latin typeface="Cambria Math" panose="02040503050406030204" pitchFamily="18" charset="0"/>
+                                          </a:rPr>
+                                        </m:ctrlPr>
+                                      </m:accPr>
+                                      <m:e>
+                                        <m:r>
+                                          <a:rPr lang="en-US" altLang="zh-TW" i="1">
+                                            <a:latin typeface="Cambria Math" panose="02040503050406030204" pitchFamily="18" charset="0"/>
+                                          </a:rPr>
+                                          <m:t>𝐴</m:t>
+                                        </m:r>
+                                      </m:e>
+                                    </m:acc>
+                                  </m:e>
+                                  <m:sub>
+                                    <m:r>
+                                      <a:rPr lang="en-US" altLang="zh-TW" i="1">
+                                        <a:latin typeface="Cambria Math" panose="02040503050406030204" pitchFamily="18" charset="0"/>
+                                      </a:rPr>
+                                      <m:t>𝜎</m:t>
+                                    </m:r>
+                                    <m:r>
+                                      <a:rPr lang="en-US" altLang="zh-TW" i="1">
+                                        <a:latin typeface="Cambria Math" panose="02040503050406030204" pitchFamily="18" charset="0"/>
+                                      </a:rPr>
+                                      <m:t>=1,ℓ, </m:t>
+                                    </m:r>
+                                    <m:r>
+                                      <a:rPr lang="en-US" altLang="zh-TW" i="1">
+                                        <a:latin typeface="Cambria Math" panose="02040503050406030204" pitchFamily="18" charset="0"/>
+                                      </a:rPr>
+                                      <m:t>𝑝</m:t>
+                                    </m:r>
+                                    <m:r>
+                                      <a:rPr lang="en-US" altLang="zh-TW" i="1">
+                                        <a:latin typeface="Cambria Math" panose="02040503050406030204" pitchFamily="18" charset="0"/>
+                                      </a:rPr>
+                                      <m:t>=0</m:t>
+                                    </m:r>
+                                  </m:sub>
+                                  <m:sup>
+                                    <m:r>
+                                      <a:rPr lang="en-US" altLang="zh-TW" i="1">
+                                        <a:latin typeface="Cambria Math" panose="02040503050406030204" pitchFamily="18" charset="0"/>
+                                      </a:rPr>
+                                      <m:t>𝑧</m:t>
+                                    </m:r>
+                                  </m:sup>
+                                </m:sSubSup>
+                                <m:d>
+                                  <m:dPr>
+                                    <m:ctrlPr>
+                                      <a:rPr lang="en-US" altLang="zh-TW" b="1" i="1">
+                                        <a:latin typeface="Cambria Math" panose="02040503050406030204" pitchFamily="18" charset="0"/>
+                                      </a:rPr>
+                                    </m:ctrlPr>
+                                  </m:dPr>
+                                  <m:e>
+                                    <m:r>
+                                      <a:rPr lang="en-US" altLang="zh-TW" i="1">
+                                        <a:latin typeface="Cambria Math" panose="02040503050406030204" pitchFamily="18" charset="0"/>
+                                      </a:rPr>
+                                      <m:t>𝑟</m:t>
+                                    </m:r>
+                                  </m:e>
+                                </m:d>
+                              </m:e>
+                            </m:d>
+                          </m:oMath>
+                        </m:oMathPara>
+                      </a14:m>
+                      <a:endParaRPr lang="en-US" altLang="zh-TW" dirty="0">
+                        <a:latin typeface="Times New Roman" panose="02020603050405020304" pitchFamily="18" charset="0"/>
+                        <a:cs typeface="Times New Roman" panose="02020603050405020304" pitchFamily="18" charset="0"/>
+                      </a:endParaRPr>
+                    </a:p>
+                    <a:p>
+                      <a:pPr/>
+                      <a14:m>
+                        <m:oMathPara xmlns:m="http://schemas.openxmlformats.org/officeDocument/2006/math">
+                          <m:oMathParaPr>
+                            <m:jc m:val="left"/>
+                          </m:oMathParaPr>
+                          <m:oMath xmlns:m="http://schemas.openxmlformats.org/officeDocument/2006/math">
+                            <m:d>
+                              <m:dPr>
+                                <m:begChr m:val="|"/>
+                                <m:endChr m:val="|"/>
+                                <m:ctrlPr>
+                                  <a:rPr lang="en-US" altLang="zh-TW" i="1">
+                                    <a:latin typeface="Cambria Math" panose="02040503050406030204" pitchFamily="18" charset="0"/>
+                                  </a:rPr>
+                                </m:ctrlPr>
+                              </m:dPr>
+                              <m:e>
+                                <m:sSubSup>
+                                  <m:sSubSupPr>
+                                    <m:ctrlPr>
+                                      <a:rPr lang="en-US" altLang="zh-TW" b="1" i="1">
+                                        <a:latin typeface="Cambria Math" panose="02040503050406030204" pitchFamily="18" charset="0"/>
+                                      </a:rPr>
+                                    </m:ctrlPr>
+                                  </m:sSubSupPr>
+                                  <m:e>
+                                    <m:acc>
+                                      <m:accPr>
+                                        <m:chr m:val="̃"/>
+                                        <m:ctrlPr>
+                                          <a:rPr lang="en-US" altLang="zh-TW" i="1">
+                                            <a:latin typeface="Cambria Math" panose="02040503050406030204" pitchFamily="18" charset="0"/>
+                                          </a:rPr>
+                                        </m:ctrlPr>
+                                      </m:accPr>
+                                      <m:e>
+                                        <m:r>
+                                          <a:rPr lang="en-US" altLang="zh-TW" i="1">
+                                            <a:latin typeface="Cambria Math" panose="02040503050406030204" pitchFamily="18" charset="0"/>
+                                          </a:rPr>
+                                          <m:t>𝐴</m:t>
+                                        </m:r>
+                                      </m:e>
+                                    </m:acc>
+                                  </m:e>
+                                  <m:sub>
+                                    <m:r>
+                                      <a:rPr lang="en-US" altLang="zh-TW" i="1">
+                                        <a:latin typeface="Cambria Math" panose="02040503050406030204" pitchFamily="18" charset="0"/>
+                                      </a:rPr>
+                                      <m:t>𝜎</m:t>
+                                    </m:r>
+                                    <m:r>
+                                      <a:rPr lang="en-US" altLang="zh-TW" i="1">
+                                        <a:latin typeface="Cambria Math" panose="02040503050406030204" pitchFamily="18" charset="0"/>
+                                      </a:rPr>
+                                      <m:t>=−1,ℓ, </m:t>
+                                    </m:r>
+                                    <m:r>
+                                      <a:rPr lang="en-US" altLang="zh-TW" i="1">
+                                        <a:latin typeface="Cambria Math" panose="02040503050406030204" pitchFamily="18" charset="0"/>
+                                      </a:rPr>
+                                      <m:t>𝑝</m:t>
+                                    </m:r>
+                                    <m:r>
+                                      <a:rPr lang="en-US" altLang="zh-TW" i="1">
+                                        <a:latin typeface="Cambria Math" panose="02040503050406030204" pitchFamily="18" charset="0"/>
+                                      </a:rPr>
+                                      <m:t>=0</m:t>
+                                    </m:r>
+                                  </m:sub>
+                                  <m:sup>
+                                    <m:r>
+                                      <a:rPr lang="en-US" altLang="zh-TW" i="1">
+                                        <a:latin typeface="Cambria Math" panose="02040503050406030204" pitchFamily="18" charset="0"/>
+                                      </a:rPr>
+                                      <m:t>𝑧</m:t>
+                                    </m:r>
+                                  </m:sup>
+                                </m:sSubSup>
+                                <m:d>
+                                  <m:dPr>
+                                    <m:ctrlPr>
+                                      <a:rPr lang="en-US" altLang="zh-TW" b="1" i="1">
+                                        <a:latin typeface="Cambria Math" panose="02040503050406030204" pitchFamily="18" charset="0"/>
+                                      </a:rPr>
+                                    </m:ctrlPr>
+                                  </m:dPr>
+                                  <m:e>
+                                    <m:r>
+                                      <a:rPr lang="en-US" altLang="zh-TW" i="1">
+                                        <a:latin typeface="Cambria Math" panose="02040503050406030204" pitchFamily="18" charset="0"/>
+                                      </a:rPr>
+                                      <m:t>𝑟</m:t>
+                                    </m:r>
+                                  </m:e>
+                                </m:d>
+                              </m:e>
+                            </m:d>
+                          </m:oMath>
+                        </m:oMathPara>
+                      </a14:m>
+                      <a:endParaRPr lang="zh-TW" altLang="en-US" b="1" dirty="0">
+                        <a:latin typeface="Times New Roman" panose="02020603050405020304" pitchFamily="18" charset="0"/>
+                        <a:cs typeface="Times New Roman" panose="02020603050405020304" pitchFamily="18" charset="0"/>
+                      </a:endParaRPr>
+                    </a:p>
+                  </p:txBody>
+                </p:sp>
+              </mc:Choice>
+              <mc:Fallback>
+                <p:sp>
+                  <p:nvSpPr>
+                    <p:cNvPr id="44" name="文字方塊 43">
+                      <a:extLst>
+                        <a:ext uri="{FF2B5EF4-FFF2-40B4-BE49-F238E27FC236}">
+                          <a16:creationId xmlns:a16="http://schemas.microsoft.com/office/drawing/2014/main" id="{0EECDBE0-B06E-400E-ACE6-C5E5DE9C003D}"/>
+                        </a:ext>
+                      </a:extLst>
+                    </p:cNvPr>
+                    <p:cNvSpPr txBox="1">
+                      <a:spLocks noRot="1" noChangeAspect="1" noMove="1" noResize="1" noEditPoints="1" noAdjustHandles="1" noChangeArrowheads="1" noChangeShapeType="1" noTextEdit="1"/>
+                    </p:cNvSpPr>
+                    <p:nvPr/>
+                  </p:nvSpPr>
+                  <p:spPr>
+                    <a:xfrm>
+                      <a:off x="6645248" y="-300721"/>
+                      <a:ext cx="1822660" cy="1119155"/>
+                    </a:xfrm>
+                    <a:prstGeom prst="rect">
+                      <a:avLst/>
+                    </a:prstGeom>
+                    <a:blipFill>
+                      <a:blip r:embed="rId17"/>
+                      <a:stretch>
+                        <a:fillRect b="-559"/>
+                      </a:stretch>
+                    </a:blipFill>
+                  </p:spPr>
+                  <p:txBody>
+                    <a:bodyPr/>
+                    <a:lstStyle/>
+                    <a:p>
+                      <a:r>
+                        <a:rPr lang="zh-TW" altLang="en-US">
+                          <a:noFill/>
+                        </a:rPr>
+                        <a:t> </a:t>
+                      </a:r>
+                    </a:p>
+                  </p:txBody>
+                </p:sp>
+              </mc:Fallback>
+            </mc:AlternateContent>
+            <p:sp>
+              <p:nvSpPr>
+                <p:cNvPr id="45" name="矩形: 圓角 44">
+                  <a:extLst>
+                    <a:ext uri="{FF2B5EF4-FFF2-40B4-BE49-F238E27FC236}">
+                      <a16:creationId xmlns:a16="http://schemas.microsoft.com/office/drawing/2014/main" id="{D3F319D8-58DC-40A7-AD41-E91DC1E9F8DE}"/>
+                    </a:ext>
+                  </a:extLst>
+                </p:cNvPr>
+                <p:cNvSpPr/>
+                <p:nvPr/>
+              </p:nvSpPr>
+              <p:spPr>
+                <a:xfrm>
+                  <a:off x="6067325" y="-268451"/>
+                  <a:ext cx="2258421" cy="1121234"/>
+                </a:xfrm>
+                <a:prstGeom prst="roundRect">
+                  <a:avLst/>
+                </a:prstGeom>
+                <a:noFill/>
+                <a:ln w="28575">
+                  <a:solidFill>
+                    <a:schemeClr val="tx1">
+                      <a:lumMod val="50000"/>
+                      <a:lumOff val="50000"/>
+                    </a:schemeClr>
+                  </a:solidFill>
+                </a:ln>
+              </p:spPr>
+              <p:style>
+                <a:lnRef idx="2">
+                  <a:schemeClr val="accent1">
+                    <a:shade val="50000"/>
+                  </a:schemeClr>
+                </a:lnRef>
+                <a:fillRef idx="1">
+                  <a:schemeClr val="accent1"/>
+                </a:fillRef>
+                <a:effectRef idx="0">
+                  <a:schemeClr val="accent1"/>
+                </a:effectRef>
+                <a:fontRef idx="minor">
+                  <a:schemeClr val="lt1"/>
+                </a:fontRef>
+              </p:style>
+              <p:txBody>
+                <a:bodyPr rot="0" spcFirstLastPara="0" vertOverflow="overflow" horzOverflow="overflow" vert="horz" wrap="square" lIns="80998" tIns="40499" rIns="80998" bIns="40499" numCol="1" spcCol="0" rtlCol="0" fromWordArt="0" anchor="ctr" anchorCtr="0" forceAA="0" compatLnSpc="1">
+                  <a:prstTxWarp prst="textNoShape">
+                    <a:avLst/>
+                  </a:prstTxWarp>
+                  <a:noAutofit/>
+                </a:bodyPr>
+                <a:lstStyle/>
+                <a:p>
+                  <a:pPr algn="ctr"/>
+                  <a:endParaRPr lang="zh-TW" altLang="en-US" dirty="0">
+                    <a:latin typeface="Times New Roman" panose="02020603050405020304" pitchFamily="18" charset="0"/>
+                    <a:cs typeface="Times New Roman" panose="02020603050405020304" pitchFamily="18" charset="0"/>
+                  </a:endParaRPr>
+                </a:p>
+              </p:txBody>
+            </p:sp>
+          </p:grpSp>
+          <p:pic>
+            <p:nvPicPr>
+              <p:cNvPr id="10" name="圖片 9">
+                <a:extLst>
+                  <a:ext uri="{FF2B5EF4-FFF2-40B4-BE49-F238E27FC236}">
+                    <a16:creationId xmlns:a16="http://schemas.microsoft.com/office/drawing/2014/main" id="{A996B56B-7116-495E-9B2D-54843A7E5EDB}"/>
+                  </a:ext>
+                </a:extLst>
+              </p:cNvPr>
+              <p:cNvPicPr>
+                <a:picLocks noChangeAspect="1"/>
+              </p:cNvPicPr>
+              <p:nvPr/>
+            </p:nvPicPr>
+            <p:blipFill>
+              <a:blip r:embed="rId18">
+                <a:clrChange>
+                  <a:clrFrom>
+                    <a:srgbClr val="FFFFFF"/>
+                  </a:clrFrom>
+                  <a:clrTo>
+                    <a:srgbClr val="FFFFFF">
+                      <a:alpha val="0"/>
+                    </a:srgbClr>
+                  </a:clrTo>
+                </a:clrChange>
+              </a:blip>
+              <a:stretch>
+                <a:fillRect/>
+              </a:stretch>
+            </p:blipFill>
             <p:spPr>
               <a:xfrm>
-                <a:off x="2084960" y="5895686"/>
-                <a:ext cx="508459" cy="369332"/>
+                <a:off x="6855681" y="153447"/>
+                <a:ext cx="567470" cy="787419"/>
               </a:xfrm>
               <a:prstGeom prst="rect">
                 <a:avLst/>
               </a:prstGeom>
-              <a:blipFill>
-                <a:blip r:embed="rId15"/>
-                <a:stretch>
-                  <a:fillRect/>
-                </a:stretch>
-              </a:blipFill>
             </p:spPr>
-            <p:txBody>
-              <a:bodyPr/>
-              <a:lstStyle/>
-              <a:p>
-                <a:r>
-                  <a:rPr lang="zh-TW" altLang="en-US">
-                    <a:noFill/>
-                  </a:rPr>
-                  <a:t> </a:t>
-                </a:r>
-              </a:p>
-            </p:txBody>
-          </p:sp>
-        </mc:Fallback>
-      </mc:AlternateContent>
-      <mc:AlternateContent xmlns:mc="http://schemas.openxmlformats.org/markup-compatibility/2006">
-        <mc:Choice xmlns:a14="http://schemas.microsoft.com/office/drawing/2010/main" Requires="a14">
-          <p:sp>
-            <p:nvSpPr>
-              <p:cNvPr id="59" name="文字方塊 58">
-                <a:extLst>
-                  <a:ext uri="{FF2B5EF4-FFF2-40B4-BE49-F238E27FC236}">
-                    <a16:creationId xmlns:a16="http://schemas.microsoft.com/office/drawing/2014/main" id="{CE297881-E961-4B5E-83EB-928F44B50082}"/>
-                  </a:ext>
-                </a:extLst>
-              </p:cNvPr>
-              <p:cNvSpPr txBox="1"/>
-              <p:nvPr/>
-            </p:nvSpPr>
-            <p:spPr>
-              <a:xfrm>
-                <a:off x="4612708" y="4294801"/>
-                <a:ext cx="1133442" cy="369332"/>
-              </a:xfrm>
-              <a:prstGeom prst="rect">
-                <a:avLst/>
-              </a:prstGeom>
-              <a:noFill/>
-            </p:spPr>
-            <p:txBody>
-              <a:bodyPr wrap="square" rtlCol="0">
-                <a:spAutoFit/>
-              </a:bodyPr>
-              <a:lstStyle/>
-              <a:p>
-                <a:pPr/>
-                <a14:m>
-                  <m:oMathPara xmlns:m="http://schemas.openxmlformats.org/officeDocument/2006/math">
-                    <m:oMathParaPr>
-                      <m:jc m:val="centerGroup"/>
-                    </m:oMathParaPr>
-                    <m:oMath xmlns:m="http://schemas.openxmlformats.org/officeDocument/2006/math">
-                      <m:r>
-                        <a:rPr lang="en-US" altLang="zh-TW" i="1">
-                          <a:latin typeface="Cambria Math" panose="02040503050406030204" pitchFamily="18" charset="0"/>
-                        </a:rPr>
-                        <m:t>ℓ=0</m:t>
-                      </m:r>
-                    </m:oMath>
-                  </m:oMathPara>
-                </a14:m>
-                <a:endParaRPr lang="zh-TW" altLang="en-US" dirty="0">
-                  <a:latin typeface="Times New Roman" panose="02020603050405020304" pitchFamily="18" charset="0"/>
-                  <a:cs typeface="Times New Roman" panose="02020603050405020304" pitchFamily="18" charset="0"/>
-                </a:endParaRPr>
-              </a:p>
-            </p:txBody>
-          </p:sp>
-        </mc:Choice>
-        <mc:Fallback>
-          <p:sp>
-            <p:nvSpPr>
-              <p:cNvPr id="59" name="文字方塊 58">
-                <a:extLst>
-                  <a:ext uri="{FF2B5EF4-FFF2-40B4-BE49-F238E27FC236}">
-                    <a16:creationId xmlns:a16="http://schemas.microsoft.com/office/drawing/2014/main" id="{CE297881-E961-4B5E-83EB-928F44B50082}"/>
-                  </a:ext>
-                </a:extLst>
-              </p:cNvPr>
-              <p:cNvSpPr txBox="1">
-                <a:spLocks noRot="1" noChangeAspect="1" noMove="1" noResize="1" noEditPoints="1" noAdjustHandles="1" noChangeArrowheads="1" noChangeShapeType="1" noTextEdit="1"/>
-              </p:cNvSpPr>
-              <p:nvPr/>
-            </p:nvSpPr>
-            <p:spPr>
-              <a:xfrm>
-                <a:off x="4612708" y="4294801"/>
-                <a:ext cx="1133442" cy="369332"/>
-              </a:xfrm>
-              <a:prstGeom prst="rect">
-                <a:avLst/>
-              </a:prstGeom>
-              <a:blipFill>
-                <a:blip r:embed="rId16"/>
-                <a:stretch>
-                  <a:fillRect/>
-                </a:stretch>
-              </a:blipFill>
-            </p:spPr>
-            <p:txBody>
-              <a:bodyPr/>
-              <a:lstStyle/>
-              <a:p>
-                <a:r>
-                  <a:rPr lang="zh-TW" altLang="en-US">
-                    <a:noFill/>
-                  </a:rPr>
-                  <a:t> </a:t>
-                </a:r>
-              </a:p>
-            </p:txBody>
-          </p:sp>
-        </mc:Fallback>
-      </mc:AlternateContent>
-      <mc:AlternateContent xmlns:mc="http://schemas.openxmlformats.org/markup-compatibility/2006">
-        <mc:Choice xmlns:a14="http://schemas.microsoft.com/office/drawing/2010/main" Requires="a14">
-          <p:sp>
-            <p:nvSpPr>
-              <p:cNvPr id="60" name="文字方塊 59">
-                <a:extLst>
-                  <a:ext uri="{FF2B5EF4-FFF2-40B4-BE49-F238E27FC236}">
-                    <a16:creationId xmlns:a16="http://schemas.microsoft.com/office/drawing/2014/main" id="{1058910C-C900-415E-9577-4F2E6C6F0642}"/>
-                  </a:ext>
-                </a:extLst>
-              </p:cNvPr>
-              <p:cNvSpPr txBox="1"/>
-              <p:nvPr/>
-            </p:nvSpPr>
-            <p:spPr>
-              <a:xfrm>
-                <a:off x="8184841" y="4294801"/>
-                <a:ext cx="1133442" cy="369332"/>
-              </a:xfrm>
-              <a:prstGeom prst="rect">
-                <a:avLst/>
-              </a:prstGeom>
-              <a:noFill/>
-            </p:spPr>
-            <p:txBody>
-              <a:bodyPr wrap="square" rtlCol="0">
-                <a:spAutoFit/>
-              </a:bodyPr>
-              <a:lstStyle/>
-              <a:p>
-                <a:pPr/>
-                <a14:m>
-                  <m:oMathPara xmlns:m="http://schemas.openxmlformats.org/officeDocument/2006/math">
-                    <m:oMathParaPr>
-                      <m:jc m:val="centerGroup"/>
-                    </m:oMathParaPr>
-                    <m:oMath xmlns:m="http://schemas.openxmlformats.org/officeDocument/2006/math">
-                      <m:r>
-                        <a:rPr lang="en-US" altLang="zh-TW" i="1">
-                          <a:latin typeface="Cambria Math" panose="02040503050406030204" pitchFamily="18" charset="0"/>
-                        </a:rPr>
-                        <m:t>ℓ=2</m:t>
-                      </m:r>
-                    </m:oMath>
-                  </m:oMathPara>
-                </a14:m>
-                <a:endParaRPr lang="zh-TW" altLang="en-US" dirty="0">
-                  <a:latin typeface="Times New Roman" panose="02020603050405020304" pitchFamily="18" charset="0"/>
-                  <a:cs typeface="Times New Roman" panose="02020603050405020304" pitchFamily="18" charset="0"/>
-                </a:endParaRPr>
-              </a:p>
-            </p:txBody>
-          </p:sp>
-        </mc:Choice>
-        <mc:Fallback>
-          <p:sp>
-            <p:nvSpPr>
-              <p:cNvPr id="60" name="文字方塊 59">
-                <a:extLst>
-                  <a:ext uri="{FF2B5EF4-FFF2-40B4-BE49-F238E27FC236}">
-                    <a16:creationId xmlns:a16="http://schemas.microsoft.com/office/drawing/2014/main" id="{1058910C-C900-415E-9577-4F2E6C6F0642}"/>
-                  </a:ext>
-                </a:extLst>
-              </p:cNvPr>
-              <p:cNvSpPr txBox="1">
-                <a:spLocks noRot="1" noChangeAspect="1" noMove="1" noResize="1" noEditPoints="1" noAdjustHandles="1" noChangeArrowheads="1" noChangeShapeType="1" noTextEdit="1"/>
-              </p:cNvSpPr>
-              <p:nvPr/>
-            </p:nvSpPr>
-            <p:spPr>
-              <a:xfrm>
-                <a:off x="8184841" y="4294801"/>
-                <a:ext cx="1133442" cy="369332"/>
-              </a:xfrm>
-              <a:prstGeom prst="rect">
-                <a:avLst/>
-              </a:prstGeom>
-              <a:blipFill>
-                <a:blip r:embed="rId17"/>
-                <a:stretch>
-                  <a:fillRect/>
-                </a:stretch>
-              </a:blipFill>
-            </p:spPr>
-            <p:txBody>
-              <a:bodyPr/>
-              <a:lstStyle/>
-              <a:p>
-                <a:r>
-                  <a:rPr lang="zh-TW" altLang="en-US">
-                    <a:noFill/>
-                  </a:rPr>
-                  <a:t> </a:t>
-                </a:r>
-              </a:p>
-            </p:txBody>
-          </p:sp>
-        </mc:Fallback>
-      </mc:AlternateContent>
-      <mc:AlternateContent xmlns:mc="http://schemas.openxmlformats.org/markup-compatibility/2006">
-        <mc:Choice xmlns:a14="http://schemas.microsoft.com/office/drawing/2010/main" Requires="a14">
-          <p:sp>
-            <p:nvSpPr>
-              <p:cNvPr id="61" name="文字方塊 60">
-                <a:extLst>
-                  <a:ext uri="{FF2B5EF4-FFF2-40B4-BE49-F238E27FC236}">
-                    <a16:creationId xmlns:a16="http://schemas.microsoft.com/office/drawing/2014/main" id="{F9D57B0F-D9B1-4F26-8293-A741864DAF18}"/>
-                  </a:ext>
-                </a:extLst>
-              </p:cNvPr>
-              <p:cNvSpPr txBox="1"/>
-              <p:nvPr/>
-            </p:nvSpPr>
-            <p:spPr>
-              <a:xfrm>
-                <a:off x="6398775" y="4294801"/>
-                <a:ext cx="1133442" cy="369332"/>
-              </a:xfrm>
-              <a:prstGeom prst="rect">
-                <a:avLst/>
-              </a:prstGeom>
-              <a:noFill/>
-            </p:spPr>
-            <p:txBody>
-              <a:bodyPr wrap="square" rtlCol="0">
-                <a:spAutoFit/>
-              </a:bodyPr>
-              <a:lstStyle/>
-              <a:p>
-                <a:pPr/>
-                <a14:m>
-                  <m:oMathPara xmlns:m="http://schemas.openxmlformats.org/officeDocument/2006/math">
-                    <m:oMathParaPr>
-                      <m:jc m:val="centerGroup"/>
-                    </m:oMathParaPr>
-                    <m:oMath xmlns:m="http://schemas.openxmlformats.org/officeDocument/2006/math">
-                      <m:r>
-                        <a:rPr lang="en-US" altLang="zh-TW" i="1">
-                          <a:latin typeface="Cambria Math" panose="02040503050406030204" pitchFamily="18" charset="0"/>
-                        </a:rPr>
-                        <m:t>ℓ=1</m:t>
-                      </m:r>
-                    </m:oMath>
-                  </m:oMathPara>
-                </a14:m>
-                <a:endParaRPr lang="zh-TW" altLang="en-US" dirty="0">
-                  <a:latin typeface="Times New Roman" panose="02020603050405020304" pitchFamily="18" charset="0"/>
-                  <a:cs typeface="Times New Roman" panose="02020603050405020304" pitchFamily="18" charset="0"/>
-                </a:endParaRPr>
-              </a:p>
-            </p:txBody>
-          </p:sp>
-        </mc:Choice>
-        <mc:Fallback>
-          <p:sp>
-            <p:nvSpPr>
-              <p:cNvPr id="61" name="文字方塊 60">
-                <a:extLst>
-                  <a:ext uri="{FF2B5EF4-FFF2-40B4-BE49-F238E27FC236}">
-                    <a16:creationId xmlns:a16="http://schemas.microsoft.com/office/drawing/2014/main" id="{F9D57B0F-D9B1-4F26-8293-A741864DAF18}"/>
-                  </a:ext>
-                </a:extLst>
-              </p:cNvPr>
-              <p:cNvSpPr txBox="1">
-                <a:spLocks noRot="1" noChangeAspect="1" noMove="1" noResize="1" noEditPoints="1" noAdjustHandles="1" noChangeArrowheads="1" noChangeShapeType="1" noTextEdit="1"/>
-              </p:cNvSpPr>
-              <p:nvPr/>
-            </p:nvSpPr>
-            <p:spPr>
-              <a:xfrm>
-                <a:off x="6398775" y="4294801"/>
-                <a:ext cx="1133442" cy="369332"/>
-              </a:xfrm>
-              <a:prstGeom prst="rect">
-                <a:avLst/>
-              </a:prstGeom>
-              <a:blipFill>
-                <a:blip r:embed="rId18"/>
-                <a:stretch>
-                  <a:fillRect/>
-                </a:stretch>
-              </a:blipFill>
-            </p:spPr>
-            <p:txBody>
-              <a:bodyPr/>
-              <a:lstStyle/>
-              <a:p>
-                <a:r>
-                  <a:rPr lang="zh-TW" altLang="en-US">
-                    <a:noFill/>
-                  </a:rPr>
-                  <a:t> </a:t>
-                </a:r>
-              </a:p>
-            </p:txBody>
-          </p:sp>
-        </mc:Fallback>
-      </mc:AlternateContent>
-      <mc:AlternateContent xmlns:mc="http://schemas.openxmlformats.org/markup-compatibility/2006">
-        <mc:Choice xmlns:a14="http://schemas.microsoft.com/office/drawing/2010/main" Requires="a14">
-          <p:sp>
-            <p:nvSpPr>
-              <p:cNvPr id="62" name="文字方塊 61">
-                <a:extLst>
-                  <a:ext uri="{FF2B5EF4-FFF2-40B4-BE49-F238E27FC236}">
-                    <a16:creationId xmlns:a16="http://schemas.microsoft.com/office/drawing/2014/main" id="{AAA00F8E-F9E9-49E8-A5F3-CBB433CACFF6}"/>
-                  </a:ext>
-                </a:extLst>
-              </p:cNvPr>
-              <p:cNvSpPr txBox="1"/>
-              <p:nvPr/>
-            </p:nvSpPr>
-            <p:spPr>
-              <a:xfrm>
-                <a:off x="2826641" y="4294801"/>
-                <a:ext cx="1133442" cy="369332"/>
-              </a:xfrm>
-              <a:prstGeom prst="rect">
-                <a:avLst/>
-              </a:prstGeom>
-              <a:noFill/>
-            </p:spPr>
-            <p:txBody>
-              <a:bodyPr wrap="square" rtlCol="0">
-                <a:spAutoFit/>
-              </a:bodyPr>
-              <a:lstStyle/>
-              <a:p>
-                <a:pPr/>
-                <a14:m>
-                  <m:oMathPara xmlns:m="http://schemas.openxmlformats.org/officeDocument/2006/math">
-                    <m:oMathParaPr>
-                      <m:jc m:val="centerGroup"/>
-                    </m:oMathParaPr>
-                    <m:oMath xmlns:m="http://schemas.openxmlformats.org/officeDocument/2006/math">
-                      <m:r>
-                        <a:rPr lang="en-US" altLang="zh-TW" i="1">
-                          <a:latin typeface="Cambria Math" panose="02040503050406030204" pitchFamily="18" charset="0"/>
-                        </a:rPr>
-                        <m:t>ℓ=−1</m:t>
-                      </m:r>
-                    </m:oMath>
-                  </m:oMathPara>
-                </a14:m>
-                <a:endParaRPr lang="zh-TW" altLang="en-US" dirty="0">
-                  <a:latin typeface="Times New Roman" panose="02020603050405020304" pitchFamily="18" charset="0"/>
-                  <a:cs typeface="Times New Roman" panose="02020603050405020304" pitchFamily="18" charset="0"/>
-                </a:endParaRPr>
-              </a:p>
-            </p:txBody>
-          </p:sp>
-        </mc:Choice>
-        <mc:Fallback>
-          <p:sp>
-            <p:nvSpPr>
-              <p:cNvPr id="62" name="文字方塊 61">
-                <a:extLst>
-                  <a:ext uri="{FF2B5EF4-FFF2-40B4-BE49-F238E27FC236}">
-                    <a16:creationId xmlns:a16="http://schemas.microsoft.com/office/drawing/2014/main" id="{AAA00F8E-F9E9-49E8-A5F3-CBB433CACFF6}"/>
-                  </a:ext>
-                </a:extLst>
-              </p:cNvPr>
-              <p:cNvSpPr txBox="1">
-                <a:spLocks noRot="1" noChangeAspect="1" noMove="1" noResize="1" noEditPoints="1" noAdjustHandles="1" noChangeArrowheads="1" noChangeShapeType="1" noTextEdit="1"/>
-              </p:cNvSpPr>
-              <p:nvPr/>
-            </p:nvSpPr>
-            <p:spPr>
-              <a:xfrm>
-                <a:off x="2826641" y="4294801"/>
-                <a:ext cx="1133442" cy="369332"/>
-              </a:xfrm>
-              <a:prstGeom prst="rect">
-                <a:avLst/>
-              </a:prstGeom>
-              <a:blipFill>
-                <a:blip r:embed="rId19"/>
-                <a:stretch>
-                  <a:fillRect/>
-                </a:stretch>
-              </a:blipFill>
-            </p:spPr>
-            <p:txBody>
-              <a:bodyPr/>
-              <a:lstStyle/>
-              <a:p>
-                <a:r>
-                  <a:rPr lang="zh-TW" altLang="en-US">
-                    <a:noFill/>
-                  </a:rPr>
-                  <a:t> </a:t>
-                </a:r>
-              </a:p>
-            </p:txBody>
-          </p:sp>
-        </mc:Fallback>
-      </mc:AlternateContent>
-      <mc:AlternateContent xmlns:mc="http://schemas.openxmlformats.org/markup-compatibility/2006">
-        <mc:Choice xmlns:a14="http://schemas.microsoft.com/office/drawing/2010/main" Requires="a14">
-          <p:sp>
-            <p:nvSpPr>
-              <p:cNvPr id="63" name="文字方塊 62">
-                <a:extLst>
-                  <a:ext uri="{FF2B5EF4-FFF2-40B4-BE49-F238E27FC236}">
-                    <a16:creationId xmlns:a16="http://schemas.microsoft.com/office/drawing/2014/main" id="{A4D67281-D7F6-40E7-B0DE-82DF71F1DA52}"/>
-                  </a:ext>
-                </a:extLst>
-              </p:cNvPr>
-              <p:cNvSpPr txBox="1"/>
-              <p:nvPr/>
-            </p:nvSpPr>
-            <p:spPr>
-              <a:xfrm>
-                <a:off x="1040575" y="4294801"/>
-                <a:ext cx="1133442" cy="369332"/>
-              </a:xfrm>
-              <a:prstGeom prst="rect">
-                <a:avLst/>
-              </a:prstGeom>
-              <a:noFill/>
-            </p:spPr>
-            <p:txBody>
-              <a:bodyPr wrap="square" rtlCol="0">
-                <a:spAutoFit/>
-              </a:bodyPr>
-              <a:lstStyle/>
-              <a:p>
-                <a:pPr/>
-                <a14:m>
-                  <m:oMathPara xmlns:m="http://schemas.openxmlformats.org/officeDocument/2006/math">
-                    <m:oMathParaPr>
-                      <m:jc m:val="centerGroup"/>
-                    </m:oMathParaPr>
-                    <m:oMath xmlns:m="http://schemas.openxmlformats.org/officeDocument/2006/math">
-                      <m:r>
-                        <a:rPr lang="en-US" altLang="zh-TW" i="1">
-                          <a:latin typeface="Cambria Math" panose="02040503050406030204" pitchFamily="18" charset="0"/>
-                        </a:rPr>
-                        <m:t>ℓ=−2</m:t>
-                      </m:r>
-                    </m:oMath>
-                  </m:oMathPara>
-                </a14:m>
-                <a:endParaRPr lang="zh-TW" altLang="en-US" dirty="0">
-                  <a:latin typeface="Times New Roman" panose="02020603050405020304" pitchFamily="18" charset="0"/>
-                  <a:cs typeface="Times New Roman" panose="02020603050405020304" pitchFamily="18" charset="0"/>
-                </a:endParaRPr>
-              </a:p>
-            </p:txBody>
-          </p:sp>
-        </mc:Choice>
-        <mc:Fallback>
-          <p:sp>
-            <p:nvSpPr>
-              <p:cNvPr id="63" name="文字方塊 62">
-                <a:extLst>
-                  <a:ext uri="{FF2B5EF4-FFF2-40B4-BE49-F238E27FC236}">
-                    <a16:creationId xmlns:a16="http://schemas.microsoft.com/office/drawing/2014/main" id="{A4D67281-D7F6-40E7-B0DE-82DF71F1DA52}"/>
-                  </a:ext>
-                </a:extLst>
-              </p:cNvPr>
-              <p:cNvSpPr txBox="1">
-                <a:spLocks noRot="1" noChangeAspect="1" noMove="1" noResize="1" noEditPoints="1" noAdjustHandles="1" noChangeArrowheads="1" noChangeShapeType="1" noTextEdit="1"/>
-              </p:cNvSpPr>
-              <p:nvPr/>
-            </p:nvSpPr>
-            <p:spPr>
-              <a:xfrm>
-                <a:off x="1040575" y="4294801"/>
-                <a:ext cx="1133442" cy="369332"/>
-              </a:xfrm>
-              <a:prstGeom prst="rect">
-                <a:avLst/>
-              </a:prstGeom>
-              <a:blipFill>
-                <a:blip r:embed="rId20"/>
-                <a:stretch>
-                  <a:fillRect/>
-                </a:stretch>
-              </a:blipFill>
-            </p:spPr>
-            <p:txBody>
-              <a:bodyPr/>
-              <a:lstStyle/>
-              <a:p>
-                <a:r>
-                  <a:rPr lang="zh-TW" altLang="en-US">
-                    <a:noFill/>
-                  </a:rPr>
-                  <a:t> </a:t>
-                </a:r>
-              </a:p>
-            </p:txBody>
-          </p:sp>
-        </mc:Fallback>
-      </mc:AlternateContent>
+          </p:pic>
+        </p:grpSp>
+      </p:grpSp>
     </p:spTree>
     <p:extLst>
       <p:ext uri="{BB962C8B-B14F-4D97-AF65-F5344CB8AC3E}">

--- a/Final/Figures/AinRinC.pptx
+++ b/Final/Figures/AinRinC.pptx
@@ -6,6 +6,7 @@
   </p:sldMasterIdLst>
   <p:sldIdLst>
     <p:sldId id="256" r:id="rId2"/>
+    <p:sldId id="257" r:id="rId3"/>
   </p:sldIdLst>
   <p:sldSz cx="9906000" cy="4859338"/>
   <p:notesSz cx="6858000" cy="9144000"/>
@@ -243,7 +244,7 @@
           <a:p>
             <a:fld id="{4CEE9FC5-A85C-4366-93B5-9F0FBACB00B5}" type="datetimeFigureOut">
               <a:rPr lang="zh-TW" altLang="en-US" smtClean="0"/>
-              <a:t>2026/6/18</a:t>
+              <a:t>2026/6/30</a:t>
             </a:fld>
             <a:endParaRPr lang="zh-TW" altLang="en-US"/>
           </a:p>
@@ -413,7 +414,7 @@
           <a:p>
             <a:fld id="{4CEE9FC5-A85C-4366-93B5-9F0FBACB00B5}" type="datetimeFigureOut">
               <a:rPr lang="zh-TW" altLang="en-US" smtClean="0"/>
-              <a:t>2026/6/18</a:t>
+              <a:t>2026/6/30</a:t>
             </a:fld>
             <a:endParaRPr lang="zh-TW" altLang="en-US"/>
           </a:p>
@@ -593,7 +594,7 @@
           <a:p>
             <a:fld id="{4CEE9FC5-A85C-4366-93B5-9F0FBACB00B5}" type="datetimeFigureOut">
               <a:rPr lang="zh-TW" altLang="en-US" smtClean="0"/>
-              <a:t>2026/6/18</a:t>
+              <a:t>2026/6/30</a:t>
             </a:fld>
             <a:endParaRPr lang="zh-TW" altLang="en-US"/>
           </a:p>
@@ -763,7 +764,7 @@
           <a:p>
             <a:fld id="{4CEE9FC5-A85C-4366-93B5-9F0FBACB00B5}" type="datetimeFigureOut">
               <a:rPr lang="zh-TW" altLang="en-US" smtClean="0"/>
-              <a:t>2026/6/18</a:t>
+              <a:t>2026/6/30</a:t>
             </a:fld>
             <a:endParaRPr lang="zh-TW" altLang="en-US"/>
           </a:p>
@@ -1009,7 +1010,7 @@
           <a:p>
             <a:fld id="{4CEE9FC5-A85C-4366-93B5-9F0FBACB00B5}" type="datetimeFigureOut">
               <a:rPr lang="zh-TW" altLang="en-US" smtClean="0"/>
-              <a:t>2026/6/18</a:t>
+              <a:t>2026/6/30</a:t>
             </a:fld>
             <a:endParaRPr lang="zh-TW" altLang="en-US"/>
           </a:p>
@@ -1241,7 +1242,7 @@
           <a:p>
             <a:fld id="{4CEE9FC5-A85C-4366-93B5-9F0FBACB00B5}" type="datetimeFigureOut">
               <a:rPr lang="zh-TW" altLang="en-US" smtClean="0"/>
-              <a:t>2026/6/18</a:t>
+              <a:t>2026/6/30</a:t>
             </a:fld>
             <a:endParaRPr lang="zh-TW" altLang="en-US"/>
           </a:p>
@@ -1608,7 +1609,7 @@
           <a:p>
             <a:fld id="{4CEE9FC5-A85C-4366-93B5-9F0FBACB00B5}" type="datetimeFigureOut">
               <a:rPr lang="zh-TW" altLang="en-US" smtClean="0"/>
-              <a:t>2026/6/18</a:t>
+              <a:t>2026/6/30</a:t>
             </a:fld>
             <a:endParaRPr lang="zh-TW" altLang="en-US"/>
           </a:p>
@@ -1726,7 +1727,7 @@
           <a:p>
             <a:fld id="{4CEE9FC5-A85C-4366-93B5-9F0FBACB00B5}" type="datetimeFigureOut">
               <a:rPr lang="zh-TW" altLang="en-US" smtClean="0"/>
-              <a:t>2026/6/18</a:t>
+              <a:t>2026/6/30</a:t>
             </a:fld>
             <a:endParaRPr lang="zh-TW" altLang="en-US"/>
           </a:p>
@@ -1821,7 +1822,7 @@
           <a:p>
             <a:fld id="{4CEE9FC5-A85C-4366-93B5-9F0FBACB00B5}" type="datetimeFigureOut">
               <a:rPr lang="zh-TW" altLang="en-US" smtClean="0"/>
-              <a:t>2026/6/18</a:t>
+              <a:t>2026/6/30</a:t>
             </a:fld>
             <a:endParaRPr lang="zh-TW" altLang="en-US"/>
           </a:p>
@@ -2098,7 +2099,7 @@
           <a:p>
             <a:fld id="{4CEE9FC5-A85C-4366-93B5-9F0FBACB00B5}" type="datetimeFigureOut">
               <a:rPr lang="zh-TW" altLang="en-US" smtClean="0"/>
-              <a:t>2026/6/18</a:t>
+              <a:t>2026/6/30</a:t>
             </a:fld>
             <a:endParaRPr lang="zh-TW" altLang="en-US"/>
           </a:p>
@@ -2355,7 +2356,7 @@
           <a:p>
             <a:fld id="{4CEE9FC5-A85C-4366-93B5-9F0FBACB00B5}" type="datetimeFigureOut">
               <a:rPr lang="zh-TW" altLang="en-US" smtClean="0"/>
-              <a:t>2026/6/18</a:t>
+              <a:t>2026/6/30</a:t>
             </a:fld>
             <a:endParaRPr lang="zh-TW" altLang="en-US"/>
           </a:p>
@@ -2568,7 +2569,7 @@
           <a:p>
             <a:fld id="{4CEE9FC5-A85C-4366-93B5-9F0FBACB00B5}" type="datetimeFigureOut">
               <a:rPr lang="zh-TW" altLang="en-US" smtClean="0"/>
-              <a:t>2026/6/18</a:t>
+              <a:t>2026/6/30</a:t>
             </a:fld>
             <a:endParaRPr lang="zh-TW" altLang="en-US"/>
           </a:p>
@@ -3223,8 +3224,8 @@
             </a:prstGeom>
           </p:spPr>
         </p:pic>
-        <mc:AlternateContent xmlns:mc="http://schemas.openxmlformats.org/markup-compatibility/2006">
-          <mc:Choice xmlns:a14="http://schemas.microsoft.com/office/drawing/2010/main" Requires="a14">
+        <mc:AlternateContent xmlns:mc="http://schemas.openxmlformats.org/markup-compatibility/2006" xmlns:a14="http://schemas.microsoft.com/office/drawing/2010/main">
+          <mc:Choice Requires="a14">
             <p:sp>
               <p:nvSpPr>
                 <p:cNvPr id="46" name="文字方塊 45">
@@ -3277,7 +3278,7 @@
               </p:txBody>
             </p:sp>
           </mc:Choice>
-          <mc:Fallback>
+          <mc:Fallback xmlns="">
             <p:sp>
               <p:nvSpPr>
                 <p:cNvPr id="46" name="文字方塊 45">
@@ -3322,8 +3323,8 @@
             </p:sp>
           </mc:Fallback>
         </mc:AlternateContent>
-        <mc:AlternateContent xmlns:mc="http://schemas.openxmlformats.org/markup-compatibility/2006">
-          <mc:Choice xmlns:a14="http://schemas.microsoft.com/office/drawing/2010/main" Requires="a14">
+        <mc:AlternateContent xmlns:mc="http://schemas.openxmlformats.org/markup-compatibility/2006" xmlns:a14="http://schemas.microsoft.com/office/drawing/2010/main">
+          <mc:Choice Requires="a14">
             <p:sp>
               <p:nvSpPr>
                 <p:cNvPr id="47" name="文字方塊 46">
@@ -3376,7 +3377,7 @@
               </p:txBody>
             </p:sp>
           </mc:Choice>
-          <mc:Fallback>
+          <mc:Fallback xmlns="">
             <p:sp>
               <p:nvSpPr>
                 <p:cNvPr id="47" name="文字方塊 46">
@@ -3421,8 +3422,8 @@
             </p:sp>
           </mc:Fallback>
         </mc:AlternateContent>
-        <mc:AlternateContent xmlns:mc="http://schemas.openxmlformats.org/markup-compatibility/2006">
-          <mc:Choice xmlns:a14="http://schemas.microsoft.com/office/drawing/2010/main" Requires="a14">
+        <mc:AlternateContent xmlns:mc="http://schemas.openxmlformats.org/markup-compatibility/2006" xmlns:a14="http://schemas.microsoft.com/office/drawing/2010/main">
+          <mc:Choice Requires="a14">
             <p:sp>
               <p:nvSpPr>
                 <p:cNvPr id="48" name="文字方塊 47">
@@ -3475,7 +3476,7 @@
               </p:txBody>
             </p:sp>
           </mc:Choice>
-          <mc:Fallback>
+          <mc:Fallback xmlns="">
             <p:sp>
               <p:nvSpPr>
                 <p:cNvPr id="48" name="文字方塊 47">
@@ -3520,8 +3521,8 @@
             </p:sp>
           </mc:Fallback>
         </mc:AlternateContent>
-        <mc:AlternateContent xmlns:mc="http://schemas.openxmlformats.org/markup-compatibility/2006">
-          <mc:Choice xmlns:a14="http://schemas.microsoft.com/office/drawing/2010/main" Requires="a14">
+        <mc:AlternateContent xmlns:mc="http://schemas.openxmlformats.org/markup-compatibility/2006" xmlns:a14="http://schemas.microsoft.com/office/drawing/2010/main">
+          <mc:Choice Requires="a14">
             <p:sp>
               <p:nvSpPr>
                 <p:cNvPr id="50" name="文字方塊 49">
@@ -3574,7 +3575,7 @@
               </p:txBody>
             </p:sp>
           </mc:Choice>
-          <mc:Fallback>
+          <mc:Fallback xmlns="">
             <p:sp>
               <p:nvSpPr>
                 <p:cNvPr id="50" name="文字方塊 49">
@@ -3619,8 +3620,8 @@
             </p:sp>
           </mc:Fallback>
         </mc:AlternateContent>
-        <mc:AlternateContent xmlns:mc="http://schemas.openxmlformats.org/markup-compatibility/2006">
-          <mc:Choice xmlns:a14="http://schemas.microsoft.com/office/drawing/2010/main" Requires="a14">
+        <mc:AlternateContent xmlns:mc="http://schemas.openxmlformats.org/markup-compatibility/2006" xmlns:a14="http://schemas.microsoft.com/office/drawing/2010/main">
+          <mc:Choice Requires="a14">
             <p:sp>
               <p:nvSpPr>
                 <p:cNvPr id="52" name="文字方塊 51">
@@ -3673,7 +3674,7 @@
               </p:txBody>
             </p:sp>
           </mc:Choice>
-          <mc:Fallback>
+          <mc:Fallback xmlns="">
             <p:sp>
               <p:nvSpPr>
                 <p:cNvPr id="52" name="文字方塊 51">
@@ -3718,8 +3719,8 @@
             </p:sp>
           </mc:Fallback>
         </mc:AlternateContent>
-        <mc:AlternateContent xmlns:mc="http://schemas.openxmlformats.org/markup-compatibility/2006">
-          <mc:Choice xmlns:a14="http://schemas.microsoft.com/office/drawing/2010/main" Requires="a14">
+        <mc:AlternateContent xmlns:mc="http://schemas.openxmlformats.org/markup-compatibility/2006" xmlns:a14="http://schemas.microsoft.com/office/drawing/2010/main">
+          <mc:Choice Requires="a14">
             <p:sp>
               <p:nvSpPr>
                 <p:cNvPr id="59" name="文字方塊 58">
@@ -3772,7 +3773,7 @@
               </p:txBody>
             </p:sp>
           </mc:Choice>
-          <mc:Fallback>
+          <mc:Fallback xmlns="">
             <p:sp>
               <p:nvSpPr>
                 <p:cNvPr id="59" name="文字方塊 58">
@@ -3817,8 +3818,8 @@
             </p:sp>
           </mc:Fallback>
         </mc:AlternateContent>
-        <mc:AlternateContent xmlns:mc="http://schemas.openxmlformats.org/markup-compatibility/2006">
-          <mc:Choice xmlns:a14="http://schemas.microsoft.com/office/drawing/2010/main" Requires="a14">
+        <mc:AlternateContent xmlns:mc="http://schemas.openxmlformats.org/markup-compatibility/2006" xmlns:a14="http://schemas.microsoft.com/office/drawing/2010/main">
+          <mc:Choice Requires="a14">
             <p:sp>
               <p:nvSpPr>
                 <p:cNvPr id="60" name="文字方塊 59">
@@ -3871,7 +3872,7 @@
               </p:txBody>
             </p:sp>
           </mc:Choice>
-          <mc:Fallback>
+          <mc:Fallback xmlns="">
             <p:sp>
               <p:nvSpPr>
                 <p:cNvPr id="60" name="文字方塊 59">
@@ -3916,8 +3917,8 @@
             </p:sp>
           </mc:Fallback>
         </mc:AlternateContent>
-        <mc:AlternateContent xmlns:mc="http://schemas.openxmlformats.org/markup-compatibility/2006">
-          <mc:Choice xmlns:a14="http://schemas.microsoft.com/office/drawing/2010/main" Requires="a14">
+        <mc:AlternateContent xmlns:mc="http://schemas.openxmlformats.org/markup-compatibility/2006" xmlns:a14="http://schemas.microsoft.com/office/drawing/2010/main">
+          <mc:Choice Requires="a14">
             <p:sp>
               <p:nvSpPr>
                 <p:cNvPr id="61" name="文字方塊 60">
@@ -3970,7 +3971,7 @@
               </p:txBody>
             </p:sp>
           </mc:Choice>
-          <mc:Fallback>
+          <mc:Fallback xmlns="">
             <p:sp>
               <p:nvSpPr>
                 <p:cNvPr id="61" name="文字方塊 60">
@@ -4015,8 +4016,8 @@
             </p:sp>
           </mc:Fallback>
         </mc:AlternateContent>
-        <mc:AlternateContent xmlns:mc="http://schemas.openxmlformats.org/markup-compatibility/2006">
-          <mc:Choice xmlns:a14="http://schemas.microsoft.com/office/drawing/2010/main" Requires="a14">
+        <mc:AlternateContent xmlns:mc="http://schemas.openxmlformats.org/markup-compatibility/2006" xmlns:a14="http://schemas.microsoft.com/office/drawing/2010/main">
+          <mc:Choice Requires="a14">
             <p:sp>
               <p:nvSpPr>
                 <p:cNvPr id="62" name="文字方塊 61">
@@ -4069,7 +4070,7 @@
               </p:txBody>
             </p:sp>
           </mc:Choice>
-          <mc:Fallback>
+          <mc:Fallback xmlns="">
             <p:sp>
               <p:nvSpPr>
                 <p:cNvPr id="62" name="文字方塊 61">
@@ -4114,8 +4115,8 @@
             </p:sp>
           </mc:Fallback>
         </mc:AlternateContent>
-        <mc:AlternateContent xmlns:mc="http://schemas.openxmlformats.org/markup-compatibility/2006">
-          <mc:Choice xmlns:a14="http://schemas.microsoft.com/office/drawing/2010/main" Requires="a14">
+        <mc:AlternateContent xmlns:mc="http://schemas.openxmlformats.org/markup-compatibility/2006" xmlns:a14="http://schemas.microsoft.com/office/drawing/2010/main">
+          <mc:Choice Requires="a14">
             <p:sp>
               <p:nvSpPr>
                 <p:cNvPr id="63" name="文字方塊 62">
@@ -4168,7 +4169,7 @@
               </p:txBody>
             </p:sp>
           </mc:Choice>
-          <mc:Fallback>
+          <mc:Fallback xmlns="">
             <p:sp>
               <p:nvSpPr>
                 <p:cNvPr id="63" name="文字方塊 62">
@@ -4213,8 +4214,8 @@
             </p:sp>
           </mc:Fallback>
         </mc:AlternateContent>
-        <mc:AlternateContent xmlns:mc="http://schemas.openxmlformats.org/markup-compatibility/2006">
-          <mc:Choice xmlns:a14="http://schemas.microsoft.com/office/drawing/2010/main" Requires="a14">
+        <mc:AlternateContent xmlns:mc="http://schemas.openxmlformats.org/markup-compatibility/2006" xmlns:a14="http://schemas.microsoft.com/office/drawing/2010/main">
+          <mc:Choice Requires="a14">
             <p:sp>
               <p:nvSpPr>
                 <p:cNvPr id="53" name="文字方塊 52">
@@ -4293,7 +4294,7 @@
               </p:txBody>
             </p:sp>
           </mc:Choice>
-          <mc:Fallback>
+          <mc:Fallback xmlns="">
             <p:sp>
               <p:nvSpPr>
                 <p:cNvPr id="53" name="文字方塊 52">
@@ -4381,8 +4382,8 @@
             </a:p>
           </p:txBody>
         </p:sp>
-        <mc:AlternateContent xmlns:mc="http://schemas.openxmlformats.org/markup-compatibility/2006">
-          <mc:Choice xmlns:a14="http://schemas.microsoft.com/office/drawing/2010/main" Requires="a14">
+        <mc:AlternateContent xmlns:mc="http://schemas.openxmlformats.org/markup-compatibility/2006" xmlns:a14="http://schemas.microsoft.com/office/drawing/2010/main">
+          <mc:Choice Requires="a14">
             <p:sp>
               <p:nvSpPr>
                 <p:cNvPr id="55" name="矩形 54">
@@ -4445,13 +4446,7 @@
                         <a:rPr lang="en-US" altLang="zh-TW" i="1">
                           <a:latin typeface="Cambria Math" panose="02040503050406030204" pitchFamily="18" charset="0"/>
                         </a:rPr>
-                        <m:t>=1.5</m:t>
-                      </m:r>
-                      <m:r>
-                        <a:rPr lang="en-US" altLang="zh-TW" i="1">
-                          <a:latin typeface="Cambria Math" panose="02040503050406030204" pitchFamily="18" charset="0"/>
-                        </a:rPr>
-                        <m:t> </m:t>
+                        <m:t>=1.5 </m:t>
                       </m:r>
                       <m:r>
                         <a:rPr lang="en-US" altLang="zh-TW" i="1">
@@ -4478,7 +4473,7 @@
               </p:txBody>
             </p:sp>
           </mc:Choice>
-          <mc:Fallback>
+          <mc:Fallback xmlns="">
             <p:sp>
               <p:nvSpPr>
                 <p:cNvPr id="55" name="矩形 54">
@@ -4523,8 +4518,8 @@
             </p:sp>
           </mc:Fallback>
         </mc:AlternateContent>
-        <mc:AlternateContent xmlns:mc="http://schemas.openxmlformats.org/markup-compatibility/2006">
-          <mc:Choice xmlns:a14="http://schemas.microsoft.com/office/drawing/2010/main" Requires="a14">
+        <mc:AlternateContent xmlns:mc="http://schemas.openxmlformats.org/markup-compatibility/2006" xmlns:a14="http://schemas.microsoft.com/office/drawing/2010/main">
+          <mc:Choice Requires="a14">
             <p:sp>
               <p:nvSpPr>
                 <p:cNvPr id="57" name="矩形 56">
@@ -4626,7 +4621,7 @@
               </p:txBody>
             </p:sp>
           </mc:Choice>
-          <mc:Fallback>
+          <mc:Fallback xmlns="">
             <p:sp>
               <p:nvSpPr>
                 <p:cNvPr id="57" name="矩形 56">
@@ -4711,8 +4706,8 @@
                 <a:chExt cx="2400583" cy="1153504"/>
               </a:xfrm>
             </p:grpSpPr>
-            <mc:AlternateContent xmlns:mc="http://schemas.openxmlformats.org/markup-compatibility/2006">
-              <mc:Choice xmlns:a14="http://schemas.microsoft.com/office/drawing/2010/main" Requires="a14">
+            <mc:AlternateContent xmlns:mc="http://schemas.openxmlformats.org/markup-compatibility/2006" xmlns:a14="http://schemas.microsoft.com/office/drawing/2010/main">
+              <mc:Choice Requires="a14">
                 <p:sp>
                   <p:nvSpPr>
                     <p:cNvPr id="44" name="文字方塊 43">
@@ -5064,7 +5059,7 @@
                   </p:txBody>
                 </p:sp>
               </mc:Choice>
-              <mc:Fallback>
+              <mc:Fallback xmlns="">
                 <p:sp>
                   <p:nvSpPr>
                     <p:cNvPr id="44" name="文字方塊 43">
@@ -5220,6 +5215,2610 @@
     <p:extLst>
       <p:ext uri="{BB962C8B-B14F-4D97-AF65-F5344CB8AC3E}">
         <p14:creationId xmlns:p14="http://schemas.microsoft.com/office/powerpoint/2010/main" val="1684366169"/>
+      </p:ext>
+    </p:extLst>
+  </p:cSld>
+  <p:clrMapOvr>
+    <a:masterClrMapping/>
+  </p:clrMapOvr>
+</p:sld>
+</file>
+
+<file path=ppt/slides/slide2.xml><?xml version="1.0" encoding="utf-8"?>
+<p:sld xmlns:a="http://schemas.openxmlformats.org/drawingml/2006/main" xmlns:r="http://schemas.openxmlformats.org/officeDocument/2006/relationships" xmlns:p="http://schemas.openxmlformats.org/presentationml/2006/main" show="0">
+  <p:cSld>
+    <p:spTree>
+      <p:nvGrpSpPr>
+        <p:cNvPr id="1" name=""/>
+        <p:cNvGrpSpPr/>
+        <p:nvPr/>
+      </p:nvGrpSpPr>
+      <p:grpSpPr>
+        <a:xfrm>
+          <a:off x="0" y="0"/>
+          <a:ext cx="0" cy="0"/>
+          <a:chOff x="0" y="0"/>
+          <a:chExt cx="0" cy="0"/>
+        </a:xfrm>
+      </p:grpSpPr>
+      <p:sp>
+        <p:nvSpPr>
+          <p:cNvPr id="29" name="矩形: 圓角 28">
+            <a:extLst>
+              <a:ext uri="{FF2B5EF4-FFF2-40B4-BE49-F238E27FC236}">
+                <a16:creationId xmlns:a16="http://schemas.microsoft.com/office/drawing/2014/main" id="{12A747F0-4A58-4A15-AB9D-2DB0BA632A37}"/>
+              </a:ext>
+            </a:extLst>
+          </p:cNvPr>
+          <p:cNvSpPr/>
+          <p:nvPr/>
+        </p:nvSpPr>
+        <p:spPr>
+          <a:xfrm>
+            <a:off x="2618181" y="2846973"/>
+            <a:ext cx="6995719" cy="1831707"/>
+          </a:xfrm>
+          <a:prstGeom prst="roundRect">
+            <a:avLst>
+              <a:gd name="adj" fmla="val 5706"/>
+            </a:avLst>
+          </a:prstGeom>
+          <a:solidFill>
+            <a:schemeClr val="bg1">
+              <a:lumMod val="95000"/>
+            </a:schemeClr>
+          </a:solidFill>
+          <a:ln w="19050">
+            <a:solidFill>
+              <a:schemeClr val="tx1">
+                <a:lumMod val="50000"/>
+                <a:lumOff val="50000"/>
+              </a:schemeClr>
+            </a:solidFill>
+          </a:ln>
+        </p:spPr>
+        <p:style>
+          <a:lnRef idx="2">
+            <a:schemeClr val="accent1">
+              <a:shade val="50000"/>
+            </a:schemeClr>
+          </a:lnRef>
+          <a:fillRef idx="1">
+            <a:schemeClr val="accent1"/>
+          </a:fillRef>
+          <a:effectRef idx="0">
+            <a:schemeClr val="accent1"/>
+          </a:effectRef>
+          <a:fontRef idx="minor">
+            <a:schemeClr val="lt1"/>
+          </a:fontRef>
+        </p:style>
+        <p:txBody>
+          <a:bodyPr rot="0" spcFirstLastPara="0" vertOverflow="overflow" horzOverflow="overflow" vert="horz" wrap="square" lIns="91440" tIns="45720" rIns="91440" bIns="45720" numCol="1" spcCol="0" rtlCol="0" fromWordArt="0" anchor="ctr" anchorCtr="0" forceAA="0" compatLnSpc="1">
+            <a:prstTxWarp prst="textNoShape">
+              <a:avLst/>
+            </a:prstTxWarp>
+            <a:noAutofit/>
+          </a:bodyPr>
+          <a:lstStyle/>
+          <a:p>
+            <a:pPr algn="ctr"/>
+            <a:endParaRPr lang="zh-TW" altLang="en-US">
+              <a:latin typeface="Times New Roman" panose="02020603050405020304" pitchFamily="18" charset="0"/>
+              <a:cs typeface="Times New Roman" panose="02020603050405020304" pitchFamily="18" charset="0"/>
+            </a:endParaRPr>
+          </a:p>
+        </p:txBody>
+      </p:sp>
+      <p:pic>
+        <p:nvPicPr>
+          <p:cNvPr id="35" name="圖片 34">
+            <a:extLst>
+              <a:ext uri="{FF2B5EF4-FFF2-40B4-BE49-F238E27FC236}">
+                <a16:creationId xmlns:a16="http://schemas.microsoft.com/office/drawing/2014/main" id="{910F7F4D-6B3C-48B5-B766-F91B6CD0B9CF}"/>
+              </a:ext>
+            </a:extLst>
+          </p:cNvPr>
+          <p:cNvPicPr>
+            <a:picLocks noChangeAspect="1"/>
+          </p:cNvPicPr>
+          <p:nvPr/>
+        </p:nvPicPr>
+        <p:blipFill rotWithShape="1">
+          <a:blip r:embed="rId2">
+            <a:clrChange>
+              <a:clrFrom>
+                <a:srgbClr val="FFFFFF"/>
+              </a:clrFrom>
+              <a:clrTo>
+                <a:srgbClr val="FFFFFF">
+                  <a:alpha val="0"/>
+                </a:srgbClr>
+              </a:clrTo>
+            </a:clrChange>
+            <a:extLst>
+              <a:ext uri="{28A0092B-C50C-407E-A947-70E740481C1C}">
+                <a14:useLocalDpi xmlns:a14="http://schemas.microsoft.com/office/drawing/2010/main" val="0"/>
+              </a:ext>
+            </a:extLst>
+          </a:blip>
+          <a:srcRect l="80822"/>
+          <a:stretch/>
+        </p:blipFill>
+        <p:spPr>
+          <a:xfrm>
+            <a:off x="8227694" y="2731067"/>
+            <a:ext cx="1448359" cy="2000504"/>
+          </a:xfrm>
+          <a:prstGeom prst="rect">
+            <a:avLst/>
+          </a:prstGeom>
+        </p:spPr>
+      </p:pic>
+      <p:sp>
+        <p:nvSpPr>
+          <p:cNvPr id="30" name="矩形: 圓角 29">
+            <a:extLst>
+              <a:ext uri="{FF2B5EF4-FFF2-40B4-BE49-F238E27FC236}">
+                <a16:creationId xmlns:a16="http://schemas.microsoft.com/office/drawing/2014/main" id="{B93E4F7D-C584-48A1-8746-F7F6E909DF40}"/>
+              </a:ext>
+            </a:extLst>
+          </p:cNvPr>
+          <p:cNvSpPr/>
+          <p:nvPr/>
+        </p:nvSpPr>
+        <p:spPr>
+          <a:xfrm>
+            <a:off x="2613285" y="423610"/>
+            <a:ext cx="6995719" cy="2030231"/>
+          </a:xfrm>
+          <a:prstGeom prst="roundRect">
+            <a:avLst>
+              <a:gd name="adj" fmla="val 6163"/>
+            </a:avLst>
+          </a:prstGeom>
+          <a:solidFill>
+            <a:schemeClr val="bg1">
+              <a:lumMod val="95000"/>
+            </a:schemeClr>
+          </a:solidFill>
+          <a:ln w="19050">
+            <a:solidFill>
+              <a:schemeClr val="tx1">
+                <a:lumMod val="50000"/>
+                <a:lumOff val="50000"/>
+              </a:schemeClr>
+            </a:solidFill>
+          </a:ln>
+        </p:spPr>
+        <p:style>
+          <a:lnRef idx="2">
+            <a:schemeClr val="accent1">
+              <a:shade val="50000"/>
+            </a:schemeClr>
+          </a:lnRef>
+          <a:fillRef idx="1">
+            <a:schemeClr val="accent1"/>
+          </a:fillRef>
+          <a:effectRef idx="0">
+            <a:schemeClr val="accent1"/>
+          </a:effectRef>
+          <a:fontRef idx="minor">
+            <a:schemeClr val="lt1"/>
+          </a:fontRef>
+        </p:style>
+        <p:txBody>
+          <a:bodyPr rot="0" spcFirstLastPara="0" vertOverflow="overflow" horzOverflow="overflow" vert="horz" wrap="square" lIns="91440" tIns="45720" rIns="91440" bIns="45720" numCol="1" spcCol="0" rtlCol="0" fromWordArt="0" anchor="ctr" anchorCtr="0" forceAA="0" compatLnSpc="1">
+            <a:prstTxWarp prst="textNoShape">
+              <a:avLst/>
+            </a:prstTxWarp>
+            <a:noAutofit/>
+          </a:bodyPr>
+          <a:lstStyle/>
+          <a:p>
+            <a:pPr algn="ctr"/>
+            <a:endParaRPr lang="zh-TW" altLang="en-US" dirty="0">
+              <a:latin typeface="Times New Roman" panose="02020603050405020304" pitchFamily="18" charset="0"/>
+              <a:cs typeface="Times New Roman" panose="02020603050405020304" pitchFamily="18" charset="0"/>
+            </a:endParaRPr>
+          </a:p>
+        </p:txBody>
+      </p:sp>
+      <p:pic>
+        <p:nvPicPr>
+          <p:cNvPr id="7" name="圖片 6">
+            <a:extLst>
+              <a:ext uri="{FF2B5EF4-FFF2-40B4-BE49-F238E27FC236}">
+                <a16:creationId xmlns:a16="http://schemas.microsoft.com/office/drawing/2014/main" id="{84826E07-676E-4A6F-8402-97871E4AD56C}"/>
+              </a:ext>
+            </a:extLst>
+          </p:cNvPr>
+          <p:cNvPicPr>
+            <a:picLocks noChangeAspect="1"/>
+          </p:cNvPicPr>
+          <p:nvPr/>
+        </p:nvPicPr>
+        <p:blipFill rotWithShape="1">
+          <a:blip r:embed="rId3">
+            <a:clrChange>
+              <a:clrFrom>
+                <a:srgbClr val="FFFFFF"/>
+              </a:clrFrom>
+              <a:clrTo>
+                <a:srgbClr val="FFFFFF">
+                  <a:alpha val="0"/>
+                </a:srgbClr>
+              </a:clrTo>
+            </a:clrChange>
+            <a:extLst>
+              <a:ext uri="{28A0092B-C50C-407E-A947-70E740481C1C}">
+                <a14:useLocalDpi xmlns:a14="http://schemas.microsoft.com/office/drawing/2010/main" val="0"/>
+              </a:ext>
+            </a:extLst>
+          </a:blip>
+          <a:srcRect r="76535"/>
+          <a:stretch/>
+        </p:blipFill>
+        <p:spPr>
+          <a:xfrm>
+            <a:off x="2559807" y="306347"/>
+            <a:ext cx="1772163" cy="2000504"/>
+          </a:xfrm>
+          <a:prstGeom prst="rect">
+            <a:avLst/>
+          </a:prstGeom>
+        </p:spPr>
+      </p:pic>
+      <p:pic>
+        <p:nvPicPr>
+          <p:cNvPr id="9" name="圖片 8">
+            <a:extLst>
+              <a:ext uri="{FF2B5EF4-FFF2-40B4-BE49-F238E27FC236}">
+                <a16:creationId xmlns:a16="http://schemas.microsoft.com/office/drawing/2014/main" id="{FDB0F021-B179-41EB-832A-F5FBB65DAECD}"/>
+              </a:ext>
+            </a:extLst>
+          </p:cNvPr>
+          <p:cNvPicPr>
+            <a:picLocks noChangeAspect="1"/>
+          </p:cNvPicPr>
+          <p:nvPr/>
+        </p:nvPicPr>
+        <p:blipFill rotWithShape="1">
+          <a:blip r:embed="rId2">
+            <a:clrChange>
+              <a:clrFrom>
+                <a:srgbClr val="FFFFFF"/>
+              </a:clrFrom>
+              <a:clrTo>
+                <a:srgbClr val="FFFFFF">
+                  <a:alpha val="0"/>
+                </a:srgbClr>
+              </a:clrTo>
+            </a:clrChange>
+            <a:extLst>
+              <a:ext uri="{28A0092B-C50C-407E-A947-70E740481C1C}">
+                <a14:useLocalDpi xmlns:a14="http://schemas.microsoft.com/office/drawing/2010/main" val="0"/>
+              </a:ext>
+            </a:extLst>
+          </a:blip>
+          <a:srcRect r="76688"/>
+          <a:stretch/>
+        </p:blipFill>
+        <p:spPr>
+          <a:xfrm>
+            <a:off x="2548561" y="2731067"/>
+            <a:ext cx="1760549" cy="2000504"/>
+          </a:xfrm>
+          <a:prstGeom prst="rect">
+            <a:avLst/>
+          </a:prstGeom>
+        </p:spPr>
+      </p:pic>
+      <p:pic>
+        <p:nvPicPr>
+          <p:cNvPr id="26" name="圖片 25">
+            <a:extLst>
+              <a:ext uri="{FF2B5EF4-FFF2-40B4-BE49-F238E27FC236}">
+                <a16:creationId xmlns:a16="http://schemas.microsoft.com/office/drawing/2014/main" id="{79827435-0C28-405B-8780-66836B077752}"/>
+              </a:ext>
+            </a:extLst>
+          </p:cNvPr>
+          <p:cNvPicPr>
+            <a:picLocks noChangeAspect="1"/>
+          </p:cNvPicPr>
+          <p:nvPr/>
+        </p:nvPicPr>
+        <p:blipFill rotWithShape="1">
+          <a:blip r:embed="rId3">
+            <a:clrChange>
+              <a:clrFrom>
+                <a:srgbClr val="FFFFFF"/>
+              </a:clrFrom>
+              <a:clrTo>
+                <a:srgbClr val="FFFFFF">
+                  <a:alpha val="0"/>
+                </a:srgbClr>
+              </a:clrTo>
+            </a:clrChange>
+            <a:extLst>
+              <a:ext uri="{28A0092B-C50C-407E-A947-70E740481C1C}">
+                <a14:useLocalDpi xmlns:a14="http://schemas.microsoft.com/office/drawing/2010/main" val="0"/>
+              </a:ext>
+            </a:extLst>
+          </a:blip>
+          <a:srcRect l="23919" r="57617"/>
+          <a:stretch/>
+        </p:blipFill>
+        <p:spPr>
+          <a:xfrm>
+            <a:off x="4255770" y="306347"/>
+            <a:ext cx="1394460" cy="2000504"/>
+          </a:xfrm>
+          <a:prstGeom prst="rect">
+            <a:avLst/>
+          </a:prstGeom>
+        </p:spPr>
+      </p:pic>
+      <p:pic>
+        <p:nvPicPr>
+          <p:cNvPr id="27" name="圖片 26">
+            <a:extLst>
+              <a:ext uri="{FF2B5EF4-FFF2-40B4-BE49-F238E27FC236}">
+                <a16:creationId xmlns:a16="http://schemas.microsoft.com/office/drawing/2014/main" id="{096AA757-8061-4BB4-8E02-9CB8D4AB4FF5}"/>
+              </a:ext>
+            </a:extLst>
+          </p:cNvPr>
+          <p:cNvPicPr>
+            <a:picLocks noChangeAspect="1"/>
+          </p:cNvPicPr>
+          <p:nvPr/>
+        </p:nvPicPr>
+        <p:blipFill rotWithShape="1">
+          <a:blip r:embed="rId2">
+            <a:clrChange>
+              <a:clrFrom>
+                <a:srgbClr val="FFFFFF"/>
+              </a:clrFrom>
+              <a:clrTo>
+                <a:srgbClr val="FFFFFF">
+                  <a:alpha val="0"/>
+                </a:srgbClr>
+              </a:clrTo>
+            </a:clrChange>
+            <a:extLst>
+              <a:ext uri="{28A0092B-C50C-407E-A947-70E740481C1C}">
+                <a14:useLocalDpi xmlns:a14="http://schemas.microsoft.com/office/drawing/2010/main" val="0"/>
+              </a:ext>
+            </a:extLst>
+          </a:blip>
+          <a:srcRect l="24068" r="57771"/>
+          <a:stretch/>
+        </p:blipFill>
+        <p:spPr>
+          <a:xfrm>
+            <a:off x="4255770" y="2731067"/>
+            <a:ext cx="1371600" cy="2000504"/>
+          </a:xfrm>
+          <a:prstGeom prst="rect">
+            <a:avLst/>
+          </a:prstGeom>
+        </p:spPr>
+      </p:pic>
+      <p:pic>
+        <p:nvPicPr>
+          <p:cNvPr id="28" name="圖片 27">
+            <a:extLst>
+              <a:ext uri="{FF2B5EF4-FFF2-40B4-BE49-F238E27FC236}">
+                <a16:creationId xmlns:a16="http://schemas.microsoft.com/office/drawing/2014/main" id="{5E9FD916-6555-48AC-A802-CE6D2BBCDF04}"/>
+              </a:ext>
+            </a:extLst>
+          </p:cNvPr>
+          <p:cNvPicPr>
+            <a:picLocks noChangeAspect="1"/>
+          </p:cNvPicPr>
+          <p:nvPr/>
+        </p:nvPicPr>
+        <p:blipFill rotWithShape="1">
+          <a:blip r:embed="rId3">
+            <a:clrChange>
+              <a:clrFrom>
+                <a:srgbClr val="FFFFFF"/>
+              </a:clrFrom>
+              <a:clrTo>
+                <a:srgbClr val="FFFFFF">
+                  <a:alpha val="0"/>
+                </a:srgbClr>
+              </a:clrTo>
+            </a:clrChange>
+            <a:extLst>
+              <a:ext uri="{28A0092B-C50C-407E-A947-70E740481C1C}">
+                <a14:useLocalDpi xmlns:a14="http://schemas.microsoft.com/office/drawing/2010/main" val="0"/>
+              </a:ext>
+            </a:extLst>
+          </a:blip>
+          <a:srcRect l="42989" r="38850"/>
+          <a:stretch/>
+        </p:blipFill>
+        <p:spPr>
+          <a:xfrm>
+            <a:off x="5591175" y="306347"/>
+            <a:ext cx="1371600" cy="2000504"/>
+          </a:xfrm>
+          <a:prstGeom prst="rect">
+            <a:avLst/>
+          </a:prstGeom>
+        </p:spPr>
+      </p:pic>
+      <p:pic>
+        <p:nvPicPr>
+          <p:cNvPr id="31" name="圖片 30">
+            <a:extLst>
+              <a:ext uri="{FF2B5EF4-FFF2-40B4-BE49-F238E27FC236}">
+                <a16:creationId xmlns:a16="http://schemas.microsoft.com/office/drawing/2014/main" id="{40EFB41C-C280-402F-84C2-7A84B7D9736B}"/>
+              </a:ext>
+            </a:extLst>
+          </p:cNvPr>
+          <p:cNvPicPr>
+            <a:picLocks noChangeAspect="1"/>
+          </p:cNvPicPr>
+          <p:nvPr/>
+        </p:nvPicPr>
+        <p:blipFill rotWithShape="1">
+          <a:blip r:embed="rId2">
+            <a:clrChange>
+              <a:clrFrom>
+                <a:srgbClr val="FFFFFF"/>
+              </a:clrFrom>
+              <a:clrTo>
+                <a:srgbClr val="FFFFFF">
+                  <a:alpha val="0"/>
+                </a:srgbClr>
+              </a:clrTo>
+            </a:clrChange>
+            <a:extLst>
+              <a:ext uri="{28A0092B-C50C-407E-A947-70E740481C1C}">
+                <a14:useLocalDpi xmlns:a14="http://schemas.microsoft.com/office/drawing/2010/main" val="0"/>
+              </a:ext>
+            </a:extLst>
+          </a:blip>
+          <a:srcRect l="42835" r="38701"/>
+          <a:stretch/>
+        </p:blipFill>
+        <p:spPr>
+          <a:xfrm>
+            <a:off x="5568315" y="2731067"/>
+            <a:ext cx="1394460" cy="2000504"/>
+          </a:xfrm>
+          <a:prstGeom prst="rect">
+            <a:avLst/>
+          </a:prstGeom>
+        </p:spPr>
+      </p:pic>
+      <p:pic>
+        <p:nvPicPr>
+          <p:cNvPr id="32" name="圖片 31">
+            <a:extLst>
+              <a:ext uri="{FF2B5EF4-FFF2-40B4-BE49-F238E27FC236}">
+                <a16:creationId xmlns:a16="http://schemas.microsoft.com/office/drawing/2014/main" id="{A7082120-052D-408D-8779-FC4729856C34}"/>
+              </a:ext>
+            </a:extLst>
+          </p:cNvPr>
+          <p:cNvPicPr>
+            <a:picLocks noChangeAspect="1"/>
+          </p:cNvPicPr>
+          <p:nvPr/>
+        </p:nvPicPr>
+        <p:blipFill rotWithShape="1">
+          <a:blip r:embed="rId3">
+            <a:clrChange>
+              <a:clrFrom>
+                <a:srgbClr val="FFFFFF"/>
+              </a:clrFrom>
+              <a:clrTo>
+                <a:srgbClr val="FFFFFF">
+                  <a:alpha val="0"/>
+                </a:srgbClr>
+              </a:clrTo>
+            </a:clrChange>
+            <a:extLst>
+              <a:ext uri="{28A0092B-C50C-407E-A947-70E740481C1C}">
+                <a14:useLocalDpi xmlns:a14="http://schemas.microsoft.com/office/drawing/2010/main" val="0"/>
+              </a:ext>
+            </a:extLst>
+          </a:blip>
+          <a:srcRect l="61755" r="19932"/>
+          <a:stretch/>
+        </p:blipFill>
+        <p:spPr>
+          <a:xfrm>
+            <a:off x="6903719" y="306347"/>
+            <a:ext cx="1383031" cy="2000504"/>
+          </a:xfrm>
+          <a:prstGeom prst="rect">
+            <a:avLst/>
+          </a:prstGeom>
+        </p:spPr>
+      </p:pic>
+      <p:pic>
+        <p:nvPicPr>
+          <p:cNvPr id="33" name="圖片 32">
+            <a:extLst>
+              <a:ext uri="{FF2B5EF4-FFF2-40B4-BE49-F238E27FC236}">
+                <a16:creationId xmlns:a16="http://schemas.microsoft.com/office/drawing/2014/main" id="{7A80ADCF-B66F-40EF-9B89-A737A5586C3F}"/>
+              </a:ext>
+            </a:extLst>
+          </p:cNvPr>
+          <p:cNvPicPr>
+            <a:picLocks noChangeAspect="1"/>
+          </p:cNvPicPr>
+          <p:nvPr/>
+        </p:nvPicPr>
+        <p:blipFill rotWithShape="1">
+          <a:blip r:embed="rId2">
+            <a:clrChange>
+              <a:clrFrom>
+                <a:srgbClr val="FFFFFF"/>
+              </a:clrFrom>
+              <a:clrTo>
+                <a:srgbClr val="FFFFFF">
+                  <a:alpha val="0"/>
+                </a:srgbClr>
+              </a:clrTo>
+            </a:clrChange>
+            <a:extLst>
+              <a:ext uri="{28A0092B-C50C-407E-A947-70E740481C1C}">
+                <a14:useLocalDpi xmlns:a14="http://schemas.microsoft.com/office/drawing/2010/main" val="0"/>
+              </a:ext>
+            </a:extLst>
+          </a:blip>
+          <a:srcRect l="61753" r="19934"/>
+          <a:stretch/>
+        </p:blipFill>
+        <p:spPr>
+          <a:xfrm>
+            <a:off x="6892289" y="2731067"/>
+            <a:ext cx="1383031" cy="2000504"/>
+          </a:xfrm>
+          <a:prstGeom prst="rect">
+            <a:avLst/>
+          </a:prstGeom>
+        </p:spPr>
+      </p:pic>
+      <p:pic>
+        <p:nvPicPr>
+          <p:cNvPr id="34" name="圖片 33">
+            <a:extLst>
+              <a:ext uri="{FF2B5EF4-FFF2-40B4-BE49-F238E27FC236}">
+                <a16:creationId xmlns:a16="http://schemas.microsoft.com/office/drawing/2014/main" id="{84E397AF-6251-4834-B759-06AD57008879}"/>
+              </a:ext>
+            </a:extLst>
+          </p:cNvPr>
+          <p:cNvPicPr>
+            <a:picLocks noChangeAspect="1"/>
+          </p:cNvPicPr>
+          <p:nvPr/>
+        </p:nvPicPr>
+        <p:blipFill rotWithShape="1">
+          <a:blip r:embed="rId3">
+            <a:clrChange>
+              <a:clrFrom>
+                <a:srgbClr val="FFFFFF"/>
+              </a:clrFrom>
+              <a:clrTo>
+                <a:srgbClr val="FFFFFF">
+                  <a:alpha val="0"/>
+                </a:srgbClr>
+              </a:clrTo>
+            </a:clrChange>
+            <a:extLst>
+              <a:ext uri="{28A0092B-C50C-407E-A947-70E740481C1C}">
+                <a14:useLocalDpi xmlns:a14="http://schemas.microsoft.com/office/drawing/2010/main" val="0"/>
+              </a:ext>
+            </a:extLst>
+          </a:blip>
+          <a:srcRect l="80673"/>
+          <a:stretch/>
+        </p:blipFill>
+        <p:spPr>
+          <a:xfrm>
+            <a:off x="8227694" y="306347"/>
+            <a:ext cx="1459605" cy="2000504"/>
+          </a:xfrm>
+          <a:prstGeom prst="rect">
+            <a:avLst/>
+          </a:prstGeom>
+        </p:spPr>
+      </p:pic>
+      <mc:AlternateContent xmlns:mc="http://schemas.openxmlformats.org/markup-compatibility/2006">
+        <mc:Choice xmlns:a14="http://schemas.microsoft.com/office/drawing/2010/main" Requires="a14">
+          <p:sp>
+            <p:nvSpPr>
+              <p:cNvPr id="46" name="文字方塊 45">
+                <a:extLst>
+                  <a:ext uri="{FF2B5EF4-FFF2-40B4-BE49-F238E27FC236}">
+                    <a16:creationId xmlns:a16="http://schemas.microsoft.com/office/drawing/2014/main" id="{D139B888-3F1C-498F-88E9-BE66C800874E}"/>
+                  </a:ext>
+                </a:extLst>
+              </p:cNvPr>
+              <p:cNvSpPr txBox="1"/>
+              <p:nvPr/>
+            </p:nvSpPr>
+            <p:spPr>
+              <a:xfrm>
+                <a:off x="5779622" y="562510"/>
+                <a:ext cx="1006558" cy="369332"/>
+              </a:xfrm>
+              <a:prstGeom prst="rect">
+                <a:avLst/>
+              </a:prstGeom>
+              <a:noFill/>
+            </p:spPr>
+            <p:txBody>
+              <a:bodyPr wrap="square" rtlCol="0">
+                <a:spAutoFit/>
+              </a:bodyPr>
+              <a:lstStyle/>
+              <a:p>
+                <a:pPr algn="ctr"/>
+                <a14:m>
+                  <m:oMathPara xmlns:m="http://schemas.openxmlformats.org/officeDocument/2006/math">
+                    <m:oMathParaPr>
+                      <m:jc m:val="centerGroup"/>
+                    </m:oMathParaPr>
+                    <m:oMath xmlns:m="http://schemas.openxmlformats.org/officeDocument/2006/math">
+                      <m:r>
+                        <a:rPr lang="en-US" altLang="zh-TW" i="1">
+                          <a:latin typeface="Cambria Math" panose="02040503050406030204" pitchFamily="18" charset="0"/>
+                        </a:rPr>
+                        <m:t>ℓ=0</m:t>
+                      </m:r>
+                    </m:oMath>
+                  </m:oMathPara>
+                </a14:m>
+                <a:endParaRPr lang="zh-TW" altLang="en-US" dirty="0">
+                  <a:latin typeface="Times New Roman" panose="02020603050405020304" pitchFamily="18" charset="0"/>
+                  <a:cs typeface="Times New Roman" panose="02020603050405020304" pitchFamily="18" charset="0"/>
+                </a:endParaRPr>
+              </a:p>
+            </p:txBody>
+          </p:sp>
+        </mc:Choice>
+        <mc:Fallback>
+          <p:sp>
+            <p:nvSpPr>
+              <p:cNvPr id="46" name="文字方塊 45">
+                <a:extLst>
+                  <a:ext uri="{FF2B5EF4-FFF2-40B4-BE49-F238E27FC236}">
+                    <a16:creationId xmlns:a16="http://schemas.microsoft.com/office/drawing/2014/main" id="{D139B888-3F1C-498F-88E9-BE66C800874E}"/>
+                  </a:ext>
+                </a:extLst>
+              </p:cNvPr>
+              <p:cNvSpPr txBox="1">
+                <a:spLocks noRot="1" noChangeAspect="1" noMove="1" noResize="1" noEditPoints="1" noAdjustHandles="1" noChangeArrowheads="1" noChangeShapeType="1" noTextEdit="1"/>
+              </p:cNvSpPr>
+              <p:nvPr/>
+            </p:nvSpPr>
+            <p:spPr>
+              <a:xfrm>
+                <a:off x="5779622" y="562510"/>
+                <a:ext cx="1006558" cy="369332"/>
+              </a:xfrm>
+              <a:prstGeom prst="rect">
+                <a:avLst/>
+              </a:prstGeom>
+              <a:blipFill>
+                <a:blip r:embed="rId4"/>
+                <a:stretch>
+                  <a:fillRect/>
+                </a:stretch>
+              </a:blipFill>
+            </p:spPr>
+            <p:txBody>
+              <a:bodyPr/>
+              <a:lstStyle/>
+              <a:p>
+                <a:r>
+                  <a:rPr lang="zh-TW" altLang="en-US">
+                    <a:noFill/>
+                  </a:rPr>
+                  <a:t> </a:t>
+                </a:r>
+              </a:p>
+            </p:txBody>
+          </p:sp>
+        </mc:Fallback>
+      </mc:AlternateContent>
+      <mc:AlternateContent xmlns:mc="http://schemas.openxmlformats.org/markup-compatibility/2006">
+        <mc:Choice xmlns:a14="http://schemas.microsoft.com/office/drawing/2010/main" Requires="a14">
+          <p:sp>
+            <p:nvSpPr>
+              <p:cNvPr id="47" name="文字方塊 46">
+                <a:extLst>
+                  <a:ext uri="{FF2B5EF4-FFF2-40B4-BE49-F238E27FC236}">
+                    <a16:creationId xmlns:a16="http://schemas.microsoft.com/office/drawing/2014/main" id="{4F245FA2-4DBE-46ED-9B8D-44919FF47C9F}"/>
+                  </a:ext>
+                </a:extLst>
+              </p:cNvPr>
+              <p:cNvSpPr txBox="1"/>
+              <p:nvPr/>
+            </p:nvSpPr>
+            <p:spPr>
+              <a:xfrm>
+                <a:off x="8416050" y="562510"/>
+                <a:ext cx="1006558" cy="369332"/>
+              </a:xfrm>
+              <a:prstGeom prst="rect">
+                <a:avLst/>
+              </a:prstGeom>
+              <a:noFill/>
+            </p:spPr>
+            <p:txBody>
+              <a:bodyPr wrap="square" rtlCol="0">
+                <a:spAutoFit/>
+              </a:bodyPr>
+              <a:lstStyle/>
+              <a:p>
+                <a:pPr algn="ctr"/>
+                <a14:m>
+                  <m:oMathPara xmlns:m="http://schemas.openxmlformats.org/officeDocument/2006/math">
+                    <m:oMathParaPr>
+                      <m:jc m:val="centerGroup"/>
+                    </m:oMathParaPr>
+                    <m:oMath xmlns:m="http://schemas.openxmlformats.org/officeDocument/2006/math">
+                      <m:r>
+                        <a:rPr lang="en-US" altLang="zh-TW" i="1">
+                          <a:latin typeface="Cambria Math" panose="02040503050406030204" pitchFamily="18" charset="0"/>
+                        </a:rPr>
+                        <m:t>ℓ=2</m:t>
+                      </m:r>
+                    </m:oMath>
+                  </m:oMathPara>
+                </a14:m>
+                <a:endParaRPr lang="zh-TW" altLang="en-US" dirty="0">
+                  <a:latin typeface="Times New Roman" panose="02020603050405020304" pitchFamily="18" charset="0"/>
+                  <a:cs typeface="Times New Roman" panose="02020603050405020304" pitchFamily="18" charset="0"/>
+                </a:endParaRPr>
+              </a:p>
+            </p:txBody>
+          </p:sp>
+        </mc:Choice>
+        <mc:Fallback>
+          <p:sp>
+            <p:nvSpPr>
+              <p:cNvPr id="47" name="文字方塊 46">
+                <a:extLst>
+                  <a:ext uri="{FF2B5EF4-FFF2-40B4-BE49-F238E27FC236}">
+                    <a16:creationId xmlns:a16="http://schemas.microsoft.com/office/drawing/2014/main" id="{4F245FA2-4DBE-46ED-9B8D-44919FF47C9F}"/>
+                  </a:ext>
+                </a:extLst>
+              </p:cNvPr>
+              <p:cNvSpPr txBox="1">
+                <a:spLocks noRot="1" noChangeAspect="1" noMove="1" noResize="1" noEditPoints="1" noAdjustHandles="1" noChangeArrowheads="1" noChangeShapeType="1" noTextEdit="1"/>
+              </p:cNvSpPr>
+              <p:nvPr/>
+            </p:nvSpPr>
+            <p:spPr>
+              <a:xfrm>
+                <a:off x="8416050" y="562510"/>
+                <a:ext cx="1006558" cy="369332"/>
+              </a:xfrm>
+              <a:prstGeom prst="rect">
+                <a:avLst/>
+              </a:prstGeom>
+              <a:blipFill>
+                <a:blip r:embed="rId5"/>
+                <a:stretch>
+                  <a:fillRect/>
+                </a:stretch>
+              </a:blipFill>
+            </p:spPr>
+            <p:txBody>
+              <a:bodyPr/>
+              <a:lstStyle/>
+              <a:p>
+                <a:r>
+                  <a:rPr lang="zh-TW" altLang="en-US">
+                    <a:noFill/>
+                  </a:rPr>
+                  <a:t> </a:t>
+                </a:r>
+              </a:p>
+            </p:txBody>
+          </p:sp>
+        </mc:Fallback>
+      </mc:AlternateContent>
+      <mc:AlternateContent xmlns:mc="http://schemas.openxmlformats.org/markup-compatibility/2006">
+        <mc:Choice xmlns:a14="http://schemas.microsoft.com/office/drawing/2010/main" Requires="a14">
+          <p:sp>
+            <p:nvSpPr>
+              <p:cNvPr id="48" name="文字方塊 47">
+                <a:extLst>
+                  <a:ext uri="{FF2B5EF4-FFF2-40B4-BE49-F238E27FC236}">
+                    <a16:creationId xmlns:a16="http://schemas.microsoft.com/office/drawing/2014/main" id="{58B10F4E-2C32-473F-9973-42D224D7247B}"/>
+                  </a:ext>
+                </a:extLst>
+              </p:cNvPr>
+              <p:cNvSpPr txBox="1"/>
+              <p:nvPr/>
+            </p:nvSpPr>
+            <p:spPr>
+              <a:xfrm>
+                <a:off x="7097835" y="562510"/>
+                <a:ext cx="1006558" cy="369332"/>
+              </a:xfrm>
+              <a:prstGeom prst="rect">
+                <a:avLst/>
+              </a:prstGeom>
+              <a:noFill/>
+            </p:spPr>
+            <p:txBody>
+              <a:bodyPr wrap="square" rtlCol="0">
+                <a:spAutoFit/>
+              </a:bodyPr>
+              <a:lstStyle/>
+              <a:p>
+                <a:pPr algn="ctr"/>
+                <a14:m>
+                  <m:oMathPara xmlns:m="http://schemas.openxmlformats.org/officeDocument/2006/math">
+                    <m:oMathParaPr>
+                      <m:jc m:val="centerGroup"/>
+                    </m:oMathParaPr>
+                    <m:oMath xmlns:m="http://schemas.openxmlformats.org/officeDocument/2006/math">
+                      <m:r>
+                        <a:rPr lang="en-US" altLang="zh-TW" i="1">
+                          <a:latin typeface="Cambria Math" panose="02040503050406030204" pitchFamily="18" charset="0"/>
+                        </a:rPr>
+                        <m:t>ℓ=1</m:t>
+                      </m:r>
+                    </m:oMath>
+                  </m:oMathPara>
+                </a14:m>
+                <a:endParaRPr lang="zh-TW" altLang="en-US" dirty="0">
+                  <a:latin typeface="Times New Roman" panose="02020603050405020304" pitchFamily="18" charset="0"/>
+                  <a:cs typeface="Times New Roman" panose="02020603050405020304" pitchFamily="18" charset="0"/>
+                </a:endParaRPr>
+              </a:p>
+            </p:txBody>
+          </p:sp>
+        </mc:Choice>
+        <mc:Fallback>
+          <p:sp>
+            <p:nvSpPr>
+              <p:cNvPr id="48" name="文字方塊 47">
+                <a:extLst>
+                  <a:ext uri="{FF2B5EF4-FFF2-40B4-BE49-F238E27FC236}">
+                    <a16:creationId xmlns:a16="http://schemas.microsoft.com/office/drawing/2014/main" id="{58B10F4E-2C32-473F-9973-42D224D7247B}"/>
+                  </a:ext>
+                </a:extLst>
+              </p:cNvPr>
+              <p:cNvSpPr txBox="1">
+                <a:spLocks noRot="1" noChangeAspect="1" noMove="1" noResize="1" noEditPoints="1" noAdjustHandles="1" noChangeArrowheads="1" noChangeShapeType="1" noTextEdit="1"/>
+              </p:cNvSpPr>
+              <p:nvPr/>
+            </p:nvSpPr>
+            <p:spPr>
+              <a:xfrm>
+                <a:off x="7097835" y="562510"/>
+                <a:ext cx="1006558" cy="369332"/>
+              </a:xfrm>
+              <a:prstGeom prst="rect">
+                <a:avLst/>
+              </a:prstGeom>
+              <a:blipFill>
+                <a:blip r:embed="rId6"/>
+                <a:stretch>
+                  <a:fillRect/>
+                </a:stretch>
+              </a:blipFill>
+            </p:spPr>
+            <p:txBody>
+              <a:bodyPr/>
+              <a:lstStyle/>
+              <a:p>
+                <a:r>
+                  <a:rPr lang="zh-TW" altLang="en-US">
+                    <a:noFill/>
+                  </a:rPr>
+                  <a:t> </a:t>
+                </a:r>
+              </a:p>
+            </p:txBody>
+          </p:sp>
+        </mc:Fallback>
+      </mc:AlternateContent>
+      <mc:AlternateContent xmlns:mc="http://schemas.openxmlformats.org/markup-compatibility/2006">
+        <mc:Choice xmlns:a14="http://schemas.microsoft.com/office/drawing/2010/main" Requires="a14">
+          <p:sp>
+            <p:nvSpPr>
+              <p:cNvPr id="50" name="文字方塊 49">
+                <a:extLst>
+                  <a:ext uri="{FF2B5EF4-FFF2-40B4-BE49-F238E27FC236}">
+                    <a16:creationId xmlns:a16="http://schemas.microsoft.com/office/drawing/2014/main" id="{9BF2C953-92CE-4A9A-B6D5-E85DE4B362FA}"/>
+                  </a:ext>
+                </a:extLst>
+              </p:cNvPr>
+              <p:cNvSpPr txBox="1"/>
+              <p:nvPr/>
+            </p:nvSpPr>
+            <p:spPr>
+              <a:xfrm>
+                <a:off x="4461409" y="562510"/>
+                <a:ext cx="1006558" cy="369332"/>
+              </a:xfrm>
+              <a:prstGeom prst="rect">
+                <a:avLst/>
+              </a:prstGeom>
+              <a:noFill/>
+            </p:spPr>
+            <p:txBody>
+              <a:bodyPr wrap="square" rtlCol="0">
+                <a:spAutoFit/>
+              </a:bodyPr>
+              <a:lstStyle/>
+              <a:p>
+                <a:pPr algn="ctr"/>
+                <a14:m>
+                  <m:oMathPara xmlns:m="http://schemas.openxmlformats.org/officeDocument/2006/math">
+                    <m:oMathParaPr>
+                      <m:jc m:val="centerGroup"/>
+                    </m:oMathParaPr>
+                    <m:oMath xmlns:m="http://schemas.openxmlformats.org/officeDocument/2006/math">
+                      <m:r>
+                        <a:rPr lang="en-US" altLang="zh-TW" i="1">
+                          <a:latin typeface="Cambria Math" panose="02040503050406030204" pitchFamily="18" charset="0"/>
+                        </a:rPr>
+                        <m:t>ℓ=−1</m:t>
+                      </m:r>
+                    </m:oMath>
+                  </m:oMathPara>
+                </a14:m>
+                <a:endParaRPr lang="zh-TW" altLang="en-US" dirty="0">
+                  <a:latin typeface="Times New Roman" panose="02020603050405020304" pitchFamily="18" charset="0"/>
+                  <a:cs typeface="Times New Roman" panose="02020603050405020304" pitchFamily="18" charset="0"/>
+                </a:endParaRPr>
+              </a:p>
+            </p:txBody>
+          </p:sp>
+        </mc:Choice>
+        <mc:Fallback>
+          <p:sp>
+            <p:nvSpPr>
+              <p:cNvPr id="50" name="文字方塊 49">
+                <a:extLst>
+                  <a:ext uri="{FF2B5EF4-FFF2-40B4-BE49-F238E27FC236}">
+                    <a16:creationId xmlns:a16="http://schemas.microsoft.com/office/drawing/2014/main" id="{9BF2C953-92CE-4A9A-B6D5-E85DE4B362FA}"/>
+                  </a:ext>
+                </a:extLst>
+              </p:cNvPr>
+              <p:cNvSpPr txBox="1">
+                <a:spLocks noRot="1" noChangeAspect="1" noMove="1" noResize="1" noEditPoints="1" noAdjustHandles="1" noChangeArrowheads="1" noChangeShapeType="1" noTextEdit="1"/>
+              </p:cNvSpPr>
+              <p:nvPr/>
+            </p:nvSpPr>
+            <p:spPr>
+              <a:xfrm>
+                <a:off x="4461409" y="562510"/>
+                <a:ext cx="1006558" cy="369332"/>
+              </a:xfrm>
+              <a:prstGeom prst="rect">
+                <a:avLst/>
+              </a:prstGeom>
+              <a:blipFill>
+                <a:blip r:embed="rId7"/>
+                <a:stretch>
+                  <a:fillRect/>
+                </a:stretch>
+              </a:blipFill>
+            </p:spPr>
+            <p:txBody>
+              <a:bodyPr/>
+              <a:lstStyle/>
+              <a:p>
+                <a:r>
+                  <a:rPr lang="zh-TW" altLang="en-US">
+                    <a:noFill/>
+                  </a:rPr>
+                  <a:t> </a:t>
+                </a:r>
+              </a:p>
+            </p:txBody>
+          </p:sp>
+        </mc:Fallback>
+      </mc:AlternateContent>
+      <mc:AlternateContent xmlns:mc="http://schemas.openxmlformats.org/markup-compatibility/2006">
+        <mc:Choice xmlns:a14="http://schemas.microsoft.com/office/drawing/2010/main" Requires="a14">
+          <p:sp>
+            <p:nvSpPr>
+              <p:cNvPr id="52" name="文字方塊 51">
+                <a:extLst>
+                  <a:ext uri="{FF2B5EF4-FFF2-40B4-BE49-F238E27FC236}">
+                    <a16:creationId xmlns:a16="http://schemas.microsoft.com/office/drawing/2014/main" id="{FA6A6B30-6EBE-419A-8F73-1E8B0B28748C}"/>
+                  </a:ext>
+                </a:extLst>
+              </p:cNvPr>
+              <p:cNvSpPr txBox="1"/>
+              <p:nvPr/>
+            </p:nvSpPr>
+            <p:spPr>
+              <a:xfrm>
+                <a:off x="3143196" y="562510"/>
+                <a:ext cx="1006558" cy="369332"/>
+              </a:xfrm>
+              <a:prstGeom prst="rect">
+                <a:avLst/>
+              </a:prstGeom>
+              <a:noFill/>
+            </p:spPr>
+            <p:txBody>
+              <a:bodyPr wrap="square" rtlCol="0">
+                <a:spAutoFit/>
+              </a:bodyPr>
+              <a:lstStyle/>
+              <a:p>
+                <a:pPr algn="ctr"/>
+                <a14:m>
+                  <m:oMathPara xmlns:m="http://schemas.openxmlformats.org/officeDocument/2006/math">
+                    <m:oMathParaPr>
+                      <m:jc m:val="centerGroup"/>
+                    </m:oMathParaPr>
+                    <m:oMath xmlns:m="http://schemas.openxmlformats.org/officeDocument/2006/math">
+                      <m:r>
+                        <a:rPr lang="en-US" altLang="zh-TW" i="1">
+                          <a:latin typeface="Cambria Math" panose="02040503050406030204" pitchFamily="18" charset="0"/>
+                        </a:rPr>
+                        <m:t>ℓ=−2</m:t>
+                      </m:r>
+                    </m:oMath>
+                  </m:oMathPara>
+                </a14:m>
+                <a:endParaRPr lang="zh-TW" altLang="en-US" dirty="0">
+                  <a:latin typeface="Times New Roman" panose="02020603050405020304" pitchFamily="18" charset="0"/>
+                  <a:cs typeface="Times New Roman" panose="02020603050405020304" pitchFamily="18" charset="0"/>
+                </a:endParaRPr>
+              </a:p>
+            </p:txBody>
+          </p:sp>
+        </mc:Choice>
+        <mc:Fallback>
+          <p:sp>
+            <p:nvSpPr>
+              <p:cNvPr id="52" name="文字方塊 51">
+                <a:extLst>
+                  <a:ext uri="{FF2B5EF4-FFF2-40B4-BE49-F238E27FC236}">
+                    <a16:creationId xmlns:a16="http://schemas.microsoft.com/office/drawing/2014/main" id="{FA6A6B30-6EBE-419A-8F73-1E8B0B28748C}"/>
+                  </a:ext>
+                </a:extLst>
+              </p:cNvPr>
+              <p:cNvSpPr txBox="1">
+                <a:spLocks noRot="1" noChangeAspect="1" noMove="1" noResize="1" noEditPoints="1" noAdjustHandles="1" noChangeArrowheads="1" noChangeShapeType="1" noTextEdit="1"/>
+              </p:cNvSpPr>
+              <p:nvPr/>
+            </p:nvSpPr>
+            <p:spPr>
+              <a:xfrm>
+                <a:off x="3143196" y="562510"/>
+                <a:ext cx="1006558" cy="369332"/>
+              </a:xfrm>
+              <a:prstGeom prst="rect">
+                <a:avLst/>
+              </a:prstGeom>
+              <a:blipFill>
+                <a:blip r:embed="rId8"/>
+                <a:stretch>
+                  <a:fillRect/>
+                </a:stretch>
+              </a:blipFill>
+            </p:spPr>
+            <p:txBody>
+              <a:bodyPr/>
+              <a:lstStyle/>
+              <a:p>
+                <a:r>
+                  <a:rPr lang="zh-TW" altLang="en-US">
+                    <a:noFill/>
+                  </a:rPr>
+                  <a:t> </a:t>
+                </a:r>
+              </a:p>
+            </p:txBody>
+          </p:sp>
+        </mc:Fallback>
+      </mc:AlternateContent>
+      <mc:AlternateContent xmlns:mc="http://schemas.openxmlformats.org/markup-compatibility/2006">
+        <mc:Choice xmlns:a14="http://schemas.microsoft.com/office/drawing/2010/main" Requires="a14">
+          <p:sp>
+            <p:nvSpPr>
+              <p:cNvPr id="59" name="文字方塊 58">
+                <a:extLst>
+                  <a:ext uri="{FF2B5EF4-FFF2-40B4-BE49-F238E27FC236}">
+                    <a16:creationId xmlns:a16="http://schemas.microsoft.com/office/drawing/2014/main" id="{CE297881-E961-4B5E-83EB-928F44B50082}"/>
+                  </a:ext>
+                </a:extLst>
+              </p:cNvPr>
+              <p:cNvSpPr txBox="1"/>
+              <p:nvPr/>
+            </p:nvSpPr>
+            <p:spPr>
+              <a:xfrm>
+                <a:off x="5779147" y="2998298"/>
+                <a:ext cx="1006558" cy="369332"/>
+              </a:xfrm>
+              <a:prstGeom prst="rect">
+                <a:avLst/>
+              </a:prstGeom>
+              <a:noFill/>
+            </p:spPr>
+            <p:txBody>
+              <a:bodyPr wrap="square" rtlCol="0">
+                <a:spAutoFit/>
+              </a:bodyPr>
+              <a:lstStyle/>
+              <a:p>
+                <a:pPr algn="ctr"/>
+                <a14:m>
+                  <m:oMathPara xmlns:m="http://schemas.openxmlformats.org/officeDocument/2006/math">
+                    <m:oMathParaPr>
+                      <m:jc m:val="centerGroup"/>
+                    </m:oMathParaPr>
+                    <m:oMath xmlns:m="http://schemas.openxmlformats.org/officeDocument/2006/math">
+                      <m:r>
+                        <a:rPr lang="en-US" altLang="zh-TW" i="1">
+                          <a:latin typeface="Cambria Math" panose="02040503050406030204" pitchFamily="18" charset="0"/>
+                        </a:rPr>
+                        <m:t>ℓ=0</m:t>
+                      </m:r>
+                    </m:oMath>
+                  </m:oMathPara>
+                </a14:m>
+                <a:endParaRPr lang="zh-TW" altLang="en-US" dirty="0">
+                  <a:latin typeface="Times New Roman" panose="02020603050405020304" pitchFamily="18" charset="0"/>
+                  <a:cs typeface="Times New Roman" panose="02020603050405020304" pitchFamily="18" charset="0"/>
+                </a:endParaRPr>
+              </a:p>
+            </p:txBody>
+          </p:sp>
+        </mc:Choice>
+        <mc:Fallback>
+          <p:sp>
+            <p:nvSpPr>
+              <p:cNvPr id="59" name="文字方塊 58">
+                <a:extLst>
+                  <a:ext uri="{FF2B5EF4-FFF2-40B4-BE49-F238E27FC236}">
+                    <a16:creationId xmlns:a16="http://schemas.microsoft.com/office/drawing/2014/main" id="{CE297881-E961-4B5E-83EB-928F44B50082}"/>
+                  </a:ext>
+                </a:extLst>
+              </p:cNvPr>
+              <p:cNvSpPr txBox="1">
+                <a:spLocks noRot="1" noChangeAspect="1" noMove="1" noResize="1" noEditPoints="1" noAdjustHandles="1" noChangeArrowheads="1" noChangeShapeType="1" noTextEdit="1"/>
+              </p:cNvSpPr>
+              <p:nvPr/>
+            </p:nvSpPr>
+            <p:spPr>
+              <a:xfrm>
+                <a:off x="5779147" y="2998298"/>
+                <a:ext cx="1006558" cy="369332"/>
+              </a:xfrm>
+              <a:prstGeom prst="rect">
+                <a:avLst/>
+              </a:prstGeom>
+              <a:blipFill>
+                <a:blip r:embed="rId9"/>
+                <a:stretch>
+                  <a:fillRect/>
+                </a:stretch>
+              </a:blipFill>
+            </p:spPr>
+            <p:txBody>
+              <a:bodyPr/>
+              <a:lstStyle/>
+              <a:p>
+                <a:r>
+                  <a:rPr lang="zh-TW" altLang="en-US">
+                    <a:noFill/>
+                  </a:rPr>
+                  <a:t> </a:t>
+                </a:r>
+              </a:p>
+            </p:txBody>
+          </p:sp>
+        </mc:Fallback>
+      </mc:AlternateContent>
+      <mc:AlternateContent xmlns:mc="http://schemas.openxmlformats.org/markup-compatibility/2006">
+        <mc:Choice xmlns:a14="http://schemas.microsoft.com/office/drawing/2010/main" Requires="a14">
+          <p:sp>
+            <p:nvSpPr>
+              <p:cNvPr id="60" name="文字方塊 59">
+                <a:extLst>
+                  <a:ext uri="{FF2B5EF4-FFF2-40B4-BE49-F238E27FC236}">
+                    <a16:creationId xmlns:a16="http://schemas.microsoft.com/office/drawing/2014/main" id="{1058910C-C900-415E-9577-4F2E6C6F0642}"/>
+                  </a:ext>
+                </a:extLst>
+              </p:cNvPr>
+              <p:cNvSpPr txBox="1"/>
+              <p:nvPr/>
+            </p:nvSpPr>
+            <p:spPr>
+              <a:xfrm>
+                <a:off x="8416050" y="2998298"/>
+                <a:ext cx="1006558" cy="369332"/>
+              </a:xfrm>
+              <a:prstGeom prst="rect">
+                <a:avLst/>
+              </a:prstGeom>
+              <a:noFill/>
+            </p:spPr>
+            <p:txBody>
+              <a:bodyPr wrap="square" rtlCol="0">
+                <a:spAutoFit/>
+              </a:bodyPr>
+              <a:lstStyle/>
+              <a:p>
+                <a:pPr algn="ctr"/>
+                <a14:m>
+                  <m:oMathPara xmlns:m="http://schemas.openxmlformats.org/officeDocument/2006/math">
+                    <m:oMathParaPr>
+                      <m:jc m:val="centerGroup"/>
+                    </m:oMathParaPr>
+                    <m:oMath xmlns:m="http://schemas.openxmlformats.org/officeDocument/2006/math">
+                      <m:r>
+                        <a:rPr lang="en-US" altLang="zh-TW" i="1">
+                          <a:latin typeface="Cambria Math" panose="02040503050406030204" pitchFamily="18" charset="0"/>
+                        </a:rPr>
+                        <m:t>ℓ=2</m:t>
+                      </m:r>
+                    </m:oMath>
+                  </m:oMathPara>
+                </a14:m>
+                <a:endParaRPr lang="zh-TW" altLang="en-US" dirty="0">
+                  <a:latin typeface="Times New Roman" panose="02020603050405020304" pitchFamily="18" charset="0"/>
+                  <a:cs typeface="Times New Roman" panose="02020603050405020304" pitchFamily="18" charset="0"/>
+                </a:endParaRPr>
+              </a:p>
+            </p:txBody>
+          </p:sp>
+        </mc:Choice>
+        <mc:Fallback>
+          <p:sp>
+            <p:nvSpPr>
+              <p:cNvPr id="60" name="文字方塊 59">
+                <a:extLst>
+                  <a:ext uri="{FF2B5EF4-FFF2-40B4-BE49-F238E27FC236}">
+                    <a16:creationId xmlns:a16="http://schemas.microsoft.com/office/drawing/2014/main" id="{1058910C-C900-415E-9577-4F2E6C6F0642}"/>
+                  </a:ext>
+                </a:extLst>
+              </p:cNvPr>
+              <p:cNvSpPr txBox="1">
+                <a:spLocks noRot="1" noChangeAspect="1" noMove="1" noResize="1" noEditPoints="1" noAdjustHandles="1" noChangeArrowheads="1" noChangeShapeType="1" noTextEdit="1"/>
+              </p:cNvSpPr>
+              <p:nvPr/>
+            </p:nvSpPr>
+            <p:spPr>
+              <a:xfrm>
+                <a:off x="8416050" y="2998298"/>
+                <a:ext cx="1006558" cy="369332"/>
+              </a:xfrm>
+              <a:prstGeom prst="rect">
+                <a:avLst/>
+              </a:prstGeom>
+              <a:blipFill>
+                <a:blip r:embed="rId10"/>
+                <a:stretch>
+                  <a:fillRect/>
+                </a:stretch>
+              </a:blipFill>
+            </p:spPr>
+            <p:txBody>
+              <a:bodyPr/>
+              <a:lstStyle/>
+              <a:p>
+                <a:r>
+                  <a:rPr lang="zh-TW" altLang="en-US">
+                    <a:noFill/>
+                  </a:rPr>
+                  <a:t> </a:t>
+                </a:r>
+              </a:p>
+            </p:txBody>
+          </p:sp>
+        </mc:Fallback>
+      </mc:AlternateContent>
+      <mc:AlternateContent xmlns:mc="http://schemas.openxmlformats.org/markup-compatibility/2006">
+        <mc:Choice xmlns:a14="http://schemas.microsoft.com/office/drawing/2010/main" Requires="a14">
+          <p:sp>
+            <p:nvSpPr>
+              <p:cNvPr id="61" name="文字方塊 60">
+                <a:extLst>
+                  <a:ext uri="{FF2B5EF4-FFF2-40B4-BE49-F238E27FC236}">
+                    <a16:creationId xmlns:a16="http://schemas.microsoft.com/office/drawing/2014/main" id="{F9D57B0F-D9B1-4F26-8293-A741864DAF18}"/>
+                  </a:ext>
+                </a:extLst>
+              </p:cNvPr>
+              <p:cNvSpPr txBox="1"/>
+              <p:nvPr/>
+            </p:nvSpPr>
+            <p:spPr>
+              <a:xfrm>
+                <a:off x="7097599" y="2998298"/>
+                <a:ext cx="1006558" cy="369332"/>
+              </a:xfrm>
+              <a:prstGeom prst="rect">
+                <a:avLst/>
+              </a:prstGeom>
+              <a:noFill/>
+            </p:spPr>
+            <p:txBody>
+              <a:bodyPr wrap="square" rtlCol="0">
+                <a:spAutoFit/>
+              </a:bodyPr>
+              <a:lstStyle/>
+              <a:p>
+                <a:pPr algn="ctr"/>
+                <a14:m>
+                  <m:oMathPara xmlns:m="http://schemas.openxmlformats.org/officeDocument/2006/math">
+                    <m:oMathParaPr>
+                      <m:jc m:val="centerGroup"/>
+                    </m:oMathParaPr>
+                    <m:oMath xmlns:m="http://schemas.openxmlformats.org/officeDocument/2006/math">
+                      <m:r>
+                        <a:rPr lang="en-US" altLang="zh-TW" i="1">
+                          <a:latin typeface="Cambria Math" panose="02040503050406030204" pitchFamily="18" charset="0"/>
+                        </a:rPr>
+                        <m:t>ℓ=1</m:t>
+                      </m:r>
+                    </m:oMath>
+                  </m:oMathPara>
+                </a14:m>
+                <a:endParaRPr lang="zh-TW" altLang="en-US" dirty="0">
+                  <a:latin typeface="Times New Roman" panose="02020603050405020304" pitchFamily="18" charset="0"/>
+                  <a:cs typeface="Times New Roman" panose="02020603050405020304" pitchFamily="18" charset="0"/>
+                </a:endParaRPr>
+              </a:p>
+            </p:txBody>
+          </p:sp>
+        </mc:Choice>
+        <mc:Fallback>
+          <p:sp>
+            <p:nvSpPr>
+              <p:cNvPr id="61" name="文字方塊 60">
+                <a:extLst>
+                  <a:ext uri="{FF2B5EF4-FFF2-40B4-BE49-F238E27FC236}">
+                    <a16:creationId xmlns:a16="http://schemas.microsoft.com/office/drawing/2014/main" id="{F9D57B0F-D9B1-4F26-8293-A741864DAF18}"/>
+                  </a:ext>
+                </a:extLst>
+              </p:cNvPr>
+              <p:cNvSpPr txBox="1">
+                <a:spLocks noRot="1" noChangeAspect="1" noMove="1" noResize="1" noEditPoints="1" noAdjustHandles="1" noChangeArrowheads="1" noChangeShapeType="1" noTextEdit="1"/>
+              </p:cNvSpPr>
+              <p:nvPr/>
+            </p:nvSpPr>
+            <p:spPr>
+              <a:xfrm>
+                <a:off x="7097599" y="2998298"/>
+                <a:ext cx="1006558" cy="369332"/>
+              </a:xfrm>
+              <a:prstGeom prst="rect">
+                <a:avLst/>
+              </a:prstGeom>
+              <a:blipFill>
+                <a:blip r:embed="rId11"/>
+                <a:stretch>
+                  <a:fillRect/>
+                </a:stretch>
+              </a:blipFill>
+            </p:spPr>
+            <p:txBody>
+              <a:bodyPr/>
+              <a:lstStyle/>
+              <a:p>
+                <a:r>
+                  <a:rPr lang="zh-TW" altLang="en-US">
+                    <a:noFill/>
+                  </a:rPr>
+                  <a:t> </a:t>
+                </a:r>
+              </a:p>
+            </p:txBody>
+          </p:sp>
+        </mc:Fallback>
+      </mc:AlternateContent>
+      <mc:AlternateContent xmlns:mc="http://schemas.openxmlformats.org/markup-compatibility/2006">
+        <mc:Choice xmlns:a14="http://schemas.microsoft.com/office/drawing/2010/main" Requires="a14">
+          <p:sp>
+            <p:nvSpPr>
+              <p:cNvPr id="62" name="文字方塊 61">
+                <a:extLst>
+                  <a:ext uri="{FF2B5EF4-FFF2-40B4-BE49-F238E27FC236}">
+                    <a16:creationId xmlns:a16="http://schemas.microsoft.com/office/drawing/2014/main" id="{AAA00F8E-F9E9-49E8-A5F3-CBB433CACFF6}"/>
+                  </a:ext>
+                </a:extLst>
+              </p:cNvPr>
+              <p:cNvSpPr txBox="1"/>
+              <p:nvPr/>
+            </p:nvSpPr>
+            <p:spPr>
+              <a:xfrm>
+                <a:off x="4460695" y="2998298"/>
+                <a:ext cx="1006558" cy="369332"/>
+              </a:xfrm>
+              <a:prstGeom prst="rect">
+                <a:avLst/>
+              </a:prstGeom>
+              <a:noFill/>
+            </p:spPr>
+            <p:txBody>
+              <a:bodyPr wrap="square" rtlCol="0">
+                <a:spAutoFit/>
+              </a:bodyPr>
+              <a:lstStyle/>
+              <a:p>
+                <a:pPr algn="ctr"/>
+                <a14:m>
+                  <m:oMathPara xmlns:m="http://schemas.openxmlformats.org/officeDocument/2006/math">
+                    <m:oMathParaPr>
+                      <m:jc m:val="centerGroup"/>
+                    </m:oMathParaPr>
+                    <m:oMath xmlns:m="http://schemas.openxmlformats.org/officeDocument/2006/math">
+                      <m:r>
+                        <a:rPr lang="en-US" altLang="zh-TW" i="1">
+                          <a:latin typeface="Cambria Math" panose="02040503050406030204" pitchFamily="18" charset="0"/>
+                        </a:rPr>
+                        <m:t>ℓ=−1</m:t>
+                      </m:r>
+                    </m:oMath>
+                  </m:oMathPara>
+                </a14:m>
+                <a:endParaRPr lang="zh-TW" altLang="en-US" dirty="0">
+                  <a:latin typeface="Times New Roman" panose="02020603050405020304" pitchFamily="18" charset="0"/>
+                  <a:cs typeface="Times New Roman" panose="02020603050405020304" pitchFamily="18" charset="0"/>
+                </a:endParaRPr>
+              </a:p>
+            </p:txBody>
+          </p:sp>
+        </mc:Choice>
+        <mc:Fallback>
+          <p:sp>
+            <p:nvSpPr>
+              <p:cNvPr id="62" name="文字方塊 61">
+                <a:extLst>
+                  <a:ext uri="{FF2B5EF4-FFF2-40B4-BE49-F238E27FC236}">
+                    <a16:creationId xmlns:a16="http://schemas.microsoft.com/office/drawing/2014/main" id="{AAA00F8E-F9E9-49E8-A5F3-CBB433CACFF6}"/>
+                  </a:ext>
+                </a:extLst>
+              </p:cNvPr>
+              <p:cNvSpPr txBox="1">
+                <a:spLocks noRot="1" noChangeAspect="1" noMove="1" noResize="1" noEditPoints="1" noAdjustHandles="1" noChangeArrowheads="1" noChangeShapeType="1" noTextEdit="1"/>
+              </p:cNvSpPr>
+              <p:nvPr/>
+            </p:nvSpPr>
+            <p:spPr>
+              <a:xfrm>
+                <a:off x="4460695" y="2998298"/>
+                <a:ext cx="1006558" cy="369332"/>
+              </a:xfrm>
+              <a:prstGeom prst="rect">
+                <a:avLst/>
+              </a:prstGeom>
+              <a:blipFill>
+                <a:blip r:embed="rId12"/>
+                <a:stretch>
+                  <a:fillRect/>
+                </a:stretch>
+              </a:blipFill>
+            </p:spPr>
+            <p:txBody>
+              <a:bodyPr/>
+              <a:lstStyle/>
+              <a:p>
+                <a:r>
+                  <a:rPr lang="zh-TW" altLang="en-US">
+                    <a:noFill/>
+                  </a:rPr>
+                  <a:t> </a:t>
+                </a:r>
+              </a:p>
+            </p:txBody>
+          </p:sp>
+        </mc:Fallback>
+      </mc:AlternateContent>
+      <mc:AlternateContent xmlns:mc="http://schemas.openxmlformats.org/markup-compatibility/2006">
+        <mc:Choice xmlns:a14="http://schemas.microsoft.com/office/drawing/2010/main" Requires="a14">
+          <p:sp>
+            <p:nvSpPr>
+              <p:cNvPr id="63" name="文字方塊 62">
+                <a:extLst>
+                  <a:ext uri="{FF2B5EF4-FFF2-40B4-BE49-F238E27FC236}">
+                    <a16:creationId xmlns:a16="http://schemas.microsoft.com/office/drawing/2014/main" id="{A4D67281-D7F6-40E7-B0DE-82DF71F1DA52}"/>
+                  </a:ext>
+                </a:extLst>
+              </p:cNvPr>
+              <p:cNvSpPr txBox="1"/>
+              <p:nvPr/>
+            </p:nvSpPr>
+            <p:spPr>
+              <a:xfrm>
+                <a:off x="3142243" y="2998298"/>
+                <a:ext cx="1006558" cy="369332"/>
+              </a:xfrm>
+              <a:prstGeom prst="rect">
+                <a:avLst/>
+              </a:prstGeom>
+              <a:noFill/>
+            </p:spPr>
+            <p:txBody>
+              <a:bodyPr wrap="square" rtlCol="0">
+                <a:spAutoFit/>
+              </a:bodyPr>
+              <a:lstStyle/>
+              <a:p>
+                <a:pPr algn="ctr"/>
+                <a14:m>
+                  <m:oMathPara xmlns:m="http://schemas.openxmlformats.org/officeDocument/2006/math">
+                    <m:oMathParaPr>
+                      <m:jc m:val="centerGroup"/>
+                    </m:oMathParaPr>
+                    <m:oMath xmlns:m="http://schemas.openxmlformats.org/officeDocument/2006/math">
+                      <m:r>
+                        <a:rPr lang="en-US" altLang="zh-TW" i="1">
+                          <a:latin typeface="Cambria Math" panose="02040503050406030204" pitchFamily="18" charset="0"/>
+                        </a:rPr>
+                        <m:t>ℓ=−2</m:t>
+                      </m:r>
+                    </m:oMath>
+                  </m:oMathPara>
+                </a14:m>
+                <a:endParaRPr lang="zh-TW" altLang="en-US" dirty="0">
+                  <a:latin typeface="Times New Roman" panose="02020603050405020304" pitchFamily="18" charset="0"/>
+                  <a:cs typeface="Times New Roman" panose="02020603050405020304" pitchFamily="18" charset="0"/>
+                </a:endParaRPr>
+              </a:p>
+            </p:txBody>
+          </p:sp>
+        </mc:Choice>
+        <mc:Fallback>
+          <p:sp>
+            <p:nvSpPr>
+              <p:cNvPr id="63" name="文字方塊 62">
+                <a:extLst>
+                  <a:ext uri="{FF2B5EF4-FFF2-40B4-BE49-F238E27FC236}">
+                    <a16:creationId xmlns:a16="http://schemas.microsoft.com/office/drawing/2014/main" id="{A4D67281-D7F6-40E7-B0DE-82DF71F1DA52}"/>
+                  </a:ext>
+                </a:extLst>
+              </p:cNvPr>
+              <p:cNvSpPr txBox="1">
+                <a:spLocks noRot="1" noChangeAspect="1" noMove="1" noResize="1" noEditPoints="1" noAdjustHandles="1" noChangeArrowheads="1" noChangeShapeType="1" noTextEdit="1"/>
+              </p:cNvSpPr>
+              <p:nvPr/>
+            </p:nvSpPr>
+            <p:spPr>
+              <a:xfrm>
+                <a:off x="3142243" y="2998298"/>
+                <a:ext cx="1006558" cy="369332"/>
+              </a:xfrm>
+              <a:prstGeom prst="rect">
+                <a:avLst/>
+              </a:prstGeom>
+              <a:blipFill>
+                <a:blip r:embed="rId13"/>
+                <a:stretch>
+                  <a:fillRect/>
+                </a:stretch>
+              </a:blipFill>
+            </p:spPr>
+            <p:txBody>
+              <a:bodyPr/>
+              <a:lstStyle/>
+              <a:p>
+                <a:r>
+                  <a:rPr lang="zh-TW" altLang="en-US">
+                    <a:noFill/>
+                  </a:rPr>
+                  <a:t> </a:t>
+                </a:r>
+              </a:p>
+            </p:txBody>
+          </p:sp>
+        </mc:Fallback>
+      </mc:AlternateContent>
+      <mc:AlternateContent xmlns:mc="http://schemas.openxmlformats.org/markup-compatibility/2006">
+        <mc:Choice xmlns:a14="http://schemas.microsoft.com/office/drawing/2010/main" Requires="a14">
+          <p:sp>
+            <p:nvSpPr>
+              <p:cNvPr id="53" name="文字方塊 52">
+                <a:extLst>
+                  <a:ext uri="{FF2B5EF4-FFF2-40B4-BE49-F238E27FC236}">
+                    <a16:creationId xmlns:a16="http://schemas.microsoft.com/office/drawing/2014/main" id="{7FE76E93-B02D-4EC3-9A0D-9DB35AB83345}"/>
+                  </a:ext>
+                </a:extLst>
+              </p:cNvPr>
+              <p:cNvSpPr txBox="1"/>
+              <p:nvPr/>
+            </p:nvSpPr>
+            <p:spPr>
+              <a:xfrm>
+                <a:off x="3292665" y="2110237"/>
+                <a:ext cx="675585" cy="369332"/>
+              </a:xfrm>
+              <a:prstGeom prst="rect">
+                <a:avLst/>
+              </a:prstGeom>
+              <a:noFill/>
+            </p:spPr>
+            <p:txBody>
+              <a:bodyPr wrap="square" rtlCol="0">
+                <a:spAutoFit/>
+              </a:bodyPr>
+              <a:lstStyle/>
+              <a:p>
+                <a:pPr algn="ctr"/>
+                <a14:m>
+                  <m:oMathPara xmlns:m="http://schemas.openxmlformats.org/officeDocument/2006/math">
+                    <m:oMathParaPr>
+                      <m:jc m:val="centerGroup"/>
+                    </m:oMathParaPr>
+                    <m:oMath xmlns:m="http://schemas.openxmlformats.org/officeDocument/2006/math">
+                      <m:r>
+                        <a:rPr lang="en-US" altLang="zh-TW" i="1">
+                          <a:latin typeface="Cambria Math" panose="02040503050406030204" pitchFamily="18" charset="0"/>
+                        </a:rPr>
+                        <m:t>𝜌</m:t>
+                      </m:r>
+                      <m:d>
+                        <m:dPr>
+                          <m:ctrlPr>
+                            <a:rPr lang="en-US" altLang="zh-TW" i="1">
+                              <a:latin typeface="Cambria Math" panose="02040503050406030204" pitchFamily="18" charset="0"/>
+                            </a:rPr>
+                          </m:ctrlPr>
+                        </m:dPr>
+                        <m:e>
+                          <m:r>
+                            <a:rPr lang="en-US" altLang="zh-TW" i="1">
+                              <a:latin typeface="Cambria Math" panose="02040503050406030204" pitchFamily="18" charset="0"/>
+                            </a:rPr>
+                            <m:t>𝜇</m:t>
+                          </m:r>
+                          <m:r>
+                            <m:rPr>
+                              <m:sty m:val="p"/>
+                            </m:rPr>
+                            <a:rPr lang="en-US" altLang="zh-TW">
+                              <a:latin typeface="Cambria Math" panose="02040503050406030204" pitchFamily="18" charset="0"/>
+                            </a:rPr>
+                            <m:t>m</m:t>
+                          </m:r>
+                        </m:e>
+                      </m:d>
+                    </m:oMath>
+                  </m:oMathPara>
+                </a14:m>
+                <a:endParaRPr lang="zh-TW" altLang="en-US" dirty="0">
+                  <a:latin typeface="Times New Roman" panose="02020603050405020304" pitchFamily="18" charset="0"/>
+                  <a:cs typeface="Times New Roman" panose="02020603050405020304" pitchFamily="18" charset="0"/>
+                </a:endParaRPr>
+              </a:p>
+            </p:txBody>
+          </p:sp>
+        </mc:Choice>
+        <mc:Fallback>
+          <p:sp>
+            <p:nvSpPr>
+              <p:cNvPr id="53" name="文字方塊 52">
+                <a:extLst>
+                  <a:ext uri="{FF2B5EF4-FFF2-40B4-BE49-F238E27FC236}">
+                    <a16:creationId xmlns:a16="http://schemas.microsoft.com/office/drawing/2014/main" id="{7FE76E93-B02D-4EC3-9A0D-9DB35AB83345}"/>
+                  </a:ext>
+                </a:extLst>
+              </p:cNvPr>
+              <p:cNvSpPr txBox="1">
+                <a:spLocks noRot="1" noChangeAspect="1" noMove="1" noResize="1" noEditPoints="1" noAdjustHandles="1" noChangeArrowheads="1" noChangeShapeType="1" noTextEdit="1"/>
+              </p:cNvSpPr>
+              <p:nvPr/>
+            </p:nvSpPr>
+            <p:spPr>
+              <a:xfrm>
+                <a:off x="3292665" y="2110237"/>
+                <a:ext cx="675585" cy="369332"/>
+              </a:xfrm>
+              <a:prstGeom prst="rect">
+                <a:avLst/>
+              </a:prstGeom>
+              <a:blipFill>
+                <a:blip r:embed="rId14"/>
+                <a:stretch>
+                  <a:fillRect l="-13514" b="-8197"/>
+                </a:stretch>
+              </a:blipFill>
+            </p:spPr>
+            <p:txBody>
+              <a:bodyPr/>
+              <a:lstStyle/>
+              <a:p>
+                <a:r>
+                  <a:rPr lang="zh-TW" altLang="en-US">
+                    <a:noFill/>
+                  </a:rPr>
+                  <a:t> </a:t>
+                </a:r>
+              </a:p>
+            </p:txBody>
+          </p:sp>
+        </mc:Fallback>
+      </mc:AlternateContent>
+      <p:sp>
+        <p:nvSpPr>
+          <p:cNvPr id="54" name="文字方塊 53">
+            <a:extLst>
+              <a:ext uri="{FF2B5EF4-FFF2-40B4-BE49-F238E27FC236}">
+                <a16:creationId xmlns:a16="http://schemas.microsoft.com/office/drawing/2014/main" id="{5862E318-61FC-4C34-8EAE-6C2CADB3295A}"/>
+              </a:ext>
+            </a:extLst>
+          </p:cNvPr>
+          <p:cNvSpPr txBox="1"/>
+          <p:nvPr/>
+        </p:nvSpPr>
+        <p:spPr>
+          <a:xfrm>
+            <a:off x="598292" y="1635231"/>
+            <a:ext cx="1643518" cy="369332"/>
+          </a:xfrm>
+          <a:prstGeom prst="rect">
+            <a:avLst/>
+          </a:prstGeom>
+          <a:noFill/>
+        </p:spPr>
+        <p:txBody>
+          <a:bodyPr wrap="square" rtlCol="0">
+            <a:spAutoFit/>
+          </a:bodyPr>
+          <a:lstStyle/>
+          <a:p>
+            <a:pPr algn="ctr"/>
+            <a:r>
+              <a:rPr lang="en-US" altLang="zh-TW" dirty="0">
+                <a:latin typeface="Times New Roman" panose="02020603050405020304" pitchFamily="18" charset="0"/>
+                <a:cs typeface="Times New Roman" panose="02020603050405020304" pitchFamily="18" charset="0"/>
+              </a:rPr>
+              <a:t>(arbitrary units)</a:t>
+            </a:r>
+            <a:endParaRPr lang="zh-TW" altLang="en-US" dirty="0">
+              <a:latin typeface="Times New Roman" panose="02020603050405020304" pitchFamily="18" charset="0"/>
+              <a:cs typeface="Times New Roman" panose="02020603050405020304" pitchFamily="18" charset="0"/>
+            </a:endParaRPr>
+          </a:p>
+        </p:txBody>
+      </p:sp>
+      <mc:AlternateContent xmlns:mc="http://schemas.openxmlformats.org/markup-compatibility/2006">
+        <mc:Choice xmlns:a14="http://schemas.microsoft.com/office/drawing/2010/main" Requires="a14">
+          <p:sp>
+            <p:nvSpPr>
+              <p:cNvPr id="55" name="矩形 54">
+                <a:extLst>
+                  <a:ext uri="{FF2B5EF4-FFF2-40B4-BE49-F238E27FC236}">
+                    <a16:creationId xmlns:a16="http://schemas.microsoft.com/office/drawing/2014/main" id="{152BF3A2-AEA0-485D-9EFB-ED42184338EC}"/>
+                  </a:ext>
+                </a:extLst>
+              </p:cNvPr>
+              <p:cNvSpPr/>
+              <p:nvPr/>
+            </p:nvSpPr>
+            <p:spPr>
+              <a:xfrm>
+                <a:off x="2625510" y="86347"/>
+                <a:ext cx="3721573" cy="369332"/>
+              </a:xfrm>
+              <a:prstGeom prst="rect">
+                <a:avLst/>
+              </a:prstGeom>
+            </p:spPr>
+            <p:txBody>
+              <a:bodyPr wrap="square">
+                <a:spAutoFit/>
+              </a:bodyPr>
+              <a:lstStyle/>
+              <a:p>
+                <a:r>
+                  <a:rPr lang="en-US" altLang="zh-TW" dirty="0"/>
+                  <a:t>Normally focused : </a:t>
+                </a:r>
+                <a14:m>
+                  <m:oMath xmlns:m="http://schemas.openxmlformats.org/officeDocument/2006/math">
+                    <m:sSub>
+                      <m:sSubPr>
+                        <m:ctrlPr>
+                          <a:rPr lang="en-US" altLang="zh-TW" i="1">
+                            <a:latin typeface="Cambria Math" panose="02040503050406030204" pitchFamily="18" charset="0"/>
+                          </a:rPr>
+                        </m:ctrlPr>
+                      </m:sSubPr>
+                      <m:e>
+                        <m:r>
+                          <a:rPr lang="en-US" altLang="zh-TW" i="1">
+                            <a:latin typeface="Cambria Math" panose="02040503050406030204" pitchFamily="18" charset="0"/>
+                          </a:rPr>
+                          <m:t>𝑊</m:t>
+                        </m:r>
+                      </m:e>
+                      <m:sub>
+                        <m:r>
+                          <a:rPr lang="en-US" altLang="zh-TW" i="1">
+                            <a:latin typeface="Cambria Math" panose="02040503050406030204" pitchFamily="18" charset="0"/>
+                          </a:rPr>
+                          <m:t>0</m:t>
+                        </m:r>
+                      </m:sub>
+                    </m:sSub>
+                    <m:r>
+                      <a:rPr lang="en-US" altLang="zh-TW" i="1">
+                        <a:latin typeface="Cambria Math" panose="02040503050406030204" pitchFamily="18" charset="0"/>
+                      </a:rPr>
+                      <m:t>=1.5 </m:t>
+                    </m:r>
+                    <m:r>
+                      <a:rPr lang="en-US" altLang="zh-TW" i="1">
+                        <a:latin typeface="Cambria Math" panose="02040503050406030204" pitchFamily="18" charset="0"/>
+                      </a:rPr>
+                      <m:t>𝜇</m:t>
+                    </m:r>
+                    <m:r>
+                      <m:rPr>
+                        <m:sty m:val="p"/>
+                      </m:rPr>
+                      <a:rPr lang="en-US" altLang="zh-TW">
+                        <a:latin typeface="Cambria Math" panose="02040503050406030204" pitchFamily="18" charset="0"/>
+                      </a:rPr>
+                      <m:t>m</m:t>
+                    </m:r>
+                  </m:oMath>
+                </a14:m>
+                <a:endParaRPr lang="zh-TW" altLang="en-US" dirty="0">
+                  <a:latin typeface="Times New Roman" panose="02020603050405020304" pitchFamily="18" charset="0"/>
+                  <a:cs typeface="Times New Roman" panose="02020603050405020304" pitchFamily="18" charset="0"/>
+                </a:endParaRPr>
+              </a:p>
+            </p:txBody>
+          </p:sp>
+        </mc:Choice>
+        <mc:Fallback>
+          <p:sp>
+            <p:nvSpPr>
+              <p:cNvPr id="55" name="矩形 54">
+                <a:extLst>
+                  <a:ext uri="{FF2B5EF4-FFF2-40B4-BE49-F238E27FC236}">
+                    <a16:creationId xmlns:a16="http://schemas.microsoft.com/office/drawing/2014/main" id="{152BF3A2-AEA0-485D-9EFB-ED42184338EC}"/>
+                  </a:ext>
+                </a:extLst>
+              </p:cNvPr>
+              <p:cNvSpPr>
+                <a:spLocks noRot="1" noChangeAspect="1" noMove="1" noResize="1" noEditPoints="1" noAdjustHandles="1" noChangeArrowheads="1" noChangeShapeType="1" noTextEdit="1"/>
+              </p:cNvSpPr>
+              <p:nvPr/>
+            </p:nvSpPr>
+            <p:spPr>
+              <a:xfrm>
+                <a:off x="2625510" y="86347"/>
+                <a:ext cx="3721573" cy="369332"/>
+              </a:xfrm>
+              <a:prstGeom prst="rect">
+                <a:avLst/>
+              </a:prstGeom>
+              <a:blipFill>
+                <a:blip r:embed="rId15"/>
+                <a:stretch>
+                  <a:fillRect l="-1475" t="-8197" b="-24590"/>
+                </a:stretch>
+              </a:blipFill>
+            </p:spPr>
+            <p:txBody>
+              <a:bodyPr/>
+              <a:lstStyle/>
+              <a:p>
+                <a:r>
+                  <a:rPr lang="zh-TW" altLang="en-US">
+                    <a:noFill/>
+                  </a:rPr>
+                  <a:t> </a:t>
+                </a:r>
+              </a:p>
+            </p:txBody>
+          </p:sp>
+        </mc:Fallback>
+      </mc:AlternateContent>
+      <mc:AlternateContent xmlns:mc="http://schemas.openxmlformats.org/markup-compatibility/2006">
+        <mc:Choice xmlns:a14="http://schemas.microsoft.com/office/drawing/2010/main" Requires="a14">
+          <p:sp>
+            <p:nvSpPr>
+              <p:cNvPr id="57" name="矩形 56">
+                <a:extLst>
+                  <a:ext uri="{FF2B5EF4-FFF2-40B4-BE49-F238E27FC236}">
+                    <a16:creationId xmlns:a16="http://schemas.microsoft.com/office/drawing/2014/main" id="{04EE70F6-14B4-4E90-989B-144ABE438097}"/>
+                  </a:ext>
+                </a:extLst>
+              </p:cNvPr>
+              <p:cNvSpPr/>
+              <p:nvPr/>
+            </p:nvSpPr>
+            <p:spPr>
+              <a:xfrm>
+                <a:off x="2617972" y="2510980"/>
+                <a:ext cx="3475113" cy="369332"/>
+              </a:xfrm>
+              <a:prstGeom prst="rect">
+                <a:avLst/>
+              </a:prstGeom>
+            </p:spPr>
+            <p:txBody>
+              <a:bodyPr wrap="square">
+                <a:spAutoFit/>
+              </a:bodyPr>
+              <a:lstStyle/>
+              <a:p>
+                <a:r>
+                  <a:rPr lang="en-US" altLang="zh-TW" dirty="0"/>
+                  <a:t>highly focused : </a:t>
+                </a:r>
+                <a14:m>
+                  <m:oMath xmlns:m="http://schemas.openxmlformats.org/officeDocument/2006/math">
+                    <m:sSub>
+                      <m:sSubPr>
+                        <m:ctrlPr>
+                          <a:rPr lang="en-US" altLang="zh-TW" i="1">
+                            <a:latin typeface="Cambria Math" panose="02040503050406030204" pitchFamily="18" charset="0"/>
+                          </a:rPr>
+                        </m:ctrlPr>
+                      </m:sSubPr>
+                      <m:e>
+                        <m:r>
+                          <a:rPr lang="en-US" altLang="zh-TW" i="1">
+                            <a:latin typeface="Cambria Math" panose="02040503050406030204" pitchFamily="18" charset="0"/>
+                          </a:rPr>
+                          <m:t>𝑊</m:t>
+                        </m:r>
+                      </m:e>
+                      <m:sub>
+                        <m:r>
+                          <a:rPr lang="en-US" altLang="zh-TW" i="1">
+                            <a:latin typeface="Cambria Math" panose="02040503050406030204" pitchFamily="18" charset="0"/>
+                          </a:rPr>
+                          <m:t>0</m:t>
+                        </m:r>
+                      </m:sub>
+                    </m:sSub>
+                    <m:r>
+                      <a:rPr lang="en-US" altLang="zh-TW" i="1">
+                        <a:latin typeface="Cambria Math" panose="02040503050406030204" pitchFamily="18" charset="0"/>
+                      </a:rPr>
+                      <m:t>=</m:t>
+                    </m:r>
+                    <m:r>
+                      <a:rPr lang="en-US" altLang="zh-TW">
+                        <a:latin typeface="Cambria Math" panose="02040503050406030204" pitchFamily="18" charset="0"/>
+                      </a:rPr>
+                      <m:t>0.5</m:t>
+                    </m:r>
+                    <m:r>
+                      <a:rPr lang="en-US" altLang="zh-TW" i="1">
+                        <a:latin typeface="Cambria Math" panose="02040503050406030204" pitchFamily="18" charset="0"/>
+                      </a:rPr>
+                      <m:t> </m:t>
+                    </m:r>
+                    <m:r>
+                      <a:rPr lang="en-US" altLang="zh-TW" i="1">
+                        <a:latin typeface="Cambria Math" panose="02040503050406030204" pitchFamily="18" charset="0"/>
+                      </a:rPr>
+                      <m:t>𝜇</m:t>
+                    </m:r>
+                    <m:r>
+                      <m:rPr>
+                        <m:sty m:val="p"/>
+                      </m:rPr>
+                      <a:rPr lang="en-US" altLang="zh-TW">
+                        <a:latin typeface="Cambria Math" panose="02040503050406030204" pitchFamily="18" charset="0"/>
+                      </a:rPr>
+                      <m:t>m</m:t>
+                    </m:r>
+                  </m:oMath>
+                </a14:m>
+                <a:endParaRPr lang="zh-TW" altLang="en-US" dirty="0">
+                  <a:latin typeface="Times New Roman" panose="02020603050405020304" pitchFamily="18" charset="0"/>
+                  <a:cs typeface="Times New Roman" panose="02020603050405020304" pitchFamily="18" charset="0"/>
+                </a:endParaRPr>
+              </a:p>
+            </p:txBody>
+          </p:sp>
+        </mc:Choice>
+        <mc:Fallback>
+          <p:sp>
+            <p:nvSpPr>
+              <p:cNvPr id="57" name="矩形 56">
+                <a:extLst>
+                  <a:ext uri="{FF2B5EF4-FFF2-40B4-BE49-F238E27FC236}">
+                    <a16:creationId xmlns:a16="http://schemas.microsoft.com/office/drawing/2014/main" id="{04EE70F6-14B4-4E90-989B-144ABE438097}"/>
+                  </a:ext>
+                </a:extLst>
+              </p:cNvPr>
+              <p:cNvSpPr>
+                <a:spLocks noRot="1" noChangeAspect="1" noMove="1" noResize="1" noEditPoints="1" noAdjustHandles="1" noChangeArrowheads="1" noChangeShapeType="1" noTextEdit="1"/>
+              </p:cNvSpPr>
+              <p:nvPr/>
+            </p:nvSpPr>
+            <p:spPr>
+              <a:xfrm>
+                <a:off x="2617972" y="2510980"/>
+                <a:ext cx="3475113" cy="369332"/>
+              </a:xfrm>
+              <a:prstGeom prst="rect">
+                <a:avLst/>
+              </a:prstGeom>
+              <a:blipFill>
+                <a:blip r:embed="rId16"/>
+                <a:stretch>
+                  <a:fillRect l="-1401" t="-10000" b="-26667"/>
+                </a:stretch>
+              </a:blipFill>
+            </p:spPr>
+            <p:txBody>
+              <a:bodyPr/>
+              <a:lstStyle/>
+              <a:p>
+                <a:r>
+                  <a:rPr lang="zh-TW" altLang="en-US">
+                    <a:noFill/>
+                  </a:rPr>
+                  <a:t> </a:t>
+                </a:r>
+              </a:p>
+            </p:txBody>
+          </p:sp>
+        </mc:Fallback>
+      </mc:AlternateContent>
+      <p:grpSp>
+        <p:nvGrpSpPr>
+          <p:cNvPr id="2" name="群組 1">
+            <a:extLst>
+              <a:ext uri="{FF2B5EF4-FFF2-40B4-BE49-F238E27FC236}">
+                <a16:creationId xmlns:a16="http://schemas.microsoft.com/office/drawing/2014/main" id="{FFE07388-8444-4F28-9AB7-B0F8604B6660}"/>
+              </a:ext>
+            </a:extLst>
+          </p:cNvPr>
+          <p:cNvGrpSpPr/>
+          <p:nvPr/>
+        </p:nvGrpSpPr>
+        <p:grpSpPr>
+          <a:xfrm>
+            <a:off x="251085" y="515426"/>
+            <a:ext cx="2445204" cy="1127530"/>
+            <a:chOff x="6759573" y="-18665"/>
+            <a:chExt cx="2445204" cy="1127530"/>
+          </a:xfrm>
+        </p:grpSpPr>
+        <p:grpSp>
+          <p:nvGrpSpPr>
+            <p:cNvPr id="41" name="群組 40">
+              <a:extLst>
+                <a:ext uri="{FF2B5EF4-FFF2-40B4-BE49-F238E27FC236}">
+                  <a16:creationId xmlns:a16="http://schemas.microsoft.com/office/drawing/2014/main" id="{09E59E93-E82C-4AAA-8C80-0F97C39D1F64}"/>
+                </a:ext>
+              </a:extLst>
+            </p:cNvPr>
+            <p:cNvGrpSpPr/>
+            <p:nvPr/>
+          </p:nvGrpSpPr>
+          <p:grpSpPr>
+            <a:xfrm>
+              <a:off x="6759573" y="-18665"/>
+              <a:ext cx="2445204" cy="1127530"/>
+              <a:chOff x="6067325" y="-300721"/>
+              <a:chExt cx="2400583" cy="1153504"/>
+            </a:xfrm>
+          </p:grpSpPr>
+          <mc:AlternateContent xmlns:mc="http://schemas.openxmlformats.org/markup-compatibility/2006" xmlns:a14="http://schemas.microsoft.com/office/drawing/2010/main">
+            <mc:Choice Requires="a14">
+              <p:sp>
+                <p:nvSpPr>
+                  <p:cNvPr id="44" name="文字方塊 43">
+                    <a:extLst>
+                      <a:ext uri="{FF2B5EF4-FFF2-40B4-BE49-F238E27FC236}">
+                        <a16:creationId xmlns:a16="http://schemas.microsoft.com/office/drawing/2014/main" id="{0EECDBE0-B06E-400E-ACE6-C5E5DE9C003D}"/>
+                      </a:ext>
+                    </a:extLst>
+                  </p:cNvPr>
+                  <p:cNvSpPr txBox="1"/>
+                  <p:nvPr/>
+                </p:nvSpPr>
+                <p:spPr>
+                  <a:xfrm>
+                    <a:off x="6645248" y="-300721"/>
+                    <a:ext cx="1822660" cy="1119155"/>
+                  </a:xfrm>
+                  <a:prstGeom prst="rect">
+                    <a:avLst/>
+                  </a:prstGeom>
+                  <a:noFill/>
+                </p:spPr>
+                <p:txBody>
+                  <a:bodyPr wrap="square" rtlCol="0">
+                    <a:spAutoFit/>
+                  </a:bodyPr>
+                  <a:lstStyle/>
+                  <a:p>
+                    <a:pPr/>
+                    <a14:m>
+                      <m:oMathPara xmlns:m="http://schemas.openxmlformats.org/officeDocument/2006/math">
+                        <m:oMathParaPr>
+                          <m:jc m:val="left"/>
+                        </m:oMathParaPr>
+                        <m:oMath xmlns:m="http://schemas.openxmlformats.org/officeDocument/2006/math">
+                          <m:d>
+                            <m:dPr>
+                              <m:begChr m:val="|"/>
+                              <m:endChr m:val="|"/>
+                              <m:ctrlPr>
+                                <a:rPr lang="en-US" altLang="zh-TW" i="1" smtClean="0">
+                                  <a:latin typeface="Cambria Math" panose="02040503050406030204" pitchFamily="18" charset="0"/>
+                                </a:rPr>
+                              </m:ctrlPr>
+                            </m:dPr>
+                            <m:e>
+                              <m:sSubSup>
+                                <m:sSubSupPr>
+                                  <m:ctrlPr>
+                                    <a:rPr lang="en-US" altLang="zh-TW" b="1" i="1">
+                                      <a:latin typeface="Cambria Math" panose="02040503050406030204" pitchFamily="18" charset="0"/>
+                                    </a:rPr>
+                                  </m:ctrlPr>
+                                </m:sSubSupPr>
+                                <m:e>
+                                  <m:acc>
+                                    <m:accPr>
+                                      <m:chr m:val="̃"/>
+                                      <m:ctrlPr>
+                                        <a:rPr lang="en-US" altLang="zh-TW" i="1" smtClean="0">
+                                          <a:latin typeface="Cambria Math" panose="02040503050406030204" pitchFamily="18" charset="0"/>
+                                        </a:rPr>
+                                      </m:ctrlPr>
+                                    </m:accPr>
+                                    <m:e>
+                                      <m:r>
+                                        <a:rPr lang="en-US" altLang="zh-TW" b="0" i="1" smtClean="0">
+                                          <a:latin typeface="Cambria Math" panose="02040503050406030204" pitchFamily="18" charset="0"/>
+                                        </a:rPr>
+                                        <m:t>𝐴</m:t>
+                                      </m:r>
+                                    </m:e>
+                                  </m:acc>
+                                </m:e>
+                                <m:sub>
+                                  <m:r>
+                                    <a:rPr lang="en-US" altLang="zh-TW" i="1">
+                                      <a:latin typeface="Cambria Math" panose="02040503050406030204" pitchFamily="18" charset="0"/>
+                                    </a:rPr>
+                                    <m:t>ℓ, </m:t>
+                                  </m:r>
+                                  <m:r>
+                                    <a:rPr lang="en-US" altLang="zh-TW" i="1">
+                                      <a:latin typeface="Cambria Math" panose="02040503050406030204" pitchFamily="18" charset="0"/>
+                                    </a:rPr>
+                                    <m:t>𝑝</m:t>
+                                  </m:r>
+                                  <m:r>
+                                    <a:rPr lang="en-US" altLang="zh-TW" i="1">
+                                      <a:latin typeface="Cambria Math" panose="02040503050406030204" pitchFamily="18" charset="0"/>
+                                    </a:rPr>
+                                    <m:t>=0</m:t>
+                                  </m:r>
+                                </m:sub>
+                                <m:sup>
+                                  <m:r>
+                                    <a:rPr lang="en-US" altLang="zh-TW" i="1">
+                                      <a:latin typeface="Cambria Math" panose="02040503050406030204" pitchFamily="18" charset="0"/>
+                                    </a:rPr>
+                                    <m:t>∥</m:t>
+                                  </m:r>
+                                </m:sup>
+                              </m:sSubSup>
+                              <m:d>
+                                <m:dPr>
+                                  <m:ctrlPr>
+                                    <a:rPr lang="en-US" altLang="zh-TW" b="1" i="1">
+                                      <a:latin typeface="Cambria Math" panose="02040503050406030204" pitchFamily="18" charset="0"/>
+                                    </a:rPr>
+                                  </m:ctrlPr>
+                                </m:dPr>
+                                <m:e>
+                                  <m:r>
+                                    <a:rPr lang="en-US" altLang="zh-TW" i="1">
+                                      <a:latin typeface="Cambria Math" panose="02040503050406030204" pitchFamily="18" charset="0"/>
+                                    </a:rPr>
+                                    <m:t>𝑟</m:t>
+                                  </m:r>
+                                </m:e>
+                              </m:d>
+                            </m:e>
+                          </m:d>
+                        </m:oMath>
+                      </m:oMathPara>
+                    </a14:m>
+                    <a:endParaRPr lang="en-US" altLang="zh-TW" i="1" dirty="0">
+                      <a:latin typeface="Times New Roman" panose="02020603050405020304" pitchFamily="18" charset="0"/>
+                      <a:cs typeface="Times New Roman" panose="02020603050405020304" pitchFamily="18" charset="0"/>
+                    </a:endParaRPr>
+                  </a:p>
+                  <a:p>
+                    <a:pPr/>
+                    <a14:m>
+                      <m:oMathPara xmlns:m="http://schemas.openxmlformats.org/officeDocument/2006/math">
+                        <m:oMathParaPr>
+                          <m:jc m:val="left"/>
+                        </m:oMathParaPr>
+                        <m:oMath xmlns:m="http://schemas.openxmlformats.org/officeDocument/2006/math">
+                          <m:d>
+                            <m:dPr>
+                              <m:begChr m:val="|"/>
+                              <m:endChr m:val="|"/>
+                              <m:ctrlPr>
+                                <a:rPr lang="en-US" altLang="zh-TW" i="1">
+                                  <a:latin typeface="Cambria Math" panose="02040503050406030204" pitchFamily="18" charset="0"/>
+                                </a:rPr>
+                              </m:ctrlPr>
+                            </m:dPr>
+                            <m:e>
+                              <m:sSubSup>
+                                <m:sSubSupPr>
+                                  <m:ctrlPr>
+                                    <a:rPr lang="en-US" altLang="zh-TW" b="1" i="1">
+                                      <a:latin typeface="Cambria Math" panose="02040503050406030204" pitchFamily="18" charset="0"/>
+                                    </a:rPr>
+                                  </m:ctrlPr>
+                                </m:sSubSupPr>
+                                <m:e>
+                                  <m:acc>
+                                    <m:accPr>
+                                      <m:chr m:val="̃"/>
+                                      <m:ctrlPr>
+                                        <a:rPr lang="en-US" altLang="zh-TW" i="1">
+                                          <a:latin typeface="Cambria Math" panose="02040503050406030204" pitchFamily="18" charset="0"/>
+                                        </a:rPr>
+                                      </m:ctrlPr>
+                                    </m:accPr>
+                                    <m:e>
+                                      <m:r>
+                                        <a:rPr lang="en-US" altLang="zh-TW" i="1">
+                                          <a:latin typeface="Cambria Math" panose="02040503050406030204" pitchFamily="18" charset="0"/>
+                                        </a:rPr>
+                                        <m:t>𝐴</m:t>
+                                      </m:r>
+                                    </m:e>
+                                  </m:acc>
+                                </m:e>
+                                <m:sub>
+                                  <m:r>
+                                    <a:rPr lang="en-US" altLang="zh-TW" i="1">
+                                      <a:latin typeface="Cambria Math" panose="02040503050406030204" pitchFamily="18" charset="0"/>
+                                    </a:rPr>
+                                    <m:t>𝜎</m:t>
+                                  </m:r>
+                                  <m:r>
+                                    <a:rPr lang="en-US" altLang="zh-TW" i="1">
+                                      <a:latin typeface="Cambria Math" panose="02040503050406030204" pitchFamily="18" charset="0"/>
+                                    </a:rPr>
+                                    <m:t>=1,ℓ, </m:t>
+                                  </m:r>
+                                  <m:r>
+                                    <a:rPr lang="en-US" altLang="zh-TW" i="1">
+                                      <a:latin typeface="Cambria Math" panose="02040503050406030204" pitchFamily="18" charset="0"/>
+                                    </a:rPr>
+                                    <m:t>𝑝</m:t>
+                                  </m:r>
+                                  <m:r>
+                                    <a:rPr lang="en-US" altLang="zh-TW" i="1">
+                                      <a:latin typeface="Cambria Math" panose="02040503050406030204" pitchFamily="18" charset="0"/>
+                                    </a:rPr>
+                                    <m:t>=0</m:t>
+                                  </m:r>
+                                </m:sub>
+                                <m:sup>
+                                  <m:r>
+                                    <a:rPr lang="en-US" altLang="zh-TW" i="1">
+                                      <a:latin typeface="Cambria Math" panose="02040503050406030204" pitchFamily="18" charset="0"/>
+                                    </a:rPr>
+                                    <m:t>𝑧</m:t>
+                                  </m:r>
+                                </m:sup>
+                              </m:sSubSup>
+                              <m:d>
+                                <m:dPr>
+                                  <m:ctrlPr>
+                                    <a:rPr lang="en-US" altLang="zh-TW" b="1" i="1">
+                                      <a:latin typeface="Cambria Math" panose="02040503050406030204" pitchFamily="18" charset="0"/>
+                                    </a:rPr>
+                                  </m:ctrlPr>
+                                </m:dPr>
+                                <m:e>
+                                  <m:r>
+                                    <a:rPr lang="en-US" altLang="zh-TW" i="1">
+                                      <a:latin typeface="Cambria Math" panose="02040503050406030204" pitchFamily="18" charset="0"/>
+                                    </a:rPr>
+                                    <m:t>𝑟</m:t>
+                                  </m:r>
+                                </m:e>
+                              </m:d>
+                            </m:e>
+                          </m:d>
+                        </m:oMath>
+                      </m:oMathPara>
+                    </a14:m>
+                    <a:endParaRPr lang="en-US" altLang="zh-TW" dirty="0">
+                      <a:latin typeface="Times New Roman" panose="02020603050405020304" pitchFamily="18" charset="0"/>
+                      <a:cs typeface="Times New Roman" panose="02020603050405020304" pitchFamily="18" charset="0"/>
+                    </a:endParaRPr>
+                  </a:p>
+                  <a:p>
+                    <a:pPr/>
+                    <a14:m>
+                      <m:oMathPara xmlns:m="http://schemas.openxmlformats.org/officeDocument/2006/math">
+                        <m:oMathParaPr>
+                          <m:jc m:val="left"/>
+                        </m:oMathParaPr>
+                        <m:oMath xmlns:m="http://schemas.openxmlformats.org/officeDocument/2006/math">
+                          <m:d>
+                            <m:dPr>
+                              <m:begChr m:val="|"/>
+                              <m:endChr m:val="|"/>
+                              <m:ctrlPr>
+                                <a:rPr lang="en-US" altLang="zh-TW" i="1">
+                                  <a:latin typeface="Cambria Math" panose="02040503050406030204" pitchFamily="18" charset="0"/>
+                                </a:rPr>
+                              </m:ctrlPr>
+                            </m:dPr>
+                            <m:e>
+                              <m:sSubSup>
+                                <m:sSubSupPr>
+                                  <m:ctrlPr>
+                                    <a:rPr lang="en-US" altLang="zh-TW" b="1" i="1">
+                                      <a:latin typeface="Cambria Math" panose="02040503050406030204" pitchFamily="18" charset="0"/>
+                                    </a:rPr>
+                                  </m:ctrlPr>
+                                </m:sSubSupPr>
+                                <m:e>
+                                  <m:acc>
+                                    <m:accPr>
+                                      <m:chr m:val="̃"/>
+                                      <m:ctrlPr>
+                                        <a:rPr lang="en-US" altLang="zh-TW" i="1">
+                                          <a:latin typeface="Cambria Math" panose="02040503050406030204" pitchFamily="18" charset="0"/>
+                                        </a:rPr>
+                                      </m:ctrlPr>
+                                    </m:accPr>
+                                    <m:e>
+                                      <m:r>
+                                        <a:rPr lang="en-US" altLang="zh-TW" i="1">
+                                          <a:latin typeface="Cambria Math" panose="02040503050406030204" pitchFamily="18" charset="0"/>
+                                        </a:rPr>
+                                        <m:t>𝐴</m:t>
+                                      </m:r>
+                                    </m:e>
+                                  </m:acc>
+                                </m:e>
+                                <m:sub>
+                                  <m:r>
+                                    <a:rPr lang="en-US" altLang="zh-TW" i="1">
+                                      <a:latin typeface="Cambria Math" panose="02040503050406030204" pitchFamily="18" charset="0"/>
+                                    </a:rPr>
+                                    <m:t>𝜎</m:t>
+                                  </m:r>
+                                  <m:r>
+                                    <a:rPr lang="en-US" altLang="zh-TW" i="1">
+                                      <a:latin typeface="Cambria Math" panose="02040503050406030204" pitchFamily="18" charset="0"/>
+                                    </a:rPr>
+                                    <m:t>=−1,ℓ, </m:t>
+                                  </m:r>
+                                  <m:r>
+                                    <a:rPr lang="en-US" altLang="zh-TW" i="1">
+                                      <a:latin typeface="Cambria Math" panose="02040503050406030204" pitchFamily="18" charset="0"/>
+                                    </a:rPr>
+                                    <m:t>𝑝</m:t>
+                                  </m:r>
+                                  <m:r>
+                                    <a:rPr lang="en-US" altLang="zh-TW" i="1">
+                                      <a:latin typeface="Cambria Math" panose="02040503050406030204" pitchFamily="18" charset="0"/>
+                                    </a:rPr>
+                                    <m:t>=0</m:t>
+                                  </m:r>
+                                </m:sub>
+                                <m:sup>
+                                  <m:r>
+                                    <a:rPr lang="en-US" altLang="zh-TW" i="1">
+                                      <a:latin typeface="Cambria Math" panose="02040503050406030204" pitchFamily="18" charset="0"/>
+                                    </a:rPr>
+                                    <m:t>𝑧</m:t>
+                                  </m:r>
+                                </m:sup>
+                              </m:sSubSup>
+                              <m:d>
+                                <m:dPr>
+                                  <m:ctrlPr>
+                                    <a:rPr lang="en-US" altLang="zh-TW" b="1" i="1">
+                                      <a:latin typeface="Cambria Math" panose="02040503050406030204" pitchFamily="18" charset="0"/>
+                                    </a:rPr>
+                                  </m:ctrlPr>
+                                </m:dPr>
+                                <m:e>
+                                  <m:r>
+                                    <a:rPr lang="en-US" altLang="zh-TW" i="1">
+                                      <a:latin typeface="Cambria Math" panose="02040503050406030204" pitchFamily="18" charset="0"/>
+                                    </a:rPr>
+                                    <m:t>𝑟</m:t>
+                                  </m:r>
+                                </m:e>
+                              </m:d>
+                            </m:e>
+                          </m:d>
+                        </m:oMath>
+                      </m:oMathPara>
+                    </a14:m>
+                    <a:endParaRPr lang="zh-TW" altLang="en-US" b="1" dirty="0">
+                      <a:latin typeface="Times New Roman" panose="02020603050405020304" pitchFamily="18" charset="0"/>
+                      <a:cs typeface="Times New Roman" panose="02020603050405020304" pitchFamily="18" charset="0"/>
+                    </a:endParaRPr>
+                  </a:p>
+                </p:txBody>
+              </p:sp>
+            </mc:Choice>
+            <mc:Fallback xmlns="">
+              <p:sp>
+                <p:nvSpPr>
+                  <p:cNvPr id="44" name="文字方塊 43">
+                    <a:extLst>
+                      <a:ext uri="{FF2B5EF4-FFF2-40B4-BE49-F238E27FC236}">
+                        <a16:creationId xmlns:a16="http://schemas.microsoft.com/office/drawing/2014/main" id="{0EECDBE0-B06E-400E-ACE6-C5E5DE9C003D}"/>
+                      </a:ext>
+                    </a:extLst>
+                  </p:cNvPr>
+                  <p:cNvSpPr txBox="1">
+                    <a:spLocks noRot="1" noChangeAspect="1" noMove="1" noResize="1" noEditPoints="1" noAdjustHandles="1" noChangeArrowheads="1" noChangeShapeType="1" noTextEdit="1"/>
+                  </p:cNvSpPr>
+                  <p:nvPr/>
+                </p:nvSpPr>
+                <p:spPr>
+                  <a:xfrm>
+                    <a:off x="6645248" y="-300721"/>
+                    <a:ext cx="1822660" cy="1119155"/>
+                  </a:xfrm>
+                  <a:prstGeom prst="rect">
+                    <a:avLst/>
+                  </a:prstGeom>
+                  <a:blipFill>
+                    <a:blip r:embed="rId17"/>
+                    <a:stretch>
+                      <a:fillRect b="-559"/>
+                    </a:stretch>
+                  </a:blipFill>
+                </p:spPr>
+                <p:txBody>
+                  <a:bodyPr/>
+                  <a:lstStyle/>
+                  <a:p>
+                    <a:r>
+                      <a:rPr lang="zh-TW" altLang="en-US">
+                        <a:noFill/>
+                      </a:rPr>
+                      <a:t> </a:t>
+                    </a:r>
+                  </a:p>
+                </p:txBody>
+              </p:sp>
+            </mc:Fallback>
+          </mc:AlternateContent>
+          <p:sp>
+            <p:nvSpPr>
+              <p:cNvPr id="45" name="矩形: 圓角 44">
+                <a:extLst>
+                  <a:ext uri="{FF2B5EF4-FFF2-40B4-BE49-F238E27FC236}">
+                    <a16:creationId xmlns:a16="http://schemas.microsoft.com/office/drawing/2014/main" id="{D3F319D8-58DC-40A7-AD41-E91DC1E9F8DE}"/>
+                  </a:ext>
+                </a:extLst>
+              </p:cNvPr>
+              <p:cNvSpPr/>
+              <p:nvPr/>
+            </p:nvSpPr>
+            <p:spPr>
+              <a:xfrm>
+                <a:off x="6067325" y="-268451"/>
+                <a:ext cx="2258421" cy="1121234"/>
+              </a:xfrm>
+              <a:prstGeom prst="roundRect">
+                <a:avLst/>
+              </a:prstGeom>
+              <a:noFill/>
+              <a:ln w="28575">
+                <a:solidFill>
+                  <a:schemeClr val="tx1">
+                    <a:lumMod val="50000"/>
+                    <a:lumOff val="50000"/>
+                  </a:schemeClr>
+                </a:solidFill>
+              </a:ln>
+            </p:spPr>
+            <p:style>
+              <a:lnRef idx="2">
+                <a:schemeClr val="accent1">
+                  <a:shade val="50000"/>
+                </a:schemeClr>
+              </a:lnRef>
+              <a:fillRef idx="1">
+                <a:schemeClr val="accent1"/>
+              </a:fillRef>
+              <a:effectRef idx="0">
+                <a:schemeClr val="accent1"/>
+              </a:effectRef>
+              <a:fontRef idx="minor">
+                <a:schemeClr val="lt1"/>
+              </a:fontRef>
+            </p:style>
+            <p:txBody>
+              <a:bodyPr rot="0" spcFirstLastPara="0" vertOverflow="overflow" horzOverflow="overflow" vert="horz" wrap="square" lIns="80998" tIns="40499" rIns="80998" bIns="40499" numCol="1" spcCol="0" rtlCol="0" fromWordArt="0" anchor="ctr" anchorCtr="0" forceAA="0" compatLnSpc="1">
+                <a:prstTxWarp prst="textNoShape">
+                  <a:avLst/>
+                </a:prstTxWarp>
+                <a:noAutofit/>
+              </a:bodyPr>
+              <a:lstStyle/>
+              <a:p>
+                <a:pPr algn="ctr"/>
+                <a:endParaRPr lang="zh-TW" altLang="en-US" dirty="0">
+                  <a:latin typeface="Times New Roman" panose="02020603050405020304" pitchFamily="18" charset="0"/>
+                  <a:cs typeface="Times New Roman" panose="02020603050405020304" pitchFamily="18" charset="0"/>
+                </a:endParaRPr>
+              </a:p>
+            </p:txBody>
+          </p:sp>
+        </p:grpSp>
+        <p:pic>
+          <p:nvPicPr>
+            <p:cNvPr id="10" name="圖片 9">
+              <a:extLst>
+                <a:ext uri="{FF2B5EF4-FFF2-40B4-BE49-F238E27FC236}">
+                  <a16:creationId xmlns:a16="http://schemas.microsoft.com/office/drawing/2014/main" id="{A996B56B-7116-495E-9B2D-54843A7E5EDB}"/>
+                </a:ext>
+              </a:extLst>
+            </p:cNvPr>
+            <p:cNvPicPr>
+              <a:picLocks noChangeAspect="1"/>
+            </p:cNvPicPr>
+            <p:nvPr/>
+          </p:nvPicPr>
+          <p:blipFill>
+            <a:blip r:embed="rId18">
+              <a:clrChange>
+                <a:clrFrom>
+                  <a:srgbClr val="FFFFFF"/>
+                </a:clrFrom>
+                <a:clrTo>
+                  <a:srgbClr val="FFFFFF">
+                    <a:alpha val="0"/>
+                  </a:srgbClr>
+                </a:clrTo>
+              </a:clrChange>
+            </a:blip>
+            <a:stretch>
+              <a:fillRect/>
+            </a:stretch>
+          </p:blipFill>
+          <p:spPr>
+            <a:xfrm>
+              <a:off x="6855681" y="153447"/>
+              <a:ext cx="567470" cy="787419"/>
+            </a:xfrm>
+            <a:prstGeom prst="rect">
+              <a:avLst/>
+            </a:prstGeom>
+          </p:spPr>
+        </p:pic>
+      </p:grpSp>
+    </p:spTree>
+    <p:extLst>
+      <p:ext uri="{BB962C8B-B14F-4D97-AF65-F5344CB8AC3E}">
+        <p14:creationId xmlns:p14="http://schemas.microsoft.com/office/powerpoint/2010/main" val="702813568"/>
       </p:ext>
     </p:extLst>
   </p:cSld>

--- a/Final/Figures/AinRinC.pptx
+++ b/Final/Figures/AinRinC.pptx
@@ -244,7 +244,7 @@
           <a:p>
             <a:fld id="{4CEE9FC5-A85C-4366-93B5-9F0FBACB00B5}" type="datetimeFigureOut">
               <a:rPr lang="zh-TW" altLang="en-US" smtClean="0"/>
-              <a:t>2026/6/30</a:t>
+              <a:t>2026/7/2</a:t>
             </a:fld>
             <a:endParaRPr lang="zh-TW" altLang="en-US"/>
           </a:p>
@@ -414,7 +414,7 @@
           <a:p>
             <a:fld id="{4CEE9FC5-A85C-4366-93B5-9F0FBACB00B5}" type="datetimeFigureOut">
               <a:rPr lang="zh-TW" altLang="en-US" smtClean="0"/>
-              <a:t>2026/6/30</a:t>
+              <a:t>2026/7/2</a:t>
             </a:fld>
             <a:endParaRPr lang="zh-TW" altLang="en-US"/>
           </a:p>
@@ -594,7 +594,7 @@
           <a:p>
             <a:fld id="{4CEE9FC5-A85C-4366-93B5-9F0FBACB00B5}" type="datetimeFigureOut">
               <a:rPr lang="zh-TW" altLang="en-US" smtClean="0"/>
-              <a:t>2026/6/30</a:t>
+              <a:t>2026/7/2</a:t>
             </a:fld>
             <a:endParaRPr lang="zh-TW" altLang="en-US"/>
           </a:p>
@@ -764,7 +764,7 @@
           <a:p>
             <a:fld id="{4CEE9FC5-A85C-4366-93B5-9F0FBACB00B5}" type="datetimeFigureOut">
               <a:rPr lang="zh-TW" altLang="en-US" smtClean="0"/>
-              <a:t>2026/6/30</a:t>
+              <a:t>2026/7/2</a:t>
             </a:fld>
             <a:endParaRPr lang="zh-TW" altLang="en-US"/>
           </a:p>
@@ -1010,7 +1010,7 @@
           <a:p>
             <a:fld id="{4CEE9FC5-A85C-4366-93B5-9F0FBACB00B5}" type="datetimeFigureOut">
               <a:rPr lang="zh-TW" altLang="en-US" smtClean="0"/>
-              <a:t>2026/6/30</a:t>
+              <a:t>2026/7/2</a:t>
             </a:fld>
             <a:endParaRPr lang="zh-TW" altLang="en-US"/>
           </a:p>
@@ -1242,7 +1242,7 @@
           <a:p>
             <a:fld id="{4CEE9FC5-A85C-4366-93B5-9F0FBACB00B5}" type="datetimeFigureOut">
               <a:rPr lang="zh-TW" altLang="en-US" smtClean="0"/>
-              <a:t>2026/6/30</a:t>
+              <a:t>2026/7/2</a:t>
             </a:fld>
             <a:endParaRPr lang="zh-TW" altLang="en-US"/>
           </a:p>
@@ -1609,7 +1609,7 @@
           <a:p>
             <a:fld id="{4CEE9FC5-A85C-4366-93B5-9F0FBACB00B5}" type="datetimeFigureOut">
               <a:rPr lang="zh-TW" altLang="en-US" smtClean="0"/>
-              <a:t>2026/6/30</a:t>
+              <a:t>2026/7/2</a:t>
             </a:fld>
             <a:endParaRPr lang="zh-TW" altLang="en-US"/>
           </a:p>
@@ -1727,7 +1727,7 @@
           <a:p>
             <a:fld id="{4CEE9FC5-A85C-4366-93B5-9F0FBACB00B5}" type="datetimeFigureOut">
               <a:rPr lang="zh-TW" altLang="en-US" smtClean="0"/>
-              <a:t>2026/6/30</a:t>
+              <a:t>2026/7/2</a:t>
             </a:fld>
             <a:endParaRPr lang="zh-TW" altLang="en-US"/>
           </a:p>
@@ -1822,7 +1822,7 @@
           <a:p>
             <a:fld id="{4CEE9FC5-A85C-4366-93B5-9F0FBACB00B5}" type="datetimeFigureOut">
               <a:rPr lang="zh-TW" altLang="en-US" smtClean="0"/>
-              <a:t>2026/6/30</a:t>
+              <a:t>2026/7/2</a:t>
             </a:fld>
             <a:endParaRPr lang="zh-TW" altLang="en-US"/>
           </a:p>
@@ -2099,7 +2099,7 @@
           <a:p>
             <a:fld id="{4CEE9FC5-A85C-4366-93B5-9F0FBACB00B5}" type="datetimeFigureOut">
               <a:rPr lang="zh-TW" altLang="en-US" smtClean="0"/>
-              <a:t>2026/6/30</a:t>
+              <a:t>2026/7/2</a:t>
             </a:fld>
             <a:endParaRPr lang="zh-TW" altLang="en-US"/>
           </a:p>
@@ -2356,7 +2356,7 @@
           <a:p>
             <a:fld id="{4CEE9FC5-A85C-4366-93B5-9F0FBACB00B5}" type="datetimeFigureOut">
               <a:rPr lang="zh-TW" altLang="en-US" smtClean="0"/>
-              <a:t>2026/6/30</a:t>
+              <a:t>2026/7/2</a:t>
             </a:fld>
             <a:endParaRPr lang="zh-TW" altLang="en-US"/>
           </a:p>
@@ -2569,7 +2569,7 @@
           <a:p>
             <a:fld id="{4CEE9FC5-A85C-4366-93B5-9F0FBACB00B5}" type="datetimeFigureOut">
               <a:rPr lang="zh-TW" altLang="en-US" smtClean="0"/>
-              <a:t>2026/6/30</a:t>
+              <a:t>2026/7/2</a:t>
             </a:fld>
             <a:endParaRPr lang="zh-TW" altLang="en-US"/>
           </a:p>
@@ -5255,8 +5255,8 @@
         </p:nvSpPr>
         <p:spPr>
           <a:xfrm>
-            <a:off x="2618181" y="2846973"/>
-            <a:ext cx="6995719" cy="1831707"/>
+            <a:off x="2800350" y="2846973"/>
+            <a:ext cx="6813550" cy="1831707"/>
           </a:xfrm>
           <a:prstGeom prst="roundRect">
             <a:avLst>
@@ -5310,51 +5310,6 @@
           </a:p>
         </p:txBody>
       </p:sp>
-      <p:pic>
-        <p:nvPicPr>
-          <p:cNvPr id="35" name="圖片 34">
-            <a:extLst>
-              <a:ext uri="{FF2B5EF4-FFF2-40B4-BE49-F238E27FC236}">
-                <a16:creationId xmlns:a16="http://schemas.microsoft.com/office/drawing/2014/main" id="{910F7F4D-6B3C-48B5-B766-F91B6CD0B9CF}"/>
-              </a:ext>
-            </a:extLst>
-          </p:cNvPr>
-          <p:cNvPicPr>
-            <a:picLocks noChangeAspect="1"/>
-          </p:cNvPicPr>
-          <p:nvPr/>
-        </p:nvPicPr>
-        <p:blipFill rotWithShape="1">
-          <a:blip r:embed="rId2">
-            <a:clrChange>
-              <a:clrFrom>
-                <a:srgbClr val="FFFFFF"/>
-              </a:clrFrom>
-              <a:clrTo>
-                <a:srgbClr val="FFFFFF">
-                  <a:alpha val="0"/>
-                </a:srgbClr>
-              </a:clrTo>
-            </a:clrChange>
-            <a:extLst>
-              <a:ext uri="{28A0092B-C50C-407E-A947-70E740481C1C}">
-                <a14:useLocalDpi xmlns:a14="http://schemas.microsoft.com/office/drawing/2010/main" val="0"/>
-              </a:ext>
-            </a:extLst>
-          </a:blip>
-          <a:srcRect l="80822"/>
-          <a:stretch/>
-        </p:blipFill>
-        <p:spPr>
-          <a:xfrm>
-            <a:off x="8227694" y="2731067"/>
-            <a:ext cx="1448359" cy="2000504"/>
-          </a:xfrm>
-          <a:prstGeom prst="rect">
-            <a:avLst/>
-          </a:prstGeom>
-        </p:spPr>
-      </p:pic>
       <p:sp>
         <p:nvSpPr>
           <p:cNvPr id="30" name="矩形: 圓角 29">
@@ -5369,8 +5324,8 @@
         </p:nvSpPr>
         <p:spPr>
           <a:xfrm>
-            <a:off x="2613285" y="423610"/>
-            <a:ext cx="6995719" cy="2030231"/>
+            <a:off x="2795454" y="423610"/>
+            <a:ext cx="6813550" cy="2030231"/>
           </a:xfrm>
           <a:prstGeom prst="roundRect">
             <a:avLst>
@@ -5426,96 +5381,6 @@
       </p:sp>
       <p:pic>
         <p:nvPicPr>
-          <p:cNvPr id="7" name="圖片 6">
-            <a:extLst>
-              <a:ext uri="{FF2B5EF4-FFF2-40B4-BE49-F238E27FC236}">
-                <a16:creationId xmlns:a16="http://schemas.microsoft.com/office/drawing/2014/main" id="{84826E07-676E-4A6F-8402-97871E4AD56C}"/>
-              </a:ext>
-            </a:extLst>
-          </p:cNvPr>
-          <p:cNvPicPr>
-            <a:picLocks noChangeAspect="1"/>
-          </p:cNvPicPr>
-          <p:nvPr/>
-        </p:nvPicPr>
-        <p:blipFill rotWithShape="1">
-          <a:blip r:embed="rId3">
-            <a:clrChange>
-              <a:clrFrom>
-                <a:srgbClr val="FFFFFF"/>
-              </a:clrFrom>
-              <a:clrTo>
-                <a:srgbClr val="FFFFFF">
-                  <a:alpha val="0"/>
-                </a:srgbClr>
-              </a:clrTo>
-            </a:clrChange>
-            <a:extLst>
-              <a:ext uri="{28A0092B-C50C-407E-A947-70E740481C1C}">
-                <a14:useLocalDpi xmlns:a14="http://schemas.microsoft.com/office/drawing/2010/main" val="0"/>
-              </a:ext>
-            </a:extLst>
-          </a:blip>
-          <a:srcRect r="76535"/>
-          <a:stretch/>
-        </p:blipFill>
-        <p:spPr>
-          <a:xfrm>
-            <a:off x="2559807" y="306347"/>
-            <a:ext cx="1772163" cy="2000504"/>
-          </a:xfrm>
-          <a:prstGeom prst="rect">
-            <a:avLst/>
-          </a:prstGeom>
-        </p:spPr>
-      </p:pic>
-      <p:pic>
-        <p:nvPicPr>
-          <p:cNvPr id="9" name="圖片 8">
-            <a:extLst>
-              <a:ext uri="{FF2B5EF4-FFF2-40B4-BE49-F238E27FC236}">
-                <a16:creationId xmlns:a16="http://schemas.microsoft.com/office/drawing/2014/main" id="{FDB0F021-B179-41EB-832A-F5FBB65DAECD}"/>
-              </a:ext>
-            </a:extLst>
-          </p:cNvPr>
-          <p:cNvPicPr>
-            <a:picLocks noChangeAspect="1"/>
-          </p:cNvPicPr>
-          <p:nvPr/>
-        </p:nvPicPr>
-        <p:blipFill rotWithShape="1">
-          <a:blip r:embed="rId2">
-            <a:clrChange>
-              <a:clrFrom>
-                <a:srgbClr val="FFFFFF"/>
-              </a:clrFrom>
-              <a:clrTo>
-                <a:srgbClr val="FFFFFF">
-                  <a:alpha val="0"/>
-                </a:srgbClr>
-              </a:clrTo>
-            </a:clrChange>
-            <a:extLst>
-              <a:ext uri="{28A0092B-C50C-407E-A947-70E740481C1C}">
-                <a14:useLocalDpi xmlns:a14="http://schemas.microsoft.com/office/drawing/2010/main" val="0"/>
-              </a:ext>
-            </a:extLst>
-          </a:blip>
-          <a:srcRect r="76688"/>
-          <a:stretch/>
-        </p:blipFill>
-        <p:spPr>
-          <a:xfrm>
-            <a:off x="2548561" y="2731067"/>
-            <a:ext cx="1760549" cy="2000504"/>
-          </a:xfrm>
-          <a:prstGeom prst="rect">
-            <a:avLst/>
-          </a:prstGeom>
-        </p:spPr>
-      </p:pic>
-      <p:pic>
-        <p:nvPicPr>
           <p:cNvPr id="26" name="圖片 25">
             <a:extLst>
               <a:ext uri="{FF2B5EF4-FFF2-40B4-BE49-F238E27FC236}">
@@ -5529,7 +5394,7 @@
           <p:nvPr/>
         </p:nvPicPr>
         <p:blipFill rotWithShape="1">
-          <a:blip r:embed="rId3">
+          <a:blip r:embed="rId2">
             <a:clrChange>
               <a:clrFrom>
                 <a:srgbClr val="FFFFFF"/>
@@ -5574,7 +5439,7 @@
           <p:nvPr/>
         </p:nvPicPr>
         <p:blipFill rotWithShape="1">
-          <a:blip r:embed="rId2">
+          <a:blip r:embed="rId3">
             <a:clrChange>
               <a:clrFrom>
                 <a:srgbClr val="FFFFFF"/>
@@ -5606,6 +5471,141 @@
       </p:pic>
       <p:pic>
         <p:nvPicPr>
+          <p:cNvPr id="35" name="圖片 34">
+            <a:extLst>
+              <a:ext uri="{FF2B5EF4-FFF2-40B4-BE49-F238E27FC236}">
+                <a16:creationId xmlns:a16="http://schemas.microsoft.com/office/drawing/2014/main" id="{910F7F4D-6B3C-48B5-B766-F91B6CD0B9CF}"/>
+              </a:ext>
+            </a:extLst>
+          </p:cNvPr>
+          <p:cNvPicPr>
+            <a:picLocks noChangeAspect="1"/>
+          </p:cNvPicPr>
+          <p:nvPr/>
+        </p:nvPicPr>
+        <p:blipFill rotWithShape="1">
+          <a:blip r:embed="rId3">
+            <a:clrChange>
+              <a:clrFrom>
+                <a:srgbClr val="FFFFFF"/>
+              </a:clrFrom>
+              <a:clrTo>
+                <a:srgbClr val="FFFFFF">
+                  <a:alpha val="0"/>
+                </a:srgbClr>
+              </a:clrTo>
+            </a:clrChange>
+            <a:extLst>
+              <a:ext uri="{28A0092B-C50C-407E-A947-70E740481C1C}">
+                <a14:useLocalDpi xmlns:a14="http://schemas.microsoft.com/office/drawing/2010/main" val="0"/>
+              </a:ext>
+            </a:extLst>
+          </a:blip>
+          <a:srcRect l="80822"/>
+          <a:stretch/>
+        </p:blipFill>
+        <p:spPr>
+          <a:xfrm>
+            <a:off x="8227694" y="2731067"/>
+            <a:ext cx="1448359" cy="2000504"/>
+          </a:xfrm>
+          <a:prstGeom prst="rect">
+            <a:avLst/>
+          </a:prstGeom>
+        </p:spPr>
+      </p:pic>
+      <p:pic>
+        <p:nvPicPr>
+          <p:cNvPr id="7" name="圖片 6">
+            <a:extLst>
+              <a:ext uri="{FF2B5EF4-FFF2-40B4-BE49-F238E27FC236}">
+                <a16:creationId xmlns:a16="http://schemas.microsoft.com/office/drawing/2014/main" id="{84826E07-676E-4A6F-8402-97871E4AD56C}"/>
+              </a:ext>
+            </a:extLst>
+          </p:cNvPr>
+          <p:cNvPicPr>
+            <a:picLocks noChangeAspect="1"/>
+          </p:cNvPicPr>
+          <p:nvPr/>
+        </p:nvPicPr>
+        <p:blipFill rotWithShape="1">
+          <a:blip r:embed="rId2">
+            <a:clrChange>
+              <a:clrFrom>
+                <a:srgbClr val="FFFFFF"/>
+              </a:clrFrom>
+              <a:clrTo>
+                <a:srgbClr val="FFFFFF">
+                  <a:alpha val="0"/>
+                </a:srgbClr>
+              </a:clrTo>
+            </a:clrChange>
+            <a:extLst>
+              <a:ext uri="{28A0092B-C50C-407E-A947-70E740481C1C}">
+                <a14:useLocalDpi xmlns:a14="http://schemas.microsoft.com/office/drawing/2010/main" val="0"/>
+              </a:ext>
+            </a:extLst>
+          </a:blip>
+          <a:srcRect l="3406" r="76535"/>
+          <a:stretch/>
+        </p:blipFill>
+        <p:spPr>
+          <a:xfrm>
+            <a:off x="2817018" y="306347"/>
+            <a:ext cx="1514951" cy="2000504"/>
+          </a:xfrm>
+          <a:prstGeom prst="rect">
+            <a:avLst/>
+          </a:prstGeom>
+        </p:spPr>
+      </p:pic>
+      <p:pic>
+        <p:nvPicPr>
+          <p:cNvPr id="9" name="圖片 8">
+            <a:extLst>
+              <a:ext uri="{FF2B5EF4-FFF2-40B4-BE49-F238E27FC236}">
+                <a16:creationId xmlns:a16="http://schemas.microsoft.com/office/drawing/2014/main" id="{FDB0F021-B179-41EB-832A-F5FBB65DAECD}"/>
+              </a:ext>
+            </a:extLst>
+          </p:cNvPr>
+          <p:cNvPicPr>
+            <a:picLocks noChangeAspect="1"/>
+          </p:cNvPicPr>
+          <p:nvPr/>
+        </p:nvPicPr>
+        <p:blipFill rotWithShape="1">
+          <a:blip r:embed="rId3">
+            <a:clrChange>
+              <a:clrFrom>
+                <a:srgbClr val="FFFFFF"/>
+              </a:clrFrom>
+              <a:clrTo>
+                <a:srgbClr val="FFFFFF">
+                  <a:alpha val="0"/>
+                </a:srgbClr>
+              </a:clrTo>
+            </a:clrChange>
+            <a:extLst>
+              <a:ext uri="{28A0092B-C50C-407E-A947-70E740481C1C}">
+                <a14:useLocalDpi xmlns:a14="http://schemas.microsoft.com/office/drawing/2010/main" val="0"/>
+              </a:ext>
+            </a:extLst>
+          </a:blip>
+          <a:srcRect l="3398" r="76688"/>
+          <a:stretch/>
+        </p:blipFill>
+        <p:spPr>
+          <a:xfrm>
+            <a:off x="2805113" y="2731067"/>
+            <a:ext cx="1503997" cy="2000504"/>
+          </a:xfrm>
+          <a:prstGeom prst="rect">
+            <a:avLst/>
+          </a:prstGeom>
+        </p:spPr>
+      </p:pic>
+      <p:pic>
+        <p:nvPicPr>
           <p:cNvPr id="28" name="圖片 27">
             <a:extLst>
               <a:ext uri="{FF2B5EF4-FFF2-40B4-BE49-F238E27FC236}">
@@ -5619,7 +5619,7 @@
           <p:nvPr/>
         </p:nvPicPr>
         <p:blipFill rotWithShape="1">
-          <a:blip r:embed="rId3">
+          <a:blip r:embed="rId2">
             <a:clrChange>
               <a:clrFrom>
                 <a:srgbClr val="FFFFFF"/>
@@ -5664,7 +5664,7 @@
           <p:nvPr/>
         </p:nvPicPr>
         <p:blipFill rotWithShape="1">
-          <a:blip r:embed="rId2">
+          <a:blip r:embed="rId3">
             <a:clrChange>
               <a:clrFrom>
                 <a:srgbClr val="FFFFFF"/>
@@ -5709,7 +5709,7 @@
           <p:nvPr/>
         </p:nvPicPr>
         <p:blipFill rotWithShape="1">
-          <a:blip r:embed="rId3">
+          <a:blip r:embed="rId2">
             <a:clrChange>
               <a:clrFrom>
                 <a:srgbClr val="FFFFFF"/>
@@ -5754,7 +5754,7 @@
           <p:nvPr/>
         </p:nvPicPr>
         <p:blipFill rotWithShape="1">
-          <a:blip r:embed="rId2">
+          <a:blip r:embed="rId3">
             <a:clrChange>
               <a:clrFrom>
                 <a:srgbClr val="FFFFFF"/>
@@ -5799,7 +5799,7 @@
           <p:nvPr/>
         </p:nvPicPr>
         <p:blipFill rotWithShape="1">
-          <a:blip r:embed="rId3">
+          <a:blip r:embed="rId2">
             <a:clrChange>
               <a:clrFrom>
                 <a:srgbClr val="FFFFFF"/>
@@ -5829,8 +5829,8 @@
           </a:prstGeom>
         </p:spPr>
       </p:pic>
-      <mc:AlternateContent xmlns:mc="http://schemas.openxmlformats.org/markup-compatibility/2006">
-        <mc:Choice xmlns:a14="http://schemas.microsoft.com/office/drawing/2010/main" Requires="a14">
+      <mc:AlternateContent xmlns:mc="http://schemas.openxmlformats.org/markup-compatibility/2006" xmlns:a14="http://schemas.microsoft.com/office/drawing/2010/main">
+        <mc:Choice Requires="a14">
           <p:sp>
             <p:nvSpPr>
               <p:cNvPr id="46" name="文字方塊 45">
@@ -5883,7 +5883,7 @@
             </p:txBody>
           </p:sp>
         </mc:Choice>
-        <mc:Fallback>
+        <mc:Fallback xmlns="">
           <p:sp>
             <p:nvSpPr>
               <p:cNvPr id="46" name="文字方塊 45">
@@ -5928,8 +5928,8 @@
           </p:sp>
         </mc:Fallback>
       </mc:AlternateContent>
-      <mc:AlternateContent xmlns:mc="http://schemas.openxmlformats.org/markup-compatibility/2006">
-        <mc:Choice xmlns:a14="http://schemas.microsoft.com/office/drawing/2010/main" Requires="a14">
+      <mc:AlternateContent xmlns:mc="http://schemas.openxmlformats.org/markup-compatibility/2006" xmlns:a14="http://schemas.microsoft.com/office/drawing/2010/main">
+        <mc:Choice Requires="a14">
           <p:sp>
             <p:nvSpPr>
               <p:cNvPr id="47" name="文字方塊 46">
@@ -5982,7 +5982,7 @@
             </p:txBody>
           </p:sp>
         </mc:Choice>
-        <mc:Fallback>
+        <mc:Fallback xmlns="">
           <p:sp>
             <p:nvSpPr>
               <p:cNvPr id="47" name="文字方塊 46">
@@ -6027,8 +6027,8 @@
           </p:sp>
         </mc:Fallback>
       </mc:AlternateContent>
-      <mc:AlternateContent xmlns:mc="http://schemas.openxmlformats.org/markup-compatibility/2006">
-        <mc:Choice xmlns:a14="http://schemas.microsoft.com/office/drawing/2010/main" Requires="a14">
+      <mc:AlternateContent xmlns:mc="http://schemas.openxmlformats.org/markup-compatibility/2006" xmlns:a14="http://schemas.microsoft.com/office/drawing/2010/main">
+        <mc:Choice Requires="a14">
           <p:sp>
             <p:nvSpPr>
               <p:cNvPr id="48" name="文字方塊 47">
@@ -6081,7 +6081,7 @@
             </p:txBody>
           </p:sp>
         </mc:Choice>
-        <mc:Fallback>
+        <mc:Fallback xmlns="">
           <p:sp>
             <p:nvSpPr>
               <p:cNvPr id="48" name="文字方塊 47">
@@ -6126,8 +6126,8 @@
           </p:sp>
         </mc:Fallback>
       </mc:AlternateContent>
-      <mc:AlternateContent xmlns:mc="http://schemas.openxmlformats.org/markup-compatibility/2006">
-        <mc:Choice xmlns:a14="http://schemas.microsoft.com/office/drawing/2010/main" Requires="a14">
+      <mc:AlternateContent xmlns:mc="http://schemas.openxmlformats.org/markup-compatibility/2006" xmlns:a14="http://schemas.microsoft.com/office/drawing/2010/main">
+        <mc:Choice Requires="a14">
           <p:sp>
             <p:nvSpPr>
               <p:cNvPr id="50" name="文字方塊 49">
@@ -6180,7 +6180,7 @@
             </p:txBody>
           </p:sp>
         </mc:Choice>
-        <mc:Fallback>
+        <mc:Fallback xmlns="">
           <p:sp>
             <p:nvSpPr>
               <p:cNvPr id="50" name="文字方塊 49">
@@ -6225,8 +6225,8 @@
           </p:sp>
         </mc:Fallback>
       </mc:AlternateContent>
-      <mc:AlternateContent xmlns:mc="http://schemas.openxmlformats.org/markup-compatibility/2006">
-        <mc:Choice xmlns:a14="http://schemas.microsoft.com/office/drawing/2010/main" Requires="a14">
+      <mc:AlternateContent xmlns:mc="http://schemas.openxmlformats.org/markup-compatibility/2006" xmlns:a14="http://schemas.microsoft.com/office/drawing/2010/main">
+        <mc:Choice Requires="a14">
           <p:sp>
             <p:nvSpPr>
               <p:cNvPr id="52" name="文字方塊 51">
@@ -6279,7 +6279,7 @@
             </p:txBody>
           </p:sp>
         </mc:Choice>
-        <mc:Fallback>
+        <mc:Fallback xmlns="">
           <p:sp>
             <p:nvSpPr>
               <p:cNvPr id="52" name="文字方塊 51">
@@ -6324,8 +6324,8 @@
           </p:sp>
         </mc:Fallback>
       </mc:AlternateContent>
-      <mc:AlternateContent xmlns:mc="http://schemas.openxmlformats.org/markup-compatibility/2006">
-        <mc:Choice xmlns:a14="http://schemas.microsoft.com/office/drawing/2010/main" Requires="a14">
+      <mc:AlternateContent xmlns:mc="http://schemas.openxmlformats.org/markup-compatibility/2006" xmlns:a14="http://schemas.microsoft.com/office/drawing/2010/main">
+        <mc:Choice Requires="a14">
           <p:sp>
             <p:nvSpPr>
               <p:cNvPr id="59" name="文字方塊 58">
@@ -6378,7 +6378,7 @@
             </p:txBody>
           </p:sp>
         </mc:Choice>
-        <mc:Fallback>
+        <mc:Fallback xmlns="">
           <p:sp>
             <p:nvSpPr>
               <p:cNvPr id="59" name="文字方塊 58">
@@ -6423,8 +6423,8 @@
           </p:sp>
         </mc:Fallback>
       </mc:AlternateContent>
-      <mc:AlternateContent xmlns:mc="http://schemas.openxmlformats.org/markup-compatibility/2006">
-        <mc:Choice xmlns:a14="http://schemas.microsoft.com/office/drawing/2010/main" Requires="a14">
+      <mc:AlternateContent xmlns:mc="http://schemas.openxmlformats.org/markup-compatibility/2006" xmlns:a14="http://schemas.microsoft.com/office/drawing/2010/main">
+        <mc:Choice Requires="a14">
           <p:sp>
             <p:nvSpPr>
               <p:cNvPr id="60" name="文字方塊 59">
@@ -6477,7 +6477,7 @@
             </p:txBody>
           </p:sp>
         </mc:Choice>
-        <mc:Fallback>
+        <mc:Fallback xmlns="">
           <p:sp>
             <p:nvSpPr>
               <p:cNvPr id="60" name="文字方塊 59">
@@ -6522,8 +6522,8 @@
           </p:sp>
         </mc:Fallback>
       </mc:AlternateContent>
-      <mc:AlternateContent xmlns:mc="http://schemas.openxmlformats.org/markup-compatibility/2006">
-        <mc:Choice xmlns:a14="http://schemas.microsoft.com/office/drawing/2010/main" Requires="a14">
+      <mc:AlternateContent xmlns:mc="http://schemas.openxmlformats.org/markup-compatibility/2006" xmlns:a14="http://schemas.microsoft.com/office/drawing/2010/main">
+        <mc:Choice Requires="a14">
           <p:sp>
             <p:nvSpPr>
               <p:cNvPr id="61" name="文字方塊 60">
@@ -6576,7 +6576,7 @@
             </p:txBody>
           </p:sp>
         </mc:Choice>
-        <mc:Fallback>
+        <mc:Fallback xmlns="">
           <p:sp>
             <p:nvSpPr>
               <p:cNvPr id="61" name="文字方塊 60">
@@ -6621,8 +6621,8 @@
           </p:sp>
         </mc:Fallback>
       </mc:AlternateContent>
-      <mc:AlternateContent xmlns:mc="http://schemas.openxmlformats.org/markup-compatibility/2006">
-        <mc:Choice xmlns:a14="http://schemas.microsoft.com/office/drawing/2010/main" Requires="a14">
+      <mc:AlternateContent xmlns:mc="http://schemas.openxmlformats.org/markup-compatibility/2006" xmlns:a14="http://schemas.microsoft.com/office/drawing/2010/main">
+        <mc:Choice Requires="a14">
           <p:sp>
             <p:nvSpPr>
               <p:cNvPr id="62" name="文字方塊 61">
@@ -6675,7 +6675,7 @@
             </p:txBody>
           </p:sp>
         </mc:Choice>
-        <mc:Fallback>
+        <mc:Fallback xmlns="">
           <p:sp>
             <p:nvSpPr>
               <p:cNvPr id="62" name="文字方塊 61">
@@ -6720,8 +6720,8 @@
           </p:sp>
         </mc:Fallback>
       </mc:AlternateContent>
-      <mc:AlternateContent xmlns:mc="http://schemas.openxmlformats.org/markup-compatibility/2006">
-        <mc:Choice xmlns:a14="http://schemas.microsoft.com/office/drawing/2010/main" Requires="a14">
+      <mc:AlternateContent xmlns:mc="http://schemas.openxmlformats.org/markup-compatibility/2006" xmlns:a14="http://schemas.microsoft.com/office/drawing/2010/main">
+        <mc:Choice Requires="a14">
           <p:sp>
             <p:nvSpPr>
               <p:cNvPr id="63" name="文字方塊 62">
@@ -6774,7 +6774,7 @@
             </p:txBody>
           </p:sp>
         </mc:Choice>
-        <mc:Fallback>
+        <mc:Fallback xmlns="">
           <p:sp>
             <p:nvSpPr>
               <p:cNvPr id="63" name="文字方塊 62">
@@ -6819,8 +6819,8 @@
           </p:sp>
         </mc:Fallback>
       </mc:AlternateContent>
-      <mc:AlternateContent xmlns:mc="http://schemas.openxmlformats.org/markup-compatibility/2006">
-        <mc:Choice xmlns:a14="http://schemas.microsoft.com/office/drawing/2010/main" Requires="a14">
+      <mc:AlternateContent xmlns:mc="http://schemas.openxmlformats.org/markup-compatibility/2006" xmlns:a14="http://schemas.microsoft.com/office/drawing/2010/main">
+        <mc:Choice Requires="a14">
           <p:sp>
             <p:nvSpPr>
               <p:cNvPr id="53" name="文字方塊 52">
@@ -6899,7 +6899,7 @@
             </p:txBody>
           </p:sp>
         </mc:Choice>
-        <mc:Fallback>
+        <mc:Fallback xmlns="">
           <p:sp>
             <p:nvSpPr>
               <p:cNvPr id="53" name="文字方塊 52">
@@ -7003,7 +7003,7 @@
             </p:nvSpPr>
             <p:spPr>
               <a:xfrm>
-                <a:off x="2625510" y="86347"/>
+                <a:off x="2743698" y="86347"/>
                 <a:ext cx="3721573" cy="369332"/>
               </a:xfrm>
               <a:prstGeom prst="rect">
@@ -7095,7 +7095,7 @@
             </p:nvSpPr>
             <p:spPr>
               <a:xfrm>
-                <a:off x="2625510" y="86347"/>
+                <a:off x="2743698" y="86347"/>
                 <a:ext cx="3721573" cy="369332"/>
               </a:xfrm>
               <a:prstGeom prst="rect">
@@ -7104,7 +7104,7 @@
               <a:blipFill>
                 <a:blip r:embed="rId15"/>
                 <a:stretch>
-                  <a:fillRect l="-1475" t="-8197" b="-24590"/>
+                  <a:fillRect l="-1309" t="-8197" b="-24590"/>
                 </a:stretch>
               </a:blipFill>
             </p:spPr>
@@ -7139,7 +7139,7 @@
             </p:nvSpPr>
             <p:spPr>
               <a:xfrm>
-                <a:off x="2617972" y="2510980"/>
+                <a:off x="2736160" y="2510980"/>
                 <a:ext cx="3475113" cy="369332"/>
               </a:xfrm>
               <a:prstGeom prst="rect">
@@ -7243,7 +7243,7 @@
             </p:nvSpPr>
             <p:spPr>
               <a:xfrm>
-                <a:off x="2617972" y="2510980"/>
+                <a:off x="2736160" y="2510980"/>
                 <a:ext cx="3475113" cy="369332"/>
               </a:xfrm>
               <a:prstGeom prst="rect">
@@ -7252,7 +7252,7 @@
               <a:blipFill>
                 <a:blip r:embed="rId16"/>
                 <a:stretch>
-                  <a:fillRect l="-1401" t="-10000" b="-26667"/>
+                  <a:fillRect l="-1579" t="-10000" b="-26667"/>
                 </a:stretch>
               </a:blipFill>
             </p:spPr>
@@ -7815,6 +7815,110 @@
           </p:spPr>
         </p:pic>
       </p:grpSp>
+      <p:sp>
+        <p:nvSpPr>
+          <p:cNvPr id="3" name="矩形 2">
+            <a:extLst>
+              <a:ext uri="{FF2B5EF4-FFF2-40B4-BE49-F238E27FC236}">
+                <a16:creationId xmlns:a16="http://schemas.microsoft.com/office/drawing/2014/main" id="{4AE27B5E-5E7A-4A0B-A83A-DA088219F9D0}"/>
+              </a:ext>
+            </a:extLst>
+          </p:cNvPr>
+          <p:cNvSpPr/>
+          <p:nvPr/>
+        </p:nvSpPr>
+        <p:spPr>
+          <a:xfrm>
+            <a:off x="2809875" y="1133061"/>
+            <a:ext cx="125792" cy="288235"/>
+          </a:xfrm>
+          <a:prstGeom prst="rect">
+            <a:avLst/>
+          </a:prstGeom>
+          <a:solidFill>
+            <a:srgbClr val="F2F2F2"/>
+          </a:solidFill>
+          <a:ln>
+            <a:noFill/>
+          </a:ln>
+        </p:spPr>
+        <p:style>
+          <a:lnRef idx="2">
+            <a:schemeClr val="accent1">
+              <a:shade val="50000"/>
+            </a:schemeClr>
+          </a:lnRef>
+          <a:fillRef idx="1">
+            <a:schemeClr val="accent1"/>
+          </a:fillRef>
+          <a:effectRef idx="0">
+            <a:schemeClr val="accent1"/>
+          </a:effectRef>
+          <a:fontRef idx="minor">
+            <a:schemeClr val="lt1"/>
+          </a:fontRef>
+        </p:style>
+        <p:txBody>
+          <a:bodyPr rtlCol="0" anchor="ctr"/>
+          <a:lstStyle/>
+          <a:p>
+            <a:pPr algn="ctr"/>
+            <a:endParaRPr lang="zh-TW" altLang="en-US"/>
+          </a:p>
+        </p:txBody>
+      </p:sp>
+      <p:sp>
+        <p:nvSpPr>
+          <p:cNvPr id="36" name="矩形 35">
+            <a:extLst>
+              <a:ext uri="{FF2B5EF4-FFF2-40B4-BE49-F238E27FC236}">
+                <a16:creationId xmlns:a16="http://schemas.microsoft.com/office/drawing/2014/main" id="{40DC376B-6DEA-4898-9501-50C4B11303EF}"/>
+              </a:ext>
+            </a:extLst>
+          </p:cNvPr>
+          <p:cNvSpPr/>
+          <p:nvPr/>
+        </p:nvSpPr>
+        <p:spPr>
+          <a:xfrm>
+            <a:off x="2817019" y="3571461"/>
+            <a:ext cx="78167" cy="288235"/>
+          </a:xfrm>
+          <a:prstGeom prst="rect">
+            <a:avLst/>
+          </a:prstGeom>
+          <a:solidFill>
+            <a:srgbClr val="F2F2F2"/>
+          </a:solidFill>
+          <a:ln>
+            <a:noFill/>
+          </a:ln>
+        </p:spPr>
+        <p:style>
+          <a:lnRef idx="2">
+            <a:schemeClr val="accent1">
+              <a:shade val="50000"/>
+            </a:schemeClr>
+          </a:lnRef>
+          <a:fillRef idx="1">
+            <a:schemeClr val="accent1"/>
+          </a:fillRef>
+          <a:effectRef idx="0">
+            <a:schemeClr val="accent1"/>
+          </a:effectRef>
+          <a:fontRef idx="minor">
+            <a:schemeClr val="lt1"/>
+          </a:fontRef>
+        </p:style>
+        <p:txBody>
+          <a:bodyPr rtlCol="0" anchor="ctr"/>
+          <a:lstStyle/>
+          <a:p>
+            <a:pPr algn="ctr"/>
+            <a:endParaRPr lang="zh-TW" altLang="en-US"/>
+          </a:p>
+        </p:txBody>
+      </p:sp>
     </p:spTree>
     <p:extLst>
       <p:ext uri="{BB962C8B-B14F-4D97-AF65-F5344CB8AC3E}">
